--- a/Docs/Final_Project_Presentation_Draft.pptx
+++ b/Docs/Final_Project_Presentation_Draft.pptx
@@ -13,7 +13,7 @@
     <p:sldId id="258" r:id="rId4"/>
     <p:sldId id="259" r:id="rId5"/>
     <p:sldId id="260" r:id="rId6"/>
-    <p:sldId id="269" r:id="rId7"/>
+    <p:sldId id="271" r:id="rId7"/>
     <p:sldId id="261" r:id="rId8"/>
     <p:sldId id="270" r:id="rId9"/>
     <p:sldId id="262" r:id="rId10"/>
@@ -296,9 +296,56 @@
           <a:lstStyle/>
           <a:p>
             <a:r>
-              <a:rPr lang="en-US" dirty="0"/>
-              <a:t>Open by baselining the audience: this is not only an audio project. It is a controlled way to make the evolution of neural-network capability visible.</a:t>
-            </a:r>
+              <a:rPr lang="en-US" b="0" i="0" dirty="0">
+                <a:solidFill>
+                  <a:srgbClr val="FFFFFF"/>
+                </a:solidFill>
+                <a:effectLst/>
+                <a:latin typeface="-apple-system"/>
+              </a:rPr>
+              <a:t>we wanted to search out a means of showing how the evolution of neural network models would result in measurable accuracy increases over time. We then searched for a clean data set of a manageable size and good quality that could serve as that vehicle. </a:t>
+            </a:r>
+            <a:r>
+              <a:rPr lang="en-US" b="0" i="0" dirty="0" err="1">
+                <a:solidFill>
+                  <a:srgbClr val="FFFFFF"/>
+                </a:solidFill>
+                <a:effectLst/>
+                <a:latin typeface="-apple-system"/>
+              </a:rPr>
+              <a:t>Piczak's</a:t>
+            </a:r>
+            <a:r>
+              <a:rPr lang="en-US" b="0" i="0" dirty="0">
+                <a:solidFill>
+                  <a:srgbClr val="FFFFFF"/>
+                </a:solidFill>
+                <a:effectLst/>
+                <a:latin typeface="-apple-system"/>
+              </a:rPr>
+              <a:t> work gave us that, and with it we were able use his same data set to </a:t>
+            </a:r>
+            <a:r>
+              <a:rPr lang="en-US" b="0" i="0" dirty="0" err="1">
+                <a:solidFill>
+                  <a:srgbClr val="FFFFFF"/>
+                </a:solidFill>
+                <a:effectLst/>
+                <a:latin typeface="-apple-system"/>
+              </a:rPr>
+              <a:t>perfrom</a:t>
+            </a:r>
+            <a:r>
+              <a:rPr lang="en-US" b="0" i="0" dirty="0">
+                <a:solidFill>
+                  <a:srgbClr val="FFFFFF"/>
+                </a:solidFill>
+                <a:effectLst/>
+                <a:latin typeface="-apple-system"/>
+              </a:rPr>
+              <a:t> the same task and, walking them forward through the model eras - CNNs trained from scratch to transfer learning with pretrained CNN and finally to transfer learning with pretrained audio transformers. At each step we were able to compare against a known baseline.</a:t>
+            </a:r>
+            <a:endParaRPr lang="en-US" dirty="0"/>
           </a:p>
         </p:txBody>
       </p:sp>
@@ -382,10 +429,7 @@
           <a:bodyPr/>
           <a:lstStyle/>
           <a:p>
-            <a:r>
-              <a:rPr lang="en-US" dirty="0"/>
-              <a:t>Do not pick a frozen/fine-tuned narrative until the teammate confirms. Present both as the current result candidates.</a:t>
-            </a:r>
+            <a:endParaRPr lang="en-US" dirty="0"/>
           </a:p>
         </p:txBody>
       </p:sp>
@@ -469,10 +513,7 @@
           <a:bodyPr/>
           <a:lstStyle/>
           <a:p>
-            <a:r>
-              <a:rPr lang="en-US" dirty="0"/>
-              <a:t>YAMNet is where the transfer-learning story becomes visible in the results. Tie it back to representation quality rather than simply saying this model is newer.</a:t>
-            </a:r>
+            <a:endParaRPr lang="en-US" dirty="0"/>
           </a:p>
         </p:txBody>
       </p:sp>
@@ -556,10 +597,7 @@
           <a:bodyPr/>
           <a:lstStyle/>
           <a:p>
-            <a:r>
-              <a:rPr lang="en-US" dirty="0"/>
-              <a:t>Be precise: do not say transformers are a separate top-level learning regime. They are a later period inside transfer learning.</a:t>
-            </a:r>
+            <a:endParaRPr lang="en-US" dirty="0"/>
           </a:p>
         </p:txBody>
       </p:sp>
@@ -643,10 +681,7 @@
           <a:bodyPr/>
           <a:lstStyle/>
           <a:p>
-            <a:r>
-              <a:rPr lang="en-US" dirty="0"/>
-              <a:t>AST is the spectrogram-transformer path: familiar audio representation, much more powerful pretrained backbone.</a:t>
-            </a:r>
+            <a:endParaRPr lang="en-US" dirty="0"/>
           </a:p>
         </p:txBody>
       </p:sp>
@@ -730,10 +765,7 @@
           <a:bodyPr/>
           <a:lstStyle/>
           <a:p>
-            <a:r>
-              <a:rPr lang="en-US" dirty="0"/>
-              <a:t>BEATs gives the second modern endpoint. Use it to reinforce the central story: where the model learned audio knowledge mattered most.</a:t>
-            </a:r>
+            <a:endParaRPr lang="en-US" dirty="0"/>
           </a:p>
         </p:txBody>
       </p:sp>
@@ -819,7 +851,37 @@
           <a:p>
             <a:r>
               <a:rPr lang="en-US" dirty="0"/>
-              <a:t>Close by returning to the hypothesis. The results support the idea that modern techniques improve performance, but the strongest explanation is pretrained audio representation learning.</a:t>
+              <a:t> Our results did not follow the smooth chronological improvements that we’d initially expected.  What we found that was model fit mattered much more than model age.  Hyperparameter tuning and architectural complexity only produced minor improvements when the model was still only learning from the ESC-50 dataset.  Instead, the larger gains were seen when the model was able to use prior knowledge from audio pre-training. </a:t>
+            </a:r>
+            <a:br>
+              <a:rPr lang="en-US" dirty="0"/>
+            </a:br>
+            <a:br>
+              <a:rPr lang="en-US" dirty="0"/>
+            </a:br>
+            <a:r>
+              <a:rPr lang="en-US" dirty="0"/>
+              <a:t>As for our lessons learned, we found that our original assumption regarding the data set was accurate – it provided a great benchmark and was able to efficiently be used by various models to help test our hypothesis.  </a:t>
+            </a:r>
+            <a:br>
+              <a:rPr lang="en-US" dirty="0"/>
+            </a:br>
+            <a:br>
+              <a:rPr lang="en-US" dirty="0"/>
+            </a:br>
+            <a:r>
+              <a:rPr lang="en-US" dirty="0"/>
+              <a:t>What we found didn’t go as well is that recreation of the baseline was somewhat of a challenge due to the age of the original test and technological progressions since then.  Additionally, as is often the case with group work, communication and documentation is crucial.  It took a few last second code updates and model re-runs to make sure we had consistent results to compare.  </a:t>
+            </a:r>
+            <a:br>
+              <a:rPr lang="en-US" dirty="0"/>
+            </a:br>
+            <a:br>
+              <a:rPr lang="en-US" dirty="0"/>
+            </a:br>
+            <a:r>
+              <a:rPr lang="en-US" dirty="0"/>
+              <a:t>And lastly, a few things that could be changed to improve the results – it might have helped to use less variants but dive deeper into the results of them, giving us more time to explore the nuances of the models themselves.  Locking in the evaluation protocols would save time going forward.  Introducing a random forest analysis could have provided a more classical baseline to compare to in addition to the neural networks.  And one we had hoped to include but considered a bit too late was the introduction of a runtime metric as measure of improvement rather than just relying on model accuracy.  </a:t>
             </a:r>
           </a:p>
         </p:txBody>
@@ -905,9 +967,83 @@
           <a:lstStyle/>
           <a:p>
             <a:r>
-              <a:rPr lang="en-US" dirty="0"/>
-              <a:t>State the hypothesis early, then give the map. Era 1 learns from ESC-50 only. Eras 2 and 3 start with knowledge learned from much larger audio datasets, then adapt that knowledge to ESC-50.</a:t>
-            </a:r>
+              <a:rPr lang="en-US" b="0" i="0" dirty="0">
+                <a:solidFill>
+                  <a:srgbClr val="FFFFFF"/>
+                </a:solidFill>
+                <a:effectLst/>
+                <a:latin typeface="-apple-system"/>
+              </a:rPr>
+              <a:t>Main job: tell the audience exactly what we tested and how to judge success.</a:t>
+            </a:r>
+            <a:br>
+              <a:rPr lang="en-US" b="0" i="0" dirty="0">
+                <a:solidFill>
+                  <a:srgbClr val="FFFFFF"/>
+                </a:solidFill>
+                <a:effectLst/>
+                <a:latin typeface="-apple-system"/>
+              </a:rPr>
+            </a:br>
+            <a:br>
+              <a:rPr lang="en-US" b="0" i="0" dirty="0">
+                <a:solidFill>
+                  <a:srgbClr val="FFFFFF"/>
+                </a:solidFill>
+                <a:effectLst/>
+                <a:latin typeface="-apple-system"/>
+              </a:rPr>
+            </a:br>
+            <a:r>
+              <a:rPr lang="en-US" b="0" i="0" dirty="0">
+                <a:solidFill>
+                  <a:srgbClr val="FFFFFF"/>
+                </a:solidFill>
+                <a:effectLst/>
+                <a:latin typeface="-apple-system"/>
+              </a:rPr>
+              <a:t>Narrative:</a:t>
+            </a:r>
+            <a:br>
+              <a:rPr lang="en-US" b="0" i="0" dirty="0">
+                <a:solidFill>
+                  <a:srgbClr val="FFFFFF"/>
+                </a:solidFill>
+                <a:effectLst/>
+                <a:latin typeface="-apple-system"/>
+              </a:rPr>
+            </a:br>
+            <a:r>
+              <a:rPr lang="en-US" b="0" i="0" dirty="0">
+                <a:solidFill>
+                  <a:srgbClr val="FFFFFF"/>
+                </a:solidFill>
+                <a:effectLst/>
+                <a:latin typeface="-apple-system"/>
+              </a:rPr>
+              <a:t>Our hypothesis was that the modern neural-network techniques would out-perform the original model.  To test it, we re-created </a:t>
+            </a:r>
+            <a:r>
+              <a:rPr lang="en-US" b="0" i="0" dirty="0" err="1">
+                <a:solidFill>
+                  <a:srgbClr val="FFFFFF"/>
+                </a:solidFill>
+                <a:effectLst/>
+                <a:latin typeface="-apple-system"/>
+              </a:rPr>
+              <a:t>Piczak’s</a:t>
+            </a:r>
+            <a:r>
+              <a:rPr lang="en-US" b="0" i="0" dirty="0">
+                <a:solidFill>
+                  <a:srgbClr val="FFFFFF"/>
+                </a:solidFill>
+                <a:effectLst/>
+                <a:latin typeface="-apple-system"/>
+              </a:rPr>
+              <a:t> model to set a baseline.  We then left the problem set the same and evolved the analysis model using the final five-fold test accuracy with clip-level voting where required.  Ultimately, we used the results from the long segments with probability voting as the comparator to ensure an apples-to-apples comparison.  This was done across three different eras of neural network design – from a training-from-scratch approach, to utilizing transfer learning with a pre-trained CNN and final to transfer learning models with pre-trained transformers.</a:t>
+            </a:r>
+            <a:endParaRPr lang="en-US" dirty="0"/>
           </a:p>
         </p:txBody>
       </p:sp>
@@ -993,7 +1129,51 @@
           <a:p>
             <a:r>
               <a:rPr lang="en-US" dirty="0"/>
-              <a:t>Keep this slide focused on the dataset and the historical anchor. Do not explain voting yet.</a:t>
+              <a:t>Describe the baseline:</a:t>
+            </a:r>
+            <a:br>
+              <a:rPr lang="en-US" dirty="0"/>
+            </a:br>
+            <a:br>
+              <a:rPr lang="en-US" dirty="0"/>
+            </a:br>
+            <a:r>
+              <a:rPr lang="en-US" dirty="0"/>
+              <a:t>Here we’ve got details about the baseline and the dataset.  We chose </a:t>
+            </a:r>
+            <a:r>
+              <a:rPr lang="en-US" dirty="0" err="1"/>
+              <a:t>Piczak’s</a:t>
+            </a:r>
+            <a:r>
+              <a:rPr lang="en-US" dirty="0"/>
+              <a:t> ESC-50 because we felt his work took a relatively unstudied segment, which was audio sound training, and that would do well to represent the growth in neural network capabilities from that point.  He also had a robust yet compact data set that was well organized – 2000 audio samples, 50 classes, 5 folds – and they were of a manageable size at 5 seconds. Per clip.</a:t>
+            </a:r>
+            <a:br>
+              <a:rPr lang="en-US" dirty="0"/>
+            </a:br>
+            <a:br>
+              <a:rPr lang="en-US" dirty="0"/>
+            </a:br>
+            <a:r>
+              <a:rPr lang="en-US" dirty="0"/>
+              <a:t>Looking specifically at what he did with it, </a:t>
+            </a:r>
+            <a:r>
+              <a:rPr lang="en-US" dirty="0" err="1"/>
+              <a:t>Piczak</a:t>
+            </a:r>
+            <a:r>
+              <a:rPr lang="en-US" dirty="0"/>
+              <a:t> converted audio clips into log-</a:t>
+            </a:r>
+            <a:r>
+              <a:rPr lang="en-US" dirty="0" err="1"/>
+              <a:t>mel</a:t>
+            </a:r>
+            <a:r>
+              <a:rPr lang="en-US" dirty="0"/>
+              <a:t> spectrogram segments, classified each segment, and then used clip-level voting to produce one prediction per audio clip. That gave us the fixed baseline we needed</a:t>
             </a:r>
           </a:p>
         </p:txBody>
@@ -1078,10 +1258,7 @@
           <a:bodyPr/>
           <a:lstStyle/>
           <a:p>
-            <a:r>
-              <a:rPr lang="en-US" dirty="0"/>
-              <a:t>Use this as the conceptual break: the first era is not CNN-specific. It is the era where the model learns from the benchmark itself.</a:t>
-            </a:r>
+            <a:endParaRPr lang="en-US" dirty="0"/>
           </a:p>
         </p:txBody>
       </p:sp>
@@ -1166,9 +1343,56 @@
           <a:lstStyle/>
           <a:p>
             <a:r>
-              <a:rPr lang="en-US" dirty="0"/>
-              <a:t>Treat voting as part of the official baseline, not as a mistake to discuss. The prior no-voting result is intentionally omitted.</a:t>
-            </a:r>
+              <a:rPr lang="en-US" b="0" i="0" dirty="0">
+                <a:solidFill>
+                  <a:srgbClr val="FFFFFF"/>
+                </a:solidFill>
+                <a:effectLst/>
+                <a:latin typeface="-apple-system"/>
+              </a:rPr>
+              <a:t>Here is where we established the baseline from which subsequent models would be evaluated. We needed to re-create it to ensure we had a solid understanding of how it was created as well as to use that as the springboard for other models. What you'll see in the baseline model accuracy curves is the various runs that were performed, again, recreating the original model. However, it was ultimately the Long-Segment, clip level run that was highlighted by </a:t>
+            </a:r>
+            <a:r>
+              <a:rPr lang="en-US" b="0" i="0" dirty="0" err="1">
+                <a:solidFill>
+                  <a:srgbClr val="FFFFFF"/>
+                </a:solidFill>
+                <a:effectLst/>
+                <a:latin typeface="-apple-system"/>
+              </a:rPr>
+              <a:t>Piczak</a:t>
+            </a:r>
+            <a:r>
+              <a:rPr lang="en-US" b="0" i="0" dirty="0">
+                <a:solidFill>
+                  <a:srgbClr val="FFFFFF"/>
+                </a:solidFill>
+                <a:effectLst/>
+                <a:latin typeface="-apple-system"/>
+              </a:rPr>
+              <a:t> and will serve as the basis of comparison </a:t>
+            </a:r>
+            <a:r>
+              <a:rPr lang="en-US" b="0" i="0" dirty="0" err="1">
+                <a:solidFill>
+                  <a:srgbClr val="FFFFFF"/>
+                </a:solidFill>
+                <a:effectLst/>
+                <a:latin typeface="-apple-system"/>
+              </a:rPr>
+              <a:t>goign</a:t>
+            </a:r>
+            <a:r>
+              <a:rPr lang="en-US" b="0" i="0" dirty="0">
+                <a:solidFill>
+                  <a:srgbClr val="FFFFFF"/>
+                </a:solidFill>
+                <a:effectLst/>
+                <a:latin typeface="-apple-system"/>
+              </a:rPr>
+              <a:t> forward. We underran slightly at 63.5%, but felt that was close enough to treat as a credible baseline and accurate enough replication of his work.</a:t>
+            </a:r>
+            <a:endParaRPr lang="en-US" dirty="0"/>
           </a:p>
         </p:txBody>
       </p:sp>
@@ -1213,13 +1437,7 @@
   <p:cSld>
     <p:spTree>
       <p:nvGrpSpPr>
-        <p:cNvPr id="1" name="">
-          <a:extLst>
-            <a:ext uri="{FF2B5EF4-FFF2-40B4-BE49-F238E27FC236}">
-              <a16:creationId xmlns:a16="http://schemas.microsoft.com/office/drawing/2014/main" id="{8B4D0D6F-FF64-0FE2-53C6-D6C5817A89CD}"/>
-            </a:ext>
-          </a:extLst>
-        </p:cNvPr>
+        <p:cNvPr id="1" name=""/>
         <p:cNvGrpSpPr/>
         <p:nvPr/>
       </p:nvGrpSpPr>
@@ -1233,13 +1451,7 @@
       </p:grpSpPr>
       <p:sp>
         <p:nvSpPr>
-          <p:cNvPr id="2" name="Slide Image Placeholder 1">
-            <a:extLst>
-              <a:ext uri="{FF2B5EF4-FFF2-40B4-BE49-F238E27FC236}">
-                <a16:creationId xmlns:a16="http://schemas.microsoft.com/office/drawing/2014/main" id="{7E8F081A-F82D-65F5-1F82-D7D1CD956A7F}"/>
-              </a:ext>
-            </a:extLst>
-          </p:cNvPr>
+          <p:cNvPr id="2" name="Slide Image Placeholder 1"/>
           <p:cNvSpPr>
             <a:spLocks noGrp="1" noRot="1" noChangeAspect="1"/>
           </p:cNvSpPr>
@@ -1251,13 +1463,7 @@
       </p:sp>
       <p:sp>
         <p:nvSpPr>
-          <p:cNvPr id="3" name="Notes Placeholder 2">
-            <a:extLst>
-              <a:ext uri="{FF2B5EF4-FFF2-40B4-BE49-F238E27FC236}">
-                <a16:creationId xmlns:a16="http://schemas.microsoft.com/office/drawing/2014/main" id="{1549CDCF-0CF2-B0A4-CB78-5F3C7AFD3153}"/>
-              </a:ext>
-            </a:extLst>
-          </p:cNvPr>
+          <p:cNvPr id="3" name="Notes Placeholder 2"/>
           <p:cNvSpPr>
             <a:spLocks noGrp="1"/>
           </p:cNvSpPr>
@@ -1270,22 +1476,13 @@
           <a:bodyPr/>
           <a:lstStyle/>
           <a:p>
-            <a:r>
-              <a:rPr lang="en-US" dirty="0"/>
-              <a:t>Treat voting as part of the official baseline, not as a mistake to discuss. The prior no-voting result is intentionally omitted.</a:t>
-            </a:r>
-          </a:p>
-        </p:txBody>
-      </p:sp>
-      <p:sp>
-        <p:nvSpPr>
-          <p:cNvPr id="4" name="Slide Number Placeholder 3">
-            <a:extLst>
-              <a:ext uri="{FF2B5EF4-FFF2-40B4-BE49-F238E27FC236}">
-                <a16:creationId xmlns:a16="http://schemas.microsoft.com/office/drawing/2014/main" id="{D896CAE2-969B-E03C-743B-0D13AC3E7D1E}"/>
-              </a:ext>
-            </a:extLst>
-          </p:cNvPr>
+            <a:endParaRPr lang="en-US" dirty="0"/>
+          </a:p>
+        </p:txBody>
+      </p:sp>
+      <p:sp>
+        <p:nvSpPr>
+          <p:cNvPr id="4" name="Slide Number Placeholder 3"/>
           <p:cNvSpPr>
             <a:spLocks noGrp="1"/>
           </p:cNvSpPr>
@@ -1309,7 +1506,7 @@
     </p:spTree>
     <p:extLst>
       <p:ext uri="{BB962C8B-B14F-4D97-AF65-F5344CB8AC3E}">
-        <p14:creationId xmlns:p14="http://schemas.microsoft.com/office/powerpoint/2010/main" val="1738885055"/>
+        <p14:creationId xmlns:p14="http://schemas.microsoft.com/office/powerpoint/2010/main" val="1024086991"/>
       </p:ext>
     </p:extLst>
   </p:cSld>
@@ -1363,10 +1560,7 @@
           <a:bodyPr/>
           <a:lstStyle/>
           <a:p>
-            <a:r>
-              <a:rPr lang="en-US" dirty="0"/>
-              <a:t>Do not overclaim the LSTM interpretation until the teammate confirms it. The safe framing is that it is a from-scratch architecture extension.</a:t>
-            </a:r>
+            <a:endParaRPr lang="en-US" dirty="0"/>
           </a:p>
         </p:txBody>
       </p:sp>
@@ -1468,10 +1662,7 @@
           <a:bodyPr/>
           <a:lstStyle/>
           <a:p>
-            <a:r>
-              <a:rPr lang="en-US" dirty="0"/>
-              <a:t>Do not overclaim the LSTM interpretation until the teammate confirms it. The safe framing is that it is a from-scratch architecture extension.</a:t>
-            </a:r>
+            <a:endParaRPr lang="en-US" dirty="0"/>
           </a:p>
         </p:txBody>
       </p:sp>
@@ -1561,10 +1752,7 @@
           <a:bodyPr/>
           <a:lstStyle/>
           <a:p>
-            <a:r>
-              <a:rPr lang="en-US" dirty="0"/>
-              <a:t>This is the first major era break. Make it clear that transfer learning is the big shift; VGGish and YAMNet are the first period inside it.</a:t>
-            </a:r>
+            <a:endParaRPr lang="en-US" dirty="0"/>
           </a:p>
         </p:txBody>
       </p:sp>
@@ -3073,6 +3261,46 @@
       </p:grpSpPr>
       <p:sp>
         <p:nvSpPr>
+          <p:cNvPr id="7" name="Shape 22">
+            <a:extLst>
+              <a:ext uri="{FF2B5EF4-FFF2-40B4-BE49-F238E27FC236}">
+                <a16:creationId xmlns:a16="http://schemas.microsoft.com/office/drawing/2014/main" id="{4E8E16E2-37B9-346D-B13E-9C3F8B2A7500}"/>
+              </a:ext>
+            </a:extLst>
+          </p:cNvPr>
+          <p:cNvSpPr/>
+          <p:nvPr/>
+        </p:nvSpPr>
+        <p:spPr>
+          <a:xfrm>
+            <a:off x="7904546" y="750102"/>
+            <a:ext cx="1809206" cy="295381"/>
+          </a:xfrm>
+          <a:prstGeom prst="chevron">
+            <a:avLst/>
+          </a:prstGeom>
+          <a:solidFill>
+            <a:srgbClr val="17677D"/>
+          </a:solidFill>
+          <a:ln w="12700">
+            <a:solidFill>
+              <a:srgbClr val="17677D">
+                <a:alpha val="0"/>
+              </a:srgbClr>
+            </a:solidFill>
+            <a:prstDash val="solid"/>
+          </a:ln>
+        </p:spPr>
+        <p:txBody>
+          <a:bodyPr/>
+          <a:lstStyle/>
+          <a:p>
+            <a:endParaRPr lang="en-US"/>
+          </a:p>
+        </p:txBody>
+      </p:sp>
+      <p:sp>
+        <p:nvSpPr>
           <p:cNvPr id="5" name="Shape 25">
             <a:extLst>
               <a:ext uri="{FF2B5EF4-FFF2-40B4-BE49-F238E27FC236}">
@@ -3634,46 +3862,6 @@
               </a:rPr>
               <a:t> CNN | Variations | LSTM</a:t>
             </a:r>
-          </a:p>
-        </p:txBody>
-      </p:sp>
-      <p:sp>
-        <p:nvSpPr>
-          <p:cNvPr id="52" name="Shape 22">
-            <a:extLst>
-              <a:ext uri="{FF2B5EF4-FFF2-40B4-BE49-F238E27FC236}">
-                <a16:creationId xmlns:a16="http://schemas.microsoft.com/office/drawing/2014/main" id="{E25D3238-A5D6-1BEE-AC6D-187287686F9C}"/>
-              </a:ext>
-            </a:extLst>
-          </p:cNvPr>
-          <p:cNvSpPr/>
-          <p:nvPr/>
-        </p:nvSpPr>
-        <p:spPr>
-          <a:xfrm>
-            <a:off x="7904546" y="750102"/>
-            <a:ext cx="1809206" cy="295381"/>
-          </a:xfrm>
-          <a:prstGeom prst="chevron">
-            <a:avLst/>
-          </a:prstGeom>
-          <a:solidFill>
-            <a:srgbClr val="17677D"/>
-          </a:solidFill>
-          <a:ln w="12700">
-            <a:solidFill>
-              <a:srgbClr val="17677D">
-                <a:alpha val="0"/>
-              </a:srgbClr>
-            </a:solidFill>
-            <a:prstDash val="solid"/>
-          </a:ln>
-        </p:spPr>
-        <p:txBody>
-          <a:bodyPr/>
-          <a:lstStyle/>
-          <a:p>
-            <a:endParaRPr lang="en-US"/>
           </a:p>
         </p:txBody>
       </p:sp>
@@ -5646,6 +5834,46 @@
       </p:grpSpPr>
       <p:sp>
         <p:nvSpPr>
+          <p:cNvPr id="6" name="Shape 22">
+            <a:extLst>
+              <a:ext uri="{FF2B5EF4-FFF2-40B4-BE49-F238E27FC236}">
+                <a16:creationId xmlns:a16="http://schemas.microsoft.com/office/drawing/2014/main" id="{F684BC13-2D06-23C5-F25B-E9DF4481EC1A}"/>
+              </a:ext>
+            </a:extLst>
+          </p:cNvPr>
+          <p:cNvSpPr/>
+          <p:nvPr/>
+        </p:nvSpPr>
+        <p:spPr>
+          <a:xfrm>
+            <a:off x="7904546" y="750102"/>
+            <a:ext cx="1809206" cy="295381"/>
+          </a:xfrm>
+          <a:prstGeom prst="chevron">
+            <a:avLst/>
+          </a:prstGeom>
+          <a:solidFill>
+            <a:srgbClr val="17677D"/>
+          </a:solidFill>
+          <a:ln w="12700">
+            <a:solidFill>
+              <a:srgbClr val="17677D">
+                <a:alpha val="0"/>
+              </a:srgbClr>
+            </a:solidFill>
+            <a:prstDash val="solid"/>
+          </a:ln>
+        </p:spPr>
+        <p:txBody>
+          <a:bodyPr/>
+          <a:lstStyle/>
+          <a:p>
+            <a:endParaRPr lang="en-US"/>
+          </a:p>
+        </p:txBody>
+      </p:sp>
+      <p:sp>
+        <p:nvSpPr>
           <p:cNvPr id="5" name="Shape 25">
             <a:extLst>
               <a:ext uri="{FF2B5EF4-FFF2-40B4-BE49-F238E27FC236}">
@@ -6351,46 +6579,6 @@
               </a:rPr>
               <a:t> CNN | Variations | LSTM</a:t>
             </a:r>
-          </a:p>
-        </p:txBody>
-      </p:sp>
-      <p:sp>
-        <p:nvSpPr>
-          <p:cNvPr id="58" name="Shape 22">
-            <a:extLst>
-              <a:ext uri="{FF2B5EF4-FFF2-40B4-BE49-F238E27FC236}">
-                <a16:creationId xmlns:a16="http://schemas.microsoft.com/office/drawing/2014/main" id="{C64B0169-1E3C-B2D1-805B-689FC3168121}"/>
-              </a:ext>
-            </a:extLst>
-          </p:cNvPr>
-          <p:cNvSpPr/>
-          <p:nvPr/>
-        </p:nvSpPr>
-        <p:spPr>
-          <a:xfrm>
-            <a:off x="7904546" y="750102"/>
-            <a:ext cx="1809206" cy="295381"/>
-          </a:xfrm>
-          <a:prstGeom prst="chevron">
-            <a:avLst/>
-          </a:prstGeom>
-          <a:solidFill>
-            <a:srgbClr val="17677D"/>
-          </a:solidFill>
-          <a:ln w="12700">
-            <a:solidFill>
-              <a:srgbClr val="17677D">
-                <a:alpha val="0"/>
-              </a:srgbClr>
-            </a:solidFill>
-            <a:prstDash val="solid"/>
-          </a:ln>
-        </p:spPr>
-        <p:txBody>
-          <a:bodyPr/>
-          <a:lstStyle/>
-          <a:p>
-            <a:endParaRPr lang="en-US"/>
           </a:p>
         </p:txBody>
       </p:sp>
@@ -7944,47 +8132,13 @@
       </p:sp>
       <p:sp>
         <p:nvSpPr>
-          <p:cNvPr id="481" name="Shape 479"/>
-          <p:cNvSpPr/>
-          <p:nvPr/>
-        </p:nvSpPr>
-        <p:spPr>
-          <a:xfrm>
-            <a:off x="960120" y="2889504"/>
-            <a:ext cx="2743200" cy="1280160"/>
-          </a:xfrm>
-          <a:prstGeom prst="rect">
-            <a:avLst/>
-          </a:prstGeom>
-          <a:solidFill>
-            <a:srgbClr val="FFFFFF">
-              <a:alpha val="0"/>
-            </a:srgbClr>
-          </a:solidFill>
-          <a:ln w="5715">
-            <a:solidFill>
-              <a:srgbClr val="30383D"/>
-            </a:solidFill>
-            <a:prstDash val="solid"/>
-          </a:ln>
-        </p:spPr>
-        <p:txBody>
-          <a:bodyPr/>
-          <a:lstStyle/>
-          <a:p>
-            <a:endParaRPr lang="en-US"/>
-          </a:p>
-        </p:txBody>
-      </p:sp>
-      <p:sp>
-        <p:nvSpPr>
           <p:cNvPr id="482" name="Shape 480"/>
           <p:cNvSpPr/>
           <p:nvPr/>
         </p:nvSpPr>
         <p:spPr>
           <a:xfrm>
-            <a:off x="4251960" y="2926080"/>
+            <a:off x="4251960" y="3018542"/>
             <a:ext cx="1554480" cy="731520"/>
           </a:xfrm>
           <a:prstGeom prst="rect">
@@ -8016,7 +8170,7 @@
         </p:nvSpPr>
         <p:spPr>
           <a:xfrm>
-            <a:off x="4325112" y="3218688"/>
+            <a:off x="4325112" y="3302006"/>
             <a:ext cx="1408176" cy="164592"/>
           </a:xfrm>
           <a:prstGeom prst="rect">
@@ -8060,7 +8214,7 @@
         </p:nvSpPr>
         <p:spPr>
           <a:xfrm>
-            <a:off x="3703320" y="3429000"/>
+            <a:off x="3685032" y="3384302"/>
             <a:ext cx="457200" cy="0"/>
           </a:xfrm>
           <a:prstGeom prst="line">
@@ -8091,7 +8245,7 @@
         </p:nvSpPr>
         <p:spPr>
           <a:xfrm>
-            <a:off x="5916168" y="3429000"/>
+            <a:off x="5916168" y="3384302"/>
             <a:ext cx="713232" cy="0"/>
           </a:xfrm>
           <a:prstGeom prst="line">
@@ -8122,7 +8276,7 @@
         </p:nvSpPr>
         <p:spPr>
           <a:xfrm>
-            <a:off x="6812280" y="2926080"/>
+            <a:off x="6812280" y="2835662"/>
             <a:ext cx="2057400" cy="1097280"/>
           </a:xfrm>
           <a:prstGeom prst="rect">
@@ -8154,7 +8308,7 @@
         </p:nvSpPr>
         <p:spPr>
           <a:xfrm>
-            <a:off x="6885432" y="3401568"/>
+            <a:off x="6885432" y="3302006"/>
             <a:ext cx="1911096" cy="164592"/>
           </a:xfrm>
           <a:prstGeom prst="rect">
@@ -8218,7 +8372,7 @@
         </p:nvSpPr>
         <p:spPr>
           <a:xfrm>
-            <a:off x="9034272" y="3429000"/>
+            <a:off x="9034272" y="3384302"/>
             <a:ext cx="612648" cy="0"/>
           </a:xfrm>
           <a:prstGeom prst="line">
@@ -8249,7 +8403,7 @@
         </p:nvSpPr>
         <p:spPr>
           <a:xfrm>
-            <a:off x="9829800" y="2889504"/>
+            <a:off x="9829800" y="2981966"/>
             <a:ext cx="1600200" cy="804672"/>
           </a:xfrm>
           <a:prstGeom prst="rect">
@@ -8281,7 +8435,7 @@
         </p:nvSpPr>
         <p:spPr>
           <a:xfrm>
-            <a:off x="9902952" y="3218688"/>
+            <a:off x="9902952" y="3302006"/>
             <a:ext cx="1453896" cy="164592"/>
           </a:xfrm>
           <a:prstGeom prst="rect">
@@ -8901,6 +9055,155 @@
               </a:rPr>
               <a:t>AST | BEATs</a:t>
             </a:r>
+          </a:p>
+        </p:txBody>
+      </p:sp>
+      <p:sp>
+        <p:nvSpPr>
+          <p:cNvPr id="7" name="Rectangle 6">
+            <a:extLst>
+              <a:ext uri="{FF2B5EF4-FFF2-40B4-BE49-F238E27FC236}">
+                <a16:creationId xmlns:a16="http://schemas.microsoft.com/office/drawing/2014/main" id="{1836B0A0-C07F-7982-2BDA-65B9FEACE5F2}"/>
+              </a:ext>
+            </a:extLst>
+          </p:cNvPr>
+          <p:cNvSpPr/>
+          <p:nvPr/>
+        </p:nvSpPr>
+        <p:spPr>
+          <a:xfrm>
+            <a:off x="762000" y="2835662"/>
+            <a:ext cx="2780400" cy="1097280"/>
+          </a:xfrm>
+          <a:prstGeom prst="rect">
+            <a:avLst/>
+          </a:prstGeom>
+          <a:noFill/>
+          <a:ln>
+            <a:solidFill>
+              <a:schemeClr val="tx1"/>
+            </a:solidFill>
+          </a:ln>
+        </p:spPr>
+        <p:style>
+          <a:lnRef idx="2">
+            <a:schemeClr val="accent1">
+              <a:shade val="15000"/>
+            </a:schemeClr>
+          </a:lnRef>
+          <a:fillRef idx="1">
+            <a:schemeClr val="accent1"/>
+          </a:fillRef>
+          <a:effectRef idx="0">
+            <a:schemeClr val="accent1"/>
+          </a:effectRef>
+          <a:fontRef idx="minor">
+            <a:schemeClr val="lt1"/>
+          </a:fontRef>
+        </p:style>
+        <p:txBody>
+          <a:bodyPr rtlCol="0" anchor="ctr"/>
+          <a:lstStyle/>
+          <a:p>
+            <a:pPr algn="ctr"/>
+            <a:endParaRPr lang="en-US"/>
+          </a:p>
+        </p:txBody>
+      </p:sp>
+      <p:pic>
+        <p:nvPicPr>
+          <p:cNvPr id="1038" name="Picture 14" descr="Sound Wave Icon Vector rectangular sound wave curve PNG picture png">
+            <a:extLst>
+              <a:ext uri="{FF2B5EF4-FFF2-40B4-BE49-F238E27FC236}">
+                <a16:creationId xmlns:a16="http://schemas.microsoft.com/office/drawing/2014/main" id="{9AE78517-7D6D-1B85-CD27-9C5AB7996135}"/>
+              </a:ext>
+            </a:extLst>
+          </p:cNvPr>
+          <p:cNvPicPr>
+            <a:picLocks noChangeAspect="1" noChangeArrowheads="1"/>
+          </p:cNvPicPr>
+          <p:nvPr/>
+        </p:nvPicPr>
+        <p:blipFill>
+          <a:blip r:embed="rId4">
+            <a:extLst>
+              <a:ext uri="{28A0092B-C50C-407E-A947-70E740481C1C}">
+                <a14:useLocalDpi xmlns:a14="http://schemas.microsoft.com/office/drawing/2010/main" val="0"/>
+              </a:ext>
+            </a:extLst>
+          </a:blip>
+          <a:srcRect/>
+          <a:stretch>
+            <a:fillRect/>
+          </a:stretch>
+        </p:blipFill>
+        <p:spPr bwMode="auto">
+          <a:xfrm>
+            <a:off x="2154120" y="3066602"/>
+            <a:ext cx="1308800" cy="736200"/>
+          </a:xfrm>
+          <a:prstGeom prst="rect">
+            <a:avLst/>
+          </a:prstGeom>
+          <a:noFill/>
+          <a:extLst>
+            <a:ext uri="{909E8E84-426E-40DD-AFC4-6F175D3DCCD1}">
+              <a14:hiddenFill xmlns:a14="http://schemas.microsoft.com/office/drawing/2010/main">
+                <a:solidFill>
+                  <a:srgbClr val="FFFFFF"/>
+                </a:solidFill>
+              </a14:hiddenFill>
+            </a:ext>
+          </a:extLst>
+        </p:spPr>
+      </p:pic>
+      <p:sp>
+        <p:nvSpPr>
+          <p:cNvPr id="13" name="Text 481">
+            <a:extLst>
+              <a:ext uri="{FF2B5EF4-FFF2-40B4-BE49-F238E27FC236}">
+                <a16:creationId xmlns:a16="http://schemas.microsoft.com/office/drawing/2014/main" id="{1A7D5425-434B-1AC9-C716-9CCE330842B4}"/>
+              </a:ext>
+            </a:extLst>
+          </p:cNvPr>
+          <p:cNvSpPr/>
+          <p:nvPr/>
+        </p:nvSpPr>
+        <p:spPr>
+          <a:xfrm>
+            <a:off x="837600" y="3302006"/>
+            <a:ext cx="1408176" cy="164592"/>
+          </a:xfrm>
+          <a:prstGeom prst="rect">
+            <a:avLst/>
+          </a:prstGeom>
+          <a:noFill/>
+          <a:ln/>
+        </p:spPr>
+        <p:txBody>
+          <a:bodyPr wrap="square" lIns="0" tIns="0" rIns="0" bIns="0" rtlCol="0" anchor="ctr">
+            <a:normAutofit/>
+          </a:bodyPr>
+          <a:lstStyle/>
+          <a:p>
+            <a:pPr marL="0" indent="0" algn="ctr">
+              <a:lnSpc>
+                <a:spcPct val="90000"/>
+              </a:lnSpc>
+              <a:buNone/>
+            </a:pPr>
+            <a:r>
+              <a:rPr lang="en-US" sz="1100" dirty="0">
+                <a:solidFill>
+                  <a:srgbClr val="1F2528"/>
+                </a:solidFill>
+                <a:latin typeface="Aptos" pitchFamily="34" charset="0"/>
+                <a:ea typeface="Aptos" pitchFamily="34" charset="-122"/>
+                <a:cs typeface="Aptos" pitchFamily="34" charset="-120"/>
+              </a:rPr>
+              <a:t>Audio Waveform</a:t>
+            </a:r>
+            <a:endParaRPr lang="en-US" sz="1100" dirty="0"/>
           </a:p>
         </p:txBody>
       </p:sp>
@@ -13834,13 +14137,13 @@
       </p:sp>
       <p:sp>
         <p:nvSpPr>
-          <p:cNvPr id="6" name="Text 4"/>
-          <p:cNvSpPr/>
-          <p:nvPr/>
-        </p:nvSpPr>
-        <p:spPr>
-          <a:xfrm>
-            <a:off x="749808" y="1920240"/>
+          <p:cNvPr id="10" name="Text 8"/>
+          <p:cNvSpPr/>
+          <p:nvPr/>
+        </p:nvSpPr>
+        <p:spPr>
+          <a:xfrm>
+            <a:off x="731520" y="2110784"/>
             <a:ext cx="2468880" cy="164592"/>
           </a:xfrm>
           <a:prstGeom prst="rect">
@@ -13866,13 +14169,13 @@
             <a:r>
               <a:rPr lang="en-US" sz="840" dirty="0">
                 <a:solidFill>
-                  <a:srgbClr val="6B7176"/>
+                  <a:srgbClr val="1F2528"/>
                 </a:solidFill>
                 <a:latin typeface="Aptos" pitchFamily="34" charset="0"/>
                 <a:ea typeface="Aptos" pitchFamily="34" charset="-122"/>
                 <a:cs typeface="Aptos" pitchFamily="34" charset="-120"/>
               </a:rPr>
-              <a:t>Random forest reference</a:t>
+              <a:t>Piczak CNN published LP</a:t>
             </a:r>
             <a:endParaRPr lang="en-US" sz="840" dirty="0"/>
           </a:p>
@@ -13880,13 +14183,13 @@
       </p:sp>
       <p:sp>
         <p:nvSpPr>
-          <p:cNvPr id="7" name="Shape 5"/>
-          <p:cNvSpPr/>
-          <p:nvPr/>
-        </p:nvSpPr>
-        <p:spPr>
-          <a:xfrm>
-            <a:off x="3355848" y="2020824"/>
+          <p:cNvPr id="11" name="Shape 9"/>
+          <p:cNvSpPr/>
+          <p:nvPr/>
+        </p:nvSpPr>
+        <p:spPr>
+          <a:xfrm>
+            <a:off x="3337560" y="2211368"/>
             <a:ext cx="2148840" cy="0"/>
           </a:xfrm>
           <a:prstGeom prst="line">
@@ -13910,167 +14213,13 @@
       </p:sp>
       <p:sp>
         <p:nvSpPr>
-          <p:cNvPr id="8" name="Shape 6"/>
-          <p:cNvSpPr/>
-          <p:nvPr/>
-        </p:nvSpPr>
-        <p:spPr>
-          <a:xfrm>
-            <a:off x="3355848" y="1938528"/>
-            <a:ext cx="945490" cy="155448"/>
-          </a:xfrm>
-          <a:prstGeom prst="rect">
-            <a:avLst/>
-          </a:prstGeom>
-          <a:solidFill>
-            <a:srgbClr val="BFC6C8"/>
-          </a:solidFill>
-          <a:ln w="12700">
-            <a:solidFill>
-              <a:srgbClr val="BFC6C8">
-                <a:alpha val="0"/>
-              </a:srgbClr>
-            </a:solidFill>
-            <a:prstDash val="solid"/>
-          </a:ln>
-        </p:spPr>
-        <p:txBody>
-          <a:bodyPr/>
-          <a:lstStyle/>
-          <a:p>
-            <a:endParaRPr lang="en-US"/>
-          </a:p>
-        </p:txBody>
-      </p:sp>
-      <p:sp>
-        <p:nvSpPr>
-          <p:cNvPr id="9" name="Text 7"/>
-          <p:cNvSpPr/>
-          <p:nvPr/>
-        </p:nvSpPr>
-        <p:spPr>
-          <a:xfrm>
-            <a:off x="4392778" y="1920240"/>
-            <a:ext cx="658368" cy="146304"/>
-          </a:xfrm>
-          <a:prstGeom prst="rect">
-            <a:avLst/>
-          </a:prstGeom>
-          <a:noFill/>
-          <a:ln/>
-        </p:spPr>
-        <p:txBody>
-          <a:bodyPr wrap="square" lIns="0" tIns="0" rIns="0" bIns="0" rtlCol="0" anchor="t">
-            <a:normAutofit/>
-          </a:bodyPr>
-          <a:lstStyle/>
-          <a:p>
-            <a:pPr marL="0" indent="0" algn="l">
-              <a:lnSpc>
-                <a:spcPct val="90000"/>
-              </a:lnSpc>
-              <a:buNone/>
-            </a:pPr>
-            <a:r>
-              <a:rPr lang="en-US" sz="760" dirty="0">
-                <a:solidFill>
-                  <a:srgbClr val="1F2528"/>
-                </a:solidFill>
-                <a:latin typeface="Aptos" pitchFamily="34" charset="0"/>
-                <a:ea typeface="Aptos" pitchFamily="34" charset="-122"/>
-                <a:cs typeface="Aptos" pitchFamily="34" charset="-120"/>
-              </a:rPr>
-              <a:t>44.0%</a:t>
-            </a:r>
-            <a:endParaRPr lang="en-US" sz="760" dirty="0"/>
-          </a:p>
-        </p:txBody>
-      </p:sp>
-      <p:sp>
-        <p:nvSpPr>
-          <p:cNvPr id="10" name="Text 8"/>
-          <p:cNvSpPr/>
-          <p:nvPr/>
-        </p:nvSpPr>
-        <p:spPr>
-          <a:xfrm>
-            <a:off x="749808" y="2240280"/>
-            <a:ext cx="2468880" cy="164592"/>
-          </a:xfrm>
-          <a:prstGeom prst="rect">
-            <a:avLst/>
-          </a:prstGeom>
-          <a:noFill/>
-          <a:ln>
-            <a:noFill/>
-          </a:ln>
-        </p:spPr>
-        <p:txBody>
-          <a:bodyPr wrap="square" lIns="0" tIns="0" rIns="0" bIns="0" rtlCol="0" anchor="t">
-            <a:normAutofit/>
-          </a:bodyPr>
-          <a:lstStyle/>
-          <a:p>
-            <a:pPr marL="0" indent="0" algn="l">
-              <a:lnSpc>
-                <a:spcPct val="90000"/>
-              </a:lnSpc>
-              <a:buNone/>
-            </a:pPr>
-            <a:r>
-              <a:rPr lang="en-US" sz="840" dirty="0">
-                <a:solidFill>
-                  <a:srgbClr val="1F2528"/>
-                </a:solidFill>
-                <a:latin typeface="Aptos" pitchFamily="34" charset="0"/>
-                <a:ea typeface="Aptos" pitchFamily="34" charset="-122"/>
-                <a:cs typeface="Aptos" pitchFamily="34" charset="-120"/>
-              </a:rPr>
-              <a:t>Piczak CNN published LP</a:t>
-            </a:r>
-            <a:endParaRPr lang="en-US" sz="840" dirty="0"/>
-          </a:p>
-        </p:txBody>
-      </p:sp>
-      <p:sp>
-        <p:nvSpPr>
-          <p:cNvPr id="11" name="Shape 9"/>
-          <p:cNvSpPr/>
-          <p:nvPr/>
-        </p:nvSpPr>
-        <p:spPr>
-          <a:xfrm>
-            <a:off x="3355848" y="2340864"/>
-            <a:ext cx="2148840" cy="0"/>
-          </a:xfrm>
-          <a:prstGeom prst="line">
-            <a:avLst/>
-          </a:prstGeom>
-          <a:noFill/>
-          <a:ln w="5080">
-            <a:solidFill>
-              <a:srgbClr val="D8D4C8"/>
-            </a:solidFill>
-            <a:prstDash val="solid"/>
-          </a:ln>
-        </p:spPr>
-        <p:txBody>
-          <a:bodyPr/>
-          <a:lstStyle/>
-          <a:p>
-            <a:endParaRPr lang="en-US"/>
-          </a:p>
-        </p:txBody>
-      </p:sp>
-      <p:sp>
-        <p:nvSpPr>
           <p:cNvPr id="12" name="Shape 10"/>
           <p:cNvSpPr/>
           <p:nvPr/>
         </p:nvSpPr>
         <p:spPr>
           <a:xfrm>
-            <a:off x="3355848" y="2258568"/>
+            <a:off x="3337560" y="2129072"/>
             <a:ext cx="1386002" cy="155448"/>
           </a:xfrm>
           <a:prstGeom prst="rect">
@@ -14104,7 +14253,7 @@
         </p:nvSpPr>
         <p:spPr>
           <a:xfrm>
-            <a:off x="4833290" y="2240280"/>
+            <a:off x="4815002" y="2110784"/>
             <a:ext cx="658368" cy="146304"/>
           </a:xfrm>
           <a:prstGeom prst="rect">
@@ -14148,7 +14297,7 @@
         </p:nvSpPr>
         <p:spPr>
           <a:xfrm>
-            <a:off x="749808" y="2862072"/>
+            <a:off x="731520" y="2739990"/>
             <a:ext cx="2468880" cy="164592"/>
           </a:xfrm>
           <a:prstGeom prst="rect">
@@ -14192,7 +14341,7 @@
         </p:nvSpPr>
         <p:spPr>
           <a:xfrm>
-            <a:off x="3355848" y="2962656"/>
+            <a:off x="3337560" y="2840574"/>
             <a:ext cx="2148840" cy="0"/>
           </a:xfrm>
           <a:prstGeom prst="line">
@@ -14222,7 +14371,7 @@
         </p:nvSpPr>
         <p:spPr>
           <a:xfrm>
-            <a:off x="3355848" y="2880360"/>
+            <a:off x="3337560" y="2758278"/>
             <a:ext cx="1220541" cy="155448"/>
           </a:xfrm>
           <a:prstGeom prst="rect">
@@ -14256,7 +14405,7 @@
         </p:nvSpPr>
         <p:spPr>
           <a:xfrm>
-            <a:off x="4667829" y="2862072"/>
+            <a:off x="4649541" y="2739990"/>
             <a:ext cx="658368" cy="146304"/>
           </a:xfrm>
           <a:prstGeom prst="rect">
@@ -14300,7 +14449,7 @@
         </p:nvSpPr>
         <p:spPr>
           <a:xfrm>
-            <a:off x="749808" y="3182112"/>
+            <a:off x="731520" y="3268616"/>
             <a:ext cx="2468880" cy="164592"/>
           </a:xfrm>
           <a:prstGeom prst="rect">
@@ -14344,7 +14493,7 @@
         </p:nvSpPr>
         <p:spPr>
           <a:xfrm>
-            <a:off x="3355848" y="3282696"/>
+            <a:off x="3337560" y="3369200"/>
             <a:ext cx="2148840" cy="0"/>
           </a:xfrm>
           <a:prstGeom prst="line">
@@ -14374,7 +14523,7 @@
         </p:nvSpPr>
         <p:spPr>
           <a:xfrm>
-            <a:off x="3355848" y="3200400"/>
+            <a:off x="3337560" y="3286904"/>
             <a:ext cx="1213020" cy="155448"/>
           </a:xfrm>
           <a:prstGeom prst="rect">
@@ -14408,7 +14557,7 @@
         </p:nvSpPr>
         <p:spPr>
           <a:xfrm>
-            <a:off x="4660308" y="3182112"/>
+            <a:off x="4642020" y="3268616"/>
             <a:ext cx="658368" cy="146304"/>
           </a:xfrm>
           <a:prstGeom prst="rect">
@@ -14452,7 +14601,7 @@
         </p:nvSpPr>
         <p:spPr>
           <a:xfrm>
-            <a:off x="749808" y="3502152"/>
+            <a:off x="731520" y="3588656"/>
             <a:ext cx="2468880" cy="164592"/>
           </a:xfrm>
           <a:prstGeom prst="rect">
@@ -14496,7 +14645,7 @@
         </p:nvSpPr>
         <p:spPr>
           <a:xfrm>
-            <a:off x="3355848" y="3602736"/>
+            <a:off x="3337560" y="3689240"/>
             <a:ext cx="2148840" cy="0"/>
           </a:xfrm>
           <a:prstGeom prst="line">
@@ -14526,7 +14675,7 @@
         </p:nvSpPr>
         <p:spPr>
           <a:xfrm>
-            <a:off x="3355848" y="3520440"/>
+            <a:off x="3337560" y="3606944"/>
             <a:ext cx="1792133" cy="155448"/>
           </a:xfrm>
           <a:prstGeom prst="rect">
@@ -14560,7 +14709,7 @@
         </p:nvSpPr>
         <p:spPr>
           <a:xfrm>
-            <a:off x="5239421" y="3502152"/>
+            <a:off x="5221133" y="3588656"/>
             <a:ext cx="658368" cy="146304"/>
           </a:xfrm>
           <a:prstGeom prst="rect">
@@ -14604,7 +14753,7 @@
         </p:nvSpPr>
         <p:spPr>
           <a:xfrm>
-            <a:off x="749808" y="3822192"/>
+            <a:off x="731520" y="4124696"/>
             <a:ext cx="2468880" cy="164592"/>
           </a:xfrm>
           <a:prstGeom prst="rect">
@@ -14626,7 +14775,7 @@
               <a:buNone/>
             </a:pPr>
             <a:r>
-              <a:rPr lang="en-US" sz="840" b="1" dirty="0">
+              <a:rPr lang="en-US" sz="840" dirty="0">
                 <a:solidFill>
                   <a:srgbClr val="1F2528"/>
                 </a:solidFill>
@@ -14648,7 +14797,7 @@
         </p:nvSpPr>
         <p:spPr>
           <a:xfrm>
-            <a:off x="3355848" y="3922776"/>
+            <a:off x="3337560" y="4225280"/>
             <a:ext cx="2148840" cy="0"/>
           </a:xfrm>
           <a:prstGeom prst="line">
@@ -14678,7 +14827,7 @@
         </p:nvSpPr>
         <p:spPr>
           <a:xfrm>
-            <a:off x="3355848" y="3840480"/>
+            <a:off x="3337560" y="4142984"/>
             <a:ext cx="2028505" cy="155448"/>
           </a:xfrm>
           <a:prstGeom prst="rect">
@@ -14712,7 +14861,7 @@
         </p:nvSpPr>
         <p:spPr>
           <a:xfrm>
-            <a:off x="5475793" y="3822192"/>
+            <a:off x="5457505" y="4124696"/>
             <a:ext cx="658368" cy="146304"/>
           </a:xfrm>
           <a:prstGeom prst="rect">
@@ -14756,7 +14905,7 @@
         </p:nvSpPr>
         <p:spPr>
           <a:xfrm>
-            <a:off x="749808" y="4142232"/>
+            <a:off x="731520" y="4444736"/>
             <a:ext cx="2468880" cy="164592"/>
           </a:xfrm>
           <a:prstGeom prst="rect">
@@ -14778,7 +14927,7 @@
               <a:buNone/>
             </a:pPr>
             <a:r>
-              <a:rPr lang="en-US" sz="840" b="1" dirty="0">
+              <a:rPr lang="en-US" sz="840" dirty="0">
                 <a:solidFill>
                   <a:srgbClr val="1F2528"/>
                 </a:solidFill>
@@ -14800,7 +14949,7 @@
         </p:nvSpPr>
         <p:spPr>
           <a:xfrm>
-            <a:off x="3355848" y="4242816"/>
+            <a:off x="3337560" y="4545320"/>
             <a:ext cx="2148840" cy="0"/>
           </a:xfrm>
           <a:prstGeom prst="line">
@@ -14830,7 +14979,7 @@
         </p:nvSpPr>
         <p:spPr>
           <a:xfrm>
-            <a:off x="3355848" y="4160520"/>
+            <a:off x="3337560" y="4463024"/>
             <a:ext cx="2046770" cy="155448"/>
           </a:xfrm>
           <a:prstGeom prst="rect">
@@ -14864,7 +15013,7 @@
         </p:nvSpPr>
         <p:spPr>
           <a:xfrm>
-            <a:off x="5494058" y="4142232"/>
+            <a:off x="5475770" y="4444736"/>
             <a:ext cx="658368" cy="146304"/>
           </a:xfrm>
           <a:prstGeom prst="rect">
@@ -15068,8 +15217,8 @@
         </p:nvSpPr>
         <p:spPr>
           <a:xfrm>
-            <a:off x="6537960" y="2944368"/>
-            <a:ext cx="4754880" cy="914400"/>
+            <a:off x="6537960" y="2862073"/>
+            <a:ext cx="4754880" cy="1173856"/>
           </a:xfrm>
           <a:prstGeom prst="rect">
             <a:avLst/>
@@ -15144,8 +15293,8 @@
         </p:nvSpPr>
         <p:spPr>
           <a:xfrm>
-            <a:off x="6702552" y="3337560"/>
-            <a:ext cx="4297680" cy="329184"/>
+            <a:off x="6702552" y="3255265"/>
+            <a:ext cx="4297680" cy="808095"/>
           </a:xfrm>
           <a:prstGeom prst="rect">
             <a:avLst/>
@@ -15174,9 +15323,39 @@
                 <a:ea typeface="Aptos" pitchFamily="34" charset="-122"/>
                 <a:cs typeface="Aptos" pitchFamily="34" charset="-120"/>
               </a:rPr>
-              <a:t>Baseline replication required careful protocol matching; runtime and cost are hard without controlled hardware.</a:t>
-            </a:r>
-            <a:endParaRPr lang="en-US" sz="890" dirty="0"/>
+              <a:t>Baseline replication required careful protocol matching and was difficult to reproduce one-to-one based on the evolution of libraries, protocols, etc.</a:t>
+            </a:r>
+          </a:p>
+          <a:p>
+            <a:pPr marL="0" indent="0" algn="l">
+              <a:lnSpc>
+                <a:spcPct val="82000"/>
+              </a:lnSpc>
+              <a:buNone/>
+            </a:pPr>
+            <a:endParaRPr lang="en-US" sz="890" dirty="0">
+              <a:solidFill>
+                <a:srgbClr val="1F2528"/>
+              </a:solidFill>
+              <a:latin typeface="Aptos" pitchFamily="34" charset="0"/>
+            </a:endParaRPr>
+          </a:p>
+          <a:p>
+            <a:pPr marL="0" indent="0" algn="l">
+              <a:lnSpc>
+                <a:spcPct val="82000"/>
+              </a:lnSpc>
+              <a:buNone/>
+            </a:pPr>
+            <a:r>
+              <a:rPr lang="en-US" sz="890" dirty="0">
+                <a:solidFill>
+                  <a:srgbClr val="1F2528"/>
+                </a:solidFill>
+                <a:latin typeface="Aptos" pitchFamily="34" charset="0"/>
+              </a:rPr>
+              <a:t>Comparison discipline was initially overlooked.  The creation of apples-to-apples comparison required intentional model setup and evaluation…as well as last second re-runs</a:t>
+            </a:r>
           </a:p>
         </p:txBody>
       </p:sp>
@@ -15188,7 +15367,7 @@
         </p:nvSpPr>
         <p:spPr>
           <a:xfrm>
-            <a:off x="6537960" y="4151376"/>
+            <a:off x="6565627" y="4248140"/>
             <a:ext cx="4754880" cy="914400"/>
           </a:xfrm>
           <a:prstGeom prst="rect">
@@ -15220,7 +15399,7 @@
         </p:nvSpPr>
         <p:spPr>
           <a:xfrm>
-            <a:off x="6702552" y="4279392"/>
+            <a:off x="6730219" y="4376156"/>
             <a:ext cx="4389120" cy="164592"/>
           </a:xfrm>
           <a:prstGeom prst="rect">
@@ -15264,7 +15443,7 @@
         </p:nvSpPr>
         <p:spPr>
           <a:xfrm>
-            <a:off x="6702552" y="4544568"/>
+            <a:off x="6730219" y="4641332"/>
             <a:ext cx="4297680" cy="329184"/>
           </a:xfrm>
           <a:prstGeom prst="rect">
@@ -15294,7 +15473,7 @@
                 <a:ea typeface="Aptos" pitchFamily="34" charset="-122"/>
                 <a:cs typeface="Aptos" pitchFamily="34" charset="-120"/>
               </a:rPr>
-              <a:t>Lock evaluation protocol first; time all models on the same hardware; use fewer variants with deeper analysis.</a:t>
+              <a:t>Lock evaluation protocol first; use fewer variants with deeper analysis; include a random forest analysis; utilize run time as a metric in addition to accuracy.</a:t>
             </a:r>
             <a:endParaRPr lang="en-US" sz="890" dirty="0"/>
           </a:p>
@@ -15403,7 +15582,7 @@
         </p:nvSpPr>
         <p:spPr>
           <a:xfrm>
-            <a:off x="749808" y="2560319"/>
+            <a:off x="731520" y="2430823"/>
             <a:ext cx="2468880" cy="164592"/>
           </a:xfrm>
           <a:prstGeom prst="rect">
@@ -15466,7 +15645,7 @@
         </p:nvSpPr>
         <p:spPr>
           <a:xfrm>
-            <a:off x="3355848" y="2660903"/>
+            <a:off x="3337560" y="2531407"/>
             <a:ext cx="2148840" cy="0"/>
           </a:xfrm>
           <a:prstGeom prst="line">
@@ -15502,8 +15681,8 @@
         </p:nvSpPr>
         <p:spPr>
           <a:xfrm>
-            <a:off x="3355848" y="2578607"/>
-            <a:ext cx="1386002" cy="155448"/>
+            <a:off x="3337560" y="2449111"/>
+            <a:ext cx="1463629" cy="155448"/>
           </a:xfrm>
           <a:prstGeom prst="rect">
             <a:avLst/>
@@ -15542,7 +15721,7 @@
         </p:nvSpPr>
         <p:spPr>
           <a:xfrm>
-            <a:off x="4833290" y="2560319"/>
+            <a:off x="4891949" y="2439970"/>
             <a:ext cx="658368" cy="146304"/>
           </a:xfrm>
           <a:prstGeom prst="rect">
@@ -15572,12 +15751,104 @@
                 <a:ea typeface="Aptos" pitchFamily="34" charset="-122"/>
                 <a:cs typeface="Aptos" pitchFamily="34" charset="-120"/>
               </a:rPr>
-              <a:t>64.5%</a:t>
+              <a:t>67.9%</a:t>
             </a:r>
             <a:endParaRPr lang="en-US" sz="760" dirty="0"/>
           </a:p>
         </p:txBody>
       </p:sp>
+      <p:cxnSp>
+        <p:nvCxnSpPr>
+          <p:cNvPr id="57" name="Straight Connector 56">
+            <a:extLst>
+              <a:ext uri="{FF2B5EF4-FFF2-40B4-BE49-F238E27FC236}">
+                <a16:creationId xmlns:a16="http://schemas.microsoft.com/office/drawing/2014/main" id="{13C1CC58-8AF7-F6FB-2D8E-D396FD6F3DAB}"/>
+              </a:ext>
+            </a:extLst>
+          </p:cNvPr>
+          <p:cNvCxnSpPr>
+            <a:cxnSpLocks/>
+          </p:cNvCxnSpPr>
+          <p:nvPr/>
+        </p:nvCxnSpPr>
+        <p:spPr>
+          <a:xfrm>
+            <a:off x="1594512" y="3081918"/>
+            <a:ext cx="2688538" cy="0"/>
+          </a:xfrm>
+          <a:prstGeom prst="line">
+            <a:avLst/>
+          </a:prstGeom>
+          <a:ln w="3175">
+            <a:solidFill>
+              <a:schemeClr val="tx1">
+                <a:lumMod val="75000"/>
+                <a:lumOff val="25000"/>
+              </a:schemeClr>
+            </a:solidFill>
+          </a:ln>
+        </p:spPr>
+        <p:style>
+          <a:lnRef idx="1">
+            <a:schemeClr val="accent1"/>
+          </a:lnRef>
+          <a:fillRef idx="0">
+            <a:schemeClr val="accent1"/>
+          </a:fillRef>
+          <a:effectRef idx="0">
+            <a:schemeClr val="accent1"/>
+          </a:effectRef>
+          <a:fontRef idx="minor">
+            <a:schemeClr val="tx1"/>
+          </a:fontRef>
+        </p:style>
+      </p:cxnSp>
+      <p:cxnSp>
+        <p:nvCxnSpPr>
+          <p:cNvPr id="60" name="Straight Connector 59">
+            <a:extLst>
+              <a:ext uri="{FF2B5EF4-FFF2-40B4-BE49-F238E27FC236}">
+                <a16:creationId xmlns:a16="http://schemas.microsoft.com/office/drawing/2014/main" id="{30E18C45-DA94-5067-874B-3D558359BD4B}"/>
+              </a:ext>
+            </a:extLst>
+          </p:cNvPr>
+          <p:cNvCxnSpPr>
+            <a:cxnSpLocks/>
+          </p:cNvCxnSpPr>
+          <p:nvPr/>
+        </p:nvCxnSpPr>
+        <p:spPr>
+          <a:xfrm>
+            <a:off x="1530912" y="3945272"/>
+            <a:ext cx="2688538" cy="0"/>
+          </a:xfrm>
+          <a:prstGeom prst="line">
+            <a:avLst/>
+          </a:prstGeom>
+          <a:ln w="3175">
+            <a:solidFill>
+              <a:schemeClr val="tx1">
+                <a:lumMod val="75000"/>
+                <a:lumOff val="25000"/>
+              </a:schemeClr>
+            </a:solidFill>
+          </a:ln>
+        </p:spPr>
+        <p:style>
+          <a:lnRef idx="1">
+            <a:schemeClr val="accent1"/>
+          </a:lnRef>
+          <a:fillRef idx="0">
+            <a:schemeClr val="accent1"/>
+          </a:fillRef>
+          <a:effectRef idx="0">
+            <a:schemeClr val="accent1"/>
+          </a:effectRef>
+          <a:fontRef idx="minor">
+            <a:schemeClr val="tx1"/>
+          </a:fontRef>
+        </p:style>
+      </p:cxnSp>
     </p:spTree>
   </p:cSld>
   <p:clrMapOvr>
@@ -16189,7 +16460,7 @@
                 <a:ea typeface="Aptos" pitchFamily="34" charset="-122"/>
                 <a:cs typeface="Aptos" pitchFamily="34" charset="-120"/>
               </a:rPr>
-              <a:t>accuracy | loss | runtime</a:t>
+              <a:t>accuracy | loss </a:t>
             </a:r>
             <a:endParaRPr lang="en-US" sz="1000" dirty="0"/>
           </a:p>
@@ -16271,9 +16542,8 @@
                 <a:ea typeface="Aptos" pitchFamily="34" charset="-122"/>
                 <a:cs typeface="Aptos" pitchFamily="34" charset="-120"/>
               </a:rPr>
-              <a:t>Final 5-fold test accuracy is the headline metric.</a:t>
-            </a:r>
-            <a:endParaRPr lang="en-US" sz="1320" dirty="0"/>
+              <a:t>Final 5-fold test accuracy</a:t>
+            </a:r>
           </a:p>
           <a:p>
             <a:endParaRPr lang="en-US" sz="1320" dirty="0"/>
@@ -16288,7 +16558,7 @@
                 <a:ea typeface="Aptos" pitchFamily="34" charset="-122"/>
                 <a:cs typeface="Aptos" pitchFamily="34" charset="-120"/>
               </a:rPr>
-              <a:t>Clip-level accuracy is used for segment-based models.</a:t>
+              <a:t>Clip-level accuracy is used for segment-based models</a:t>
             </a:r>
             <a:endParaRPr lang="en-US" sz="1320" dirty="0"/>
           </a:p>
@@ -16305,7 +16575,7 @@
                 <a:ea typeface="Aptos" pitchFamily="34" charset="-122"/>
                 <a:cs typeface="Aptos" pitchFamily="34" charset="-120"/>
               </a:rPr>
-              <a:t>Loss and runtime help interpret the magnitude of gains…if any.</a:t>
+              <a:t>Loss to help interpret the magnitude of gains…if any.</a:t>
             </a:r>
             <a:endParaRPr lang="en-US" sz="1320" dirty="0"/>
           </a:p>
@@ -16957,7 +17227,7 @@
                 <a:ea typeface="Aptos" pitchFamily="34" charset="-122"/>
                 <a:cs typeface="Aptos" pitchFamily="34" charset="-120"/>
               </a:rPr>
-              <a:t>THE BENCHMARK</a:t>
+              <a:t>THE BASELINE</a:t>
             </a:r>
             <a:endParaRPr lang="en-US" sz="880" dirty="0"/>
           </a:p>
@@ -17045,7 +17315,7 @@
         </p:nvSpPr>
         <p:spPr>
           <a:xfrm>
-            <a:off x="6554586" y="1415310"/>
+            <a:off x="6771132" y="1438962"/>
             <a:ext cx="2011680" cy="320040"/>
           </a:xfrm>
           <a:prstGeom prst="rect">
@@ -17089,8 +17359,8 @@
         </p:nvSpPr>
         <p:spPr>
           <a:xfrm>
-            <a:off x="6554586" y="1872510"/>
-            <a:ext cx="1783080" cy="914400"/>
+            <a:off x="6931445" y="1849611"/>
+            <a:ext cx="1783080" cy="759330"/>
           </a:xfrm>
           <a:prstGeom prst="rect">
             <a:avLst/>
@@ -17123,7 +17393,7 @@
         </p:nvSpPr>
         <p:spPr>
           <a:xfrm>
-            <a:off x="6646026" y="2009670"/>
+            <a:off x="7022885" y="1964869"/>
             <a:ext cx="1600200" cy="329184"/>
           </a:xfrm>
           <a:prstGeom prst="rect">
@@ -17167,7 +17437,7 @@
         </p:nvSpPr>
         <p:spPr>
           <a:xfrm>
-            <a:off x="6664314" y="2402862"/>
+            <a:off x="7041173" y="2358061"/>
             <a:ext cx="1563624" cy="219456"/>
           </a:xfrm>
           <a:prstGeom prst="rect">
@@ -17211,8 +17481,8 @@
         </p:nvSpPr>
         <p:spPr>
           <a:xfrm>
-            <a:off x="8749146" y="1872510"/>
-            <a:ext cx="1783080" cy="914400"/>
+            <a:off x="9153748" y="1859133"/>
+            <a:ext cx="1783080" cy="749808"/>
           </a:xfrm>
           <a:prstGeom prst="rect">
             <a:avLst/>
@@ -17245,7 +17515,7 @@
         </p:nvSpPr>
         <p:spPr>
           <a:xfrm>
-            <a:off x="8840586" y="2009670"/>
+            <a:off x="9245188" y="1974391"/>
             <a:ext cx="1600200" cy="329184"/>
           </a:xfrm>
           <a:prstGeom prst="rect">
@@ -17289,7 +17559,7 @@
         </p:nvSpPr>
         <p:spPr>
           <a:xfrm>
-            <a:off x="8858874" y="2402862"/>
+            <a:off x="9263476" y="2367583"/>
             <a:ext cx="1563624" cy="219456"/>
           </a:xfrm>
           <a:prstGeom prst="rect">
@@ -17333,8 +17603,8 @@
         </p:nvSpPr>
         <p:spPr>
           <a:xfrm>
-            <a:off x="6554586" y="2951502"/>
-            <a:ext cx="1783080" cy="914400"/>
+            <a:off x="6931445" y="2857491"/>
+            <a:ext cx="1783080" cy="759330"/>
           </a:xfrm>
           <a:prstGeom prst="rect">
             <a:avLst/>
@@ -17367,7 +17637,7 @@
         </p:nvSpPr>
         <p:spPr>
           <a:xfrm>
-            <a:off x="6646026" y="3088662"/>
+            <a:off x="7022885" y="2972749"/>
             <a:ext cx="1600200" cy="329184"/>
           </a:xfrm>
           <a:prstGeom prst="rect">
@@ -17411,7 +17681,7 @@
         </p:nvSpPr>
         <p:spPr>
           <a:xfrm>
-            <a:off x="6664314" y="3481854"/>
+            <a:off x="7041173" y="3365941"/>
             <a:ext cx="1563624" cy="219456"/>
           </a:xfrm>
           <a:prstGeom prst="rect">
@@ -17455,8 +17725,8 @@
         </p:nvSpPr>
         <p:spPr>
           <a:xfrm>
-            <a:off x="8749146" y="2951502"/>
-            <a:ext cx="1783080" cy="914400"/>
+            <a:off x="9153748" y="2845111"/>
+            <a:ext cx="1783080" cy="749808"/>
           </a:xfrm>
           <a:prstGeom prst="rect">
             <a:avLst/>
@@ -17489,7 +17759,7 @@
         </p:nvSpPr>
         <p:spPr>
           <a:xfrm>
-            <a:off x="8840586" y="3088662"/>
+            <a:off x="9245188" y="2982271"/>
             <a:ext cx="1600200" cy="329184"/>
           </a:xfrm>
           <a:prstGeom prst="rect">
@@ -17533,7 +17803,7 @@
         </p:nvSpPr>
         <p:spPr>
           <a:xfrm>
-            <a:off x="8858874" y="3481854"/>
+            <a:off x="9263476" y="3375463"/>
             <a:ext cx="1563624" cy="219456"/>
           </a:xfrm>
           <a:prstGeom prst="rect">
@@ -17577,8 +17847,8 @@
         </p:nvSpPr>
         <p:spPr>
           <a:xfrm>
-            <a:off x="6524944" y="4436849"/>
-            <a:ext cx="1416241" cy="201168"/>
+            <a:off x="807279" y="3858470"/>
+            <a:ext cx="2471961" cy="201168"/>
           </a:xfrm>
           <a:prstGeom prst="rect">
             <a:avLst/>
@@ -17607,7 +17877,7 @@
                 <a:ea typeface="Aptos" pitchFamily="34" charset="-122"/>
                 <a:cs typeface="Aptos" pitchFamily="34" charset="-120"/>
               </a:rPr>
-              <a:t>Why this matters</a:t>
+              <a:t>Experiment Significance</a:t>
             </a:r>
             <a:endParaRPr lang="en-US" sz="1100" dirty="0"/>
           </a:p>
@@ -17621,7 +17891,7 @@
         </p:nvSpPr>
         <p:spPr>
           <a:xfrm>
-            <a:off x="6543232" y="4775177"/>
+            <a:off x="825567" y="4196798"/>
             <a:ext cx="5428923" cy="1234440"/>
           </a:xfrm>
           <a:prstGeom prst="rect">
@@ -17925,12 +18195,15 @@
         </p:blipFill>
         <p:spPr>
           <a:xfrm>
-            <a:off x="684622" y="3213307"/>
+            <a:off x="6788060" y="3812081"/>
             <a:ext cx="2293407" cy="2330638"/>
           </a:xfrm>
           <a:prstGeom prst="rect">
             <a:avLst/>
           </a:prstGeom>
+          <a:ln>
+            <a:noFill/>
+          </a:ln>
         </p:spPr>
       </p:pic>
       <p:pic>
@@ -17966,7 +18239,7 @@
         </p:blipFill>
         <p:spPr>
           <a:xfrm>
-            <a:off x="3754973" y="3417846"/>
+            <a:off x="9382678" y="3858470"/>
             <a:ext cx="1670630" cy="1624008"/>
           </a:xfrm>
           <a:prstGeom prst="rect">
@@ -18001,14 +18274,13 @@
               </a:clrTo>
             </a:clrChange>
           </a:blip>
-          <a:stretch>
-            <a:fillRect/>
-          </a:stretch>
+          <a:srcRect l="40238" b="6"/>
+          <a:stretch/>
         </p:blipFill>
         <p:spPr>
           <a:xfrm>
-            <a:off x="3150661" y="5045181"/>
-            <a:ext cx="3021721" cy="347216"/>
+            <a:off x="9521794" y="5722004"/>
+            <a:ext cx="1670630" cy="347194"/>
           </a:xfrm>
           <a:prstGeom prst="rect">
             <a:avLst/>
@@ -18017,10 +18289,10 @@
       </p:pic>
       <p:sp>
         <p:nvSpPr>
-          <p:cNvPr id="501" name="Rectangle 500">
+          <p:cNvPr id="502" name="Rectangle 501">
             <a:extLst>
               <a:ext uri="{FF2B5EF4-FFF2-40B4-BE49-F238E27FC236}">
-                <a16:creationId xmlns:a16="http://schemas.microsoft.com/office/drawing/2014/main" id="{00BB4C16-2AFE-0A05-09B8-3EC018B04C8C}"/>
+                <a16:creationId xmlns:a16="http://schemas.microsoft.com/office/drawing/2014/main" id="{9A3B1683-A76E-36B5-FAE8-A77EBE055D51}"/>
               </a:ext>
             </a:extLst>
           </p:cNvPr>
@@ -18029,17 +18301,15 @@
         </p:nvSpPr>
         <p:spPr>
           <a:xfrm>
-            <a:off x="3101287" y="3253253"/>
-            <a:ext cx="3120470" cy="2299799"/>
+            <a:off x="594360" y="3244145"/>
+            <a:ext cx="2383669" cy="2299800"/>
           </a:xfrm>
           <a:prstGeom prst="rect">
             <a:avLst/>
           </a:prstGeom>
           <a:noFill/>
           <a:ln w="3175">
-            <a:solidFill>
-              <a:schemeClr val="tx1"/>
-            </a:solidFill>
+            <a:noFill/>
           </a:ln>
         </p:spPr>
         <p:style>
@@ -18067,58 +18337,46 @@
           </a:p>
         </p:txBody>
       </p:sp>
-      <p:sp>
-        <p:nvSpPr>
-          <p:cNvPr id="502" name="Rectangle 501">
+      <p:pic>
+        <p:nvPicPr>
+          <p:cNvPr id="5" name="Picture 4">
             <a:extLst>
               <a:ext uri="{FF2B5EF4-FFF2-40B4-BE49-F238E27FC236}">
-                <a16:creationId xmlns:a16="http://schemas.microsoft.com/office/drawing/2014/main" id="{9A3B1683-A76E-36B5-FAE8-A77EBE055D51}"/>
+                <a16:creationId xmlns:a16="http://schemas.microsoft.com/office/drawing/2014/main" id="{1E9DCF99-AF5D-4783-4A13-56382C1897A2}"/>
               </a:ext>
             </a:extLst>
           </p:cNvPr>
-          <p:cNvSpPr/>
-          <p:nvPr/>
-        </p:nvSpPr>
-        <p:spPr>
-          <a:xfrm>
-            <a:off x="594360" y="3244145"/>
-            <a:ext cx="2383669" cy="2299800"/>
+          <p:cNvPicPr>
+            <a:picLocks noChangeAspect="1"/>
+          </p:cNvPicPr>
+          <p:nvPr/>
+        </p:nvPicPr>
+        <p:blipFill>
+          <a:blip r:embed="rId6">
+            <a:clrChange>
+              <a:clrFrom>
+                <a:srgbClr val="FFFFFE"/>
+              </a:clrFrom>
+              <a:clrTo>
+                <a:srgbClr val="FFFFFE">
+                  <a:alpha val="0"/>
+                </a:srgbClr>
+              </a:clrTo>
+            </a:clrChange>
+          </a:blip>
+          <a:srcRect r="60262"/>
+          <a:stretch/>
+        </p:blipFill>
+        <p:spPr>
+          <a:xfrm>
+            <a:off x="9553199" y="5458432"/>
+            <a:ext cx="1110884" cy="347215"/>
           </a:xfrm>
           <a:prstGeom prst="rect">
             <a:avLst/>
           </a:prstGeom>
-          <a:noFill/>
-          <a:ln w="3175">
-            <a:solidFill>
-              <a:schemeClr val="tx1"/>
-            </a:solidFill>
-          </a:ln>
-        </p:spPr>
-        <p:style>
-          <a:lnRef idx="2">
-            <a:schemeClr val="accent1">
-              <a:shade val="15000"/>
-            </a:schemeClr>
-          </a:lnRef>
-          <a:fillRef idx="1">
-            <a:schemeClr val="accent1"/>
-          </a:fillRef>
-          <a:effectRef idx="0">
-            <a:schemeClr val="accent1"/>
-          </a:effectRef>
-          <a:fontRef idx="minor">
-            <a:schemeClr val="lt1"/>
-          </a:fontRef>
-        </p:style>
-        <p:txBody>
-          <a:bodyPr rtlCol="0" anchor="ctr"/>
-          <a:lstStyle/>
-          <a:p>
-            <a:pPr algn="ctr"/>
-            <a:endParaRPr lang="en-US"/>
-          </a:p>
-        </p:txBody>
-      </p:sp>
+        </p:spPr>
+      </p:pic>
     </p:spTree>
   </p:cSld>
   <p:clrMapOvr>
@@ -18965,17 +19223,39 @@
               <a:buNone/>
             </a:pPr>
             <a:r>
+              <a:rPr lang="en-US" sz="500" dirty="0" err="1">
+                <a:solidFill>
+                  <a:srgbClr val="D9D9D9"/>
+                </a:solidFill>
+                <a:latin typeface="Aptos" pitchFamily="34" charset="0"/>
+              </a:rPr>
+              <a:t>Piczak</a:t>
+            </a:r>
+            <a:r>
               <a:rPr lang="en-US" sz="500" dirty="0">
                 <a:solidFill>
-                  <a:srgbClr val="FFFFFF"/>
+                  <a:srgbClr val="D9D9D9"/>
+                </a:solidFill>
+                <a:latin typeface="Aptos" pitchFamily="34" charset="0"/>
+              </a:rPr>
+              <a:t> CNN | Variations </a:t>
+            </a:r>
+            <a:r>
+              <a:rPr lang="en-US" sz="500" dirty="0">
+                <a:solidFill>
+                  <a:srgbClr val="D9D9D9"/>
                 </a:solidFill>
                 <a:latin typeface="Aptos" pitchFamily="34" charset="0"/>
                 <a:ea typeface="Aptos" pitchFamily="34" charset="-122"/>
                 <a:cs typeface="Aptos" pitchFamily="34" charset="-120"/>
               </a:rPr>
-              <a:t>Piczak CNN | LSTM</a:t>
-            </a:r>
-            <a:endParaRPr lang="en-US" sz="500" dirty="0"/>
+              <a:t>| LSTM</a:t>
+            </a:r>
+            <a:endParaRPr lang="en-US" sz="500" dirty="0">
+              <a:solidFill>
+                <a:srgbClr val="D9D9D9"/>
+              </a:solidFill>
+            </a:endParaRPr>
           </a:p>
         </p:txBody>
       </p:sp>
@@ -19462,7 +19742,7 @@
         </p:nvSpPr>
         <p:spPr>
           <a:xfrm>
-            <a:off x="743871" y="2090533"/>
+            <a:off x="743871" y="2377918"/>
             <a:ext cx="2926080" cy="182880"/>
           </a:xfrm>
           <a:prstGeom prst="rect">
@@ -19477,31 +19757,29 @@
           </a:bodyPr>
           <a:lstStyle/>
           <a:p>
-            <a:pPr marL="0" indent="0" algn="l">
+            <a:pPr>
               <a:lnSpc>
                 <a:spcPct val="90000"/>
               </a:lnSpc>
-              <a:buNone/>
             </a:pPr>
             <a:r>
-              <a:rPr lang="en-US" sz="950" b="1" dirty="0" err="1">
-                <a:solidFill>
-                  <a:srgbClr val="6B7176"/>
+              <a:rPr lang="en-US" sz="1000" b="1" dirty="0" err="1">
+                <a:solidFill>
+                  <a:srgbClr val="426E9E"/>
                 </a:solidFill>
                 <a:latin typeface="Aptos" pitchFamily="34" charset="0"/>
               </a:rPr>
               <a:t>Piczak</a:t>
             </a:r>
             <a:r>
-              <a:rPr lang="en-US" sz="950" b="1" dirty="0">
-                <a:solidFill>
-                  <a:srgbClr val="6B7176"/>
+              <a:rPr lang="en-US" sz="1000" b="1" dirty="0">
+                <a:solidFill>
+                  <a:srgbClr val="426E9E"/>
                 </a:solidFill>
                 <a:latin typeface="Aptos" pitchFamily="34" charset="0"/>
               </a:rPr>
               <a:t> Model Architecture</a:t>
             </a:r>
-            <a:endParaRPr lang="en-US" sz="950" dirty="0"/>
           </a:p>
         </p:txBody>
       </p:sp>
@@ -19743,7 +20021,7 @@
                 <a:ea typeface="Aptos" pitchFamily="34" charset="-122"/>
                 <a:cs typeface="Aptos" pitchFamily="34" charset="-120"/>
               </a:rPr>
-              <a:t>team corrected baseline rerun</a:t>
+              <a:t>Baseline Replication</a:t>
             </a:r>
             <a:endParaRPr lang="en-US" sz="780" dirty="0"/>
           </a:p>
@@ -20317,13 +20595,13 @@
           <p:nvPr>
             <p:extLst>
               <p:ext uri="{D42A27DB-BD31-4B8C-83A1-F6EECF244321}">
-                <p14:modId xmlns:p14="http://schemas.microsoft.com/office/powerpoint/2010/main" val="2843265255"/>
+                <p14:modId xmlns:p14="http://schemas.microsoft.com/office/powerpoint/2010/main" val="3272244310"/>
               </p:ext>
             </p:extLst>
           </p:nvPr>
         </p:nvGraphicFramePr>
         <p:xfrm>
-          <a:off x="694942" y="2368295"/>
+          <a:off x="694942" y="2655680"/>
           <a:ext cx="4434151" cy="1713738"/>
         </p:xfrm>
         <a:graphic>
@@ -21443,7 +21721,7 @@
         </p:nvSpPr>
         <p:spPr>
           <a:xfrm>
-            <a:off x="731520" y="4425695"/>
+            <a:off x="731520" y="4713080"/>
             <a:ext cx="1645920" cy="182880"/>
           </a:xfrm>
           <a:prstGeom prst="rect">
@@ -21490,8 +21768,8 @@
         </p:nvSpPr>
         <p:spPr>
           <a:xfrm>
-            <a:off x="731520" y="4727447"/>
-            <a:ext cx="3886200" cy="420624"/>
+            <a:off x="731520" y="5014830"/>
+            <a:ext cx="5277394" cy="1203089"/>
           </a:xfrm>
           <a:prstGeom prst="rect">
             <a:avLst/>
@@ -21501,28 +21779,118 @@
         </p:spPr>
         <p:txBody>
           <a:bodyPr wrap="square" lIns="0" tIns="0" rIns="0" bIns="0" rtlCol="0" anchor="t">
-            <a:normAutofit/>
+            <a:normAutofit lnSpcReduction="10000"/>
           </a:bodyPr>
           <a:lstStyle/>
           <a:p>
-            <a:pPr marL="0" indent="0" algn="l">
+            <a:pPr>
               <a:lnSpc>
                 <a:spcPct val="90000"/>
               </a:lnSpc>
-              <a:buNone/>
             </a:pPr>
             <a:r>
-              <a:rPr lang="en-US" sz="1130" dirty="0">
+              <a:rPr lang="en-US" sz="1200" dirty="0">
                 <a:solidFill>
                   <a:srgbClr val="1F2528"/>
                 </a:solidFill>
                 <a:latin typeface="Aptos" pitchFamily="34" charset="0"/>
-                <a:ea typeface="Aptos" pitchFamily="34" charset="-122"/>
-                <a:cs typeface="Aptos" pitchFamily="34" charset="-120"/>
-              </a:rPr>
-              <a:t>Alternative from-scratch architecture: tests temporal modeling before importing external pretrained knowledge.</a:t>
-            </a:r>
-            <a:endParaRPr lang="en-US" sz="1130" dirty="0"/>
+              </a:rPr>
+              <a:t>We successfully recreated </a:t>
+            </a:r>
+            <a:r>
+              <a:rPr lang="en-US" sz="1200" dirty="0" err="1">
+                <a:solidFill>
+                  <a:srgbClr val="1F2528"/>
+                </a:solidFill>
+                <a:latin typeface="Aptos" pitchFamily="34" charset="0"/>
+              </a:rPr>
+              <a:t>Piczak’s</a:t>
+            </a:r>
+            <a:r>
+              <a:rPr lang="en-US" sz="1200" dirty="0">
+                <a:solidFill>
+                  <a:srgbClr val="1F2528"/>
+                </a:solidFill>
+                <a:latin typeface="Aptos" pitchFamily="34" charset="0"/>
+              </a:rPr>
+              <a:t> original model. </a:t>
+            </a:r>
+          </a:p>
+          <a:p>
+            <a:pPr>
+              <a:lnSpc>
+                <a:spcPct val="90000"/>
+              </a:lnSpc>
+            </a:pPr>
+            <a:endParaRPr lang="en-US" sz="1200" dirty="0">
+              <a:solidFill>
+                <a:srgbClr val="1F2528"/>
+              </a:solidFill>
+              <a:latin typeface="Aptos" pitchFamily="34" charset="0"/>
+            </a:endParaRPr>
+          </a:p>
+          <a:p>
+            <a:pPr>
+              <a:lnSpc>
+                <a:spcPct val="90000"/>
+              </a:lnSpc>
+            </a:pPr>
+            <a:r>
+              <a:rPr lang="en-US" sz="1200" dirty="0">
+                <a:solidFill>
+                  <a:srgbClr val="1F2528"/>
+                </a:solidFill>
+                <a:latin typeface="Aptos" pitchFamily="34" charset="0"/>
+              </a:rPr>
+              <a:t>The corrected rerun slightly underperformed vs. the original baseline, which may reflect implementation and library differences over the decade since the original work. </a:t>
+            </a:r>
+          </a:p>
+          <a:p>
+            <a:pPr>
+              <a:lnSpc>
+                <a:spcPct val="90000"/>
+              </a:lnSpc>
+            </a:pPr>
+            <a:endParaRPr lang="en-US" sz="1200" dirty="0">
+              <a:solidFill>
+                <a:srgbClr val="1F2528"/>
+              </a:solidFill>
+              <a:latin typeface="Aptos" pitchFamily="34" charset="0"/>
+            </a:endParaRPr>
+          </a:p>
+          <a:p>
+            <a:pPr>
+              <a:lnSpc>
+                <a:spcPct val="90000"/>
+              </a:lnSpc>
+            </a:pPr>
+            <a:r>
+              <a:rPr lang="en-US" sz="1200" dirty="0">
+                <a:solidFill>
+                  <a:srgbClr val="1F2528"/>
+                </a:solidFill>
+                <a:latin typeface="Aptos" pitchFamily="34" charset="0"/>
+              </a:rPr>
+              <a:t>Ultimately, we found the reproduced baseline to be a sufficient representation of </a:t>
+            </a:r>
+            <a:r>
+              <a:rPr lang="en-US" sz="1200" dirty="0" err="1">
+                <a:solidFill>
+                  <a:srgbClr val="1F2528"/>
+                </a:solidFill>
+                <a:latin typeface="Aptos" pitchFamily="34" charset="0"/>
+              </a:rPr>
+              <a:t>Piczak’s</a:t>
+            </a:r>
+            <a:r>
+              <a:rPr lang="en-US" sz="1200" dirty="0">
+                <a:solidFill>
+                  <a:srgbClr val="1F2528"/>
+                </a:solidFill>
+                <a:latin typeface="Aptos" pitchFamily="34" charset="0"/>
+              </a:rPr>
+              <a:t> model for subsequent comparisons..</a:t>
+            </a:r>
           </a:p>
         </p:txBody>
       </p:sp>
@@ -21590,8 +21958,8 @@
         </p:nvSpPr>
         <p:spPr>
           <a:xfrm>
-            <a:off x="777240" y="1600200"/>
-            <a:ext cx="5950564" cy="411480"/>
+            <a:off x="777239" y="1600200"/>
+            <a:ext cx="5013961" cy="658846"/>
           </a:xfrm>
           <a:prstGeom prst="rect">
             <a:avLst/>
@@ -21601,28 +21969,60 @@
         </p:spPr>
         <p:txBody>
           <a:bodyPr wrap="square" lIns="0" tIns="0" rIns="0" bIns="0" rtlCol="0" anchor="t">
-            <a:normAutofit/>
+            <a:noAutofit/>
           </a:bodyPr>
           <a:lstStyle/>
           <a:p>
-            <a:pPr marL="0" indent="0" algn="l">
+            <a:pPr>
               <a:lnSpc>
                 <a:spcPct val="90000"/>
               </a:lnSpc>
-              <a:buNone/>
             </a:pPr>
             <a:r>
-              <a:rPr lang="en-US" sz="1900" b="1" dirty="0">
+              <a:rPr lang="en-US" sz="1200" dirty="0">
                 <a:solidFill>
                   <a:srgbClr val="1F2528"/>
                 </a:solidFill>
-                <a:latin typeface="Aptos Display" pitchFamily="34" charset="0"/>
-                <a:ea typeface="Aptos Display" pitchFamily="34" charset="-122"/>
-                <a:cs typeface="Aptos Display" pitchFamily="34" charset="-120"/>
-              </a:rPr>
-              <a:t>TEXT GOES HERE</a:t>
-            </a:r>
-            <a:endParaRPr lang="en-US" sz="1900" dirty="0"/>
+                <a:latin typeface="Aptos" pitchFamily="34" charset="0"/>
+              </a:rPr>
+              <a:t>We recreated </a:t>
+            </a:r>
+            <a:r>
+              <a:rPr lang="en-US" sz="1200" dirty="0" err="1">
+                <a:solidFill>
+                  <a:srgbClr val="1F2528"/>
+                </a:solidFill>
+                <a:latin typeface="Aptos" pitchFamily="34" charset="0"/>
+              </a:rPr>
+              <a:t>Piczak’s</a:t>
+            </a:r>
+            <a:r>
+              <a:rPr lang="en-US" sz="1200" dirty="0">
+                <a:solidFill>
+                  <a:srgbClr val="1F2528"/>
+                </a:solidFill>
+                <a:latin typeface="Aptos" pitchFamily="34" charset="0"/>
+              </a:rPr>
+              <a:t> CNN experiment to establish a defensible reference point. The comparison anchor is </a:t>
+            </a:r>
+            <a:r>
+              <a:rPr lang="en-US" sz="1200" dirty="0" err="1">
+                <a:solidFill>
+                  <a:srgbClr val="1F2528"/>
+                </a:solidFill>
+                <a:latin typeface="Aptos" pitchFamily="34" charset="0"/>
+              </a:rPr>
+              <a:t>Piczak’s</a:t>
+            </a:r>
+            <a:r>
+              <a:rPr lang="en-US" sz="1200" dirty="0">
+                <a:solidFill>
+                  <a:srgbClr val="1F2528"/>
+                </a:solidFill>
+                <a:latin typeface="Aptos" pitchFamily="34" charset="0"/>
+              </a:rPr>
+              <a:t> LP run: long spectrogram segments aggregated with probability voting into one clip-level prediction.</a:t>
+            </a:r>
           </a:p>
         </p:txBody>
       </p:sp>
@@ -21647,13 +22047,7 @@
     </p:bg>
     <p:spTree>
       <p:nvGrpSpPr>
-        <p:cNvPr id="1" name="">
-          <a:extLst>
-            <a:ext uri="{FF2B5EF4-FFF2-40B4-BE49-F238E27FC236}">
-              <a16:creationId xmlns:a16="http://schemas.microsoft.com/office/drawing/2014/main" id="{C54088F2-DA3C-2608-956D-E58B3F44A962}"/>
-            </a:ext>
-          </a:extLst>
-        </p:cNvPr>
+        <p:cNvPr id="1" name=""/>
         <p:cNvGrpSpPr/>
         <p:nvPr/>
       </p:nvGrpSpPr>
@@ -21667,53 +22061,7 @@
       </p:grpSpPr>
       <p:sp>
         <p:nvSpPr>
-          <p:cNvPr id="5" name="Shape 25">
-            <a:extLst>
-              <a:ext uri="{FF2B5EF4-FFF2-40B4-BE49-F238E27FC236}">
-                <a16:creationId xmlns:a16="http://schemas.microsoft.com/office/drawing/2014/main" id="{1F18A111-8714-5E04-B352-2377475B8F1C}"/>
-              </a:ext>
-            </a:extLst>
-          </p:cNvPr>
-          <p:cNvSpPr/>
-          <p:nvPr/>
-        </p:nvSpPr>
-        <p:spPr>
-          <a:xfrm>
-            <a:off x="9550658" y="750101"/>
-            <a:ext cx="1755200" cy="295381"/>
-          </a:xfrm>
-          <a:prstGeom prst="chevron">
-            <a:avLst/>
-          </a:prstGeom>
-          <a:solidFill>
-            <a:srgbClr val="D7DDE0">
-              <a:alpha val="90000"/>
-            </a:srgbClr>
-          </a:solidFill>
-          <a:ln w="12700">
-            <a:solidFill>
-              <a:srgbClr val="F7F5EF"/>
-            </a:solidFill>
-            <a:prstDash val="solid"/>
-          </a:ln>
-        </p:spPr>
-        <p:txBody>
-          <a:bodyPr/>
-          <a:lstStyle/>
-          <a:p>
-            <a:endParaRPr lang="en-US" sz="1100"/>
-          </a:p>
-        </p:txBody>
-      </p:sp>
-      <p:sp>
-        <p:nvSpPr>
-          <p:cNvPr id="2" name="Text 0">
-            <a:extLst>
-              <a:ext uri="{FF2B5EF4-FFF2-40B4-BE49-F238E27FC236}">
-                <a16:creationId xmlns:a16="http://schemas.microsoft.com/office/drawing/2014/main" id="{E60420E2-7817-31A2-688C-C20A85394ED2}"/>
-              </a:ext>
-            </a:extLst>
-          </p:cNvPr>
+          <p:cNvPr id="2" name="Text 0"/>
           <p:cNvSpPr/>
           <p:nvPr/>
         </p:nvSpPr>
@@ -21757,20 +22105,14 @@
       </p:sp>
       <p:sp>
         <p:nvSpPr>
-          <p:cNvPr id="3" name="Text 1">
-            <a:extLst>
-              <a:ext uri="{FF2B5EF4-FFF2-40B4-BE49-F238E27FC236}">
-                <a16:creationId xmlns:a16="http://schemas.microsoft.com/office/drawing/2014/main" id="{ECD29A6D-0FE5-648B-B869-5FB811676821}"/>
-              </a:ext>
-            </a:extLst>
-          </p:cNvPr>
+          <p:cNvPr id="3" name="Text 1"/>
           <p:cNvSpPr/>
           <p:nvPr/>
         </p:nvSpPr>
         <p:spPr>
           <a:xfrm>
             <a:off x="566928" y="512064"/>
-            <a:ext cx="5555413" cy="502920"/>
+            <a:ext cx="8046720" cy="502920"/>
           </a:xfrm>
           <a:prstGeom prst="rect">
             <a:avLst/>
@@ -21791,7 +22133,7 @@
               <a:buNone/>
             </a:pPr>
             <a:r>
-              <a:rPr lang="en-US" sz="2600" b="1" dirty="0" err="1">
+              <a:rPr lang="en-US" sz="2600" b="1" dirty="0">
                 <a:solidFill>
                   <a:srgbClr val="1F2528"/>
                 </a:solidFill>
@@ -21799,18 +22141,7 @@
                 <a:ea typeface="Aptos Display" pitchFamily="34" charset="-122"/>
                 <a:cs typeface="Aptos Display" pitchFamily="34" charset="-120"/>
               </a:rPr>
-              <a:t>Piczak</a:t>
-            </a:r>
-            <a:r>
-              <a:rPr lang="en-US" sz="2600" b="1" dirty="0">
-                <a:solidFill>
-                  <a:srgbClr val="1F2528"/>
-                </a:solidFill>
-                <a:latin typeface="Aptos Display" pitchFamily="34" charset="0"/>
-                <a:ea typeface="Aptos Display" pitchFamily="34" charset="-122"/>
-                <a:cs typeface="Aptos Display" pitchFamily="34" charset="-120"/>
-              </a:rPr>
-              <a:t> CNN Variations</a:t>
+              <a:t>Piczak CNN variations</a:t>
             </a:r>
             <a:endParaRPr lang="en-US" sz="2600" dirty="0"/>
           </a:p>
@@ -21818,13 +22149,7 @@
       </p:sp>
       <p:sp>
         <p:nvSpPr>
-          <p:cNvPr id="4" name="Shape 2">
-            <a:extLst>
-              <a:ext uri="{FF2B5EF4-FFF2-40B4-BE49-F238E27FC236}">
-                <a16:creationId xmlns:a16="http://schemas.microsoft.com/office/drawing/2014/main" id="{A759DC15-BE98-6DCA-7DFC-E643811B6EB0}"/>
-              </a:ext>
-            </a:extLst>
-          </p:cNvPr>
+          <p:cNvPr id="4" name="Shape 2"/>
           <p:cNvSpPr/>
           <p:nvPr/>
         </p:nvSpPr>
@@ -21854,70 +22179,14 @@
       </p:sp>
       <p:sp>
         <p:nvSpPr>
-          <p:cNvPr id="11" name="Text 9">
-            <a:extLst>
-              <a:ext uri="{FF2B5EF4-FFF2-40B4-BE49-F238E27FC236}">
-                <a16:creationId xmlns:a16="http://schemas.microsoft.com/office/drawing/2014/main" id="{261C9E63-63F3-1B22-58C5-AC2BD3DF53B7}"/>
-              </a:ext>
-            </a:extLst>
-          </p:cNvPr>
-          <p:cNvSpPr/>
-          <p:nvPr/>
-        </p:nvSpPr>
-        <p:spPr>
-          <a:xfrm>
-            <a:off x="11064240" y="6473952"/>
-            <a:ext cx="411480" cy="164592"/>
-          </a:xfrm>
-          <a:prstGeom prst="rect">
-            <a:avLst/>
-          </a:prstGeom>
-          <a:noFill/>
-          <a:ln/>
-        </p:spPr>
-        <p:txBody>
-          <a:bodyPr wrap="square" lIns="0" tIns="0" rIns="0" bIns="0" rtlCol="0" anchor="t">
-            <a:normAutofit/>
-          </a:bodyPr>
-          <a:lstStyle/>
-          <a:p>
-            <a:pPr marL="0" indent="0" algn="r">
-              <a:lnSpc>
-                <a:spcPct val="90000"/>
-              </a:lnSpc>
-              <a:buNone/>
-            </a:pPr>
-            <a:r>
-              <a:rPr lang="en-US" sz="750" dirty="0">
-                <a:solidFill>
-                  <a:srgbClr val="6B7176"/>
-                </a:solidFill>
-                <a:latin typeface="Aptos" pitchFamily="34" charset="0"/>
-                <a:ea typeface="Aptos" pitchFamily="34" charset="-122"/>
-                <a:cs typeface="Aptos" pitchFamily="34" charset="-120"/>
-              </a:rPr>
-              <a:t>05</a:t>
-            </a:r>
-            <a:endParaRPr lang="en-US" sz="750" dirty="0"/>
-          </a:p>
-        </p:txBody>
-      </p:sp>
-      <p:sp>
-        <p:nvSpPr>
-          <p:cNvPr id="13" name="Text 11">
-            <a:extLst>
-              <a:ext uri="{FF2B5EF4-FFF2-40B4-BE49-F238E27FC236}">
-                <a16:creationId xmlns:a16="http://schemas.microsoft.com/office/drawing/2014/main" id="{3BE12356-48EC-58D5-1826-5630A3D799DB}"/>
-              </a:ext>
-            </a:extLst>
-          </p:cNvPr>
-          <p:cNvSpPr/>
-          <p:nvPr/>
-        </p:nvSpPr>
-        <p:spPr>
-          <a:xfrm>
-            <a:off x="743871" y="2090533"/>
-            <a:ext cx="2926080" cy="182880"/>
+          <p:cNvPr id="14" name="Text 12"/>
+          <p:cNvSpPr/>
+          <p:nvPr/>
+        </p:nvSpPr>
+        <p:spPr>
+          <a:xfrm>
+            <a:off x="713232" y="1307592"/>
+            <a:ext cx="1097280" cy="164592"/>
           </a:xfrm>
           <a:prstGeom prst="rect">
             <a:avLst/>
@@ -21938,83 +22207,30 @@
               <a:buNone/>
             </a:pPr>
             <a:r>
-              <a:rPr lang="en-US" sz="950" b="1" dirty="0" err="1">
-                <a:solidFill>
-                  <a:srgbClr val="6B7176"/>
+              <a:rPr lang="en-US" sz="1000" b="1" dirty="0">
+                <a:solidFill>
+                  <a:srgbClr val="426E9E"/>
                 </a:solidFill>
                 <a:latin typeface="Aptos" pitchFamily="34" charset="0"/>
-              </a:rPr>
-              <a:t>Piczak</a:t>
-            </a:r>
-            <a:r>
-              <a:rPr lang="en-US" sz="950" b="1" dirty="0">
-                <a:solidFill>
-                  <a:srgbClr val="6B7176"/>
-                </a:solidFill>
-                <a:latin typeface="Aptos" pitchFamily="34" charset="0"/>
-              </a:rPr>
-              <a:t> Model Architecture</a:t>
-            </a:r>
-            <a:endParaRPr lang="en-US" sz="950" dirty="0"/>
-          </a:p>
-        </p:txBody>
-      </p:sp>
-      <p:sp>
-        <p:nvSpPr>
-          <p:cNvPr id="50" name="Shape 48">
-            <a:extLst>
-              <a:ext uri="{FF2B5EF4-FFF2-40B4-BE49-F238E27FC236}">
-                <a16:creationId xmlns:a16="http://schemas.microsoft.com/office/drawing/2014/main" id="{8D70525D-6212-E049-6EDE-7A21FDB9EDC9}"/>
-              </a:ext>
-            </a:extLst>
-          </p:cNvPr>
-          <p:cNvSpPr/>
-          <p:nvPr/>
-        </p:nvSpPr>
-        <p:spPr>
-          <a:xfrm>
-            <a:off x="6957490" y="4123666"/>
-            <a:ext cx="2011680" cy="914400"/>
-          </a:xfrm>
-          <a:prstGeom prst="rect">
-            <a:avLst/>
-          </a:prstGeom>
-          <a:solidFill>
-            <a:srgbClr val="FFFFFF">
-              <a:alpha val="98000"/>
-            </a:srgbClr>
-          </a:solidFill>
-          <a:ln w="17780">
-            <a:solidFill>
-              <a:srgbClr val="B65D3A"/>
-            </a:solidFill>
-            <a:prstDash val="solid"/>
-          </a:ln>
-        </p:spPr>
-        <p:txBody>
-          <a:bodyPr/>
-          <a:lstStyle/>
-          <a:p>
-            <a:endParaRPr lang="en-US"/>
-          </a:p>
-        </p:txBody>
-      </p:sp>
-      <p:sp>
-        <p:nvSpPr>
-          <p:cNvPr id="51" name="Text 49">
-            <a:extLst>
-              <a:ext uri="{FF2B5EF4-FFF2-40B4-BE49-F238E27FC236}">
-                <a16:creationId xmlns:a16="http://schemas.microsoft.com/office/drawing/2014/main" id="{769227F5-7BC0-0E36-61C0-EE9668B9A50A}"/>
-              </a:ext>
-            </a:extLst>
-          </p:cNvPr>
-          <p:cNvSpPr/>
-          <p:nvPr/>
-        </p:nvSpPr>
-        <p:spPr>
-          <a:xfrm>
-            <a:off x="7048930" y="4260826"/>
-            <a:ext cx="1828800" cy="329184"/>
+                <a:ea typeface="Aptos" pitchFamily="34" charset="-122"/>
+                <a:cs typeface="Aptos" pitchFamily="34" charset="-120"/>
+              </a:rPr>
+              <a:t>What changed?</a:t>
+            </a:r>
+            <a:endParaRPr lang="en-US" sz="1000" dirty="0"/>
+          </a:p>
+        </p:txBody>
+      </p:sp>
+      <p:sp>
+        <p:nvSpPr>
+          <p:cNvPr id="15" name="Text 13"/>
+          <p:cNvSpPr/>
+          <p:nvPr/>
+        </p:nvSpPr>
+        <p:spPr>
+          <a:xfrm>
+            <a:off x="713232" y="1554480"/>
+            <a:ext cx="5303520" cy="457200"/>
           </a:xfrm>
           <a:prstGeom prst="rect">
             <a:avLst/>
@@ -22024,7 +22240,47 @@
         </p:spPr>
         <p:txBody>
           <a:bodyPr wrap="square" lIns="0" tIns="0" rIns="0" bIns="0" rtlCol="0" anchor="t">
-            <a:normAutofit/>
+            <a:noAutofit/>
+          </a:bodyPr>
+          <a:lstStyle/>
+          <a:p>
+            <a:pPr>
+              <a:lnSpc>
+                <a:spcPct val="90000"/>
+              </a:lnSpc>
+            </a:pPr>
+            <a:r>
+              <a:rPr lang="en-US" sz="1200" dirty="0">
+                <a:solidFill>
+                  <a:srgbClr val="1F2528"/>
+                </a:solidFill>
+                <a:latin typeface="Aptos" pitchFamily="34" charset="0"/>
+              </a:rPr>
+              <a:t>Multiple iterations of hyperparameter tuning were performed to observe the impact of small changes to the original model.</a:t>
+            </a:r>
+          </a:p>
+        </p:txBody>
+      </p:sp>
+      <p:sp>
+        <p:nvSpPr>
+          <p:cNvPr id="16" name="Text 14"/>
+          <p:cNvSpPr/>
+          <p:nvPr/>
+        </p:nvSpPr>
+        <p:spPr>
+          <a:xfrm>
+            <a:off x="6574536" y="5309666"/>
+            <a:ext cx="1417320" cy="274320"/>
+          </a:xfrm>
+          <a:prstGeom prst="rect">
+            <a:avLst/>
+          </a:prstGeom>
+          <a:noFill/>
+          <a:ln/>
+        </p:spPr>
+        <p:txBody>
+          <a:bodyPr wrap="square" lIns="0" tIns="0" rIns="0" bIns="0" rtlCol="0" anchor="t">
+            <a:normAutofit fontScale="85000" lnSpcReduction="10000"/>
           </a:bodyPr>
           <a:lstStyle/>
           <a:p>
@@ -22035,36 +22291,30 @@
               <a:buNone/>
             </a:pPr>
             <a:r>
-              <a:rPr lang="en-US" sz="2100" b="1" dirty="0">
-                <a:solidFill>
-                  <a:srgbClr val="B65D3A"/>
+              <a:rPr lang="en-US" sz="1750" b="1" dirty="0">
+                <a:solidFill>
+                  <a:srgbClr val="17677D"/>
                 </a:solidFill>
                 <a:latin typeface="Aptos Display" pitchFamily="34" charset="0"/>
                 <a:ea typeface="Aptos Display" pitchFamily="34" charset="-122"/>
                 <a:cs typeface="Aptos Display" pitchFamily="34" charset="-120"/>
               </a:rPr>
-              <a:t>64.5%</a:t>
-            </a:r>
-            <a:endParaRPr lang="en-US" sz="2100" dirty="0"/>
-          </a:p>
-        </p:txBody>
-      </p:sp>
-      <p:sp>
-        <p:nvSpPr>
-          <p:cNvPr id="52" name="Text 50">
-            <a:extLst>
-              <a:ext uri="{FF2B5EF4-FFF2-40B4-BE49-F238E27FC236}">
-                <a16:creationId xmlns:a16="http://schemas.microsoft.com/office/drawing/2014/main" id="{E2A191DF-4607-D5A0-4C88-231D58306B1B}"/>
-              </a:ext>
-            </a:extLst>
-          </p:cNvPr>
-          <p:cNvSpPr/>
-          <p:nvPr/>
-        </p:nvSpPr>
-        <p:spPr>
-          <a:xfrm>
-            <a:off x="7067218" y="4654018"/>
-            <a:ext cx="1792224" cy="219456"/>
+              <a:t>10 condition runs</a:t>
+            </a:r>
+            <a:endParaRPr lang="en-US" sz="1750" dirty="0"/>
+          </a:p>
+        </p:txBody>
+      </p:sp>
+      <p:sp>
+        <p:nvSpPr>
+          <p:cNvPr id="17" name="Text 15"/>
+          <p:cNvSpPr/>
+          <p:nvPr/>
+        </p:nvSpPr>
+        <p:spPr>
+          <a:xfrm>
+            <a:off x="8129016" y="5309666"/>
+            <a:ext cx="1508760" cy="274320"/>
           </a:xfrm>
           <a:prstGeom prst="rect">
             <a:avLst/>
@@ -22074,7 +22324,7 @@
         </p:spPr>
         <p:txBody>
           <a:bodyPr wrap="square" lIns="0" tIns="0" rIns="0" bIns="0" rtlCol="0" anchor="t">
-            <a:normAutofit/>
+            <a:normAutofit fontScale="85000" lnSpcReduction="10000"/>
           </a:bodyPr>
           <a:lstStyle/>
           <a:p>
@@ -22085,76 +22335,30 @@
               <a:buNone/>
             </a:pPr>
             <a:r>
-              <a:rPr lang="en-US" sz="780" dirty="0">
-                <a:solidFill>
-                  <a:srgbClr val="6B7176"/>
-                </a:solidFill>
-                <a:latin typeface="Aptos" pitchFamily="34" charset="0"/>
-                <a:ea typeface="Aptos" pitchFamily="34" charset="-122"/>
-                <a:cs typeface="Aptos" pitchFamily="34" charset="-120"/>
-              </a:rPr>
-              <a:t>Piczak published LP clip-level reference</a:t>
-            </a:r>
-            <a:endParaRPr lang="en-US" sz="780" dirty="0"/>
-          </a:p>
-        </p:txBody>
-      </p:sp>
-      <p:sp>
-        <p:nvSpPr>
-          <p:cNvPr id="53" name="Shape 51">
-            <a:extLst>
-              <a:ext uri="{FF2B5EF4-FFF2-40B4-BE49-F238E27FC236}">
-                <a16:creationId xmlns:a16="http://schemas.microsoft.com/office/drawing/2014/main" id="{3BF93BF9-E4C7-1373-2D57-D5CE86B5ADE7}"/>
-              </a:ext>
-            </a:extLst>
-          </p:cNvPr>
-          <p:cNvSpPr/>
-          <p:nvPr/>
-        </p:nvSpPr>
-        <p:spPr>
-          <a:xfrm>
-            <a:off x="9216058" y="4123666"/>
-            <a:ext cx="1828800" cy="914400"/>
-          </a:xfrm>
-          <a:prstGeom prst="rect">
-            <a:avLst/>
-          </a:prstGeom>
-          <a:solidFill>
-            <a:srgbClr val="FFFFFF">
-              <a:alpha val="98000"/>
-            </a:srgbClr>
-          </a:solidFill>
-          <a:ln w="17780">
-            <a:solidFill>
-              <a:srgbClr val="426E9E"/>
-            </a:solidFill>
-            <a:prstDash val="solid"/>
-          </a:ln>
-        </p:spPr>
-        <p:txBody>
-          <a:bodyPr/>
-          <a:lstStyle/>
-          <a:p>
-            <a:endParaRPr lang="en-US"/>
-          </a:p>
-        </p:txBody>
-      </p:sp>
-      <p:sp>
-        <p:nvSpPr>
-          <p:cNvPr id="54" name="Text 52">
-            <a:extLst>
-              <a:ext uri="{FF2B5EF4-FFF2-40B4-BE49-F238E27FC236}">
-                <a16:creationId xmlns:a16="http://schemas.microsoft.com/office/drawing/2014/main" id="{DA57CDD9-6788-D438-837E-46B5F8376456}"/>
-              </a:ext>
-            </a:extLst>
-          </p:cNvPr>
-          <p:cNvSpPr/>
-          <p:nvPr/>
-        </p:nvSpPr>
-        <p:spPr>
-          <a:xfrm>
-            <a:off x="9307498" y="4260826"/>
-            <a:ext cx="1645920" cy="329184"/>
+              <a:rPr lang="en-US" sz="1750" b="1" dirty="0">
+                <a:solidFill>
+                  <a:srgbClr val="426E9E"/>
+                </a:solidFill>
+                <a:latin typeface="Aptos Display" pitchFamily="34" charset="0"/>
+                <a:ea typeface="Aptos Display" pitchFamily="34" charset="-122"/>
+                <a:cs typeface="Aptos Display" pitchFamily="34" charset="-120"/>
+              </a:rPr>
+              <a:t>50 fold-level runs</a:t>
+            </a:r>
+            <a:endParaRPr lang="en-US" sz="1750" dirty="0"/>
+          </a:p>
+        </p:txBody>
+      </p:sp>
+      <p:sp>
+        <p:nvSpPr>
+          <p:cNvPr id="18" name="Text 16"/>
+          <p:cNvSpPr/>
+          <p:nvPr/>
+        </p:nvSpPr>
+        <p:spPr>
+          <a:xfrm>
+            <a:off x="9774936" y="5309666"/>
+            <a:ext cx="1737360" cy="274320"/>
           </a:xfrm>
           <a:prstGeom prst="rect">
             <a:avLst/>
@@ -22164,7 +22368,7 @@
         </p:spPr>
         <p:txBody>
           <a:bodyPr wrap="square" lIns="0" tIns="0" rIns="0" bIns="0" rtlCol="0" anchor="t">
-            <a:normAutofit/>
+            <a:normAutofit fontScale="77500" lnSpcReduction="20000"/>
           </a:bodyPr>
           <a:lstStyle/>
           <a:p>
@@ -22175,36 +22379,30 @@
               <a:buNone/>
             </a:pPr>
             <a:r>
-              <a:rPr lang="en-US" sz="2100" b="1" dirty="0">
-                <a:solidFill>
-                  <a:srgbClr val="426E9E"/>
+              <a:rPr lang="en-US" sz="1750" b="1" dirty="0">
+                <a:solidFill>
+                  <a:srgbClr val="B65D3A"/>
                 </a:solidFill>
                 <a:latin typeface="Aptos Display" pitchFamily="34" charset="0"/>
                 <a:ea typeface="Aptos Display" pitchFamily="34" charset="-122"/>
                 <a:cs typeface="Aptos Display" pitchFamily="34" charset="-120"/>
               </a:rPr>
-              <a:t>63.5%</a:t>
-            </a:r>
-            <a:endParaRPr lang="en-US" sz="2100" dirty="0"/>
-          </a:p>
-        </p:txBody>
-      </p:sp>
-      <p:sp>
-        <p:nvSpPr>
-          <p:cNvPr id="55" name="Text 53">
-            <a:extLst>
-              <a:ext uri="{FF2B5EF4-FFF2-40B4-BE49-F238E27FC236}">
-                <a16:creationId xmlns:a16="http://schemas.microsoft.com/office/drawing/2014/main" id="{20DA95E7-C68D-FA67-DEA6-53AF1E5D738F}"/>
-              </a:ext>
-            </a:extLst>
-          </p:cNvPr>
-          <p:cNvSpPr/>
-          <p:nvPr/>
-        </p:nvSpPr>
-        <p:spPr>
-          <a:xfrm>
-            <a:off x="9325786" y="4654018"/>
-            <a:ext cx="1609344" cy="219456"/>
+              <a:t>+3.4 pts best observed</a:t>
+            </a:r>
+            <a:endParaRPr lang="en-US" sz="1750" dirty="0"/>
+          </a:p>
+        </p:txBody>
+      </p:sp>
+      <p:sp>
+        <p:nvSpPr>
+          <p:cNvPr id="20" name="Text 18"/>
+          <p:cNvSpPr/>
+          <p:nvPr/>
+        </p:nvSpPr>
+        <p:spPr>
+          <a:xfrm>
+            <a:off x="713232" y="2321628"/>
+            <a:ext cx="1645920" cy="164592"/>
           </a:xfrm>
           <a:prstGeom prst="rect">
             <a:avLst/>
@@ -22218,640 +22416,69 @@
           </a:bodyPr>
           <a:lstStyle/>
           <a:p>
-            <a:pPr marL="0" indent="0" algn="ctr">
+            <a:pPr>
               <a:lnSpc>
                 <a:spcPct val="90000"/>
               </a:lnSpc>
-              <a:buNone/>
             </a:pPr>
             <a:r>
-              <a:rPr lang="en-US" sz="780" dirty="0">
-                <a:solidFill>
-                  <a:srgbClr val="6B7176"/>
+              <a:rPr lang="en-US" sz="1000" b="1" dirty="0">
+                <a:solidFill>
+                  <a:srgbClr val="426E9E"/>
                 </a:solidFill>
                 <a:latin typeface="Aptos" pitchFamily="34" charset="0"/>
-                <a:ea typeface="Aptos" pitchFamily="34" charset="-122"/>
-                <a:cs typeface="Aptos" pitchFamily="34" charset="-120"/>
-              </a:rPr>
-              <a:t>team corrected baseline rerun</a:t>
-            </a:r>
-            <a:endParaRPr lang="en-US" sz="780" dirty="0"/>
-          </a:p>
-        </p:txBody>
-      </p:sp>
-      <p:sp>
-        <p:nvSpPr>
-          <p:cNvPr id="56" name="Text 54">
-            <a:extLst>
-              <a:ext uri="{FF2B5EF4-FFF2-40B4-BE49-F238E27FC236}">
-                <a16:creationId xmlns:a16="http://schemas.microsoft.com/office/drawing/2014/main" id="{E319F404-6620-2A94-CFC9-8B5ADAF92750}"/>
-              </a:ext>
-            </a:extLst>
-          </p:cNvPr>
-          <p:cNvSpPr/>
-          <p:nvPr/>
-        </p:nvSpPr>
-        <p:spPr>
-          <a:xfrm>
-            <a:off x="6957490" y="5129506"/>
-            <a:ext cx="4389120" cy="274320"/>
-          </a:xfrm>
-          <a:prstGeom prst="rect">
-            <a:avLst/>
-          </a:prstGeom>
-          <a:noFill/>
-          <a:ln/>
-        </p:spPr>
-        <p:txBody>
-          <a:bodyPr wrap="square" lIns="0" tIns="0" rIns="0" bIns="0" rtlCol="0" anchor="t">
-            <a:normAutofit/>
-          </a:bodyPr>
-          <a:lstStyle/>
-          <a:p>
-            <a:pPr marL="0" indent="0" algn="l">
-              <a:lnSpc>
-                <a:spcPct val="82000"/>
-              </a:lnSpc>
-              <a:buNone/>
-            </a:pPr>
-            <a:r>
-              <a:rPr lang="en-US" sz="850" i="1" dirty="0">
-                <a:solidFill>
-                  <a:srgbClr val="6B7176"/>
-                </a:solidFill>
-                <a:latin typeface="Aptos" pitchFamily="34" charset="0"/>
-                <a:ea typeface="Aptos" pitchFamily="34" charset="-122"/>
-                <a:cs typeface="Aptos" pitchFamily="34" charset="-120"/>
-              </a:rPr>
-              <a:t>Baseline result closely match those found by </a:t>
-            </a:r>
-            <a:r>
-              <a:rPr lang="en-US" sz="850" i="1" dirty="0" err="1">
-                <a:solidFill>
-                  <a:srgbClr val="6B7176"/>
-                </a:solidFill>
-                <a:latin typeface="Aptos" pitchFamily="34" charset="0"/>
-                <a:ea typeface="Aptos" pitchFamily="34" charset="-122"/>
-                <a:cs typeface="Aptos" pitchFamily="34" charset="-120"/>
-              </a:rPr>
-              <a:t>Piczak</a:t>
-            </a:r>
-            <a:endParaRPr lang="en-US" sz="850" dirty="0"/>
-          </a:p>
-        </p:txBody>
-      </p:sp>
-      <p:sp>
-        <p:nvSpPr>
-          <p:cNvPr id="57" name="Text 55">
-            <a:extLst>
-              <a:ext uri="{FF2B5EF4-FFF2-40B4-BE49-F238E27FC236}">
-                <a16:creationId xmlns:a16="http://schemas.microsoft.com/office/drawing/2014/main" id="{A673375A-8875-57A8-F0A6-58606C9A2E38}"/>
-              </a:ext>
-            </a:extLst>
-          </p:cNvPr>
-          <p:cNvSpPr/>
-          <p:nvPr/>
-        </p:nvSpPr>
-        <p:spPr>
-          <a:xfrm>
-            <a:off x="11064240" y="6473952"/>
-            <a:ext cx="411480" cy="164592"/>
-          </a:xfrm>
-          <a:prstGeom prst="rect">
-            <a:avLst/>
-          </a:prstGeom>
-          <a:noFill/>
-          <a:ln/>
-        </p:spPr>
-        <p:txBody>
-          <a:bodyPr wrap="square" lIns="0" tIns="0" rIns="0" bIns="0" rtlCol="0" anchor="t">
-            <a:normAutofit/>
-          </a:bodyPr>
-          <a:lstStyle/>
-          <a:p>
-            <a:pPr marL="0" indent="0" algn="r">
-              <a:lnSpc>
-                <a:spcPct val="90000"/>
-              </a:lnSpc>
-              <a:buNone/>
-            </a:pPr>
-            <a:r>
-              <a:rPr lang="en-US" sz="750" dirty="0">
-                <a:solidFill>
-                  <a:srgbClr val="6B7176"/>
-                </a:solidFill>
-                <a:latin typeface="Aptos" pitchFamily="34" charset="0"/>
-                <a:ea typeface="Aptos" pitchFamily="34" charset="-122"/>
-                <a:cs typeface="Aptos" pitchFamily="34" charset="-120"/>
-              </a:rPr>
-              <a:t>05</a:t>
-            </a:r>
-            <a:endParaRPr lang="en-US" sz="750" dirty="0"/>
-          </a:p>
-        </p:txBody>
-      </p:sp>
-      <p:pic>
-        <p:nvPicPr>
-          <p:cNvPr id="65" name="Picture 2" descr="Cornell University Logo, symbol, meaning, history, PNG, brand">
-            <a:extLst>
-              <a:ext uri="{FF2B5EF4-FFF2-40B4-BE49-F238E27FC236}">
-                <a16:creationId xmlns:a16="http://schemas.microsoft.com/office/drawing/2014/main" id="{58C2C611-69D6-CF84-9F3C-57B825D2DA8F}"/>
-              </a:ext>
-            </a:extLst>
-          </p:cNvPr>
-          <p:cNvPicPr>
-            <a:picLocks noChangeAspect="1" noChangeArrowheads="1"/>
-          </p:cNvPicPr>
-          <p:nvPr/>
-        </p:nvPicPr>
-        <p:blipFill rotWithShape="1">
-          <a:blip r:embed="rId3">
-            <a:extLst>
-              <a:ext uri="{28A0092B-C50C-407E-A947-70E740481C1C}">
-                <a14:useLocalDpi xmlns:a14="http://schemas.microsoft.com/office/drawing/2010/main" val="0"/>
-              </a:ext>
-            </a:extLst>
-          </a:blip>
-          <a:srcRect l="15934" r="15589"/>
-          <a:stretch/>
-        </p:blipFill>
-        <p:spPr bwMode="auto">
-          <a:xfrm>
-            <a:off x="11320507" y="147128"/>
-            <a:ext cx="863884" cy="709633"/>
-          </a:xfrm>
-          <a:prstGeom prst="rect">
-            <a:avLst/>
-          </a:prstGeom>
-          <a:noFill/>
-          <a:extLst>
-            <a:ext uri="{909E8E84-426E-40DD-AFC4-6F175D3DCCD1}">
-              <a14:hiddenFill xmlns:a14="http://schemas.microsoft.com/office/drawing/2010/main">
-                <a:solidFill>
-                  <a:srgbClr val="FFFFFF"/>
-                </a:solidFill>
-              </a14:hiddenFill>
-            </a:ext>
-          </a:extLst>
-        </p:spPr>
-      </p:pic>
-      <p:sp>
-        <p:nvSpPr>
-          <p:cNvPr id="66" name="Shape 19">
-            <a:extLst>
-              <a:ext uri="{FF2B5EF4-FFF2-40B4-BE49-F238E27FC236}">
-                <a16:creationId xmlns:a16="http://schemas.microsoft.com/office/drawing/2014/main" id="{060EE3F5-7CC0-B1C2-8951-2C79B6D16C7C}"/>
-              </a:ext>
-            </a:extLst>
-          </p:cNvPr>
-          <p:cNvSpPr/>
-          <p:nvPr/>
-        </p:nvSpPr>
-        <p:spPr>
-          <a:xfrm>
-            <a:off x="6237447" y="751408"/>
-            <a:ext cx="1809206" cy="295381"/>
-          </a:xfrm>
-          <a:prstGeom prst="chevron">
-            <a:avLst/>
-          </a:prstGeom>
-          <a:solidFill>
-            <a:srgbClr val="426E9E"/>
-          </a:solidFill>
-          <a:ln w="12700">
-            <a:solidFill>
-              <a:srgbClr val="F7F5EF"/>
-            </a:solidFill>
-            <a:prstDash val="solid"/>
-          </a:ln>
-        </p:spPr>
-        <p:txBody>
-          <a:bodyPr/>
-          <a:lstStyle/>
-          <a:p>
-            <a:endParaRPr lang="en-US" sz="1100" dirty="0"/>
-          </a:p>
-        </p:txBody>
-      </p:sp>
-      <p:sp>
-        <p:nvSpPr>
-          <p:cNvPr id="67" name="Text 20">
-            <a:extLst>
-              <a:ext uri="{FF2B5EF4-FFF2-40B4-BE49-F238E27FC236}">
-                <a16:creationId xmlns:a16="http://schemas.microsoft.com/office/drawing/2014/main" id="{C1BC8EE8-4D56-2CA8-D8DF-72F051430316}"/>
-              </a:ext>
-            </a:extLst>
-          </p:cNvPr>
-          <p:cNvSpPr/>
-          <p:nvPr/>
-        </p:nvSpPr>
-        <p:spPr>
-          <a:xfrm>
-            <a:off x="6287692" y="833886"/>
-            <a:ext cx="1597682" cy="75563"/>
-          </a:xfrm>
-          <a:prstGeom prst="rect">
-            <a:avLst/>
-          </a:prstGeom>
-          <a:noFill/>
-          <a:ln/>
-        </p:spPr>
-        <p:txBody>
-          <a:bodyPr wrap="square" lIns="0" tIns="0" rIns="0" bIns="0" rtlCol="0" anchor="t">
-            <a:normAutofit fontScale="92500" lnSpcReduction="20000"/>
-          </a:bodyPr>
-          <a:lstStyle/>
-          <a:p>
-            <a:pPr marL="0" indent="0" algn="ctr">
-              <a:lnSpc>
-                <a:spcPct val="90000"/>
-              </a:lnSpc>
-              <a:buNone/>
-            </a:pPr>
-            <a:r>
-              <a:rPr lang="en-US" sz="700" b="1" dirty="0">
-                <a:solidFill>
-                  <a:srgbClr val="FFFFFF"/>
-                </a:solidFill>
-                <a:latin typeface="Aptos" pitchFamily="34" charset="0"/>
-                <a:ea typeface="Aptos" pitchFamily="34" charset="-122"/>
-                <a:cs typeface="Aptos" pitchFamily="34" charset="-120"/>
-              </a:rPr>
-              <a:t>Training from scratch</a:t>
-            </a:r>
-            <a:endParaRPr lang="en-US" sz="700" dirty="0"/>
-          </a:p>
-        </p:txBody>
-      </p:sp>
-      <p:sp>
-        <p:nvSpPr>
-          <p:cNvPr id="68" name="Text 21">
-            <a:extLst>
-              <a:ext uri="{FF2B5EF4-FFF2-40B4-BE49-F238E27FC236}">
-                <a16:creationId xmlns:a16="http://schemas.microsoft.com/office/drawing/2014/main" id="{E5BDE706-25CB-97DE-3CA3-2D405E88A833}"/>
-              </a:ext>
-            </a:extLst>
-          </p:cNvPr>
-          <p:cNvSpPr/>
-          <p:nvPr/>
-        </p:nvSpPr>
-        <p:spPr>
-          <a:xfrm>
-            <a:off x="6295809" y="928966"/>
-            <a:ext cx="1597682" cy="58389"/>
-          </a:xfrm>
-          <a:prstGeom prst="rect">
-            <a:avLst/>
-          </a:prstGeom>
-          <a:noFill/>
-          <a:ln/>
-        </p:spPr>
-        <p:txBody>
-          <a:bodyPr wrap="square" lIns="0" tIns="0" rIns="0" bIns="0" rtlCol="0" anchor="t">
-            <a:normAutofit fontScale="92500" lnSpcReduction="20000"/>
-          </a:bodyPr>
-          <a:lstStyle/>
-          <a:p>
-            <a:pPr marL="0" indent="0" algn="ctr">
-              <a:lnSpc>
-                <a:spcPct val="90000"/>
-              </a:lnSpc>
-              <a:buNone/>
-            </a:pPr>
-            <a:r>
-              <a:rPr lang="en-US" sz="500" dirty="0" err="1">
-                <a:solidFill>
-                  <a:srgbClr val="D9D9D9"/>
-                </a:solidFill>
-                <a:latin typeface="Aptos" pitchFamily="34" charset="0"/>
-              </a:rPr>
-              <a:t>Piczak</a:t>
-            </a:r>
-            <a:r>
-              <a:rPr lang="en-US" sz="500" dirty="0">
-                <a:solidFill>
-                  <a:srgbClr val="D9D9D9"/>
-                </a:solidFill>
-                <a:latin typeface="Aptos" pitchFamily="34" charset="0"/>
-              </a:rPr>
-              <a:t> CNN | </a:t>
-            </a:r>
-            <a:r>
-              <a:rPr lang="en-US" sz="500" b="1" dirty="0">
-                <a:solidFill>
-                  <a:srgbClr val="FFFFFF"/>
-                </a:solidFill>
-                <a:latin typeface="Aptos" pitchFamily="34" charset="0"/>
-              </a:rPr>
-              <a:t>Variations</a:t>
-            </a:r>
-            <a:r>
-              <a:rPr lang="en-US" sz="500" dirty="0">
-                <a:solidFill>
-                  <a:srgbClr val="D9D9D9"/>
-                </a:solidFill>
-                <a:latin typeface="Aptos" pitchFamily="34" charset="0"/>
-              </a:rPr>
-              <a:t> </a:t>
-            </a:r>
-            <a:r>
-              <a:rPr lang="en-US" sz="500" dirty="0">
-                <a:solidFill>
-                  <a:srgbClr val="D9D9D9"/>
-                </a:solidFill>
-                <a:latin typeface="Aptos" pitchFamily="34" charset="0"/>
-                <a:ea typeface="Aptos" pitchFamily="34" charset="-122"/>
-                <a:cs typeface="Aptos" pitchFamily="34" charset="-120"/>
-              </a:rPr>
-              <a:t>| LSTM</a:t>
-            </a:r>
-            <a:endParaRPr lang="en-US" sz="500" dirty="0">
-              <a:solidFill>
-                <a:srgbClr val="D9D9D9"/>
-              </a:solidFill>
-            </a:endParaRPr>
-          </a:p>
-        </p:txBody>
-      </p:sp>
-      <p:sp>
-        <p:nvSpPr>
-          <p:cNvPr id="69" name="Shape 22">
-            <a:extLst>
-              <a:ext uri="{FF2B5EF4-FFF2-40B4-BE49-F238E27FC236}">
-                <a16:creationId xmlns:a16="http://schemas.microsoft.com/office/drawing/2014/main" id="{78F714B2-41FC-2DD0-C9FB-20FF702F806C}"/>
-              </a:ext>
-            </a:extLst>
-          </p:cNvPr>
-          <p:cNvSpPr/>
-          <p:nvPr/>
-        </p:nvSpPr>
-        <p:spPr>
-          <a:xfrm>
-            <a:off x="7891484" y="750102"/>
-            <a:ext cx="1809206" cy="295381"/>
-          </a:xfrm>
-          <a:prstGeom prst="chevron">
-            <a:avLst/>
-          </a:prstGeom>
-          <a:solidFill>
-            <a:srgbClr val="D7DDE0">
-              <a:alpha val="90000"/>
-            </a:srgbClr>
-          </a:solidFill>
-          <a:ln w="12700">
-            <a:solidFill>
-              <a:srgbClr val="F7F5EF"/>
-            </a:solidFill>
-            <a:prstDash val="solid"/>
-          </a:ln>
-        </p:spPr>
-        <p:txBody>
-          <a:bodyPr/>
-          <a:lstStyle/>
-          <a:p>
-            <a:endParaRPr lang="en-US" sz="1100"/>
-          </a:p>
-        </p:txBody>
-      </p:sp>
-      <p:sp>
-        <p:nvSpPr>
-          <p:cNvPr id="70" name="Text 23">
-            <a:extLst>
-              <a:ext uri="{FF2B5EF4-FFF2-40B4-BE49-F238E27FC236}">
-                <a16:creationId xmlns:a16="http://schemas.microsoft.com/office/drawing/2014/main" id="{D4781922-827F-87D9-893D-C6A2851C66B8}"/>
-              </a:ext>
-            </a:extLst>
-          </p:cNvPr>
-          <p:cNvSpPr/>
-          <p:nvPr/>
-        </p:nvSpPr>
-        <p:spPr>
-          <a:xfrm>
-            <a:off x="7963330" y="839252"/>
-            <a:ext cx="1597682" cy="75563"/>
-          </a:xfrm>
-          <a:prstGeom prst="rect">
-            <a:avLst/>
-          </a:prstGeom>
-          <a:noFill/>
-          <a:ln/>
-        </p:spPr>
-        <p:txBody>
-          <a:bodyPr wrap="square" lIns="0" tIns="0" rIns="0" bIns="0" rtlCol="0" anchor="t">
-            <a:normAutofit fontScale="92500" lnSpcReduction="20000"/>
-          </a:bodyPr>
-          <a:lstStyle/>
-          <a:p>
-            <a:pPr marL="0" indent="0" algn="ctr">
-              <a:lnSpc>
-                <a:spcPct val="90000"/>
-              </a:lnSpc>
-              <a:buNone/>
-            </a:pPr>
-            <a:r>
-              <a:rPr lang="en-US" sz="700" b="1" dirty="0">
-                <a:solidFill>
-                  <a:srgbClr val="30383D"/>
-                </a:solidFill>
-                <a:latin typeface="Aptos" pitchFamily="34" charset="0"/>
-                <a:ea typeface="Aptos" pitchFamily="34" charset="-122"/>
-                <a:cs typeface="Aptos" pitchFamily="34" charset="-120"/>
-              </a:rPr>
-              <a:t>Transfer learning: pretrained CNN</a:t>
-            </a:r>
-            <a:endParaRPr lang="en-US" sz="700" dirty="0"/>
-          </a:p>
-        </p:txBody>
-      </p:sp>
-      <p:sp>
-        <p:nvSpPr>
-          <p:cNvPr id="71" name="Text 24">
-            <a:extLst>
-              <a:ext uri="{FF2B5EF4-FFF2-40B4-BE49-F238E27FC236}">
-                <a16:creationId xmlns:a16="http://schemas.microsoft.com/office/drawing/2014/main" id="{5F3CA679-E6E9-A601-6D53-AE17EB85F566}"/>
-              </a:ext>
-            </a:extLst>
-          </p:cNvPr>
-          <p:cNvSpPr/>
-          <p:nvPr/>
-        </p:nvSpPr>
-        <p:spPr>
-          <a:xfrm>
-            <a:off x="7984136" y="941012"/>
-            <a:ext cx="1597682" cy="58389"/>
-          </a:xfrm>
-          <a:prstGeom prst="rect">
-            <a:avLst/>
-          </a:prstGeom>
-          <a:noFill/>
-          <a:ln/>
-        </p:spPr>
-        <p:txBody>
-          <a:bodyPr wrap="square" lIns="0" tIns="0" rIns="0" bIns="0" rtlCol="0" anchor="t">
-            <a:normAutofit fontScale="92500" lnSpcReduction="20000"/>
-          </a:bodyPr>
-          <a:lstStyle/>
-          <a:p>
-            <a:pPr marL="0" indent="0" algn="ctr">
-              <a:lnSpc>
-                <a:spcPct val="90000"/>
-              </a:lnSpc>
-              <a:buNone/>
-            </a:pPr>
-            <a:r>
-              <a:rPr lang="en-US" sz="500" dirty="0">
-                <a:solidFill>
-                  <a:srgbClr val="6B7176"/>
-                </a:solidFill>
-                <a:latin typeface="Aptos" pitchFamily="34" charset="0"/>
-                <a:ea typeface="Aptos" pitchFamily="34" charset="-122"/>
-                <a:cs typeface="Aptos" pitchFamily="34" charset="-120"/>
-              </a:rPr>
-              <a:t>VGGish | YAMNet</a:t>
-            </a:r>
-            <a:endParaRPr lang="en-US" sz="500" dirty="0"/>
-          </a:p>
-        </p:txBody>
-      </p:sp>
-      <p:sp>
-        <p:nvSpPr>
-          <p:cNvPr id="73" name="Text 26">
-            <a:extLst>
-              <a:ext uri="{FF2B5EF4-FFF2-40B4-BE49-F238E27FC236}">
-                <a16:creationId xmlns:a16="http://schemas.microsoft.com/office/drawing/2014/main" id="{62D1D5A1-1040-280B-75DE-73B4E82A16F0}"/>
-              </a:ext>
-            </a:extLst>
-          </p:cNvPr>
-          <p:cNvSpPr/>
-          <p:nvPr/>
-        </p:nvSpPr>
-        <p:spPr>
-          <a:xfrm>
-            <a:off x="9657605" y="848441"/>
-            <a:ext cx="1597682" cy="75563"/>
-          </a:xfrm>
-          <a:prstGeom prst="rect">
-            <a:avLst/>
-          </a:prstGeom>
-          <a:noFill/>
-          <a:ln/>
-        </p:spPr>
-        <p:txBody>
-          <a:bodyPr wrap="square" lIns="0" tIns="0" rIns="0" bIns="0" rtlCol="0" anchor="t">
-            <a:normAutofit fontScale="92500" lnSpcReduction="20000"/>
-          </a:bodyPr>
-          <a:lstStyle/>
-          <a:p>
-            <a:pPr marL="0" indent="0" algn="ctr">
-              <a:lnSpc>
-                <a:spcPct val="90000"/>
-              </a:lnSpc>
-              <a:buNone/>
-            </a:pPr>
-            <a:r>
-              <a:rPr lang="en-US" sz="700" b="1" dirty="0">
-                <a:solidFill>
-                  <a:srgbClr val="30383D"/>
-                </a:solidFill>
-                <a:latin typeface="Aptos" pitchFamily="34" charset="0"/>
-                <a:ea typeface="Aptos" pitchFamily="34" charset="-122"/>
-                <a:cs typeface="Aptos" pitchFamily="34" charset="-120"/>
-              </a:rPr>
-              <a:t>Transfer learning: pretrained transformers</a:t>
-            </a:r>
-            <a:endParaRPr lang="en-US" sz="700" dirty="0"/>
-          </a:p>
-        </p:txBody>
-      </p:sp>
-      <p:sp>
-        <p:nvSpPr>
-          <p:cNvPr id="74" name="Text 27">
-            <a:extLst>
-              <a:ext uri="{FF2B5EF4-FFF2-40B4-BE49-F238E27FC236}">
-                <a16:creationId xmlns:a16="http://schemas.microsoft.com/office/drawing/2014/main" id="{0E12CE33-B404-7A3D-0B3F-8BB11A36DC03}"/>
-              </a:ext>
-            </a:extLst>
-          </p:cNvPr>
-          <p:cNvSpPr/>
-          <p:nvPr/>
-        </p:nvSpPr>
-        <p:spPr>
-          <a:xfrm>
-            <a:off x="9657605" y="944489"/>
-            <a:ext cx="1662902" cy="107931"/>
-          </a:xfrm>
-          <a:prstGeom prst="rect">
-            <a:avLst/>
-          </a:prstGeom>
-          <a:noFill/>
-          <a:ln/>
-        </p:spPr>
-        <p:txBody>
-          <a:bodyPr wrap="square" lIns="0" tIns="0" rIns="0" bIns="0" rtlCol="0" anchor="t">
-            <a:normAutofit/>
-          </a:bodyPr>
-          <a:lstStyle/>
-          <a:p>
-            <a:pPr marL="0" indent="0" algn="ctr">
-              <a:lnSpc>
-                <a:spcPct val="90000"/>
-              </a:lnSpc>
-              <a:buNone/>
-            </a:pPr>
-            <a:r>
-              <a:rPr lang="en-US" sz="500" dirty="0">
-                <a:solidFill>
-                  <a:srgbClr val="6B7176"/>
-                </a:solidFill>
-                <a:latin typeface="Aptos" pitchFamily="34" charset="0"/>
-                <a:ea typeface="Aptos" pitchFamily="34" charset="-122"/>
-                <a:cs typeface="Aptos" pitchFamily="34" charset="-120"/>
-              </a:rPr>
-              <a:t>AST | BEATs</a:t>
-            </a:r>
-            <a:endParaRPr lang="en-US" sz="500" dirty="0"/>
+              </a:rPr>
+              <a:t>Variation matrix</a:t>
+            </a:r>
           </a:p>
         </p:txBody>
       </p:sp>
       <p:graphicFrame>
         <p:nvGraphicFramePr>
-          <p:cNvPr id="77" name="Table 0">
-            <a:extLst>
-              <a:ext uri="{FF2B5EF4-FFF2-40B4-BE49-F238E27FC236}">
-                <a16:creationId xmlns:a16="http://schemas.microsoft.com/office/drawing/2014/main" id="{75A08E96-1E5C-C263-FEA3-B7269A9F5236}"/>
-              </a:ext>
-            </a:extLst>
-          </p:cNvPr>
+          <p:cNvPr id="21" name="Table 0"/>
           <p:cNvGraphicFramePr>
             <a:graphicFrameLocks noGrp="1"/>
           </p:cNvGraphicFramePr>
-          <p:nvPr/>
+          <p:nvPr>
+            <p:extLst>
+              <p:ext uri="{D42A27DB-BD31-4B8C-83A1-F6EECF244321}">
+                <p14:modId xmlns:p14="http://schemas.microsoft.com/office/powerpoint/2010/main" val="279914698"/>
+              </p:ext>
+            </p:extLst>
+          </p:nvPr>
         </p:nvGraphicFramePr>
         <p:xfrm>
-          <a:off x="694942" y="2368295"/>
-          <a:ext cx="4434151" cy="1713738"/>
+          <a:off x="713232" y="2595948"/>
+          <a:ext cx="5257800" cy="1600200"/>
         </p:xfrm>
         <a:graphic>
           <a:graphicData uri="http://schemas.openxmlformats.org/drawingml/2006/table">
             <a:tbl>
               <a:tblPr/>
               <a:tblGrid>
-                <a:gridCol w="1058235">
+                <a:gridCol w="1325880">
                   <a:extLst>
                     <a:ext uri="{9D8B030D-6E8A-4147-A177-3AD203B41FA5}">
                       <a16:colId xmlns:a16="http://schemas.microsoft.com/office/drawing/2014/main" val="20000"/>
                     </a:ext>
                   </a:extLst>
                 </a:gridCol>
-                <a:gridCol w="3375916">
+                <a:gridCol w="2240280">
                   <a:extLst>
                     <a:ext uri="{9D8B030D-6E8A-4147-A177-3AD203B41FA5}">
                       <a16:colId xmlns:a16="http://schemas.microsoft.com/office/drawing/2014/main" val="20001"/>
                     </a:ext>
                   </a:extLst>
                 </a:gridCol>
+                <a:gridCol w="1691640">
+                  <a:extLst>
+                    <a:ext uri="{9D8B030D-6E8A-4147-A177-3AD203B41FA5}">
+                      <a16:colId xmlns:a16="http://schemas.microsoft.com/office/drawing/2014/main" val="20002"/>
+                    </a:ext>
+                  </a:extLst>
+                </a:gridCol>
               </a:tblGrid>
-              <a:tr h="144705">
+              <a:tr h="320040">
                 <a:tc>
                   <a:txBody>
                     <a:bodyPr/>
@@ -22861,14 +22488,21 @@
                         <a:buNone/>
                       </a:pPr>
                       <a:r>
-                        <a:rPr lang="en-US" sz="1030" b="1" dirty="0">
+                        <a:rPr lang="en-US" sz="715" b="1" dirty="0">
                           <a:solidFill>
                             <a:srgbClr val="FFFFFF"/>
                           </a:solidFill>
+                          <a:latin typeface="Aptos" pitchFamily="34" charset="0"/>
+                          <a:ea typeface="Aptos" pitchFamily="34" charset="-122"/>
+                          <a:cs typeface="Aptos" pitchFamily="34" charset="-120"/>
                         </a:rPr>
-                        <a:t>Step</a:t>
+                        <a:t>Dimension</a:t>
                       </a:r>
-                      <a:endParaRPr lang="en-US" sz="1030" dirty="0"/>
+                      <a:endParaRPr lang="en-US" sz="715" dirty="0">
+                        <a:latin typeface="Aptos" charset="0"/>
+                        <a:ea typeface="Aptos" charset="0"/>
+                        <a:cs typeface="Aptos" charset="0"/>
+                      </a:endParaRPr>
                     </a:p>
                   </a:txBody>
                   <a:tcPr marL="50292" marR="50292" marT="50292" marB="50292">
@@ -22922,14 +22556,89 @@
                         <a:buNone/>
                       </a:pPr>
                       <a:r>
-                        <a:rPr lang="en-US" sz="1030" b="1" dirty="0">
+                        <a:rPr lang="en-US" sz="715" b="1" dirty="0">
                           <a:solidFill>
                             <a:srgbClr val="FFFFFF"/>
                           </a:solidFill>
+                          <a:latin typeface="Aptos" pitchFamily="34" charset="0"/>
+                          <a:ea typeface="Aptos" pitchFamily="34" charset="-122"/>
+                          <a:cs typeface="Aptos" pitchFamily="34" charset="-120"/>
                         </a:rPr>
-                        <a:t>Parameters / implementation</a:t>
+                        <a:t>Conditions</a:t>
                       </a:r>
-                      <a:endParaRPr lang="en-US" sz="1030" dirty="0"/>
+                      <a:endParaRPr lang="en-US" sz="715" dirty="0">
+                        <a:latin typeface="Aptos" charset="0"/>
+                        <a:ea typeface="Aptos" charset="0"/>
+                        <a:cs typeface="Aptos" charset="0"/>
+                      </a:endParaRPr>
+                    </a:p>
+                  </a:txBody>
+                  <a:tcPr marL="50292" marR="50292" marT="50292" marB="50292">
+                    <a:lnL w="10795" cap="flat" cmpd="sng" algn="ctr">
+                      <a:solidFill>
+                        <a:srgbClr val="FFFFFF"/>
+                      </a:solidFill>
+                      <a:prstDash val="solid"/>
+                      <a:round/>
+                      <a:headEnd type="none" w="med" len="med"/>
+                      <a:tailEnd type="none" w="med" len="med"/>
+                    </a:lnL>
+                    <a:lnR w="10795" cap="flat" cmpd="sng" algn="ctr">
+                      <a:solidFill>
+                        <a:srgbClr val="FFFFFF"/>
+                      </a:solidFill>
+                      <a:prstDash val="solid"/>
+                      <a:round/>
+                      <a:headEnd type="none" w="med" len="med"/>
+                      <a:tailEnd type="none" w="med" len="med"/>
+                    </a:lnR>
+                    <a:lnT w="10795" cap="flat" cmpd="sng" algn="ctr">
+                      <a:solidFill>
+                        <a:srgbClr val="FFFFFF"/>
+                      </a:solidFill>
+                      <a:prstDash val="solid"/>
+                      <a:round/>
+                      <a:headEnd type="none" w="med" len="med"/>
+                      <a:tailEnd type="none" w="med" len="med"/>
+                    </a:lnT>
+                    <a:lnB w="10795" cap="flat" cmpd="sng" algn="ctr">
+                      <a:solidFill>
+                        <a:srgbClr val="FFFFFF"/>
+                      </a:solidFill>
+                      <a:prstDash val="solid"/>
+                      <a:round/>
+                      <a:headEnd type="none" w="med" len="med"/>
+                      <a:tailEnd type="none" w="med" len="med"/>
+                    </a:lnB>
+                    <a:solidFill>
+                      <a:srgbClr val="426E9E"/>
+                    </a:solidFill>
+                  </a:tcPr>
+                </a:tc>
+                <a:tc>
+                  <a:txBody>
+                    <a:bodyPr/>
+                    <a:lstStyle/>
+                    <a:p>
+                      <a:pPr marL="0" indent="0">
+                        <a:buNone/>
+                      </a:pPr>
+                      <a:r>
+                        <a:rPr lang="en-US" sz="715" b="1" dirty="0">
+                          <a:solidFill>
+                            <a:srgbClr val="FFFFFF"/>
+                          </a:solidFill>
+                          <a:latin typeface="Aptos" pitchFamily="34" charset="0"/>
+                          <a:ea typeface="Aptos" pitchFamily="34" charset="-122"/>
+                          <a:cs typeface="Aptos" pitchFamily="34" charset="-120"/>
+                        </a:rPr>
+                        <a:t>Best observed</a:t>
+                      </a:r>
+                      <a:endParaRPr lang="en-US" sz="715" dirty="0">
+                        <a:latin typeface="Aptos" charset="0"/>
+                        <a:ea typeface="Aptos" charset="0"/>
+                        <a:cs typeface="Aptos" charset="0"/>
+                      </a:endParaRPr>
                     </a:p>
                   </a:txBody>
                   <a:tcPr marL="50292" marR="50292" marT="50292" marB="50292">
@@ -22980,7 +22689,7 @@
                   </a:ext>
                 </a:extLst>
               </a:tr>
-              <a:tr h="0">
+              <a:tr h="320040">
                 <a:tc>
                   <a:txBody>
                     <a:bodyPr/>
@@ -22990,14 +22699,21 @@
                         <a:buNone/>
                       </a:pPr>
                       <a:r>
-                        <a:rPr lang="en-US" sz="705" b="1" dirty="0">
+                        <a:rPr lang="en-US" sz="715" dirty="0">
                           <a:solidFill>
                             <a:srgbClr val="1F2528"/>
                           </a:solidFill>
+                          <a:latin typeface="Aptos" pitchFamily="34" charset="0"/>
+                          <a:ea typeface="Aptos" pitchFamily="34" charset="-122"/>
+                          <a:cs typeface="Aptos" pitchFamily="34" charset="-120"/>
                         </a:rPr>
-                        <a:t>Input</a:t>
+                        <a:t>Learning rate (4)</a:t>
                       </a:r>
-                      <a:endParaRPr lang="en-US" sz="705" dirty="0"/>
+                      <a:endParaRPr lang="en-US" sz="715" dirty="0">
+                        <a:latin typeface="Aptos" charset="0"/>
+                        <a:ea typeface="Aptos" charset="0"/>
+                        <a:cs typeface="Aptos" charset="0"/>
+                      </a:endParaRPr>
                     </a:p>
                   </a:txBody>
                   <a:tcPr marL="50292" marR="50292" marT="50292" marB="50292">
@@ -23037,9 +22753,6 @@
                       <a:headEnd type="none" w="med" len="med"/>
                       <a:tailEnd type="none" w="med" len="med"/>
                     </a:lnB>
-                    <a:solidFill>
-                      <a:srgbClr val="EEF2F3"/>
-                    </a:solidFill>
                   </a:tcPr>
                 </a:tc>
                 <a:tc>
@@ -23051,14 +22764,21 @@
                         <a:buNone/>
                       </a:pPr>
                       <a:r>
-                        <a:rPr lang="en-US" sz="705" dirty="0">
+                        <a:rPr lang="en-US" sz="715" dirty="0">
                           <a:solidFill>
                             <a:srgbClr val="1F2528"/>
                           </a:solidFill>
+                          <a:latin typeface="Aptos" pitchFamily="34" charset="0"/>
+                          <a:ea typeface="Aptos" pitchFamily="34" charset="-122"/>
+                          <a:cs typeface="Aptos" pitchFamily="34" charset="-120"/>
                         </a:rPr>
-                        <a:t>ESC-50 waveform -&gt; log-mel spectrogram + delta, shape (2, 60, T)</a:t>
+                        <a:t>0.001, 0.002, 0.005, 0.010</a:t>
                       </a:r>
-                      <a:endParaRPr lang="en-US" sz="705" dirty="0"/>
+                      <a:endParaRPr lang="en-US" sz="715" dirty="0">
+                        <a:latin typeface="Aptos" charset="0"/>
+                        <a:ea typeface="Aptos" charset="0"/>
+                        <a:cs typeface="Aptos" charset="0"/>
+                      </a:endParaRPr>
                     </a:p>
                   </a:txBody>
                   <a:tcPr marL="50292" marR="50292" marT="50292" marB="50292">
@@ -23098,77 +22818,6 @@
                       <a:headEnd type="none" w="med" len="med"/>
                       <a:tailEnd type="none" w="med" len="med"/>
                     </a:lnB>
-                    <a:solidFill>
-                      <a:srgbClr val="EEF2F3"/>
-                    </a:solidFill>
-                  </a:tcPr>
-                </a:tc>
-                <a:extLst>
-                  <a:ext uri="{0D108BD9-81ED-4DB2-BD59-A6C34878D82A}">
-                    <a16:rowId xmlns:a16="http://schemas.microsoft.com/office/drawing/2014/main" val="10001"/>
-                  </a:ext>
-                </a:extLst>
-              </a:tr>
-              <a:tr h="0">
-                <a:tc>
-                  <a:txBody>
-                    <a:bodyPr/>
-                    <a:lstStyle/>
-                    <a:p>
-                      <a:pPr marL="0" indent="0">
-                        <a:buNone/>
-                      </a:pPr>
-                      <a:r>
-                        <a:rPr lang="en-US" sz="705" b="1" dirty="0">
-                          <a:solidFill>
-                            <a:srgbClr val="1F2528"/>
-                          </a:solidFill>
-                        </a:rPr>
-                        <a:t>Segments</a:t>
-                      </a:r>
-                      <a:endParaRPr lang="en-US" sz="705" dirty="0"/>
-                    </a:p>
-                  </a:txBody>
-                  <a:tcPr marL="50292" marR="50292" marT="50292" marB="50292">
-                    <a:lnL w="10795" cap="flat" cmpd="sng" algn="ctr">
-                      <a:solidFill>
-                        <a:srgbClr val="FFFFFF"/>
-                      </a:solidFill>
-                      <a:prstDash val="solid"/>
-                      <a:round/>
-                      <a:headEnd type="none" w="med" len="med"/>
-                      <a:tailEnd type="none" w="med" len="med"/>
-                    </a:lnL>
-                    <a:lnR w="10795" cap="flat" cmpd="sng" algn="ctr">
-                      <a:solidFill>
-                        <a:srgbClr val="FFFFFF"/>
-                      </a:solidFill>
-                      <a:prstDash val="solid"/>
-                      <a:round/>
-                      <a:headEnd type="none" w="med" len="med"/>
-                      <a:tailEnd type="none" w="med" len="med"/>
-                    </a:lnR>
-                    <a:lnT w="10795" cap="flat" cmpd="sng" algn="ctr">
-                      <a:solidFill>
-                        <a:srgbClr val="FFFFFF"/>
-                      </a:solidFill>
-                      <a:prstDash val="solid"/>
-                      <a:round/>
-                      <a:headEnd type="none" w="med" len="med"/>
-                      <a:tailEnd type="none" w="med" len="med"/>
-                    </a:lnT>
-                    <a:lnB w="10795" cap="flat" cmpd="sng" algn="ctr">
-                      <a:solidFill>
-                        <a:srgbClr val="FFFFFF"/>
-                      </a:solidFill>
-                      <a:prstDash val="solid"/>
-                      <a:round/>
-                      <a:headEnd type="none" w="med" len="med"/>
-                      <a:tailEnd type="none" w="med" len="med"/>
-                    </a:lnB>
-                    <a:solidFill>
-                      <a:srgbClr val="F8FAF8"/>
-                    </a:solidFill>
                   </a:tcPr>
                 </a:tc>
                 <a:tc>
@@ -23180,14 +22829,21 @@
                         <a:buNone/>
                       </a:pPr>
                       <a:r>
-                        <a:rPr lang="en-US" sz="705" dirty="0">
+                        <a:rPr lang="en-US" sz="715" dirty="0">
                           <a:solidFill>
                             <a:srgbClr val="1F2528"/>
                           </a:solidFill>
+                          <a:latin typeface="Aptos" pitchFamily="34" charset="0"/>
+                          <a:ea typeface="Aptos" pitchFamily="34" charset="-122"/>
+                          <a:cs typeface="Aptos" pitchFamily="34" charset="-120"/>
                         </a:rPr>
-                        <a:t>Short: 41 frames, hop 20; Long: 101 frames, hop 10</a:t>
+                        <a:t>65.6% at LR 0.005</a:t>
                       </a:r>
-                      <a:endParaRPr lang="en-US" sz="705" dirty="0"/>
+                      <a:endParaRPr lang="en-US" sz="715" dirty="0">
+                        <a:latin typeface="Aptos" charset="0"/>
+                        <a:ea typeface="Aptos" charset="0"/>
+                        <a:cs typeface="Aptos" charset="0"/>
+                      </a:endParaRPr>
                     </a:p>
                   </a:txBody>
                   <a:tcPr marL="50292" marR="50292" marT="50292" marB="50292">
@@ -23227,18 +22883,15 @@
                       <a:headEnd type="none" w="med" len="med"/>
                       <a:tailEnd type="none" w="med" len="med"/>
                     </a:lnB>
-                    <a:solidFill>
-                      <a:srgbClr val="F8FAF8"/>
-                    </a:solidFill>
                   </a:tcPr>
                 </a:tc>
                 <a:extLst>
                   <a:ext uri="{0D108BD9-81ED-4DB2-BD59-A6C34878D82A}">
-                    <a16:rowId xmlns:a16="http://schemas.microsoft.com/office/drawing/2014/main" val="10002"/>
+                    <a16:rowId xmlns:a16="http://schemas.microsoft.com/office/drawing/2014/main" val="10001"/>
                   </a:ext>
                 </a:extLst>
               </a:tr>
-              <a:tr h="0">
+              <a:tr h="320040">
                 <a:tc>
                   <a:txBody>
                     <a:bodyPr/>
@@ -23248,14 +22901,21 @@
                         <a:buNone/>
                       </a:pPr>
                       <a:r>
-                        <a:rPr lang="en-US" sz="705" b="1" dirty="0">
+                        <a:rPr lang="en-US" sz="715" dirty="0">
                           <a:solidFill>
                             <a:srgbClr val="1F2528"/>
                           </a:solidFill>
+                          <a:latin typeface="Aptos" pitchFamily="34" charset="0"/>
+                          <a:ea typeface="Aptos" pitchFamily="34" charset="-122"/>
+                          <a:cs typeface="Aptos" pitchFamily="34" charset="-120"/>
                         </a:rPr>
-                        <a:t>Conv block 1</a:t>
+                        <a:t>Initialization (2)</a:t>
                       </a:r>
-                      <a:endParaRPr lang="en-US" sz="705" dirty="0"/>
+                      <a:endParaRPr lang="en-US" sz="715" dirty="0">
+                        <a:latin typeface="Aptos" charset="0"/>
+                        <a:ea typeface="Aptos" charset="0"/>
+                        <a:cs typeface="Aptos" charset="0"/>
+                      </a:endParaRPr>
                     </a:p>
                   </a:txBody>
                   <a:tcPr marL="50292" marR="50292" marT="50292" marB="50292">
@@ -23295,9 +22955,6 @@
                       <a:headEnd type="none" w="med" len="med"/>
                       <a:tailEnd type="none" w="med" len="med"/>
                     </a:lnB>
-                    <a:solidFill>
-                      <a:srgbClr val="EEF2F3"/>
-                    </a:solidFill>
                   </a:tcPr>
                 </a:tc>
                 <a:tc>
@@ -23309,14 +22966,21 @@
                         <a:buNone/>
                       </a:pPr>
                       <a:r>
-                        <a:rPr lang="en-US" sz="705" dirty="0">
+                        <a:rPr lang="en-US" sz="715" dirty="0">
                           <a:solidFill>
                             <a:srgbClr val="1F2528"/>
                           </a:solidFill>
+                          <a:latin typeface="Aptos" pitchFamily="34" charset="0"/>
+                          <a:ea typeface="Aptos" pitchFamily="34" charset="-122"/>
+                          <a:cs typeface="Aptos" pitchFamily="34" charset="-120"/>
                         </a:rPr>
-                        <a:t>Conv2d 2-&gt;80, kernel 57x6; ReLU; Dropout 0.5; MaxPool 4x3</a:t>
+                        <a:t>Kaiming, Xavier</a:t>
                       </a:r>
-                      <a:endParaRPr lang="en-US" sz="705" dirty="0"/>
+                      <a:endParaRPr lang="en-US" sz="715" dirty="0">
+                        <a:latin typeface="Aptos" charset="0"/>
+                        <a:ea typeface="Aptos" charset="0"/>
+                        <a:cs typeface="Aptos" charset="0"/>
+                      </a:endParaRPr>
                     </a:p>
                   </a:txBody>
                   <a:tcPr marL="50292" marR="50292" marT="50292" marB="50292">
@@ -23356,77 +23020,6 @@
                       <a:headEnd type="none" w="med" len="med"/>
                       <a:tailEnd type="none" w="med" len="med"/>
                     </a:lnB>
-                    <a:solidFill>
-                      <a:srgbClr val="EEF2F3"/>
-                    </a:solidFill>
-                  </a:tcPr>
-                </a:tc>
-                <a:extLst>
-                  <a:ext uri="{0D108BD9-81ED-4DB2-BD59-A6C34878D82A}">
-                    <a16:rowId xmlns:a16="http://schemas.microsoft.com/office/drawing/2014/main" val="10003"/>
-                  </a:ext>
-                </a:extLst>
-              </a:tr>
-              <a:tr h="0">
-                <a:tc>
-                  <a:txBody>
-                    <a:bodyPr/>
-                    <a:lstStyle/>
-                    <a:p>
-                      <a:pPr marL="0" indent="0">
-                        <a:buNone/>
-                      </a:pPr>
-                      <a:r>
-                        <a:rPr lang="en-US" sz="705" b="1" dirty="0">
-                          <a:solidFill>
-                            <a:srgbClr val="1F2528"/>
-                          </a:solidFill>
-                        </a:rPr>
-                        <a:t>Conv block 2</a:t>
-                      </a:r>
-                      <a:endParaRPr lang="en-US" sz="705" dirty="0"/>
-                    </a:p>
-                  </a:txBody>
-                  <a:tcPr marL="50292" marR="50292" marT="50292" marB="50292">
-                    <a:lnL w="10795" cap="flat" cmpd="sng" algn="ctr">
-                      <a:solidFill>
-                        <a:srgbClr val="FFFFFF"/>
-                      </a:solidFill>
-                      <a:prstDash val="solid"/>
-                      <a:round/>
-                      <a:headEnd type="none" w="med" len="med"/>
-                      <a:tailEnd type="none" w="med" len="med"/>
-                    </a:lnL>
-                    <a:lnR w="10795" cap="flat" cmpd="sng" algn="ctr">
-                      <a:solidFill>
-                        <a:srgbClr val="FFFFFF"/>
-                      </a:solidFill>
-                      <a:prstDash val="solid"/>
-                      <a:round/>
-                      <a:headEnd type="none" w="med" len="med"/>
-                      <a:tailEnd type="none" w="med" len="med"/>
-                    </a:lnR>
-                    <a:lnT w="10795" cap="flat" cmpd="sng" algn="ctr">
-                      <a:solidFill>
-                        <a:srgbClr val="FFFFFF"/>
-                      </a:solidFill>
-                      <a:prstDash val="solid"/>
-                      <a:round/>
-                      <a:headEnd type="none" w="med" len="med"/>
-                      <a:tailEnd type="none" w="med" len="med"/>
-                    </a:lnT>
-                    <a:lnB w="10795" cap="flat" cmpd="sng" algn="ctr">
-                      <a:solidFill>
-                        <a:srgbClr val="FFFFFF"/>
-                      </a:solidFill>
-                      <a:prstDash val="solid"/>
-                      <a:round/>
-                      <a:headEnd type="none" w="med" len="med"/>
-                      <a:tailEnd type="none" w="med" len="med"/>
-                    </a:lnB>
-                    <a:solidFill>
-                      <a:srgbClr val="F8FAF8"/>
-                    </a:solidFill>
                   </a:tcPr>
                 </a:tc>
                 <a:tc>
@@ -23438,14 +23031,21 @@
                         <a:buNone/>
                       </a:pPr>
                       <a:r>
-                        <a:rPr lang="en-US" sz="705" dirty="0">
+                        <a:rPr lang="en-US" sz="715" dirty="0">
                           <a:solidFill>
                             <a:srgbClr val="1F2528"/>
                           </a:solidFill>
+                          <a:latin typeface="Aptos" pitchFamily="34" charset="0"/>
+                          <a:ea typeface="Aptos" pitchFamily="34" charset="-122"/>
+                          <a:cs typeface="Aptos" pitchFamily="34" charset="-120"/>
                         </a:rPr>
-                        <a:t>Conv2d 80-&gt;80, kernel 1x3; ReLU; MaxPool 1x3</a:t>
+                        <a:t>67.9% with Xavier</a:t>
                       </a:r>
-                      <a:endParaRPr lang="en-US" sz="705" dirty="0"/>
+                      <a:endParaRPr lang="en-US" sz="715" dirty="0">
+                        <a:latin typeface="Aptos" charset="0"/>
+                        <a:ea typeface="Aptos" charset="0"/>
+                        <a:cs typeface="Aptos" charset="0"/>
+                      </a:endParaRPr>
                     </a:p>
                   </a:txBody>
                   <a:tcPr marL="50292" marR="50292" marT="50292" marB="50292">
@@ -23485,18 +23085,15 @@
                       <a:headEnd type="none" w="med" len="med"/>
                       <a:tailEnd type="none" w="med" len="med"/>
                     </a:lnB>
-                    <a:solidFill>
-                      <a:srgbClr val="F8FAF8"/>
-                    </a:solidFill>
                   </a:tcPr>
                 </a:tc>
                 <a:extLst>
                   <a:ext uri="{0D108BD9-81ED-4DB2-BD59-A6C34878D82A}">
-                    <a16:rowId xmlns:a16="http://schemas.microsoft.com/office/drawing/2014/main" val="10004"/>
+                    <a16:rowId xmlns:a16="http://schemas.microsoft.com/office/drawing/2014/main" val="10002"/>
                   </a:ext>
                 </a:extLst>
               </a:tr>
-              <a:tr h="0">
+              <a:tr h="320040">
                 <a:tc>
                   <a:txBody>
                     <a:bodyPr/>
@@ -23506,14 +23103,21 @@
                         <a:buNone/>
                       </a:pPr>
                       <a:r>
-                        <a:rPr lang="en-US" sz="705" b="1" dirty="0">
+                        <a:rPr lang="en-US" sz="715" dirty="0">
                           <a:solidFill>
                             <a:srgbClr val="1F2528"/>
                           </a:solidFill>
+                          <a:latin typeface="Aptos" pitchFamily="34" charset="0"/>
+                          <a:ea typeface="Aptos" pitchFamily="34" charset="-122"/>
+                          <a:cs typeface="Aptos" pitchFamily="34" charset="-120"/>
                         </a:rPr>
-                        <a:t>Dense head</a:t>
+                        <a:t>Max-norm (2)</a:t>
                       </a:r>
-                      <a:endParaRPr lang="en-US" sz="705" dirty="0"/>
+                      <a:endParaRPr lang="en-US" sz="715" dirty="0">
+                        <a:latin typeface="Aptos" charset="0"/>
+                        <a:ea typeface="Aptos" charset="0"/>
+                        <a:cs typeface="Aptos" charset="0"/>
+                      </a:endParaRPr>
                     </a:p>
                   </a:txBody>
                   <a:tcPr marL="50292" marR="50292" marT="50292" marB="50292">
@@ -23553,9 +23157,6 @@
                       <a:headEnd type="none" w="med" len="med"/>
                       <a:tailEnd type="none" w="med" len="med"/>
                     </a:lnB>
-                    <a:solidFill>
-                      <a:srgbClr val="EEF2F3"/>
-                    </a:solidFill>
                   </a:tcPr>
                 </a:tc>
                 <a:tc>
@@ -23567,14 +23168,21 @@
                         <a:buNone/>
                       </a:pPr>
                       <a:r>
-                        <a:rPr lang="en-US" sz="705" dirty="0">
+                        <a:rPr lang="en-US" sz="715" dirty="0">
                           <a:solidFill>
                             <a:srgbClr val="1F2528"/>
                           </a:solidFill>
+                          <a:latin typeface="Aptos" pitchFamily="34" charset="0"/>
+                          <a:ea typeface="Aptos" pitchFamily="34" charset="-122"/>
+                          <a:cs typeface="Aptos" pitchFamily="34" charset="-120"/>
                         </a:rPr>
-                        <a:t>Flatten -&gt; FC 5000 ReLU Dropout -&gt; FC 5000 ReLU Dropout -&gt; FC 50</a:t>
+                        <a:t>off, on</a:t>
                       </a:r>
-                      <a:endParaRPr lang="en-US" sz="705" dirty="0"/>
+                      <a:endParaRPr lang="en-US" sz="715" dirty="0">
+                        <a:latin typeface="Aptos" charset="0"/>
+                        <a:ea typeface="Aptos" charset="0"/>
+                        <a:cs typeface="Aptos" charset="0"/>
+                      </a:endParaRPr>
                     </a:p>
                   </a:txBody>
                   <a:tcPr marL="50292" marR="50292" marT="50292" marB="50292">
@@ -23614,77 +23222,6 @@
                       <a:headEnd type="none" w="med" len="med"/>
                       <a:tailEnd type="none" w="med" len="med"/>
                     </a:lnB>
-                    <a:solidFill>
-                      <a:srgbClr val="EEF2F3"/>
-                    </a:solidFill>
-                  </a:tcPr>
-                </a:tc>
-                <a:extLst>
-                  <a:ext uri="{0D108BD9-81ED-4DB2-BD59-A6C34878D82A}">
-                    <a16:rowId xmlns:a16="http://schemas.microsoft.com/office/drawing/2014/main" val="10005"/>
-                  </a:ext>
-                </a:extLst>
-              </a:tr>
-              <a:tr h="170837">
-                <a:tc>
-                  <a:txBody>
-                    <a:bodyPr/>
-                    <a:lstStyle/>
-                    <a:p>
-                      <a:pPr marL="0" indent="0">
-                        <a:buNone/>
-                      </a:pPr>
-                      <a:r>
-                        <a:rPr lang="en-US" sz="705" b="1" dirty="0">
-                          <a:solidFill>
-                            <a:srgbClr val="1F2528"/>
-                          </a:solidFill>
-                        </a:rPr>
-                        <a:t>Optimization</a:t>
-                      </a:r>
-                      <a:endParaRPr lang="en-US" sz="705" dirty="0"/>
-                    </a:p>
-                  </a:txBody>
-                  <a:tcPr marL="50292" marR="50292" marT="50292" marB="50292">
-                    <a:lnL w="10795" cap="flat" cmpd="sng" algn="ctr">
-                      <a:solidFill>
-                        <a:srgbClr val="FFFFFF"/>
-                      </a:solidFill>
-                      <a:prstDash val="solid"/>
-                      <a:round/>
-                      <a:headEnd type="none" w="med" len="med"/>
-                      <a:tailEnd type="none" w="med" len="med"/>
-                    </a:lnL>
-                    <a:lnR w="10795" cap="flat" cmpd="sng" algn="ctr">
-                      <a:solidFill>
-                        <a:srgbClr val="FFFFFF"/>
-                      </a:solidFill>
-                      <a:prstDash val="solid"/>
-                      <a:round/>
-                      <a:headEnd type="none" w="med" len="med"/>
-                      <a:tailEnd type="none" w="med" len="med"/>
-                    </a:lnR>
-                    <a:lnT w="10795" cap="flat" cmpd="sng" algn="ctr">
-                      <a:solidFill>
-                        <a:srgbClr val="FFFFFF"/>
-                      </a:solidFill>
-                      <a:prstDash val="solid"/>
-                      <a:round/>
-                      <a:headEnd type="none" w="med" len="med"/>
-                      <a:tailEnd type="none" w="med" len="med"/>
-                    </a:lnT>
-                    <a:lnB w="10795" cap="flat" cmpd="sng" algn="ctr">
-                      <a:solidFill>
-                        <a:srgbClr val="FFFFFF"/>
-                      </a:solidFill>
-                      <a:prstDash val="solid"/>
-                      <a:round/>
-                      <a:headEnd type="none" w="med" len="med"/>
-                      <a:tailEnd type="none" w="med" len="med"/>
-                    </a:lnB>
-                    <a:solidFill>
-                      <a:srgbClr val="F8FAF8"/>
-                    </a:solidFill>
                   </a:tcPr>
                 </a:tc>
                 <a:tc>
@@ -23696,14 +23233,21 @@
                         <a:buNone/>
                       </a:pPr>
                       <a:r>
-                        <a:rPr lang="en-US" sz="705" dirty="0">
+                        <a:rPr lang="en-US" sz="715" dirty="0">
                           <a:solidFill>
                             <a:srgbClr val="1F2528"/>
                           </a:solidFill>
+                          <a:latin typeface="Aptos" pitchFamily="34" charset="0"/>
+                          <a:ea typeface="Aptos" pitchFamily="34" charset="-122"/>
+                          <a:cs typeface="Aptos" pitchFamily="34" charset="-120"/>
                         </a:rPr>
-                        <a:t>CrossEntropyLoss; SGD lr 0.002/0.01; momentum 0.9; Nesterov; weight decay 0.001</a:t>
+                        <a:t>67.0% with max-norm on</a:t>
                       </a:r>
-                      <a:endParaRPr lang="en-US" sz="705" dirty="0"/>
+                      <a:endParaRPr lang="en-US" sz="715" dirty="0">
+                        <a:latin typeface="Aptos" charset="0"/>
+                        <a:ea typeface="Aptos" charset="0"/>
+                        <a:cs typeface="Aptos" charset="0"/>
+                      </a:endParaRPr>
                     </a:p>
                   </a:txBody>
                   <a:tcPr marL="50292" marR="50292" marT="50292" marB="50292">
@@ -23743,18 +23287,15 @@
                       <a:headEnd type="none" w="med" len="med"/>
                       <a:tailEnd type="none" w="med" len="med"/>
                     </a:lnB>
-                    <a:solidFill>
-                      <a:srgbClr val="F8FAF8"/>
-                    </a:solidFill>
                   </a:tcPr>
                 </a:tc>
                 <a:extLst>
                   <a:ext uri="{0D108BD9-81ED-4DB2-BD59-A6C34878D82A}">
-                    <a16:rowId xmlns:a16="http://schemas.microsoft.com/office/drawing/2014/main" val="10006"/>
+                    <a16:rowId xmlns:a16="http://schemas.microsoft.com/office/drawing/2014/main" val="10003"/>
                   </a:ext>
                 </a:extLst>
               </a:tr>
-              <a:tr h="0">
+              <a:tr h="320040">
                 <a:tc>
                   <a:txBody>
                     <a:bodyPr/>
@@ -23764,14 +23305,21 @@
                         <a:buNone/>
                       </a:pPr>
                       <a:r>
-                        <a:rPr lang="en-US" sz="705" b="1" dirty="0">
+                        <a:rPr lang="en-US" sz="715" dirty="0">
                           <a:solidFill>
                             <a:srgbClr val="1F2528"/>
                           </a:solidFill>
+                          <a:latin typeface="Aptos" pitchFamily="34" charset="0"/>
+                          <a:ea typeface="Aptos" pitchFamily="34" charset="-122"/>
+                          <a:cs typeface="Aptos" pitchFamily="34" charset="-120"/>
                         </a:rPr>
-                        <a:t>Evaluation</a:t>
+                        <a:t>Segment length (2)</a:t>
                       </a:r>
-                      <a:endParaRPr lang="en-US" sz="705" dirty="0"/>
+                      <a:endParaRPr lang="en-US" sz="715" dirty="0">
+                        <a:latin typeface="Aptos" charset="0"/>
+                        <a:ea typeface="Aptos" charset="0"/>
+                        <a:cs typeface="Aptos" charset="0"/>
+                      </a:endParaRPr>
                     </a:p>
                   </a:txBody>
                   <a:tcPr marL="50292" marR="50292" marT="50292" marB="50292">
@@ -23811,9 +23359,6 @@
                       <a:headEnd type="none" w="med" len="med"/>
                       <a:tailEnd type="none" w="med" len="med"/>
                     </a:lnB>
-                    <a:solidFill>
-                      <a:srgbClr val="EEF2F3"/>
-                    </a:solidFill>
                   </a:tcPr>
                 </a:tc>
                 <a:tc>
@@ -23825,14 +23370,21 @@
                         <a:buNone/>
                       </a:pPr>
                       <a:r>
-                        <a:rPr lang="en-US" sz="705" dirty="0">
+                        <a:rPr lang="en-US" sz="715" dirty="0">
                           <a:solidFill>
                             <a:srgbClr val="1F2528"/>
                           </a:solidFill>
+                          <a:latin typeface="Aptos" pitchFamily="34" charset="0"/>
+                          <a:ea typeface="Aptos" pitchFamily="34" charset="-122"/>
+                          <a:cs typeface="Aptos" pitchFamily="34" charset="-120"/>
                         </a:rPr>
-                        <a:t>Softmax per segment; average probabilities by filename for clip-level vote</a:t>
+                        <a:t>long, short*</a:t>
                       </a:r>
-                      <a:endParaRPr lang="en-US" sz="705" dirty="0"/>
+                      <a:endParaRPr lang="en-US" sz="715" dirty="0">
+                        <a:latin typeface="Aptos" charset="0"/>
+                        <a:ea typeface="Aptos" charset="0"/>
+                        <a:cs typeface="Aptos" charset="0"/>
+                      </a:endParaRPr>
                     </a:p>
                   </a:txBody>
                   <a:tcPr marL="50292" marR="50292" marT="50292" marB="50292">
@@ -23872,14 +23424,76 @@
                       <a:headEnd type="none" w="med" len="med"/>
                       <a:tailEnd type="none" w="med" len="med"/>
                     </a:lnB>
-                    <a:solidFill>
-                      <a:srgbClr val="EEF2F3"/>
-                    </a:solidFill>
+                  </a:tcPr>
+                </a:tc>
+                <a:tc>
+                  <a:txBody>
+                    <a:bodyPr/>
+                    <a:lstStyle/>
+                    <a:p>
+                      <a:pPr marL="0" indent="0">
+                        <a:buNone/>
+                      </a:pPr>
+                      <a:r>
+                        <a:rPr lang="en-US" sz="715" dirty="0">
+                          <a:solidFill>
+                            <a:srgbClr val="1F2528"/>
+                          </a:solidFill>
+                          <a:latin typeface="Aptos" pitchFamily="34" charset="0"/>
+                          <a:ea typeface="Aptos" pitchFamily="34" charset="-122"/>
+                          <a:cs typeface="Aptos" pitchFamily="34" charset="-120"/>
+                        </a:rPr>
+                        <a:t>65.8% short*; 64.9% long</a:t>
+                      </a:r>
+                      <a:endParaRPr lang="en-US" sz="715" dirty="0">
+                        <a:latin typeface="Aptos" charset="0"/>
+                        <a:ea typeface="Aptos" charset="0"/>
+                        <a:cs typeface="Aptos" charset="0"/>
+                      </a:endParaRPr>
+                    </a:p>
+                  </a:txBody>
+                  <a:tcPr marL="50292" marR="50292" marT="50292" marB="50292">
+                    <a:lnL w="10795" cap="flat" cmpd="sng" algn="ctr">
+                      <a:solidFill>
+                        <a:srgbClr val="FFFFFF"/>
+                      </a:solidFill>
+                      <a:prstDash val="solid"/>
+                      <a:round/>
+                      <a:headEnd type="none" w="med" len="med"/>
+                      <a:tailEnd type="none" w="med" len="med"/>
+                    </a:lnL>
+                    <a:lnR w="10795" cap="flat" cmpd="sng" algn="ctr">
+                      <a:solidFill>
+                        <a:srgbClr val="FFFFFF"/>
+                      </a:solidFill>
+                      <a:prstDash val="solid"/>
+                      <a:round/>
+                      <a:headEnd type="none" w="med" len="med"/>
+                      <a:tailEnd type="none" w="med" len="med"/>
+                    </a:lnR>
+                    <a:lnT w="10795" cap="flat" cmpd="sng" algn="ctr">
+                      <a:solidFill>
+                        <a:srgbClr val="FFFFFF"/>
+                      </a:solidFill>
+                      <a:prstDash val="solid"/>
+                      <a:round/>
+                      <a:headEnd type="none" w="med" len="med"/>
+                      <a:tailEnd type="none" w="med" len="med"/>
+                    </a:lnT>
+                    <a:lnB w="10795" cap="flat" cmpd="sng" algn="ctr">
+                      <a:solidFill>
+                        <a:srgbClr val="FFFFFF"/>
+                      </a:solidFill>
+                      <a:prstDash val="solid"/>
+                      <a:round/>
+                      <a:headEnd type="none" w="med" len="med"/>
+                      <a:tailEnd type="none" w="med" len="med"/>
+                    </a:lnB>
                   </a:tcPr>
                 </a:tc>
                 <a:extLst>
                   <a:ext uri="{0D108BD9-81ED-4DB2-BD59-A6C34878D82A}">
-                    <a16:rowId xmlns:a16="http://schemas.microsoft.com/office/drawing/2014/main" val="10007"/>
+                    <a16:rowId xmlns:a16="http://schemas.microsoft.com/office/drawing/2014/main" val="10004"/>
                   </a:ext>
                 </a:extLst>
               </a:tr>
@@ -23887,12 +23501,321 @@
           </a:graphicData>
         </a:graphic>
       </p:graphicFrame>
+      <p:sp>
+        <p:nvSpPr>
+          <p:cNvPr id="22" name="Text 19"/>
+          <p:cNvSpPr/>
+          <p:nvPr/>
+        </p:nvSpPr>
+        <p:spPr>
+          <a:xfrm>
+            <a:off x="713232" y="4606054"/>
+            <a:ext cx="1005840" cy="146304"/>
+          </a:xfrm>
+          <a:prstGeom prst="rect">
+            <a:avLst/>
+          </a:prstGeom>
+          <a:noFill/>
+          <a:ln/>
+        </p:spPr>
+        <p:txBody>
+          <a:bodyPr wrap="square" lIns="0" tIns="0" rIns="0" bIns="0" rtlCol="0" anchor="t">
+            <a:normAutofit/>
+          </a:bodyPr>
+          <a:lstStyle/>
+          <a:p>
+            <a:pPr>
+              <a:lnSpc>
+                <a:spcPct val="90000"/>
+              </a:lnSpc>
+            </a:pPr>
+            <a:r>
+              <a:rPr lang="en-US" sz="1000" b="1" dirty="0">
+                <a:solidFill>
+                  <a:srgbClr val="426E9E"/>
+                </a:solidFill>
+                <a:latin typeface="Aptos" pitchFamily="34" charset="0"/>
+              </a:rPr>
+              <a:t>Result</a:t>
+            </a:r>
+          </a:p>
+        </p:txBody>
+      </p:sp>
+      <p:sp>
+        <p:nvSpPr>
+          <p:cNvPr id="23" name="Text 20"/>
+          <p:cNvSpPr/>
+          <p:nvPr/>
+        </p:nvSpPr>
+        <p:spPr>
+          <a:xfrm>
+            <a:off x="713232" y="4831656"/>
+            <a:ext cx="4995673" cy="877824"/>
+          </a:xfrm>
+          <a:prstGeom prst="rect">
+            <a:avLst/>
+          </a:prstGeom>
+          <a:noFill/>
+          <a:ln/>
+        </p:spPr>
+        <p:txBody>
+          <a:bodyPr wrap="square" lIns="0" tIns="0" rIns="0" bIns="0" rtlCol="0" anchor="t">
+            <a:noAutofit/>
+          </a:bodyPr>
+          <a:lstStyle/>
+          <a:p>
+            <a:pPr marL="0" indent="0" algn="l">
+              <a:lnSpc>
+                <a:spcPct val="90000"/>
+              </a:lnSpc>
+              <a:buNone/>
+            </a:pPr>
+            <a:r>
+              <a:rPr lang="en-US" sz="1200" dirty="0">
+                <a:solidFill>
+                  <a:srgbClr val="1F2528"/>
+                </a:solidFill>
+                <a:latin typeface="Aptos" pitchFamily="34" charset="0"/>
+                <a:ea typeface="Aptos" pitchFamily="34" charset="-122"/>
+                <a:cs typeface="Aptos" pitchFamily="34" charset="-120"/>
+              </a:rPr>
+              <a:t>Best observed was 67.9% with Xavier initialization, versus Piczak's 64.5% LP reference. That is measurable, but still the same from-scratch CNN performance band.</a:t>
+            </a:r>
+          </a:p>
+          <a:p>
+            <a:pPr marL="0" indent="0" algn="l">
+              <a:lnSpc>
+                <a:spcPct val="90000"/>
+              </a:lnSpc>
+              <a:buNone/>
+            </a:pPr>
+            <a:endParaRPr lang="en-US" sz="1200" dirty="0">
+              <a:solidFill>
+                <a:srgbClr val="1F2528"/>
+              </a:solidFill>
+              <a:latin typeface="Aptos" pitchFamily="34" charset="0"/>
+            </a:endParaRPr>
+          </a:p>
+          <a:p>
+            <a:pPr>
+              <a:lnSpc>
+                <a:spcPct val="90000"/>
+              </a:lnSpc>
+            </a:pPr>
+            <a:r>
+              <a:rPr lang="en-US" sz="1200" dirty="0">
+                <a:solidFill>
+                  <a:srgbClr val="1F2528"/>
+                </a:solidFill>
+                <a:latin typeface="Aptos" pitchFamily="34" charset="0"/>
+                <a:ea typeface="Aptos" pitchFamily="34" charset="-122"/>
+                <a:cs typeface="Aptos" pitchFamily="34" charset="-120"/>
+              </a:rPr>
+              <a:t>Hyperparameter tuning helped but did not create the step-change that later came from pretrained representations.</a:t>
+            </a:r>
+            <a:endParaRPr lang="en-US" sz="1200" dirty="0"/>
+          </a:p>
+          <a:p>
+            <a:pPr marL="0" indent="0" algn="l">
+              <a:lnSpc>
+                <a:spcPct val="90000"/>
+              </a:lnSpc>
+              <a:buNone/>
+            </a:pPr>
+            <a:endParaRPr lang="en-US" sz="1200" dirty="0"/>
+          </a:p>
+        </p:txBody>
+      </p:sp>
+      <p:sp>
+        <p:nvSpPr>
+          <p:cNvPr id="26" name="Text 23"/>
+          <p:cNvSpPr/>
+          <p:nvPr/>
+        </p:nvSpPr>
+        <p:spPr>
+          <a:xfrm>
+            <a:off x="6446520" y="5559552"/>
+            <a:ext cx="4434840" cy="384048"/>
+          </a:xfrm>
+          <a:prstGeom prst="rect">
+            <a:avLst/>
+          </a:prstGeom>
+          <a:noFill/>
+          <a:ln/>
+        </p:spPr>
+        <p:txBody>
+          <a:bodyPr wrap="square" lIns="0" tIns="0" rIns="0" bIns="0" rtlCol="0" anchor="t">
+            <a:normAutofit/>
+          </a:bodyPr>
+          <a:lstStyle/>
+          <a:p>
+            <a:pPr marL="0" indent="0" algn="l">
+              <a:lnSpc>
+                <a:spcPct val="90000"/>
+              </a:lnSpc>
+              <a:buNone/>
+            </a:pPr>
+            <a:endParaRPr lang="en-US" sz="1040" dirty="0"/>
+          </a:p>
+        </p:txBody>
+      </p:sp>
       <p:pic>
         <p:nvPicPr>
-          <p:cNvPr id="6146" name="Picture 2">
+          <p:cNvPr id="27" name="Image 0" descr="/Users/andrew/Library/CloudStorage/OneDrive-CornellUniversity/Courses/SYSEN5888/ Project/cnn_variations_summary_curve.png"/>
+          <p:cNvPicPr>
+            <a:picLocks noChangeAspect="1"/>
+          </p:cNvPicPr>
+          <p:nvPr/>
+        </p:nvPicPr>
+        <p:blipFill>
+          <a:blip r:embed="rId3"/>
+          <a:srcRect/>
+          <a:stretch/>
+        </p:blipFill>
+        <p:spPr>
+          <a:xfrm>
+            <a:off x="6446520" y="1307592"/>
+            <a:ext cx="5065776" cy="3858768"/>
+          </a:xfrm>
+          <a:prstGeom prst="rect">
+            <a:avLst/>
+          </a:prstGeom>
+        </p:spPr>
+      </p:pic>
+      <p:sp>
+        <p:nvSpPr>
+          <p:cNvPr id="28" name="Text 24"/>
+          <p:cNvSpPr/>
+          <p:nvPr/>
+        </p:nvSpPr>
+        <p:spPr>
+          <a:xfrm>
+            <a:off x="11082528" y="6473952"/>
+            <a:ext cx="384048" cy="128016"/>
+          </a:xfrm>
+          <a:prstGeom prst="rect">
+            <a:avLst/>
+          </a:prstGeom>
+          <a:noFill/>
+          <a:ln/>
+        </p:spPr>
+        <p:txBody>
+          <a:bodyPr wrap="square" lIns="0" tIns="0" rIns="0" bIns="0" rtlCol="0" anchor="t">
+            <a:normAutofit/>
+          </a:bodyPr>
+          <a:lstStyle/>
+          <a:p>
+            <a:pPr marL="0" indent="0" algn="r">
+              <a:lnSpc>
+                <a:spcPct val="90000"/>
+              </a:lnSpc>
+              <a:buNone/>
+            </a:pPr>
+            <a:r>
+              <a:rPr lang="en-US" sz="750" dirty="0">
+                <a:solidFill>
+                  <a:srgbClr val="6B7176"/>
+                </a:solidFill>
+                <a:latin typeface="Aptos" pitchFamily="34" charset="0"/>
+                <a:ea typeface="Aptos" pitchFamily="34" charset="-122"/>
+                <a:cs typeface="Aptos" pitchFamily="34" charset="-120"/>
+              </a:rPr>
+              <a:t>06</a:t>
+            </a:r>
+            <a:endParaRPr lang="en-US" sz="750" dirty="0"/>
+          </a:p>
+        </p:txBody>
+      </p:sp>
+      <p:sp>
+        <p:nvSpPr>
+          <p:cNvPr id="29" name="Text 25"/>
+          <p:cNvSpPr/>
+          <p:nvPr/>
+        </p:nvSpPr>
+        <p:spPr>
+          <a:xfrm>
+            <a:off x="594360" y="6446520"/>
+            <a:ext cx="1828800" cy="128016"/>
+          </a:xfrm>
+          <a:prstGeom prst="rect">
+            <a:avLst/>
+          </a:prstGeom>
+          <a:noFill/>
+          <a:ln/>
+        </p:spPr>
+        <p:txBody>
+          <a:bodyPr wrap="square" lIns="0" tIns="0" rIns="0" bIns="0" rtlCol="0" anchor="t">
+            <a:normAutofit/>
+          </a:bodyPr>
+          <a:lstStyle/>
+          <a:p>
+            <a:pPr marL="0" indent="0" algn="l">
+              <a:lnSpc>
+                <a:spcPct val="90000"/>
+              </a:lnSpc>
+              <a:buNone/>
+            </a:pPr>
+            <a:r>
+              <a:rPr lang="en-US" sz="800" dirty="0">
+                <a:solidFill>
+                  <a:srgbClr val="6B7176"/>
+                </a:solidFill>
+                <a:latin typeface="Aptos" pitchFamily="34" charset="0"/>
+                <a:ea typeface="Aptos" pitchFamily="34" charset="-122"/>
+                <a:cs typeface="Aptos" pitchFamily="34" charset="-120"/>
+              </a:rPr>
+              <a:t>Era 1</a:t>
+            </a:r>
+            <a:endParaRPr lang="en-US" sz="800" dirty="0"/>
+          </a:p>
+        </p:txBody>
+      </p:sp>
+      <p:sp>
+        <p:nvSpPr>
+          <p:cNvPr id="19" name="Shape 25">
             <a:extLst>
               <a:ext uri="{FF2B5EF4-FFF2-40B4-BE49-F238E27FC236}">
-                <a16:creationId xmlns:a16="http://schemas.microsoft.com/office/drawing/2014/main" id="{0C21B85F-A11B-FA9F-F63A-8930A9ECABCA}"/>
+                <a16:creationId xmlns:a16="http://schemas.microsoft.com/office/drawing/2014/main" id="{6B621938-6C9B-F684-C6E1-1EF4408FAEE1}"/>
+              </a:ext>
+            </a:extLst>
+          </p:cNvPr>
+          <p:cNvSpPr/>
+          <p:nvPr/>
+        </p:nvSpPr>
+        <p:spPr>
+          <a:xfrm>
+            <a:off x="9550658" y="750101"/>
+            <a:ext cx="1755200" cy="295381"/>
+          </a:xfrm>
+          <a:prstGeom prst="chevron">
+            <a:avLst/>
+          </a:prstGeom>
+          <a:solidFill>
+            <a:srgbClr val="D7DDE0">
+              <a:alpha val="90000"/>
+            </a:srgbClr>
+          </a:solidFill>
+          <a:ln w="12700">
+            <a:solidFill>
+              <a:srgbClr val="F7F5EF"/>
+            </a:solidFill>
+            <a:prstDash val="solid"/>
+          </a:ln>
+        </p:spPr>
+        <p:txBody>
+          <a:bodyPr/>
+          <a:lstStyle/>
+          <a:p>
+            <a:endParaRPr lang="en-US" sz="1100"/>
+          </a:p>
+        </p:txBody>
+      </p:sp>
+      <p:pic>
+        <p:nvPicPr>
+          <p:cNvPr id="24" name="Picture 2" descr="Cornell University Logo, symbol, meaning, history, PNG, brand">
+            <a:extLst>
+              <a:ext uri="{FF2B5EF4-FFF2-40B4-BE49-F238E27FC236}">
+                <a16:creationId xmlns:a16="http://schemas.microsoft.com/office/drawing/2014/main" id="{C5A74DF1-464E-5E32-8310-9B3BBC7FD905}"/>
               </a:ext>
             </a:extLst>
           </p:cNvPr>
@@ -23901,7 +23824,7 @@
           </p:cNvPicPr>
           <p:nvPr/>
         </p:nvPicPr>
-        <p:blipFill>
+        <p:blipFill rotWithShape="1">
           <a:blip r:embed="rId4">
             <a:extLst>
               <a:ext uri="{28A0092B-C50C-407E-A947-70E740481C1C}">
@@ -23909,15 +23832,13 @@
               </a:ext>
             </a:extLst>
           </a:blip>
-          <a:srcRect/>
-          <a:stretch>
-            <a:fillRect/>
-          </a:stretch>
+          <a:srcRect l="15934" r="15589"/>
+          <a:stretch/>
         </p:blipFill>
         <p:spPr bwMode="auto">
           <a:xfrm>
-            <a:off x="6287692" y="1556753"/>
-            <a:ext cx="5464127" cy="2411188"/>
+            <a:off x="11320507" y="147128"/>
+            <a:ext cx="863884" cy="709633"/>
           </a:xfrm>
           <a:prstGeom prst="rect">
             <a:avLst/>
@@ -23936,10 +23857,10 @@
       </p:pic>
       <p:sp>
         <p:nvSpPr>
-          <p:cNvPr id="82" name="Text 36">
+          <p:cNvPr id="25" name="Shape 19">
             <a:extLst>
               <a:ext uri="{FF2B5EF4-FFF2-40B4-BE49-F238E27FC236}">
-                <a16:creationId xmlns:a16="http://schemas.microsoft.com/office/drawing/2014/main" id="{F104206D-EFB0-5514-3811-044DFB6AAB9B}"/>
+                <a16:creationId xmlns:a16="http://schemas.microsoft.com/office/drawing/2014/main" id="{A19E6E09-7436-0334-603F-AE64A504872B}"/>
               </a:ext>
             </a:extLst>
           </p:cNvPr>
@@ -23948,8 +23869,46 @@
         </p:nvSpPr>
         <p:spPr>
           <a:xfrm>
-            <a:off x="731520" y="4425695"/>
-            <a:ext cx="1645920" cy="182880"/>
+            <a:off x="6237447" y="751408"/>
+            <a:ext cx="1809206" cy="295381"/>
+          </a:xfrm>
+          <a:prstGeom prst="chevron">
+            <a:avLst/>
+          </a:prstGeom>
+          <a:solidFill>
+            <a:srgbClr val="426E9E"/>
+          </a:solidFill>
+          <a:ln w="12700">
+            <a:solidFill>
+              <a:srgbClr val="F7F5EF"/>
+            </a:solidFill>
+            <a:prstDash val="solid"/>
+          </a:ln>
+        </p:spPr>
+        <p:txBody>
+          <a:bodyPr/>
+          <a:lstStyle/>
+          <a:p>
+            <a:endParaRPr lang="en-US" sz="1100" dirty="0"/>
+          </a:p>
+        </p:txBody>
+      </p:sp>
+      <p:sp>
+        <p:nvSpPr>
+          <p:cNvPr id="30" name="Text 20">
+            <a:extLst>
+              <a:ext uri="{FF2B5EF4-FFF2-40B4-BE49-F238E27FC236}">
+                <a16:creationId xmlns:a16="http://schemas.microsoft.com/office/drawing/2014/main" id="{8F3484FD-8FEB-AA36-CF7E-00275362D9A7}"/>
+              </a:ext>
+            </a:extLst>
+          </p:cNvPr>
+          <p:cNvSpPr/>
+          <p:nvPr/>
+        </p:nvSpPr>
+        <p:spPr>
+          <a:xfrm>
+            <a:off x="6287692" y="833886"/>
+            <a:ext cx="1597682" cy="75563"/>
           </a:xfrm>
           <a:prstGeom prst="rect">
             <a:avLst/>
@@ -23959,34 +23918,37 @@
         </p:spPr>
         <p:txBody>
           <a:bodyPr wrap="square" lIns="0" tIns="0" rIns="0" bIns="0" rtlCol="0" anchor="t">
-            <a:normAutofit/>
+            <a:normAutofit fontScale="92500" lnSpcReduction="20000"/>
           </a:bodyPr>
           <a:lstStyle/>
           <a:p>
-            <a:pPr marL="0" indent="0" algn="l">
+            <a:pPr marL="0" indent="0" algn="ctr">
               <a:lnSpc>
                 <a:spcPct val="90000"/>
               </a:lnSpc>
               <a:buNone/>
             </a:pPr>
             <a:r>
-              <a:rPr lang="en-US" sz="1000" b="1" dirty="0">
-                <a:solidFill>
-                  <a:srgbClr val="426E9E"/>
+              <a:rPr lang="en-US" sz="700" b="1" dirty="0">
+                <a:solidFill>
+                  <a:srgbClr val="FFFFFF"/>
                 </a:solidFill>
                 <a:latin typeface="Aptos" pitchFamily="34" charset="0"/>
-              </a:rPr>
-              <a:t>Results</a:t>
-            </a:r>
-          </a:p>
-        </p:txBody>
-      </p:sp>
-      <p:sp>
-        <p:nvSpPr>
-          <p:cNvPr id="83" name="Text 37">
+                <a:ea typeface="Aptos" pitchFamily="34" charset="-122"/>
+                <a:cs typeface="Aptos" pitchFamily="34" charset="-120"/>
+              </a:rPr>
+              <a:t>Training from scratch</a:t>
+            </a:r>
+            <a:endParaRPr lang="en-US" sz="700" dirty="0"/>
+          </a:p>
+        </p:txBody>
+      </p:sp>
+      <p:sp>
+        <p:nvSpPr>
+          <p:cNvPr id="31" name="Text 21">
             <a:extLst>
               <a:ext uri="{FF2B5EF4-FFF2-40B4-BE49-F238E27FC236}">
-                <a16:creationId xmlns:a16="http://schemas.microsoft.com/office/drawing/2014/main" id="{1337ACAA-EB2E-74B2-35C8-58CA6BF0D85A}"/>
+                <a16:creationId xmlns:a16="http://schemas.microsoft.com/office/drawing/2014/main" id="{3039B58A-3FBD-163E-F613-615D44EC9D2A}"/>
               </a:ext>
             </a:extLst>
           </p:cNvPr>
@@ -23995,8 +23957,8 @@
         </p:nvSpPr>
         <p:spPr>
           <a:xfrm>
-            <a:off x="731520" y="4727447"/>
-            <a:ext cx="3886200" cy="420624"/>
+            <a:off x="6295809" y="928966"/>
+            <a:ext cx="1597682" cy="58389"/>
           </a:xfrm>
           <a:prstGeom prst="rect">
             <a:avLst/>
@@ -24006,37 +23968,77 @@
         </p:spPr>
         <p:txBody>
           <a:bodyPr wrap="square" lIns="0" tIns="0" rIns="0" bIns="0" rtlCol="0" anchor="t">
-            <a:normAutofit/>
+            <a:normAutofit fontScale="92500" lnSpcReduction="20000"/>
           </a:bodyPr>
           <a:lstStyle/>
           <a:p>
-            <a:pPr marL="0" indent="0" algn="l">
+            <a:pPr marL="0" indent="0" algn="ctr">
               <a:lnSpc>
                 <a:spcPct val="90000"/>
               </a:lnSpc>
               <a:buNone/>
             </a:pPr>
             <a:r>
-              <a:rPr lang="en-US" sz="1130" dirty="0">
-                <a:solidFill>
-                  <a:srgbClr val="1F2528"/>
+              <a:rPr lang="en-US" sz="500" dirty="0" err="1">
+                <a:solidFill>
+                  <a:srgbClr val="D9D9D9"/>
+                </a:solidFill>
+                <a:latin typeface="Aptos" pitchFamily="34" charset="0"/>
+              </a:rPr>
+              <a:t>Piczak</a:t>
+            </a:r>
+            <a:r>
+              <a:rPr lang="en-US" sz="500" dirty="0">
+                <a:solidFill>
+                  <a:srgbClr val="D9D9D9"/>
+                </a:solidFill>
+                <a:latin typeface="Aptos" pitchFamily="34" charset="0"/>
+              </a:rPr>
+              <a:t> CNN | </a:t>
+            </a:r>
+            <a:r>
+              <a:rPr lang="en-US" sz="500" b="1" dirty="0">
+                <a:solidFill>
+                  <a:srgbClr val="FFFFFF"/>
+                </a:solidFill>
+                <a:latin typeface="Aptos" pitchFamily="34" charset="0"/>
+              </a:rPr>
+              <a:t>Variations</a:t>
+            </a:r>
+            <a:r>
+              <a:rPr lang="en-US" sz="500" dirty="0">
+                <a:solidFill>
+                  <a:srgbClr val="D9D9D9"/>
+                </a:solidFill>
+                <a:latin typeface="Aptos" pitchFamily="34" charset="0"/>
+              </a:rPr>
+              <a:t> </a:t>
+            </a:r>
+            <a:r>
+              <a:rPr lang="en-US" sz="500" dirty="0">
+                <a:solidFill>
+                  <a:srgbClr val="D9D9D9"/>
                 </a:solidFill>
                 <a:latin typeface="Aptos" pitchFamily="34" charset="0"/>
                 <a:ea typeface="Aptos" pitchFamily="34" charset="-122"/>
                 <a:cs typeface="Aptos" pitchFamily="34" charset="-120"/>
               </a:rPr>
-              <a:t>Alternative from-scratch architecture: tests temporal modeling before importing external pretrained knowledge.</a:t>
-            </a:r>
-            <a:endParaRPr lang="en-US" sz="1130" dirty="0"/>
-          </a:p>
-        </p:txBody>
-      </p:sp>
-      <p:sp>
-        <p:nvSpPr>
-          <p:cNvPr id="84" name="Text 11">
+              <a:t>| LSTM</a:t>
+            </a:r>
+            <a:endParaRPr lang="en-US" sz="500" dirty="0">
+              <a:solidFill>
+                <a:srgbClr val="D9D9D9"/>
+              </a:solidFill>
+            </a:endParaRPr>
+          </a:p>
+        </p:txBody>
+      </p:sp>
+      <p:sp>
+        <p:nvSpPr>
+          <p:cNvPr id="32" name="Shape 22">
             <a:extLst>
               <a:ext uri="{FF2B5EF4-FFF2-40B4-BE49-F238E27FC236}">
-                <a16:creationId xmlns:a16="http://schemas.microsoft.com/office/drawing/2014/main" id="{5B557A98-14B0-CECC-8DC9-CE3D867DCE43}"/>
+                <a16:creationId xmlns:a16="http://schemas.microsoft.com/office/drawing/2014/main" id="{FF38F45D-D531-EDE8-2EF6-54A906C11034}"/>
               </a:ext>
             </a:extLst>
           </p:cNvPr>
@@ -24045,8 +24047,48 @@
         </p:nvSpPr>
         <p:spPr>
           <a:xfrm>
-            <a:off x="777240" y="1325880"/>
-            <a:ext cx="1828800" cy="182880"/>
+            <a:off x="7891484" y="750102"/>
+            <a:ext cx="1809206" cy="295381"/>
+          </a:xfrm>
+          <a:prstGeom prst="chevron">
+            <a:avLst/>
+          </a:prstGeom>
+          <a:solidFill>
+            <a:srgbClr val="D7DDE0">
+              <a:alpha val="90000"/>
+            </a:srgbClr>
+          </a:solidFill>
+          <a:ln w="12700">
+            <a:solidFill>
+              <a:srgbClr val="F7F5EF"/>
+            </a:solidFill>
+            <a:prstDash val="solid"/>
+          </a:ln>
+        </p:spPr>
+        <p:txBody>
+          <a:bodyPr/>
+          <a:lstStyle/>
+          <a:p>
+            <a:endParaRPr lang="en-US" sz="1100"/>
+          </a:p>
+        </p:txBody>
+      </p:sp>
+      <p:sp>
+        <p:nvSpPr>
+          <p:cNvPr id="33" name="Text 23">
+            <a:extLst>
+              <a:ext uri="{FF2B5EF4-FFF2-40B4-BE49-F238E27FC236}">
+                <a16:creationId xmlns:a16="http://schemas.microsoft.com/office/drawing/2014/main" id="{16945683-C0E3-8CA8-E873-71FD2C589403}"/>
+              </a:ext>
+            </a:extLst>
+          </p:cNvPr>
+          <p:cNvSpPr/>
+          <p:nvPr/>
+        </p:nvSpPr>
+        <p:spPr>
+          <a:xfrm>
+            <a:off x="7963330" y="839252"/>
+            <a:ext cx="1597682" cy="75563"/>
           </a:xfrm>
           <a:prstGeom prst="rect">
             <a:avLst/>
@@ -24056,37 +24098,37 @@
         </p:spPr>
         <p:txBody>
           <a:bodyPr wrap="square" lIns="0" tIns="0" rIns="0" bIns="0" rtlCol="0" anchor="t">
-            <a:normAutofit/>
+            <a:normAutofit fontScale="92500" lnSpcReduction="20000"/>
           </a:bodyPr>
           <a:lstStyle/>
           <a:p>
-            <a:pPr marL="0" indent="0" algn="l">
+            <a:pPr marL="0" indent="0" algn="ctr">
               <a:lnSpc>
                 <a:spcPct val="90000"/>
               </a:lnSpc>
               <a:buNone/>
             </a:pPr>
             <a:r>
-              <a:rPr lang="en-US" sz="1000" b="1" dirty="0">
-                <a:solidFill>
-                  <a:srgbClr val="426E9E"/>
+              <a:rPr lang="en-US" sz="700" b="1" dirty="0">
+                <a:solidFill>
+                  <a:srgbClr val="30383D"/>
                 </a:solidFill>
                 <a:latin typeface="Aptos" pitchFamily="34" charset="0"/>
                 <a:ea typeface="Aptos" pitchFamily="34" charset="-122"/>
                 <a:cs typeface="Aptos" pitchFamily="34" charset="-120"/>
               </a:rPr>
-              <a:t>What Changed?</a:t>
-            </a:r>
-            <a:endParaRPr lang="en-US" sz="1000" dirty="0"/>
-          </a:p>
-        </p:txBody>
-      </p:sp>
-      <p:sp>
-        <p:nvSpPr>
-          <p:cNvPr id="85" name="Text 12">
+              <a:t>Transfer learning: pretrained CNN</a:t>
+            </a:r>
+            <a:endParaRPr lang="en-US" sz="700" dirty="0"/>
+          </a:p>
+        </p:txBody>
+      </p:sp>
+      <p:sp>
+        <p:nvSpPr>
+          <p:cNvPr id="34" name="Text 24">
             <a:extLst>
               <a:ext uri="{FF2B5EF4-FFF2-40B4-BE49-F238E27FC236}">
-                <a16:creationId xmlns:a16="http://schemas.microsoft.com/office/drawing/2014/main" id="{E587FDA3-B3DA-CEE8-05B7-9AE2E8FEC7A0}"/>
+                <a16:creationId xmlns:a16="http://schemas.microsoft.com/office/drawing/2014/main" id="{F5B6A1B0-9974-9455-2C1F-AC8FDA91CEEE}"/>
               </a:ext>
             </a:extLst>
           </p:cNvPr>
@@ -24095,8 +24137,8 @@
         </p:nvSpPr>
         <p:spPr>
           <a:xfrm>
-            <a:off x="777240" y="1600200"/>
-            <a:ext cx="5950564" cy="411480"/>
+            <a:off x="7984136" y="941012"/>
+            <a:ext cx="1597682" cy="58389"/>
           </a:xfrm>
           <a:prstGeom prst="rect">
             <a:avLst/>
@@ -24106,37 +24148,132 @@
         </p:spPr>
         <p:txBody>
           <a:bodyPr wrap="square" lIns="0" tIns="0" rIns="0" bIns="0" rtlCol="0" anchor="t">
-            <a:normAutofit/>
+            <a:normAutofit fontScale="92500" lnSpcReduction="20000"/>
           </a:bodyPr>
           <a:lstStyle/>
           <a:p>
-            <a:pPr marL="0" indent="0" algn="l">
+            <a:pPr marL="0" indent="0" algn="ctr">
               <a:lnSpc>
                 <a:spcPct val="90000"/>
               </a:lnSpc>
               <a:buNone/>
             </a:pPr>
             <a:r>
-              <a:rPr lang="en-US" sz="1900" b="1" dirty="0">
-                <a:solidFill>
-                  <a:srgbClr val="1F2528"/>
-                </a:solidFill>
-                <a:latin typeface="Aptos Display" pitchFamily="34" charset="0"/>
-                <a:ea typeface="Aptos Display" pitchFamily="34" charset="-122"/>
-                <a:cs typeface="Aptos Display" pitchFamily="34" charset="-120"/>
-              </a:rPr>
-              <a:t>TEXT GOES HERE</a:t>
-            </a:r>
-            <a:endParaRPr lang="en-US" sz="1900" dirty="0"/>
+              <a:rPr lang="en-US" sz="500" dirty="0">
+                <a:solidFill>
+                  <a:srgbClr val="6B7176"/>
+                </a:solidFill>
+                <a:latin typeface="Aptos" pitchFamily="34" charset="0"/>
+                <a:ea typeface="Aptos" pitchFamily="34" charset="-122"/>
+                <a:cs typeface="Aptos" pitchFamily="34" charset="-120"/>
+              </a:rPr>
+              <a:t>VGGish | YAMNet</a:t>
+            </a:r>
+            <a:endParaRPr lang="en-US" sz="500" dirty="0"/>
+          </a:p>
+        </p:txBody>
+      </p:sp>
+      <p:sp>
+        <p:nvSpPr>
+          <p:cNvPr id="35" name="Text 26">
+            <a:extLst>
+              <a:ext uri="{FF2B5EF4-FFF2-40B4-BE49-F238E27FC236}">
+                <a16:creationId xmlns:a16="http://schemas.microsoft.com/office/drawing/2014/main" id="{AE247940-4F28-A462-FB2C-F4B9C01AB7A7}"/>
+              </a:ext>
+            </a:extLst>
+          </p:cNvPr>
+          <p:cNvSpPr/>
+          <p:nvPr/>
+        </p:nvSpPr>
+        <p:spPr>
+          <a:xfrm>
+            <a:off x="9657605" y="848441"/>
+            <a:ext cx="1597682" cy="75563"/>
+          </a:xfrm>
+          <a:prstGeom prst="rect">
+            <a:avLst/>
+          </a:prstGeom>
+          <a:noFill/>
+          <a:ln/>
+        </p:spPr>
+        <p:txBody>
+          <a:bodyPr wrap="square" lIns="0" tIns="0" rIns="0" bIns="0" rtlCol="0" anchor="t">
+            <a:normAutofit fontScale="92500" lnSpcReduction="20000"/>
+          </a:bodyPr>
+          <a:lstStyle/>
+          <a:p>
+            <a:pPr marL="0" indent="0" algn="ctr">
+              <a:lnSpc>
+                <a:spcPct val="90000"/>
+              </a:lnSpc>
+              <a:buNone/>
+            </a:pPr>
+            <a:r>
+              <a:rPr lang="en-US" sz="700" b="1" dirty="0">
+                <a:solidFill>
+                  <a:srgbClr val="30383D"/>
+                </a:solidFill>
+                <a:latin typeface="Aptos" pitchFamily="34" charset="0"/>
+                <a:ea typeface="Aptos" pitchFamily="34" charset="-122"/>
+                <a:cs typeface="Aptos" pitchFamily="34" charset="-120"/>
+              </a:rPr>
+              <a:t>Transfer learning: pretrained transformers</a:t>
+            </a:r>
+            <a:endParaRPr lang="en-US" sz="700" dirty="0"/>
+          </a:p>
+        </p:txBody>
+      </p:sp>
+      <p:sp>
+        <p:nvSpPr>
+          <p:cNvPr id="36" name="Text 27">
+            <a:extLst>
+              <a:ext uri="{FF2B5EF4-FFF2-40B4-BE49-F238E27FC236}">
+                <a16:creationId xmlns:a16="http://schemas.microsoft.com/office/drawing/2014/main" id="{84C7863A-378B-51E0-045C-B3C1A3462236}"/>
+              </a:ext>
+            </a:extLst>
+          </p:cNvPr>
+          <p:cNvSpPr/>
+          <p:nvPr/>
+        </p:nvSpPr>
+        <p:spPr>
+          <a:xfrm>
+            <a:off x="9657605" y="944489"/>
+            <a:ext cx="1662902" cy="107931"/>
+          </a:xfrm>
+          <a:prstGeom prst="rect">
+            <a:avLst/>
+          </a:prstGeom>
+          <a:noFill/>
+          <a:ln/>
+        </p:spPr>
+        <p:txBody>
+          <a:bodyPr wrap="square" lIns="0" tIns="0" rIns="0" bIns="0" rtlCol="0" anchor="t">
+            <a:normAutofit/>
+          </a:bodyPr>
+          <a:lstStyle/>
+          <a:p>
+            <a:pPr marL="0" indent="0" algn="ctr">
+              <a:lnSpc>
+                <a:spcPct val="90000"/>
+              </a:lnSpc>
+              <a:buNone/>
+            </a:pPr>
+            <a:r>
+              <a:rPr lang="en-US" sz="500" dirty="0">
+                <a:solidFill>
+                  <a:srgbClr val="6B7176"/>
+                </a:solidFill>
+                <a:latin typeface="Aptos" pitchFamily="34" charset="0"/>
+                <a:ea typeface="Aptos" pitchFamily="34" charset="-122"/>
+                <a:cs typeface="Aptos" pitchFamily="34" charset="-120"/>
+              </a:rPr>
+              <a:t>AST | BEATs</a:t>
+            </a:r>
+            <a:endParaRPr lang="en-US" sz="500" dirty="0"/>
           </a:p>
         </p:txBody>
       </p:sp>
     </p:spTree>
-    <p:extLst>
-      <p:ext uri="{BB962C8B-B14F-4D97-AF65-F5344CB8AC3E}">
-        <p14:creationId xmlns:p14="http://schemas.microsoft.com/office/powerpoint/2010/main" val="1364430808"/>
-      </p:ext>
-    </p:extLst>
   </p:cSld>
   <p:clrMapOvr>
     <a:masterClrMapping/>
@@ -29278,7 +29415,7 @@
         <p:spPr>
           <a:xfrm>
             <a:off x="6182085" y="1296008"/>
-            <a:ext cx="4274361" cy="2367493"/>
+            <a:ext cx="4691231" cy="2251881"/>
           </a:xfrm>
           <a:prstGeom prst="rect">
             <a:avLst/>
@@ -29505,7 +29642,7 @@
         </p:nvSpPr>
         <p:spPr>
           <a:xfrm>
-            <a:off x="780690" y="2189978"/>
+            <a:off x="780829" y="2163539"/>
             <a:ext cx="5440680" cy="164592"/>
           </a:xfrm>
           <a:prstGeom prst="rect">
@@ -29520,24 +29657,20 @@
           </a:bodyPr>
           <a:lstStyle/>
           <a:p>
-            <a:pPr marL="0" indent="0" algn="l">
+            <a:pPr>
               <a:lnSpc>
                 <a:spcPct val="90000"/>
               </a:lnSpc>
-              <a:buNone/>
             </a:pPr>
             <a:r>
-              <a:rPr lang="en-US" sz="1020" b="1" dirty="0">
-                <a:solidFill>
-                  <a:srgbClr val="6B7176"/>
+              <a:rPr lang="en-US" sz="1000" b="1" dirty="0">
+                <a:solidFill>
+                  <a:srgbClr val="426E9E"/>
                 </a:solidFill>
                 <a:latin typeface="Aptos" pitchFamily="34" charset="0"/>
-                <a:ea typeface="Aptos" pitchFamily="34" charset="-122"/>
-                <a:cs typeface="Aptos" pitchFamily="34" charset="-120"/>
               </a:rPr>
               <a:t>LSTM architecture</a:t>
             </a:r>
-            <a:endParaRPr lang="en-US" sz="1020" dirty="0"/>
           </a:p>
         </p:txBody>
       </p:sp>
@@ -29556,13 +29689,13 @@
           <p:nvPr>
             <p:extLst>
               <p:ext uri="{D42A27DB-BD31-4B8C-83A1-F6EECF244321}">
-                <p14:modId xmlns:p14="http://schemas.microsoft.com/office/powerpoint/2010/main" val="1656511783"/>
+                <p14:modId xmlns:p14="http://schemas.microsoft.com/office/powerpoint/2010/main" val="3222696318"/>
               </p:ext>
             </p:extLst>
           </p:nvPr>
         </p:nvGraphicFramePr>
         <p:xfrm>
-          <a:off x="737817" y="2366641"/>
+          <a:off x="777241" y="2354342"/>
           <a:ext cx="4434165" cy="1821180"/>
         </p:xfrm>
         <a:graphic>
@@ -30797,13 +30930,13 @@
           <p:nvPr>
             <p:extLst>
               <p:ext uri="{D42A27DB-BD31-4B8C-83A1-F6EECF244321}">
-                <p14:modId xmlns:p14="http://schemas.microsoft.com/office/powerpoint/2010/main" val="267553208"/>
+                <p14:modId xmlns:p14="http://schemas.microsoft.com/office/powerpoint/2010/main" val="2695269915"/>
               </p:ext>
             </p:extLst>
           </p:nvPr>
         </p:nvGraphicFramePr>
         <p:xfrm>
-          <a:off x="737816" y="4300968"/>
+          <a:off x="777240" y="4288669"/>
           <a:ext cx="4434166" cy="1158240"/>
         </p:xfrm>
         <a:graphic>
@@ -31848,13 +31981,13 @@
           <p:nvPr>
             <p:extLst>
               <p:ext uri="{D42A27DB-BD31-4B8C-83A1-F6EECF244321}">
-                <p14:modId xmlns:p14="http://schemas.microsoft.com/office/powerpoint/2010/main" val="2859822257"/>
+                <p14:modId xmlns:p14="http://schemas.microsoft.com/office/powerpoint/2010/main" val="110652709"/>
               </p:ext>
             </p:extLst>
           </p:nvPr>
         </p:nvGraphicFramePr>
         <p:xfrm>
-          <a:off x="737818" y="5572355"/>
+          <a:off x="777242" y="5560056"/>
           <a:ext cx="4434164" cy="600456"/>
         </p:xfrm>
         <a:graphic>

--- a/Docs/Final_Project_Presentation_Draft.pptx
+++ b/Docs/Final_Project_Presentation_Draft.pptx
@@ -5,24 +5,25 @@
     <p:sldMasterId id="2147483648" r:id="rId1"/>
   </p:sldMasterIdLst>
   <p:notesMasterIdLst>
-    <p:notesMasterId r:id="rId17"/>
+    <p:notesMasterId r:id="rId18"/>
   </p:notesMasterIdLst>
   <p:sldIdLst>
-    <p:sldId id="256" r:id="rId2"/>
-    <p:sldId id="257" r:id="rId3"/>
-    <p:sldId id="258" r:id="rId4"/>
-    <p:sldId id="259" r:id="rId5"/>
-    <p:sldId id="260" r:id="rId6"/>
-    <p:sldId id="271" r:id="rId7"/>
-    <p:sldId id="261" r:id="rId8"/>
-    <p:sldId id="270" r:id="rId9"/>
-    <p:sldId id="262" r:id="rId10"/>
-    <p:sldId id="263" r:id="rId11"/>
-    <p:sldId id="264" r:id="rId12"/>
-    <p:sldId id="265" r:id="rId13"/>
-    <p:sldId id="266" r:id="rId14"/>
-    <p:sldId id="267" r:id="rId15"/>
-    <p:sldId id="268" r:id="rId16"/>
+    <p:sldId id="273" r:id="rId2"/>
+    <p:sldId id="256" r:id="rId3"/>
+    <p:sldId id="257" r:id="rId4"/>
+    <p:sldId id="258" r:id="rId5"/>
+    <p:sldId id="259" r:id="rId6"/>
+    <p:sldId id="260" r:id="rId7"/>
+    <p:sldId id="271" r:id="rId8"/>
+    <p:sldId id="261" r:id="rId9"/>
+    <p:sldId id="270" r:id="rId10"/>
+    <p:sldId id="262" r:id="rId11"/>
+    <p:sldId id="263" r:id="rId12"/>
+    <p:sldId id="264" r:id="rId13"/>
+    <p:sldId id="265" r:id="rId14"/>
+    <p:sldId id="266" r:id="rId15"/>
+    <p:sldId id="267" r:id="rId16"/>
+    <p:sldId id="268" r:id="rId17"/>
   </p:sldIdLst>
   <p:sldSz cx="12192000" cy="6858000"/>
   <p:notesSz cx="6858000" cy="12192000"/>
@@ -295,56 +296,6 @@
           <a:bodyPr/>
           <a:lstStyle/>
           <a:p>
-            <a:r>
-              <a:rPr lang="en-US" b="0" i="0" dirty="0">
-                <a:solidFill>
-                  <a:srgbClr val="FFFFFF"/>
-                </a:solidFill>
-                <a:effectLst/>
-                <a:latin typeface="-apple-system"/>
-              </a:rPr>
-              <a:t>we wanted to search out a means of showing how the evolution of neural network models would result in measurable accuracy increases over time. We then searched for a clean data set of a manageable size and good quality that could serve as that vehicle. </a:t>
-            </a:r>
-            <a:r>
-              <a:rPr lang="en-US" b="0" i="0" dirty="0" err="1">
-                <a:solidFill>
-                  <a:srgbClr val="FFFFFF"/>
-                </a:solidFill>
-                <a:effectLst/>
-                <a:latin typeface="-apple-system"/>
-              </a:rPr>
-              <a:t>Piczak's</a:t>
-            </a:r>
-            <a:r>
-              <a:rPr lang="en-US" b="0" i="0" dirty="0">
-                <a:solidFill>
-                  <a:srgbClr val="FFFFFF"/>
-                </a:solidFill>
-                <a:effectLst/>
-                <a:latin typeface="-apple-system"/>
-              </a:rPr>
-              <a:t> work gave us that, and with it we were able use his same data set to </a:t>
-            </a:r>
-            <a:r>
-              <a:rPr lang="en-US" b="0" i="0" dirty="0" err="1">
-                <a:solidFill>
-                  <a:srgbClr val="FFFFFF"/>
-                </a:solidFill>
-                <a:effectLst/>
-                <a:latin typeface="-apple-system"/>
-              </a:rPr>
-              <a:t>perfrom</a:t>
-            </a:r>
-            <a:r>
-              <a:rPr lang="en-US" b="0" i="0" dirty="0">
-                <a:solidFill>
-                  <a:srgbClr val="FFFFFF"/>
-                </a:solidFill>
-                <a:effectLst/>
-                <a:latin typeface="-apple-system"/>
-              </a:rPr>
-              <a:t> the same task and, walking them forward through the model eras - CNNs trained from scratch to transfer learning with pretrained CNN and finally to transfer learning with pretrained audio transformers. At each step we were able to compare against a known baseline.</a:t>
-            </a:r>
             <a:endParaRPr lang="en-US" dirty="0"/>
           </a:p>
         </p:txBody>
@@ -849,40 +800,7 @@
           <a:bodyPr/>
           <a:lstStyle/>
           <a:p>
-            <a:r>
-              <a:rPr lang="en-US" dirty="0"/>
-              <a:t> Our results did not follow the smooth chronological improvements that we’d initially expected.  What we found that was model fit mattered much more than model age.  Hyperparameter tuning and architectural complexity only produced minor improvements when the model was still only learning from the ESC-50 dataset.  Instead, the larger gains were seen when the model was able to use prior knowledge from audio pre-training. </a:t>
-            </a:r>
-            <a:br>
-              <a:rPr lang="en-US" dirty="0"/>
-            </a:br>
-            <a:br>
-              <a:rPr lang="en-US" dirty="0"/>
-            </a:br>
-            <a:r>
-              <a:rPr lang="en-US" dirty="0"/>
-              <a:t>As for our lessons learned, we found that our original assumption regarding the data set was accurate – it provided a great benchmark and was able to efficiently be used by various models to help test our hypothesis.  </a:t>
-            </a:r>
-            <a:br>
-              <a:rPr lang="en-US" dirty="0"/>
-            </a:br>
-            <a:br>
-              <a:rPr lang="en-US" dirty="0"/>
-            </a:br>
-            <a:r>
-              <a:rPr lang="en-US" dirty="0"/>
-              <a:t>What we found didn’t go as well is that recreation of the baseline was somewhat of a challenge due to the age of the original test and technological progressions since then.  Additionally, as is often the case with group work, communication and documentation is crucial.  It took a few last second code updates and model re-runs to make sure we had consistent results to compare.  </a:t>
-            </a:r>
-            <a:br>
-              <a:rPr lang="en-US" dirty="0"/>
-            </a:br>
-            <a:br>
-              <a:rPr lang="en-US" dirty="0"/>
-            </a:br>
-            <a:r>
-              <a:rPr lang="en-US" dirty="0"/>
-              <a:t>And lastly, a few things that could be changed to improve the results – it might have helped to use less variants but dive deeper into the results of them, giving us more time to explore the nuances of the models themselves.  Locking in the evaluation protocols would save time going forward.  Introducing a random forest analysis could have provided a more classical baseline to compare to in addition to the neural networks.  And one we had hoped to include but considered a bit too late was the introduction of a runtime metric as measure of improvement rather than just relying on model accuracy.  </a:t>
-            </a:r>
+            <a:endParaRPr lang="en-US" dirty="0"/>
           </a:p>
         </p:txBody>
       </p:sp>
@@ -904,6 +822,123 @@
             <a:fld id="{F7021451-1387-4CA6-816F-3879F97B5CBC}" type="slidenum">
               <a:rPr lang="en-US"/>
               <a:t>15</a:t>
+            </a:fld>
+            <a:endParaRPr lang="en-US"/>
+          </a:p>
+        </p:txBody>
+      </p:sp>
+    </p:spTree>
+    <p:extLst>
+      <p:ext uri="{BB962C8B-B14F-4D97-AF65-F5344CB8AC3E}">
+        <p14:creationId xmlns:p14="http://schemas.microsoft.com/office/powerpoint/2010/main" val="1024086991"/>
+      </p:ext>
+    </p:extLst>
+  </p:cSld>
+  <p:clrMapOvr>
+    <a:masterClrMapping/>
+  </p:clrMapOvr>
+</p:notes>
+</file>
+
+<file path=ppt/notesSlides/notesSlide16.xml><?xml version="1.0" encoding="utf-8"?>
+<p:notes xmlns:a="http://schemas.openxmlformats.org/drawingml/2006/main" xmlns:r="http://schemas.openxmlformats.org/officeDocument/2006/relationships" xmlns:p="http://schemas.openxmlformats.org/presentationml/2006/main">
+  <p:cSld>
+    <p:spTree>
+      <p:nvGrpSpPr>
+        <p:cNvPr id="1" name=""/>
+        <p:cNvGrpSpPr/>
+        <p:nvPr/>
+      </p:nvGrpSpPr>
+      <p:grpSpPr>
+        <a:xfrm>
+          <a:off x="0" y="0"/>
+          <a:ext cx="0" cy="0"/>
+          <a:chOff x="0" y="0"/>
+          <a:chExt cx="0" cy="0"/>
+        </a:xfrm>
+      </p:grpSpPr>
+      <p:sp>
+        <p:nvSpPr>
+          <p:cNvPr id="2" name="Slide Image Placeholder 1"/>
+          <p:cNvSpPr>
+            <a:spLocks noGrp="1" noRot="1" noChangeAspect="1"/>
+          </p:cNvSpPr>
+          <p:nvPr>
+            <p:ph type="sldImg"/>
+          </p:nvPr>
+        </p:nvSpPr>
+        <p:spPr/>
+      </p:sp>
+      <p:sp>
+        <p:nvSpPr>
+          <p:cNvPr id="3" name="Notes Placeholder 2"/>
+          <p:cNvSpPr>
+            <a:spLocks noGrp="1"/>
+          </p:cNvSpPr>
+          <p:nvPr>
+            <p:ph type="body" idx="1"/>
+          </p:nvPr>
+        </p:nvSpPr>
+        <p:spPr/>
+        <p:txBody>
+          <a:bodyPr/>
+          <a:lstStyle/>
+          <a:p>
+            <a:r>
+              <a:rPr lang="en-US" dirty="0"/>
+              <a:t> Our results did not follow the smooth chronological improvements that we’d initially expected.  What we found that was model fit mattered much more than model age.  Hyperparameter tuning and architectural complexity only produced minor improvements when the model was still only learning from the ESC-50 dataset.  Instead, the larger gains were seen when the model was able to use prior knowledge from audio pre-training. </a:t>
+            </a:r>
+            <a:br>
+              <a:rPr lang="en-US" dirty="0"/>
+            </a:br>
+            <a:br>
+              <a:rPr lang="en-US" dirty="0"/>
+            </a:br>
+            <a:r>
+              <a:rPr lang="en-US" dirty="0"/>
+              <a:t>As for our lessons learned, we found that our original assumption regarding the data set was accurate – it provided a great benchmark and was able to efficiently be used by various models to help test our hypothesis.  </a:t>
+            </a:r>
+            <a:br>
+              <a:rPr lang="en-US" dirty="0"/>
+            </a:br>
+            <a:br>
+              <a:rPr lang="en-US" dirty="0"/>
+            </a:br>
+            <a:r>
+              <a:rPr lang="en-US" dirty="0"/>
+              <a:t>What we found didn’t go as well is that recreation of the baseline was somewhat of a challenge due to the age of the original test and technological progressions since then.  Additionally, as is often the case with group work, communication and documentation is crucial.  It took a few last second code updates and model re-runs to make sure we had consistent results to compare.  </a:t>
+            </a:r>
+            <a:br>
+              <a:rPr lang="en-US" dirty="0"/>
+            </a:br>
+            <a:br>
+              <a:rPr lang="en-US" dirty="0"/>
+            </a:br>
+            <a:r>
+              <a:rPr lang="en-US" dirty="0"/>
+              <a:t>And lastly, a few things that could be changed to improve the results – it might have helped to use less variants but dive deeper into the results of them, giving us more time to explore the nuances of the models themselves.  Locking in the evaluation protocols would save time going forward.  Introducing a random forest analysis could have provided a more classical baseline to compare to in addition to the neural networks.  And one we had hoped to include but considered a bit too late was the introduction of a runtime metric as measure of improvement rather than just relying on model accuracy.  </a:t>
+            </a:r>
+          </a:p>
+        </p:txBody>
+      </p:sp>
+      <p:sp>
+        <p:nvSpPr>
+          <p:cNvPr id="4" name="Slide Number Placeholder 3"/>
+          <p:cNvSpPr>
+            <a:spLocks noGrp="1"/>
+          </p:cNvSpPr>
+          <p:nvPr>
+            <p:ph type="sldNum" sz="quarter" idx="10"/>
+          </p:nvPr>
+        </p:nvSpPr>
+        <p:spPr/>
+        <p:txBody>
+          <a:bodyPr/>
+          <a:lstStyle/>
+          <a:p>
+            <a:fld id="{F7021451-1387-4CA6-816F-3879F97B5CBC}" type="slidenum">
+              <a:rPr lang="en-US"/>
+              <a:t>16</a:t>
             </a:fld>
             <a:endParaRPr lang="en-US"/>
           </a:p>
@@ -974,18 +1009,19 @@
                 <a:effectLst/>
                 <a:latin typeface="-apple-system"/>
               </a:rPr>
-              <a:t>Main job: tell the audience exactly what we tested and how to judge success.</a:t>
-            </a:r>
-            <a:br>
-              <a:rPr lang="en-US" b="0" i="0" dirty="0">
+              <a:t>we wanted to search out a means of showing how the evolution of neural network models would result in measurable accuracy increases over time. We then searched for a clean data set of a manageable size and good quality that could serve as that vehicle. </a:t>
+            </a:r>
+            <a:r>
+              <a:rPr lang="en-US" b="0" i="0" dirty="0" err="1">
                 <a:solidFill>
                   <a:srgbClr val="FFFFFF"/>
                 </a:solidFill>
                 <a:effectLst/>
                 <a:latin typeface="-apple-system"/>
               </a:rPr>
-            </a:br>
-            <a:br>
+              <a:t>Piczak's</a:t>
+            </a:r>
+            <a:r>
               <a:rPr lang="en-US" b="0" i="0" dirty="0">
                 <a:solidFill>
                   <a:srgbClr val="FFFFFF"/>
@@ -993,18 +1029,19 @@
                 <a:effectLst/>
                 <a:latin typeface="-apple-system"/>
               </a:rPr>
-            </a:br>
-            <a:r>
-              <a:rPr lang="en-US" b="0" i="0" dirty="0">
+              <a:t> work gave us that, and with it we were able use his same data set to </a:t>
+            </a:r>
+            <a:r>
+              <a:rPr lang="en-US" b="0" i="0" dirty="0" err="1">
                 <a:solidFill>
                   <a:srgbClr val="FFFFFF"/>
                 </a:solidFill>
                 <a:effectLst/>
                 <a:latin typeface="-apple-system"/>
               </a:rPr>
-              <a:t>Narrative:</a:t>
-            </a:r>
-            <a:br>
+              <a:t>perfrom</a:t>
+            </a:r>
+            <a:r>
               <a:rPr lang="en-US" b="0" i="0" dirty="0">
                 <a:solidFill>
                   <a:srgbClr val="FFFFFF"/>
@@ -1012,36 +1049,7 @@
                 <a:effectLst/>
                 <a:latin typeface="-apple-system"/>
               </a:rPr>
-            </a:br>
-            <a:r>
-              <a:rPr lang="en-US" b="0" i="0" dirty="0">
-                <a:solidFill>
-                  <a:srgbClr val="FFFFFF"/>
-                </a:solidFill>
-                <a:effectLst/>
-                <a:latin typeface="-apple-system"/>
-              </a:rPr>
-              <a:t>Our hypothesis was that the modern neural-network techniques would out-perform the original model.  To test it, we re-created </a:t>
-            </a:r>
-            <a:r>
-              <a:rPr lang="en-US" b="0" i="0" dirty="0" err="1">
-                <a:solidFill>
-                  <a:srgbClr val="FFFFFF"/>
-                </a:solidFill>
-                <a:effectLst/>
-                <a:latin typeface="-apple-system"/>
-              </a:rPr>
-              <a:t>Piczak’s</a:t>
-            </a:r>
-            <a:r>
-              <a:rPr lang="en-US" b="0" i="0" dirty="0">
-                <a:solidFill>
-                  <a:srgbClr val="FFFFFF"/>
-                </a:solidFill>
-                <a:effectLst/>
-                <a:latin typeface="-apple-system"/>
-              </a:rPr>
-              <a:t> model to set a baseline.  We then left the problem set the same and evolved the analysis model using the final five-fold test accuracy with clip-level voting where required.  Ultimately, we used the results from the long segments with probability voting as the comparator to ensure an apples-to-apples comparison.  This was done across three different eras of neural network design – from a training-from-scratch approach, to utilizing transfer learning with a pre-trained CNN and final to transfer learning models with pre-trained transformers.</a:t>
+              <a:t> the same task and, walking them forward through the model eras - CNNs trained from scratch to transfer learning with pretrained CNN and finally to transfer learning with pretrained audio transformers. At each step we were able to compare against a known baseline.</a:t>
             </a:r>
             <a:endParaRPr lang="en-US" dirty="0"/>
           </a:p>
@@ -1128,53 +1136,83 @@
           <a:lstStyle/>
           <a:p>
             <a:r>
-              <a:rPr lang="en-US" dirty="0"/>
-              <a:t>Describe the baseline:</a:t>
+              <a:rPr lang="en-US" b="0" i="0" dirty="0">
+                <a:solidFill>
+                  <a:srgbClr val="FFFFFF"/>
+                </a:solidFill>
+                <a:effectLst/>
+                <a:latin typeface="-apple-system"/>
+              </a:rPr>
+              <a:t>Main job: tell the audience exactly what we tested and how to judge success.</a:t>
             </a:r>
             <a:br>
-              <a:rPr lang="en-US" dirty="0"/>
+              <a:rPr lang="en-US" b="0" i="0" dirty="0">
+                <a:solidFill>
+                  <a:srgbClr val="FFFFFF"/>
+                </a:solidFill>
+                <a:effectLst/>
+                <a:latin typeface="-apple-system"/>
+              </a:rPr>
             </a:br>
             <a:br>
-              <a:rPr lang="en-US" dirty="0"/>
+              <a:rPr lang="en-US" b="0" i="0" dirty="0">
+                <a:solidFill>
+                  <a:srgbClr val="FFFFFF"/>
+                </a:solidFill>
+                <a:effectLst/>
+                <a:latin typeface="-apple-system"/>
+              </a:rPr>
             </a:br>
             <a:r>
-              <a:rPr lang="en-US" dirty="0"/>
-              <a:t>Here we’ve got details about the baseline and the dataset.  We chose </a:t>
-            </a:r>
-            <a:r>
-              <a:rPr lang="en-US" dirty="0" err="1"/>
+              <a:rPr lang="en-US" b="0" i="0" dirty="0">
+                <a:solidFill>
+                  <a:srgbClr val="FFFFFF"/>
+                </a:solidFill>
+                <a:effectLst/>
+                <a:latin typeface="-apple-system"/>
+              </a:rPr>
+              <a:t>Narrative:</a:t>
+            </a:r>
+            <a:br>
+              <a:rPr lang="en-US" b="0" i="0" dirty="0">
+                <a:solidFill>
+                  <a:srgbClr val="FFFFFF"/>
+                </a:solidFill>
+                <a:effectLst/>
+                <a:latin typeface="-apple-system"/>
+              </a:rPr>
+            </a:br>
+            <a:r>
+              <a:rPr lang="en-US" b="0" i="0" dirty="0">
+                <a:solidFill>
+                  <a:srgbClr val="FFFFFF"/>
+                </a:solidFill>
+                <a:effectLst/>
+                <a:latin typeface="-apple-system"/>
+              </a:rPr>
+              <a:t>Our hypothesis was that the modern neural-network techniques would out-perform the original model.  To test it, we re-created </a:t>
+            </a:r>
+            <a:r>
+              <a:rPr lang="en-US" b="0" i="0" dirty="0" err="1">
+                <a:solidFill>
+                  <a:srgbClr val="FFFFFF"/>
+                </a:solidFill>
+                <a:effectLst/>
+                <a:latin typeface="-apple-system"/>
+              </a:rPr>
               <a:t>Piczak’s</a:t>
             </a:r>
             <a:r>
-              <a:rPr lang="en-US" dirty="0"/>
-              <a:t> ESC-50 because we felt his work took a relatively unstudied segment, which was audio sound training, and that would do well to represent the growth in neural network capabilities from that point.  He also had a robust yet compact data set that was well organized – 2000 audio samples, 50 classes, 5 folds – and they were of a manageable size at 5 seconds. Per clip.</a:t>
-            </a:r>
-            <a:br>
-              <a:rPr lang="en-US" dirty="0"/>
-            </a:br>
-            <a:br>
-              <a:rPr lang="en-US" dirty="0"/>
-            </a:br>
-            <a:r>
-              <a:rPr lang="en-US" dirty="0"/>
-              <a:t>Looking specifically at what he did with it, </a:t>
-            </a:r>
-            <a:r>
-              <a:rPr lang="en-US" dirty="0" err="1"/>
-              <a:t>Piczak</a:t>
-            </a:r>
-            <a:r>
-              <a:rPr lang="en-US" dirty="0"/>
-              <a:t> converted audio clips into log-</a:t>
-            </a:r>
-            <a:r>
-              <a:rPr lang="en-US" dirty="0" err="1"/>
-              <a:t>mel</a:t>
-            </a:r>
-            <a:r>
-              <a:rPr lang="en-US" dirty="0"/>
-              <a:t> spectrogram segments, classified each segment, and then used clip-level voting to produce one prediction per audio clip. That gave us the fixed baseline we needed</a:t>
-            </a:r>
+              <a:rPr lang="en-US" b="0" i="0" dirty="0">
+                <a:solidFill>
+                  <a:srgbClr val="FFFFFF"/>
+                </a:solidFill>
+                <a:effectLst/>
+                <a:latin typeface="-apple-system"/>
+              </a:rPr>
+              <a:t> model to set a baseline.  We then left the problem set the same and evolved the analysis model using the final five-fold test accuracy with clip-level voting where required.  Ultimately, we used the results from the long segments with probability voting as the comparator to ensure an apples-to-apples comparison.  This was done across three different eras of neural network design – from a training-from-scratch approach, to utilizing transfer learning with a pre-trained CNN and final to transfer learning models with pre-trained transformers.</a:t>
+            </a:r>
+            <a:endParaRPr lang="en-US" dirty="0"/>
           </a:p>
         </p:txBody>
       </p:sp>
@@ -1258,7 +1296,54 @@
           <a:bodyPr/>
           <a:lstStyle/>
           <a:p>
-            <a:endParaRPr lang="en-US" dirty="0"/>
+            <a:r>
+              <a:rPr lang="en-US" dirty="0"/>
+              <a:t>Describe the baseline:</a:t>
+            </a:r>
+            <a:br>
+              <a:rPr lang="en-US" dirty="0"/>
+            </a:br>
+            <a:br>
+              <a:rPr lang="en-US" dirty="0"/>
+            </a:br>
+            <a:r>
+              <a:rPr lang="en-US" dirty="0"/>
+              <a:t>Here we’ve got details about the baseline and the dataset.  We chose </a:t>
+            </a:r>
+            <a:r>
+              <a:rPr lang="en-US" dirty="0" err="1"/>
+              <a:t>Piczak’s</a:t>
+            </a:r>
+            <a:r>
+              <a:rPr lang="en-US" dirty="0"/>
+              <a:t> ESC-50 because we felt his work took a relatively unstudied segment, which was audio sound training, and that would do well to represent the growth in neural network capabilities from that point.  He also had a robust yet compact data set that was well organized – 2000 audio samples, 50 classes, 5 folds – and they were of a manageable size at 5 seconds. Per clip.</a:t>
+            </a:r>
+            <a:br>
+              <a:rPr lang="en-US" dirty="0"/>
+            </a:br>
+            <a:br>
+              <a:rPr lang="en-US" dirty="0"/>
+            </a:br>
+            <a:r>
+              <a:rPr lang="en-US" dirty="0"/>
+              <a:t>Looking specifically at what he did with it, </a:t>
+            </a:r>
+            <a:r>
+              <a:rPr lang="en-US" dirty="0" err="1"/>
+              <a:t>Piczak</a:t>
+            </a:r>
+            <a:r>
+              <a:rPr lang="en-US" dirty="0"/>
+              <a:t> converted audio clips into log-</a:t>
+            </a:r>
+            <a:r>
+              <a:rPr lang="en-US" dirty="0" err="1"/>
+              <a:t>mel</a:t>
+            </a:r>
+            <a:r>
+              <a:rPr lang="en-US" dirty="0"/>
+              <a:t> spectrogram segments, classified each segment, and then used clip-level voting to produce one prediction per audio clip. That gave us the fixed baseline we needed</a:t>
+            </a:r>
           </a:p>
         </p:txBody>
       </p:sp>
@@ -1342,56 +1427,6 @@
           <a:bodyPr/>
           <a:lstStyle/>
           <a:p>
-            <a:r>
-              <a:rPr lang="en-US" b="0" i="0" dirty="0">
-                <a:solidFill>
-                  <a:srgbClr val="FFFFFF"/>
-                </a:solidFill>
-                <a:effectLst/>
-                <a:latin typeface="-apple-system"/>
-              </a:rPr>
-              <a:t>Here is where we established the baseline from which subsequent models would be evaluated. We needed to re-create it to ensure we had a solid understanding of how it was created as well as to use that as the springboard for other models. What you'll see in the baseline model accuracy curves is the various runs that were performed, again, recreating the original model. However, it was ultimately the Long-Segment, clip level run that was highlighted by </a:t>
-            </a:r>
-            <a:r>
-              <a:rPr lang="en-US" b="0" i="0" dirty="0" err="1">
-                <a:solidFill>
-                  <a:srgbClr val="FFFFFF"/>
-                </a:solidFill>
-                <a:effectLst/>
-                <a:latin typeface="-apple-system"/>
-              </a:rPr>
-              <a:t>Piczak</a:t>
-            </a:r>
-            <a:r>
-              <a:rPr lang="en-US" b="0" i="0" dirty="0">
-                <a:solidFill>
-                  <a:srgbClr val="FFFFFF"/>
-                </a:solidFill>
-                <a:effectLst/>
-                <a:latin typeface="-apple-system"/>
-              </a:rPr>
-              <a:t> and will serve as the basis of comparison </a:t>
-            </a:r>
-            <a:r>
-              <a:rPr lang="en-US" b="0" i="0" dirty="0" err="1">
-                <a:solidFill>
-                  <a:srgbClr val="FFFFFF"/>
-                </a:solidFill>
-                <a:effectLst/>
-                <a:latin typeface="-apple-system"/>
-              </a:rPr>
-              <a:t>goign</a:t>
-            </a:r>
-            <a:r>
-              <a:rPr lang="en-US" b="0" i="0" dirty="0">
-                <a:solidFill>
-                  <a:srgbClr val="FFFFFF"/>
-                </a:solidFill>
-                <a:effectLst/>
-                <a:latin typeface="-apple-system"/>
-              </a:rPr>
-              <a:t> forward. We underran slightly at 63.5%, but felt that was close enough to treat as a credible baseline and accurate enough replication of his work.</a:t>
-            </a:r>
             <a:endParaRPr lang="en-US" dirty="0"/>
           </a:p>
         </p:txBody>
@@ -1476,6 +1511,56 @@
           <a:bodyPr/>
           <a:lstStyle/>
           <a:p>
+            <a:r>
+              <a:rPr lang="en-US" b="0" i="0" dirty="0">
+                <a:solidFill>
+                  <a:srgbClr val="FFFFFF"/>
+                </a:solidFill>
+                <a:effectLst/>
+                <a:latin typeface="-apple-system"/>
+              </a:rPr>
+              <a:t>Here is where we established the baseline from which subsequent models would be evaluated. We needed to re-create it to ensure we had a solid understanding of how it was created as well as to use that as the springboard for other models. What you'll see in the baseline model accuracy curves is the various runs that were performed, again, recreating the original model. However, it was ultimately the Long-Segment, clip level run that was highlighted by </a:t>
+            </a:r>
+            <a:r>
+              <a:rPr lang="en-US" b="0" i="0" dirty="0" err="1">
+                <a:solidFill>
+                  <a:srgbClr val="FFFFFF"/>
+                </a:solidFill>
+                <a:effectLst/>
+                <a:latin typeface="-apple-system"/>
+              </a:rPr>
+              <a:t>Piczak</a:t>
+            </a:r>
+            <a:r>
+              <a:rPr lang="en-US" b="0" i="0" dirty="0">
+                <a:solidFill>
+                  <a:srgbClr val="FFFFFF"/>
+                </a:solidFill>
+                <a:effectLst/>
+                <a:latin typeface="-apple-system"/>
+              </a:rPr>
+              <a:t> and will serve as the basis of comparison </a:t>
+            </a:r>
+            <a:r>
+              <a:rPr lang="en-US" b="0" i="0" dirty="0" err="1">
+                <a:solidFill>
+                  <a:srgbClr val="FFFFFF"/>
+                </a:solidFill>
+                <a:effectLst/>
+                <a:latin typeface="-apple-system"/>
+              </a:rPr>
+              <a:t>goign</a:t>
+            </a:r>
+            <a:r>
+              <a:rPr lang="en-US" b="0" i="0" dirty="0">
+                <a:solidFill>
+                  <a:srgbClr val="FFFFFF"/>
+                </a:solidFill>
+                <a:effectLst/>
+                <a:latin typeface="-apple-system"/>
+              </a:rPr>
+              <a:t> forward. We underran slightly at 63.5%, but felt that was close enough to treat as a credible baseline and accurate enough replication of his work.</a:t>
+            </a:r>
             <a:endParaRPr lang="en-US" dirty="0"/>
           </a:p>
         </p:txBody>
@@ -1605,6 +1690,90 @@
   <p:cSld>
     <p:spTree>
       <p:nvGrpSpPr>
+        <p:cNvPr id="1" name=""/>
+        <p:cNvGrpSpPr/>
+        <p:nvPr/>
+      </p:nvGrpSpPr>
+      <p:grpSpPr>
+        <a:xfrm>
+          <a:off x="0" y="0"/>
+          <a:ext cx="0" cy="0"/>
+          <a:chOff x="0" y="0"/>
+          <a:chExt cx="0" cy="0"/>
+        </a:xfrm>
+      </p:grpSpPr>
+      <p:sp>
+        <p:nvSpPr>
+          <p:cNvPr id="2" name="Slide Image Placeholder 1"/>
+          <p:cNvSpPr>
+            <a:spLocks noGrp="1" noRot="1" noChangeAspect="1"/>
+          </p:cNvSpPr>
+          <p:nvPr>
+            <p:ph type="sldImg"/>
+          </p:nvPr>
+        </p:nvSpPr>
+        <p:spPr/>
+      </p:sp>
+      <p:sp>
+        <p:nvSpPr>
+          <p:cNvPr id="3" name="Notes Placeholder 2"/>
+          <p:cNvSpPr>
+            <a:spLocks noGrp="1"/>
+          </p:cNvSpPr>
+          <p:nvPr>
+            <p:ph type="body" idx="1"/>
+          </p:nvPr>
+        </p:nvSpPr>
+        <p:spPr/>
+        <p:txBody>
+          <a:bodyPr/>
+          <a:lstStyle/>
+          <a:p>
+            <a:endParaRPr lang="en-US" dirty="0"/>
+          </a:p>
+        </p:txBody>
+      </p:sp>
+      <p:sp>
+        <p:nvSpPr>
+          <p:cNvPr id="4" name="Slide Number Placeholder 3"/>
+          <p:cNvSpPr>
+            <a:spLocks noGrp="1"/>
+          </p:cNvSpPr>
+          <p:nvPr>
+            <p:ph type="sldNum" sz="quarter" idx="10"/>
+          </p:nvPr>
+        </p:nvSpPr>
+        <p:spPr/>
+        <p:txBody>
+          <a:bodyPr/>
+          <a:lstStyle/>
+          <a:p>
+            <a:fld id="{F7021451-1387-4CA6-816F-3879F97B5CBC}" type="slidenum">
+              <a:rPr lang="en-US"/>
+              <a:t>8</a:t>
+            </a:fld>
+            <a:endParaRPr lang="en-US"/>
+          </a:p>
+        </p:txBody>
+      </p:sp>
+    </p:spTree>
+    <p:extLst>
+      <p:ext uri="{BB962C8B-B14F-4D97-AF65-F5344CB8AC3E}">
+        <p14:creationId xmlns:p14="http://schemas.microsoft.com/office/powerpoint/2010/main" val="1024086991"/>
+      </p:ext>
+    </p:extLst>
+  </p:cSld>
+  <p:clrMapOvr>
+    <a:masterClrMapping/>
+  </p:clrMapOvr>
+</p:notes>
+</file>
+
+<file path=ppt/notesSlides/notesSlide9.xml><?xml version="1.0" encoding="utf-8"?>
+<p:notes xmlns:a="http://schemas.openxmlformats.org/drawingml/2006/main" xmlns:r="http://schemas.openxmlformats.org/officeDocument/2006/relationships" xmlns:p="http://schemas.openxmlformats.org/presentationml/2006/main">
+  <p:cSld>
+    <p:spTree>
+      <p:nvGrpSpPr>
         <p:cNvPr id="1" name="">
           <a:extLst>
             <a:ext uri="{FF2B5EF4-FFF2-40B4-BE49-F238E27FC236}">
@@ -1689,7 +1858,7 @@
           <a:p>
             <a:fld id="{F7021451-1387-4CA6-816F-3879F97B5CBC}" type="slidenum">
               <a:rPr lang="en-US"/>
-              <a:t>8</a:t>
+              <a:t>9</a:t>
             </a:fld>
             <a:endParaRPr lang="en-US"/>
           </a:p>
@@ -1699,90 +1868,6 @@
     <p:extLst>
       <p:ext uri="{BB962C8B-B14F-4D97-AF65-F5344CB8AC3E}">
         <p14:creationId xmlns:p14="http://schemas.microsoft.com/office/powerpoint/2010/main" val="1136316266"/>
-      </p:ext>
-    </p:extLst>
-  </p:cSld>
-  <p:clrMapOvr>
-    <a:masterClrMapping/>
-  </p:clrMapOvr>
-</p:notes>
-</file>
-
-<file path=ppt/notesSlides/notesSlide9.xml><?xml version="1.0" encoding="utf-8"?>
-<p:notes xmlns:a="http://schemas.openxmlformats.org/drawingml/2006/main" xmlns:r="http://schemas.openxmlformats.org/officeDocument/2006/relationships" xmlns:p="http://schemas.openxmlformats.org/presentationml/2006/main">
-  <p:cSld>
-    <p:spTree>
-      <p:nvGrpSpPr>
-        <p:cNvPr id="1" name=""/>
-        <p:cNvGrpSpPr/>
-        <p:nvPr/>
-      </p:nvGrpSpPr>
-      <p:grpSpPr>
-        <a:xfrm>
-          <a:off x="0" y="0"/>
-          <a:ext cx="0" cy="0"/>
-          <a:chOff x="0" y="0"/>
-          <a:chExt cx="0" cy="0"/>
-        </a:xfrm>
-      </p:grpSpPr>
-      <p:sp>
-        <p:nvSpPr>
-          <p:cNvPr id="2" name="Slide Image Placeholder 1"/>
-          <p:cNvSpPr>
-            <a:spLocks noGrp="1" noRot="1" noChangeAspect="1"/>
-          </p:cNvSpPr>
-          <p:nvPr>
-            <p:ph type="sldImg"/>
-          </p:nvPr>
-        </p:nvSpPr>
-        <p:spPr/>
-      </p:sp>
-      <p:sp>
-        <p:nvSpPr>
-          <p:cNvPr id="3" name="Notes Placeholder 2"/>
-          <p:cNvSpPr>
-            <a:spLocks noGrp="1"/>
-          </p:cNvSpPr>
-          <p:nvPr>
-            <p:ph type="body" idx="1"/>
-          </p:nvPr>
-        </p:nvSpPr>
-        <p:spPr/>
-        <p:txBody>
-          <a:bodyPr/>
-          <a:lstStyle/>
-          <a:p>
-            <a:endParaRPr lang="en-US" dirty="0"/>
-          </a:p>
-        </p:txBody>
-      </p:sp>
-      <p:sp>
-        <p:nvSpPr>
-          <p:cNvPr id="4" name="Slide Number Placeholder 3"/>
-          <p:cNvSpPr>
-            <a:spLocks noGrp="1"/>
-          </p:cNvSpPr>
-          <p:nvPr>
-            <p:ph type="sldNum" sz="quarter" idx="10"/>
-          </p:nvPr>
-        </p:nvSpPr>
-        <p:spPr/>
-        <p:txBody>
-          <a:bodyPr/>
-          <a:lstStyle/>
-          <a:p>
-            <a:fld id="{F7021451-1387-4CA6-816F-3879F97B5CBC}" type="slidenum">
-              <a:rPr lang="en-US"/>
-              <a:t>9</a:t>
-            </a:fld>
-            <a:endParaRPr lang="en-US"/>
-          </a:p>
-        </p:txBody>
-      </p:sp>
-    </p:spTree>
-    <p:extLst>
-      <p:ext uri="{BB962C8B-B14F-4D97-AF65-F5344CB8AC3E}">
-        <p14:creationId xmlns:p14="http://schemas.microsoft.com/office/powerpoint/2010/main" val="1024086991"/>
       </p:ext>
     </p:extLst>
   </p:cSld>
@@ -2106,7 +2191,477 @@
 
 <file path=ppt/slides/slide1.xml><?xml version="1.0" encoding="utf-8"?>
 <p:sld xmlns:a="http://schemas.openxmlformats.org/drawingml/2006/main" xmlns:r="http://schemas.openxmlformats.org/officeDocument/2006/relationships" xmlns:p="http://schemas.openxmlformats.org/presentationml/2006/main">
-  <p:cSld name="Slide 1">
+  <p:cSld>
+    <p:spTree>
+      <p:nvGrpSpPr>
+        <p:cNvPr id="1" name=""/>
+        <p:cNvGrpSpPr/>
+        <p:nvPr/>
+      </p:nvGrpSpPr>
+      <p:grpSpPr>
+        <a:xfrm>
+          <a:off x="0" y="0"/>
+          <a:ext cx="0" cy="0"/>
+          <a:chOff x="0" y="0"/>
+          <a:chExt cx="0" cy="0"/>
+        </a:xfrm>
+      </p:grpSpPr>
+      <p:pic>
+        <p:nvPicPr>
+          <p:cNvPr id="2" name="Image 0" descr="/Users/andrew/Desktop/CU/CornellUniversity.jpg"/>
+          <p:cNvPicPr>
+            <a:picLocks noChangeAspect="1"/>
+          </p:cNvPicPr>
+          <p:nvPr/>
+        </p:nvPicPr>
+        <p:blipFill>
+          <a:blip r:embed="rId3">
+            <a:alphaModFix amt="62000"/>
+          </a:blip>
+          <a:srcRect/>
+          <a:stretch/>
+        </p:blipFill>
+        <p:spPr>
+          <a:xfrm>
+            <a:off x="0" y="0"/>
+            <a:ext cx="12191695" cy="6858000"/>
+          </a:xfrm>
+          <a:prstGeom prst="rect">
+            <a:avLst/>
+          </a:prstGeom>
+        </p:spPr>
+      </p:pic>
+      <p:sp>
+        <p:nvSpPr>
+          <p:cNvPr id="3" name="Shape 0"/>
+          <p:cNvSpPr/>
+          <p:nvPr/>
+        </p:nvSpPr>
+        <p:spPr>
+          <a:xfrm>
+            <a:off x="0" y="118200"/>
+            <a:ext cx="12191695" cy="6858000"/>
+          </a:xfrm>
+          <a:prstGeom prst="rect">
+            <a:avLst/>
+          </a:prstGeom>
+          <a:solidFill>
+            <a:srgbClr val="F2F0EA">
+              <a:alpha val="82000"/>
+            </a:srgbClr>
+          </a:solidFill>
+          <a:ln w="12700">
+            <a:solidFill>
+              <a:srgbClr val="F2F0EA">
+                <a:alpha val="0"/>
+              </a:srgbClr>
+            </a:solidFill>
+            <a:prstDash val="solid"/>
+          </a:ln>
+        </p:spPr>
+        <p:txBody>
+          <a:bodyPr/>
+          <a:lstStyle/>
+          <a:p>
+            <a:endParaRPr lang="en-US" dirty="0">
+              <a:hlinkClick r:id="rId4"/>
+            </a:endParaRPr>
+          </a:p>
+          <a:p>
+            <a:endParaRPr lang="en-US" dirty="0"/>
+          </a:p>
+        </p:txBody>
+      </p:sp>
+      <p:sp>
+        <p:nvSpPr>
+          <p:cNvPr id="5" name="Text 2"/>
+          <p:cNvSpPr/>
+          <p:nvPr/>
+        </p:nvSpPr>
+        <p:spPr>
+          <a:xfrm>
+            <a:off x="1078991" y="2157984"/>
+            <a:ext cx="10416317" cy="1325880"/>
+          </a:xfrm>
+          <a:prstGeom prst="rect">
+            <a:avLst/>
+          </a:prstGeom>
+          <a:noFill/>
+          <a:ln/>
+        </p:spPr>
+        <p:txBody>
+          <a:bodyPr wrap="square" lIns="0" tIns="0" rIns="0" bIns="0" rtlCol="0" anchor="t">
+            <a:normAutofit/>
+          </a:bodyPr>
+          <a:lstStyle/>
+          <a:p>
+            <a:pPr marL="0" indent="0" algn="l">
+              <a:lnSpc>
+                <a:spcPct val="88000"/>
+              </a:lnSpc>
+              <a:buNone/>
+            </a:pPr>
+            <a:r>
+              <a:rPr lang="en-US" sz="4000" b="1" dirty="0">
+                <a:solidFill>
+                  <a:schemeClr val="tx1">
+                    <a:lumMod val="75000"/>
+                    <a:lumOff val="25000"/>
+                  </a:schemeClr>
+                </a:solidFill>
+                <a:latin typeface="Aptos Display" pitchFamily="34" charset="0"/>
+                <a:ea typeface="Aptos Display" pitchFamily="34" charset="-122"/>
+                <a:cs typeface="Aptos Display" pitchFamily="34" charset="-120"/>
+              </a:rPr>
+              <a:t>SYSEN 5888</a:t>
+            </a:r>
+          </a:p>
+          <a:p>
+            <a:pPr marL="0" indent="0" algn="l">
+              <a:lnSpc>
+                <a:spcPct val="88000"/>
+              </a:lnSpc>
+              <a:buNone/>
+            </a:pPr>
+            <a:r>
+              <a:rPr lang="en-US" sz="4800" b="1" dirty="0">
+                <a:solidFill>
+                  <a:srgbClr val="B31B1B"/>
+                </a:solidFill>
+                <a:latin typeface="Aptos Display" pitchFamily="34" charset="0"/>
+                <a:ea typeface="Aptos Display" pitchFamily="34" charset="-122"/>
+                <a:cs typeface="Aptos Display" pitchFamily="34" charset="-120"/>
+              </a:rPr>
+              <a:t>Measuring AI Acceleration Over Time</a:t>
+            </a:r>
+            <a:endParaRPr lang="en-US" sz="4800" dirty="0"/>
+          </a:p>
+        </p:txBody>
+      </p:sp>
+      <p:sp>
+        <p:nvSpPr>
+          <p:cNvPr id="6" name="Text 3"/>
+          <p:cNvSpPr/>
+          <p:nvPr/>
+        </p:nvSpPr>
+        <p:spPr>
+          <a:xfrm>
+            <a:off x="1078991" y="3594492"/>
+            <a:ext cx="7909560" cy="1325879"/>
+          </a:xfrm>
+          <a:prstGeom prst="rect">
+            <a:avLst/>
+          </a:prstGeom>
+          <a:noFill/>
+          <a:ln/>
+        </p:spPr>
+        <p:txBody>
+          <a:bodyPr wrap="square" lIns="0" tIns="0" rIns="0" bIns="0" rtlCol="0" anchor="t">
+            <a:normAutofit/>
+          </a:bodyPr>
+          <a:lstStyle/>
+          <a:p>
+            <a:pPr marL="0" indent="0" algn="l">
+              <a:lnSpc>
+                <a:spcPct val="88000"/>
+              </a:lnSpc>
+              <a:buNone/>
+            </a:pPr>
+            <a:r>
+              <a:rPr lang="en-US" dirty="0">
+                <a:solidFill>
+                  <a:schemeClr val="tx1">
+                    <a:lumMod val="75000"/>
+                    <a:lumOff val="25000"/>
+                  </a:schemeClr>
+                </a:solidFill>
+                <a:latin typeface="Aptos" pitchFamily="34" charset="0"/>
+                <a:ea typeface="Aptos" pitchFamily="34" charset="-122"/>
+                <a:cs typeface="Aptos" pitchFamily="34" charset="-120"/>
+              </a:rPr>
+              <a:t>Amine Amirouche (BAA93)</a:t>
+            </a:r>
+          </a:p>
+          <a:p>
+            <a:pPr marL="0" indent="0" algn="l">
+              <a:lnSpc>
+                <a:spcPct val="88000"/>
+              </a:lnSpc>
+              <a:buNone/>
+            </a:pPr>
+            <a:r>
+              <a:rPr lang="en-US" dirty="0">
+                <a:solidFill>
+                  <a:schemeClr val="tx1">
+                    <a:lumMod val="75000"/>
+                    <a:lumOff val="25000"/>
+                  </a:schemeClr>
+                </a:solidFill>
+                <a:latin typeface="Aptos" pitchFamily="34" charset="0"/>
+                <a:ea typeface="Aptos" pitchFamily="34" charset="-122"/>
+                <a:cs typeface="Aptos" pitchFamily="34" charset="-120"/>
+              </a:rPr>
+              <a:t>Andrew Littlefield (DAL352)</a:t>
+            </a:r>
+          </a:p>
+          <a:p>
+            <a:pPr marL="0" indent="0" algn="l">
+              <a:lnSpc>
+                <a:spcPct val="88000"/>
+              </a:lnSpc>
+              <a:buNone/>
+            </a:pPr>
+            <a:r>
+              <a:rPr lang="en-US" dirty="0">
+                <a:solidFill>
+                  <a:schemeClr val="tx1">
+                    <a:lumMod val="75000"/>
+                    <a:lumOff val="25000"/>
+                  </a:schemeClr>
+                </a:solidFill>
+                <a:latin typeface="Aptos" pitchFamily="34" charset="0"/>
+                <a:ea typeface="Aptos" pitchFamily="34" charset="-122"/>
+                <a:cs typeface="Aptos" pitchFamily="34" charset="-120"/>
+              </a:rPr>
+              <a:t>Angela Li (YL3937)</a:t>
+            </a:r>
+          </a:p>
+          <a:p>
+            <a:pPr marL="0" indent="0" algn="l">
+              <a:lnSpc>
+                <a:spcPct val="88000"/>
+              </a:lnSpc>
+              <a:buNone/>
+            </a:pPr>
+            <a:r>
+              <a:rPr lang="en-US" dirty="0">
+                <a:solidFill>
+                  <a:schemeClr val="tx1">
+                    <a:lumMod val="75000"/>
+                    <a:lumOff val="25000"/>
+                  </a:schemeClr>
+                </a:solidFill>
+                <a:latin typeface="Aptos" pitchFamily="34" charset="0"/>
+                <a:ea typeface="Aptos" pitchFamily="34" charset="-122"/>
+                <a:cs typeface="Aptos" pitchFamily="34" charset="-120"/>
+              </a:rPr>
+              <a:t>Jack Bush (JLB662)</a:t>
+            </a:r>
+          </a:p>
+          <a:p>
+            <a:pPr marL="0" indent="0" algn="l">
+              <a:lnSpc>
+                <a:spcPct val="88000"/>
+              </a:lnSpc>
+              <a:buNone/>
+            </a:pPr>
+            <a:r>
+              <a:rPr lang="en-US" dirty="0">
+                <a:solidFill>
+                  <a:schemeClr val="tx1">
+                    <a:lumMod val="75000"/>
+                    <a:lumOff val="25000"/>
+                  </a:schemeClr>
+                </a:solidFill>
+                <a:latin typeface="Aptos" pitchFamily="34" charset="0"/>
+              </a:rPr>
+              <a:t>Jonathan Lloyd (JLS384)</a:t>
+            </a:r>
+            <a:endParaRPr lang="en-US" dirty="0">
+              <a:solidFill>
+                <a:schemeClr val="tx1">
+                  <a:lumMod val="75000"/>
+                  <a:lumOff val="25000"/>
+                </a:schemeClr>
+              </a:solidFill>
+            </a:endParaRPr>
+          </a:p>
+        </p:txBody>
+      </p:sp>
+      <p:sp>
+        <p:nvSpPr>
+          <p:cNvPr id="7" name="Text 4"/>
+          <p:cNvSpPr/>
+          <p:nvPr/>
+        </p:nvSpPr>
+        <p:spPr>
+          <a:xfrm>
+            <a:off x="1078991" y="4990354"/>
+            <a:ext cx="7315200" cy="274320"/>
+          </a:xfrm>
+          <a:prstGeom prst="rect">
+            <a:avLst/>
+          </a:prstGeom>
+          <a:noFill/>
+          <a:ln/>
+        </p:spPr>
+        <p:txBody>
+          <a:bodyPr wrap="square" lIns="0" tIns="0" rIns="0" bIns="0" rtlCol="0" anchor="t">
+            <a:normAutofit/>
+          </a:bodyPr>
+          <a:lstStyle/>
+          <a:p>
+            <a:pPr marL="0" indent="0" algn="l">
+              <a:lnSpc>
+                <a:spcPct val="88000"/>
+              </a:lnSpc>
+              <a:buNone/>
+            </a:pPr>
+            <a:r>
+              <a:rPr lang="en-US" b="1" dirty="0">
+                <a:solidFill>
+                  <a:schemeClr val="tx1">
+                    <a:lumMod val="75000"/>
+                    <a:lumOff val="25000"/>
+                  </a:schemeClr>
+                </a:solidFill>
+                <a:latin typeface="Aptos" pitchFamily="34" charset="0"/>
+                <a:ea typeface="Aptos" pitchFamily="34" charset="-122"/>
+                <a:cs typeface="Aptos" pitchFamily="34" charset="-120"/>
+              </a:rPr>
+              <a:t>4 May 2026</a:t>
+            </a:r>
+            <a:endParaRPr lang="en-US" b="1" dirty="0">
+              <a:solidFill>
+                <a:schemeClr val="tx1">
+                  <a:lumMod val="75000"/>
+                  <a:lumOff val="25000"/>
+                </a:schemeClr>
+              </a:solidFill>
+            </a:endParaRPr>
+          </a:p>
+        </p:txBody>
+      </p:sp>
+      <p:pic>
+        <p:nvPicPr>
+          <p:cNvPr id="1028" name="Picture 4">
+            <a:extLst>
+              <a:ext uri="{FF2B5EF4-FFF2-40B4-BE49-F238E27FC236}">
+                <a16:creationId xmlns:a16="http://schemas.microsoft.com/office/drawing/2014/main" id="{B9554E79-58B1-EE7B-4384-C821622D3B1B}"/>
+              </a:ext>
+            </a:extLst>
+          </p:cNvPr>
+          <p:cNvPicPr>
+            <a:picLocks noChangeAspect="1" noChangeArrowheads="1"/>
+          </p:cNvPicPr>
+          <p:nvPr/>
+        </p:nvPicPr>
+        <p:blipFill>
+          <a:blip r:embed="rId5">
+            <a:extLst>
+              <a:ext uri="{28A0092B-C50C-407E-A947-70E740481C1C}">
+                <a14:useLocalDpi xmlns:a14="http://schemas.microsoft.com/office/drawing/2010/main" val="0"/>
+              </a:ext>
+            </a:extLst>
+          </a:blip>
+          <a:srcRect/>
+          <a:stretch>
+            <a:fillRect/>
+          </a:stretch>
+        </p:blipFill>
+        <p:spPr bwMode="auto">
+          <a:xfrm>
+            <a:off x="8129700" y="157514"/>
+            <a:ext cx="3896972" cy="917654"/>
+          </a:xfrm>
+          <a:prstGeom prst="rect">
+            <a:avLst/>
+          </a:prstGeom>
+          <a:noFill/>
+          <a:extLst>
+            <a:ext uri="{909E8E84-426E-40DD-AFC4-6F175D3DCCD1}">
+              <a14:hiddenFill xmlns:a14="http://schemas.microsoft.com/office/drawing/2010/main">
+                <a:solidFill>
+                  <a:srgbClr val="FFFFFF"/>
+                </a:solidFill>
+              </a14:hiddenFill>
+            </a:ext>
+          </a:extLst>
+        </p:spPr>
+      </p:pic>
+      <p:pic>
+        <p:nvPicPr>
+          <p:cNvPr id="10" name="Picture 9" descr="A red circle with a shield and text&#10;&#10;AI-generated content may be incorrect.">
+            <a:extLst>
+              <a:ext uri="{FF2B5EF4-FFF2-40B4-BE49-F238E27FC236}">
+                <a16:creationId xmlns:a16="http://schemas.microsoft.com/office/drawing/2014/main" id="{64FD0950-08F2-4703-2551-0499DAB85518}"/>
+              </a:ext>
+            </a:extLst>
+          </p:cNvPr>
+          <p:cNvPicPr>
+            <a:picLocks noChangeAspect="1"/>
+          </p:cNvPicPr>
+          <p:nvPr/>
+        </p:nvPicPr>
+        <p:blipFill>
+          <a:blip r:embed="rId6"/>
+          <a:srcRect l="30015" t="10691" r="28666" b="10859"/>
+          <a:stretch/>
+        </p:blipFill>
+        <p:spPr>
+          <a:xfrm>
+            <a:off x="6827711" y="118200"/>
+            <a:ext cx="1000539" cy="996282"/>
+          </a:xfrm>
+          <a:prstGeom prst="rect">
+            <a:avLst/>
+          </a:prstGeom>
+        </p:spPr>
+      </p:pic>
+      <p:cxnSp>
+        <p:nvCxnSpPr>
+          <p:cNvPr id="12" name="Straight Connector 11">
+            <a:extLst>
+              <a:ext uri="{FF2B5EF4-FFF2-40B4-BE49-F238E27FC236}">
+                <a16:creationId xmlns:a16="http://schemas.microsoft.com/office/drawing/2014/main" id="{9E34265B-5AC7-AD92-C855-B1C880CBF117}"/>
+              </a:ext>
+            </a:extLst>
+          </p:cNvPr>
+          <p:cNvCxnSpPr/>
+          <p:nvPr/>
+        </p:nvCxnSpPr>
+        <p:spPr>
+          <a:xfrm>
+            <a:off x="7964677" y="157514"/>
+            <a:ext cx="0" cy="917654"/>
+          </a:xfrm>
+          <a:prstGeom prst="line">
+            <a:avLst/>
+          </a:prstGeom>
+          <a:ln w="19050">
+            <a:solidFill>
+              <a:schemeClr val="bg1">
+                <a:lumMod val="65000"/>
+              </a:schemeClr>
+            </a:solidFill>
+          </a:ln>
+        </p:spPr>
+        <p:style>
+          <a:lnRef idx="1">
+            <a:schemeClr val="accent1"/>
+          </a:lnRef>
+          <a:fillRef idx="0">
+            <a:schemeClr val="accent1"/>
+          </a:fillRef>
+          <a:effectRef idx="0">
+            <a:schemeClr val="accent1"/>
+          </a:effectRef>
+          <a:fontRef idx="minor">
+            <a:schemeClr val="tx1"/>
+          </a:fontRef>
+        </p:style>
+      </p:cxnSp>
+    </p:spTree>
+  </p:cSld>
+  <p:clrMapOvr>
+    <a:masterClrMapping/>
+  </p:clrMapOvr>
+</p:sld>
+</file>
+
+<file path=ppt/slides/slide10.xml><?xml version="1.0" encoding="utf-8"?>
+<p:sld xmlns:a="http://schemas.openxmlformats.org/drawingml/2006/main" xmlns:r="http://schemas.openxmlformats.org/officeDocument/2006/relationships" xmlns:p="http://schemas.openxmlformats.org/presentationml/2006/main">
+  <p:cSld name="Slide 7">
     <p:bg>
       <p:bgPr>
         <a:solidFill>
@@ -2167,7 +2722,7 @@
                 <a:ea typeface="Aptos" pitchFamily="34" charset="-122"/>
                 <a:cs typeface="Aptos" pitchFamily="34" charset="-120"/>
               </a:rPr>
-              <a:t>SYSEN 5888 FINAL PROJECT</a:t>
+              <a:t>SECOND TECHNICAL ERA</a:t>
             </a:r>
             <a:endParaRPr lang="en-US" sz="880" dirty="0"/>
           </a:p>
@@ -2182,7 +2737,7 @@
         <p:spPr>
           <a:xfrm>
             <a:off x="566928" y="512064"/>
-            <a:ext cx="10497312" cy="502920"/>
+            <a:ext cx="5657347" cy="502920"/>
           </a:xfrm>
           <a:prstGeom prst="rect">
             <a:avLst/>
@@ -2192,7 +2747,7 @@
         </p:spPr>
         <p:txBody>
           <a:bodyPr wrap="square" lIns="0" tIns="0" rIns="0" bIns="0" rtlCol="0" anchor="t">
-            <a:normAutofit/>
+            <a:normAutofit fontScale="85000" lnSpcReduction="20000"/>
           </a:bodyPr>
           <a:lstStyle/>
           <a:p>
@@ -2211,7 +2766,7 @@
                 <a:ea typeface="Aptos Display" pitchFamily="34" charset="-122"/>
                 <a:cs typeface="Aptos Display" pitchFamily="34" charset="-120"/>
               </a:rPr>
-              <a:t>Measuring the AI acceleration: Measurable impact of improvements</a:t>
+              <a:t>Era shift: transfer learning with pretrained CNN models</a:t>
             </a:r>
             <a:endParaRPr lang="en-US" sz="2600" dirty="0"/>
           </a:p>
@@ -2249,14 +2804,14 @@
       </p:sp>
       <p:sp>
         <p:nvSpPr>
-          <p:cNvPr id="5" name="Text 3"/>
-          <p:cNvSpPr/>
-          <p:nvPr/>
-        </p:nvSpPr>
-        <p:spPr>
-          <a:xfrm>
-            <a:off x="676656" y="1417320"/>
-            <a:ext cx="5394960" cy="749808"/>
+          <p:cNvPr id="11" name="Text 9"/>
+          <p:cNvSpPr/>
+          <p:nvPr/>
+        </p:nvSpPr>
+        <p:spPr>
+          <a:xfrm>
+            <a:off x="822960" y="1371600"/>
+            <a:ext cx="822960" cy="182880"/>
           </a:xfrm>
           <a:prstGeom prst="rect">
             <a:avLst/>
@@ -2266,7 +2821,7 @@
         </p:spPr>
         <p:txBody>
           <a:bodyPr wrap="square" lIns="0" tIns="0" rIns="0" bIns="0" rtlCol="0" anchor="t">
-            <a:normAutofit fontScale="92500"/>
+            <a:normAutofit/>
           </a:bodyPr>
           <a:lstStyle/>
           <a:p>
@@ -2277,7 +2832,51 @@
               <a:buNone/>
             </a:pPr>
             <a:r>
-              <a:rPr lang="en-US" sz="2200" b="1" dirty="0">
+              <a:rPr lang="en-US" sz="1000" b="1" dirty="0">
+                <a:solidFill>
+                  <a:srgbClr val="17677D"/>
+                </a:solidFill>
+                <a:latin typeface="Aptos" pitchFamily="34" charset="0"/>
+                <a:ea typeface="Aptos" pitchFamily="34" charset="-122"/>
+                <a:cs typeface="Aptos" pitchFamily="34" charset="-120"/>
+              </a:rPr>
+              <a:t>Shift</a:t>
+            </a:r>
+            <a:endParaRPr lang="en-US" sz="1000" dirty="0"/>
+          </a:p>
+        </p:txBody>
+      </p:sp>
+      <p:sp>
+        <p:nvSpPr>
+          <p:cNvPr id="12" name="Text 10"/>
+          <p:cNvSpPr/>
+          <p:nvPr/>
+        </p:nvSpPr>
+        <p:spPr>
+          <a:xfrm>
+            <a:off x="822960" y="1664208"/>
+            <a:ext cx="5486400" cy="438912"/>
+          </a:xfrm>
+          <a:prstGeom prst="rect">
+            <a:avLst/>
+          </a:prstGeom>
+          <a:noFill/>
+          <a:ln/>
+        </p:spPr>
+        <p:txBody>
+          <a:bodyPr wrap="square" lIns="0" tIns="0" rIns="0" bIns="0" rtlCol="0" anchor="t">
+            <a:normAutofit fontScale="85000" lnSpcReduction="10000"/>
+          </a:bodyPr>
+          <a:lstStyle/>
+          <a:p>
+            <a:pPr marL="0" indent="0" algn="l">
+              <a:lnSpc>
+                <a:spcPct val="90000"/>
+              </a:lnSpc>
+              <a:buNone/>
+            </a:pPr>
+            <a:r>
+              <a:rPr lang="en-US" sz="2400" b="1" dirty="0">
                 <a:solidFill>
                   <a:srgbClr val="1F2528"/>
                 </a:solidFill>
@@ -2285,30 +2884,32 @@
                 <a:ea typeface="Aptos Display" pitchFamily="34" charset="-122"/>
                 <a:cs typeface="Aptos Display" pitchFamily="34" charset="-120"/>
               </a:rPr>
-              <a:t>Neural networks span decades. The last decade made their progress visible enough to test.</a:t>
-            </a:r>
-            <a:endParaRPr lang="en-US" sz="2200" dirty="0"/>
-          </a:p>
-        </p:txBody>
-      </p:sp>
-      <p:sp>
-        <p:nvSpPr>
-          <p:cNvPr id="6" name="Shape 4"/>
-          <p:cNvSpPr/>
-          <p:nvPr/>
-        </p:nvSpPr>
-        <p:spPr>
-          <a:xfrm>
-            <a:off x="291403" y="3657600"/>
-            <a:ext cx="11465168" cy="0"/>
-          </a:xfrm>
-          <a:prstGeom prst="line">
-            <a:avLst/>
-          </a:prstGeom>
-          <a:noFill/>
-          <a:ln w="13970">
+              <a:t>Learn the representation elsewhere. Adapt it here.</a:t>
+            </a:r>
+            <a:endParaRPr lang="en-US" sz="2400" dirty="0"/>
+          </a:p>
+        </p:txBody>
+      </p:sp>
+      <p:sp>
+        <p:nvSpPr>
+          <p:cNvPr id="13" name="Shape 11"/>
+          <p:cNvSpPr/>
+          <p:nvPr/>
+        </p:nvSpPr>
+        <p:spPr>
+          <a:xfrm>
+            <a:off x="914400" y="2743200"/>
+            <a:ext cx="2743200" cy="1005840"/>
+          </a:xfrm>
+          <a:prstGeom prst="rect">
+            <a:avLst/>
+          </a:prstGeom>
+          <a:solidFill>
+            <a:srgbClr val="FFFFFF"/>
+          </a:solidFill>
+          <a:ln w="15240">
             <a:solidFill>
-              <a:srgbClr val="30383D"/>
+              <a:srgbClr val="17677D"/>
             </a:solidFill>
             <a:prstDash val="solid"/>
           </a:ln>
@@ -2323,46 +2924,14 @@
       </p:sp>
       <p:sp>
         <p:nvSpPr>
-          <p:cNvPr id="7" name="Shape 5"/>
-          <p:cNvSpPr/>
-          <p:nvPr/>
-        </p:nvSpPr>
-        <p:spPr>
-          <a:xfrm>
-            <a:off x="740664" y="3575304"/>
-            <a:ext cx="164592" cy="164592"/>
-          </a:xfrm>
-          <a:prstGeom prst="ellipse">
-            <a:avLst/>
-          </a:prstGeom>
-          <a:solidFill>
-            <a:srgbClr val="F7F5EF"/>
-          </a:solidFill>
-          <a:ln w="11430">
-            <a:solidFill>
-              <a:srgbClr val="30383D"/>
-            </a:solidFill>
-            <a:prstDash val="solid"/>
-          </a:ln>
-        </p:spPr>
-        <p:txBody>
-          <a:bodyPr/>
-          <a:lstStyle/>
-          <a:p>
-            <a:endParaRPr lang="en-US"/>
-          </a:p>
-        </p:txBody>
-      </p:sp>
-      <p:sp>
-        <p:nvSpPr>
-          <p:cNvPr id="8" name="Text 6"/>
-          <p:cNvSpPr/>
-          <p:nvPr/>
-        </p:nvSpPr>
-        <p:spPr>
-          <a:xfrm>
-            <a:off x="411480" y="3154680"/>
-            <a:ext cx="822960" cy="164592"/>
+          <p:cNvPr id="14" name="Text 12"/>
+          <p:cNvSpPr/>
+          <p:nvPr/>
+        </p:nvSpPr>
+        <p:spPr>
+          <a:xfrm>
+            <a:off x="1097280" y="2971800"/>
+            <a:ext cx="2377440" cy="182880"/>
           </a:xfrm>
           <a:prstGeom prst="rect">
             <a:avLst/>
@@ -2372,7 +2941,7 @@
         </p:spPr>
         <p:txBody>
           <a:bodyPr wrap="square" lIns="0" tIns="0" rIns="0" bIns="0" rtlCol="0" anchor="t">
-            <a:normAutofit/>
+            <a:normAutofit lnSpcReduction="10000"/>
           </a:bodyPr>
           <a:lstStyle/>
           <a:p>
@@ -2383,106 +2952,30 @@
               <a:buNone/>
             </a:pPr>
             <a:r>
-              <a:rPr lang="en-US" sz="880" b="1" dirty="0">
-                <a:solidFill>
-                  <a:srgbClr val="1F2528"/>
+              <a:rPr lang="en-US" sz="1350" b="1" dirty="0">
+                <a:solidFill>
+                  <a:srgbClr val="17677D"/>
                 </a:solidFill>
                 <a:latin typeface="Aptos" pitchFamily="34" charset="0"/>
                 <a:ea typeface="Aptos" pitchFamily="34" charset="-122"/>
                 <a:cs typeface="Aptos" pitchFamily="34" charset="-120"/>
               </a:rPr>
-              <a:t>1980s-90s</a:t>
-            </a:r>
-            <a:endParaRPr lang="en-US" sz="880" dirty="0"/>
-          </a:p>
-        </p:txBody>
-      </p:sp>
-      <p:sp>
-        <p:nvSpPr>
-          <p:cNvPr id="9" name="Text 7"/>
-          <p:cNvSpPr/>
-          <p:nvPr/>
-        </p:nvSpPr>
-        <p:spPr>
-          <a:xfrm>
-            <a:off x="219456" y="3913632"/>
-            <a:ext cx="1207008" cy="438912"/>
-          </a:xfrm>
-          <a:prstGeom prst="rect">
-            <a:avLst/>
-          </a:prstGeom>
-          <a:noFill/>
-          <a:ln/>
-        </p:spPr>
-        <p:txBody>
-          <a:bodyPr wrap="square" lIns="0" tIns="0" rIns="0" bIns="0" rtlCol="0" anchor="t">
-            <a:normAutofit/>
-          </a:bodyPr>
-          <a:lstStyle/>
-          <a:p>
-            <a:pPr marL="0" indent="0" algn="ctr">
-              <a:lnSpc>
-                <a:spcPct val="85000"/>
-              </a:lnSpc>
-              <a:buNone/>
-            </a:pPr>
-            <a:r>
-              <a:rPr lang="en-US" sz="800" dirty="0">
-                <a:solidFill>
-                  <a:srgbClr val="6B7176"/>
-                </a:solidFill>
-                <a:latin typeface="Aptos" pitchFamily="34" charset="0"/>
-                <a:ea typeface="Aptos" pitchFamily="34" charset="-122"/>
-                <a:cs typeface="Aptos" pitchFamily="34" charset="-120"/>
-              </a:rPr>
-              <a:t>Backprop and early neural nets</a:t>
-            </a:r>
-            <a:endParaRPr lang="en-US" sz="800" dirty="0"/>
-          </a:p>
-        </p:txBody>
-      </p:sp>
-      <p:sp>
-        <p:nvSpPr>
-          <p:cNvPr id="10" name="Shape 8"/>
-          <p:cNvSpPr/>
-          <p:nvPr/>
-        </p:nvSpPr>
-        <p:spPr>
-          <a:xfrm>
-            <a:off x="2788920" y="3575304"/>
-            <a:ext cx="164592" cy="164592"/>
-          </a:xfrm>
-          <a:prstGeom prst="ellipse">
-            <a:avLst/>
-          </a:prstGeom>
-          <a:solidFill>
-            <a:srgbClr val="F7F5EF"/>
-          </a:solidFill>
-          <a:ln w="11430">
-            <a:solidFill>
-              <a:srgbClr val="30383D"/>
-            </a:solidFill>
-            <a:prstDash val="solid"/>
-          </a:ln>
-        </p:spPr>
-        <p:txBody>
-          <a:bodyPr/>
-          <a:lstStyle/>
-          <a:p>
-            <a:endParaRPr lang="en-US"/>
-          </a:p>
-        </p:txBody>
-      </p:sp>
-      <p:sp>
-        <p:nvSpPr>
-          <p:cNvPr id="11" name="Text 9"/>
-          <p:cNvSpPr/>
-          <p:nvPr/>
-        </p:nvSpPr>
-        <p:spPr>
-          <a:xfrm>
-            <a:off x="2459736" y="3154680"/>
-            <a:ext cx="822960" cy="164592"/>
+              <a:t>Large audio datasets</a:t>
+            </a:r>
+            <a:endParaRPr lang="en-US" sz="1350" dirty="0"/>
+          </a:p>
+        </p:txBody>
+      </p:sp>
+      <p:sp>
+        <p:nvSpPr>
+          <p:cNvPr id="15" name="Text 13"/>
+          <p:cNvSpPr/>
+          <p:nvPr/>
+        </p:nvSpPr>
+        <p:spPr>
+          <a:xfrm>
+            <a:off x="1097280" y="3246120"/>
+            <a:ext cx="2377440" cy="146304"/>
           </a:xfrm>
           <a:prstGeom prst="rect">
             <a:avLst/>
@@ -2503,84 +2996,71 @@
               <a:buNone/>
             </a:pPr>
             <a:r>
-              <a:rPr lang="en-US" sz="880" b="1" dirty="0">
-                <a:solidFill>
-                  <a:srgbClr val="1F2528"/>
+              <a:rPr lang="en-US" sz="850" dirty="0">
+                <a:solidFill>
+                  <a:srgbClr val="6B7176"/>
                 </a:solidFill>
                 <a:latin typeface="Aptos" pitchFamily="34" charset="0"/>
                 <a:ea typeface="Aptos" pitchFamily="34" charset="-122"/>
                 <a:cs typeface="Aptos" pitchFamily="34" charset="-120"/>
               </a:rPr>
-              <a:t>2006</a:t>
-            </a:r>
-            <a:endParaRPr lang="en-US" sz="880" dirty="0"/>
-          </a:p>
-        </p:txBody>
-      </p:sp>
-      <p:sp>
-        <p:nvSpPr>
-          <p:cNvPr id="12" name="Text 10"/>
-          <p:cNvSpPr/>
-          <p:nvPr/>
-        </p:nvSpPr>
-        <p:spPr>
-          <a:xfrm>
-            <a:off x="2267712" y="3913632"/>
-            <a:ext cx="1207008" cy="438912"/>
+              <a:t>pretraining</a:t>
+            </a:r>
+            <a:endParaRPr lang="en-US" sz="850" dirty="0"/>
+          </a:p>
+        </p:txBody>
+      </p:sp>
+      <p:sp>
+        <p:nvSpPr>
+          <p:cNvPr id="16" name="Shape 14"/>
+          <p:cNvSpPr/>
+          <p:nvPr/>
+        </p:nvSpPr>
+        <p:spPr>
+          <a:xfrm>
+            <a:off x="3886200" y="3246120"/>
+            <a:ext cx="1069848" cy="0"/>
+          </a:xfrm>
+          <a:prstGeom prst="line">
+            <a:avLst/>
+          </a:prstGeom>
+          <a:noFill/>
+          <a:ln w="19050">
+            <a:solidFill>
+              <a:srgbClr val="BFC6C8"/>
+            </a:solidFill>
+            <a:prstDash val="solid"/>
+            <a:tailEnd type="triangle"/>
+          </a:ln>
+        </p:spPr>
+        <p:txBody>
+          <a:bodyPr/>
+          <a:lstStyle/>
+          <a:p>
+            <a:endParaRPr lang="en-US"/>
+          </a:p>
+        </p:txBody>
+      </p:sp>
+      <p:sp>
+        <p:nvSpPr>
+          <p:cNvPr id="17" name="Shape 15"/>
+          <p:cNvSpPr/>
+          <p:nvPr/>
+        </p:nvSpPr>
+        <p:spPr>
+          <a:xfrm>
+            <a:off x="5138928" y="2743200"/>
+            <a:ext cx="2148840" cy="1005840"/>
           </a:xfrm>
           <a:prstGeom prst="rect">
             <a:avLst/>
           </a:prstGeom>
-          <a:noFill/>
-          <a:ln/>
-        </p:spPr>
-        <p:txBody>
-          <a:bodyPr wrap="square" lIns="0" tIns="0" rIns="0" bIns="0" rtlCol="0" anchor="t">
-            <a:normAutofit/>
-          </a:bodyPr>
-          <a:lstStyle/>
-          <a:p>
-            <a:pPr marL="0" indent="0" algn="ctr">
-              <a:lnSpc>
-                <a:spcPct val="85000"/>
-              </a:lnSpc>
-              <a:buNone/>
-            </a:pPr>
-            <a:r>
-              <a:rPr lang="en-US" sz="800" dirty="0">
-                <a:solidFill>
-                  <a:srgbClr val="6B7176"/>
-                </a:solidFill>
-                <a:latin typeface="Aptos" pitchFamily="34" charset="0"/>
-                <a:ea typeface="Aptos" pitchFamily="34" charset="-122"/>
-                <a:cs typeface="Aptos" pitchFamily="34" charset="-120"/>
-              </a:rPr>
-              <a:t>Deep learning revival</a:t>
-            </a:r>
-            <a:endParaRPr lang="en-US" sz="800" dirty="0"/>
-          </a:p>
-        </p:txBody>
-      </p:sp>
-      <p:sp>
-        <p:nvSpPr>
-          <p:cNvPr id="13" name="Shape 11"/>
-          <p:cNvSpPr/>
-          <p:nvPr/>
-        </p:nvSpPr>
-        <p:spPr>
-          <a:xfrm>
-            <a:off x="4837176" y="3575304"/>
-            <a:ext cx="164592" cy="164592"/>
-          </a:xfrm>
-          <a:prstGeom prst="ellipse">
-            <a:avLst/>
-          </a:prstGeom>
           <a:solidFill>
-            <a:srgbClr val="F7F5EF"/>
+            <a:srgbClr val="FDFDFB"/>
           </a:solidFill>
-          <a:ln w="11430">
+          <a:ln w="10160">
             <a:solidFill>
-              <a:srgbClr val="30383D"/>
+              <a:srgbClr val="17677D"/>
             </a:solidFill>
             <a:prstDash val="solid"/>
           </a:ln>
@@ -2595,14 +3075,14 @@
       </p:sp>
       <p:sp>
         <p:nvSpPr>
-          <p:cNvPr id="14" name="Text 12"/>
-          <p:cNvSpPr/>
-          <p:nvPr/>
-        </p:nvSpPr>
-        <p:spPr>
-          <a:xfrm>
-            <a:off x="4507992" y="3154680"/>
-            <a:ext cx="822960" cy="164592"/>
+          <p:cNvPr id="18" name="Text 16"/>
+          <p:cNvSpPr/>
+          <p:nvPr/>
+        </p:nvSpPr>
+        <p:spPr>
+          <a:xfrm>
+            <a:off x="5212080" y="3172968"/>
+            <a:ext cx="2002536" cy="164592"/>
           </a:xfrm>
           <a:prstGeom prst="rect">
             <a:avLst/>
@@ -2611,8 +3091,8 @@
           <a:ln/>
         </p:spPr>
         <p:txBody>
-          <a:bodyPr wrap="square" lIns="0" tIns="0" rIns="0" bIns="0" rtlCol="0" anchor="t">
-            <a:normAutofit/>
+          <a:bodyPr wrap="square" lIns="0" tIns="0" rIns="0" bIns="0" rtlCol="0" anchor="ctr">
+            <a:normAutofit fontScale="62500" lnSpcReduction="20000"/>
           </a:bodyPr>
           <a:lstStyle/>
           <a:p>
@@ -2623,7 +3103,7 @@
               <a:buNone/>
             </a:pPr>
             <a:r>
-              <a:rPr lang="en-US" sz="880" b="1" dirty="0">
+              <a:rPr lang="en-US" sz="1100" dirty="0">
                 <a:solidFill>
                   <a:srgbClr val="1F2528"/>
                 </a:solidFill>
@@ -2631,110 +3111,10 @@
                 <a:ea typeface="Aptos" pitchFamily="34" charset="-122"/>
                 <a:cs typeface="Aptos" pitchFamily="34" charset="-120"/>
               </a:rPr>
-              <a:t>2012</a:t>
-            </a:r>
-            <a:endParaRPr lang="en-US" sz="880" dirty="0"/>
-          </a:p>
-        </p:txBody>
-      </p:sp>
-      <p:sp>
-        <p:nvSpPr>
-          <p:cNvPr id="15" name="Text 13"/>
-          <p:cNvSpPr/>
-          <p:nvPr/>
-        </p:nvSpPr>
-        <p:spPr>
-          <a:xfrm>
-            <a:off x="4315968" y="3913632"/>
-            <a:ext cx="1207008" cy="438912"/>
-          </a:xfrm>
-          <a:prstGeom prst="rect">
-            <a:avLst/>
-          </a:prstGeom>
-          <a:noFill/>
-          <a:ln/>
-        </p:spPr>
-        <p:txBody>
-          <a:bodyPr wrap="square" lIns="0" tIns="0" rIns="0" bIns="0" rtlCol="0" anchor="t">
-            <a:normAutofit/>
-          </a:bodyPr>
-          <a:lstStyle/>
-          <a:p>
-            <a:pPr marL="0" indent="0" algn="ctr">
-              <a:lnSpc>
-                <a:spcPct val="85000"/>
-              </a:lnSpc>
-              <a:buNone/>
-            </a:pPr>
-            <a:r>
-              <a:rPr lang="en-US" sz="800" dirty="0">
-                <a:solidFill>
-                  <a:srgbClr val="6B7176"/>
-                </a:solidFill>
-                <a:latin typeface="Aptos" pitchFamily="34" charset="0"/>
-                <a:ea typeface="Aptos" pitchFamily="34" charset="-122"/>
-                <a:cs typeface="Aptos" pitchFamily="34" charset="-120"/>
-              </a:rPr>
-              <a:t>CNN/ImageNet moment</a:t>
-            </a:r>
-            <a:endParaRPr lang="en-US" sz="800" dirty="0"/>
-          </a:p>
-        </p:txBody>
-      </p:sp>
-      <p:sp>
-        <p:nvSpPr>
-          <p:cNvPr id="16" name="Shape 14"/>
-          <p:cNvSpPr/>
-          <p:nvPr/>
-        </p:nvSpPr>
-        <p:spPr>
-          <a:xfrm>
-            <a:off x="6885432" y="3575304"/>
-            <a:ext cx="164592" cy="164592"/>
-          </a:xfrm>
-          <a:prstGeom prst="ellipse">
-            <a:avLst/>
-          </a:prstGeom>
-          <a:solidFill>
-            <a:srgbClr val="B65D3A"/>
-          </a:solidFill>
-          <a:ln w="11430">
-            <a:solidFill>
-              <a:srgbClr val="30383D"/>
-            </a:solidFill>
-            <a:prstDash val="solid"/>
-          </a:ln>
-        </p:spPr>
-        <p:txBody>
-          <a:bodyPr/>
-          <a:lstStyle/>
-          <a:p>
-            <a:endParaRPr lang="en-US"/>
-          </a:p>
-        </p:txBody>
-      </p:sp>
-      <p:sp>
-        <p:nvSpPr>
-          <p:cNvPr id="17" name="Text 15"/>
-          <p:cNvSpPr/>
-          <p:nvPr/>
-        </p:nvSpPr>
-        <p:spPr>
-          <a:xfrm>
-            <a:off x="6556248" y="3154680"/>
-            <a:ext cx="822960" cy="164592"/>
-          </a:xfrm>
-          <a:prstGeom prst="rect">
-            <a:avLst/>
-          </a:prstGeom>
-          <a:noFill/>
-          <a:ln/>
-        </p:spPr>
-        <p:txBody>
-          <a:bodyPr wrap="square" lIns="0" tIns="0" rIns="0" bIns="0" rtlCol="0" anchor="t">
-            <a:normAutofit/>
-          </a:bodyPr>
-          <a:lstStyle/>
+              <a:t>Pretrained</a:t>
+            </a:r>
+            <a:endParaRPr lang="en-US" sz="1100" dirty="0"/>
+          </a:p>
           <a:p>
             <a:pPr marL="0" indent="0" algn="ctr">
               <a:lnSpc>
@@ -2743,84 +3123,71 @@
               <a:buNone/>
             </a:pPr>
             <a:r>
-              <a:rPr lang="en-US" sz="880" b="1" dirty="0">
-                <a:solidFill>
-                  <a:srgbClr val="B65D3A"/>
+              <a:rPr lang="en-US" sz="1100" dirty="0">
+                <a:solidFill>
+                  <a:srgbClr val="1F2528"/>
                 </a:solidFill>
                 <a:latin typeface="Aptos" pitchFamily="34" charset="0"/>
                 <a:ea typeface="Aptos" pitchFamily="34" charset="-122"/>
                 <a:cs typeface="Aptos" pitchFamily="34" charset="-120"/>
               </a:rPr>
-              <a:t>2015</a:t>
-            </a:r>
-            <a:endParaRPr lang="en-US" sz="880" dirty="0"/>
-          </a:p>
-        </p:txBody>
-      </p:sp>
-      <p:sp>
-        <p:nvSpPr>
-          <p:cNvPr id="18" name="Text 16"/>
-          <p:cNvSpPr/>
-          <p:nvPr/>
-        </p:nvSpPr>
-        <p:spPr>
-          <a:xfrm>
-            <a:off x="6364224" y="3913632"/>
-            <a:ext cx="1207008" cy="438912"/>
+              <a:t>CNN-style encoder</a:t>
+            </a:r>
+            <a:endParaRPr lang="en-US" sz="1100" dirty="0"/>
+          </a:p>
+        </p:txBody>
+      </p:sp>
+      <p:sp>
+        <p:nvSpPr>
+          <p:cNvPr id="19" name="Shape 17"/>
+          <p:cNvSpPr/>
+          <p:nvPr/>
+        </p:nvSpPr>
+        <p:spPr>
+          <a:xfrm>
+            <a:off x="7452360" y="3246120"/>
+            <a:ext cx="1005840" cy="0"/>
+          </a:xfrm>
+          <a:prstGeom prst="line">
+            <a:avLst/>
+          </a:prstGeom>
+          <a:noFill/>
+          <a:ln w="19050">
+            <a:solidFill>
+              <a:srgbClr val="BFC6C8"/>
+            </a:solidFill>
+            <a:prstDash val="solid"/>
+            <a:tailEnd type="triangle"/>
+          </a:ln>
+        </p:spPr>
+        <p:txBody>
+          <a:bodyPr/>
+          <a:lstStyle/>
+          <a:p>
+            <a:endParaRPr lang="en-US"/>
+          </a:p>
+        </p:txBody>
+      </p:sp>
+      <p:sp>
+        <p:nvSpPr>
+          <p:cNvPr id="20" name="Shape 18"/>
+          <p:cNvSpPr/>
+          <p:nvPr/>
+        </p:nvSpPr>
+        <p:spPr>
+          <a:xfrm>
+            <a:off x="8641080" y="2743200"/>
+            <a:ext cx="1920240" cy="1005840"/>
           </a:xfrm>
           <a:prstGeom prst="rect">
             <a:avLst/>
           </a:prstGeom>
-          <a:noFill/>
-          <a:ln/>
-        </p:spPr>
-        <p:txBody>
-          <a:bodyPr wrap="square" lIns="0" tIns="0" rIns="0" bIns="0" rtlCol="0" anchor="t">
-            <a:normAutofit/>
-          </a:bodyPr>
-          <a:lstStyle/>
-          <a:p>
-            <a:pPr marL="0" indent="0" algn="ctr">
-              <a:lnSpc>
-                <a:spcPct val="85000"/>
-              </a:lnSpc>
-              <a:buNone/>
-            </a:pPr>
-            <a:r>
-              <a:rPr lang="en-US" sz="800" dirty="0">
-                <a:solidFill>
-                  <a:srgbClr val="6B7176"/>
-                </a:solidFill>
-                <a:latin typeface="Aptos" pitchFamily="34" charset="0"/>
-                <a:ea typeface="Aptos" pitchFamily="34" charset="-122"/>
-                <a:cs typeface="Aptos" pitchFamily="34" charset="-120"/>
-              </a:rPr>
-              <a:t>Piczak CNN on ESC-50</a:t>
-            </a:r>
-            <a:endParaRPr lang="en-US" sz="800" dirty="0"/>
-          </a:p>
-        </p:txBody>
-      </p:sp>
-      <p:sp>
-        <p:nvSpPr>
-          <p:cNvPr id="19" name="Shape 17"/>
-          <p:cNvSpPr/>
-          <p:nvPr/>
-        </p:nvSpPr>
-        <p:spPr>
-          <a:xfrm>
-            <a:off x="8933688" y="3575304"/>
-            <a:ext cx="164592" cy="164592"/>
-          </a:xfrm>
-          <a:prstGeom prst="ellipse">
-            <a:avLst/>
-          </a:prstGeom>
           <a:solidFill>
-            <a:srgbClr val="F7F5EF"/>
+            <a:srgbClr val="FDFDFB"/>
           </a:solidFill>
-          <a:ln w="11430">
+          <a:ln w="10160">
             <a:solidFill>
-              <a:srgbClr val="30383D"/>
+              <a:srgbClr val="BFC6C8"/>
             </a:solidFill>
             <a:prstDash val="solid"/>
           </a:ln>
@@ -2835,14 +3202,14 @@
       </p:sp>
       <p:sp>
         <p:nvSpPr>
-          <p:cNvPr id="20" name="Text 18"/>
-          <p:cNvSpPr/>
-          <p:nvPr/>
-        </p:nvSpPr>
-        <p:spPr>
-          <a:xfrm>
-            <a:off x="8604504" y="3154680"/>
-            <a:ext cx="822960" cy="164592"/>
+          <p:cNvPr id="21" name="Text 19"/>
+          <p:cNvSpPr/>
+          <p:nvPr/>
+        </p:nvSpPr>
+        <p:spPr>
+          <a:xfrm>
+            <a:off x="8714232" y="3172968"/>
+            <a:ext cx="1773936" cy="164592"/>
           </a:xfrm>
           <a:prstGeom prst="rect">
             <a:avLst/>
@@ -2851,8 +3218,8 @@
           <a:ln/>
         </p:spPr>
         <p:txBody>
-          <a:bodyPr wrap="square" lIns="0" tIns="0" rIns="0" bIns="0" rtlCol="0" anchor="t">
-            <a:normAutofit/>
+          <a:bodyPr wrap="square" lIns="0" tIns="0" rIns="0" bIns="0" rtlCol="0" anchor="ctr">
+            <a:normAutofit fontScale="62500" lnSpcReduction="20000"/>
           </a:bodyPr>
           <a:lstStyle/>
           <a:p>
@@ -2863,7 +3230,7 @@
               <a:buNone/>
             </a:pPr>
             <a:r>
-              <a:rPr lang="en-US" sz="880" b="1" dirty="0">
+              <a:rPr lang="en-US" sz="1100" dirty="0">
                 <a:solidFill>
                   <a:srgbClr val="1F2528"/>
                 </a:solidFill>
@@ -2871,110 +3238,10 @@
                 <a:ea typeface="Aptos" pitchFamily="34" charset="-122"/>
                 <a:cs typeface="Aptos" pitchFamily="34" charset="-120"/>
               </a:rPr>
-              <a:t>2017-19</a:t>
-            </a:r>
-            <a:endParaRPr lang="en-US" sz="880" dirty="0"/>
-          </a:p>
-        </p:txBody>
-      </p:sp>
-      <p:sp>
-        <p:nvSpPr>
-          <p:cNvPr id="21" name="Text 19"/>
-          <p:cNvSpPr/>
-          <p:nvPr/>
-        </p:nvSpPr>
-        <p:spPr>
-          <a:xfrm>
-            <a:off x="8412480" y="3913632"/>
-            <a:ext cx="1207008" cy="438912"/>
-          </a:xfrm>
-          <a:prstGeom prst="rect">
-            <a:avLst/>
-          </a:prstGeom>
-          <a:noFill/>
-          <a:ln/>
-        </p:spPr>
-        <p:txBody>
-          <a:bodyPr wrap="square" lIns="0" tIns="0" rIns="0" bIns="0" rtlCol="0" anchor="t">
-            <a:normAutofit/>
-          </a:bodyPr>
-          <a:lstStyle/>
-          <a:p>
-            <a:pPr marL="0" indent="0" algn="ctr">
-              <a:lnSpc>
-                <a:spcPct val="85000"/>
-              </a:lnSpc>
-              <a:buNone/>
-            </a:pPr>
-            <a:r>
-              <a:rPr lang="en-US" sz="800" dirty="0">
-                <a:solidFill>
-                  <a:srgbClr val="6B7176"/>
-                </a:solidFill>
-                <a:latin typeface="Aptos" pitchFamily="34" charset="0"/>
-                <a:ea typeface="Aptos" pitchFamily="34" charset="-122"/>
-                <a:cs typeface="Aptos" pitchFamily="34" charset="-120"/>
-              </a:rPr>
-              <a:t>Transfer learning matures</a:t>
-            </a:r>
-            <a:endParaRPr lang="en-US" sz="800" dirty="0"/>
-          </a:p>
-        </p:txBody>
-      </p:sp>
-      <p:sp>
-        <p:nvSpPr>
-          <p:cNvPr id="22" name="Shape 20"/>
-          <p:cNvSpPr/>
-          <p:nvPr/>
-        </p:nvSpPr>
-        <p:spPr>
-          <a:xfrm>
-            <a:off x="10981944" y="3575304"/>
-            <a:ext cx="164592" cy="164592"/>
-          </a:xfrm>
-          <a:prstGeom prst="ellipse">
-            <a:avLst/>
-          </a:prstGeom>
-          <a:solidFill>
-            <a:srgbClr val="17677D"/>
-          </a:solidFill>
-          <a:ln w="11430">
-            <a:solidFill>
-              <a:srgbClr val="30383D"/>
-            </a:solidFill>
-            <a:prstDash val="solid"/>
-          </a:ln>
-        </p:spPr>
-        <p:txBody>
-          <a:bodyPr/>
-          <a:lstStyle/>
-          <a:p>
-            <a:endParaRPr lang="en-US"/>
-          </a:p>
-        </p:txBody>
-      </p:sp>
-      <p:sp>
-        <p:nvSpPr>
-          <p:cNvPr id="23" name="Text 21"/>
-          <p:cNvSpPr/>
-          <p:nvPr/>
-        </p:nvSpPr>
-        <p:spPr>
-          <a:xfrm>
-            <a:off x="10652760" y="3154680"/>
-            <a:ext cx="822960" cy="164592"/>
-          </a:xfrm>
-          <a:prstGeom prst="rect">
-            <a:avLst/>
-          </a:prstGeom>
-          <a:noFill/>
-          <a:ln/>
-        </p:spPr>
-        <p:txBody>
-          <a:bodyPr wrap="square" lIns="0" tIns="0" rIns="0" bIns="0" rtlCol="0" anchor="t">
-            <a:normAutofit/>
-          </a:bodyPr>
-          <a:lstStyle/>
+              <a:t>ESC-50</a:t>
+            </a:r>
+            <a:endParaRPr lang="en-US" sz="1100" dirty="0"/>
+          </a:p>
           <a:p>
             <a:pPr marL="0" indent="0" algn="ctr">
               <a:lnSpc>
@@ -2983,7 +3250,7 @@
               <a:buNone/>
             </a:pPr>
             <a:r>
-              <a:rPr lang="en-US" sz="880" b="1" dirty="0">
+              <a:rPr lang="en-US" sz="1100" dirty="0">
                 <a:solidFill>
                   <a:srgbClr val="1F2528"/>
                 </a:solidFill>
@@ -2991,22 +3258,22 @@
                 <a:ea typeface="Aptos" pitchFamily="34" charset="-122"/>
                 <a:cs typeface="Aptos" pitchFamily="34" charset="-120"/>
               </a:rPr>
-              <a:t>2020s</a:t>
-            </a:r>
-            <a:endParaRPr lang="en-US" sz="880" dirty="0"/>
-          </a:p>
-        </p:txBody>
-      </p:sp>
-      <p:sp>
-        <p:nvSpPr>
-          <p:cNvPr id="24" name="Text 22"/>
-          <p:cNvSpPr/>
-          <p:nvPr/>
-        </p:nvSpPr>
-        <p:spPr>
-          <a:xfrm>
-            <a:off x="10460736" y="3913632"/>
-            <a:ext cx="1207008" cy="438912"/>
+              <a:t>fine-tuning</a:t>
+            </a:r>
+            <a:endParaRPr lang="en-US" sz="1100" dirty="0"/>
+          </a:p>
+        </p:txBody>
+      </p:sp>
+      <p:sp>
+        <p:nvSpPr>
+          <p:cNvPr id="22" name="Text 20"/>
+          <p:cNvSpPr/>
+          <p:nvPr/>
+        </p:nvSpPr>
+        <p:spPr>
+          <a:xfrm>
+            <a:off x="914400" y="4572000"/>
+            <a:ext cx="9509760" cy="1024128"/>
           </a:xfrm>
           <a:prstGeom prst="rect">
             <a:avLst/>
@@ -3015,79 +3282,63 @@
           <a:ln/>
         </p:spPr>
         <p:txBody>
-          <a:bodyPr wrap="square" lIns="0" tIns="0" rIns="0" bIns="0" rtlCol="0" anchor="t">
+          <a:bodyPr wrap="square" lIns="254" tIns="254" rIns="254" bIns="254" rtlCol="0" anchor="ctr">
             <a:normAutofit/>
           </a:bodyPr>
           <a:lstStyle/>
           <a:p>
-            <a:pPr marL="0" indent="0" algn="ctr">
-              <a:lnSpc>
-                <a:spcPct val="85000"/>
-              </a:lnSpc>
-              <a:buNone/>
-            </a:pPr>
-            <a:r>
-              <a:rPr lang="en-US" sz="800" dirty="0">
-                <a:solidFill>
-                  <a:srgbClr val="6B7176"/>
+            <a:r>
+              <a:rPr lang="en-US" sz="1300" dirty="0">
+                <a:solidFill>
+                  <a:srgbClr val="1F2528"/>
                 </a:solidFill>
                 <a:latin typeface="Aptos" pitchFamily="34" charset="0"/>
                 <a:ea typeface="Aptos" pitchFamily="34" charset="-122"/>
                 <a:cs typeface="Aptos" pitchFamily="34" charset="-120"/>
               </a:rPr>
-              <a:t>Pretrained representations at scale</a:t>
-            </a:r>
-            <a:endParaRPr lang="en-US" sz="800" dirty="0"/>
-          </a:p>
-        </p:txBody>
-      </p:sp>
-      <p:sp>
-        <p:nvSpPr>
-          <p:cNvPr id="25" name="Text 23"/>
-          <p:cNvSpPr/>
-          <p:nvPr/>
-        </p:nvSpPr>
-        <p:spPr>
-          <a:xfrm>
-            <a:off x="6463401" y="4693985"/>
-            <a:ext cx="4526280" cy="868680"/>
-          </a:xfrm>
-          <a:prstGeom prst="rect">
-            <a:avLst/>
-          </a:prstGeom>
-          <a:noFill/>
-          <a:ln/>
-        </p:spPr>
-        <p:txBody>
-          <a:bodyPr wrap="square" lIns="0" tIns="0" rIns="0" bIns="0" rtlCol="0" anchor="t">
-            <a:normAutofit/>
-          </a:bodyPr>
-          <a:lstStyle/>
-          <a:p>
-            <a:pPr marL="0" indent="0" algn="l">
-              <a:lnSpc>
-                <a:spcPct val="90000"/>
-              </a:lnSpc>
-              <a:buNone/>
-            </a:pPr>
-            <a:r>
-              <a:rPr lang="en-US" sz="1700" b="1" dirty="0">
-                <a:solidFill>
-                  <a:srgbClr val="17677D"/>
-                </a:solidFill>
-                <a:latin typeface="Aptos Display" pitchFamily="34" charset="0"/>
-                <a:ea typeface="Aptos Display" pitchFamily="34" charset="-122"/>
-                <a:cs typeface="Aptos Display" pitchFamily="34" charset="-120"/>
-              </a:rPr>
-              <a:t>We use a 2015 benchmark as a time capsule: can later neural-network techniques produce measurable gains?</a:t>
-            </a:r>
-            <a:endParaRPr lang="en-US" sz="1700" dirty="0"/>
-          </a:p>
-        </p:txBody>
-      </p:sp>
-      <p:sp>
-        <p:nvSpPr>
-          <p:cNvPr id="26" name="Text 24"/>
+              <a:t>ESC-50 is small for learning robust audio features from scratch.</a:t>
+            </a:r>
+            <a:endParaRPr lang="en-US" sz="1300" dirty="0"/>
+          </a:p>
+          <a:p>
+            <a:endParaRPr lang="en-US" sz="1300" dirty="0"/>
+          </a:p>
+          <a:p>
+            <a:r>
+              <a:rPr lang="en-US" sz="1300" dirty="0">
+                <a:solidFill>
+                  <a:srgbClr val="1F2528"/>
+                </a:solidFill>
+                <a:latin typeface="Aptos" pitchFamily="34" charset="0"/>
+                <a:ea typeface="Aptos" pitchFamily="34" charset="-122"/>
+                <a:cs typeface="Aptos" pitchFamily="34" charset="-120"/>
+              </a:rPr>
+              <a:t>Transfer learning imports representations learned from much larger audio datasets.</a:t>
+            </a:r>
+            <a:endParaRPr lang="en-US" sz="1300" dirty="0"/>
+          </a:p>
+          <a:p>
+            <a:endParaRPr lang="en-US" sz="1300" dirty="0"/>
+          </a:p>
+          <a:p>
+            <a:r>
+              <a:rPr lang="en-US" sz="1300" dirty="0">
+                <a:solidFill>
+                  <a:srgbClr val="1F2528"/>
+                </a:solidFill>
+                <a:latin typeface="Aptos" pitchFamily="34" charset="0"/>
+                <a:ea typeface="Aptos" pitchFamily="34" charset="-122"/>
+                <a:cs typeface="Aptos" pitchFamily="34" charset="-120"/>
+              </a:rPr>
+              <a:t>This era tests pretrained CNN-style audio models before transformer-based audio encoders.</a:t>
+            </a:r>
+            <a:endParaRPr lang="en-US" sz="1300" dirty="0"/>
+          </a:p>
+        </p:txBody>
+      </p:sp>
+      <p:sp>
+        <p:nvSpPr>
+          <p:cNvPr id="23" name="Text 21"/>
           <p:cNvSpPr/>
           <p:nvPr/>
         </p:nvSpPr>
@@ -3123,70 +3374,18 @@
                 <a:ea typeface="Aptos" pitchFamily="34" charset="-122"/>
                 <a:cs typeface="Aptos" pitchFamily="34" charset="-120"/>
               </a:rPr>
-              <a:t>01</a:t>
+              <a:t>07</a:t>
             </a:r>
             <a:endParaRPr lang="en-US" sz="750" dirty="0"/>
           </a:p>
         </p:txBody>
       </p:sp>
-      <p:sp>
-        <p:nvSpPr>
-          <p:cNvPr id="27" name="Rectangle 26">
+      <p:pic>
+        <p:nvPicPr>
+          <p:cNvPr id="31" name="Picture 2" descr="Cornell University Logo, symbol, meaning, history, PNG, brand">
             <a:extLst>
               <a:ext uri="{FF2B5EF4-FFF2-40B4-BE49-F238E27FC236}">
-                <a16:creationId xmlns:a16="http://schemas.microsoft.com/office/drawing/2014/main" id="{9BA562B3-85D6-D8F9-B3B8-1384B0F1FBB9}"/>
-              </a:ext>
-            </a:extLst>
-          </p:cNvPr>
-          <p:cNvSpPr/>
-          <p:nvPr/>
-        </p:nvSpPr>
-        <p:spPr>
-          <a:xfrm>
-            <a:off x="6364224" y="2873846"/>
-            <a:ext cx="5303520" cy="1688106"/>
-          </a:xfrm>
-          <a:prstGeom prst="rect">
-            <a:avLst/>
-          </a:prstGeom>
-          <a:noFill/>
-          <a:ln>
-            <a:solidFill>
-              <a:schemeClr val="tx1"/>
-            </a:solidFill>
-          </a:ln>
-        </p:spPr>
-        <p:style>
-          <a:lnRef idx="2">
-            <a:schemeClr val="accent1">
-              <a:shade val="15000"/>
-            </a:schemeClr>
-          </a:lnRef>
-          <a:fillRef idx="1">
-            <a:schemeClr val="accent1"/>
-          </a:fillRef>
-          <a:effectRef idx="0">
-            <a:schemeClr val="accent1"/>
-          </a:effectRef>
-          <a:fontRef idx="minor">
-            <a:schemeClr val="lt1"/>
-          </a:fontRef>
-        </p:style>
-        <p:txBody>
-          <a:bodyPr rtlCol="0" anchor="ctr"/>
-          <a:lstStyle/>
-          <a:p>
-            <a:pPr algn="ctr"/>
-            <a:endParaRPr lang="en-US"/>
-          </a:p>
-        </p:txBody>
-      </p:sp>
-      <p:pic>
-        <p:nvPicPr>
-          <p:cNvPr id="28" name="Picture 2" descr="Cornell University Logo, symbol, meaning, history, PNG, brand">
-            <a:extLst>
-              <a:ext uri="{FF2B5EF4-FFF2-40B4-BE49-F238E27FC236}">
-                <a16:creationId xmlns:a16="http://schemas.microsoft.com/office/drawing/2014/main" id="{3B50C48C-33E4-796F-F8B1-DB5A33A30FF6}"/>
+                <a16:creationId xmlns:a16="http://schemas.microsoft.com/office/drawing/2014/main" id="{62E0AF86-B513-90EF-C7B7-DDB5A9E396B9}"/>
               </a:ext>
             </a:extLst>
           </p:cNvPr>
@@ -3226,6 +3425,420 @@
           </a:extLst>
         </p:spPr>
       </p:pic>
+      <p:sp>
+        <p:nvSpPr>
+          <p:cNvPr id="32" name="Shape 19">
+            <a:extLst>
+              <a:ext uri="{FF2B5EF4-FFF2-40B4-BE49-F238E27FC236}">
+                <a16:creationId xmlns:a16="http://schemas.microsoft.com/office/drawing/2014/main" id="{260A39BB-675D-9A5C-9111-93699EA456EF}"/>
+              </a:ext>
+            </a:extLst>
+          </p:cNvPr>
+          <p:cNvSpPr/>
+          <p:nvPr/>
+        </p:nvSpPr>
+        <p:spPr>
+          <a:xfrm>
+            <a:off x="6237447" y="751408"/>
+            <a:ext cx="1809206" cy="295381"/>
+          </a:xfrm>
+          <a:prstGeom prst="chevron">
+            <a:avLst/>
+          </a:prstGeom>
+          <a:solidFill>
+            <a:srgbClr val="D7DDE0">
+              <a:alpha val="90000"/>
+            </a:srgbClr>
+          </a:solidFill>
+          <a:ln w="12700">
+            <a:solidFill>
+              <a:srgbClr val="F7F5EF"/>
+            </a:solidFill>
+            <a:prstDash val="solid"/>
+          </a:ln>
+        </p:spPr>
+        <p:txBody>
+          <a:bodyPr/>
+          <a:lstStyle/>
+          <a:p>
+            <a:endParaRPr lang="en-US" sz="1100" dirty="0"/>
+          </a:p>
+        </p:txBody>
+      </p:sp>
+      <p:sp>
+        <p:nvSpPr>
+          <p:cNvPr id="33" name="Text 20">
+            <a:extLst>
+              <a:ext uri="{FF2B5EF4-FFF2-40B4-BE49-F238E27FC236}">
+                <a16:creationId xmlns:a16="http://schemas.microsoft.com/office/drawing/2014/main" id="{BA526180-DF64-53B3-1180-B6DBF5A9B1C8}"/>
+              </a:ext>
+            </a:extLst>
+          </p:cNvPr>
+          <p:cNvSpPr/>
+          <p:nvPr/>
+        </p:nvSpPr>
+        <p:spPr>
+          <a:xfrm>
+            <a:off x="6287692" y="833886"/>
+            <a:ext cx="1597682" cy="75563"/>
+          </a:xfrm>
+          <a:prstGeom prst="rect">
+            <a:avLst/>
+          </a:prstGeom>
+          <a:noFill/>
+          <a:ln/>
+        </p:spPr>
+        <p:txBody>
+          <a:bodyPr wrap="square" lIns="0" tIns="0" rIns="0" bIns="0" rtlCol="0" anchor="t">
+            <a:normAutofit fontScale="92500" lnSpcReduction="20000"/>
+          </a:bodyPr>
+          <a:lstStyle/>
+          <a:p>
+            <a:pPr algn="ctr">
+              <a:lnSpc>
+                <a:spcPct val="90000"/>
+              </a:lnSpc>
+            </a:pPr>
+            <a:r>
+              <a:rPr lang="en-US" sz="700" b="1" dirty="0">
+                <a:solidFill>
+                  <a:srgbClr val="30383D"/>
+                </a:solidFill>
+                <a:latin typeface="Aptos" pitchFamily="34" charset="0"/>
+              </a:rPr>
+              <a:t>Training from scratch</a:t>
+            </a:r>
+          </a:p>
+        </p:txBody>
+      </p:sp>
+      <p:sp>
+        <p:nvSpPr>
+          <p:cNvPr id="34" name="Text 21">
+            <a:extLst>
+              <a:ext uri="{FF2B5EF4-FFF2-40B4-BE49-F238E27FC236}">
+                <a16:creationId xmlns:a16="http://schemas.microsoft.com/office/drawing/2014/main" id="{91AA0ADC-A28C-7C05-372C-FD6A76EC5657}"/>
+              </a:ext>
+            </a:extLst>
+          </p:cNvPr>
+          <p:cNvSpPr/>
+          <p:nvPr/>
+        </p:nvSpPr>
+        <p:spPr>
+          <a:xfrm>
+            <a:off x="6295809" y="928966"/>
+            <a:ext cx="1597682" cy="58389"/>
+          </a:xfrm>
+          <a:prstGeom prst="rect">
+            <a:avLst/>
+          </a:prstGeom>
+          <a:noFill/>
+          <a:ln/>
+        </p:spPr>
+        <p:txBody>
+          <a:bodyPr wrap="square" lIns="0" tIns="0" rIns="0" bIns="0" rtlCol="0" anchor="t">
+            <a:normAutofit fontScale="92500" lnSpcReduction="20000"/>
+          </a:bodyPr>
+          <a:lstStyle/>
+          <a:p>
+            <a:pPr marL="0" indent="0" algn="ctr">
+              <a:lnSpc>
+                <a:spcPct val="90000"/>
+              </a:lnSpc>
+              <a:buNone/>
+            </a:pPr>
+            <a:r>
+              <a:rPr lang="en-US" sz="500" dirty="0" err="1">
+                <a:solidFill>
+                  <a:srgbClr val="6B7176"/>
+                </a:solidFill>
+                <a:latin typeface="Aptos" pitchFamily="34" charset="0"/>
+              </a:rPr>
+              <a:t>Piczak</a:t>
+            </a:r>
+            <a:r>
+              <a:rPr lang="en-US" sz="500" dirty="0">
+                <a:solidFill>
+                  <a:srgbClr val="6B7176"/>
+                </a:solidFill>
+                <a:latin typeface="Aptos" pitchFamily="34" charset="0"/>
+              </a:rPr>
+              <a:t> CNN | Variations | LSTM</a:t>
+            </a:r>
+          </a:p>
+        </p:txBody>
+      </p:sp>
+      <p:sp>
+        <p:nvSpPr>
+          <p:cNvPr id="35" name="Shape 22">
+            <a:extLst>
+              <a:ext uri="{FF2B5EF4-FFF2-40B4-BE49-F238E27FC236}">
+                <a16:creationId xmlns:a16="http://schemas.microsoft.com/office/drawing/2014/main" id="{7BC609B8-2454-D1E2-FD78-ECFA4A2277B6}"/>
+              </a:ext>
+            </a:extLst>
+          </p:cNvPr>
+          <p:cNvSpPr/>
+          <p:nvPr/>
+        </p:nvSpPr>
+        <p:spPr>
+          <a:xfrm>
+            <a:off x="7904546" y="750102"/>
+            <a:ext cx="1809206" cy="295381"/>
+          </a:xfrm>
+          <a:prstGeom prst="chevron">
+            <a:avLst/>
+          </a:prstGeom>
+          <a:solidFill>
+            <a:srgbClr val="17677D"/>
+          </a:solidFill>
+          <a:ln w="12700">
+            <a:solidFill>
+              <a:srgbClr val="17677D">
+                <a:alpha val="0"/>
+              </a:srgbClr>
+            </a:solidFill>
+            <a:prstDash val="solid"/>
+          </a:ln>
+        </p:spPr>
+        <p:txBody>
+          <a:bodyPr/>
+          <a:lstStyle/>
+          <a:p>
+            <a:endParaRPr lang="en-US"/>
+          </a:p>
+        </p:txBody>
+      </p:sp>
+      <p:sp>
+        <p:nvSpPr>
+          <p:cNvPr id="36" name="Text 23">
+            <a:extLst>
+              <a:ext uri="{FF2B5EF4-FFF2-40B4-BE49-F238E27FC236}">
+                <a16:creationId xmlns:a16="http://schemas.microsoft.com/office/drawing/2014/main" id="{5795C228-2271-C0A9-F5DA-A886FEE6BFCA}"/>
+              </a:ext>
+            </a:extLst>
+          </p:cNvPr>
+          <p:cNvSpPr/>
+          <p:nvPr/>
+        </p:nvSpPr>
+        <p:spPr>
+          <a:xfrm>
+            <a:off x="7976392" y="839252"/>
+            <a:ext cx="1597682" cy="75563"/>
+          </a:xfrm>
+          <a:prstGeom prst="rect">
+            <a:avLst/>
+          </a:prstGeom>
+          <a:noFill/>
+          <a:ln/>
+        </p:spPr>
+        <p:txBody>
+          <a:bodyPr wrap="square" lIns="0" tIns="0" rIns="0" bIns="0" rtlCol="0" anchor="t">
+            <a:normAutofit fontScale="92500" lnSpcReduction="20000"/>
+          </a:bodyPr>
+          <a:lstStyle/>
+          <a:p>
+            <a:pPr algn="ctr">
+              <a:lnSpc>
+                <a:spcPct val="90000"/>
+              </a:lnSpc>
+            </a:pPr>
+            <a:r>
+              <a:rPr lang="en-US" sz="700" b="1" dirty="0">
+                <a:solidFill>
+                  <a:srgbClr val="FFFFFF"/>
+                </a:solidFill>
+                <a:latin typeface="Aptos" pitchFamily="34" charset="0"/>
+              </a:rPr>
+              <a:t>Transfer learning: pretrained CNN</a:t>
+            </a:r>
+          </a:p>
+        </p:txBody>
+      </p:sp>
+      <p:sp>
+        <p:nvSpPr>
+          <p:cNvPr id="37" name="Text 24">
+            <a:extLst>
+              <a:ext uri="{FF2B5EF4-FFF2-40B4-BE49-F238E27FC236}">
+                <a16:creationId xmlns:a16="http://schemas.microsoft.com/office/drawing/2014/main" id="{9EEFE770-72AD-FDAB-7578-75687A89F7E1}"/>
+              </a:ext>
+            </a:extLst>
+          </p:cNvPr>
+          <p:cNvSpPr/>
+          <p:nvPr/>
+        </p:nvSpPr>
+        <p:spPr>
+          <a:xfrm>
+            <a:off x="7997198" y="941012"/>
+            <a:ext cx="1597682" cy="58389"/>
+          </a:xfrm>
+          <a:prstGeom prst="rect">
+            <a:avLst/>
+          </a:prstGeom>
+          <a:noFill/>
+          <a:ln/>
+        </p:spPr>
+        <p:txBody>
+          <a:bodyPr wrap="square" lIns="0" tIns="0" rIns="0" bIns="0" rtlCol="0" anchor="t">
+            <a:normAutofit fontScale="92500" lnSpcReduction="20000"/>
+          </a:bodyPr>
+          <a:lstStyle/>
+          <a:p>
+            <a:pPr algn="ctr">
+              <a:lnSpc>
+                <a:spcPct val="90000"/>
+              </a:lnSpc>
+            </a:pPr>
+            <a:r>
+              <a:rPr lang="en-US" sz="500" dirty="0">
+                <a:solidFill>
+                  <a:srgbClr val="FFFFFF"/>
+                </a:solidFill>
+                <a:latin typeface="Aptos" pitchFamily="34" charset="0"/>
+              </a:rPr>
+              <a:t>VGGish | YAMNet</a:t>
+            </a:r>
+          </a:p>
+        </p:txBody>
+      </p:sp>
+      <p:sp>
+        <p:nvSpPr>
+          <p:cNvPr id="38" name="Shape 25">
+            <a:extLst>
+              <a:ext uri="{FF2B5EF4-FFF2-40B4-BE49-F238E27FC236}">
+                <a16:creationId xmlns:a16="http://schemas.microsoft.com/office/drawing/2014/main" id="{87FAA393-F71D-9400-5795-A3916A051E8B}"/>
+              </a:ext>
+            </a:extLst>
+          </p:cNvPr>
+          <p:cNvSpPr/>
+          <p:nvPr/>
+        </p:nvSpPr>
+        <p:spPr>
+          <a:xfrm>
+            <a:off x="9564782" y="749723"/>
+            <a:ext cx="1755200" cy="295381"/>
+          </a:xfrm>
+          <a:prstGeom prst="chevron">
+            <a:avLst/>
+          </a:prstGeom>
+          <a:solidFill>
+            <a:srgbClr val="D7DDE0">
+              <a:alpha val="90000"/>
+            </a:srgbClr>
+          </a:solidFill>
+          <a:ln w="12700">
+            <a:solidFill>
+              <a:srgbClr val="F7F5EF"/>
+            </a:solidFill>
+            <a:prstDash val="solid"/>
+          </a:ln>
+        </p:spPr>
+        <p:txBody>
+          <a:bodyPr/>
+          <a:lstStyle/>
+          <a:p>
+            <a:endParaRPr lang="en-US" sz="1100"/>
+          </a:p>
+        </p:txBody>
+      </p:sp>
+      <p:sp>
+        <p:nvSpPr>
+          <p:cNvPr id="39" name="Text 26">
+            <a:extLst>
+              <a:ext uri="{FF2B5EF4-FFF2-40B4-BE49-F238E27FC236}">
+                <a16:creationId xmlns:a16="http://schemas.microsoft.com/office/drawing/2014/main" id="{180CCBB2-1146-638B-A7EE-280D19E1094A}"/>
+              </a:ext>
+            </a:extLst>
+          </p:cNvPr>
+          <p:cNvSpPr/>
+          <p:nvPr/>
+        </p:nvSpPr>
+        <p:spPr>
+          <a:xfrm>
+            <a:off x="9657605" y="848441"/>
+            <a:ext cx="1597682" cy="75563"/>
+          </a:xfrm>
+          <a:prstGeom prst="rect">
+            <a:avLst/>
+          </a:prstGeom>
+          <a:noFill/>
+          <a:ln/>
+        </p:spPr>
+        <p:txBody>
+          <a:bodyPr wrap="square" lIns="0" tIns="0" rIns="0" bIns="0" rtlCol="0" anchor="t">
+            <a:normAutofit fontScale="92500" lnSpcReduction="20000"/>
+          </a:bodyPr>
+          <a:lstStyle/>
+          <a:p>
+            <a:pPr marL="0" indent="0" algn="ctr">
+              <a:lnSpc>
+                <a:spcPct val="90000"/>
+              </a:lnSpc>
+              <a:buNone/>
+            </a:pPr>
+            <a:r>
+              <a:rPr lang="en-US" sz="700" b="1" dirty="0">
+                <a:solidFill>
+                  <a:srgbClr val="30383D"/>
+                </a:solidFill>
+                <a:latin typeface="Aptos" pitchFamily="34" charset="0"/>
+                <a:ea typeface="Aptos" pitchFamily="34" charset="-122"/>
+                <a:cs typeface="Aptos" pitchFamily="34" charset="-120"/>
+              </a:rPr>
+              <a:t>Transfer learning: pretrained transformers</a:t>
+            </a:r>
+            <a:endParaRPr lang="en-US" sz="700" dirty="0"/>
+          </a:p>
+        </p:txBody>
+      </p:sp>
+      <p:sp>
+        <p:nvSpPr>
+          <p:cNvPr id="40" name="Text 27">
+            <a:extLst>
+              <a:ext uri="{FF2B5EF4-FFF2-40B4-BE49-F238E27FC236}">
+                <a16:creationId xmlns:a16="http://schemas.microsoft.com/office/drawing/2014/main" id="{3FEF8C9C-411D-2FBC-9DE3-A476A096BB75}"/>
+              </a:ext>
+            </a:extLst>
+          </p:cNvPr>
+          <p:cNvSpPr/>
+          <p:nvPr/>
+        </p:nvSpPr>
+        <p:spPr>
+          <a:xfrm>
+            <a:off x="9657605" y="944489"/>
+            <a:ext cx="1662902" cy="107931"/>
+          </a:xfrm>
+          <a:prstGeom prst="rect">
+            <a:avLst/>
+          </a:prstGeom>
+          <a:noFill/>
+          <a:ln/>
+        </p:spPr>
+        <p:txBody>
+          <a:bodyPr wrap="square" lIns="0" tIns="0" rIns="0" bIns="0" rtlCol="0" anchor="t">
+            <a:normAutofit/>
+          </a:bodyPr>
+          <a:lstStyle/>
+          <a:p>
+            <a:pPr marL="0" indent="0" algn="ctr">
+              <a:lnSpc>
+                <a:spcPct val="90000"/>
+              </a:lnSpc>
+              <a:buNone/>
+            </a:pPr>
+            <a:r>
+              <a:rPr lang="en-US" sz="500" dirty="0">
+                <a:solidFill>
+                  <a:srgbClr val="6B7176"/>
+                </a:solidFill>
+                <a:latin typeface="Aptos" pitchFamily="34" charset="0"/>
+                <a:ea typeface="Aptos" pitchFamily="34" charset="-122"/>
+                <a:cs typeface="Aptos" pitchFamily="34" charset="-120"/>
+              </a:rPr>
+              <a:t>AST | BEATs</a:t>
+            </a:r>
+            <a:endParaRPr lang="en-US" sz="500" dirty="0"/>
+          </a:p>
+        </p:txBody>
+      </p:sp>
     </p:spTree>
   </p:cSld>
   <p:clrMapOvr>
@@ -3234,7 +3847,7 @@
 </p:sld>
 </file>
 
-<file path=ppt/slides/slide10.xml><?xml version="1.0" encoding="utf-8"?>
+<file path=ppt/slides/slide11.xml><?xml version="1.0" encoding="utf-8"?>
 <p:sld xmlns:a="http://schemas.openxmlformats.org/drawingml/2006/main" xmlns:r="http://schemas.openxmlformats.org/officeDocument/2006/relationships" xmlns:p="http://schemas.openxmlformats.org/presentationml/2006/main">
   <p:cSld name="Slide 8">
     <p:bg>
@@ -5807,7 +6420,7 @@
 </p:sld>
 </file>
 
-<file path=ppt/slides/slide11.xml><?xml version="1.0" encoding="utf-8"?>
+<file path=ppt/slides/slide12.xml><?xml version="1.0" encoding="utf-8"?>
 <p:sld xmlns:a="http://schemas.openxmlformats.org/drawingml/2006/main" xmlns:r="http://schemas.openxmlformats.org/officeDocument/2006/relationships" xmlns:p="http://schemas.openxmlformats.org/presentationml/2006/main">
   <p:cSld name="Slide 9">
     <p:bg>
@@ -7899,7 +8512,7 @@
 </p:sld>
 </file>
 
-<file path=ppt/slides/slide12.xml><?xml version="1.0" encoding="utf-8"?>
+<file path=ppt/slides/slide13.xml><?xml version="1.0" encoding="utf-8"?>
 <p:sld xmlns:a="http://schemas.openxmlformats.org/drawingml/2006/main" xmlns:r="http://schemas.openxmlformats.org/officeDocument/2006/relationships" xmlns:p="http://schemas.openxmlformats.org/presentationml/2006/main">
   <p:cSld name="Slide 10">
     <p:bg>
@@ -9215,7 +9828,7 @@
 </p:sld>
 </file>
 
-<file path=ppt/slides/slide13.xml><?xml version="1.0" encoding="utf-8"?>
+<file path=ppt/slides/slide14.xml><?xml version="1.0" encoding="utf-8"?>
 <p:sld xmlns:a="http://schemas.openxmlformats.org/drawingml/2006/main" xmlns:r="http://schemas.openxmlformats.org/officeDocument/2006/relationships" xmlns:p="http://schemas.openxmlformats.org/presentationml/2006/main">
   <p:cSld name="Slide 11">
     <p:bg>
@@ -9448,144 +10061,14 @@
       </p:sp>
       <p:sp>
         <p:nvSpPr>
-          <p:cNvPr id="497" name="Shape 495"/>
-          <p:cNvSpPr/>
-          <p:nvPr/>
-        </p:nvSpPr>
-        <p:spPr>
-          <a:xfrm>
-            <a:off x="7612380" y="1806799"/>
-            <a:ext cx="1565910" cy="1417320"/>
-          </a:xfrm>
-          <a:prstGeom prst="rect">
-            <a:avLst/>
-          </a:prstGeom>
-          <a:solidFill>
-            <a:srgbClr val="FFFFFF">
-              <a:alpha val="0"/>
-            </a:srgbClr>
-          </a:solidFill>
-          <a:ln w="5715">
-            <a:solidFill>
-              <a:srgbClr val="30383D"/>
-            </a:solidFill>
-            <a:prstDash val="solid"/>
-          </a:ln>
-        </p:spPr>
-        <p:txBody>
-          <a:bodyPr/>
-          <a:lstStyle/>
-          <a:p>
-            <a:endParaRPr lang="en-US"/>
-          </a:p>
-        </p:txBody>
-      </p:sp>
-      <p:sp>
-        <p:nvSpPr>
-          <p:cNvPr id="498" name="Shape 496"/>
-          <p:cNvSpPr/>
-          <p:nvPr/>
-        </p:nvSpPr>
-        <p:spPr>
-          <a:xfrm>
-            <a:off x="9418320" y="1806799"/>
-            <a:ext cx="2423160" cy="1234440"/>
-          </a:xfrm>
-          <a:prstGeom prst="rect">
-            <a:avLst/>
-          </a:prstGeom>
-          <a:solidFill>
-            <a:srgbClr val="FFF9EA"/>
-          </a:solidFill>
-          <a:ln w="13970">
-            <a:solidFill>
-              <a:srgbClr val="B65D3A"/>
-            </a:solidFill>
-            <a:prstDash val="solid"/>
-          </a:ln>
-        </p:spPr>
-        <p:txBody>
-          <a:bodyPr/>
-          <a:lstStyle/>
-          <a:p>
-            <a:endParaRPr lang="en-US"/>
-          </a:p>
-        </p:txBody>
-      </p:sp>
-      <p:sp>
-        <p:nvSpPr>
-          <p:cNvPr id="499" name="Text 497"/>
-          <p:cNvSpPr/>
-          <p:nvPr/>
-        </p:nvSpPr>
-        <p:spPr>
-          <a:xfrm>
-            <a:off x="9665208" y="2099407"/>
-            <a:ext cx="1920240" cy="411480"/>
-          </a:xfrm>
-          <a:prstGeom prst="rect">
-            <a:avLst/>
-          </a:prstGeom>
-          <a:noFill/>
-          <a:ln/>
-        </p:spPr>
-        <p:txBody>
-          <a:bodyPr wrap="square" lIns="0" tIns="0" rIns="0" bIns="0" rtlCol="0" anchor="t">
-            <a:normAutofit/>
-          </a:bodyPr>
-          <a:lstStyle/>
-          <a:p>
-            <a:pPr marL="0" indent="0" algn="ctr">
-              <a:lnSpc>
-                <a:spcPct val="90000"/>
-              </a:lnSpc>
-              <a:buNone/>
-            </a:pPr>
-            <a:r>
-              <a:rPr lang="en-US" sz="1450" b="1" dirty="0">
-                <a:solidFill>
-                  <a:srgbClr val="B65D3A"/>
-                </a:solidFill>
-                <a:latin typeface="Aptos" pitchFamily="34" charset="0"/>
-                <a:ea typeface="Aptos" pitchFamily="34" charset="-122"/>
-                <a:cs typeface="Aptos" pitchFamily="34" charset="-120"/>
-              </a:rPr>
-              <a:t>Attention over</a:t>
-            </a:r>
-            <a:endParaRPr lang="en-US" sz="1450" dirty="0"/>
-          </a:p>
-          <a:p>
-            <a:pPr marL="0" indent="0" algn="ctr">
-              <a:lnSpc>
-                <a:spcPct val="90000"/>
-              </a:lnSpc>
-              <a:buNone/>
-            </a:pPr>
-            <a:r>
-              <a:rPr lang="en-US" sz="1450" b="1" dirty="0">
-                <a:solidFill>
-                  <a:srgbClr val="B65D3A"/>
-                </a:solidFill>
-                <a:latin typeface="Aptos" pitchFamily="34" charset="0"/>
-                <a:ea typeface="Aptos" pitchFamily="34" charset="-122"/>
-                <a:cs typeface="Aptos" pitchFamily="34" charset="-120"/>
-              </a:rPr>
-              <a:t>spectrogram patches</a:t>
-            </a:r>
-            <a:endParaRPr lang="en-US" sz="1450" dirty="0"/>
-          </a:p>
-        </p:txBody>
-      </p:sp>
-      <p:sp>
-        <p:nvSpPr>
           <p:cNvPr id="500" name="Shape 498"/>
           <p:cNvSpPr/>
           <p:nvPr/>
         </p:nvSpPr>
         <p:spPr>
           <a:xfrm>
-            <a:off x="7539228" y="4727447"/>
-            <a:ext cx="2148840" cy="914400"/>
+            <a:off x="8239330" y="4084421"/>
+            <a:ext cx="1920012" cy="780682"/>
           </a:xfrm>
           <a:prstGeom prst="rect">
             <a:avLst/>
@@ -9618,8 +10101,8 @@
         </p:nvSpPr>
         <p:spPr>
           <a:xfrm>
-            <a:off x="7630668" y="4864607"/>
-            <a:ext cx="1965960" cy="329184"/>
+            <a:off x="8239330" y="4224527"/>
+            <a:ext cx="1920012" cy="329184"/>
           </a:xfrm>
           <a:prstGeom prst="rect">
             <a:avLst/>
@@ -9662,8 +10145,8 @@
         </p:nvSpPr>
         <p:spPr>
           <a:xfrm>
-            <a:off x="7648956" y="5257799"/>
-            <a:ext cx="1929384" cy="219456"/>
+            <a:off x="8239330" y="4617719"/>
+            <a:ext cx="1920012" cy="219456"/>
           </a:xfrm>
           <a:prstGeom prst="rect">
             <a:avLst/>
@@ -9695,50 +10178,6 @@
               <a:t>final 5-fold accuracy</a:t>
             </a:r>
             <a:endParaRPr lang="en-US" sz="780" dirty="0"/>
-          </a:p>
-        </p:txBody>
-      </p:sp>
-      <p:sp>
-        <p:nvSpPr>
-          <p:cNvPr id="503" name="Text 501"/>
-          <p:cNvSpPr/>
-          <p:nvPr/>
-        </p:nvSpPr>
-        <p:spPr>
-          <a:xfrm>
-            <a:off x="7612380" y="5843015"/>
-            <a:ext cx="3017520" cy="274320"/>
-          </a:xfrm>
-          <a:prstGeom prst="rect">
-            <a:avLst/>
-          </a:prstGeom>
-          <a:noFill/>
-          <a:ln/>
-        </p:spPr>
-        <p:txBody>
-          <a:bodyPr wrap="square" lIns="0" tIns="0" rIns="0" bIns="0" rtlCol="0" anchor="t">
-            <a:normAutofit/>
-          </a:bodyPr>
-          <a:lstStyle/>
-          <a:p>
-            <a:pPr marL="0" indent="0" algn="l">
-              <a:lnSpc>
-                <a:spcPct val="82000"/>
-              </a:lnSpc>
-              <a:buNone/>
-            </a:pPr>
-            <a:r>
-              <a:rPr lang="en-US" sz="850" i="1" dirty="0">
-                <a:solidFill>
-                  <a:srgbClr val="6B7176"/>
-                </a:solidFill>
-                <a:latin typeface="Aptos" pitchFamily="34" charset="0"/>
-                <a:ea typeface="Aptos" pitchFamily="34" charset="-122"/>
-                <a:cs typeface="Aptos" pitchFamily="34" charset="-120"/>
-              </a:rPr>
-              <a:t>Best: 95.65%. Full backbone fine-tuned, LR = 1e-5.</a:t>
-            </a:r>
-            <a:endParaRPr lang="en-US" sz="850" dirty="0"/>
           </a:p>
         </p:txBody>
       </p:sp>
@@ -10271,7 +10710,7 @@
         </p:nvSpPr>
         <p:spPr>
           <a:xfrm>
-            <a:off x="749808" y="2119952"/>
+            <a:off x="749808" y="2597748"/>
             <a:ext cx="4397586" cy="164592"/>
           </a:xfrm>
           <a:prstGeom prst="rect">
@@ -10286,24 +10725,20 @@
           </a:bodyPr>
           <a:lstStyle/>
           <a:p>
-            <a:pPr marL="0" indent="0" algn="l">
+            <a:pPr>
               <a:lnSpc>
                 <a:spcPct val="90000"/>
               </a:lnSpc>
-              <a:buNone/>
             </a:pPr>
             <a:r>
-              <a:rPr lang="en-US" sz="1020" b="1" dirty="0">
-                <a:solidFill>
-                  <a:srgbClr val="6B7176"/>
+              <a:rPr lang="en-US" sz="1000" b="1" dirty="0">
+                <a:solidFill>
+                  <a:srgbClr val="B65D3A"/>
                 </a:solidFill>
                 <a:latin typeface="Aptos" pitchFamily="34" charset="0"/>
-                <a:ea typeface="Aptos" pitchFamily="34" charset="-122"/>
-                <a:cs typeface="Aptos" pitchFamily="34" charset="-120"/>
               </a:rPr>
               <a:t>AST architecture</a:t>
             </a:r>
-            <a:endParaRPr lang="en-US" sz="1020" dirty="0"/>
           </a:p>
         </p:txBody>
       </p:sp>
@@ -10322,13 +10757,13 @@
           <p:nvPr>
             <p:extLst>
               <p:ext uri="{D42A27DB-BD31-4B8C-83A1-F6EECF244321}">
-                <p14:modId xmlns:p14="http://schemas.microsoft.com/office/powerpoint/2010/main" val="3362796216"/>
+                <p14:modId xmlns:p14="http://schemas.microsoft.com/office/powerpoint/2010/main" val="3342296781"/>
               </p:ext>
             </p:extLst>
           </p:nvPr>
         </p:nvGraphicFramePr>
         <p:xfrm>
-          <a:off x="694943" y="2353021"/>
+          <a:off x="694943" y="2830817"/>
           <a:ext cx="4434167" cy="1713738"/>
         </p:xfrm>
         <a:graphic>
@@ -11401,7 +11836,7 @@
         </p:nvSpPr>
         <p:spPr>
           <a:xfrm>
-            <a:off x="731520" y="4425695"/>
+            <a:off x="731520" y="4903491"/>
             <a:ext cx="1645920" cy="182880"/>
           </a:xfrm>
           <a:prstGeom prst="rect">
@@ -11447,8 +11882,8 @@
         </p:nvSpPr>
         <p:spPr>
           <a:xfrm>
-            <a:off x="731519" y="4727447"/>
-            <a:ext cx="5808559" cy="420624"/>
+            <a:off x="731519" y="5205243"/>
+            <a:ext cx="4397587" cy="637772"/>
           </a:xfrm>
           <a:prstGeom prst="rect">
             <a:avLst/>
@@ -11462,24 +11897,15 @@
           </a:bodyPr>
           <a:lstStyle/>
           <a:p>
-            <a:pPr marL="0" indent="0" algn="l">
+            <a:pPr>
               <a:lnSpc>
                 <a:spcPct val="90000"/>
               </a:lnSpc>
-              <a:buNone/>
             </a:pPr>
             <a:r>
-              <a:rPr lang="en-US" sz="1200" dirty="0">
-                <a:solidFill>
-                  <a:srgbClr val="1F2528"/>
-                </a:solidFill>
-                <a:latin typeface="Aptos" pitchFamily="34" charset="0"/>
-                <a:ea typeface="Aptos" pitchFamily="34" charset="-122"/>
-                <a:cs typeface="Aptos" pitchFamily="34" charset="-120"/>
-              </a:rPr>
-              <a:t>AST keeps a spectrogram-like representation but replaces the from-scratch CNN with a pretrained transformer backbone.</a:t>
-            </a:r>
-            <a:endParaRPr lang="en-US" sz="1200" dirty="0"/>
+              <a:rPr lang="en-US" sz="1200" dirty="0"/>
+              <a:t>AST keeps the spectrogram representation, but replaces a small CNN trained from scratch with a pretrained transformer backbone.</a:t>
+            </a:r>
           </a:p>
         </p:txBody>
       </p:sp>
@@ -11497,8 +11923,8 @@
         </p:nvSpPr>
         <p:spPr>
           <a:xfrm>
-            <a:off x="731519" y="1591056"/>
-            <a:ext cx="5151121" cy="411480"/>
+            <a:off x="731520" y="1591055"/>
+            <a:ext cx="4397586" cy="647753"/>
           </a:xfrm>
           <a:prstGeom prst="rect">
             <a:avLst/>
@@ -11519,7 +11945,7 @@
               <a:buNone/>
             </a:pPr>
             <a:r>
-              <a:rPr lang="en-US" sz="1850" b="1" dirty="0">
+              <a:rPr lang="en-US" sz="1200" dirty="0">
                 <a:solidFill>
                   <a:srgbClr val="1F2528"/>
                 </a:solidFill>
@@ -11527,12 +11953,246 @@
                 <a:ea typeface="Aptos Display" pitchFamily="34" charset="-122"/>
                 <a:cs typeface="Aptos Display" pitchFamily="34" charset="-120"/>
               </a:rPr>
-              <a:t>Highlight differences here…</a:t>
-            </a:r>
-            <a:endParaRPr lang="en-US" sz="1850" dirty="0"/>
-          </a:p>
-        </p:txBody>
-      </p:sp>
+              <a:t>AST processes the full 5-second audio clip using a pretrained transformer backbone with self-attention, allowing direct clip-level prediction with much stronger pretrained audio representations.</a:t>
+            </a:r>
+            <a:endParaRPr lang="en-US" sz="1200" dirty="0"/>
+          </a:p>
+        </p:txBody>
+      </p:sp>
+      <p:pic>
+        <p:nvPicPr>
+          <p:cNvPr id="7" name="Picture 6">
+            <a:extLst>
+              <a:ext uri="{FF2B5EF4-FFF2-40B4-BE49-F238E27FC236}">
+                <a16:creationId xmlns:a16="http://schemas.microsoft.com/office/drawing/2014/main" id="{04488684-34BF-618D-0EA5-FE583F03C00D}"/>
+              </a:ext>
+            </a:extLst>
+          </p:cNvPr>
+          <p:cNvPicPr>
+            <a:picLocks noChangeAspect="1"/>
+          </p:cNvPicPr>
+          <p:nvPr/>
+        </p:nvPicPr>
+        <p:blipFill>
+          <a:blip r:embed="rId4"/>
+          <a:stretch>
+            <a:fillRect/>
+          </a:stretch>
+        </p:blipFill>
+        <p:spPr>
+          <a:xfrm>
+            <a:off x="5582544" y="1907591"/>
+            <a:ext cx="3220254" cy="1991258"/>
+          </a:xfrm>
+          <a:prstGeom prst="rect">
+            <a:avLst/>
+          </a:prstGeom>
+        </p:spPr>
+      </p:pic>
+      <p:pic>
+        <p:nvPicPr>
+          <p:cNvPr id="8" name="Picture 7">
+            <a:extLst>
+              <a:ext uri="{FF2B5EF4-FFF2-40B4-BE49-F238E27FC236}">
+                <a16:creationId xmlns:a16="http://schemas.microsoft.com/office/drawing/2014/main" id="{E32C9350-3537-C4E1-DE57-FA4AB23EEDB5}"/>
+              </a:ext>
+            </a:extLst>
+          </p:cNvPr>
+          <p:cNvPicPr>
+            <a:picLocks noChangeAspect="1"/>
+          </p:cNvPicPr>
+          <p:nvPr/>
+        </p:nvPicPr>
+        <p:blipFill>
+          <a:blip r:embed="rId5"/>
+          <a:stretch>
+            <a:fillRect/>
+          </a:stretch>
+        </p:blipFill>
+        <p:spPr>
+          <a:xfrm>
+            <a:off x="8802798" y="1908398"/>
+            <a:ext cx="3218948" cy="1990451"/>
+          </a:xfrm>
+          <a:prstGeom prst="rect">
+            <a:avLst/>
+          </a:prstGeom>
+        </p:spPr>
+      </p:pic>
+      <p:grpSp>
+        <p:nvGrpSpPr>
+          <p:cNvPr id="21" name="Group 20">
+            <a:extLst>
+              <a:ext uri="{FF2B5EF4-FFF2-40B4-BE49-F238E27FC236}">
+                <a16:creationId xmlns:a16="http://schemas.microsoft.com/office/drawing/2014/main" id="{D8791D9C-EA0A-EC0A-21F1-2FF2C25F347B}"/>
+              </a:ext>
+            </a:extLst>
+          </p:cNvPr>
+          <p:cNvGrpSpPr/>
+          <p:nvPr/>
+        </p:nvGrpSpPr>
+        <p:grpSpPr>
+          <a:xfrm>
+            <a:off x="6076188" y="4092809"/>
+            <a:ext cx="2011680" cy="772294"/>
+            <a:chOff x="6957490" y="4123666"/>
+            <a:chExt cx="2011680" cy="772294"/>
+          </a:xfrm>
+        </p:grpSpPr>
+        <p:sp>
+          <p:nvSpPr>
+            <p:cNvPr id="18" name="Shape 48">
+              <a:extLst>
+                <a:ext uri="{FF2B5EF4-FFF2-40B4-BE49-F238E27FC236}">
+                  <a16:creationId xmlns:a16="http://schemas.microsoft.com/office/drawing/2014/main" id="{52425C61-0F1F-5E0F-C655-28830D97E7C6}"/>
+                </a:ext>
+              </a:extLst>
+            </p:cNvPr>
+            <p:cNvSpPr/>
+            <p:nvPr/>
+          </p:nvSpPr>
+          <p:spPr>
+            <a:xfrm>
+              <a:off x="6957490" y="4123666"/>
+              <a:ext cx="2011680" cy="772294"/>
+            </a:xfrm>
+            <a:prstGeom prst="rect">
+              <a:avLst/>
+            </a:prstGeom>
+            <a:solidFill>
+              <a:srgbClr val="FFFFFF">
+                <a:alpha val="98000"/>
+              </a:srgbClr>
+            </a:solidFill>
+            <a:ln w="17780">
+              <a:solidFill>
+                <a:schemeClr val="tx1">
+                  <a:lumMod val="75000"/>
+                  <a:lumOff val="25000"/>
+                </a:schemeClr>
+              </a:solidFill>
+              <a:prstDash val="solid"/>
+            </a:ln>
+          </p:spPr>
+          <p:txBody>
+            <a:bodyPr/>
+            <a:lstStyle/>
+            <a:p>
+              <a:endParaRPr lang="en-US"/>
+            </a:p>
+          </p:txBody>
+        </p:sp>
+        <p:sp>
+          <p:nvSpPr>
+            <p:cNvPr id="19" name="Text 49">
+              <a:extLst>
+                <a:ext uri="{FF2B5EF4-FFF2-40B4-BE49-F238E27FC236}">
+                  <a16:creationId xmlns:a16="http://schemas.microsoft.com/office/drawing/2014/main" id="{27AF852C-092D-AA38-20D6-C5AEFF9967BB}"/>
+                </a:ext>
+              </a:extLst>
+            </p:cNvPr>
+            <p:cNvSpPr/>
+            <p:nvPr/>
+          </p:nvSpPr>
+          <p:spPr>
+            <a:xfrm>
+              <a:off x="7048930" y="4260826"/>
+              <a:ext cx="1828800" cy="329184"/>
+            </a:xfrm>
+            <a:prstGeom prst="rect">
+              <a:avLst/>
+            </a:prstGeom>
+            <a:noFill/>
+            <a:ln/>
+          </p:spPr>
+          <p:txBody>
+            <a:bodyPr wrap="square" lIns="0" tIns="0" rIns="0" bIns="0" rtlCol="0" anchor="t">
+              <a:normAutofit/>
+            </a:bodyPr>
+            <a:lstStyle/>
+            <a:p>
+              <a:pPr marL="0" indent="0" algn="ctr">
+                <a:lnSpc>
+                  <a:spcPct val="90000"/>
+                </a:lnSpc>
+                <a:buNone/>
+              </a:pPr>
+              <a:r>
+                <a:rPr lang="en-US" sz="2100" b="1" dirty="0">
+                  <a:solidFill>
+                    <a:schemeClr val="tx1">
+                      <a:lumMod val="75000"/>
+                      <a:lumOff val="25000"/>
+                    </a:schemeClr>
+                  </a:solidFill>
+                  <a:latin typeface="Aptos Display" pitchFamily="34" charset="0"/>
+                  <a:ea typeface="Aptos Display" pitchFamily="34" charset="-122"/>
+                  <a:cs typeface="Aptos Display" pitchFamily="34" charset="-120"/>
+                </a:rPr>
+                <a:t>64.5%</a:t>
+              </a:r>
+              <a:endParaRPr lang="en-US" sz="2100" dirty="0">
+                <a:solidFill>
+                  <a:schemeClr val="tx1">
+                    <a:lumMod val="75000"/>
+                    <a:lumOff val="25000"/>
+                  </a:schemeClr>
+                </a:solidFill>
+              </a:endParaRPr>
+            </a:p>
+          </p:txBody>
+        </p:sp>
+        <p:sp>
+          <p:nvSpPr>
+            <p:cNvPr id="20" name="Text 50">
+              <a:extLst>
+                <a:ext uri="{FF2B5EF4-FFF2-40B4-BE49-F238E27FC236}">
+                  <a16:creationId xmlns:a16="http://schemas.microsoft.com/office/drawing/2014/main" id="{A3E732F8-949B-008B-4FBE-CCD8D374B8A3}"/>
+                </a:ext>
+              </a:extLst>
+            </p:cNvPr>
+            <p:cNvSpPr/>
+            <p:nvPr/>
+          </p:nvSpPr>
+          <p:spPr>
+            <a:xfrm>
+              <a:off x="7067218" y="4654018"/>
+              <a:ext cx="1792224" cy="219456"/>
+            </a:xfrm>
+            <a:prstGeom prst="rect">
+              <a:avLst/>
+            </a:prstGeom>
+            <a:noFill/>
+            <a:ln/>
+          </p:spPr>
+          <p:txBody>
+            <a:bodyPr wrap="square" lIns="0" tIns="0" rIns="0" bIns="0" rtlCol="0" anchor="t">
+              <a:normAutofit/>
+            </a:bodyPr>
+            <a:lstStyle/>
+            <a:p>
+              <a:pPr marL="0" indent="0" algn="ctr">
+                <a:lnSpc>
+                  <a:spcPct val="90000"/>
+                </a:lnSpc>
+                <a:buNone/>
+              </a:pPr>
+              <a:r>
+                <a:rPr lang="en-US" sz="780" dirty="0">
+                  <a:solidFill>
+                    <a:srgbClr val="6B7176"/>
+                  </a:solidFill>
+                  <a:latin typeface="Aptos" pitchFamily="34" charset="0"/>
+                  <a:ea typeface="Aptos" pitchFamily="34" charset="-122"/>
+                  <a:cs typeface="Aptos" pitchFamily="34" charset="-120"/>
+                </a:rPr>
+                <a:t>Piczak published LP clip-level reference</a:t>
+              </a:r>
+              <a:endParaRPr lang="en-US" sz="780" dirty="0"/>
+            </a:p>
+          </p:txBody>
+        </p:sp>
+      </p:grpSp>
     </p:spTree>
   </p:cSld>
   <p:clrMapOvr>
@@ -11541,7 +12201,7 @@
 </p:sld>
 </file>
 
-<file path=ppt/slides/slide14.xml><?xml version="1.0" encoding="utf-8"?>
+<file path=ppt/slides/slide15.xml><?xml version="1.0" encoding="utf-8"?>
 <p:sld xmlns:a="http://schemas.openxmlformats.org/drawingml/2006/main" xmlns:r="http://schemas.openxmlformats.org/officeDocument/2006/relationships" xmlns:p="http://schemas.openxmlformats.org/presentationml/2006/main">
   <p:cSld name="Slide 12">
     <p:bg>
@@ -11730,134 +12390,14 @@
       </p:sp>
       <p:sp>
         <p:nvSpPr>
-          <p:cNvPr id="29" name="Shape 27"/>
-          <p:cNvSpPr/>
-          <p:nvPr/>
-        </p:nvSpPr>
-        <p:spPr>
-          <a:xfrm>
-            <a:off x="6867144" y="1726381"/>
-            <a:ext cx="4983480" cy="1417320"/>
-          </a:xfrm>
-          <a:prstGeom prst="rect">
-            <a:avLst/>
-          </a:prstGeom>
-          <a:solidFill>
-            <a:srgbClr val="FFF9EA"/>
-          </a:solidFill>
-          <a:ln w="13970">
-            <a:solidFill>
-              <a:srgbClr val="B65D3A"/>
-            </a:solidFill>
-            <a:prstDash val="solid"/>
-          </a:ln>
-        </p:spPr>
-        <p:txBody>
-          <a:bodyPr/>
-          <a:lstStyle/>
-          <a:p>
-            <a:endParaRPr lang="en-US"/>
-          </a:p>
-        </p:txBody>
-      </p:sp>
-      <p:sp>
-        <p:nvSpPr>
-          <p:cNvPr id="30" name="Text 28"/>
-          <p:cNvSpPr/>
-          <p:nvPr/>
-        </p:nvSpPr>
-        <p:spPr>
-          <a:xfrm>
-            <a:off x="7095744" y="2018989"/>
-            <a:ext cx="4480560" cy="228600"/>
-          </a:xfrm>
-          <a:prstGeom prst="rect">
-            <a:avLst/>
-          </a:prstGeom>
-          <a:noFill/>
-          <a:ln/>
-        </p:spPr>
-        <p:txBody>
-          <a:bodyPr wrap="square" lIns="0" tIns="0" rIns="0" bIns="0" rtlCol="0" anchor="t">
-            <a:normAutofit/>
-          </a:bodyPr>
-          <a:lstStyle/>
-          <a:p>
-            <a:pPr marL="0" indent="0" algn="ctr">
-              <a:lnSpc>
-                <a:spcPct val="90000"/>
-              </a:lnSpc>
-              <a:buNone/>
-            </a:pPr>
-            <a:r>
-              <a:rPr lang="en-US" sz="1650" b="1" dirty="0">
-                <a:solidFill>
-                  <a:srgbClr val="B65D3A"/>
-                </a:solidFill>
-                <a:latin typeface="Aptos" pitchFamily="34" charset="0"/>
-                <a:ea typeface="Aptos" pitchFamily="34" charset="-122"/>
-                <a:cs typeface="Aptos" pitchFamily="34" charset="-120"/>
-              </a:rPr>
-              <a:t>Foundation-style audio representation</a:t>
-            </a:r>
-            <a:endParaRPr lang="en-US" sz="1650" dirty="0"/>
-          </a:p>
-        </p:txBody>
-      </p:sp>
-      <p:sp>
-        <p:nvSpPr>
-          <p:cNvPr id="31" name="Text 29"/>
-          <p:cNvSpPr/>
-          <p:nvPr/>
-        </p:nvSpPr>
-        <p:spPr>
-          <a:xfrm>
-            <a:off x="7187184" y="2439613"/>
-            <a:ext cx="4251960" cy="347472"/>
-          </a:xfrm>
-          <a:prstGeom prst="rect">
-            <a:avLst/>
-          </a:prstGeom>
-          <a:noFill/>
-          <a:ln/>
-        </p:spPr>
-        <p:txBody>
-          <a:bodyPr wrap="square" lIns="0" tIns="0" rIns="0" bIns="0" rtlCol="0" anchor="t">
-            <a:normAutofit/>
-          </a:bodyPr>
-          <a:lstStyle/>
-          <a:p>
-            <a:pPr marL="0" indent="0" algn="ctr">
-              <a:lnSpc>
-                <a:spcPct val="90000"/>
-              </a:lnSpc>
-              <a:buNone/>
-            </a:pPr>
-            <a:r>
-              <a:rPr lang="en-US" sz="1020" dirty="0">
-                <a:solidFill>
-                  <a:srgbClr val="1F2528"/>
-                </a:solidFill>
-                <a:latin typeface="Aptos" pitchFamily="34" charset="0"/>
-                <a:ea typeface="Aptos" pitchFamily="34" charset="-122"/>
-                <a:cs typeface="Aptos" pitchFamily="34" charset="-120"/>
-              </a:rPr>
-              <a:t>The model adapts a large pretrained audio encoder rather than learning the representation from ESC-50 alone.</a:t>
-            </a:r>
-            <a:endParaRPr lang="en-US" sz="1020" dirty="0"/>
-          </a:p>
-        </p:txBody>
-      </p:sp>
-      <p:sp>
-        <p:nvSpPr>
           <p:cNvPr id="32" name="Shape 30"/>
           <p:cNvSpPr/>
           <p:nvPr/>
         </p:nvSpPr>
         <p:spPr>
           <a:xfrm>
-            <a:off x="7616467" y="4628860"/>
-            <a:ext cx="2148840" cy="914400"/>
+            <a:off x="9078898" y="4125942"/>
+            <a:ext cx="2011680" cy="770018"/>
           </a:xfrm>
           <a:prstGeom prst="rect">
             <a:avLst/>
@@ -11890,8 +12430,8 @@
         </p:nvSpPr>
         <p:spPr>
           <a:xfrm>
-            <a:off x="7707907" y="4766020"/>
-            <a:ext cx="1965960" cy="329184"/>
+            <a:off x="9078898" y="4263102"/>
+            <a:ext cx="2011680" cy="329184"/>
           </a:xfrm>
           <a:prstGeom prst="rect">
             <a:avLst/>
@@ -11934,8 +12474,8 @@
         </p:nvSpPr>
         <p:spPr>
           <a:xfrm>
-            <a:off x="7726195" y="5159212"/>
-            <a:ext cx="1929384" cy="219456"/>
+            <a:off x="9078898" y="4656294"/>
+            <a:ext cx="2011680" cy="219456"/>
           </a:xfrm>
           <a:prstGeom prst="rect">
             <a:avLst/>
@@ -11967,50 +12507,6 @@
               <a:t>final 5-fold accuracy</a:t>
             </a:r>
             <a:endParaRPr lang="en-US" sz="780" dirty="0"/>
-          </a:p>
-        </p:txBody>
-      </p:sp>
-      <p:sp>
-        <p:nvSpPr>
-          <p:cNvPr id="35" name="Text 33"/>
-          <p:cNvSpPr/>
-          <p:nvPr/>
-        </p:nvSpPr>
-        <p:spPr>
-          <a:xfrm>
-            <a:off x="7689619" y="5744428"/>
-            <a:ext cx="3154680" cy="274320"/>
-          </a:xfrm>
-          <a:prstGeom prst="rect">
-            <a:avLst/>
-          </a:prstGeom>
-          <a:noFill/>
-          <a:ln/>
-        </p:spPr>
-        <p:txBody>
-          <a:bodyPr wrap="square" lIns="0" tIns="0" rIns="0" bIns="0" rtlCol="0" anchor="t">
-            <a:normAutofit/>
-          </a:bodyPr>
-          <a:lstStyle/>
-          <a:p>
-            <a:pPr marL="0" indent="0" algn="l">
-              <a:lnSpc>
-                <a:spcPct val="82000"/>
-              </a:lnSpc>
-              <a:buNone/>
-            </a:pPr>
-            <a:r>
-              <a:rPr lang="en-US" sz="850" i="1" dirty="0">
-                <a:solidFill>
-                  <a:srgbClr val="6B7176"/>
-                </a:solidFill>
-                <a:latin typeface="Aptos" pitchFamily="34" charset="0"/>
-                <a:ea typeface="Aptos" pitchFamily="34" charset="-122"/>
-                <a:cs typeface="Aptos" pitchFamily="34" charset="-120"/>
-              </a:rPr>
-              <a:t>Best: 95.55%. Mean training time in current summary: 152.37 sec.</a:t>
-            </a:r>
-            <a:endParaRPr lang="en-US" sz="850" dirty="0"/>
           </a:p>
         </p:txBody>
       </p:sp>
@@ -12544,13 +13040,13 @@
           <p:nvPr>
             <p:extLst>
               <p:ext uri="{D42A27DB-BD31-4B8C-83A1-F6EECF244321}">
-                <p14:modId xmlns:p14="http://schemas.microsoft.com/office/powerpoint/2010/main" val="425106533"/>
+                <p14:modId xmlns:p14="http://schemas.microsoft.com/office/powerpoint/2010/main" val="3810333205"/>
               </p:ext>
             </p:extLst>
           </p:nvPr>
         </p:nvGraphicFramePr>
         <p:xfrm>
-          <a:off x="694943" y="2359150"/>
+          <a:off x="694943" y="2836948"/>
           <a:ext cx="4434166" cy="1872996"/>
         </p:xfrm>
         <a:graphic>
@@ -13752,7 +14248,7 @@
         </p:nvSpPr>
         <p:spPr>
           <a:xfrm>
-            <a:off x="743207" y="2108867"/>
+            <a:off x="743207" y="2586665"/>
             <a:ext cx="5623560" cy="164592"/>
           </a:xfrm>
           <a:prstGeom prst="rect">
@@ -13767,24 +14263,20 @@
           </a:bodyPr>
           <a:lstStyle/>
           <a:p>
-            <a:pPr marL="0" indent="0" algn="l">
+            <a:pPr>
               <a:lnSpc>
                 <a:spcPct val="90000"/>
               </a:lnSpc>
-              <a:buNone/>
             </a:pPr>
             <a:r>
-              <a:rPr lang="en-US" sz="1020" b="1" dirty="0">
-                <a:solidFill>
-                  <a:srgbClr val="6B7176"/>
+              <a:rPr lang="en-US" sz="1000" b="1" dirty="0">
+                <a:solidFill>
+                  <a:srgbClr val="B65D3A"/>
                 </a:solidFill>
                 <a:latin typeface="Aptos" pitchFamily="34" charset="0"/>
-                <a:ea typeface="Aptos" pitchFamily="34" charset="-122"/>
-                <a:cs typeface="Aptos" pitchFamily="34" charset="-120"/>
               </a:rPr>
               <a:t>BEATs architecture</a:t>
             </a:r>
-            <a:endParaRPr lang="en-US" sz="1020" dirty="0"/>
           </a:p>
         </p:txBody>
       </p:sp>
@@ -13853,7 +14345,7 @@
         <p:spPr>
           <a:xfrm>
             <a:off x="731519" y="1591056"/>
-            <a:ext cx="5151121" cy="411480"/>
+            <a:ext cx="4598363" cy="411480"/>
           </a:xfrm>
           <a:prstGeom prst="rect">
             <a:avLst/>
@@ -13863,7 +14355,7 @@
         </p:spPr>
         <p:txBody>
           <a:bodyPr wrap="square" lIns="0" tIns="0" rIns="0" bIns="0" rtlCol="0" anchor="t">
-            <a:normAutofit/>
+            <a:noAutofit/>
           </a:bodyPr>
           <a:lstStyle/>
           <a:p>
@@ -13874,7 +14366,7 @@
               <a:buNone/>
             </a:pPr>
             <a:r>
-              <a:rPr lang="en-US" sz="1850" b="1" dirty="0">
+              <a:rPr lang="en-US" sz="1200" dirty="0">
                 <a:solidFill>
                   <a:srgbClr val="1F2528"/>
                 </a:solidFill>
@@ -13882,9 +14374,9 @@
                 <a:ea typeface="Aptos Display" pitchFamily="34" charset="-122"/>
                 <a:cs typeface="Aptos Display" pitchFamily="34" charset="-120"/>
               </a:rPr>
-              <a:t>Highlight differences here…</a:t>
-            </a:r>
-            <a:endParaRPr lang="en-US" sz="1850" dirty="0"/>
+              <a:t>BEATs uses a large pretrained foundation audio encoder learned from massive external datasets and further shows that the real gain is pretrained audio representation learning.</a:t>
+            </a:r>
+            <a:endParaRPr lang="en-US" sz="1200" dirty="0"/>
           </a:p>
         </p:txBody>
       </p:sp>
@@ -13902,7 +14394,7 @@
         </p:nvSpPr>
         <p:spPr>
           <a:xfrm>
-            <a:off x="731520" y="4425695"/>
+            <a:off x="731520" y="4903493"/>
             <a:ext cx="1645920" cy="182880"/>
           </a:xfrm>
           <a:prstGeom prst="rect">
@@ -13948,8 +14440,8 @@
         </p:nvSpPr>
         <p:spPr>
           <a:xfrm>
-            <a:off x="731519" y="4727447"/>
-            <a:ext cx="5808559" cy="420624"/>
+            <a:off x="731520" y="5205245"/>
+            <a:ext cx="4598362" cy="750712"/>
           </a:xfrm>
           <a:prstGeom prst="rect">
             <a:avLst/>
@@ -13959,7 +14451,7 @@
         </p:spPr>
         <p:txBody>
           <a:bodyPr wrap="square" lIns="0" tIns="0" rIns="0" bIns="0" rtlCol="0" anchor="t">
-            <a:normAutofit/>
+            <a:noAutofit/>
           </a:bodyPr>
           <a:lstStyle/>
           <a:p>
@@ -13978,12 +14470,246 @@
                 <a:ea typeface="Aptos" pitchFamily="34" charset="-122"/>
                 <a:cs typeface="Aptos" pitchFamily="34" charset="-120"/>
               </a:rPr>
-              <a:t>BEATs confirms that the modern leap is representation learning at scale, not only the presence of attention.</a:t>
+              <a:t>BEATs confirms that modern performance gains come primarily from pretrained representations, not only from attention or architecture choice.</a:t>
             </a:r>
             <a:endParaRPr lang="en-US" sz="1200" dirty="0"/>
           </a:p>
         </p:txBody>
       </p:sp>
+      <p:grpSp>
+        <p:nvGrpSpPr>
+          <p:cNvPr id="5" name="Group 4">
+            <a:extLst>
+              <a:ext uri="{FF2B5EF4-FFF2-40B4-BE49-F238E27FC236}">
+                <a16:creationId xmlns:a16="http://schemas.microsoft.com/office/drawing/2014/main" id="{BE88CA5D-B2F9-1E52-6AC1-F2B64A98F10B}"/>
+              </a:ext>
+            </a:extLst>
+          </p:cNvPr>
+          <p:cNvGrpSpPr/>
+          <p:nvPr/>
+        </p:nvGrpSpPr>
+        <p:grpSpPr>
+          <a:xfrm>
+            <a:off x="6957490" y="4123666"/>
+            <a:ext cx="2011680" cy="772294"/>
+            <a:chOff x="6957490" y="4123666"/>
+            <a:chExt cx="2011680" cy="772294"/>
+          </a:xfrm>
+        </p:grpSpPr>
+        <p:sp>
+          <p:nvSpPr>
+            <p:cNvPr id="6" name="Shape 48">
+              <a:extLst>
+                <a:ext uri="{FF2B5EF4-FFF2-40B4-BE49-F238E27FC236}">
+                  <a16:creationId xmlns:a16="http://schemas.microsoft.com/office/drawing/2014/main" id="{7C39D036-9001-3BE9-8E12-1F1E84C39011}"/>
+                </a:ext>
+              </a:extLst>
+            </p:cNvPr>
+            <p:cNvSpPr/>
+            <p:nvPr/>
+          </p:nvSpPr>
+          <p:spPr>
+            <a:xfrm>
+              <a:off x="6957490" y="4123666"/>
+              <a:ext cx="2011680" cy="772294"/>
+            </a:xfrm>
+            <a:prstGeom prst="rect">
+              <a:avLst/>
+            </a:prstGeom>
+            <a:solidFill>
+              <a:srgbClr val="FFFFFF">
+                <a:alpha val="98000"/>
+              </a:srgbClr>
+            </a:solidFill>
+            <a:ln w="17780">
+              <a:solidFill>
+                <a:schemeClr val="tx1">
+                  <a:lumMod val="75000"/>
+                  <a:lumOff val="25000"/>
+                </a:schemeClr>
+              </a:solidFill>
+              <a:prstDash val="solid"/>
+            </a:ln>
+          </p:spPr>
+          <p:txBody>
+            <a:bodyPr/>
+            <a:lstStyle/>
+            <a:p>
+              <a:endParaRPr lang="en-US"/>
+            </a:p>
+          </p:txBody>
+        </p:sp>
+        <p:sp>
+          <p:nvSpPr>
+            <p:cNvPr id="7" name="Text 49">
+              <a:extLst>
+                <a:ext uri="{FF2B5EF4-FFF2-40B4-BE49-F238E27FC236}">
+                  <a16:creationId xmlns:a16="http://schemas.microsoft.com/office/drawing/2014/main" id="{EB63FAAC-CA55-8265-32E9-E0A1E7CBFF12}"/>
+                </a:ext>
+              </a:extLst>
+            </p:cNvPr>
+            <p:cNvSpPr/>
+            <p:nvPr/>
+          </p:nvSpPr>
+          <p:spPr>
+            <a:xfrm>
+              <a:off x="7048930" y="4260826"/>
+              <a:ext cx="1828800" cy="329184"/>
+            </a:xfrm>
+            <a:prstGeom prst="rect">
+              <a:avLst/>
+            </a:prstGeom>
+            <a:noFill/>
+            <a:ln/>
+          </p:spPr>
+          <p:txBody>
+            <a:bodyPr wrap="square" lIns="0" tIns="0" rIns="0" bIns="0" rtlCol="0" anchor="t">
+              <a:normAutofit/>
+            </a:bodyPr>
+            <a:lstStyle/>
+            <a:p>
+              <a:pPr marL="0" indent="0" algn="ctr">
+                <a:lnSpc>
+                  <a:spcPct val="90000"/>
+                </a:lnSpc>
+                <a:buNone/>
+              </a:pPr>
+              <a:r>
+                <a:rPr lang="en-US" sz="2100" b="1" dirty="0">
+                  <a:solidFill>
+                    <a:schemeClr val="tx1">
+                      <a:lumMod val="75000"/>
+                      <a:lumOff val="25000"/>
+                    </a:schemeClr>
+                  </a:solidFill>
+                  <a:latin typeface="Aptos Display" pitchFamily="34" charset="0"/>
+                  <a:ea typeface="Aptos Display" pitchFamily="34" charset="-122"/>
+                  <a:cs typeface="Aptos Display" pitchFamily="34" charset="-120"/>
+                </a:rPr>
+                <a:t>64.5%</a:t>
+              </a:r>
+              <a:endParaRPr lang="en-US" sz="2100" dirty="0">
+                <a:solidFill>
+                  <a:schemeClr val="tx1">
+                    <a:lumMod val="75000"/>
+                    <a:lumOff val="25000"/>
+                  </a:schemeClr>
+                </a:solidFill>
+              </a:endParaRPr>
+            </a:p>
+          </p:txBody>
+        </p:sp>
+        <p:sp>
+          <p:nvSpPr>
+            <p:cNvPr id="8" name="Text 50">
+              <a:extLst>
+                <a:ext uri="{FF2B5EF4-FFF2-40B4-BE49-F238E27FC236}">
+                  <a16:creationId xmlns:a16="http://schemas.microsoft.com/office/drawing/2014/main" id="{6E135FD5-F32A-7220-4260-D615BBDE8940}"/>
+                </a:ext>
+              </a:extLst>
+            </p:cNvPr>
+            <p:cNvSpPr/>
+            <p:nvPr/>
+          </p:nvSpPr>
+          <p:spPr>
+            <a:xfrm>
+              <a:off x="7067218" y="4654018"/>
+              <a:ext cx="1792224" cy="219456"/>
+            </a:xfrm>
+            <a:prstGeom prst="rect">
+              <a:avLst/>
+            </a:prstGeom>
+            <a:noFill/>
+            <a:ln/>
+          </p:spPr>
+          <p:txBody>
+            <a:bodyPr wrap="square" lIns="0" tIns="0" rIns="0" bIns="0" rtlCol="0" anchor="t">
+              <a:normAutofit/>
+            </a:bodyPr>
+            <a:lstStyle/>
+            <a:p>
+              <a:pPr marL="0" indent="0" algn="ctr">
+                <a:lnSpc>
+                  <a:spcPct val="90000"/>
+                </a:lnSpc>
+                <a:buNone/>
+              </a:pPr>
+              <a:r>
+                <a:rPr lang="en-US" sz="780" dirty="0">
+                  <a:solidFill>
+                    <a:srgbClr val="6B7176"/>
+                  </a:solidFill>
+                  <a:latin typeface="Aptos" pitchFamily="34" charset="0"/>
+                  <a:ea typeface="Aptos" pitchFamily="34" charset="-122"/>
+                  <a:cs typeface="Aptos" pitchFamily="34" charset="-120"/>
+                </a:rPr>
+                <a:t>Piczak published LP clip-level reference</a:t>
+              </a:r>
+              <a:endParaRPr lang="en-US" sz="780" dirty="0"/>
+            </a:p>
+          </p:txBody>
+        </p:sp>
+      </p:grpSp>
+      <p:pic>
+        <p:nvPicPr>
+          <p:cNvPr id="9" name="Picture 8">
+            <a:extLst>
+              <a:ext uri="{FF2B5EF4-FFF2-40B4-BE49-F238E27FC236}">
+                <a16:creationId xmlns:a16="http://schemas.microsoft.com/office/drawing/2014/main" id="{ED6FB033-FAE8-90C0-9FC0-83AC1D7A59C7}"/>
+              </a:ext>
+            </a:extLst>
+          </p:cNvPr>
+          <p:cNvPicPr>
+            <a:picLocks noChangeAspect="1"/>
+          </p:cNvPicPr>
+          <p:nvPr/>
+        </p:nvPicPr>
+        <p:blipFill>
+          <a:blip r:embed="rId4"/>
+          <a:stretch>
+            <a:fillRect/>
+          </a:stretch>
+        </p:blipFill>
+        <p:spPr>
+          <a:xfrm>
+            <a:off x="5859811" y="2022666"/>
+            <a:ext cx="3109359" cy="1922686"/>
+          </a:xfrm>
+          <a:prstGeom prst="rect">
+            <a:avLst/>
+          </a:prstGeom>
+        </p:spPr>
+      </p:pic>
+      <p:pic>
+        <p:nvPicPr>
+          <p:cNvPr id="10" name="Picture 9">
+            <a:extLst>
+              <a:ext uri="{FF2B5EF4-FFF2-40B4-BE49-F238E27FC236}">
+                <a16:creationId xmlns:a16="http://schemas.microsoft.com/office/drawing/2014/main" id="{F77EEF88-F60B-56A1-4677-329A753740B8}"/>
+              </a:ext>
+            </a:extLst>
+          </p:cNvPr>
+          <p:cNvPicPr>
+            <a:picLocks noChangeAspect="1"/>
+          </p:cNvPicPr>
+          <p:nvPr/>
+        </p:nvPicPr>
+        <p:blipFill>
+          <a:blip r:embed="rId5"/>
+          <a:stretch>
+            <a:fillRect/>
+          </a:stretch>
+        </p:blipFill>
+        <p:spPr>
+          <a:xfrm>
+            <a:off x="8969170" y="2033018"/>
+            <a:ext cx="3109359" cy="1922686"/>
+          </a:xfrm>
+          <a:prstGeom prst="rect">
+            <a:avLst/>
+          </a:prstGeom>
+        </p:spPr>
+      </p:pic>
     </p:spTree>
   </p:cSld>
   <p:clrMapOvr>
@@ -13992,7 +14718,7 @@
 </p:sld>
 </file>
 
-<file path=ppt/slides/slide15.xml><?xml version="1.0" encoding="utf-8"?>
+<file path=ppt/slides/slide16.xml><?xml version="1.0" encoding="utf-8"?>
 <p:sld xmlns:a="http://schemas.openxmlformats.org/drawingml/2006/main" xmlns:r="http://schemas.openxmlformats.org/officeDocument/2006/relationships" xmlns:p="http://schemas.openxmlformats.org/presentationml/2006/main">
   <p:cSld name="Slide 13">
     <p:bg>
@@ -15859,6 +16585,1136 @@
 
 <file path=ppt/slides/slide2.xml><?xml version="1.0" encoding="utf-8"?>
 <p:sld xmlns:a="http://schemas.openxmlformats.org/drawingml/2006/main" xmlns:r="http://schemas.openxmlformats.org/officeDocument/2006/relationships" xmlns:p="http://schemas.openxmlformats.org/presentationml/2006/main">
+  <p:cSld name="Slide 1">
+    <p:bg>
+      <p:bgPr>
+        <a:solidFill>
+          <a:srgbClr val="F7F5EF"/>
+        </a:solidFill>
+        <a:effectLst/>
+      </p:bgPr>
+    </p:bg>
+    <p:spTree>
+      <p:nvGrpSpPr>
+        <p:cNvPr id="1" name=""/>
+        <p:cNvGrpSpPr/>
+        <p:nvPr/>
+      </p:nvGrpSpPr>
+      <p:grpSpPr>
+        <a:xfrm>
+          <a:off x="0" y="0"/>
+          <a:ext cx="0" cy="0"/>
+          <a:chOff x="0" y="0"/>
+          <a:chExt cx="0" cy="0"/>
+        </a:xfrm>
+      </p:grpSpPr>
+      <p:sp>
+        <p:nvSpPr>
+          <p:cNvPr id="2" name="Text 0"/>
+          <p:cNvSpPr/>
+          <p:nvPr/>
+        </p:nvSpPr>
+        <p:spPr>
+          <a:xfrm>
+            <a:off x="594360" y="310896"/>
+            <a:ext cx="4114800" cy="201168"/>
+          </a:xfrm>
+          <a:prstGeom prst="rect">
+            <a:avLst/>
+          </a:prstGeom>
+          <a:noFill/>
+          <a:ln/>
+        </p:spPr>
+        <p:txBody>
+          <a:bodyPr wrap="square" lIns="0" tIns="0" rIns="0" bIns="0" rtlCol="0" anchor="t">
+            <a:normAutofit/>
+          </a:bodyPr>
+          <a:lstStyle/>
+          <a:p>
+            <a:pPr marL="0" indent="0" algn="l">
+              <a:lnSpc>
+                <a:spcPct val="90000"/>
+              </a:lnSpc>
+              <a:buNone/>
+            </a:pPr>
+            <a:r>
+              <a:rPr lang="en-US" sz="880" b="1" dirty="0">
+                <a:solidFill>
+                  <a:srgbClr val="17677D"/>
+                </a:solidFill>
+                <a:latin typeface="Aptos" pitchFamily="34" charset="0"/>
+                <a:ea typeface="Aptos" pitchFamily="34" charset="-122"/>
+                <a:cs typeface="Aptos" pitchFamily="34" charset="-120"/>
+              </a:rPr>
+              <a:t>SYSEN 5888 FINAL PROJECT</a:t>
+            </a:r>
+            <a:endParaRPr lang="en-US" sz="880" dirty="0"/>
+          </a:p>
+        </p:txBody>
+      </p:sp>
+      <p:sp>
+        <p:nvSpPr>
+          <p:cNvPr id="3" name="Text 1"/>
+          <p:cNvSpPr/>
+          <p:nvPr/>
+        </p:nvSpPr>
+        <p:spPr>
+          <a:xfrm>
+            <a:off x="566928" y="512064"/>
+            <a:ext cx="10497312" cy="502920"/>
+          </a:xfrm>
+          <a:prstGeom prst="rect">
+            <a:avLst/>
+          </a:prstGeom>
+          <a:noFill/>
+          <a:ln/>
+        </p:spPr>
+        <p:txBody>
+          <a:bodyPr wrap="square" lIns="0" tIns="0" rIns="0" bIns="0" rtlCol="0" anchor="t">
+            <a:normAutofit/>
+          </a:bodyPr>
+          <a:lstStyle/>
+          <a:p>
+            <a:pPr marL="0" indent="0" algn="l">
+              <a:lnSpc>
+                <a:spcPct val="90000"/>
+              </a:lnSpc>
+              <a:buNone/>
+            </a:pPr>
+            <a:r>
+              <a:rPr lang="en-US" sz="2600" b="1" dirty="0">
+                <a:solidFill>
+                  <a:srgbClr val="1F2528"/>
+                </a:solidFill>
+                <a:latin typeface="Aptos Display" pitchFamily="34" charset="0"/>
+                <a:ea typeface="Aptos Display" pitchFamily="34" charset="-122"/>
+                <a:cs typeface="Aptos Display" pitchFamily="34" charset="-120"/>
+              </a:rPr>
+              <a:t>Measuring the AI acceleration: Measurable impact of improvements</a:t>
+            </a:r>
+            <a:endParaRPr lang="en-US" sz="2600" dirty="0"/>
+          </a:p>
+        </p:txBody>
+      </p:sp>
+      <p:sp>
+        <p:nvSpPr>
+          <p:cNvPr id="4" name="Shape 2"/>
+          <p:cNvSpPr/>
+          <p:nvPr/>
+        </p:nvSpPr>
+        <p:spPr>
+          <a:xfrm>
+            <a:off x="566928" y="1078992"/>
+            <a:ext cx="11018520" cy="0"/>
+          </a:xfrm>
+          <a:prstGeom prst="line">
+            <a:avLst/>
+          </a:prstGeom>
+          <a:noFill/>
+          <a:ln w="9525">
+            <a:solidFill>
+              <a:srgbClr val="D8D4C8"/>
+            </a:solidFill>
+            <a:prstDash val="solid"/>
+          </a:ln>
+        </p:spPr>
+        <p:txBody>
+          <a:bodyPr/>
+          <a:lstStyle/>
+          <a:p>
+            <a:endParaRPr lang="en-US"/>
+          </a:p>
+        </p:txBody>
+      </p:sp>
+      <p:sp>
+        <p:nvSpPr>
+          <p:cNvPr id="5" name="Text 3"/>
+          <p:cNvSpPr/>
+          <p:nvPr/>
+        </p:nvSpPr>
+        <p:spPr>
+          <a:xfrm>
+            <a:off x="676656" y="1417320"/>
+            <a:ext cx="5394960" cy="749808"/>
+          </a:xfrm>
+          <a:prstGeom prst="rect">
+            <a:avLst/>
+          </a:prstGeom>
+          <a:noFill/>
+          <a:ln/>
+        </p:spPr>
+        <p:txBody>
+          <a:bodyPr wrap="square" lIns="0" tIns="0" rIns="0" bIns="0" rtlCol="0" anchor="t">
+            <a:normAutofit fontScale="92500"/>
+          </a:bodyPr>
+          <a:lstStyle/>
+          <a:p>
+            <a:pPr marL="0" indent="0" algn="l">
+              <a:lnSpc>
+                <a:spcPct val="90000"/>
+              </a:lnSpc>
+              <a:buNone/>
+            </a:pPr>
+            <a:r>
+              <a:rPr lang="en-US" sz="2200" b="1" dirty="0">
+                <a:solidFill>
+                  <a:srgbClr val="1F2528"/>
+                </a:solidFill>
+                <a:latin typeface="Aptos Display" pitchFamily="34" charset="0"/>
+                <a:ea typeface="Aptos Display" pitchFamily="34" charset="-122"/>
+                <a:cs typeface="Aptos Display" pitchFamily="34" charset="-120"/>
+              </a:rPr>
+              <a:t>Neural networks span decades. The last decade made their progress visible enough to test.</a:t>
+            </a:r>
+            <a:endParaRPr lang="en-US" sz="2200" dirty="0"/>
+          </a:p>
+        </p:txBody>
+      </p:sp>
+      <p:sp>
+        <p:nvSpPr>
+          <p:cNvPr id="6" name="Shape 4"/>
+          <p:cNvSpPr/>
+          <p:nvPr/>
+        </p:nvSpPr>
+        <p:spPr>
+          <a:xfrm>
+            <a:off x="291402" y="3657600"/>
+            <a:ext cx="11571083" cy="0"/>
+          </a:xfrm>
+          <a:prstGeom prst="line">
+            <a:avLst/>
+          </a:prstGeom>
+          <a:noFill/>
+          <a:ln w="13970">
+            <a:solidFill>
+              <a:srgbClr val="30383D"/>
+            </a:solidFill>
+            <a:prstDash val="solid"/>
+          </a:ln>
+        </p:spPr>
+        <p:txBody>
+          <a:bodyPr/>
+          <a:lstStyle/>
+          <a:p>
+            <a:endParaRPr lang="en-US"/>
+          </a:p>
+        </p:txBody>
+      </p:sp>
+      <p:sp>
+        <p:nvSpPr>
+          <p:cNvPr id="7" name="Shape 5"/>
+          <p:cNvSpPr/>
+          <p:nvPr/>
+        </p:nvSpPr>
+        <p:spPr>
+          <a:xfrm>
+            <a:off x="740664" y="3575304"/>
+            <a:ext cx="164592" cy="164592"/>
+          </a:xfrm>
+          <a:prstGeom prst="ellipse">
+            <a:avLst/>
+          </a:prstGeom>
+          <a:solidFill>
+            <a:srgbClr val="F7F5EF"/>
+          </a:solidFill>
+          <a:ln w="11430">
+            <a:solidFill>
+              <a:srgbClr val="30383D"/>
+            </a:solidFill>
+            <a:prstDash val="solid"/>
+          </a:ln>
+        </p:spPr>
+        <p:txBody>
+          <a:bodyPr/>
+          <a:lstStyle/>
+          <a:p>
+            <a:endParaRPr lang="en-US"/>
+          </a:p>
+        </p:txBody>
+      </p:sp>
+      <p:sp>
+        <p:nvSpPr>
+          <p:cNvPr id="8" name="Text 6"/>
+          <p:cNvSpPr/>
+          <p:nvPr/>
+        </p:nvSpPr>
+        <p:spPr>
+          <a:xfrm>
+            <a:off x="411480" y="3154680"/>
+            <a:ext cx="822960" cy="164592"/>
+          </a:xfrm>
+          <a:prstGeom prst="rect">
+            <a:avLst/>
+          </a:prstGeom>
+          <a:noFill/>
+          <a:ln/>
+        </p:spPr>
+        <p:txBody>
+          <a:bodyPr wrap="square" lIns="0" tIns="0" rIns="0" bIns="0" rtlCol="0" anchor="t">
+            <a:normAutofit/>
+          </a:bodyPr>
+          <a:lstStyle/>
+          <a:p>
+            <a:pPr marL="0" indent="0" algn="ctr">
+              <a:lnSpc>
+                <a:spcPct val="90000"/>
+              </a:lnSpc>
+              <a:buNone/>
+            </a:pPr>
+            <a:r>
+              <a:rPr lang="en-US" sz="880" b="1" dirty="0">
+                <a:solidFill>
+                  <a:srgbClr val="1F2528"/>
+                </a:solidFill>
+                <a:latin typeface="Aptos" pitchFamily="34" charset="0"/>
+                <a:ea typeface="Aptos" pitchFamily="34" charset="-122"/>
+                <a:cs typeface="Aptos" pitchFamily="34" charset="-120"/>
+              </a:rPr>
+              <a:t>1980s-90s</a:t>
+            </a:r>
+            <a:endParaRPr lang="en-US" sz="880" dirty="0"/>
+          </a:p>
+        </p:txBody>
+      </p:sp>
+      <p:sp>
+        <p:nvSpPr>
+          <p:cNvPr id="9" name="Text 7"/>
+          <p:cNvSpPr/>
+          <p:nvPr/>
+        </p:nvSpPr>
+        <p:spPr>
+          <a:xfrm>
+            <a:off x="219456" y="3913632"/>
+            <a:ext cx="1207008" cy="438912"/>
+          </a:xfrm>
+          <a:prstGeom prst="rect">
+            <a:avLst/>
+          </a:prstGeom>
+          <a:noFill/>
+          <a:ln/>
+        </p:spPr>
+        <p:txBody>
+          <a:bodyPr wrap="square" lIns="0" tIns="0" rIns="0" bIns="0" rtlCol="0" anchor="t">
+            <a:normAutofit/>
+          </a:bodyPr>
+          <a:lstStyle/>
+          <a:p>
+            <a:pPr marL="0" indent="0" algn="ctr">
+              <a:lnSpc>
+                <a:spcPct val="85000"/>
+              </a:lnSpc>
+              <a:buNone/>
+            </a:pPr>
+            <a:r>
+              <a:rPr lang="en-US" sz="800" dirty="0">
+                <a:solidFill>
+                  <a:srgbClr val="6B7176"/>
+                </a:solidFill>
+                <a:latin typeface="Aptos" pitchFamily="34" charset="0"/>
+                <a:ea typeface="Aptos" pitchFamily="34" charset="-122"/>
+                <a:cs typeface="Aptos" pitchFamily="34" charset="-120"/>
+              </a:rPr>
+              <a:t>Backprop and early neural nets</a:t>
+            </a:r>
+            <a:endParaRPr lang="en-US" sz="800" dirty="0"/>
+          </a:p>
+        </p:txBody>
+      </p:sp>
+      <p:sp>
+        <p:nvSpPr>
+          <p:cNvPr id="10" name="Shape 8"/>
+          <p:cNvSpPr/>
+          <p:nvPr/>
+        </p:nvSpPr>
+        <p:spPr>
+          <a:xfrm>
+            <a:off x="2788920" y="3575304"/>
+            <a:ext cx="164592" cy="164592"/>
+          </a:xfrm>
+          <a:prstGeom prst="ellipse">
+            <a:avLst/>
+          </a:prstGeom>
+          <a:solidFill>
+            <a:srgbClr val="F7F5EF"/>
+          </a:solidFill>
+          <a:ln w="11430">
+            <a:solidFill>
+              <a:srgbClr val="30383D"/>
+            </a:solidFill>
+            <a:prstDash val="solid"/>
+          </a:ln>
+        </p:spPr>
+        <p:txBody>
+          <a:bodyPr/>
+          <a:lstStyle/>
+          <a:p>
+            <a:endParaRPr lang="en-US"/>
+          </a:p>
+        </p:txBody>
+      </p:sp>
+      <p:sp>
+        <p:nvSpPr>
+          <p:cNvPr id="11" name="Text 9"/>
+          <p:cNvSpPr/>
+          <p:nvPr/>
+        </p:nvSpPr>
+        <p:spPr>
+          <a:xfrm>
+            <a:off x="2459736" y="3154680"/>
+            <a:ext cx="822960" cy="164592"/>
+          </a:xfrm>
+          <a:prstGeom prst="rect">
+            <a:avLst/>
+          </a:prstGeom>
+          <a:noFill/>
+          <a:ln/>
+        </p:spPr>
+        <p:txBody>
+          <a:bodyPr wrap="square" lIns="0" tIns="0" rIns="0" bIns="0" rtlCol="0" anchor="t">
+            <a:normAutofit/>
+          </a:bodyPr>
+          <a:lstStyle/>
+          <a:p>
+            <a:pPr marL="0" indent="0" algn="ctr">
+              <a:lnSpc>
+                <a:spcPct val="90000"/>
+              </a:lnSpc>
+              <a:buNone/>
+            </a:pPr>
+            <a:r>
+              <a:rPr lang="en-US" sz="880" b="1" dirty="0">
+                <a:solidFill>
+                  <a:srgbClr val="1F2528"/>
+                </a:solidFill>
+                <a:latin typeface="Aptos" pitchFamily="34" charset="0"/>
+                <a:ea typeface="Aptos" pitchFamily="34" charset="-122"/>
+                <a:cs typeface="Aptos" pitchFamily="34" charset="-120"/>
+              </a:rPr>
+              <a:t>2006</a:t>
+            </a:r>
+            <a:endParaRPr lang="en-US" sz="880" dirty="0"/>
+          </a:p>
+        </p:txBody>
+      </p:sp>
+      <p:sp>
+        <p:nvSpPr>
+          <p:cNvPr id="12" name="Text 10"/>
+          <p:cNvSpPr/>
+          <p:nvPr/>
+        </p:nvSpPr>
+        <p:spPr>
+          <a:xfrm>
+            <a:off x="2267712" y="3913632"/>
+            <a:ext cx="1207008" cy="438912"/>
+          </a:xfrm>
+          <a:prstGeom prst="rect">
+            <a:avLst/>
+          </a:prstGeom>
+          <a:noFill/>
+          <a:ln/>
+        </p:spPr>
+        <p:txBody>
+          <a:bodyPr wrap="square" lIns="0" tIns="0" rIns="0" bIns="0" rtlCol="0" anchor="t">
+            <a:normAutofit/>
+          </a:bodyPr>
+          <a:lstStyle/>
+          <a:p>
+            <a:pPr marL="0" indent="0" algn="ctr">
+              <a:lnSpc>
+                <a:spcPct val="85000"/>
+              </a:lnSpc>
+              <a:buNone/>
+            </a:pPr>
+            <a:r>
+              <a:rPr lang="en-US" sz="800" dirty="0">
+                <a:solidFill>
+                  <a:srgbClr val="6B7176"/>
+                </a:solidFill>
+                <a:latin typeface="Aptos" pitchFamily="34" charset="0"/>
+                <a:ea typeface="Aptos" pitchFamily="34" charset="-122"/>
+                <a:cs typeface="Aptos" pitchFamily="34" charset="-120"/>
+              </a:rPr>
+              <a:t>Deep learning revival</a:t>
+            </a:r>
+            <a:endParaRPr lang="en-US" sz="800" dirty="0"/>
+          </a:p>
+        </p:txBody>
+      </p:sp>
+      <p:sp>
+        <p:nvSpPr>
+          <p:cNvPr id="13" name="Shape 11"/>
+          <p:cNvSpPr/>
+          <p:nvPr/>
+        </p:nvSpPr>
+        <p:spPr>
+          <a:xfrm>
+            <a:off x="4837176" y="3575304"/>
+            <a:ext cx="164592" cy="164592"/>
+          </a:xfrm>
+          <a:prstGeom prst="ellipse">
+            <a:avLst/>
+          </a:prstGeom>
+          <a:solidFill>
+            <a:srgbClr val="F7F5EF"/>
+          </a:solidFill>
+          <a:ln w="11430">
+            <a:solidFill>
+              <a:srgbClr val="30383D"/>
+            </a:solidFill>
+            <a:prstDash val="solid"/>
+          </a:ln>
+        </p:spPr>
+        <p:txBody>
+          <a:bodyPr/>
+          <a:lstStyle/>
+          <a:p>
+            <a:endParaRPr lang="en-US"/>
+          </a:p>
+        </p:txBody>
+      </p:sp>
+      <p:sp>
+        <p:nvSpPr>
+          <p:cNvPr id="14" name="Text 12"/>
+          <p:cNvSpPr/>
+          <p:nvPr/>
+        </p:nvSpPr>
+        <p:spPr>
+          <a:xfrm>
+            <a:off x="4507992" y="3154680"/>
+            <a:ext cx="822960" cy="164592"/>
+          </a:xfrm>
+          <a:prstGeom prst="rect">
+            <a:avLst/>
+          </a:prstGeom>
+          <a:noFill/>
+          <a:ln/>
+        </p:spPr>
+        <p:txBody>
+          <a:bodyPr wrap="square" lIns="0" tIns="0" rIns="0" bIns="0" rtlCol="0" anchor="t">
+            <a:normAutofit/>
+          </a:bodyPr>
+          <a:lstStyle/>
+          <a:p>
+            <a:pPr marL="0" indent="0" algn="ctr">
+              <a:lnSpc>
+                <a:spcPct val="90000"/>
+              </a:lnSpc>
+              <a:buNone/>
+            </a:pPr>
+            <a:r>
+              <a:rPr lang="en-US" sz="880" b="1" dirty="0">
+                <a:solidFill>
+                  <a:srgbClr val="1F2528"/>
+                </a:solidFill>
+                <a:latin typeface="Aptos" pitchFamily="34" charset="0"/>
+                <a:ea typeface="Aptos" pitchFamily="34" charset="-122"/>
+                <a:cs typeface="Aptos" pitchFamily="34" charset="-120"/>
+              </a:rPr>
+              <a:t>2012</a:t>
+            </a:r>
+            <a:endParaRPr lang="en-US" sz="880" dirty="0"/>
+          </a:p>
+        </p:txBody>
+      </p:sp>
+      <p:sp>
+        <p:nvSpPr>
+          <p:cNvPr id="15" name="Text 13"/>
+          <p:cNvSpPr/>
+          <p:nvPr/>
+        </p:nvSpPr>
+        <p:spPr>
+          <a:xfrm>
+            <a:off x="4315968" y="3913632"/>
+            <a:ext cx="1207008" cy="438912"/>
+          </a:xfrm>
+          <a:prstGeom prst="rect">
+            <a:avLst/>
+          </a:prstGeom>
+          <a:noFill/>
+          <a:ln/>
+        </p:spPr>
+        <p:txBody>
+          <a:bodyPr wrap="square" lIns="0" tIns="0" rIns="0" bIns="0" rtlCol="0" anchor="t">
+            <a:normAutofit/>
+          </a:bodyPr>
+          <a:lstStyle/>
+          <a:p>
+            <a:pPr marL="0" indent="0" algn="ctr">
+              <a:lnSpc>
+                <a:spcPct val="85000"/>
+              </a:lnSpc>
+              <a:buNone/>
+            </a:pPr>
+            <a:r>
+              <a:rPr lang="en-US" sz="800" dirty="0">
+                <a:solidFill>
+                  <a:srgbClr val="6B7176"/>
+                </a:solidFill>
+                <a:latin typeface="Aptos" pitchFamily="34" charset="0"/>
+                <a:ea typeface="Aptos" pitchFamily="34" charset="-122"/>
+                <a:cs typeface="Aptos" pitchFamily="34" charset="-120"/>
+              </a:rPr>
+              <a:t>CNN/ImageNet moment</a:t>
+            </a:r>
+            <a:endParaRPr lang="en-US" sz="800" dirty="0"/>
+          </a:p>
+        </p:txBody>
+      </p:sp>
+      <p:sp>
+        <p:nvSpPr>
+          <p:cNvPr id="16" name="Shape 14"/>
+          <p:cNvSpPr/>
+          <p:nvPr/>
+        </p:nvSpPr>
+        <p:spPr>
+          <a:xfrm>
+            <a:off x="6885432" y="3575304"/>
+            <a:ext cx="164592" cy="164592"/>
+          </a:xfrm>
+          <a:prstGeom prst="ellipse">
+            <a:avLst/>
+          </a:prstGeom>
+          <a:solidFill>
+            <a:srgbClr val="B65D3A"/>
+          </a:solidFill>
+          <a:ln w="11430">
+            <a:solidFill>
+              <a:srgbClr val="30383D"/>
+            </a:solidFill>
+            <a:prstDash val="solid"/>
+          </a:ln>
+        </p:spPr>
+        <p:txBody>
+          <a:bodyPr/>
+          <a:lstStyle/>
+          <a:p>
+            <a:endParaRPr lang="en-US"/>
+          </a:p>
+        </p:txBody>
+      </p:sp>
+      <p:sp>
+        <p:nvSpPr>
+          <p:cNvPr id="17" name="Text 15"/>
+          <p:cNvSpPr/>
+          <p:nvPr/>
+        </p:nvSpPr>
+        <p:spPr>
+          <a:xfrm>
+            <a:off x="6556248" y="3154680"/>
+            <a:ext cx="822960" cy="164592"/>
+          </a:xfrm>
+          <a:prstGeom prst="rect">
+            <a:avLst/>
+          </a:prstGeom>
+          <a:noFill/>
+          <a:ln/>
+        </p:spPr>
+        <p:txBody>
+          <a:bodyPr wrap="square" lIns="0" tIns="0" rIns="0" bIns="0" rtlCol="0" anchor="t">
+            <a:normAutofit/>
+          </a:bodyPr>
+          <a:lstStyle/>
+          <a:p>
+            <a:pPr marL="0" indent="0" algn="ctr">
+              <a:lnSpc>
+                <a:spcPct val="90000"/>
+              </a:lnSpc>
+              <a:buNone/>
+            </a:pPr>
+            <a:r>
+              <a:rPr lang="en-US" sz="880" b="1" dirty="0">
+                <a:solidFill>
+                  <a:srgbClr val="B65D3A"/>
+                </a:solidFill>
+                <a:latin typeface="Aptos" pitchFamily="34" charset="0"/>
+                <a:ea typeface="Aptos" pitchFamily="34" charset="-122"/>
+                <a:cs typeface="Aptos" pitchFamily="34" charset="-120"/>
+              </a:rPr>
+              <a:t>2015</a:t>
+            </a:r>
+            <a:endParaRPr lang="en-US" sz="880" dirty="0"/>
+          </a:p>
+        </p:txBody>
+      </p:sp>
+      <p:sp>
+        <p:nvSpPr>
+          <p:cNvPr id="18" name="Text 16"/>
+          <p:cNvSpPr/>
+          <p:nvPr/>
+        </p:nvSpPr>
+        <p:spPr>
+          <a:xfrm>
+            <a:off x="6364224" y="3913632"/>
+            <a:ext cx="1207008" cy="438912"/>
+          </a:xfrm>
+          <a:prstGeom prst="rect">
+            <a:avLst/>
+          </a:prstGeom>
+          <a:noFill/>
+          <a:ln/>
+        </p:spPr>
+        <p:txBody>
+          <a:bodyPr wrap="square" lIns="0" tIns="0" rIns="0" bIns="0" rtlCol="0" anchor="t">
+            <a:normAutofit/>
+          </a:bodyPr>
+          <a:lstStyle/>
+          <a:p>
+            <a:pPr marL="0" indent="0" algn="ctr">
+              <a:lnSpc>
+                <a:spcPct val="85000"/>
+              </a:lnSpc>
+              <a:buNone/>
+            </a:pPr>
+            <a:r>
+              <a:rPr lang="en-US" sz="800" dirty="0">
+                <a:solidFill>
+                  <a:srgbClr val="6B7176"/>
+                </a:solidFill>
+                <a:latin typeface="Aptos" pitchFamily="34" charset="0"/>
+                <a:ea typeface="Aptos" pitchFamily="34" charset="-122"/>
+                <a:cs typeface="Aptos" pitchFamily="34" charset="-120"/>
+              </a:rPr>
+              <a:t>Piczak CNN on ESC-50</a:t>
+            </a:r>
+            <a:endParaRPr lang="en-US" sz="800" dirty="0"/>
+          </a:p>
+        </p:txBody>
+      </p:sp>
+      <p:sp>
+        <p:nvSpPr>
+          <p:cNvPr id="19" name="Shape 17"/>
+          <p:cNvSpPr/>
+          <p:nvPr/>
+        </p:nvSpPr>
+        <p:spPr>
+          <a:xfrm>
+            <a:off x="8933688" y="3575304"/>
+            <a:ext cx="164592" cy="164592"/>
+          </a:xfrm>
+          <a:prstGeom prst="ellipse">
+            <a:avLst/>
+          </a:prstGeom>
+          <a:solidFill>
+            <a:srgbClr val="F7F5EF"/>
+          </a:solidFill>
+          <a:ln w="11430">
+            <a:solidFill>
+              <a:srgbClr val="30383D"/>
+            </a:solidFill>
+            <a:prstDash val="solid"/>
+          </a:ln>
+        </p:spPr>
+        <p:txBody>
+          <a:bodyPr/>
+          <a:lstStyle/>
+          <a:p>
+            <a:endParaRPr lang="en-US"/>
+          </a:p>
+        </p:txBody>
+      </p:sp>
+      <p:sp>
+        <p:nvSpPr>
+          <p:cNvPr id="20" name="Text 18"/>
+          <p:cNvSpPr/>
+          <p:nvPr/>
+        </p:nvSpPr>
+        <p:spPr>
+          <a:xfrm>
+            <a:off x="8604504" y="3154680"/>
+            <a:ext cx="822960" cy="164592"/>
+          </a:xfrm>
+          <a:prstGeom prst="rect">
+            <a:avLst/>
+          </a:prstGeom>
+          <a:noFill/>
+          <a:ln/>
+        </p:spPr>
+        <p:txBody>
+          <a:bodyPr wrap="square" lIns="0" tIns="0" rIns="0" bIns="0" rtlCol="0" anchor="t">
+            <a:normAutofit/>
+          </a:bodyPr>
+          <a:lstStyle/>
+          <a:p>
+            <a:pPr marL="0" indent="0" algn="ctr">
+              <a:lnSpc>
+                <a:spcPct val="90000"/>
+              </a:lnSpc>
+              <a:buNone/>
+            </a:pPr>
+            <a:r>
+              <a:rPr lang="en-US" sz="880" b="1" dirty="0">
+                <a:solidFill>
+                  <a:srgbClr val="1F2528"/>
+                </a:solidFill>
+                <a:latin typeface="Aptos" pitchFamily="34" charset="0"/>
+                <a:ea typeface="Aptos" pitchFamily="34" charset="-122"/>
+                <a:cs typeface="Aptos" pitchFamily="34" charset="-120"/>
+              </a:rPr>
+              <a:t>2017-19</a:t>
+            </a:r>
+            <a:endParaRPr lang="en-US" sz="880" dirty="0"/>
+          </a:p>
+        </p:txBody>
+      </p:sp>
+      <p:sp>
+        <p:nvSpPr>
+          <p:cNvPr id="21" name="Text 19"/>
+          <p:cNvSpPr/>
+          <p:nvPr/>
+        </p:nvSpPr>
+        <p:spPr>
+          <a:xfrm>
+            <a:off x="8412480" y="3913632"/>
+            <a:ext cx="1207008" cy="438912"/>
+          </a:xfrm>
+          <a:prstGeom prst="rect">
+            <a:avLst/>
+          </a:prstGeom>
+          <a:noFill/>
+          <a:ln/>
+        </p:spPr>
+        <p:txBody>
+          <a:bodyPr wrap="square" lIns="0" tIns="0" rIns="0" bIns="0" rtlCol="0" anchor="t">
+            <a:normAutofit/>
+          </a:bodyPr>
+          <a:lstStyle/>
+          <a:p>
+            <a:pPr marL="0" indent="0" algn="ctr">
+              <a:lnSpc>
+                <a:spcPct val="85000"/>
+              </a:lnSpc>
+              <a:buNone/>
+            </a:pPr>
+            <a:r>
+              <a:rPr lang="en-US" sz="800" dirty="0">
+                <a:solidFill>
+                  <a:srgbClr val="6B7176"/>
+                </a:solidFill>
+                <a:latin typeface="Aptos" pitchFamily="34" charset="0"/>
+                <a:ea typeface="Aptos" pitchFamily="34" charset="-122"/>
+                <a:cs typeface="Aptos" pitchFamily="34" charset="-120"/>
+              </a:rPr>
+              <a:t>Transfer learning matures</a:t>
+            </a:r>
+            <a:endParaRPr lang="en-US" sz="800" dirty="0"/>
+          </a:p>
+        </p:txBody>
+      </p:sp>
+      <p:sp>
+        <p:nvSpPr>
+          <p:cNvPr id="22" name="Shape 20"/>
+          <p:cNvSpPr/>
+          <p:nvPr/>
+        </p:nvSpPr>
+        <p:spPr>
+          <a:xfrm>
+            <a:off x="10981944" y="3575304"/>
+            <a:ext cx="164592" cy="164592"/>
+          </a:xfrm>
+          <a:prstGeom prst="ellipse">
+            <a:avLst/>
+          </a:prstGeom>
+          <a:solidFill>
+            <a:srgbClr val="17677D"/>
+          </a:solidFill>
+          <a:ln w="11430">
+            <a:solidFill>
+              <a:srgbClr val="30383D"/>
+            </a:solidFill>
+            <a:prstDash val="solid"/>
+          </a:ln>
+        </p:spPr>
+        <p:txBody>
+          <a:bodyPr/>
+          <a:lstStyle/>
+          <a:p>
+            <a:endParaRPr lang="en-US"/>
+          </a:p>
+        </p:txBody>
+      </p:sp>
+      <p:sp>
+        <p:nvSpPr>
+          <p:cNvPr id="23" name="Text 21"/>
+          <p:cNvSpPr/>
+          <p:nvPr/>
+        </p:nvSpPr>
+        <p:spPr>
+          <a:xfrm>
+            <a:off x="10652760" y="3154680"/>
+            <a:ext cx="822960" cy="164592"/>
+          </a:xfrm>
+          <a:prstGeom prst="rect">
+            <a:avLst/>
+          </a:prstGeom>
+          <a:noFill/>
+          <a:ln/>
+        </p:spPr>
+        <p:txBody>
+          <a:bodyPr wrap="square" lIns="0" tIns="0" rIns="0" bIns="0" rtlCol="0" anchor="t">
+            <a:normAutofit/>
+          </a:bodyPr>
+          <a:lstStyle/>
+          <a:p>
+            <a:pPr marL="0" indent="0" algn="ctr">
+              <a:lnSpc>
+                <a:spcPct val="90000"/>
+              </a:lnSpc>
+              <a:buNone/>
+            </a:pPr>
+            <a:r>
+              <a:rPr lang="en-US" sz="880" b="1" dirty="0">
+                <a:solidFill>
+                  <a:srgbClr val="1F2528"/>
+                </a:solidFill>
+                <a:latin typeface="Aptos" pitchFamily="34" charset="0"/>
+                <a:ea typeface="Aptos" pitchFamily="34" charset="-122"/>
+                <a:cs typeface="Aptos" pitchFamily="34" charset="-120"/>
+              </a:rPr>
+              <a:t>2020s</a:t>
+            </a:r>
+            <a:endParaRPr lang="en-US" sz="880" dirty="0"/>
+          </a:p>
+        </p:txBody>
+      </p:sp>
+      <p:sp>
+        <p:nvSpPr>
+          <p:cNvPr id="24" name="Text 22"/>
+          <p:cNvSpPr/>
+          <p:nvPr/>
+        </p:nvSpPr>
+        <p:spPr>
+          <a:xfrm>
+            <a:off x="10460736" y="3913632"/>
+            <a:ext cx="1207008" cy="438912"/>
+          </a:xfrm>
+          <a:prstGeom prst="rect">
+            <a:avLst/>
+          </a:prstGeom>
+          <a:noFill/>
+          <a:ln/>
+        </p:spPr>
+        <p:txBody>
+          <a:bodyPr wrap="square" lIns="0" tIns="0" rIns="0" bIns="0" rtlCol="0" anchor="t">
+            <a:normAutofit/>
+          </a:bodyPr>
+          <a:lstStyle/>
+          <a:p>
+            <a:pPr marL="0" indent="0" algn="ctr">
+              <a:lnSpc>
+                <a:spcPct val="85000"/>
+              </a:lnSpc>
+              <a:buNone/>
+            </a:pPr>
+            <a:r>
+              <a:rPr lang="en-US" sz="800" dirty="0">
+                <a:solidFill>
+                  <a:srgbClr val="6B7176"/>
+                </a:solidFill>
+                <a:latin typeface="Aptos" pitchFamily="34" charset="0"/>
+                <a:ea typeface="Aptos" pitchFamily="34" charset="-122"/>
+                <a:cs typeface="Aptos" pitchFamily="34" charset="-120"/>
+              </a:rPr>
+              <a:t>Pretrained representations at scale</a:t>
+            </a:r>
+            <a:endParaRPr lang="en-US" sz="800" dirty="0"/>
+          </a:p>
+        </p:txBody>
+      </p:sp>
+      <p:sp>
+        <p:nvSpPr>
+          <p:cNvPr id="25" name="Text 23"/>
+          <p:cNvSpPr/>
+          <p:nvPr/>
+        </p:nvSpPr>
+        <p:spPr>
+          <a:xfrm>
+            <a:off x="6463401" y="4693985"/>
+            <a:ext cx="4526280" cy="868680"/>
+          </a:xfrm>
+          <a:prstGeom prst="rect">
+            <a:avLst/>
+          </a:prstGeom>
+          <a:noFill/>
+          <a:ln/>
+        </p:spPr>
+        <p:txBody>
+          <a:bodyPr wrap="square" lIns="0" tIns="0" rIns="0" bIns="0" rtlCol="0" anchor="t">
+            <a:normAutofit/>
+          </a:bodyPr>
+          <a:lstStyle/>
+          <a:p>
+            <a:pPr marL="0" indent="0" algn="l">
+              <a:lnSpc>
+                <a:spcPct val="90000"/>
+              </a:lnSpc>
+              <a:buNone/>
+            </a:pPr>
+            <a:r>
+              <a:rPr lang="en-US" sz="1700" b="1" dirty="0">
+                <a:solidFill>
+                  <a:srgbClr val="17677D"/>
+                </a:solidFill>
+                <a:latin typeface="Aptos Display" pitchFamily="34" charset="0"/>
+                <a:ea typeface="Aptos Display" pitchFamily="34" charset="-122"/>
+                <a:cs typeface="Aptos Display" pitchFamily="34" charset="-120"/>
+              </a:rPr>
+              <a:t>We use a 2015 benchmark as a time capsule: can later neural-network techniques produce measurable gains?</a:t>
+            </a:r>
+            <a:endParaRPr lang="en-US" sz="1700" dirty="0"/>
+          </a:p>
+        </p:txBody>
+      </p:sp>
+      <p:sp>
+        <p:nvSpPr>
+          <p:cNvPr id="26" name="Text 24"/>
+          <p:cNvSpPr/>
+          <p:nvPr/>
+        </p:nvSpPr>
+        <p:spPr>
+          <a:xfrm>
+            <a:off x="11064240" y="6473952"/>
+            <a:ext cx="411480" cy="164592"/>
+          </a:xfrm>
+          <a:prstGeom prst="rect">
+            <a:avLst/>
+          </a:prstGeom>
+          <a:noFill/>
+          <a:ln/>
+        </p:spPr>
+        <p:txBody>
+          <a:bodyPr wrap="square" lIns="0" tIns="0" rIns="0" bIns="0" rtlCol="0" anchor="t">
+            <a:normAutofit/>
+          </a:bodyPr>
+          <a:lstStyle/>
+          <a:p>
+            <a:pPr marL="0" indent="0" algn="r">
+              <a:lnSpc>
+                <a:spcPct val="90000"/>
+              </a:lnSpc>
+              <a:buNone/>
+            </a:pPr>
+            <a:r>
+              <a:rPr lang="en-US" sz="750" dirty="0">
+                <a:solidFill>
+                  <a:srgbClr val="6B7176"/>
+                </a:solidFill>
+                <a:latin typeface="Aptos" pitchFamily="34" charset="0"/>
+                <a:ea typeface="Aptos" pitchFamily="34" charset="-122"/>
+                <a:cs typeface="Aptos" pitchFamily="34" charset="-120"/>
+              </a:rPr>
+              <a:t>01</a:t>
+            </a:r>
+            <a:endParaRPr lang="en-US" sz="750" dirty="0"/>
+          </a:p>
+        </p:txBody>
+      </p:sp>
+      <p:sp>
+        <p:nvSpPr>
+          <p:cNvPr id="27" name="Rectangle 26">
+            <a:extLst>
+              <a:ext uri="{FF2B5EF4-FFF2-40B4-BE49-F238E27FC236}">
+                <a16:creationId xmlns:a16="http://schemas.microsoft.com/office/drawing/2014/main" id="{9BA562B3-85D6-D8F9-B3B8-1384B0F1FBB9}"/>
+              </a:ext>
+            </a:extLst>
+          </p:cNvPr>
+          <p:cNvSpPr/>
+          <p:nvPr/>
+        </p:nvSpPr>
+        <p:spPr>
+          <a:xfrm>
+            <a:off x="6364224" y="2873846"/>
+            <a:ext cx="5416296" cy="1688106"/>
+          </a:xfrm>
+          <a:prstGeom prst="rect">
+            <a:avLst/>
+          </a:prstGeom>
+          <a:noFill/>
+          <a:ln>
+            <a:solidFill>
+              <a:schemeClr val="tx1"/>
+            </a:solidFill>
+          </a:ln>
+        </p:spPr>
+        <p:style>
+          <a:lnRef idx="2">
+            <a:schemeClr val="accent1">
+              <a:shade val="15000"/>
+            </a:schemeClr>
+          </a:lnRef>
+          <a:fillRef idx="1">
+            <a:schemeClr val="accent1"/>
+          </a:fillRef>
+          <a:effectRef idx="0">
+            <a:schemeClr val="accent1"/>
+          </a:effectRef>
+          <a:fontRef idx="minor">
+            <a:schemeClr val="lt1"/>
+          </a:fontRef>
+        </p:style>
+        <p:txBody>
+          <a:bodyPr rtlCol="0" anchor="ctr"/>
+          <a:lstStyle/>
+          <a:p>
+            <a:pPr algn="ctr"/>
+            <a:endParaRPr lang="en-US"/>
+          </a:p>
+        </p:txBody>
+      </p:sp>
+      <p:pic>
+        <p:nvPicPr>
+          <p:cNvPr id="28" name="Picture 2" descr="Cornell University Logo, symbol, meaning, history, PNG, brand">
+            <a:extLst>
+              <a:ext uri="{FF2B5EF4-FFF2-40B4-BE49-F238E27FC236}">
+                <a16:creationId xmlns:a16="http://schemas.microsoft.com/office/drawing/2014/main" id="{3B50C48C-33E4-796F-F8B1-DB5A33A30FF6}"/>
+              </a:ext>
+            </a:extLst>
+          </p:cNvPr>
+          <p:cNvPicPr>
+            <a:picLocks noChangeAspect="1" noChangeArrowheads="1"/>
+          </p:cNvPicPr>
+          <p:nvPr/>
+        </p:nvPicPr>
+        <p:blipFill rotWithShape="1">
+          <a:blip r:embed="rId3">
+            <a:extLst>
+              <a:ext uri="{28A0092B-C50C-407E-A947-70E740481C1C}">
+                <a14:useLocalDpi xmlns:a14="http://schemas.microsoft.com/office/drawing/2010/main" val="0"/>
+              </a:ext>
+            </a:extLst>
+          </a:blip>
+          <a:srcRect l="15934" r="15589"/>
+          <a:stretch/>
+        </p:blipFill>
+        <p:spPr bwMode="auto">
+          <a:xfrm>
+            <a:off x="11320507" y="147128"/>
+            <a:ext cx="863884" cy="709633"/>
+          </a:xfrm>
+          <a:prstGeom prst="rect">
+            <a:avLst/>
+          </a:prstGeom>
+          <a:noFill/>
+          <a:extLst>
+            <a:ext uri="{909E8E84-426E-40DD-AFC4-6F175D3DCCD1}">
+              <a14:hiddenFill xmlns:a14="http://schemas.microsoft.com/office/drawing/2010/main">
+                <a:solidFill>
+                  <a:srgbClr val="FFFFFF"/>
+                </a:solidFill>
+              </a14:hiddenFill>
+            </a:ext>
+          </a:extLst>
+        </p:spPr>
+      </p:pic>
+    </p:spTree>
+  </p:cSld>
+  <p:clrMapOvr>
+    <a:masterClrMapping/>
+  </p:clrMapOvr>
+</p:sld>
+</file>
+
+<file path=ppt/slides/slide3.xml><?xml version="1.0" encoding="utf-8"?>
+<p:sld xmlns:a="http://schemas.openxmlformats.org/drawingml/2006/main" xmlns:r="http://schemas.openxmlformats.org/officeDocument/2006/relationships" xmlns:p="http://schemas.openxmlformats.org/presentationml/2006/main">
   <p:cSld name="Slide 2">
     <p:bg>
       <p:bgPr>
@@ -17164,7 +19020,7 @@
 </p:sld>
 </file>
 
-<file path=ppt/slides/slide3.xml><?xml version="1.0" encoding="utf-8"?>
+<file path=ppt/slides/slide4.xml><?xml version="1.0" encoding="utf-8"?>
 <p:sld xmlns:a="http://schemas.openxmlformats.org/drawingml/2006/main" xmlns:r="http://schemas.openxmlformats.org/officeDocument/2006/relationships" xmlns:p="http://schemas.openxmlformats.org/presentationml/2006/main">
   <p:cSld name="Slide 3">
     <p:bg>
@@ -18385,7 +20241,7 @@
 </p:sld>
 </file>
 
-<file path=ppt/slides/slide4.xml><?xml version="1.0" encoding="utf-8"?>
+<file path=ppt/slides/slide5.xml><?xml version="1.0" encoding="utf-8"?>
 <p:sld xmlns:a="http://schemas.openxmlformats.org/drawingml/2006/main" xmlns:r="http://schemas.openxmlformats.org/officeDocument/2006/relationships" xmlns:p="http://schemas.openxmlformats.org/presentationml/2006/main">
   <p:cSld name="Slide 4">
     <p:bg>
@@ -19507,7 +21363,7 @@
 </p:sld>
 </file>
 
-<file path=ppt/slides/slide5.xml><?xml version="1.0" encoding="utf-8"?>
+<file path=ppt/slides/slide6.xml><?xml version="1.0" encoding="utf-8"?>
 <p:sld xmlns:a="http://schemas.openxmlformats.org/drawingml/2006/main" xmlns:r="http://schemas.openxmlformats.org/officeDocument/2006/relationships" xmlns:p="http://schemas.openxmlformats.org/presentationml/2006/main">
   <p:cSld name="Slide 5">
     <p:bg>
@@ -19792,7 +21648,7 @@
         <p:spPr>
           <a:xfrm>
             <a:off x="6957490" y="4123666"/>
-            <a:ext cx="2011680" cy="914400"/>
+            <a:ext cx="2011680" cy="772294"/>
           </a:xfrm>
           <a:prstGeom prst="rect">
             <a:avLst/>
@@ -19804,7 +21660,10 @@
           </a:solidFill>
           <a:ln w="17780">
             <a:solidFill>
-              <a:srgbClr val="B65D3A"/>
+              <a:schemeClr val="tx1">
+                <a:lumMod val="75000"/>
+                <a:lumOff val="25000"/>
+              </a:schemeClr>
             </a:solidFill>
             <a:prstDash val="solid"/>
           </a:ln>
@@ -19849,7 +21708,10 @@
             <a:r>
               <a:rPr lang="en-US" sz="2100" b="1" dirty="0">
                 <a:solidFill>
-                  <a:srgbClr val="B65D3A"/>
+                  <a:schemeClr val="tx1">
+                    <a:lumMod val="75000"/>
+                    <a:lumOff val="25000"/>
+                  </a:schemeClr>
                 </a:solidFill>
                 <a:latin typeface="Aptos Display" pitchFamily="34" charset="0"/>
                 <a:ea typeface="Aptos Display" pitchFamily="34" charset="-122"/>
@@ -19857,7 +21719,14 @@
               </a:rPr>
               <a:t>64.5%</a:t>
             </a:r>
-            <a:endParaRPr lang="en-US" sz="2100" dirty="0"/>
+            <a:endParaRPr lang="en-US" sz="2100" dirty="0">
+              <a:solidFill>
+                <a:schemeClr val="tx1">
+                  <a:lumMod val="75000"/>
+                  <a:lumOff val="25000"/>
+                </a:schemeClr>
+              </a:solidFill>
+            </a:endParaRPr>
           </a:p>
         </p:txBody>
       </p:sp>
@@ -19914,7 +21783,7 @@
         <p:spPr>
           <a:xfrm>
             <a:off x="9216058" y="4123666"/>
-            <a:ext cx="1828800" cy="914400"/>
+            <a:ext cx="1828800" cy="772294"/>
           </a:xfrm>
           <a:prstGeom prst="rect">
             <a:avLst/>
@@ -20595,7 +22464,7 @@
           <p:nvPr>
             <p:extLst>
               <p:ext uri="{D42A27DB-BD31-4B8C-83A1-F6EECF244321}">
-                <p14:modId xmlns:p14="http://schemas.microsoft.com/office/powerpoint/2010/main" val="3272244310"/>
+                <p14:modId xmlns:p14="http://schemas.microsoft.com/office/powerpoint/2010/main" val="3126877790"/>
               </p:ext>
             </p:extLst>
           </p:nvPr>
@@ -21779,7 +23648,7 @@
         </p:spPr>
         <p:txBody>
           <a:bodyPr wrap="square" lIns="0" tIns="0" rIns="0" bIns="0" rtlCol="0" anchor="t">
-            <a:normAutofit lnSpcReduction="10000"/>
+            <a:normAutofit/>
           </a:bodyPr>
           <a:lstStyle/>
           <a:p>
@@ -21842,7 +23711,7 @@
                 </a:solidFill>
                 <a:latin typeface="Aptos" pitchFamily="34" charset="0"/>
               </a:rPr>
-              <a:t>The corrected rerun slightly underperformed vs. the original baseline, which may reflect implementation and library differences over the decade since the original work. </a:t>
+              <a:t>The rerun slightly underperformed vs. the original baseline, which may reflect implementation and library differences over the decade since the original work. </a:t>
             </a:r>
           </a:p>
           <a:p>
@@ -21871,7 +23740,7 @@
                 </a:solidFill>
                 <a:latin typeface="Aptos" pitchFamily="34" charset="0"/>
               </a:rPr>
-              <a:t>Ultimately, we found the reproduced baseline to be a sufficient representation of </a:t>
+              <a:t>The reproduced baseline is a sufficient representation of </a:t>
             </a:r>
             <a:r>
               <a:rPr lang="en-US" sz="1200" dirty="0" err="1">
@@ -21889,7 +23758,7 @@
                 </a:solidFill>
                 <a:latin typeface="Aptos" pitchFamily="34" charset="0"/>
               </a:rPr>
-              <a:t> model for subsequent comparisons..</a:t>
+              <a:t> model</a:t>
             </a:r>
           </a:p>
         </p:txBody>
@@ -22034,7 +23903,7 @@
 </p:sld>
 </file>
 
-<file path=ppt/slides/slide6.xml><?xml version="1.0" encoding="utf-8"?>
+<file path=ppt/slides/slide7.xml><?xml version="1.0" encoding="utf-8"?>
 <p:sld xmlns:a="http://schemas.openxmlformats.org/drawingml/2006/main" xmlns:r="http://schemas.openxmlformats.org/officeDocument/2006/relationships" xmlns:p="http://schemas.openxmlformats.org/presentationml/2006/main">
   <p:cSld>
     <p:bg>
@@ -22263,14 +24132,14 @@
       </p:sp>
       <p:sp>
         <p:nvSpPr>
-          <p:cNvPr id="16" name="Text 14"/>
-          <p:cNvSpPr/>
-          <p:nvPr/>
-        </p:nvSpPr>
-        <p:spPr>
-          <a:xfrm>
-            <a:off x="6574536" y="5309666"/>
-            <a:ext cx="1417320" cy="274320"/>
+          <p:cNvPr id="20" name="Text 18"/>
+          <p:cNvSpPr/>
+          <p:nvPr/>
+        </p:nvSpPr>
+        <p:spPr>
+          <a:xfrm>
+            <a:off x="713232" y="2321628"/>
+            <a:ext cx="1645920" cy="164592"/>
           </a:xfrm>
           <a:prstGeom prst="rect">
             <a:avLst/>
@@ -22280,7 +24149,460 @@
         </p:spPr>
         <p:txBody>
           <a:bodyPr wrap="square" lIns="0" tIns="0" rIns="0" bIns="0" rtlCol="0" anchor="t">
-            <a:normAutofit fontScale="85000" lnSpcReduction="10000"/>
+            <a:normAutofit/>
+          </a:bodyPr>
+          <a:lstStyle/>
+          <a:p>
+            <a:pPr>
+              <a:lnSpc>
+                <a:spcPct val="90000"/>
+              </a:lnSpc>
+            </a:pPr>
+            <a:r>
+              <a:rPr lang="en-US" sz="1000" b="1" dirty="0">
+                <a:solidFill>
+                  <a:srgbClr val="426E9E"/>
+                </a:solidFill>
+                <a:latin typeface="Aptos" pitchFamily="34" charset="0"/>
+              </a:rPr>
+              <a:t>Variation matrix</a:t>
+            </a:r>
+          </a:p>
+        </p:txBody>
+      </p:sp>
+      <p:sp>
+        <p:nvSpPr>
+          <p:cNvPr id="22" name="Text 19"/>
+          <p:cNvSpPr/>
+          <p:nvPr/>
+        </p:nvSpPr>
+        <p:spPr>
+          <a:xfrm>
+            <a:off x="713232" y="4342874"/>
+            <a:ext cx="1005840" cy="146304"/>
+          </a:xfrm>
+          <a:prstGeom prst="rect">
+            <a:avLst/>
+          </a:prstGeom>
+          <a:noFill/>
+          <a:ln/>
+        </p:spPr>
+        <p:txBody>
+          <a:bodyPr wrap="square" lIns="0" tIns="0" rIns="0" bIns="0" rtlCol="0" anchor="t">
+            <a:normAutofit/>
+          </a:bodyPr>
+          <a:lstStyle/>
+          <a:p>
+            <a:pPr>
+              <a:lnSpc>
+                <a:spcPct val="90000"/>
+              </a:lnSpc>
+            </a:pPr>
+            <a:r>
+              <a:rPr lang="en-US" sz="1000" b="1" dirty="0">
+                <a:solidFill>
+                  <a:srgbClr val="426E9E"/>
+                </a:solidFill>
+                <a:latin typeface="Aptos" pitchFamily="34" charset="0"/>
+              </a:rPr>
+              <a:t>Result</a:t>
+            </a:r>
+          </a:p>
+        </p:txBody>
+      </p:sp>
+      <p:sp>
+        <p:nvSpPr>
+          <p:cNvPr id="23" name="Text 20"/>
+          <p:cNvSpPr/>
+          <p:nvPr/>
+        </p:nvSpPr>
+        <p:spPr>
+          <a:xfrm>
+            <a:off x="713232" y="4568476"/>
+            <a:ext cx="5152109" cy="1281482"/>
+          </a:xfrm>
+          <a:prstGeom prst="rect">
+            <a:avLst/>
+          </a:prstGeom>
+          <a:noFill/>
+          <a:ln/>
+        </p:spPr>
+        <p:txBody>
+          <a:bodyPr wrap="square" lIns="0" tIns="0" rIns="0" bIns="0" rtlCol="0" anchor="t">
+            <a:noAutofit/>
+          </a:bodyPr>
+          <a:lstStyle/>
+          <a:p>
+            <a:pPr marL="0" indent="0" algn="l">
+              <a:lnSpc>
+                <a:spcPct val="90000"/>
+              </a:lnSpc>
+              <a:buNone/>
+            </a:pPr>
+            <a:r>
+              <a:rPr lang="en-US" sz="1200" dirty="0">
+                <a:solidFill>
+                  <a:srgbClr val="1F2528"/>
+                </a:solidFill>
+                <a:latin typeface="Aptos" pitchFamily="34" charset="0"/>
+                <a:ea typeface="Aptos" pitchFamily="34" charset="-122"/>
+                <a:cs typeface="Aptos" pitchFamily="34" charset="-120"/>
+              </a:rPr>
+              <a:t>Best observed was 67.9% with Xavier initialization relative to </a:t>
+            </a:r>
+            <a:r>
+              <a:rPr lang="en-US" sz="1200" dirty="0" err="1">
+                <a:solidFill>
+                  <a:srgbClr val="1F2528"/>
+                </a:solidFill>
+                <a:latin typeface="Aptos" pitchFamily="34" charset="0"/>
+                <a:ea typeface="Aptos" pitchFamily="34" charset="-122"/>
+                <a:cs typeface="Aptos" pitchFamily="34" charset="-120"/>
+              </a:rPr>
+              <a:t>Piczak's</a:t>
+            </a:r>
+            <a:r>
+              <a:rPr lang="en-US" sz="1200" dirty="0">
+                <a:solidFill>
+                  <a:srgbClr val="1F2528"/>
+                </a:solidFill>
+                <a:latin typeface="Aptos" pitchFamily="34" charset="0"/>
+                <a:ea typeface="Aptos" pitchFamily="34" charset="-122"/>
+                <a:cs typeface="Aptos" pitchFamily="34" charset="-120"/>
+              </a:rPr>
+              <a:t> 64.5% LP baseline. </a:t>
+            </a:r>
+          </a:p>
+          <a:p>
+            <a:pPr marL="0" indent="0" algn="l">
+              <a:lnSpc>
+                <a:spcPct val="90000"/>
+              </a:lnSpc>
+              <a:buNone/>
+            </a:pPr>
+            <a:endParaRPr lang="en-US" sz="1200" dirty="0">
+              <a:solidFill>
+                <a:srgbClr val="1F2528"/>
+              </a:solidFill>
+              <a:latin typeface="Aptos" pitchFamily="34" charset="0"/>
+              <a:ea typeface="Aptos" pitchFamily="34" charset="-122"/>
+              <a:cs typeface="Aptos" pitchFamily="34" charset="-120"/>
+            </a:endParaRPr>
+          </a:p>
+          <a:p>
+            <a:pPr marL="0" indent="0" algn="l">
+              <a:lnSpc>
+                <a:spcPct val="90000"/>
+              </a:lnSpc>
+              <a:buNone/>
+            </a:pPr>
+            <a:r>
+              <a:rPr lang="en-US" sz="1200" dirty="0">
+                <a:solidFill>
+                  <a:srgbClr val="1F2528"/>
+                </a:solidFill>
+                <a:latin typeface="Aptos" pitchFamily="34" charset="0"/>
+                <a:ea typeface="Aptos" pitchFamily="34" charset="-122"/>
+                <a:cs typeface="Aptos" pitchFamily="34" charset="-120"/>
+              </a:rPr>
+              <a:t>Resulted in a measurable improvement, but still the same from-scratch CNN performance band.</a:t>
+            </a:r>
+          </a:p>
+          <a:p>
+            <a:pPr marL="0" indent="0" algn="l">
+              <a:lnSpc>
+                <a:spcPct val="90000"/>
+              </a:lnSpc>
+              <a:buNone/>
+            </a:pPr>
+            <a:endParaRPr lang="en-US" sz="1200" dirty="0">
+              <a:solidFill>
+                <a:srgbClr val="1F2528"/>
+              </a:solidFill>
+              <a:latin typeface="Aptos" pitchFamily="34" charset="0"/>
+            </a:endParaRPr>
+          </a:p>
+          <a:p>
+            <a:pPr>
+              <a:lnSpc>
+                <a:spcPct val="90000"/>
+              </a:lnSpc>
+            </a:pPr>
+            <a:r>
+              <a:rPr lang="en-US" sz="1200" dirty="0">
+                <a:solidFill>
+                  <a:srgbClr val="1F2528"/>
+                </a:solidFill>
+                <a:latin typeface="Aptos" pitchFamily="34" charset="0"/>
+                <a:ea typeface="Aptos" pitchFamily="34" charset="-122"/>
+                <a:cs typeface="Aptos" pitchFamily="34" charset="-120"/>
+              </a:rPr>
+              <a:t>Hyperparameter tuning helped but did not create a step-change improvement</a:t>
+            </a:r>
+            <a:endParaRPr lang="en-US" sz="1200" dirty="0"/>
+          </a:p>
+        </p:txBody>
+      </p:sp>
+      <p:pic>
+        <p:nvPicPr>
+          <p:cNvPr id="27" name="Image 0" descr="/Users/andrew/Library/CloudStorage/OneDrive-CornellUniversity/Courses/SYSEN5888/ Project/cnn_variations_summary_curve.png"/>
+          <p:cNvPicPr>
+            <a:picLocks noChangeAspect="1"/>
+          </p:cNvPicPr>
+          <p:nvPr/>
+        </p:nvPicPr>
+        <p:blipFill>
+          <a:blip r:embed="rId3"/>
+          <a:srcRect/>
+          <a:stretch/>
+        </p:blipFill>
+        <p:spPr>
+          <a:xfrm>
+            <a:off x="6460360" y="1411800"/>
+            <a:ext cx="5065776" cy="3858768"/>
+          </a:xfrm>
+          <a:prstGeom prst="rect">
+            <a:avLst/>
+          </a:prstGeom>
+        </p:spPr>
+      </p:pic>
+      <p:sp>
+        <p:nvSpPr>
+          <p:cNvPr id="28" name="Text 24"/>
+          <p:cNvSpPr/>
+          <p:nvPr/>
+        </p:nvSpPr>
+        <p:spPr>
+          <a:xfrm>
+            <a:off x="11082528" y="6473952"/>
+            <a:ext cx="384048" cy="128016"/>
+          </a:xfrm>
+          <a:prstGeom prst="rect">
+            <a:avLst/>
+          </a:prstGeom>
+          <a:noFill/>
+          <a:ln/>
+        </p:spPr>
+        <p:txBody>
+          <a:bodyPr wrap="square" lIns="0" tIns="0" rIns="0" bIns="0" rtlCol="0" anchor="t">
+            <a:normAutofit/>
+          </a:bodyPr>
+          <a:lstStyle/>
+          <a:p>
+            <a:pPr marL="0" indent="0" algn="r">
+              <a:lnSpc>
+                <a:spcPct val="90000"/>
+              </a:lnSpc>
+              <a:buNone/>
+            </a:pPr>
+            <a:r>
+              <a:rPr lang="en-US" sz="750" dirty="0">
+                <a:solidFill>
+                  <a:srgbClr val="6B7176"/>
+                </a:solidFill>
+                <a:latin typeface="Aptos" pitchFamily="34" charset="0"/>
+                <a:ea typeface="Aptos" pitchFamily="34" charset="-122"/>
+                <a:cs typeface="Aptos" pitchFamily="34" charset="-120"/>
+              </a:rPr>
+              <a:t>06</a:t>
+            </a:r>
+            <a:endParaRPr lang="en-US" sz="750" dirty="0"/>
+          </a:p>
+        </p:txBody>
+      </p:sp>
+      <p:sp>
+        <p:nvSpPr>
+          <p:cNvPr id="29" name="Text 25"/>
+          <p:cNvSpPr/>
+          <p:nvPr/>
+        </p:nvSpPr>
+        <p:spPr>
+          <a:xfrm>
+            <a:off x="594360" y="6446520"/>
+            <a:ext cx="1828800" cy="128016"/>
+          </a:xfrm>
+          <a:prstGeom prst="rect">
+            <a:avLst/>
+          </a:prstGeom>
+          <a:noFill/>
+          <a:ln/>
+        </p:spPr>
+        <p:txBody>
+          <a:bodyPr wrap="square" lIns="0" tIns="0" rIns="0" bIns="0" rtlCol="0" anchor="t">
+            <a:normAutofit/>
+          </a:bodyPr>
+          <a:lstStyle/>
+          <a:p>
+            <a:pPr marL="0" indent="0" algn="l">
+              <a:lnSpc>
+                <a:spcPct val="90000"/>
+              </a:lnSpc>
+              <a:buNone/>
+            </a:pPr>
+            <a:r>
+              <a:rPr lang="en-US" sz="800" dirty="0">
+                <a:solidFill>
+                  <a:srgbClr val="6B7176"/>
+                </a:solidFill>
+                <a:latin typeface="Aptos" pitchFamily="34" charset="0"/>
+                <a:ea typeface="Aptos" pitchFamily="34" charset="-122"/>
+                <a:cs typeface="Aptos" pitchFamily="34" charset="-120"/>
+              </a:rPr>
+              <a:t>Era 1</a:t>
+            </a:r>
+            <a:endParaRPr lang="en-US" sz="800" dirty="0"/>
+          </a:p>
+        </p:txBody>
+      </p:sp>
+      <p:sp>
+        <p:nvSpPr>
+          <p:cNvPr id="19" name="Shape 25">
+            <a:extLst>
+              <a:ext uri="{FF2B5EF4-FFF2-40B4-BE49-F238E27FC236}">
+                <a16:creationId xmlns:a16="http://schemas.microsoft.com/office/drawing/2014/main" id="{6B621938-6C9B-F684-C6E1-1EF4408FAEE1}"/>
+              </a:ext>
+            </a:extLst>
+          </p:cNvPr>
+          <p:cNvSpPr/>
+          <p:nvPr/>
+        </p:nvSpPr>
+        <p:spPr>
+          <a:xfrm>
+            <a:off x="9550658" y="750101"/>
+            <a:ext cx="1755200" cy="295381"/>
+          </a:xfrm>
+          <a:prstGeom prst="chevron">
+            <a:avLst/>
+          </a:prstGeom>
+          <a:solidFill>
+            <a:srgbClr val="D7DDE0">
+              <a:alpha val="90000"/>
+            </a:srgbClr>
+          </a:solidFill>
+          <a:ln w="12700">
+            <a:solidFill>
+              <a:srgbClr val="F7F5EF"/>
+            </a:solidFill>
+            <a:prstDash val="solid"/>
+          </a:ln>
+        </p:spPr>
+        <p:txBody>
+          <a:bodyPr/>
+          <a:lstStyle/>
+          <a:p>
+            <a:endParaRPr lang="en-US" sz="1100"/>
+          </a:p>
+        </p:txBody>
+      </p:sp>
+      <p:pic>
+        <p:nvPicPr>
+          <p:cNvPr id="24" name="Picture 2" descr="Cornell University Logo, symbol, meaning, history, PNG, brand">
+            <a:extLst>
+              <a:ext uri="{FF2B5EF4-FFF2-40B4-BE49-F238E27FC236}">
+                <a16:creationId xmlns:a16="http://schemas.microsoft.com/office/drawing/2014/main" id="{C5A74DF1-464E-5E32-8310-9B3BBC7FD905}"/>
+              </a:ext>
+            </a:extLst>
+          </p:cNvPr>
+          <p:cNvPicPr>
+            <a:picLocks noChangeAspect="1" noChangeArrowheads="1"/>
+          </p:cNvPicPr>
+          <p:nvPr/>
+        </p:nvPicPr>
+        <p:blipFill rotWithShape="1">
+          <a:blip r:embed="rId4">
+            <a:extLst>
+              <a:ext uri="{28A0092B-C50C-407E-A947-70E740481C1C}">
+                <a14:useLocalDpi xmlns:a14="http://schemas.microsoft.com/office/drawing/2010/main" val="0"/>
+              </a:ext>
+            </a:extLst>
+          </a:blip>
+          <a:srcRect l="15934" r="15589"/>
+          <a:stretch/>
+        </p:blipFill>
+        <p:spPr bwMode="auto">
+          <a:xfrm>
+            <a:off x="11320507" y="147128"/>
+            <a:ext cx="863884" cy="709633"/>
+          </a:xfrm>
+          <a:prstGeom prst="rect">
+            <a:avLst/>
+          </a:prstGeom>
+          <a:noFill/>
+          <a:extLst>
+            <a:ext uri="{909E8E84-426E-40DD-AFC4-6F175D3DCCD1}">
+              <a14:hiddenFill xmlns:a14="http://schemas.microsoft.com/office/drawing/2010/main">
+                <a:solidFill>
+                  <a:srgbClr val="FFFFFF"/>
+                </a:solidFill>
+              </a14:hiddenFill>
+            </a:ext>
+          </a:extLst>
+        </p:spPr>
+      </p:pic>
+      <p:sp>
+        <p:nvSpPr>
+          <p:cNvPr id="25" name="Shape 19">
+            <a:extLst>
+              <a:ext uri="{FF2B5EF4-FFF2-40B4-BE49-F238E27FC236}">
+                <a16:creationId xmlns:a16="http://schemas.microsoft.com/office/drawing/2014/main" id="{A19E6E09-7436-0334-603F-AE64A504872B}"/>
+              </a:ext>
+            </a:extLst>
+          </p:cNvPr>
+          <p:cNvSpPr/>
+          <p:nvPr/>
+        </p:nvSpPr>
+        <p:spPr>
+          <a:xfrm>
+            <a:off x="6237447" y="751408"/>
+            <a:ext cx="1809206" cy="295381"/>
+          </a:xfrm>
+          <a:prstGeom prst="chevron">
+            <a:avLst/>
+          </a:prstGeom>
+          <a:solidFill>
+            <a:srgbClr val="426E9E"/>
+          </a:solidFill>
+          <a:ln w="12700">
+            <a:solidFill>
+              <a:srgbClr val="F7F5EF"/>
+            </a:solidFill>
+            <a:prstDash val="solid"/>
+          </a:ln>
+        </p:spPr>
+        <p:txBody>
+          <a:bodyPr/>
+          <a:lstStyle/>
+          <a:p>
+            <a:endParaRPr lang="en-US" sz="1100" dirty="0"/>
+          </a:p>
+        </p:txBody>
+      </p:sp>
+      <p:sp>
+        <p:nvSpPr>
+          <p:cNvPr id="30" name="Text 20">
+            <a:extLst>
+              <a:ext uri="{FF2B5EF4-FFF2-40B4-BE49-F238E27FC236}">
+                <a16:creationId xmlns:a16="http://schemas.microsoft.com/office/drawing/2014/main" id="{8F3484FD-8FEB-AA36-CF7E-00275362D9A7}"/>
+              </a:ext>
+            </a:extLst>
+          </p:cNvPr>
+          <p:cNvSpPr/>
+          <p:nvPr/>
+        </p:nvSpPr>
+        <p:spPr>
+          <a:xfrm>
+            <a:off x="6287692" y="833886"/>
+            <a:ext cx="1597682" cy="75563"/>
+          </a:xfrm>
+          <a:prstGeom prst="rect">
+            <a:avLst/>
+          </a:prstGeom>
+          <a:noFill/>
+          <a:ln/>
+        </p:spPr>
+        <p:txBody>
+          <a:bodyPr wrap="square" lIns="0" tIns="0" rIns="0" bIns="0" rtlCol="0" anchor="t">
+            <a:normAutofit fontScale="92500" lnSpcReduction="20000"/>
           </a:bodyPr>
           <a:lstStyle/>
           <a:p>
@@ -22291,30 +24613,36 @@
               <a:buNone/>
             </a:pPr>
             <a:r>
-              <a:rPr lang="en-US" sz="1750" b="1" dirty="0">
-                <a:solidFill>
-                  <a:srgbClr val="17677D"/>
-                </a:solidFill>
-                <a:latin typeface="Aptos Display" pitchFamily="34" charset="0"/>
-                <a:ea typeface="Aptos Display" pitchFamily="34" charset="-122"/>
-                <a:cs typeface="Aptos Display" pitchFamily="34" charset="-120"/>
-              </a:rPr>
-              <a:t>10 condition runs</a:t>
-            </a:r>
-            <a:endParaRPr lang="en-US" sz="1750" dirty="0"/>
-          </a:p>
-        </p:txBody>
-      </p:sp>
-      <p:sp>
-        <p:nvSpPr>
-          <p:cNvPr id="17" name="Text 15"/>
-          <p:cNvSpPr/>
-          <p:nvPr/>
-        </p:nvSpPr>
-        <p:spPr>
-          <a:xfrm>
-            <a:off x="8129016" y="5309666"/>
-            <a:ext cx="1508760" cy="274320"/>
+              <a:rPr lang="en-US" sz="700" b="1" dirty="0">
+                <a:solidFill>
+                  <a:srgbClr val="FFFFFF"/>
+                </a:solidFill>
+                <a:latin typeface="Aptos" pitchFamily="34" charset="0"/>
+                <a:ea typeface="Aptos" pitchFamily="34" charset="-122"/>
+                <a:cs typeface="Aptos" pitchFamily="34" charset="-120"/>
+              </a:rPr>
+              <a:t>Training from scratch</a:t>
+            </a:r>
+            <a:endParaRPr lang="en-US" sz="700" dirty="0"/>
+          </a:p>
+        </p:txBody>
+      </p:sp>
+      <p:sp>
+        <p:nvSpPr>
+          <p:cNvPr id="31" name="Text 21">
+            <a:extLst>
+              <a:ext uri="{FF2B5EF4-FFF2-40B4-BE49-F238E27FC236}">
+                <a16:creationId xmlns:a16="http://schemas.microsoft.com/office/drawing/2014/main" id="{3039B58A-3FBD-163E-F613-615D44EC9D2A}"/>
+              </a:ext>
+            </a:extLst>
+          </p:cNvPr>
+          <p:cNvSpPr/>
+          <p:nvPr/>
+        </p:nvSpPr>
+        <p:spPr>
+          <a:xfrm>
+            <a:off x="6295809" y="928966"/>
+            <a:ext cx="1597682" cy="58389"/>
           </a:xfrm>
           <a:prstGeom prst="rect">
             <a:avLst/>
@@ -22324,7 +24652,7 @@
         </p:spPr>
         <p:txBody>
           <a:bodyPr wrap="square" lIns="0" tIns="0" rIns="0" bIns="0" rtlCol="0" anchor="t">
-            <a:normAutofit fontScale="85000" lnSpcReduction="10000"/>
+            <a:normAutofit fontScale="92500" lnSpcReduction="20000"/>
           </a:bodyPr>
           <a:lstStyle/>
           <a:p>
@@ -22335,30 +24663,116 @@
               <a:buNone/>
             </a:pPr>
             <a:r>
-              <a:rPr lang="en-US" sz="1750" b="1" dirty="0">
-                <a:solidFill>
-                  <a:srgbClr val="426E9E"/>
-                </a:solidFill>
-                <a:latin typeface="Aptos Display" pitchFamily="34" charset="0"/>
-                <a:ea typeface="Aptos Display" pitchFamily="34" charset="-122"/>
-                <a:cs typeface="Aptos Display" pitchFamily="34" charset="-120"/>
-              </a:rPr>
-              <a:t>50 fold-level runs</a:t>
-            </a:r>
-            <a:endParaRPr lang="en-US" sz="1750" dirty="0"/>
-          </a:p>
-        </p:txBody>
-      </p:sp>
-      <p:sp>
-        <p:nvSpPr>
-          <p:cNvPr id="18" name="Text 16"/>
-          <p:cNvSpPr/>
-          <p:nvPr/>
-        </p:nvSpPr>
-        <p:spPr>
-          <a:xfrm>
-            <a:off x="9774936" y="5309666"/>
-            <a:ext cx="1737360" cy="274320"/>
+              <a:rPr lang="en-US" sz="500" dirty="0" err="1">
+                <a:solidFill>
+                  <a:srgbClr val="D9D9D9"/>
+                </a:solidFill>
+                <a:latin typeface="Aptos" pitchFamily="34" charset="0"/>
+              </a:rPr>
+              <a:t>Piczak</a:t>
+            </a:r>
+            <a:r>
+              <a:rPr lang="en-US" sz="500" dirty="0">
+                <a:solidFill>
+                  <a:srgbClr val="D9D9D9"/>
+                </a:solidFill>
+                <a:latin typeface="Aptos" pitchFamily="34" charset="0"/>
+              </a:rPr>
+              <a:t> CNN | </a:t>
+            </a:r>
+            <a:r>
+              <a:rPr lang="en-US" sz="500" b="1" dirty="0">
+                <a:solidFill>
+                  <a:srgbClr val="FFFFFF"/>
+                </a:solidFill>
+                <a:latin typeface="Aptos" pitchFamily="34" charset="0"/>
+              </a:rPr>
+              <a:t>Variations</a:t>
+            </a:r>
+            <a:r>
+              <a:rPr lang="en-US" sz="500" dirty="0">
+                <a:solidFill>
+                  <a:srgbClr val="D9D9D9"/>
+                </a:solidFill>
+                <a:latin typeface="Aptos" pitchFamily="34" charset="0"/>
+              </a:rPr>
+              <a:t> </a:t>
+            </a:r>
+            <a:r>
+              <a:rPr lang="en-US" sz="500" dirty="0">
+                <a:solidFill>
+                  <a:srgbClr val="D9D9D9"/>
+                </a:solidFill>
+                <a:latin typeface="Aptos" pitchFamily="34" charset="0"/>
+                <a:ea typeface="Aptos" pitchFamily="34" charset="-122"/>
+                <a:cs typeface="Aptos" pitchFamily="34" charset="-120"/>
+              </a:rPr>
+              <a:t>| LSTM</a:t>
+            </a:r>
+            <a:endParaRPr lang="en-US" sz="500" dirty="0">
+              <a:solidFill>
+                <a:srgbClr val="D9D9D9"/>
+              </a:solidFill>
+            </a:endParaRPr>
+          </a:p>
+        </p:txBody>
+      </p:sp>
+      <p:sp>
+        <p:nvSpPr>
+          <p:cNvPr id="32" name="Shape 22">
+            <a:extLst>
+              <a:ext uri="{FF2B5EF4-FFF2-40B4-BE49-F238E27FC236}">
+                <a16:creationId xmlns:a16="http://schemas.microsoft.com/office/drawing/2014/main" id="{FF38F45D-D531-EDE8-2EF6-54A906C11034}"/>
+              </a:ext>
+            </a:extLst>
+          </p:cNvPr>
+          <p:cNvSpPr/>
+          <p:nvPr/>
+        </p:nvSpPr>
+        <p:spPr>
+          <a:xfrm>
+            <a:off x="7891484" y="750102"/>
+            <a:ext cx="1809206" cy="295381"/>
+          </a:xfrm>
+          <a:prstGeom prst="chevron">
+            <a:avLst/>
+          </a:prstGeom>
+          <a:solidFill>
+            <a:srgbClr val="D7DDE0">
+              <a:alpha val="90000"/>
+            </a:srgbClr>
+          </a:solidFill>
+          <a:ln w="12700">
+            <a:solidFill>
+              <a:srgbClr val="F7F5EF"/>
+            </a:solidFill>
+            <a:prstDash val="solid"/>
+          </a:ln>
+        </p:spPr>
+        <p:txBody>
+          <a:bodyPr/>
+          <a:lstStyle/>
+          <a:p>
+            <a:endParaRPr lang="en-US" sz="1100"/>
+          </a:p>
+        </p:txBody>
+      </p:sp>
+      <p:sp>
+        <p:nvSpPr>
+          <p:cNvPr id="33" name="Text 23">
+            <a:extLst>
+              <a:ext uri="{FF2B5EF4-FFF2-40B4-BE49-F238E27FC236}">
+                <a16:creationId xmlns:a16="http://schemas.microsoft.com/office/drawing/2014/main" id="{16945683-C0E3-8CA8-E873-71FD2C589403}"/>
+              </a:ext>
+            </a:extLst>
+          </p:cNvPr>
+          <p:cNvSpPr/>
+          <p:nvPr/>
+        </p:nvSpPr>
+        <p:spPr>
+          <a:xfrm>
+            <a:off x="7963330" y="839252"/>
+            <a:ext cx="1597682" cy="75563"/>
           </a:xfrm>
           <a:prstGeom prst="rect">
             <a:avLst/>
@@ -22368,7 +24782,7 @@
         </p:spPr>
         <p:txBody>
           <a:bodyPr wrap="square" lIns="0" tIns="0" rIns="0" bIns="0" rtlCol="0" anchor="t">
-            <a:normAutofit fontScale="77500" lnSpcReduction="20000"/>
+            <a:normAutofit fontScale="92500" lnSpcReduction="20000"/>
           </a:bodyPr>
           <a:lstStyle/>
           <a:p>
@@ -22379,30 +24793,450 @@
               <a:buNone/>
             </a:pPr>
             <a:r>
-              <a:rPr lang="en-US" sz="1750" b="1" dirty="0">
-                <a:solidFill>
-                  <a:srgbClr val="B65D3A"/>
+              <a:rPr lang="en-US" sz="700" b="1" dirty="0">
+                <a:solidFill>
+                  <a:srgbClr val="30383D"/>
+                </a:solidFill>
+                <a:latin typeface="Aptos" pitchFamily="34" charset="0"/>
+                <a:ea typeface="Aptos" pitchFamily="34" charset="-122"/>
+                <a:cs typeface="Aptos" pitchFamily="34" charset="-120"/>
+              </a:rPr>
+              <a:t>Transfer learning: pretrained CNN</a:t>
+            </a:r>
+            <a:endParaRPr lang="en-US" sz="700" dirty="0"/>
+          </a:p>
+        </p:txBody>
+      </p:sp>
+      <p:sp>
+        <p:nvSpPr>
+          <p:cNvPr id="34" name="Text 24">
+            <a:extLst>
+              <a:ext uri="{FF2B5EF4-FFF2-40B4-BE49-F238E27FC236}">
+                <a16:creationId xmlns:a16="http://schemas.microsoft.com/office/drawing/2014/main" id="{F5B6A1B0-9974-9455-2C1F-AC8FDA91CEEE}"/>
+              </a:ext>
+            </a:extLst>
+          </p:cNvPr>
+          <p:cNvSpPr/>
+          <p:nvPr/>
+        </p:nvSpPr>
+        <p:spPr>
+          <a:xfrm>
+            <a:off x="7984136" y="941012"/>
+            <a:ext cx="1597682" cy="58389"/>
+          </a:xfrm>
+          <a:prstGeom prst="rect">
+            <a:avLst/>
+          </a:prstGeom>
+          <a:noFill/>
+          <a:ln/>
+        </p:spPr>
+        <p:txBody>
+          <a:bodyPr wrap="square" lIns="0" tIns="0" rIns="0" bIns="0" rtlCol="0" anchor="t">
+            <a:normAutofit fontScale="92500" lnSpcReduction="20000"/>
+          </a:bodyPr>
+          <a:lstStyle/>
+          <a:p>
+            <a:pPr marL="0" indent="0" algn="ctr">
+              <a:lnSpc>
+                <a:spcPct val="90000"/>
+              </a:lnSpc>
+              <a:buNone/>
+            </a:pPr>
+            <a:r>
+              <a:rPr lang="en-US" sz="500" dirty="0">
+                <a:solidFill>
+                  <a:srgbClr val="6B7176"/>
+                </a:solidFill>
+                <a:latin typeface="Aptos" pitchFamily="34" charset="0"/>
+                <a:ea typeface="Aptos" pitchFamily="34" charset="-122"/>
+                <a:cs typeface="Aptos" pitchFamily="34" charset="-120"/>
+              </a:rPr>
+              <a:t>VGGish | YAMNet</a:t>
+            </a:r>
+            <a:endParaRPr lang="en-US" sz="500" dirty="0"/>
+          </a:p>
+        </p:txBody>
+      </p:sp>
+      <p:sp>
+        <p:nvSpPr>
+          <p:cNvPr id="35" name="Text 26">
+            <a:extLst>
+              <a:ext uri="{FF2B5EF4-FFF2-40B4-BE49-F238E27FC236}">
+                <a16:creationId xmlns:a16="http://schemas.microsoft.com/office/drawing/2014/main" id="{AE247940-4F28-A462-FB2C-F4B9C01AB7A7}"/>
+              </a:ext>
+            </a:extLst>
+          </p:cNvPr>
+          <p:cNvSpPr/>
+          <p:nvPr/>
+        </p:nvSpPr>
+        <p:spPr>
+          <a:xfrm>
+            <a:off x="9657605" y="848441"/>
+            <a:ext cx="1597682" cy="75563"/>
+          </a:xfrm>
+          <a:prstGeom prst="rect">
+            <a:avLst/>
+          </a:prstGeom>
+          <a:noFill/>
+          <a:ln/>
+        </p:spPr>
+        <p:txBody>
+          <a:bodyPr wrap="square" lIns="0" tIns="0" rIns="0" bIns="0" rtlCol="0" anchor="t">
+            <a:normAutofit fontScale="92500" lnSpcReduction="20000"/>
+          </a:bodyPr>
+          <a:lstStyle/>
+          <a:p>
+            <a:pPr marL="0" indent="0" algn="ctr">
+              <a:lnSpc>
+                <a:spcPct val="90000"/>
+              </a:lnSpc>
+              <a:buNone/>
+            </a:pPr>
+            <a:r>
+              <a:rPr lang="en-US" sz="700" b="1" dirty="0">
+                <a:solidFill>
+                  <a:srgbClr val="30383D"/>
+                </a:solidFill>
+                <a:latin typeface="Aptos" pitchFamily="34" charset="0"/>
+                <a:ea typeface="Aptos" pitchFamily="34" charset="-122"/>
+                <a:cs typeface="Aptos" pitchFamily="34" charset="-120"/>
+              </a:rPr>
+              <a:t>Transfer learning: pretrained transformers</a:t>
+            </a:r>
+            <a:endParaRPr lang="en-US" sz="700" dirty="0"/>
+          </a:p>
+        </p:txBody>
+      </p:sp>
+      <p:sp>
+        <p:nvSpPr>
+          <p:cNvPr id="36" name="Text 27">
+            <a:extLst>
+              <a:ext uri="{FF2B5EF4-FFF2-40B4-BE49-F238E27FC236}">
+                <a16:creationId xmlns:a16="http://schemas.microsoft.com/office/drawing/2014/main" id="{84C7863A-378B-51E0-045C-B3C1A3462236}"/>
+              </a:ext>
+            </a:extLst>
+          </p:cNvPr>
+          <p:cNvSpPr/>
+          <p:nvPr/>
+        </p:nvSpPr>
+        <p:spPr>
+          <a:xfrm>
+            <a:off x="9657605" y="944489"/>
+            <a:ext cx="1662902" cy="107931"/>
+          </a:xfrm>
+          <a:prstGeom prst="rect">
+            <a:avLst/>
+          </a:prstGeom>
+          <a:noFill/>
+          <a:ln/>
+        </p:spPr>
+        <p:txBody>
+          <a:bodyPr wrap="square" lIns="0" tIns="0" rIns="0" bIns="0" rtlCol="0" anchor="t">
+            <a:normAutofit/>
+          </a:bodyPr>
+          <a:lstStyle/>
+          <a:p>
+            <a:pPr marL="0" indent="0" algn="ctr">
+              <a:lnSpc>
+                <a:spcPct val="90000"/>
+              </a:lnSpc>
+              <a:buNone/>
+            </a:pPr>
+            <a:r>
+              <a:rPr lang="en-US" sz="500" dirty="0">
+                <a:solidFill>
+                  <a:srgbClr val="6B7176"/>
+                </a:solidFill>
+                <a:latin typeface="Aptos" pitchFamily="34" charset="0"/>
+                <a:ea typeface="Aptos" pitchFamily="34" charset="-122"/>
+                <a:cs typeface="Aptos" pitchFamily="34" charset="-120"/>
+              </a:rPr>
+              <a:t>AST | BEATs</a:t>
+            </a:r>
+            <a:endParaRPr lang="en-US" sz="500" dirty="0"/>
+          </a:p>
+        </p:txBody>
+      </p:sp>
+      <p:grpSp>
+        <p:nvGrpSpPr>
+          <p:cNvPr id="5" name="Group 4">
+            <a:extLst>
+              <a:ext uri="{FF2B5EF4-FFF2-40B4-BE49-F238E27FC236}">
+                <a16:creationId xmlns:a16="http://schemas.microsoft.com/office/drawing/2014/main" id="{B7A61841-D52D-B6ED-BE68-D3F4238C713B}"/>
+              </a:ext>
+            </a:extLst>
+          </p:cNvPr>
+          <p:cNvGrpSpPr/>
+          <p:nvPr/>
+        </p:nvGrpSpPr>
+        <p:grpSpPr>
+          <a:xfrm>
+            <a:off x="8993248" y="5363330"/>
+            <a:ext cx="1920240" cy="772294"/>
+            <a:chOff x="9328755" y="4704960"/>
+            <a:chExt cx="1920240" cy="772294"/>
+          </a:xfrm>
+        </p:grpSpPr>
+        <p:sp>
+          <p:nvSpPr>
+            <p:cNvPr id="6" name="Shape 32">
+              <a:extLst>
+                <a:ext uri="{FF2B5EF4-FFF2-40B4-BE49-F238E27FC236}">
+                  <a16:creationId xmlns:a16="http://schemas.microsoft.com/office/drawing/2014/main" id="{D34D283E-8F3F-58DC-D8B0-040877B49717}"/>
+                </a:ext>
+              </a:extLst>
+            </p:cNvPr>
+            <p:cNvSpPr/>
+            <p:nvPr/>
+          </p:nvSpPr>
+          <p:spPr>
+            <a:xfrm>
+              <a:off x="9328755" y="4704960"/>
+              <a:ext cx="1920240" cy="772294"/>
+            </a:xfrm>
+            <a:prstGeom prst="rect">
+              <a:avLst/>
+            </a:prstGeom>
+            <a:solidFill>
+              <a:srgbClr val="FFFFFF">
+                <a:alpha val="98000"/>
+              </a:srgbClr>
+            </a:solidFill>
+            <a:ln w="17780">
+              <a:solidFill>
+                <a:srgbClr val="426E9E"/>
+              </a:solidFill>
+              <a:prstDash val="solid"/>
+            </a:ln>
+          </p:spPr>
+          <p:txBody>
+            <a:bodyPr/>
+            <a:lstStyle/>
+            <a:p>
+              <a:endParaRPr lang="en-US"/>
+            </a:p>
+          </p:txBody>
+        </p:sp>
+        <p:sp>
+          <p:nvSpPr>
+            <p:cNvPr id="7" name="Text 33">
+              <a:extLst>
+                <a:ext uri="{FF2B5EF4-FFF2-40B4-BE49-F238E27FC236}">
+                  <a16:creationId xmlns:a16="http://schemas.microsoft.com/office/drawing/2014/main" id="{05EBC001-8BA1-01F3-9C9D-2CBA1E2632EA}"/>
+                </a:ext>
+              </a:extLst>
+            </p:cNvPr>
+            <p:cNvSpPr/>
+            <p:nvPr/>
+          </p:nvSpPr>
+          <p:spPr>
+            <a:xfrm>
+              <a:off x="9420195" y="4864606"/>
+              <a:ext cx="1737360" cy="329184"/>
+            </a:xfrm>
+            <a:prstGeom prst="rect">
+              <a:avLst/>
+            </a:prstGeom>
+            <a:noFill/>
+            <a:ln/>
+          </p:spPr>
+          <p:txBody>
+            <a:bodyPr wrap="square" lIns="0" tIns="0" rIns="0" bIns="0" rtlCol="0" anchor="t">
+              <a:normAutofit/>
+            </a:bodyPr>
+            <a:lstStyle/>
+            <a:p>
+              <a:pPr marL="0" indent="0" algn="ctr">
+                <a:lnSpc>
+                  <a:spcPct val="90000"/>
+                </a:lnSpc>
+                <a:buNone/>
+              </a:pPr>
+              <a:r>
+                <a:rPr lang="en-US" sz="2100" b="1" dirty="0">
+                  <a:solidFill>
+                    <a:srgbClr val="426E9E"/>
+                  </a:solidFill>
+                  <a:latin typeface="Aptos Display" pitchFamily="34" charset="0"/>
+                  <a:ea typeface="Aptos Display" pitchFamily="34" charset="-122"/>
+                  <a:cs typeface="Aptos Display" pitchFamily="34" charset="-120"/>
+                </a:rPr>
+                <a:t>67.9%</a:t>
+              </a:r>
+              <a:endParaRPr lang="en-US" sz="2100" dirty="0"/>
+            </a:p>
+          </p:txBody>
+        </p:sp>
+        <p:sp>
+          <p:nvSpPr>
+            <p:cNvPr id="8" name="Text 34">
+              <a:extLst>
+                <a:ext uri="{FF2B5EF4-FFF2-40B4-BE49-F238E27FC236}">
+                  <a16:creationId xmlns:a16="http://schemas.microsoft.com/office/drawing/2014/main" id="{D075690B-04D5-1C0A-A05B-39A0811D8E67}"/>
+                </a:ext>
+              </a:extLst>
+            </p:cNvPr>
+            <p:cNvSpPr/>
+            <p:nvPr/>
+          </p:nvSpPr>
+          <p:spPr>
+            <a:xfrm>
+              <a:off x="9438483" y="5257798"/>
+              <a:ext cx="1700784" cy="219456"/>
+            </a:xfrm>
+            <a:prstGeom prst="rect">
+              <a:avLst/>
+            </a:prstGeom>
+            <a:noFill/>
+            <a:ln/>
+          </p:spPr>
+          <p:txBody>
+            <a:bodyPr wrap="square" lIns="0" tIns="0" rIns="0" bIns="0" rtlCol="0" anchor="t">
+              <a:normAutofit/>
+            </a:bodyPr>
+            <a:lstStyle/>
+            <a:p>
+              <a:pPr marL="0" indent="0" algn="ctr">
+                <a:lnSpc>
+                  <a:spcPct val="90000"/>
+                </a:lnSpc>
+                <a:buNone/>
+              </a:pPr>
+              <a:r>
+                <a:rPr lang="en-US" sz="780" dirty="0">
+                  <a:solidFill>
+                    <a:srgbClr val="6B7176"/>
+                  </a:solidFill>
+                  <a:latin typeface="Aptos" pitchFamily="34" charset="0"/>
+                  <a:ea typeface="Aptos" pitchFamily="34" charset="-122"/>
+                  <a:cs typeface="Aptos" pitchFamily="34" charset="-120"/>
+                </a:rPr>
+                <a:t>best 5-fold clip-level accuracy</a:t>
+              </a:r>
+              <a:endParaRPr lang="en-US" sz="780" dirty="0"/>
+            </a:p>
+          </p:txBody>
+        </p:sp>
+      </p:grpSp>
+      <p:sp>
+        <p:nvSpPr>
+          <p:cNvPr id="13" name="Shape 48">
+            <a:extLst>
+              <a:ext uri="{FF2B5EF4-FFF2-40B4-BE49-F238E27FC236}">
+                <a16:creationId xmlns:a16="http://schemas.microsoft.com/office/drawing/2014/main" id="{F0ED0800-8F54-1D75-841E-B4777E72BD3D}"/>
+              </a:ext>
+            </a:extLst>
+          </p:cNvPr>
+          <p:cNvSpPr/>
+          <p:nvPr/>
+        </p:nvSpPr>
+        <p:spPr>
+          <a:xfrm>
+            <a:off x="6871840" y="5363330"/>
+            <a:ext cx="2011680" cy="772294"/>
+          </a:xfrm>
+          <a:prstGeom prst="rect">
+            <a:avLst/>
+          </a:prstGeom>
+          <a:solidFill>
+            <a:srgbClr val="FFFFFF">
+              <a:alpha val="98000"/>
+            </a:srgbClr>
+          </a:solidFill>
+          <a:ln w="17780">
+            <a:solidFill>
+              <a:schemeClr val="tx1">
+                <a:lumMod val="75000"/>
+                <a:lumOff val="25000"/>
+              </a:schemeClr>
+            </a:solidFill>
+            <a:prstDash val="solid"/>
+          </a:ln>
+        </p:spPr>
+        <p:txBody>
+          <a:bodyPr/>
+          <a:lstStyle/>
+          <a:p>
+            <a:endParaRPr lang="en-US"/>
+          </a:p>
+        </p:txBody>
+      </p:sp>
+      <p:sp>
+        <p:nvSpPr>
+          <p:cNvPr id="37" name="Text 49">
+            <a:extLst>
+              <a:ext uri="{FF2B5EF4-FFF2-40B4-BE49-F238E27FC236}">
+                <a16:creationId xmlns:a16="http://schemas.microsoft.com/office/drawing/2014/main" id="{3CB76337-AD7A-110B-1F98-C1EF005752F5}"/>
+              </a:ext>
+            </a:extLst>
+          </p:cNvPr>
+          <p:cNvSpPr/>
+          <p:nvPr/>
+        </p:nvSpPr>
+        <p:spPr>
+          <a:xfrm>
+            <a:off x="6963280" y="5500490"/>
+            <a:ext cx="1828800" cy="329184"/>
+          </a:xfrm>
+          <a:prstGeom prst="rect">
+            <a:avLst/>
+          </a:prstGeom>
+          <a:noFill/>
+          <a:ln/>
+        </p:spPr>
+        <p:txBody>
+          <a:bodyPr wrap="square" lIns="0" tIns="0" rIns="0" bIns="0" rtlCol="0" anchor="t">
+            <a:normAutofit/>
+          </a:bodyPr>
+          <a:lstStyle/>
+          <a:p>
+            <a:pPr marL="0" indent="0" algn="ctr">
+              <a:lnSpc>
+                <a:spcPct val="90000"/>
+              </a:lnSpc>
+              <a:buNone/>
+            </a:pPr>
+            <a:r>
+              <a:rPr lang="en-US" sz="2100" b="1" dirty="0">
+                <a:solidFill>
+                  <a:schemeClr val="tx1">
+                    <a:lumMod val="75000"/>
+                    <a:lumOff val="25000"/>
+                  </a:schemeClr>
                 </a:solidFill>
                 <a:latin typeface="Aptos Display" pitchFamily="34" charset="0"/>
                 <a:ea typeface="Aptos Display" pitchFamily="34" charset="-122"/>
                 <a:cs typeface="Aptos Display" pitchFamily="34" charset="-120"/>
               </a:rPr>
-              <a:t>+3.4 pts best observed</a:t>
-            </a:r>
-            <a:endParaRPr lang="en-US" sz="1750" dirty="0"/>
-          </a:p>
-        </p:txBody>
-      </p:sp>
-      <p:sp>
-        <p:nvSpPr>
-          <p:cNvPr id="20" name="Text 18"/>
-          <p:cNvSpPr/>
-          <p:nvPr/>
-        </p:nvSpPr>
-        <p:spPr>
-          <a:xfrm>
-            <a:off x="713232" y="2321628"/>
-            <a:ext cx="1645920" cy="164592"/>
+              <a:t>64.5%</a:t>
+            </a:r>
+            <a:endParaRPr lang="en-US" sz="2100" dirty="0">
+              <a:solidFill>
+                <a:schemeClr val="tx1">
+                  <a:lumMod val="75000"/>
+                  <a:lumOff val="25000"/>
+                </a:schemeClr>
+              </a:solidFill>
+            </a:endParaRPr>
+          </a:p>
+        </p:txBody>
+      </p:sp>
+      <p:sp>
+        <p:nvSpPr>
+          <p:cNvPr id="38" name="Text 50">
+            <a:extLst>
+              <a:ext uri="{FF2B5EF4-FFF2-40B4-BE49-F238E27FC236}">
+                <a16:creationId xmlns:a16="http://schemas.microsoft.com/office/drawing/2014/main" id="{47B0723B-AE1A-E10C-ED1C-FAB1AFE23E00}"/>
+              </a:ext>
+            </a:extLst>
+          </p:cNvPr>
+          <p:cNvSpPr/>
+          <p:nvPr/>
+        </p:nvSpPr>
+        <p:spPr>
+          <a:xfrm>
+            <a:off x="6981568" y="5893682"/>
+            <a:ext cx="1792224" cy="219456"/>
           </a:xfrm>
           <a:prstGeom prst="rect">
             <a:avLst/>
@@ -22416,93 +25250,98 @@
           </a:bodyPr>
           <a:lstStyle/>
           <a:p>
-            <a:pPr>
+            <a:pPr marL="0" indent="0" algn="ctr">
               <a:lnSpc>
                 <a:spcPct val="90000"/>
               </a:lnSpc>
+              <a:buNone/>
             </a:pPr>
             <a:r>
-              <a:rPr lang="en-US" sz="1000" b="1" dirty="0">
-                <a:solidFill>
-                  <a:srgbClr val="426E9E"/>
+              <a:rPr lang="en-US" sz="780" dirty="0">
+                <a:solidFill>
+                  <a:srgbClr val="6B7176"/>
                 </a:solidFill>
                 <a:latin typeface="Aptos" pitchFamily="34" charset="0"/>
-              </a:rPr>
-              <a:t>Variation matrix</a:t>
-            </a:r>
+                <a:ea typeface="Aptos" pitchFamily="34" charset="-122"/>
+                <a:cs typeface="Aptos" pitchFamily="34" charset="-120"/>
+              </a:rPr>
+              <a:t>Piczak published LP clip-level reference</a:t>
+            </a:r>
+            <a:endParaRPr lang="en-US" sz="780" dirty="0"/>
           </a:p>
         </p:txBody>
       </p:sp>
       <p:graphicFrame>
         <p:nvGraphicFramePr>
-          <p:cNvPr id="21" name="Table 0"/>
+          <p:cNvPr id="39" name="Table 0">
+            <a:extLst>
+              <a:ext uri="{FF2B5EF4-FFF2-40B4-BE49-F238E27FC236}">
+                <a16:creationId xmlns:a16="http://schemas.microsoft.com/office/drawing/2014/main" id="{101D0C41-7C7A-4370-08A2-E926EFE3F6F4}"/>
+              </a:ext>
+            </a:extLst>
+          </p:cNvPr>
           <p:cNvGraphicFramePr>
             <a:graphicFrameLocks noGrp="1"/>
           </p:cNvGraphicFramePr>
           <p:nvPr>
             <p:extLst>
               <p:ext uri="{D42A27DB-BD31-4B8C-83A1-F6EECF244321}">
-                <p14:modId xmlns:p14="http://schemas.microsoft.com/office/powerpoint/2010/main" val="279914698"/>
+                <p14:modId xmlns:p14="http://schemas.microsoft.com/office/powerpoint/2010/main" val="3771119343"/>
               </p:ext>
             </p:extLst>
           </p:nvPr>
         </p:nvGraphicFramePr>
         <p:xfrm>
-          <a:off x="713232" y="2595948"/>
-          <a:ext cx="5257800" cy="1600200"/>
+          <a:off x="694942" y="2655678"/>
+          <a:ext cx="5152110" cy="1386496"/>
         </p:xfrm>
         <a:graphic>
           <a:graphicData uri="http://schemas.openxmlformats.org/drawingml/2006/table">
             <a:tbl>
               <a:tblPr/>
               <a:tblGrid>
-                <a:gridCol w="1325880">
+                <a:gridCol w="985577">
                   <a:extLst>
                     <a:ext uri="{9D8B030D-6E8A-4147-A177-3AD203B41FA5}">
                       <a16:colId xmlns:a16="http://schemas.microsoft.com/office/drawing/2014/main" val="20000"/>
                     </a:ext>
                   </a:extLst>
                 </a:gridCol>
-                <a:gridCol w="2240280">
+                <a:gridCol w="2693773">
                   <a:extLst>
                     <a:ext uri="{9D8B030D-6E8A-4147-A177-3AD203B41FA5}">
                       <a16:colId xmlns:a16="http://schemas.microsoft.com/office/drawing/2014/main" val="20001"/>
                     </a:ext>
                   </a:extLst>
                 </a:gridCol>
-                <a:gridCol w="1691640">
+                <a:gridCol w="1472760">
                   <a:extLst>
                     <a:ext uri="{9D8B030D-6E8A-4147-A177-3AD203B41FA5}">
-                      <a16:colId xmlns:a16="http://schemas.microsoft.com/office/drawing/2014/main" val="20002"/>
+                      <a16:colId xmlns:a16="http://schemas.microsoft.com/office/drawing/2014/main" val="35711274"/>
                     </a:ext>
                   </a:extLst>
                 </a:gridCol>
               </a:tblGrid>
-              <a:tr h="320040">
+              <a:tr h="145187">
                 <a:tc>
                   <a:txBody>
                     <a:bodyPr/>
                     <a:lstStyle/>
                     <a:p>
-                      <a:pPr marL="0" indent="0">
+                      <a:pPr marL="0" indent="0" algn="l" defTabSz="914400" rtl="0" eaLnBrk="1" latinLnBrk="0" hangingPunct="1">
                         <a:buNone/>
                       </a:pPr>
                       <a:r>
-                        <a:rPr lang="en-US" sz="715" b="1" dirty="0">
+                        <a:rPr lang="en-US" sz="1030" b="1" kern="1200" dirty="0">
                           <a:solidFill>
                             <a:srgbClr val="FFFFFF"/>
                           </a:solidFill>
-                          <a:latin typeface="Aptos" pitchFamily="34" charset="0"/>
-                          <a:ea typeface="Aptos" pitchFamily="34" charset="-122"/>
-                          <a:cs typeface="Aptos" pitchFamily="34" charset="-120"/>
+                          <a:latin typeface="+mn-lt"/>
+                          <a:ea typeface="+mn-ea"/>
+                          <a:cs typeface="+mn-cs"/>
                         </a:rPr>
                         <a:t>Dimension</a:t>
                       </a:r>
-                      <a:endParaRPr lang="en-US" sz="715" dirty="0">
-                        <a:latin typeface="Aptos" charset="0"/>
-                        <a:ea typeface="Aptos" charset="0"/>
-                        <a:cs typeface="Aptos" charset="0"/>
-                      </a:endParaRPr>
                     </a:p>
                   </a:txBody>
                   <a:tcPr marL="50292" marR="50292" marT="50292" marB="50292">
@@ -22552,25 +25391,20 @@
                     <a:bodyPr/>
                     <a:lstStyle/>
                     <a:p>
-                      <a:pPr marL="0" indent="0">
+                      <a:pPr marL="0" indent="0" algn="l" defTabSz="914400" rtl="0" eaLnBrk="1" latinLnBrk="0" hangingPunct="1">
                         <a:buNone/>
                       </a:pPr>
                       <a:r>
-                        <a:rPr lang="en-US" sz="715" b="1" dirty="0">
+                        <a:rPr lang="en-US" sz="1030" b="1" kern="1200" dirty="0">
                           <a:solidFill>
                             <a:srgbClr val="FFFFFF"/>
                           </a:solidFill>
-                          <a:latin typeface="Aptos" pitchFamily="34" charset="0"/>
-                          <a:ea typeface="Aptos" pitchFamily="34" charset="-122"/>
-                          <a:cs typeface="Aptos" pitchFamily="34" charset="-120"/>
+                          <a:latin typeface="+mn-lt"/>
+                          <a:ea typeface="+mn-ea"/>
+                          <a:cs typeface="+mn-cs"/>
                         </a:rPr>
                         <a:t>Conditions</a:t>
                       </a:r>
-                      <a:endParaRPr lang="en-US" sz="715" dirty="0">
-                        <a:latin typeface="Aptos" charset="0"/>
-                        <a:ea typeface="Aptos" charset="0"/>
-                        <a:cs typeface="Aptos" charset="0"/>
-                      </a:endParaRPr>
                     </a:p>
                   </a:txBody>
                   <a:tcPr marL="50292" marR="50292" marT="50292" marB="50292">
@@ -22620,25 +25454,20 @@
                     <a:bodyPr/>
                     <a:lstStyle/>
                     <a:p>
-                      <a:pPr marL="0" indent="0">
+                      <a:pPr marL="0" indent="0" algn="l" defTabSz="914400" rtl="0" eaLnBrk="1" latinLnBrk="0" hangingPunct="1">
                         <a:buNone/>
                       </a:pPr>
                       <a:r>
-                        <a:rPr lang="en-US" sz="715" b="1" dirty="0">
+                        <a:rPr lang="en-US" sz="1030" b="1" kern="1200" dirty="0">
                           <a:solidFill>
                             <a:srgbClr val="FFFFFF"/>
                           </a:solidFill>
-                          <a:latin typeface="Aptos" pitchFamily="34" charset="0"/>
-                          <a:ea typeface="Aptos" pitchFamily="34" charset="-122"/>
-                          <a:cs typeface="Aptos" pitchFamily="34" charset="-120"/>
+                          <a:latin typeface="+mn-lt"/>
+                          <a:ea typeface="+mn-ea"/>
+                          <a:cs typeface="+mn-cs"/>
                         </a:rPr>
                         <a:t>Best observed</a:t>
                       </a:r>
-                      <a:endParaRPr lang="en-US" sz="715" dirty="0">
-                        <a:latin typeface="Aptos" charset="0"/>
-                        <a:ea typeface="Aptos" charset="0"/>
-                        <a:cs typeface="Aptos" charset="0"/>
-                      </a:endParaRPr>
                     </a:p>
                   </a:txBody>
                   <a:tcPr marL="50292" marR="50292" marT="50292" marB="50292">
@@ -22689,7 +25518,7 @@
                   </a:ext>
                 </a:extLst>
               </a:tr>
-              <a:tr h="320040">
+              <a:tr h="282235">
                 <a:tc>
                   <a:txBody>
                     <a:bodyPr/>
@@ -22753,6 +25582,9 @@
                       <a:headEnd type="none" w="med" len="med"/>
                       <a:tailEnd type="none" w="med" len="med"/>
                     </a:lnB>
+                    <a:solidFill>
+                      <a:srgbClr val="EEF2F3"/>
+                    </a:solidFill>
                   </a:tcPr>
                 </a:tc>
                 <a:tc>
@@ -22818,6 +25650,9 @@
                       <a:headEnd type="none" w="med" len="med"/>
                       <a:tailEnd type="none" w="med" len="med"/>
                     </a:lnB>
+                    <a:solidFill>
+                      <a:srgbClr val="EEF2F3"/>
+                    </a:solidFill>
                   </a:tcPr>
                 </a:tc>
                 <a:tc>
@@ -22883,6 +25718,9 @@
                       <a:headEnd type="none" w="med" len="med"/>
                       <a:tailEnd type="none" w="med" len="med"/>
                     </a:lnB>
+                    <a:solidFill>
+                      <a:srgbClr val="EEF2F3"/>
+                    </a:solidFill>
                   </a:tcPr>
                 </a:tc>
                 <a:extLst>
@@ -22891,7 +25729,7 @@
                   </a:ext>
                 </a:extLst>
               </a:tr>
-              <a:tr h="320040">
+              <a:tr h="282235">
                 <a:tc>
                   <a:txBody>
                     <a:bodyPr/>
@@ -22955,6 +25793,9 @@
                       <a:headEnd type="none" w="med" len="med"/>
                       <a:tailEnd type="none" w="med" len="med"/>
                     </a:lnB>
+                    <a:solidFill>
+                      <a:srgbClr val="F8FAF8"/>
+                    </a:solidFill>
                   </a:tcPr>
                 </a:tc>
                 <a:tc>
@@ -23020,6 +25861,9 @@
                       <a:headEnd type="none" w="med" len="med"/>
                       <a:tailEnd type="none" w="med" len="med"/>
                     </a:lnB>
+                    <a:solidFill>
+                      <a:srgbClr val="F8FAF8"/>
+                    </a:solidFill>
                   </a:tcPr>
                 </a:tc>
                 <a:tc>
@@ -23085,6 +25929,9 @@
                       <a:headEnd type="none" w="med" len="med"/>
                       <a:tailEnd type="none" w="med" len="med"/>
                     </a:lnB>
+                    <a:solidFill>
+                      <a:srgbClr val="F8FAF8"/>
+                    </a:solidFill>
                   </a:tcPr>
                 </a:tc>
                 <a:extLst>
@@ -23093,7 +25940,7 @@
                   </a:ext>
                 </a:extLst>
               </a:tr>
-              <a:tr h="320040">
+              <a:tr h="282235">
                 <a:tc>
                   <a:txBody>
                     <a:bodyPr/>
@@ -23157,6 +26004,9 @@
                       <a:headEnd type="none" w="med" len="med"/>
                       <a:tailEnd type="none" w="med" len="med"/>
                     </a:lnB>
+                    <a:solidFill>
+                      <a:srgbClr val="EEF2F3"/>
+                    </a:solidFill>
                   </a:tcPr>
                 </a:tc>
                 <a:tc>
@@ -23222,6 +26072,9 @@
                       <a:headEnd type="none" w="med" len="med"/>
                       <a:tailEnd type="none" w="med" len="med"/>
                     </a:lnB>
+                    <a:solidFill>
+                      <a:srgbClr val="EEF2F3"/>
+                    </a:solidFill>
                   </a:tcPr>
                 </a:tc>
                 <a:tc>
@@ -23287,6 +26140,9 @@
                       <a:headEnd type="none" w="med" len="med"/>
                       <a:tailEnd type="none" w="med" len="med"/>
                     </a:lnB>
+                    <a:solidFill>
+                      <a:srgbClr val="EEF2F3"/>
+                    </a:solidFill>
                   </a:tcPr>
                 </a:tc>
                 <a:extLst>
@@ -23295,7 +26151,7 @@
                   </a:ext>
                 </a:extLst>
               </a:tr>
-              <a:tr h="320040">
+              <a:tr h="282235">
                 <a:tc>
                   <a:txBody>
                     <a:bodyPr/>
@@ -23359,6 +26215,9 @@
                       <a:headEnd type="none" w="med" len="med"/>
                       <a:tailEnd type="none" w="med" len="med"/>
                     </a:lnB>
+                    <a:solidFill>
+                      <a:srgbClr val="F8FAF8"/>
+                    </a:solidFill>
                   </a:tcPr>
                 </a:tc>
                 <a:tc>
@@ -23424,6 +26283,9 @@
                       <a:headEnd type="none" w="med" len="med"/>
                       <a:tailEnd type="none" w="med" len="med"/>
                     </a:lnB>
+                    <a:solidFill>
+                      <a:srgbClr val="F8FAF8"/>
+                    </a:solidFill>
                   </a:tcPr>
                 </a:tc>
                 <a:tc>
@@ -23489,6 +26351,9 @@
                       <a:headEnd type="none" w="med" len="med"/>
                       <a:tailEnd type="none" w="med" len="med"/>
                     </a:lnB>
+                    <a:solidFill>
+                      <a:srgbClr val="F8FAF8"/>
+                    </a:solidFill>
                   </a:tcPr>
                 </a:tc>
                 <a:extLst>
@@ -23501,778 +26366,6 @@
           </a:graphicData>
         </a:graphic>
       </p:graphicFrame>
-      <p:sp>
-        <p:nvSpPr>
-          <p:cNvPr id="22" name="Text 19"/>
-          <p:cNvSpPr/>
-          <p:nvPr/>
-        </p:nvSpPr>
-        <p:spPr>
-          <a:xfrm>
-            <a:off x="713232" y="4606054"/>
-            <a:ext cx="1005840" cy="146304"/>
-          </a:xfrm>
-          <a:prstGeom prst="rect">
-            <a:avLst/>
-          </a:prstGeom>
-          <a:noFill/>
-          <a:ln/>
-        </p:spPr>
-        <p:txBody>
-          <a:bodyPr wrap="square" lIns="0" tIns="0" rIns="0" bIns="0" rtlCol="0" anchor="t">
-            <a:normAutofit/>
-          </a:bodyPr>
-          <a:lstStyle/>
-          <a:p>
-            <a:pPr>
-              <a:lnSpc>
-                <a:spcPct val="90000"/>
-              </a:lnSpc>
-            </a:pPr>
-            <a:r>
-              <a:rPr lang="en-US" sz="1000" b="1" dirty="0">
-                <a:solidFill>
-                  <a:srgbClr val="426E9E"/>
-                </a:solidFill>
-                <a:latin typeface="Aptos" pitchFamily="34" charset="0"/>
-              </a:rPr>
-              <a:t>Result</a:t>
-            </a:r>
-          </a:p>
-        </p:txBody>
-      </p:sp>
-      <p:sp>
-        <p:nvSpPr>
-          <p:cNvPr id="23" name="Text 20"/>
-          <p:cNvSpPr/>
-          <p:nvPr/>
-        </p:nvSpPr>
-        <p:spPr>
-          <a:xfrm>
-            <a:off x="713232" y="4831656"/>
-            <a:ext cx="4995673" cy="877824"/>
-          </a:xfrm>
-          <a:prstGeom prst="rect">
-            <a:avLst/>
-          </a:prstGeom>
-          <a:noFill/>
-          <a:ln/>
-        </p:spPr>
-        <p:txBody>
-          <a:bodyPr wrap="square" lIns="0" tIns="0" rIns="0" bIns="0" rtlCol="0" anchor="t">
-            <a:noAutofit/>
-          </a:bodyPr>
-          <a:lstStyle/>
-          <a:p>
-            <a:pPr marL="0" indent="0" algn="l">
-              <a:lnSpc>
-                <a:spcPct val="90000"/>
-              </a:lnSpc>
-              <a:buNone/>
-            </a:pPr>
-            <a:r>
-              <a:rPr lang="en-US" sz="1200" dirty="0">
-                <a:solidFill>
-                  <a:srgbClr val="1F2528"/>
-                </a:solidFill>
-                <a:latin typeface="Aptos" pitchFamily="34" charset="0"/>
-                <a:ea typeface="Aptos" pitchFamily="34" charset="-122"/>
-                <a:cs typeface="Aptos" pitchFamily="34" charset="-120"/>
-              </a:rPr>
-              <a:t>Best observed was 67.9% with Xavier initialization, versus Piczak's 64.5% LP reference. That is measurable, but still the same from-scratch CNN performance band.</a:t>
-            </a:r>
-          </a:p>
-          <a:p>
-            <a:pPr marL="0" indent="0" algn="l">
-              <a:lnSpc>
-                <a:spcPct val="90000"/>
-              </a:lnSpc>
-              <a:buNone/>
-            </a:pPr>
-            <a:endParaRPr lang="en-US" sz="1200" dirty="0">
-              <a:solidFill>
-                <a:srgbClr val="1F2528"/>
-              </a:solidFill>
-              <a:latin typeface="Aptos" pitchFamily="34" charset="0"/>
-            </a:endParaRPr>
-          </a:p>
-          <a:p>
-            <a:pPr>
-              <a:lnSpc>
-                <a:spcPct val="90000"/>
-              </a:lnSpc>
-            </a:pPr>
-            <a:r>
-              <a:rPr lang="en-US" sz="1200" dirty="0">
-                <a:solidFill>
-                  <a:srgbClr val="1F2528"/>
-                </a:solidFill>
-                <a:latin typeface="Aptos" pitchFamily="34" charset="0"/>
-                <a:ea typeface="Aptos" pitchFamily="34" charset="-122"/>
-                <a:cs typeface="Aptos" pitchFamily="34" charset="-120"/>
-              </a:rPr>
-              <a:t>Hyperparameter tuning helped but did not create the step-change that later came from pretrained representations.</a:t>
-            </a:r>
-            <a:endParaRPr lang="en-US" sz="1200" dirty="0"/>
-          </a:p>
-          <a:p>
-            <a:pPr marL="0" indent="0" algn="l">
-              <a:lnSpc>
-                <a:spcPct val="90000"/>
-              </a:lnSpc>
-              <a:buNone/>
-            </a:pPr>
-            <a:endParaRPr lang="en-US" sz="1200" dirty="0"/>
-          </a:p>
-        </p:txBody>
-      </p:sp>
-      <p:sp>
-        <p:nvSpPr>
-          <p:cNvPr id="26" name="Text 23"/>
-          <p:cNvSpPr/>
-          <p:nvPr/>
-        </p:nvSpPr>
-        <p:spPr>
-          <a:xfrm>
-            <a:off x="6446520" y="5559552"/>
-            <a:ext cx="4434840" cy="384048"/>
-          </a:xfrm>
-          <a:prstGeom prst="rect">
-            <a:avLst/>
-          </a:prstGeom>
-          <a:noFill/>
-          <a:ln/>
-        </p:spPr>
-        <p:txBody>
-          <a:bodyPr wrap="square" lIns="0" tIns="0" rIns="0" bIns="0" rtlCol="0" anchor="t">
-            <a:normAutofit/>
-          </a:bodyPr>
-          <a:lstStyle/>
-          <a:p>
-            <a:pPr marL="0" indent="0" algn="l">
-              <a:lnSpc>
-                <a:spcPct val="90000"/>
-              </a:lnSpc>
-              <a:buNone/>
-            </a:pPr>
-            <a:endParaRPr lang="en-US" sz="1040" dirty="0"/>
-          </a:p>
-        </p:txBody>
-      </p:sp>
-      <p:pic>
-        <p:nvPicPr>
-          <p:cNvPr id="27" name="Image 0" descr="/Users/andrew/Library/CloudStorage/OneDrive-CornellUniversity/Courses/SYSEN5888/ Project/cnn_variations_summary_curve.png"/>
-          <p:cNvPicPr>
-            <a:picLocks noChangeAspect="1"/>
-          </p:cNvPicPr>
-          <p:nvPr/>
-        </p:nvPicPr>
-        <p:blipFill>
-          <a:blip r:embed="rId3"/>
-          <a:srcRect/>
-          <a:stretch/>
-        </p:blipFill>
-        <p:spPr>
-          <a:xfrm>
-            <a:off x="6446520" y="1307592"/>
-            <a:ext cx="5065776" cy="3858768"/>
-          </a:xfrm>
-          <a:prstGeom prst="rect">
-            <a:avLst/>
-          </a:prstGeom>
-        </p:spPr>
-      </p:pic>
-      <p:sp>
-        <p:nvSpPr>
-          <p:cNvPr id="28" name="Text 24"/>
-          <p:cNvSpPr/>
-          <p:nvPr/>
-        </p:nvSpPr>
-        <p:spPr>
-          <a:xfrm>
-            <a:off x="11082528" y="6473952"/>
-            <a:ext cx="384048" cy="128016"/>
-          </a:xfrm>
-          <a:prstGeom prst="rect">
-            <a:avLst/>
-          </a:prstGeom>
-          <a:noFill/>
-          <a:ln/>
-        </p:spPr>
-        <p:txBody>
-          <a:bodyPr wrap="square" lIns="0" tIns="0" rIns="0" bIns="0" rtlCol="0" anchor="t">
-            <a:normAutofit/>
-          </a:bodyPr>
-          <a:lstStyle/>
-          <a:p>
-            <a:pPr marL="0" indent="0" algn="r">
-              <a:lnSpc>
-                <a:spcPct val="90000"/>
-              </a:lnSpc>
-              <a:buNone/>
-            </a:pPr>
-            <a:r>
-              <a:rPr lang="en-US" sz="750" dirty="0">
-                <a:solidFill>
-                  <a:srgbClr val="6B7176"/>
-                </a:solidFill>
-                <a:latin typeface="Aptos" pitchFamily="34" charset="0"/>
-                <a:ea typeface="Aptos" pitchFamily="34" charset="-122"/>
-                <a:cs typeface="Aptos" pitchFamily="34" charset="-120"/>
-              </a:rPr>
-              <a:t>06</a:t>
-            </a:r>
-            <a:endParaRPr lang="en-US" sz="750" dirty="0"/>
-          </a:p>
-        </p:txBody>
-      </p:sp>
-      <p:sp>
-        <p:nvSpPr>
-          <p:cNvPr id="29" name="Text 25"/>
-          <p:cNvSpPr/>
-          <p:nvPr/>
-        </p:nvSpPr>
-        <p:spPr>
-          <a:xfrm>
-            <a:off x="594360" y="6446520"/>
-            <a:ext cx="1828800" cy="128016"/>
-          </a:xfrm>
-          <a:prstGeom prst="rect">
-            <a:avLst/>
-          </a:prstGeom>
-          <a:noFill/>
-          <a:ln/>
-        </p:spPr>
-        <p:txBody>
-          <a:bodyPr wrap="square" lIns="0" tIns="0" rIns="0" bIns="0" rtlCol="0" anchor="t">
-            <a:normAutofit/>
-          </a:bodyPr>
-          <a:lstStyle/>
-          <a:p>
-            <a:pPr marL="0" indent="0" algn="l">
-              <a:lnSpc>
-                <a:spcPct val="90000"/>
-              </a:lnSpc>
-              <a:buNone/>
-            </a:pPr>
-            <a:r>
-              <a:rPr lang="en-US" sz="800" dirty="0">
-                <a:solidFill>
-                  <a:srgbClr val="6B7176"/>
-                </a:solidFill>
-                <a:latin typeface="Aptos" pitchFamily="34" charset="0"/>
-                <a:ea typeface="Aptos" pitchFamily="34" charset="-122"/>
-                <a:cs typeface="Aptos" pitchFamily="34" charset="-120"/>
-              </a:rPr>
-              <a:t>Era 1</a:t>
-            </a:r>
-            <a:endParaRPr lang="en-US" sz="800" dirty="0"/>
-          </a:p>
-        </p:txBody>
-      </p:sp>
-      <p:sp>
-        <p:nvSpPr>
-          <p:cNvPr id="19" name="Shape 25">
-            <a:extLst>
-              <a:ext uri="{FF2B5EF4-FFF2-40B4-BE49-F238E27FC236}">
-                <a16:creationId xmlns:a16="http://schemas.microsoft.com/office/drawing/2014/main" id="{6B621938-6C9B-F684-C6E1-1EF4408FAEE1}"/>
-              </a:ext>
-            </a:extLst>
-          </p:cNvPr>
-          <p:cNvSpPr/>
-          <p:nvPr/>
-        </p:nvSpPr>
-        <p:spPr>
-          <a:xfrm>
-            <a:off x="9550658" y="750101"/>
-            <a:ext cx="1755200" cy="295381"/>
-          </a:xfrm>
-          <a:prstGeom prst="chevron">
-            <a:avLst/>
-          </a:prstGeom>
-          <a:solidFill>
-            <a:srgbClr val="D7DDE0">
-              <a:alpha val="90000"/>
-            </a:srgbClr>
-          </a:solidFill>
-          <a:ln w="12700">
-            <a:solidFill>
-              <a:srgbClr val="F7F5EF"/>
-            </a:solidFill>
-            <a:prstDash val="solid"/>
-          </a:ln>
-        </p:spPr>
-        <p:txBody>
-          <a:bodyPr/>
-          <a:lstStyle/>
-          <a:p>
-            <a:endParaRPr lang="en-US" sz="1100"/>
-          </a:p>
-        </p:txBody>
-      </p:sp>
-      <p:pic>
-        <p:nvPicPr>
-          <p:cNvPr id="24" name="Picture 2" descr="Cornell University Logo, symbol, meaning, history, PNG, brand">
-            <a:extLst>
-              <a:ext uri="{FF2B5EF4-FFF2-40B4-BE49-F238E27FC236}">
-                <a16:creationId xmlns:a16="http://schemas.microsoft.com/office/drawing/2014/main" id="{C5A74DF1-464E-5E32-8310-9B3BBC7FD905}"/>
-              </a:ext>
-            </a:extLst>
-          </p:cNvPr>
-          <p:cNvPicPr>
-            <a:picLocks noChangeAspect="1" noChangeArrowheads="1"/>
-          </p:cNvPicPr>
-          <p:nvPr/>
-        </p:nvPicPr>
-        <p:blipFill rotWithShape="1">
-          <a:blip r:embed="rId4">
-            <a:extLst>
-              <a:ext uri="{28A0092B-C50C-407E-A947-70E740481C1C}">
-                <a14:useLocalDpi xmlns:a14="http://schemas.microsoft.com/office/drawing/2010/main" val="0"/>
-              </a:ext>
-            </a:extLst>
-          </a:blip>
-          <a:srcRect l="15934" r="15589"/>
-          <a:stretch/>
-        </p:blipFill>
-        <p:spPr bwMode="auto">
-          <a:xfrm>
-            <a:off x="11320507" y="147128"/>
-            <a:ext cx="863884" cy="709633"/>
-          </a:xfrm>
-          <a:prstGeom prst="rect">
-            <a:avLst/>
-          </a:prstGeom>
-          <a:noFill/>
-          <a:extLst>
-            <a:ext uri="{909E8E84-426E-40DD-AFC4-6F175D3DCCD1}">
-              <a14:hiddenFill xmlns:a14="http://schemas.microsoft.com/office/drawing/2010/main">
-                <a:solidFill>
-                  <a:srgbClr val="FFFFFF"/>
-                </a:solidFill>
-              </a14:hiddenFill>
-            </a:ext>
-          </a:extLst>
-        </p:spPr>
-      </p:pic>
-      <p:sp>
-        <p:nvSpPr>
-          <p:cNvPr id="25" name="Shape 19">
-            <a:extLst>
-              <a:ext uri="{FF2B5EF4-FFF2-40B4-BE49-F238E27FC236}">
-                <a16:creationId xmlns:a16="http://schemas.microsoft.com/office/drawing/2014/main" id="{A19E6E09-7436-0334-603F-AE64A504872B}"/>
-              </a:ext>
-            </a:extLst>
-          </p:cNvPr>
-          <p:cNvSpPr/>
-          <p:nvPr/>
-        </p:nvSpPr>
-        <p:spPr>
-          <a:xfrm>
-            <a:off x="6237447" y="751408"/>
-            <a:ext cx="1809206" cy="295381"/>
-          </a:xfrm>
-          <a:prstGeom prst="chevron">
-            <a:avLst/>
-          </a:prstGeom>
-          <a:solidFill>
-            <a:srgbClr val="426E9E"/>
-          </a:solidFill>
-          <a:ln w="12700">
-            <a:solidFill>
-              <a:srgbClr val="F7F5EF"/>
-            </a:solidFill>
-            <a:prstDash val="solid"/>
-          </a:ln>
-        </p:spPr>
-        <p:txBody>
-          <a:bodyPr/>
-          <a:lstStyle/>
-          <a:p>
-            <a:endParaRPr lang="en-US" sz="1100" dirty="0"/>
-          </a:p>
-        </p:txBody>
-      </p:sp>
-      <p:sp>
-        <p:nvSpPr>
-          <p:cNvPr id="30" name="Text 20">
-            <a:extLst>
-              <a:ext uri="{FF2B5EF4-FFF2-40B4-BE49-F238E27FC236}">
-                <a16:creationId xmlns:a16="http://schemas.microsoft.com/office/drawing/2014/main" id="{8F3484FD-8FEB-AA36-CF7E-00275362D9A7}"/>
-              </a:ext>
-            </a:extLst>
-          </p:cNvPr>
-          <p:cNvSpPr/>
-          <p:nvPr/>
-        </p:nvSpPr>
-        <p:spPr>
-          <a:xfrm>
-            <a:off x="6287692" y="833886"/>
-            <a:ext cx="1597682" cy="75563"/>
-          </a:xfrm>
-          <a:prstGeom prst="rect">
-            <a:avLst/>
-          </a:prstGeom>
-          <a:noFill/>
-          <a:ln/>
-        </p:spPr>
-        <p:txBody>
-          <a:bodyPr wrap="square" lIns="0" tIns="0" rIns="0" bIns="0" rtlCol="0" anchor="t">
-            <a:normAutofit fontScale="92500" lnSpcReduction="20000"/>
-          </a:bodyPr>
-          <a:lstStyle/>
-          <a:p>
-            <a:pPr marL="0" indent="0" algn="ctr">
-              <a:lnSpc>
-                <a:spcPct val="90000"/>
-              </a:lnSpc>
-              <a:buNone/>
-            </a:pPr>
-            <a:r>
-              <a:rPr lang="en-US" sz="700" b="1" dirty="0">
-                <a:solidFill>
-                  <a:srgbClr val="FFFFFF"/>
-                </a:solidFill>
-                <a:latin typeface="Aptos" pitchFamily="34" charset="0"/>
-                <a:ea typeface="Aptos" pitchFamily="34" charset="-122"/>
-                <a:cs typeface="Aptos" pitchFamily="34" charset="-120"/>
-              </a:rPr>
-              <a:t>Training from scratch</a:t>
-            </a:r>
-            <a:endParaRPr lang="en-US" sz="700" dirty="0"/>
-          </a:p>
-        </p:txBody>
-      </p:sp>
-      <p:sp>
-        <p:nvSpPr>
-          <p:cNvPr id="31" name="Text 21">
-            <a:extLst>
-              <a:ext uri="{FF2B5EF4-FFF2-40B4-BE49-F238E27FC236}">
-                <a16:creationId xmlns:a16="http://schemas.microsoft.com/office/drawing/2014/main" id="{3039B58A-3FBD-163E-F613-615D44EC9D2A}"/>
-              </a:ext>
-            </a:extLst>
-          </p:cNvPr>
-          <p:cNvSpPr/>
-          <p:nvPr/>
-        </p:nvSpPr>
-        <p:spPr>
-          <a:xfrm>
-            <a:off x="6295809" y="928966"/>
-            <a:ext cx="1597682" cy="58389"/>
-          </a:xfrm>
-          <a:prstGeom prst="rect">
-            <a:avLst/>
-          </a:prstGeom>
-          <a:noFill/>
-          <a:ln/>
-        </p:spPr>
-        <p:txBody>
-          <a:bodyPr wrap="square" lIns="0" tIns="0" rIns="0" bIns="0" rtlCol="0" anchor="t">
-            <a:normAutofit fontScale="92500" lnSpcReduction="20000"/>
-          </a:bodyPr>
-          <a:lstStyle/>
-          <a:p>
-            <a:pPr marL="0" indent="0" algn="ctr">
-              <a:lnSpc>
-                <a:spcPct val="90000"/>
-              </a:lnSpc>
-              <a:buNone/>
-            </a:pPr>
-            <a:r>
-              <a:rPr lang="en-US" sz="500" dirty="0" err="1">
-                <a:solidFill>
-                  <a:srgbClr val="D9D9D9"/>
-                </a:solidFill>
-                <a:latin typeface="Aptos" pitchFamily="34" charset="0"/>
-              </a:rPr>
-              <a:t>Piczak</a:t>
-            </a:r>
-            <a:r>
-              <a:rPr lang="en-US" sz="500" dirty="0">
-                <a:solidFill>
-                  <a:srgbClr val="D9D9D9"/>
-                </a:solidFill>
-                <a:latin typeface="Aptos" pitchFamily="34" charset="0"/>
-              </a:rPr>
-              <a:t> CNN | </a:t>
-            </a:r>
-            <a:r>
-              <a:rPr lang="en-US" sz="500" b="1" dirty="0">
-                <a:solidFill>
-                  <a:srgbClr val="FFFFFF"/>
-                </a:solidFill>
-                <a:latin typeface="Aptos" pitchFamily="34" charset="0"/>
-              </a:rPr>
-              <a:t>Variations</a:t>
-            </a:r>
-            <a:r>
-              <a:rPr lang="en-US" sz="500" dirty="0">
-                <a:solidFill>
-                  <a:srgbClr val="D9D9D9"/>
-                </a:solidFill>
-                <a:latin typeface="Aptos" pitchFamily="34" charset="0"/>
-              </a:rPr>
-              <a:t> </a:t>
-            </a:r>
-            <a:r>
-              <a:rPr lang="en-US" sz="500" dirty="0">
-                <a:solidFill>
-                  <a:srgbClr val="D9D9D9"/>
-                </a:solidFill>
-                <a:latin typeface="Aptos" pitchFamily="34" charset="0"/>
-                <a:ea typeface="Aptos" pitchFamily="34" charset="-122"/>
-                <a:cs typeface="Aptos" pitchFamily="34" charset="-120"/>
-              </a:rPr>
-              <a:t>| LSTM</a:t>
-            </a:r>
-            <a:endParaRPr lang="en-US" sz="500" dirty="0">
-              <a:solidFill>
-                <a:srgbClr val="D9D9D9"/>
-              </a:solidFill>
-            </a:endParaRPr>
-          </a:p>
-        </p:txBody>
-      </p:sp>
-      <p:sp>
-        <p:nvSpPr>
-          <p:cNvPr id="32" name="Shape 22">
-            <a:extLst>
-              <a:ext uri="{FF2B5EF4-FFF2-40B4-BE49-F238E27FC236}">
-                <a16:creationId xmlns:a16="http://schemas.microsoft.com/office/drawing/2014/main" id="{FF38F45D-D531-EDE8-2EF6-54A906C11034}"/>
-              </a:ext>
-            </a:extLst>
-          </p:cNvPr>
-          <p:cNvSpPr/>
-          <p:nvPr/>
-        </p:nvSpPr>
-        <p:spPr>
-          <a:xfrm>
-            <a:off x="7891484" y="750102"/>
-            <a:ext cx="1809206" cy="295381"/>
-          </a:xfrm>
-          <a:prstGeom prst="chevron">
-            <a:avLst/>
-          </a:prstGeom>
-          <a:solidFill>
-            <a:srgbClr val="D7DDE0">
-              <a:alpha val="90000"/>
-            </a:srgbClr>
-          </a:solidFill>
-          <a:ln w="12700">
-            <a:solidFill>
-              <a:srgbClr val="F7F5EF"/>
-            </a:solidFill>
-            <a:prstDash val="solid"/>
-          </a:ln>
-        </p:spPr>
-        <p:txBody>
-          <a:bodyPr/>
-          <a:lstStyle/>
-          <a:p>
-            <a:endParaRPr lang="en-US" sz="1100"/>
-          </a:p>
-        </p:txBody>
-      </p:sp>
-      <p:sp>
-        <p:nvSpPr>
-          <p:cNvPr id="33" name="Text 23">
-            <a:extLst>
-              <a:ext uri="{FF2B5EF4-FFF2-40B4-BE49-F238E27FC236}">
-                <a16:creationId xmlns:a16="http://schemas.microsoft.com/office/drawing/2014/main" id="{16945683-C0E3-8CA8-E873-71FD2C589403}"/>
-              </a:ext>
-            </a:extLst>
-          </p:cNvPr>
-          <p:cNvSpPr/>
-          <p:nvPr/>
-        </p:nvSpPr>
-        <p:spPr>
-          <a:xfrm>
-            <a:off x="7963330" y="839252"/>
-            <a:ext cx="1597682" cy="75563"/>
-          </a:xfrm>
-          <a:prstGeom prst="rect">
-            <a:avLst/>
-          </a:prstGeom>
-          <a:noFill/>
-          <a:ln/>
-        </p:spPr>
-        <p:txBody>
-          <a:bodyPr wrap="square" lIns="0" tIns="0" rIns="0" bIns="0" rtlCol="0" anchor="t">
-            <a:normAutofit fontScale="92500" lnSpcReduction="20000"/>
-          </a:bodyPr>
-          <a:lstStyle/>
-          <a:p>
-            <a:pPr marL="0" indent="0" algn="ctr">
-              <a:lnSpc>
-                <a:spcPct val="90000"/>
-              </a:lnSpc>
-              <a:buNone/>
-            </a:pPr>
-            <a:r>
-              <a:rPr lang="en-US" sz="700" b="1" dirty="0">
-                <a:solidFill>
-                  <a:srgbClr val="30383D"/>
-                </a:solidFill>
-                <a:latin typeface="Aptos" pitchFamily="34" charset="0"/>
-                <a:ea typeface="Aptos" pitchFamily="34" charset="-122"/>
-                <a:cs typeface="Aptos" pitchFamily="34" charset="-120"/>
-              </a:rPr>
-              <a:t>Transfer learning: pretrained CNN</a:t>
-            </a:r>
-            <a:endParaRPr lang="en-US" sz="700" dirty="0"/>
-          </a:p>
-        </p:txBody>
-      </p:sp>
-      <p:sp>
-        <p:nvSpPr>
-          <p:cNvPr id="34" name="Text 24">
-            <a:extLst>
-              <a:ext uri="{FF2B5EF4-FFF2-40B4-BE49-F238E27FC236}">
-                <a16:creationId xmlns:a16="http://schemas.microsoft.com/office/drawing/2014/main" id="{F5B6A1B0-9974-9455-2C1F-AC8FDA91CEEE}"/>
-              </a:ext>
-            </a:extLst>
-          </p:cNvPr>
-          <p:cNvSpPr/>
-          <p:nvPr/>
-        </p:nvSpPr>
-        <p:spPr>
-          <a:xfrm>
-            <a:off x="7984136" y="941012"/>
-            <a:ext cx="1597682" cy="58389"/>
-          </a:xfrm>
-          <a:prstGeom prst="rect">
-            <a:avLst/>
-          </a:prstGeom>
-          <a:noFill/>
-          <a:ln/>
-        </p:spPr>
-        <p:txBody>
-          <a:bodyPr wrap="square" lIns="0" tIns="0" rIns="0" bIns="0" rtlCol="0" anchor="t">
-            <a:normAutofit fontScale="92500" lnSpcReduction="20000"/>
-          </a:bodyPr>
-          <a:lstStyle/>
-          <a:p>
-            <a:pPr marL="0" indent="0" algn="ctr">
-              <a:lnSpc>
-                <a:spcPct val="90000"/>
-              </a:lnSpc>
-              <a:buNone/>
-            </a:pPr>
-            <a:r>
-              <a:rPr lang="en-US" sz="500" dirty="0">
-                <a:solidFill>
-                  <a:srgbClr val="6B7176"/>
-                </a:solidFill>
-                <a:latin typeface="Aptos" pitchFamily="34" charset="0"/>
-                <a:ea typeface="Aptos" pitchFamily="34" charset="-122"/>
-                <a:cs typeface="Aptos" pitchFamily="34" charset="-120"/>
-              </a:rPr>
-              <a:t>VGGish | YAMNet</a:t>
-            </a:r>
-            <a:endParaRPr lang="en-US" sz="500" dirty="0"/>
-          </a:p>
-        </p:txBody>
-      </p:sp>
-      <p:sp>
-        <p:nvSpPr>
-          <p:cNvPr id="35" name="Text 26">
-            <a:extLst>
-              <a:ext uri="{FF2B5EF4-FFF2-40B4-BE49-F238E27FC236}">
-                <a16:creationId xmlns:a16="http://schemas.microsoft.com/office/drawing/2014/main" id="{AE247940-4F28-A462-FB2C-F4B9C01AB7A7}"/>
-              </a:ext>
-            </a:extLst>
-          </p:cNvPr>
-          <p:cNvSpPr/>
-          <p:nvPr/>
-        </p:nvSpPr>
-        <p:spPr>
-          <a:xfrm>
-            <a:off x="9657605" y="848441"/>
-            <a:ext cx="1597682" cy="75563"/>
-          </a:xfrm>
-          <a:prstGeom prst="rect">
-            <a:avLst/>
-          </a:prstGeom>
-          <a:noFill/>
-          <a:ln/>
-        </p:spPr>
-        <p:txBody>
-          <a:bodyPr wrap="square" lIns="0" tIns="0" rIns="0" bIns="0" rtlCol="0" anchor="t">
-            <a:normAutofit fontScale="92500" lnSpcReduction="20000"/>
-          </a:bodyPr>
-          <a:lstStyle/>
-          <a:p>
-            <a:pPr marL="0" indent="0" algn="ctr">
-              <a:lnSpc>
-                <a:spcPct val="90000"/>
-              </a:lnSpc>
-              <a:buNone/>
-            </a:pPr>
-            <a:r>
-              <a:rPr lang="en-US" sz="700" b="1" dirty="0">
-                <a:solidFill>
-                  <a:srgbClr val="30383D"/>
-                </a:solidFill>
-                <a:latin typeface="Aptos" pitchFamily="34" charset="0"/>
-                <a:ea typeface="Aptos" pitchFamily="34" charset="-122"/>
-                <a:cs typeface="Aptos" pitchFamily="34" charset="-120"/>
-              </a:rPr>
-              <a:t>Transfer learning: pretrained transformers</a:t>
-            </a:r>
-            <a:endParaRPr lang="en-US" sz="700" dirty="0"/>
-          </a:p>
-        </p:txBody>
-      </p:sp>
-      <p:sp>
-        <p:nvSpPr>
-          <p:cNvPr id="36" name="Text 27">
-            <a:extLst>
-              <a:ext uri="{FF2B5EF4-FFF2-40B4-BE49-F238E27FC236}">
-                <a16:creationId xmlns:a16="http://schemas.microsoft.com/office/drawing/2014/main" id="{84C7863A-378B-51E0-045C-B3C1A3462236}"/>
-              </a:ext>
-            </a:extLst>
-          </p:cNvPr>
-          <p:cNvSpPr/>
-          <p:nvPr/>
-        </p:nvSpPr>
-        <p:spPr>
-          <a:xfrm>
-            <a:off x="9657605" y="944489"/>
-            <a:ext cx="1662902" cy="107931"/>
-          </a:xfrm>
-          <a:prstGeom prst="rect">
-            <a:avLst/>
-          </a:prstGeom>
-          <a:noFill/>
-          <a:ln/>
-        </p:spPr>
-        <p:txBody>
-          <a:bodyPr wrap="square" lIns="0" tIns="0" rIns="0" bIns="0" rtlCol="0" anchor="t">
-            <a:normAutofit/>
-          </a:bodyPr>
-          <a:lstStyle/>
-          <a:p>
-            <a:pPr marL="0" indent="0" algn="ctr">
-              <a:lnSpc>
-                <a:spcPct val="90000"/>
-              </a:lnSpc>
-              <a:buNone/>
-            </a:pPr>
-            <a:r>
-              <a:rPr lang="en-US" sz="500" dirty="0">
-                <a:solidFill>
-                  <a:srgbClr val="6B7176"/>
-                </a:solidFill>
-                <a:latin typeface="Aptos" pitchFamily="34" charset="0"/>
-                <a:ea typeface="Aptos" pitchFamily="34" charset="-122"/>
-                <a:cs typeface="Aptos" pitchFamily="34" charset="-120"/>
-              </a:rPr>
-              <a:t>AST | BEATs</a:t>
-            </a:r>
-            <a:endParaRPr lang="en-US" sz="500" dirty="0"/>
-          </a:p>
-        </p:txBody>
-      </p:sp>
     </p:spTree>
   </p:cSld>
   <p:clrMapOvr>
@@ -24281,7 +26374,7 @@
 </p:sld>
 </file>
 
-<file path=ppt/slides/slide7.xml><?xml version="1.0" encoding="utf-8"?>
+<file path=ppt/slides/slide8.xml><?xml version="1.0" encoding="utf-8"?>
 <p:sld xmlns:a="http://schemas.openxmlformats.org/drawingml/2006/main" xmlns:r="http://schemas.openxmlformats.org/officeDocument/2006/relationships" xmlns:p="http://schemas.openxmlformats.org/presentationml/2006/main">
   <p:cSld name="Slide 6">
     <p:bg>
@@ -25076,7 +27169,7 @@
         </p:spPr>
         <p:txBody>
           <a:bodyPr wrap="square" lIns="0" tIns="0" rIns="0" bIns="0" rtlCol="0" anchor="t">
-            <a:normAutofit fontScale="62500" lnSpcReduction="20000"/>
+            <a:normAutofit fontScale="70000" lnSpcReduction="20000"/>
           </a:bodyPr>
           <a:lstStyle/>
           <a:p>
@@ -25087,7 +27180,7 @@
               <a:buNone/>
             </a:pPr>
             <a:r>
-              <a:rPr lang="en-US" sz="1900" b="1" dirty="0">
+              <a:rPr lang="en-US" sz="1900" dirty="0">
                 <a:solidFill>
                   <a:srgbClr val="1F2528"/>
                 </a:solidFill>
@@ -25115,10 +27208,10 @@
         </p:nvGrpSpPr>
         <p:grpSpPr>
           <a:xfrm>
-            <a:off x="8697485" y="4733086"/>
-            <a:ext cx="1920240" cy="914400"/>
+            <a:off x="8720101" y="4812128"/>
+            <a:ext cx="1920240" cy="772294"/>
             <a:chOff x="9328755" y="4727446"/>
-            <a:chExt cx="1920240" cy="914400"/>
+            <a:chExt cx="1920240" cy="772294"/>
           </a:xfrm>
         </p:grpSpPr>
         <p:sp>
@@ -25136,7 +27229,7 @@
           <p:spPr>
             <a:xfrm>
               <a:off x="9328755" y="4727446"/>
-              <a:ext cx="1920240" cy="914400"/>
+              <a:ext cx="1920240" cy="772294"/>
             </a:xfrm>
             <a:prstGeom prst="rect">
               <a:avLst/>
@@ -25474,7 +27567,7 @@
         </p:nvSpPr>
         <p:spPr>
           <a:xfrm>
-            <a:off x="780690" y="1935772"/>
+            <a:off x="780690" y="2051104"/>
             <a:ext cx="5440680" cy="164592"/>
           </a:xfrm>
           <a:prstGeom prst="rect">
@@ -25489,24 +27582,20 @@
           </a:bodyPr>
           <a:lstStyle/>
           <a:p>
-            <a:pPr marL="0" indent="0" algn="l">
+            <a:pPr>
               <a:lnSpc>
                 <a:spcPct val="90000"/>
               </a:lnSpc>
-              <a:buNone/>
             </a:pPr>
             <a:r>
-              <a:rPr lang="en-US" sz="1020" b="1" dirty="0">
-                <a:solidFill>
-                  <a:srgbClr val="6B7176"/>
+              <a:rPr lang="en-US" sz="1000" b="1" dirty="0">
+                <a:solidFill>
+                  <a:srgbClr val="426E9E"/>
                 </a:solidFill>
                 <a:latin typeface="Aptos" pitchFamily="34" charset="0"/>
-                <a:ea typeface="Aptos" pitchFamily="34" charset="-122"/>
-                <a:cs typeface="Aptos" pitchFamily="34" charset="-120"/>
               </a:rPr>
               <a:t>LSTM architecture</a:t>
             </a:r>
-            <a:endParaRPr lang="en-US" sz="1020" dirty="0"/>
           </a:p>
         </p:txBody>
       </p:sp>
@@ -25525,13 +27614,13 @@
           <p:nvPr>
             <p:extLst>
               <p:ext uri="{D42A27DB-BD31-4B8C-83A1-F6EECF244321}">
-                <p14:modId xmlns:p14="http://schemas.microsoft.com/office/powerpoint/2010/main" val="2168257338"/>
+                <p14:modId xmlns:p14="http://schemas.microsoft.com/office/powerpoint/2010/main" val="4276692088"/>
               </p:ext>
             </p:extLst>
           </p:nvPr>
         </p:nvGraphicFramePr>
         <p:xfrm>
-          <a:off x="737817" y="2105373"/>
+          <a:off x="737817" y="2220705"/>
           <a:ext cx="4434165" cy="1821180"/>
         </p:xfrm>
         <a:graphic>
@@ -26590,167 +28679,6 @@
           </a:graphicData>
         </a:graphic>
       </p:graphicFrame>
-      <p:grpSp>
-        <p:nvGrpSpPr>
-          <p:cNvPr id="19" name="Group 18">
-            <a:extLst>
-              <a:ext uri="{FF2B5EF4-FFF2-40B4-BE49-F238E27FC236}">
-                <a16:creationId xmlns:a16="http://schemas.microsoft.com/office/drawing/2014/main" id="{6F6E8C61-62CB-4F3D-F282-A8DD9B542CC9}"/>
-              </a:ext>
-            </a:extLst>
-          </p:cNvPr>
-          <p:cNvGrpSpPr/>
-          <p:nvPr/>
-        </p:nvGrpSpPr>
-        <p:grpSpPr>
-          <a:xfrm>
-            <a:off x="6594365" y="4733086"/>
-            <a:ext cx="2011680" cy="914400"/>
-            <a:chOff x="7207347" y="4727446"/>
-            <a:chExt cx="2011680" cy="914400"/>
-          </a:xfrm>
-        </p:grpSpPr>
-        <p:sp>
-          <p:nvSpPr>
-            <p:cNvPr id="20" name="Shape 48">
-              <a:extLst>
-                <a:ext uri="{FF2B5EF4-FFF2-40B4-BE49-F238E27FC236}">
-                  <a16:creationId xmlns:a16="http://schemas.microsoft.com/office/drawing/2014/main" id="{0D47066D-C2CD-1FF5-2BEE-B2757CCBA052}"/>
-                </a:ext>
-              </a:extLst>
-            </p:cNvPr>
-            <p:cNvSpPr/>
-            <p:nvPr/>
-          </p:nvSpPr>
-          <p:spPr>
-            <a:xfrm>
-              <a:off x="7207347" y="4727446"/>
-              <a:ext cx="2011680" cy="914400"/>
-            </a:xfrm>
-            <a:prstGeom prst="rect">
-              <a:avLst/>
-            </a:prstGeom>
-            <a:solidFill>
-              <a:srgbClr val="FFFFFF">
-                <a:alpha val="98000"/>
-              </a:srgbClr>
-            </a:solidFill>
-            <a:ln w="17780">
-              <a:solidFill>
-                <a:srgbClr val="B65D3A"/>
-              </a:solidFill>
-              <a:prstDash val="solid"/>
-            </a:ln>
-          </p:spPr>
-          <p:txBody>
-            <a:bodyPr/>
-            <a:lstStyle/>
-            <a:p>
-              <a:endParaRPr lang="en-US"/>
-            </a:p>
-          </p:txBody>
-        </p:sp>
-        <p:sp>
-          <p:nvSpPr>
-            <p:cNvPr id="21" name="Text 49">
-              <a:extLst>
-                <a:ext uri="{FF2B5EF4-FFF2-40B4-BE49-F238E27FC236}">
-                  <a16:creationId xmlns:a16="http://schemas.microsoft.com/office/drawing/2014/main" id="{B979E889-CA6B-E67A-1D4B-09BE3A252931}"/>
-                </a:ext>
-              </a:extLst>
-            </p:cNvPr>
-            <p:cNvSpPr/>
-            <p:nvPr/>
-          </p:nvSpPr>
-          <p:spPr>
-            <a:xfrm>
-              <a:off x="7298787" y="4864606"/>
-              <a:ext cx="1828800" cy="329184"/>
-            </a:xfrm>
-            <a:prstGeom prst="rect">
-              <a:avLst/>
-            </a:prstGeom>
-            <a:noFill/>
-            <a:ln/>
-          </p:spPr>
-          <p:txBody>
-            <a:bodyPr wrap="square" lIns="0" tIns="0" rIns="0" bIns="0" rtlCol="0" anchor="t">
-              <a:normAutofit/>
-            </a:bodyPr>
-            <a:lstStyle/>
-            <a:p>
-              <a:pPr marL="0" indent="0" algn="ctr">
-                <a:lnSpc>
-                  <a:spcPct val="90000"/>
-                </a:lnSpc>
-                <a:buNone/>
-              </a:pPr>
-              <a:r>
-                <a:rPr lang="en-US" sz="2100" b="1" dirty="0">
-                  <a:solidFill>
-                    <a:srgbClr val="B65D3A"/>
-                  </a:solidFill>
-                  <a:latin typeface="Aptos Display" pitchFamily="34" charset="0"/>
-                  <a:ea typeface="Aptos Display" pitchFamily="34" charset="-122"/>
-                  <a:cs typeface="Aptos Display" pitchFamily="34" charset="-120"/>
-                </a:rPr>
-                <a:t>64.5%</a:t>
-              </a:r>
-              <a:endParaRPr lang="en-US" sz="2100" dirty="0"/>
-            </a:p>
-          </p:txBody>
-        </p:sp>
-        <p:sp>
-          <p:nvSpPr>
-            <p:cNvPr id="22" name="Text 50">
-              <a:extLst>
-                <a:ext uri="{FF2B5EF4-FFF2-40B4-BE49-F238E27FC236}">
-                  <a16:creationId xmlns:a16="http://schemas.microsoft.com/office/drawing/2014/main" id="{B35D6650-D648-C8B9-CA03-40ABF04D048B}"/>
-                </a:ext>
-              </a:extLst>
-            </p:cNvPr>
-            <p:cNvSpPr/>
-            <p:nvPr/>
-          </p:nvSpPr>
-          <p:spPr>
-            <a:xfrm>
-              <a:off x="7317075" y="5257798"/>
-              <a:ext cx="1792224" cy="219456"/>
-            </a:xfrm>
-            <a:prstGeom prst="rect">
-              <a:avLst/>
-            </a:prstGeom>
-            <a:noFill/>
-            <a:ln/>
-          </p:spPr>
-          <p:txBody>
-            <a:bodyPr wrap="square" lIns="0" tIns="0" rIns="0" bIns="0" rtlCol="0" anchor="t">
-              <a:normAutofit/>
-            </a:bodyPr>
-            <a:lstStyle/>
-            <a:p>
-              <a:pPr marL="0" indent="0" algn="ctr">
-                <a:lnSpc>
-                  <a:spcPct val="90000"/>
-                </a:lnSpc>
-                <a:buNone/>
-              </a:pPr>
-              <a:r>
-                <a:rPr lang="en-US" sz="780" dirty="0">
-                  <a:solidFill>
-                    <a:srgbClr val="6B7176"/>
-                  </a:solidFill>
-                  <a:latin typeface="Aptos" pitchFamily="34" charset="0"/>
-                  <a:ea typeface="Aptos" pitchFamily="34" charset="-122"/>
-                  <a:cs typeface="Aptos" pitchFamily="34" charset="-120"/>
-                </a:rPr>
-                <a:t>Piczak published LP clip-level reference</a:t>
-              </a:r>
-              <a:endParaRPr lang="en-US" sz="780" dirty="0"/>
-            </a:p>
-          </p:txBody>
-        </p:sp>
-      </p:grpSp>
       <p:graphicFrame>
         <p:nvGraphicFramePr>
           <p:cNvPr id="23" name="Table 22">
@@ -27332,13 +29260,13 @@
           <p:nvPr>
             <p:extLst>
               <p:ext uri="{D42A27DB-BD31-4B8C-83A1-F6EECF244321}">
-                <p14:modId xmlns:p14="http://schemas.microsoft.com/office/powerpoint/2010/main" val="656138549"/>
+                <p14:modId xmlns:p14="http://schemas.microsoft.com/office/powerpoint/2010/main" val="2515556746"/>
               </p:ext>
             </p:extLst>
           </p:nvPr>
         </p:nvGraphicFramePr>
         <p:xfrm>
-          <a:off x="737816" y="4039700"/>
+          <a:off x="737816" y="4155032"/>
           <a:ext cx="4809196" cy="1158240"/>
         </p:xfrm>
         <a:graphic>
@@ -28368,6 +30296,159 @@
           </a:graphicData>
         </a:graphic>
       </p:graphicFrame>
+      <p:sp>
+        <p:nvSpPr>
+          <p:cNvPr id="13" name="Shape 48">
+            <a:extLst>
+              <a:ext uri="{FF2B5EF4-FFF2-40B4-BE49-F238E27FC236}">
+                <a16:creationId xmlns:a16="http://schemas.microsoft.com/office/drawing/2014/main" id="{92B74C76-3998-10F6-9060-161881FEC340}"/>
+              </a:ext>
+            </a:extLst>
+          </p:cNvPr>
+          <p:cNvSpPr/>
+          <p:nvPr/>
+        </p:nvSpPr>
+        <p:spPr>
+          <a:xfrm>
+            <a:off x="6535262" y="4812128"/>
+            <a:ext cx="2011680" cy="772294"/>
+          </a:xfrm>
+          <a:prstGeom prst="rect">
+            <a:avLst/>
+          </a:prstGeom>
+          <a:solidFill>
+            <a:srgbClr val="FFFFFF">
+              <a:alpha val="98000"/>
+            </a:srgbClr>
+          </a:solidFill>
+          <a:ln w="17780">
+            <a:solidFill>
+              <a:schemeClr val="tx1">
+                <a:lumMod val="75000"/>
+                <a:lumOff val="25000"/>
+              </a:schemeClr>
+            </a:solidFill>
+            <a:prstDash val="solid"/>
+          </a:ln>
+        </p:spPr>
+        <p:txBody>
+          <a:bodyPr/>
+          <a:lstStyle/>
+          <a:p>
+            <a:endParaRPr lang="en-US"/>
+          </a:p>
+        </p:txBody>
+      </p:sp>
+      <p:sp>
+        <p:nvSpPr>
+          <p:cNvPr id="14" name="Text 49">
+            <a:extLst>
+              <a:ext uri="{FF2B5EF4-FFF2-40B4-BE49-F238E27FC236}">
+                <a16:creationId xmlns:a16="http://schemas.microsoft.com/office/drawing/2014/main" id="{C162797D-3CC9-6542-3D39-69B5DCB40689}"/>
+              </a:ext>
+            </a:extLst>
+          </p:cNvPr>
+          <p:cNvSpPr/>
+          <p:nvPr/>
+        </p:nvSpPr>
+        <p:spPr>
+          <a:xfrm>
+            <a:off x="6626702" y="4949288"/>
+            <a:ext cx="1828800" cy="329184"/>
+          </a:xfrm>
+          <a:prstGeom prst="rect">
+            <a:avLst/>
+          </a:prstGeom>
+          <a:noFill/>
+          <a:ln/>
+        </p:spPr>
+        <p:txBody>
+          <a:bodyPr wrap="square" lIns="0" tIns="0" rIns="0" bIns="0" rtlCol="0" anchor="t">
+            <a:normAutofit/>
+          </a:bodyPr>
+          <a:lstStyle/>
+          <a:p>
+            <a:pPr marL="0" indent="0" algn="ctr">
+              <a:lnSpc>
+                <a:spcPct val="90000"/>
+              </a:lnSpc>
+              <a:buNone/>
+            </a:pPr>
+            <a:r>
+              <a:rPr lang="en-US" sz="2100" b="1" dirty="0">
+                <a:solidFill>
+                  <a:schemeClr val="tx1">
+                    <a:lumMod val="75000"/>
+                    <a:lumOff val="25000"/>
+                  </a:schemeClr>
+                </a:solidFill>
+                <a:latin typeface="Aptos Display" pitchFamily="34" charset="0"/>
+                <a:ea typeface="Aptos Display" pitchFamily="34" charset="-122"/>
+                <a:cs typeface="Aptos Display" pitchFamily="34" charset="-120"/>
+              </a:rPr>
+              <a:t>64.5%</a:t>
+            </a:r>
+            <a:endParaRPr lang="en-US" sz="2100" dirty="0">
+              <a:solidFill>
+                <a:schemeClr val="tx1">
+                  <a:lumMod val="75000"/>
+                  <a:lumOff val="25000"/>
+                </a:schemeClr>
+              </a:solidFill>
+            </a:endParaRPr>
+          </a:p>
+        </p:txBody>
+      </p:sp>
+      <p:sp>
+        <p:nvSpPr>
+          <p:cNvPr id="24" name="Text 50">
+            <a:extLst>
+              <a:ext uri="{FF2B5EF4-FFF2-40B4-BE49-F238E27FC236}">
+                <a16:creationId xmlns:a16="http://schemas.microsoft.com/office/drawing/2014/main" id="{69D614F5-4FAA-9AE5-9133-D5D0E3647358}"/>
+              </a:ext>
+            </a:extLst>
+          </p:cNvPr>
+          <p:cNvSpPr/>
+          <p:nvPr/>
+        </p:nvSpPr>
+        <p:spPr>
+          <a:xfrm>
+            <a:off x="6644990" y="5342480"/>
+            <a:ext cx="1792224" cy="219456"/>
+          </a:xfrm>
+          <a:prstGeom prst="rect">
+            <a:avLst/>
+          </a:prstGeom>
+          <a:noFill/>
+          <a:ln/>
+        </p:spPr>
+        <p:txBody>
+          <a:bodyPr wrap="square" lIns="0" tIns="0" rIns="0" bIns="0" rtlCol="0" anchor="t">
+            <a:normAutofit/>
+          </a:bodyPr>
+          <a:lstStyle/>
+          <a:p>
+            <a:pPr marL="0" indent="0" algn="ctr">
+              <a:lnSpc>
+                <a:spcPct val="90000"/>
+              </a:lnSpc>
+              <a:buNone/>
+            </a:pPr>
+            <a:r>
+              <a:rPr lang="en-US" sz="780" dirty="0">
+                <a:solidFill>
+                  <a:srgbClr val="6B7176"/>
+                </a:solidFill>
+                <a:latin typeface="Aptos" pitchFamily="34" charset="0"/>
+                <a:ea typeface="Aptos" pitchFamily="34" charset="-122"/>
+                <a:cs typeface="Aptos" pitchFamily="34" charset="-120"/>
+              </a:rPr>
+              <a:t>Piczak published LP clip-level reference</a:t>
+            </a:r>
+            <a:endParaRPr lang="en-US" sz="780" dirty="0"/>
+          </a:p>
+        </p:txBody>
+      </p:sp>
     </p:spTree>
   </p:cSld>
   <p:clrMapOvr>
@@ -28376,7 +30457,7 @@
 </p:sld>
 </file>
 
-<file path=ppt/slides/slide8.xml><?xml version="1.0" encoding="utf-8"?>
+<file path=ppt/slides/slide9.xml><?xml version="1.0" encoding="utf-8"?>
 <p:sld xmlns:a="http://schemas.openxmlformats.org/drawingml/2006/main" xmlns:r="http://schemas.openxmlformats.org/officeDocument/2006/relationships" xmlns:p="http://schemas.openxmlformats.org/presentationml/2006/main">
   <p:cSld>
     <p:bg>
@@ -29196,8 +31277,8 @@
         </p:nvSpPr>
         <p:spPr>
           <a:xfrm>
-            <a:off x="777240" y="1600200"/>
-            <a:ext cx="4691231" cy="411480"/>
+            <a:off x="777240" y="1600199"/>
+            <a:ext cx="4691231" cy="537127"/>
           </a:xfrm>
           <a:prstGeom prst="rect">
             <a:avLst/>
@@ -29207,7 +31288,7 @@
         </p:spPr>
         <p:txBody>
           <a:bodyPr wrap="square" lIns="0" tIns="0" rIns="0" bIns="0" rtlCol="0" anchor="t">
-            <a:normAutofit fontScale="62500" lnSpcReduction="20000"/>
+            <a:normAutofit/>
           </a:bodyPr>
           <a:lstStyle/>
           <a:p>
@@ -29218,7 +31299,7 @@
               <a:buNone/>
             </a:pPr>
             <a:r>
-              <a:rPr lang="en-US" sz="1900" b="1" dirty="0">
+              <a:rPr lang="en-US" sz="1200" dirty="0">
                 <a:solidFill>
                   <a:srgbClr val="1F2528"/>
                 </a:solidFill>
@@ -29228,7 +31309,7 @@
               </a:rPr>
               <a:t>From local spectrogram patterns to temporal sequence modeling – LSTM baseline defined, Design of Experiments created to vary 4 factors</a:t>
             </a:r>
-            <a:endParaRPr lang="en-US" sz="1900" dirty="0"/>
+            <a:endParaRPr lang="en-US" sz="1200" dirty="0"/>
           </a:p>
         </p:txBody>
       </p:sp>
@@ -29247,9 +31328,9 @@
         <p:grpSpPr>
           <a:xfrm>
             <a:off x="8463399" y="3717436"/>
-            <a:ext cx="1920240" cy="914400"/>
+            <a:ext cx="1920240" cy="772294"/>
             <a:chOff x="9328755" y="4727446"/>
-            <a:chExt cx="1920240" cy="914400"/>
+            <a:chExt cx="1920240" cy="772294"/>
           </a:xfrm>
         </p:grpSpPr>
         <p:sp>
@@ -29267,7 +31348,7 @@
           <p:spPr>
             <a:xfrm>
               <a:off x="9328755" y="4727446"/>
-              <a:ext cx="1920240" cy="914400"/>
+              <a:ext cx="1920240" cy="772294"/>
             </a:xfrm>
             <a:prstGeom prst="rect">
               <a:avLst/>
@@ -29436,7 +31517,7 @@
         </p:nvSpPr>
         <p:spPr>
           <a:xfrm>
-            <a:off x="6221370" y="4989733"/>
+            <a:off x="6221509" y="4924387"/>
             <a:ext cx="1750000" cy="182880"/>
           </a:xfrm>
           <a:prstGeom prst="rect">
@@ -29483,7 +31564,7 @@
         </p:nvSpPr>
         <p:spPr>
           <a:xfrm>
-            <a:off x="6293921" y="5195011"/>
+            <a:off x="6294060" y="5129665"/>
             <a:ext cx="5026569" cy="996734"/>
           </a:xfrm>
           <a:prstGeom prst="rect">
@@ -30754,167 +32835,6 @@
           </a:graphicData>
         </a:graphic>
       </p:graphicFrame>
-      <p:grpSp>
-        <p:nvGrpSpPr>
-          <p:cNvPr id="19" name="Group 18">
-            <a:extLst>
-              <a:ext uri="{FF2B5EF4-FFF2-40B4-BE49-F238E27FC236}">
-                <a16:creationId xmlns:a16="http://schemas.microsoft.com/office/drawing/2014/main" id="{05D29C80-F2AA-4BA3-6B71-C793E5BEAF32}"/>
-              </a:ext>
-            </a:extLst>
-          </p:cNvPr>
-          <p:cNvGrpSpPr/>
-          <p:nvPr/>
-        </p:nvGrpSpPr>
-        <p:grpSpPr>
-          <a:xfrm>
-            <a:off x="6360279" y="3717436"/>
-            <a:ext cx="2011680" cy="914400"/>
-            <a:chOff x="7207347" y="4727446"/>
-            <a:chExt cx="2011680" cy="914400"/>
-          </a:xfrm>
-        </p:grpSpPr>
-        <p:sp>
-          <p:nvSpPr>
-            <p:cNvPr id="20" name="Shape 48">
-              <a:extLst>
-                <a:ext uri="{FF2B5EF4-FFF2-40B4-BE49-F238E27FC236}">
-                  <a16:creationId xmlns:a16="http://schemas.microsoft.com/office/drawing/2014/main" id="{6EF3174C-38DC-8016-8380-19252D9106E3}"/>
-                </a:ext>
-              </a:extLst>
-            </p:cNvPr>
-            <p:cNvSpPr/>
-            <p:nvPr/>
-          </p:nvSpPr>
-          <p:spPr>
-            <a:xfrm>
-              <a:off x="7207347" y="4727446"/>
-              <a:ext cx="2011680" cy="914400"/>
-            </a:xfrm>
-            <a:prstGeom prst="rect">
-              <a:avLst/>
-            </a:prstGeom>
-            <a:solidFill>
-              <a:srgbClr val="FFFFFF">
-                <a:alpha val="98000"/>
-              </a:srgbClr>
-            </a:solidFill>
-            <a:ln w="17780">
-              <a:solidFill>
-                <a:srgbClr val="B65D3A"/>
-              </a:solidFill>
-              <a:prstDash val="solid"/>
-            </a:ln>
-          </p:spPr>
-          <p:txBody>
-            <a:bodyPr/>
-            <a:lstStyle/>
-            <a:p>
-              <a:endParaRPr lang="en-US"/>
-            </a:p>
-          </p:txBody>
-        </p:sp>
-        <p:sp>
-          <p:nvSpPr>
-            <p:cNvPr id="21" name="Text 49">
-              <a:extLst>
-                <a:ext uri="{FF2B5EF4-FFF2-40B4-BE49-F238E27FC236}">
-                  <a16:creationId xmlns:a16="http://schemas.microsoft.com/office/drawing/2014/main" id="{B359967D-E80C-47F3-BC0B-72D8ED5614FC}"/>
-                </a:ext>
-              </a:extLst>
-            </p:cNvPr>
-            <p:cNvSpPr/>
-            <p:nvPr/>
-          </p:nvSpPr>
-          <p:spPr>
-            <a:xfrm>
-              <a:off x="7298787" y="4864606"/>
-              <a:ext cx="1828800" cy="329184"/>
-            </a:xfrm>
-            <a:prstGeom prst="rect">
-              <a:avLst/>
-            </a:prstGeom>
-            <a:noFill/>
-            <a:ln/>
-          </p:spPr>
-          <p:txBody>
-            <a:bodyPr wrap="square" lIns="0" tIns="0" rIns="0" bIns="0" rtlCol="0" anchor="t">
-              <a:normAutofit/>
-            </a:bodyPr>
-            <a:lstStyle/>
-            <a:p>
-              <a:pPr marL="0" indent="0" algn="ctr">
-                <a:lnSpc>
-                  <a:spcPct val="90000"/>
-                </a:lnSpc>
-                <a:buNone/>
-              </a:pPr>
-              <a:r>
-                <a:rPr lang="en-US" sz="2100" b="1" dirty="0">
-                  <a:solidFill>
-                    <a:srgbClr val="B65D3A"/>
-                  </a:solidFill>
-                  <a:latin typeface="Aptos Display" pitchFamily="34" charset="0"/>
-                  <a:ea typeface="Aptos Display" pitchFamily="34" charset="-122"/>
-                  <a:cs typeface="Aptos Display" pitchFamily="34" charset="-120"/>
-                </a:rPr>
-                <a:t>64.5%</a:t>
-              </a:r>
-              <a:endParaRPr lang="en-US" sz="2100" dirty="0"/>
-            </a:p>
-          </p:txBody>
-        </p:sp>
-        <p:sp>
-          <p:nvSpPr>
-            <p:cNvPr id="22" name="Text 50">
-              <a:extLst>
-                <a:ext uri="{FF2B5EF4-FFF2-40B4-BE49-F238E27FC236}">
-                  <a16:creationId xmlns:a16="http://schemas.microsoft.com/office/drawing/2014/main" id="{90F988DF-A30B-CA84-F304-ADB1D40CFA3C}"/>
-                </a:ext>
-              </a:extLst>
-            </p:cNvPr>
-            <p:cNvSpPr/>
-            <p:nvPr/>
-          </p:nvSpPr>
-          <p:spPr>
-            <a:xfrm>
-              <a:off x="7317075" y="5257798"/>
-              <a:ext cx="1792224" cy="219456"/>
-            </a:xfrm>
-            <a:prstGeom prst="rect">
-              <a:avLst/>
-            </a:prstGeom>
-            <a:noFill/>
-            <a:ln/>
-          </p:spPr>
-          <p:txBody>
-            <a:bodyPr wrap="square" lIns="0" tIns="0" rIns="0" bIns="0" rtlCol="0" anchor="t">
-              <a:normAutofit/>
-            </a:bodyPr>
-            <a:lstStyle/>
-            <a:p>
-              <a:pPr marL="0" indent="0" algn="ctr">
-                <a:lnSpc>
-                  <a:spcPct val="90000"/>
-                </a:lnSpc>
-                <a:buNone/>
-              </a:pPr>
-              <a:r>
-                <a:rPr lang="en-US" sz="780" dirty="0">
-                  <a:solidFill>
-                    <a:srgbClr val="6B7176"/>
-                  </a:solidFill>
-                  <a:latin typeface="Aptos" pitchFamily="34" charset="0"/>
-                  <a:ea typeface="Aptos" pitchFamily="34" charset="-122"/>
-                  <a:cs typeface="Aptos" pitchFamily="34" charset="-120"/>
-                </a:rPr>
-                <a:t>Piczak published LP clip-level reference</a:t>
-              </a:r>
-              <a:endParaRPr lang="en-US" sz="780" dirty="0"/>
-            </a:p>
-          </p:txBody>
-        </p:sp>
-      </p:grpSp>
       <p:graphicFrame>
         <p:nvGraphicFramePr>
           <p:cNvPr id="25" name="Table 0">
@@ -32820,1200 +34740,186 @@
           </a:graphicData>
         </a:graphic>
       </p:graphicFrame>
+      <p:grpSp>
+        <p:nvGrpSpPr>
+          <p:cNvPr id="26" name="Group 25">
+            <a:extLst>
+              <a:ext uri="{FF2B5EF4-FFF2-40B4-BE49-F238E27FC236}">
+                <a16:creationId xmlns:a16="http://schemas.microsoft.com/office/drawing/2014/main" id="{3A03BEB1-9537-04EC-8635-B1F54022D681}"/>
+              </a:ext>
+            </a:extLst>
+          </p:cNvPr>
+          <p:cNvGrpSpPr/>
+          <p:nvPr/>
+        </p:nvGrpSpPr>
+        <p:grpSpPr>
+          <a:xfrm>
+            <a:off x="6341991" y="3717436"/>
+            <a:ext cx="2011680" cy="772294"/>
+            <a:chOff x="6957490" y="4123666"/>
+            <a:chExt cx="2011680" cy="772294"/>
+          </a:xfrm>
+        </p:grpSpPr>
+        <p:sp>
+          <p:nvSpPr>
+            <p:cNvPr id="14" name="Shape 48">
+              <a:extLst>
+                <a:ext uri="{FF2B5EF4-FFF2-40B4-BE49-F238E27FC236}">
+                  <a16:creationId xmlns:a16="http://schemas.microsoft.com/office/drawing/2014/main" id="{8A7B5248-96C6-6827-8A09-7A319015BD4F}"/>
+                </a:ext>
+              </a:extLst>
+            </p:cNvPr>
+            <p:cNvSpPr/>
+            <p:nvPr/>
+          </p:nvSpPr>
+          <p:spPr>
+            <a:xfrm>
+              <a:off x="6957490" y="4123666"/>
+              <a:ext cx="2011680" cy="772294"/>
+            </a:xfrm>
+            <a:prstGeom prst="rect">
+              <a:avLst/>
+            </a:prstGeom>
+            <a:solidFill>
+              <a:srgbClr val="FFFFFF">
+                <a:alpha val="98000"/>
+              </a:srgbClr>
+            </a:solidFill>
+            <a:ln w="17780">
+              <a:solidFill>
+                <a:schemeClr val="tx1">
+                  <a:lumMod val="75000"/>
+                  <a:lumOff val="25000"/>
+                </a:schemeClr>
+              </a:solidFill>
+              <a:prstDash val="solid"/>
+            </a:ln>
+          </p:spPr>
+          <p:txBody>
+            <a:bodyPr/>
+            <a:lstStyle/>
+            <a:p>
+              <a:endParaRPr lang="en-US"/>
+            </a:p>
+          </p:txBody>
+        </p:sp>
+        <p:sp>
+          <p:nvSpPr>
+            <p:cNvPr id="23" name="Text 49">
+              <a:extLst>
+                <a:ext uri="{FF2B5EF4-FFF2-40B4-BE49-F238E27FC236}">
+                  <a16:creationId xmlns:a16="http://schemas.microsoft.com/office/drawing/2014/main" id="{2CBC18AD-3BA9-18DC-7639-15930BA3D4F6}"/>
+                </a:ext>
+              </a:extLst>
+            </p:cNvPr>
+            <p:cNvSpPr/>
+            <p:nvPr/>
+          </p:nvSpPr>
+          <p:spPr>
+            <a:xfrm>
+              <a:off x="7048930" y="4260826"/>
+              <a:ext cx="1828800" cy="329184"/>
+            </a:xfrm>
+            <a:prstGeom prst="rect">
+              <a:avLst/>
+            </a:prstGeom>
+            <a:noFill/>
+            <a:ln/>
+          </p:spPr>
+          <p:txBody>
+            <a:bodyPr wrap="square" lIns="0" tIns="0" rIns="0" bIns="0" rtlCol="0" anchor="t">
+              <a:normAutofit/>
+            </a:bodyPr>
+            <a:lstStyle/>
+            <a:p>
+              <a:pPr marL="0" indent="0" algn="ctr">
+                <a:lnSpc>
+                  <a:spcPct val="90000"/>
+                </a:lnSpc>
+                <a:buNone/>
+              </a:pPr>
+              <a:r>
+                <a:rPr lang="en-US" sz="2100" b="1" dirty="0">
+                  <a:solidFill>
+                    <a:schemeClr val="tx1">
+                      <a:lumMod val="75000"/>
+                      <a:lumOff val="25000"/>
+                    </a:schemeClr>
+                  </a:solidFill>
+                  <a:latin typeface="Aptos Display" pitchFamily="34" charset="0"/>
+                  <a:ea typeface="Aptos Display" pitchFamily="34" charset="-122"/>
+                  <a:cs typeface="Aptos Display" pitchFamily="34" charset="-120"/>
+                </a:rPr>
+                <a:t>64.5%</a:t>
+              </a:r>
+              <a:endParaRPr lang="en-US" sz="2100" dirty="0">
+                <a:solidFill>
+                  <a:schemeClr val="tx1">
+                    <a:lumMod val="75000"/>
+                    <a:lumOff val="25000"/>
+                  </a:schemeClr>
+                </a:solidFill>
+              </a:endParaRPr>
+            </a:p>
+          </p:txBody>
+        </p:sp>
+        <p:sp>
+          <p:nvSpPr>
+            <p:cNvPr id="24" name="Text 50">
+              <a:extLst>
+                <a:ext uri="{FF2B5EF4-FFF2-40B4-BE49-F238E27FC236}">
+                  <a16:creationId xmlns:a16="http://schemas.microsoft.com/office/drawing/2014/main" id="{7653CAB9-2395-EFC2-BD44-9AA6BEED2CF3}"/>
+                </a:ext>
+              </a:extLst>
+            </p:cNvPr>
+            <p:cNvSpPr/>
+            <p:nvPr/>
+          </p:nvSpPr>
+          <p:spPr>
+            <a:xfrm>
+              <a:off x="7067218" y="4654018"/>
+              <a:ext cx="1792224" cy="219456"/>
+            </a:xfrm>
+            <a:prstGeom prst="rect">
+              <a:avLst/>
+            </a:prstGeom>
+            <a:noFill/>
+            <a:ln/>
+          </p:spPr>
+          <p:txBody>
+            <a:bodyPr wrap="square" lIns="0" tIns="0" rIns="0" bIns="0" rtlCol="0" anchor="t">
+              <a:normAutofit/>
+            </a:bodyPr>
+            <a:lstStyle/>
+            <a:p>
+              <a:pPr marL="0" indent="0" algn="ctr">
+                <a:lnSpc>
+                  <a:spcPct val="90000"/>
+                </a:lnSpc>
+                <a:buNone/>
+              </a:pPr>
+              <a:r>
+                <a:rPr lang="en-US" sz="780" dirty="0">
+                  <a:solidFill>
+                    <a:srgbClr val="6B7176"/>
+                  </a:solidFill>
+                  <a:latin typeface="Aptos" pitchFamily="34" charset="0"/>
+                  <a:ea typeface="Aptos" pitchFamily="34" charset="-122"/>
+                  <a:cs typeface="Aptos" pitchFamily="34" charset="-120"/>
+                </a:rPr>
+                <a:t>Piczak published LP clip-level reference</a:t>
+              </a:r>
+              <a:endParaRPr lang="en-US" sz="780" dirty="0"/>
+            </a:p>
+          </p:txBody>
+        </p:sp>
+      </p:grpSp>
     </p:spTree>
     <p:extLst>
       <p:ext uri="{BB962C8B-B14F-4D97-AF65-F5344CB8AC3E}">
         <p14:creationId xmlns:p14="http://schemas.microsoft.com/office/powerpoint/2010/main" val="1825942691"/>
       </p:ext>
     </p:extLst>
-  </p:cSld>
-  <p:clrMapOvr>
-    <a:masterClrMapping/>
-  </p:clrMapOvr>
-</p:sld>
-</file>
-
-<file path=ppt/slides/slide9.xml><?xml version="1.0" encoding="utf-8"?>
-<p:sld xmlns:a="http://schemas.openxmlformats.org/drawingml/2006/main" xmlns:r="http://schemas.openxmlformats.org/officeDocument/2006/relationships" xmlns:p="http://schemas.openxmlformats.org/presentationml/2006/main">
-  <p:cSld name="Slide 7">
-    <p:bg>
-      <p:bgPr>
-        <a:solidFill>
-          <a:srgbClr val="F7F5EF"/>
-        </a:solidFill>
-        <a:effectLst/>
-      </p:bgPr>
-    </p:bg>
-    <p:spTree>
-      <p:nvGrpSpPr>
-        <p:cNvPr id="1" name=""/>
-        <p:cNvGrpSpPr/>
-        <p:nvPr/>
-      </p:nvGrpSpPr>
-      <p:grpSpPr>
-        <a:xfrm>
-          <a:off x="0" y="0"/>
-          <a:ext cx="0" cy="0"/>
-          <a:chOff x="0" y="0"/>
-          <a:chExt cx="0" cy="0"/>
-        </a:xfrm>
-      </p:grpSpPr>
-      <p:sp>
-        <p:nvSpPr>
-          <p:cNvPr id="2" name="Text 0"/>
-          <p:cNvSpPr/>
-          <p:nvPr/>
-        </p:nvSpPr>
-        <p:spPr>
-          <a:xfrm>
-            <a:off x="594360" y="310896"/>
-            <a:ext cx="4114800" cy="201168"/>
-          </a:xfrm>
-          <a:prstGeom prst="rect">
-            <a:avLst/>
-          </a:prstGeom>
-          <a:noFill/>
-          <a:ln/>
-        </p:spPr>
-        <p:txBody>
-          <a:bodyPr wrap="square" lIns="0" tIns="0" rIns="0" bIns="0" rtlCol="0" anchor="t">
-            <a:normAutofit/>
-          </a:bodyPr>
-          <a:lstStyle/>
-          <a:p>
-            <a:pPr marL="0" indent="0" algn="l">
-              <a:lnSpc>
-                <a:spcPct val="90000"/>
-              </a:lnSpc>
-              <a:buNone/>
-            </a:pPr>
-            <a:r>
-              <a:rPr lang="en-US" sz="880" b="1" dirty="0">
-                <a:solidFill>
-                  <a:srgbClr val="17677D"/>
-                </a:solidFill>
-                <a:latin typeface="Aptos" pitchFamily="34" charset="0"/>
-                <a:ea typeface="Aptos" pitchFamily="34" charset="-122"/>
-                <a:cs typeface="Aptos" pitchFamily="34" charset="-120"/>
-              </a:rPr>
-              <a:t>SECOND TECHNICAL ERA</a:t>
-            </a:r>
-            <a:endParaRPr lang="en-US" sz="880" dirty="0"/>
-          </a:p>
-        </p:txBody>
-      </p:sp>
-      <p:sp>
-        <p:nvSpPr>
-          <p:cNvPr id="3" name="Text 1"/>
-          <p:cNvSpPr/>
-          <p:nvPr/>
-        </p:nvSpPr>
-        <p:spPr>
-          <a:xfrm>
-            <a:off x="566928" y="512064"/>
-            <a:ext cx="5657347" cy="502920"/>
-          </a:xfrm>
-          <a:prstGeom prst="rect">
-            <a:avLst/>
-          </a:prstGeom>
-          <a:noFill/>
-          <a:ln/>
-        </p:spPr>
-        <p:txBody>
-          <a:bodyPr wrap="square" lIns="0" tIns="0" rIns="0" bIns="0" rtlCol="0" anchor="t">
-            <a:normAutofit fontScale="85000" lnSpcReduction="20000"/>
-          </a:bodyPr>
-          <a:lstStyle/>
-          <a:p>
-            <a:pPr marL="0" indent="0" algn="l">
-              <a:lnSpc>
-                <a:spcPct val="90000"/>
-              </a:lnSpc>
-              <a:buNone/>
-            </a:pPr>
-            <a:r>
-              <a:rPr lang="en-US" sz="2600" b="1" dirty="0">
-                <a:solidFill>
-                  <a:srgbClr val="1F2528"/>
-                </a:solidFill>
-                <a:latin typeface="Aptos Display" pitchFamily="34" charset="0"/>
-                <a:ea typeface="Aptos Display" pitchFamily="34" charset="-122"/>
-                <a:cs typeface="Aptos Display" pitchFamily="34" charset="-120"/>
-              </a:rPr>
-              <a:t>Era shift: transfer learning with pretrained CNN models</a:t>
-            </a:r>
-            <a:endParaRPr lang="en-US" sz="2600" dirty="0"/>
-          </a:p>
-        </p:txBody>
-      </p:sp>
-      <p:sp>
-        <p:nvSpPr>
-          <p:cNvPr id="4" name="Shape 2"/>
-          <p:cNvSpPr/>
-          <p:nvPr/>
-        </p:nvSpPr>
-        <p:spPr>
-          <a:xfrm>
-            <a:off x="566928" y="1078992"/>
-            <a:ext cx="11018520" cy="0"/>
-          </a:xfrm>
-          <a:prstGeom prst="line">
-            <a:avLst/>
-          </a:prstGeom>
-          <a:noFill/>
-          <a:ln w="9525">
-            <a:solidFill>
-              <a:srgbClr val="D8D4C8"/>
-            </a:solidFill>
-            <a:prstDash val="solid"/>
-          </a:ln>
-        </p:spPr>
-        <p:txBody>
-          <a:bodyPr/>
-          <a:lstStyle/>
-          <a:p>
-            <a:endParaRPr lang="en-US"/>
-          </a:p>
-        </p:txBody>
-      </p:sp>
-      <p:sp>
-        <p:nvSpPr>
-          <p:cNvPr id="11" name="Text 9"/>
-          <p:cNvSpPr/>
-          <p:nvPr/>
-        </p:nvSpPr>
-        <p:spPr>
-          <a:xfrm>
-            <a:off x="822960" y="1371600"/>
-            <a:ext cx="822960" cy="182880"/>
-          </a:xfrm>
-          <a:prstGeom prst="rect">
-            <a:avLst/>
-          </a:prstGeom>
-          <a:noFill/>
-          <a:ln/>
-        </p:spPr>
-        <p:txBody>
-          <a:bodyPr wrap="square" lIns="0" tIns="0" rIns="0" bIns="0" rtlCol="0" anchor="t">
-            <a:normAutofit/>
-          </a:bodyPr>
-          <a:lstStyle/>
-          <a:p>
-            <a:pPr marL="0" indent="0" algn="l">
-              <a:lnSpc>
-                <a:spcPct val="90000"/>
-              </a:lnSpc>
-              <a:buNone/>
-            </a:pPr>
-            <a:r>
-              <a:rPr lang="en-US" sz="1000" b="1" dirty="0">
-                <a:solidFill>
-                  <a:srgbClr val="17677D"/>
-                </a:solidFill>
-                <a:latin typeface="Aptos" pitchFamily="34" charset="0"/>
-                <a:ea typeface="Aptos" pitchFamily="34" charset="-122"/>
-                <a:cs typeface="Aptos" pitchFamily="34" charset="-120"/>
-              </a:rPr>
-              <a:t>Shift</a:t>
-            </a:r>
-            <a:endParaRPr lang="en-US" sz="1000" dirty="0"/>
-          </a:p>
-        </p:txBody>
-      </p:sp>
-      <p:sp>
-        <p:nvSpPr>
-          <p:cNvPr id="12" name="Text 10"/>
-          <p:cNvSpPr/>
-          <p:nvPr/>
-        </p:nvSpPr>
-        <p:spPr>
-          <a:xfrm>
-            <a:off x="822960" y="1664208"/>
-            <a:ext cx="5486400" cy="438912"/>
-          </a:xfrm>
-          <a:prstGeom prst="rect">
-            <a:avLst/>
-          </a:prstGeom>
-          <a:noFill/>
-          <a:ln/>
-        </p:spPr>
-        <p:txBody>
-          <a:bodyPr wrap="square" lIns="0" tIns="0" rIns="0" bIns="0" rtlCol="0" anchor="t">
-            <a:normAutofit fontScale="85000" lnSpcReduction="10000"/>
-          </a:bodyPr>
-          <a:lstStyle/>
-          <a:p>
-            <a:pPr marL="0" indent="0" algn="l">
-              <a:lnSpc>
-                <a:spcPct val="90000"/>
-              </a:lnSpc>
-              <a:buNone/>
-            </a:pPr>
-            <a:r>
-              <a:rPr lang="en-US" sz="2400" b="1" dirty="0">
-                <a:solidFill>
-                  <a:srgbClr val="1F2528"/>
-                </a:solidFill>
-                <a:latin typeface="Aptos Display" pitchFamily="34" charset="0"/>
-                <a:ea typeface="Aptos Display" pitchFamily="34" charset="-122"/>
-                <a:cs typeface="Aptos Display" pitchFamily="34" charset="-120"/>
-              </a:rPr>
-              <a:t>Learn the representation elsewhere. Adapt it here.</a:t>
-            </a:r>
-            <a:endParaRPr lang="en-US" sz="2400" dirty="0"/>
-          </a:p>
-        </p:txBody>
-      </p:sp>
-      <p:sp>
-        <p:nvSpPr>
-          <p:cNvPr id="13" name="Shape 11"/>
-          <p:cNvSpPr/>
-          <p:nvPr/>
-        </p:nvSpPr>
-        <p:spPr>
-          <a:xfrm>
-            <a:off x="914400" y="2743200"/>
-            <a:ext cx="2743200" cy="1005840"/>
-          </a:xfrm>
-          <a:prstGeom prst="rect">
-            <a:avLst/>
-          </a:prstGeom>
-          <a:solidFill>
-            <a:srgbClr val="FFFFFF"/>
-          </a:solidFill>
-          <a:ln w="15240">
-            <a:solidFill>
-              <a:srgbClr val="17677D"/>
-            </a:solidFill>
-            <a:prstDash val="solid"/>
-          </a:ln>
-        </p:spPr>
-        <p:txBody>
-          <a:bodyPr/>
-          <a:lstStyle/>
-          <a:p>
-            <a:endParaRPr lang="en-US"/>
-          </a:p>
-        </p:txBody>
-      </p:sp>
-      <p:sp>
-        <p:nvSpPr>
-          <p:cNvPr id="14" name="Text 12"/>
-          <p:cNvSpPr/>
-          <p:nvPr/>
-        </p:nvSpPr>
-        <p:spPr>
-          <a:xfrm>
-            <a:off x="1097280" y="2971800"/>
-            <a:ext cx="2377440" cy="182880"/>
-          </a:xfrm>
-          <a:prstGeom prst="rect">
-            <a:avLst/>
-          </a:prstGeom>
-          <a:noFill/>
-          <a:ln/>
-        </p:spPr>
-        <p:txBody>
-          <a:bodyPr wrap="square" lIns="0" tIns="0" rIns="0" bIns="0" rtlCol="0" anchor="t">
-            <a:normAutofit lnSpcReduction="10000"/>
-          </a:bodyPr>
-          <a:lstStyle/>
-          <a:p>
-            <a:pPr marL="0" indent="0" algn="ctr">
-              <a:lnSpc>
-                <a:spcPct val="90000"/>
-              </a:lnSpc>
-              <a:buNone/>
-            </a:pPr>
-            <a:r>
-              <a:rPr lang="en-US" sz="1350" b="1" dirty="0">
-                <a:solidFill>
-                  <a:srgbClr val="17677D"/>
-                </a:solidFill>
-                <a:latin typeface="Aptos" pitchFamily="34" charset="0"/>
-                <a:ea typeface="Aptos" pitchFamily="34" charset="-122"/>
-                <a:cs typeface="Aptos" pitchFamily="34" charset="-120"/>
-              </a:rPr>
-              <a:t>Large audio datasets</a:t>
-            </a:r>
-            <a:endParaRPr lang="en-US" sz="1350" dirty="0"/>
-          </a:p>
-        </p:txBody>
-      </p:sp>
-      <p:sp>
-        <p:nvSpPr>
-          <p:cNvPr id="15" name="Text 13"/>
-          <p:cNvSpPr/>
-          <p:nvPr/>
-        </p:nvSpPr>
-        <p:spPr>
-          <a:xfrm>
-            <a:off x="1097280" y="3246120"/>
-            <a:ext cx="2377440" cy="146304"/>
-          </a:xfrm>
-          <a:prstGeom prst="rect">
-            <a:avLst/>
-          </a:prstGeom>
-          <a:noFill/>
-          <a:ln/>
-        </p:spPr>
-        <p:txBody>
-          <a:bodyPr wrap="square" lIns="0" tIns="0" rIns="0" bIns="0" rtlCol="0" anchor="t">
-            <a:normAutofit/>
-          </a:bodyPr>
-          <a:lstStyle/>
-          <a:p>
-            <a:pPr marL="0" indent="0" algn="ctr">
-              <a:lnSpc>
-                <a:spcPct val="90000"/>
-              </a:lnSpc>
-              <a:buNone/>
-            </a:pPr>
-            <a:r>
-              <a:rPr lang="en-US" sz="850" dirty="0">
-                <a:solidFill>
-                  <a:srgbClr val="6B7176"/>
-                </a:solidFill>
-                <a:latin typeface="Aptos" pitchFamily="34" charset="0"/>
-                <a:ea typeface="Aptos" pitchFamily="34" charset="-122"/>
-                <a:cs typeface="Aptos" pitchFamily="34" charset="-120"/>
-              </a:rPr>
-              <a:t>pretraining</a:t>
-            </a:r>
-            <a:endParaRPr lang="en-US" sz="850" dirty="0"/>
-          </a:p>
-        </p:txBody>
-      </p:sp>
-      <p:sp>
-        <p:nvSpPr>
-          <p:cNvPr id="16" name="Shape 14"/>
-          <p:cNvSpPr/>
-          <p:nvPr/>
-        </p:nvSpPr>
-        <p:spPr>
-          <a:xfrm>
-            <a:off x="3886200" y="3246120"/>
-            <a:ext cx="1069848" cy="0"/>
-          </a:xfrm>
-          <a:prstGeom prst="line">
-            <a:avLst/>
-          </a:prstGeom>
-          <a:noFill/>
-          <a:ln w="19050">
-            <a:solidFill>
-              <a:srgbClr val="BFC6C8"/>
-            </a:solidFill>
-            <a:prstDash val="solid"/>
-            <a:tailEnd type="triangle"/>
-          </a:ln>
-        </p:spPr>
-        <p:txBody>
-          <a:bodyPr/>
-          <a:lstStyle/>
-          <a:p>
-            <a:endParaRPr lang="en-US"/>
-          </a:p>
-        </p:txBody>
-      </p:sp>
-      <p:sp>
-        <p:nvSpPr>
-          <p:cNvPr id="17" name="Shape 15"/>
-          <p:cNvSpPr/>
-          <p:nvPr/>
-        </p:nvSpPr>
-        <p:spPr>
-          <a:xfrm>
-            <a:off x="5138928" y="2743200"/>
-            <a:ext cx="2148840" cy="1005840"/>
-          </a:xfrm>
-          <a:prstGeom prst="rect">
-            <a:avLst/>
-          </a:prstGeom>
-          <a:solidFill>
-            <a:srgbClr val="FDFDFB"/>
-          </a:solidFill>
-          <a:ln w="10160">
-            <a:solidFill>
-              <a:srgbClr val="17677D"/>
-            </a:solidFill>
-            <a:prstDash val="solid"/>
-          </a:ln>
-        </p:spPr>
-        <p:txBody>
-          <a:bodyPr/>
-          <a:lstStyle/>
-          <a:p>
-            <a:endParaRPr lang="en-US"/>
-          </a:p>
-        </p:txBody>
-      </p:sp>
-      <p:sp>
-        <p:nvSpPr>
-          <p:cNvPr id="18" name="Text 16"/>
-          <p:cNvSpPr/>
-          <p:nvPr/>
-        </p:nvSpPr>
-        <p:spPr>
-          <a:xfrm>
-            <a:off x="5212080" y="3172968"/>
-            <a:ext cx="2002536" cy="164592"/>
-          </a:xfrm>
-          <a:prstGeom prst="rect">
-            <a:avLst/>
-          </a:prstGeom>
-          <a:noFill/>
-          <a:ln/>
-        </p:spPr>
-        <p:txBody>
-          <a:bodyPr wrap="square" lIns="0" tIns="0" rIns="0" bIns="0" rtlCol="0" anchor="ctr">
-            <a:normAutofit fontScale="62500" lnSpcReduction="20000"/>
-          </a:bodyPr>
-          <a:lstStyle/>
-          <a:p>
-            <a:pPr marL="0" indent="0" algn="ctr">
-              <a:lnSpc>
-                <a:spcPct val="90000"/>
-              </a:lnSpc>
-              <a:buNone/>
-            </a:pPr>
-            <a:r>
-              <a:rPr lang="en-US" sz="1100" dirty="0">
-                <a:solidFill>
-                  <a:srgbClr val="1F2528"/>
-                </a:solidFill>
-                <a:latin typeface="Aptos" pitchFamily="34" charset="0"/>
-                <a:ea typeface="Aptos" pitchFamily="34" charset="-122"/>
-                <a:cs typeface="Aptos" pitchFamily="34" charset="-120"/>
-              </a:rPr>
-              <a:t>Pretrained</a:t>
-            </a:r>
-            <a:endParaRPr lang="en-US" sz="1100" dirty="0"/>
-          </a:p>
-          <a:p>
-            <a:pPr marL="0" indent="0" algn="ctr">
-              <a:lnSpc>
-                <a:spcPct val="90000"/>
-              </a:lnSpc>
-              <a:buNone/>
-            </a:pPr>
-            <a:r>
-              <a:rPr lang="en-US" sz="1100" dirty="0">
-                <a:solidFill>
-                  <a:srgbClr val="1F2528"/>
-                </a:solidFill>
-                <a:latin typeface="Aptos" pitchFamily="34" charset="0"/>
-                <a:ea typeface="Aptos" pitchFamily="34" charset="-122"/>
-                <a:cs typeface="Aptos" pitchFamily="34" charset="-120"/>
-              </a:rPr>
-              <a:t>CNN-style encoder</a:t>
-            </a:r>
-            <a:endParaRPr lang="en-US" sz="1100" dirty="0"/>
-          </a:p>
-        </p:txBody>
-      </p:sp>
-      <p:sp>
-        <p:nvSpPr>
-          <p:cNvPr id="19" name="Shape 17"/>
-          <p:cNvSpPr/>
-          <p:nvPr/>
-        </p:nvSpPr>
-        <p:spPr>
-          <a:xfrm>
-            <a:off x="7452360" y="3246120"/>
-            <a:ext cx="1005840" cy="0"/>
-          </a:xfrm>
-          <a:prstGeom prst="line">
-            <a:avLst/>
-          </a:prstGeom>
-          <a:noFill/>
-          <a:ln w="19050">
-            <a:solidFill>
-              <a:srgbClr val="BFC6C8"/>
-            </a:solidFill>
-            <a:prstDash val="solid"/>
-            <a:tailEnd type="triangle"/>
-          </a:ln>
-        </p:spPr>
-        <p:txBody>
-          <a:bodyPr/>
-          <a:lstStyle/>
-          <a:p>
-            <a:endParaRPr lang="en-US"/>
-          </a:p>
-        </p:txBody>
-      </p:sp>
-      <p:sp>
-        <p:nvSpPr>
-          <p:cNvPr id="20" name="Shape 18"/>
-          <p:cNvSpPr/>
-          <p:nvPr/>
-        </p:nvSpPr>
-        <p:spPr>
-          <a:xfrm>
-            <a:off x="8641080" y="2743200"/>
-            <a:ext cx="1920240" cy="1005840"/>
-          </a:xfrm>
-          <a:prstGeom prst="rect">
-            <a:avLst/>
-          </a:prstGeom>
-          <a:solidFill>
-            <a:srgbClr val="FDFDFB"/>
-          </a:solidFill>
-          <a:ln w="10160">
-            <a:solidFill>
-              <a:srgbClr val="BFC6C8"/>
-            </a:solidFill>
-            <a:prstDash val="solid"/>
-          </a:ln>
-        </p:spPr>
-        <p:txBody>
-          <a:bodyPr/>
-          <a:lstStyle/>
-          <a:p>
-            <a:endParaRPr lang="en-US"/>
-          </a:p>
-        </p:txBody>
-      </p:sp>
-      <p:sp>
-        <p:nvSpPr>
-          <p:cNvPr id="21" name="Text 19"/>
-          <p:cNvSpPr/>
-          <p:nvPr/>
-        </p:nvSpPr>
-        <p:spPr>
-          <a:xfrm>
-            <a:off x="8714232" y="3172968"/>
-            <a:ext cx="1773936" cy="164592"/>
-          </a:xfrm>
-          <a:prstGeom prst="rect">
-            <a:avLst/>
-          </a:prstGeom>
-          <a:noFill/>
-          <a:ln/>
-        </p:spPr>
-        <p:txBody>
-          <a:bodyPr wrap="square" lIns="0" tIns="0" rIns="0" bIns="0" rtlCol="0" anchor="ctr">
-            <a:normAutofit fontScale="62500" lnSpcReduction="20000"/>
-          </a:bodyPr>
-          <a:lstStyle/>
-          <a:p>
-            <a:pPr marL="0" indent="0" algn="ctr">
-              <a:lnSpc>
-                <a:spcPct val="90000"/>
-              </a:lnSpc>
-              <a:buNone/>
-            </a:pPr>
-            <a:r>
-              <a:rPr lang="en-US" sz="1100" dirty="0">
-                <a:solidFill>
-                  <a:srgbClr val="1F2528"/>
-                </a:solidFill>
-                <a:latin typeface="Aptos" pitchFamily="34" charset="0"/>
-                <a:ea typeface="Aptos" pitchFamily="34" charset="-122"/>
-                <a:cs typeface="Aptos" pitchFamily="34" charset="-120"/>
-              </a:rPr>
-              <a:t>ESC-50</a:t>
-            </a:r>
-            <a:endParaRPr lang="en-US" sz="1100" dirty="0"/>
-          </a:p>
-          <a:p>
-            <a:pPr marL="0" indent="0" algn="ctr">
-              <a:lnSpc>
-                <a:spcPct val="90000"/>
-              </a:lnSpc>
-              <a:buNone/>
-            </a:pPr>
-            <a:r>
-              <a:rPr lang="en-US" sz="1100" dirty="0">
-                <a:solidFill>
-                  <a:srgbClr val="1F2528"/>
-                </a:solidFill>
-                <a:latin typeface="Aptos" pitchFamily="34" charset="0"/>
-                <a:ea typeface="Aptos" pitchFamily="34" charset="-122"/>
-                <a:cs typeface="Aptos" pitchFamily="34" charset="-120"/>
-              </a:rPr>
-              <a:t>fine-tuning</a:t>
-            </a:r>
-            <a:endParaRPr lang="en-US" sz="1100" dirty="0"/>
-          </a:p>
-        </p:txBody>
-      </p:sp>
-      <p:sp>
-        <p:nvSpPr>
-          <p:cNvPr id="22" name="Text 20"/>
-          <p:cNvSpPr/>
-          <p:nvPr/>
-        </p:nvSpPr>
-        <p:spPr>
-          <a:xfrm>
-            <a:off x="914400" y="4572000"/>
-            <a:ext cx="9509760" cy="1024128"/>
-          </a:xfrm>
-          <a:prstGeom prst="rect">
-            <a:avLst/>
-          </a:prstGeom>
-          <a:noFill/>
-          <a:ln/>
-        </p:spPr>
-        <p:txBody>
-          <a:bodyPr wrap="square" lIns="254" tIns="254" rIns="254" bIns="254" rtlCol="0" anchor="ctr">
-            <a:normAutofit/>
-          </a:bodyPr>
-          <a:lstStyle/>
-          <a:p>
-            <a:r>
-              <a:rPr lang="en-US" sz="1300" dirty="0">
-                <a:solidFill>
-                  <a:srgbClr val="1F2528"/>
-                </a:solidFill>
-                <a:latin typeface="Aptos" pitchFamily="34" charset="0"/>
-                <a:ea typeface="Aptos" pitchFamily="34" charset="-122"/>
-                <a:cs typeface="Aptos" pitchFamily="34" charset="-120"/>
-              </a:rPr>
-              <a:t>ESC-50 is small for learning robust audio features from scratch.</a:t>
-            </a:r>
-            <a:endParaRPr lang="en-US" sz="1300" dirty="0"/>
-          </a:p>
-          <a:p>
-            <a:endParaRPr lang="en-US" sz="1300" dirty="0"/>
-          </a:p>
-          <a:p>
-            <a:r>
-              <a:rPr lang="en-US" sz="1300" dirty="0">
-                <a:solidFill>
-                  <a:srgbClr val="1F2528"/>
-                </a:solidFill>
-                <a:latin typeface="Aptos" pitchFamily="34" charset="0"/>
-                <a:ea typeface="Aptos" pitchFamily="34" charset="-122"/>
-                <a:cs typeface="Aptos" pitchFamily="34" charset="-120"/>
-              </a:rPr>
-              <a:t>Transfer learning imports representations learned from much larger audio datasets.</a:t>
-            </a:r>
-            <a:endParaRPr lang="en-US" sz="1300" dirty="0"/>
-          </a:p>
-          <a:p>
-            <a:endParaRPr lang="en-US" sz="1300" dirty="0"/>
-          </a:p>
-          <a:p>
-            <a:r>
-              <a:rPr lang="en-US" sz="1300" dirty="0">
-                <a:solidFill>
-                  <a:srgbClr val="1F2528"/>
-                </a:solidFill>
-                <a:latin typeface="Aptos" pitchFamily="34" charset="0"/>
-                <a:ea typeface="Aptos" pitchFamily="34" charset="-122"/>
-                <a:cs typeface="Aptos" pitchFamily="34" charset="-120"/>
-              </a:rPr>
-              <a:t>This era tests pretrained CNN-style audio models before transformer-based audio encoders.</a:t>
-            </a:r>
-            <a:endParaRPr lang="en-US" sz="1300" dirty="0"/>
-          </a:p>
-        </p:txBody>
-      </p:sp>
-      <p:sp>
-        <p:nvSpPr>
-          <p:cNvPr id="23" name="Text 21"/>
-          <p:cNvSpPr/>
-          <p:nvPr/>
-        </p:nvSpPr>
-        <p:spPr>
-          <a:xfrm>
-            <a:off x="11064240" y="6473952"/>
-            <a:ext cx="411480" cy="164592"/>
-          </a:xfrm>
-          <a:prstGeom prst="rect">
-            <a:avLst/>
-          </a:prstGeom>
-          <a:noFill/>
-          <a:ln/>
-        </p:spPr>
-        <p:txBody>
-          <a:bodyPr wrap="square" lIns="0" tIns="0" rIns="0" bIns="0" rtlCol="0" anchor="t">
-            <a:normAutofit/>
-          </a:bodyPr>
-          <a:lstStyle/>
-          <a:p>
-            <a:pPr marL="0" indent="0" algn="r">
-              <a:lnSpc>
-                <a:spcPct val="90000"/>
-              </a:lnSpc>
-              <a:buNone/>
-            </a:pPr>
-            <a:r>
-              <a:rPr lang="en-US" sz="750" dirty="0">
-                <a:solidFill>
-                  <a:srgbClr val="6B7176"/>
-                </a:solidFill>
-                <a:latin typeface="Aptos" pitchFamily="34" charset="0"/>
-                <a:ea typeface="Aptos" pitchFamily="34" charset="-122"/>
-                <a:cs typeface="Aptos" pitchFamily="34" charset="-120"/>
-              </a:rPr>
-              <a:t>07</a:t>
-            </a:r>
-            <a:endParaRPr lang="en-US" sz="750" dirty="0"/>
-          </a:p>
-        </p:txBody>
-      </p:sp>
-      <p:pic>
-        <p:nvPicPr>
-          <p:cNvPr id="31" name="Picture 2" descr="Cornell University Logo, symbol, meaning, history, PNG, brand">
-            <a:extLst>
-              <a:ext uri="{FF2B5EF4-FFF2-40B4-BE49-F238E27FC236}">
-                <a16:creationId xmlns:a16="http://schemas.microsoft.com/office/drawing/2014/main" id="{62E0AF86-B513-90EF-C7B7-DDB5A9E396B9}"/>
-              </a:ext>
-            </a:extLst>
-          </p:cNvPr>
-          <p:cNvPicPr>
-            <a:picLocks noChangeAspect="1" noChangeArrowheads="1"/>
-          </p:cNvPicPr>
-          <p:nvPr/>
-        </p:nvPicPr>
-        <p:blipFill rotWithShape="1">
-          <a:blip r:embed="rId3">
-            <a:extLst>
-              <a:ext uri="{28A0092B-C50C-407E-A947-70E740481C1C}">
-                <a14:useLocalDpi xmlns:a14="http://schemas.microsoft.com/office/drawing/2010/main" val="0"/>
-              </a:ext>
-            </a:extLst>
-          </a:blip>
-          <a:srcRect l="15934" r="15589"/>
-          <a:stretch/>
-        </p:blipFill>
-        <p:spPr bwMode="auto">
-          <a:xfrm>
-            <a:off x="11320507" y="147128"/>
-            <a:ext cx="863884" cy="709633"/>
-          </a:xfrm>
-          <a:prstGeom prst="rect">
-            <a:avLst/>
-          </a:prstGeom>
-          <a:noFill/>
-          <a:extLst>
-            <a:ext uri="{909E8E84-426E-40DD-AFC4-6F175D3DCCD1}">
-              <a14:hiddenFill xmlns:a14="http://schemas.microsoft.com/office/drawing/2010/main">
-                <a:solidFill>
-                  <a:srgbClr val="FFFFFF"/>
-                </a:solidFill>
-              </a14:hiddenFill>
-            </a:ext>
-          </a:extLst>
-        </p:spPr>
-      </p:pic>
-      <p:sp>
-        <p:nvSpPr>
-          <p:cNvPr id="32" name="Shape 19">
-            <a:extLst>
-              <a:ext uri="{FF2B5EF4-FFF2-40B4-BE49-F238E27FC236}">
-                <a16:creationId xmlns:a16="http://schemas.microsoft.com/office/drawing/2014/main" id="{260A39BB-675D-9A5C-9111-93699EA456EF}"/>
-              </a:ext>
-            </a:extLst>
-          </p:cNvPr>
-          <p:cNvSpPr/>
-          <p:nvPr/>
-        </p:nvSpPr>
-        <p:spPr>
-          <a:xfrm>
-            <a:off x="6237447" y="751408"/>
-            <a:ext cx="1809206" cy="295381"/>
-          </a:xfrm>
-          <a:prstGeom prst="chevron">
-            <a:avLst/>
-          </a:prstGeom>
-          <a:solidFill>
-            <a:srgbClr val="D7DDE0">
-              <a:alpha val="90000"/>
-            </a:srgbClr>
-          </a:solidFill>
-          <a:ln w="12700">
-            <a:solidFill>
-              <a:srgbClr val="F7F5EF"/>
-            </a:solidFill>
-            <a:prstDash val="solid"/>
-          </a:ln>
-        </p:spPr>
-        <p:txBody>
-          <a:bodyPr/>
-          <a:lstStyle/>
-          <a:p>
-            <a:endParaRPr lang="en-US" sz="1100" dirty="0"/>
-          </a:p>
-        </p:txBody>
-      </p:sp>
-      <p:sp>
-        <p:nvSpPr>
-          <p:cNvPr id="33" name="Text 20">
-            <a:extLst>
-              <a:ext uri="{FF2B5EF4-FFF2-40B4-BE49-F238E27FC236}">
-                <a16:creationId xmlns:a16="http://schemas.microsoft.com/office/drawing/2014/main" id="{BA526180-DF64-53B3-1180-B6DBF5A9B1C8}"/>
-              </a:ext>
-            </a:extLst>
-          </p:cNvPr>
-          <p:cNvSpPr/>
-          <p:nvPr/>
-        </p:nvSpPr>
-        <p:spPr>
-          <a:xfrm>
-            <a:off x="6287692" y="833886"/>
-            <a:ext cx="1597682" cy="75563"/>
-          </a:xfrm>
-          <a:prstGeom prst="rect">
-            <a:avLst/>
-          </a:prstGeom>
-          <a:noFill/>
-          <a:ln/>
-        </p:spPr>
-        <p:txBody>
-          <a:bodyPr wrap="square" lIns="0" tIns="0" rIns="0" bIns="0" rtlCol="0" anchor="t">
-            <a:normAutofit fontScale="92500" lnSpcReduction="20000"/>
-          </a:bodyPr>
-          <a:lstStyle/>
-          <a:p>
-            <a:pPr algn="ctr">
-              <a:lnSpc>
-                <a:spcPct val="90000"/>
-              </a:lnSpc>
-            </a:pPr>
-            <a:r>
-              <a:rPr lang="en-US" sz="700" b="1" dirty="0">
-                <a:solidFill>
-                  <a:srgbClr val="30383D"/>
-                </a:solidFill>
-                <a:latin typeface="Aptos" pitchFamily="34" charset="0"/>
-              </a:rPr>
-              <a:t>Training from scratch</a:t>
-            </a:r>
-          </a:p>
-        </p:txBody>
-      </p:sp>
-      <p:sp>
-        <p:nvSpPr>
-          <p:cNvPr id="34" name="Text 21">
-            <a:extLst>
-              <a:ext uri="{FF2B5EF4-FFF2-40B4-BE49-F238E27FC236}">
-                <a16:creationId xmlns:a16="http://schemas.microsoft.com/office/drawing/2014/main" id="{91AA0ADC-A28C-7C05-372C-FD6A76EC5657}"/>
-              </a:ext>
-            </a:extLst>
-          </p:cNvPr>
-          <p:cNvSpPr/>
-          <p:nvPr/>
-        </p:nvSpPr>
-        <p:spPr>
-          <a:xfrm>
-            <a:off x="6295809" y="928966"/>
-            <a:ext cx="1597682" cy="58389"/>
-          </a:xfrm>
-          <a:prstGeom prst="rect">
-            <a:avLst/>
-          </a:prstGeom>
-          <a:noFill/>
-          <a:ln/>
-        </p:spPr>
-        <p:txBody>
-          <a:bodyPr wrap="square" lIns="0" tIns="0" rIns="0" bIns="0" rtlCol="0" anchor="t">
-            <a:normAutofit fontScale="92500" lnSpcReduction="20000"/>
-          </a:bodyPr>
-          <a:lstStyle/>
-          <a:p>
-            <a:pPr marL="0" indent="0" algn="ctr">
-              <a:lnSpc>
-                <a:spcPct val="90000"/>
-              </a:lnSpc>
-              <a:buNone/>
-            </a:pPr>
-            <a:r>
-              <a:rPr lang="en-US" sz="500" dirty="0" err="1">
-                <a:solidFill>
-                  <a:srgbClr val="6B7176"/>
-                </a:solidFill>
-                <a:latin typeface="Aptos" pitchFamily="34" charset="0"/>
-              </a:rPr>
-              <a:t>Piczak</a:t>
-            </a:r>
-            <a:r>
-              <a:rPr lang="en-US" sz="500" dirty="0">
-                <a:solidFill>
-                  <a:srgbClr val="6B7176"/>
-                </a:solidFill>
-                <a:latin typeface="Aptos" pitchFamily="34" charset="0"/>
-              </a:rPr>
-              <a:t> CNN | Variations | LSTM</a:t>
-            </a:r>
-          </a:p>
-        </p:txBody>
-      </p:sp>
-      <p:sp>
-        <p:nvSpPr>
-          <p:cNvPr id="35" name="Shape 22">
-            <a:extLst>
-              <a:ext uri="{FF2B5EF4-FFF2-40B4-BE49-F238E27FC236}">
-                <a16:creationId xmlns:a16="http://schemas.microsoft.com/office/drawing/2014/main" id="{7BC609B8-2454-D1E2-FD78-ECFA4A2277B6}"/>
-              </a:ext>
-            </a:extLst>
-          </p:cNvPr>
-          <p:cNvSpPr/>
-          <p:nvPr/>
-        </p:nvSpPr>
-        <p:spPr>
-          <a:xfrm>
-            <a:off x="7904546" y="750102"/>
-            <a:ext cx="1809206" cy="295381"/>
-          </a:xfrm>
-          <a:prstGeom prst="chevron">
-            <a:avLst/>
-          </a:prstGeom>
-          <a:solidFill>
-            <a:srgbClr val="17677D"/>
-          </a:solidFill>
-          <a:ln w="12700">
-            <a:solidFill>
-              <a:srgbClr val="17677D">
-                <a:alpha val="0"/>
-              </a:srgbClr>
-            </a:solidFill>
-            <a:prstDash val="solid"/>
-          </a:ln>
-        </p:spPr>
-        <p:txBody>
-          <a:bodyPr/>
-          <a:lstStyle/>
-          <a:p>
-            <a:endParaRPr lang="en-US"/>
-          </a:p>
-        </p:txBody>
-      </p:sp>
-      <p:sp>
-        <p:nvSpPr>
-          <p:cNvPr id="36" name="Text 23">
-            <a:extLst>
-              <a:ext uri="{FF2B5EF4-FFF2-40B4-BE49-F238E27FC236}">
-                <a16:creationId xmlns:a16="http://schemas.microsoft.com/office/drawing/2014/main" id="{5795C228-2271-C0A9-F5DA-A886FEE6BFCA}"/>
-              </a:ext>
-            </a:extLst>
-          </p:cNvPr>
-          <p:cNvSpPr/>
-          <p:nvPr/>
-        </p:nvSpPr>
-        <p:spPr>
-          <a:xfrm>
-            <a:off x="7976392" y="839252"/>
-            <a:ext cx="1597682" cy="75563"/>
-          </a:xfrm>
-          <a:prstGeom prst="rect">
-            <a:avLst/>
-          </a:prstGeom>
-          <a:noFill/>
-          <a:ln/>
-        </p:spPr>
-        <p:txBody>
-          <a:bodyPr wrap="square" lIns="0" tIns="0" rIns="0" bIns="0" rtlCol="0" anchor="t">
-            <a:normAutofit fontScale="92500" lnSpcReduction="20000"/>
-          </a:bodyPr>
-          <a:lstStyle/>
-          <a:p>
-            <a:pPr algn="ctr">
-              <a:lnSpc>
-                <a:spcPct val="90000"/>
-              </a:lnSpc>
-            </a:pPr>
-            <a:r>
-              <a:rPr lang="en-US" sz="700" b="1" dirty="0">
-                <a:solidFill>
-                  <a:srgbClr val="FFFFFF"/>
-                </a:solidFill>
-                <a:latin typeface="Aptos" pitchFamily="34" charset="0"/>
-              </a:rPr>
-              <a:t>Transfer learning: pretrained CNN</a:t>
-            </a:r>
-          </a:p>
-        </p:txBody>
-      </p:sp>
-      <p:sp>
-        <p:nvSpPr>
-          <p:cNvPr id="37" name="Text 24">
-            <a:extLst>
-              <a:ext uri="{FF2B5EF4-FFF2-40B4-BE49-F238E27FC236}">
-                <a16:creationId xmlns:a16="http://schemas.microsoft.com/office/drawing/2014/main" id="{9EEFE770-72AD-FDAB-7578-75687A89F7E1}"/>
-              </a:ext>
-            </a:extLst>
-          </p:cNvPr>
-          <p:cNvSpPr/>
-          <p:nvPr/>
-        </p:nvSpPr>
-        <p:spPr>
-          <a:xfrm>
-            <a:off x="7997198" y="941012"/>
-            <a:ext cx="1597682" cy="58389"/>
-          </a:xfrm>
-          <a:prstGeom prst="rect">
-            <a:avLst/>
-          </a:prstGeom>
-          <a:noFill/>
-          <a:ln/>
-        </p:spPr>
-        <p:txBody>
-          <a:bodyPr wrap="square" lIns="0" tIns="0" rIns="0" bIns="0" rtlCol="0" anchor="t">
-            <a:normAutofit fontScale="92500" lnSpcReduction="20000"/>
-          </a:bodyPr>
-          <a:lstStyle/>
-          <a:p>
-            <a:pPr algn="ctr">
-              <a:lnSpc>
-                <a:spcPct val="90000"/>
-              </a:lnSpc>
-            </a:pPr>
-            <a:r>
-              <a:rPr lang="en-US" sz="500" dirty="0">
-                <a:solidFill>
-                  <a:srgbClr val="FFFFFF"/>
-                </a:solidFill>
-                <a:latin typeface="Aptos" pitchFamily="34" charset="0"/>
-              </a:rPr>
-              <a:t>VGGish | YAMNet</a:t>
-            </a:r>
-          </a:p>
-        </p:txBody>
-      </p:sp>
-      <p:sp>
-        <p:nvSpPr>
-          <p:cNvPr id="38" name="Shape 25">
-            <a:extLst>
-              <a:ext uri="{FF2B5EF4-FFF2-40B4-BE49-F238E27FC236}">
-                <a16:creationId xmlns:a16="http://schemas.microsoft.com/office/drawing/2014/main" id="{87FAA393-F71D-9400-5795-A3916A051E8B}"/>
-              </a:ext>
-            </a:extLst>
-          </p:cNvPr>
-          <p:cNvSpPr/>
-          <p:nvPr/>
-        </p:nvSpPr>
-        <p:spPr>
-          <a:xfrm>
-            <a:off x="9564782" y="749723"/>
-            <a:ext cx="1755200" cy="295381"/>
-          </a:xfrm>
-          <a:prstGeom prst="chevron">
-            <a:avLst/>
-          </a:prstGeom>
-          <a:solidFill>
-            <a:srgbClr val="D7DDE0">
-              <a:alpha val="90000"/>
-            </a:srgbClr>
-          </a:solidFill>
-          <a:ln w="12700">
-            <a:solidFill>
-              <a:srgbClr val="F7F5EF"/>
-            </a:solidFill>
-            <a:prstDash val="solid"/>
-          </a:ln>
-        </p:spPr>
-        <p:txBody>
-          <a:bodyPr/>
-          <a:lstStyle/>
-          <a:p>
-            <a:endParaRPr lang="en-US" sz="1100"/>
-          </a:p>
-        </p:txBody>
-      </p:sp>
-      <p:sp>
-        <p:nvSpPr>
-          <p:cNvPr id="39" name="Text 26">
-            <a:extLst>
-              <a:ext uri="{FF2B5EF4-FFF2-40B4-BE49-F238E27FC236}">
-                <a16:creationId xmlns:a16="http://schemas.microsoft.com/office/drawing/2014/main" id="{180CCBB2-1146-638B-A7EE-280D19E1094A}"/>
-              </a:ext>
-            </a:extLst>
-          </p:cNvPr>
-          <p:cNvSpPr/>
-          <p:nvPr/>
-        </p:nvSpPr>
-        <p:spPr>
-          <a:xfrm>
-            <a:off x="9657605" y="848441"/>
-            <a:ext cx="1597682" cy="75563"/>
-          </a:xfrm>
-          <a:prstGeom prst="rect">
-            <a:avLst/>
-          </a:prstGeom>
-          <a:noFill/>
-          <a:ln/>
-        </p:spPr>
-        <p:txBody>
-          <a:bodyPr wrap="square" lIns="0" tIns="0" rIns="0" bIns="0" rtlCol="0" anchor="t">
-            <a:normAutofit fontScale="92500" lnSpcReduction="20000"/>
-          </a:bodyPr>
-          <a:lstStyle/>
-          <a:p>
-            <a:pPr marL="0" indent="0" algn="ctr">
-              <a:lnSpc>
-                <a:spcPct val="90000"/>
-              </a:lnSpc>
-              <a:buNone/>
-            </a:pPr>
-            <a:r>
-              <a:rPr lang="en-US" sz="700" b="1" dirty="0">
-                <a:solidFill>
-                  <a:srgbClr val="30383D"/>
-                </a:solidFill>
-                <a:latin typeface="Aptos" pitchFamily="34" charset="0"/>
-                <a:ea typeface="Aptos" pitchFamily="34" charset="-122"/>
-                <a:cs typeface="Aptos" pitchFamily="34" charset="-120"/>
-              </a:rPr>
-              <a:t>Transfer learning: pretrained transformers</a:t>
-            </a:r>
-            <a:endParaRPr lang="en-US" sz="700" dirty="0"/>
-          </a:p>
-        </p:txBody>
-      </p:sp>
-      <p:sp>
-        <p:nvSpPr>
-          <p:cNvPr id="40" name="Text 27">
-            <a:extLst>
-              <a:ext uri="{FF2B5EF4-FFF2-40B4-BE49-F238E27FC236}">
-                <a16:creationId xmlns:a16="http://schemas.microsoft.com/office/drawing/2014/main" id="{3FEF8C9C-411D-2FBC-9DE3-A476A096BB75}"/>
-              </a:ext>
-            </a:extLst>
-          </p:cNvPr>
-          <p:cNvSpPr/>
-          <p:nvPr/>
-        </p:nvSpPr>
-        <p:spPr>
-          <a:xfrm>
-            <a:off x="9657605" y="944489"/>
-            <a:ext cx="1662902" cy="107931"/>
-          </a:xfrm>
-          <a:prstGeom prst="rect">
-            <a:avLst/>
-          </a:prstGeom>
-          <a:noFill/>
-          <a:ln/>
-        </p:spPr>
-        <p:txBody>
-          <a:bodyPr wrap="square" lIns="0" tIns="0" rIns="0" bIns="0" rtlCol="0" anchor="t">
-            <a:normAutofit/>
-          </a:bodyPr>
-          <a:lstStyle/>
-          <a:p>
-            <a:pPr marL="0" indent="0" algn="ctr">
-              <a:lnSpc>
-                <a:spcPct val="90000"/>
-              </a:lnSpc>
-              <a:buNone/>
-            </a:pPr>
-            <a:r>
-              <a:rPr lang="en-US" sz="500" dirty="0">
-                <a:solidFill>
-                  <a:srgbClr val="6B7176"/>
-                </a:solidFill>
-                <a:latin typeface="Aptos" pitchFamily="34" charset="0"/>
-                <a:ea typeface="Aptos" pitchFamily="34" charset="-122"/>
-                <a:cs typeface="Aptos" pitchFamily="34" charset="-120"/>
-              </a:rPr>
-              <a:t>AST | BEATs</a:t>
-            </a:r>
-            <a:endParaRPr lang="en-US" sz="500" dirty="0"/>
-          </a:p>
-        </p:txBody>
-      </p:sp>
-    </p:spTree>
   </p:cSld>
   <p:clrMapOvr>
     <a:masterClrMapping/>

--- a/Docs/Final_Project_Presentation_Draft.pptx
+++ b/Docs/Final_Project_Presentation_Draft.pptx
@@ -2239,7 +2239,7 @@
         </p:nvSpPr>
         <p:spPr>
           <a:xfrm>
-            <a:off x="0" y="118200"/>
+            <a:off x="305" y="0"/>
             <a:ext cx="12191695" cy="6858000"/>
           </a:xfrm>
           <a:prstGeom prst="rect">
@@ -4129,7 +4129,9 @@
             <a:avLst/>
           </a:prstGeom>
           <a:noFill/>
-          <a:ln/>
+          <a:ln>
+            <a:noFill/>
+          </a:ln>
         </p:spPr>
         <p:txBody>
           <a:bodyPr wrap="square" lIns="0" tIns="0" rIns="0" bIns="0" rtlCol="0" anchor="t">
@@ -6412,6 +6414,78 @@
           </a:p>
         </p:txBody>
       </p:sp>
+      <p:cxnSp>
+        <p:nvCxnSpPr>
+          <p:cNvPr id="10" name="Straight Connector 9">
+            <a:extLst>
+              <a:ext uri="{FF2B5EF4-FFF2-40B4-BE49-F238E27FC236}">
+                <a16:creationId xmlns:a16="http://schemas.microsoft.com/office/drawing/2014/main" id="{2EB6E24A-0E98-1A23-DB40-8F94F5FCB2E8}"/>
+              </a:ext>
+            </a:extLst>
+          </p:cNvPr>
+          <p:cNvCxnSpPr/>
+          <p:nvPr/>
+        </p:nvCxnSpPr>
+        <p:spPr>
+          <a:xfrm>
+            <a:off x="731520" y="1078992"/>
+            <a:ext cx="0" cy="2923251"/>
+          </a:xfrm>
+          <a:prstGeom prst="line">
+            <a:avLst/>
+          </a:prstGeom>
+        </p:spPr>
+        <p:style>
+          <a:lnRef idx="1">
+            <a:schemeClr val="accent1"/>
+          </a:lnRef>
+          <a:fillRef idx="0">
+            <a:schemeClr val="accent1"/>
+          </a:fillRef>
+          <a:effectRef idx="0">
+            <a:schemeClr val="accent1"/>
+          </a:effectRef>
+          <a:fontRef idx="minor">
+            <a:schemeClr val="tx1"/>
+          </a:fontRef>
+        </p:style>
+      </p:cxnSp>
+      <p:cxnSp>
+        <p:nvCxnSpPr>
+          <p:cNvPr id="15" name="Straight Connector 14">
+            <a:extLst>
+              <a:ext uri="{FF2B5EF4-FFF2-40B4-BE49-F238E27FC236}">
+                <a16:creationId xmlns:a16="http://schemas.microsoft.com/office/drawing/2014/main" id="{2B3A0584-80A7-C44B-0779-FDD7115C2F0A}"/>
+              </a:ext>
+            </a:extLst>
+          </p:cNvPr>
+          <p:cNvCxnSpPr/>
+          <p:nvPr/>
+        </p:nvCxnSpPr>
+        <p:spPr>
+          <a:xfrm>
+            <a:off x="477371" y="1307592"/>
+            <a:ext cx="1900069" cy="0"/>
+          </a:xfrm>
+          <a:prstGeom prst="line">
+            <a:avLst/>
+          </a:prstGeom>
+        </p:spPr>
+        <p:style>
+          <a:lnRef idx="1">
+            <a:schemeClr val="accent1"/>
+          </a:lnRef>
+          <a:fillRef idx="0">
+            <a:schemeClr val="accent1"/>
+          </a:fillRef>
+          <a:effectRef idx="0">
+            <a:schemeClr val="accent1"/>
+          </a:effectRef>
+          <a:fontRef idx="minor">
+            <a:schemeClr val="tx1"/>
+          </a:fontRef>
+        </p:style>
+      </p:cxnSp>
     </p:spTree>
   </p:cSld>
   <p:clrMapOvr>
@@ -10757,28 +10831,28 @@
           <p:nvPr>
             <p:extLst>
               <p:ext uri="{D42A27DB-BD31-4B8C-83A1-F6EECF244321}">
-                <p14:modId xmlns:p14="http://schemas.microsoft.com/office/powerpoint/2010/main" val="3342296781"/>
+                <p14:modId xmlns:p14="http://schemas.microsoft.com/office/powerpoint/2010/main" val="1964485884"/>
               </p:ext>
             </p:extLst>
           </p:nvPr>
         </p:nvGraphicFramePr>
         <p:xfrm>
-          <a:off x="694943" y="2830817"/>
-          <a:ext cx="4434167" cy="1713738"/>
+          <a:off x="731519" y="2830817"/>
+          <a:ext cx="4397591" cy="1713738"/>
         </p:xfrm>
         <a:graphic>
           <a:graphicData uri="http://schemas.openxmlformats.org/drawingml/2006/table">
             <a:tbl>
               <a:tblPr/>
               <a:tblGrid>
-                <a:gridCol w="1081504">
+                <a:gridCol w="1072583">
                   <a:extLst>
                     <a:ext uri="{9D8B030D-6E8A-4147-A177-3AD203B41FA5}">
                       <a16:colId xmlns:a16="http://schemas.microsoft.com/office/drawing/2014/main" val="20000"/>
                     </a:ext>
                   </a:extLst>
                 </a:gridCol>
-                <a:gridCol w="3352663">
+                <a:gridCol w="3325008">
                   <a:extLst>
                     <a:ext uri="{9D8B030D-6E8A-4147-A177-3AD203B41FA5}">
                       <a16:colId xmlns:a16="http://schemas.microsoft.com/office/drawing/2014/main" val="20001"/>
@@ -13040,28 +13114,28 @@
           <p:nvPr>
             <p:extLst>
               <p:ext uri="{D42A27DB-BD31-4B8C-83A1-F6EECF244321}">
-                <p14:modId xmlns:p14="http://schemas.microsoft.com/office/powerpoint/2010/main" val="3810333205"/>
+                <p14:modId xmlns:p14="http://schemas.microsoft.com/office/powerpoint/2010/main" val="606077971"/>
               </p:ext>
             </p:extLst>
           </p:nvPr>
         </p:nvGraphicFramePr>
         <p:xfrm>
-          <a:off x="694943" y="2836948"/>
-          <a:ext cx="4434166" cy="1872996"/>
+          <a:off x="731519" y="2836948"/>
+          <a:ext cx="4397590" cy="1872996"/>
         </p:xfrm>
         <a:graphic>
           <a:graphicData uri="http://schemas.openxmlformats.org/drawingml/2006/table">
             <a:tbl>
               <a:tblPr/>
               <a:tblGrid>
-                <a:gridCol w="1081503">
+                <a:gridCol w="1072582">
                   <a:extLst>
                     <a:ext uri="{9D8B030D-6E8A-4147-A177-3AD203B41FA5}">
                       <a16:colId xmlns:a16="http://schemas.microsoft.com/office/drawing/2014/main" val="20000"/>
                     </a:ext>
                   </a:extLst>
                 </a:gridCol>
-                <a:gridCol w="3352663">
+                <a:gridCol w="3325008">
                   <a:extLst>
                     <a:ext uri="{9D8B030D-6E8A-4147-A177-3AD203B41FA5}">
                       <a16:colId xmlns:a16="http://schemas.microsoft.com/office/drawing/2014/main" val="20001"/>
@@ -22464,28 +22538,28 @@
           <p:nvPr>
             <p:extLst>
               <p:ext uri="{D42A27DB-BD31-4B8C-83A1-F6EECF244321}">
-                <p14:modId xmlns:p14="http://schemas.microsoft.com/office/powerpoint/2010/main" val="3126877790"/>
+                <p14:modId xmlns:p14="http://schemas.microsoft.com/office/powerpoint/2010/main" val="4227911563"/>
               </p:ext>
             </p:extLst>
           </p:nvPr>
         </p:nvGraphicFramePr>
         <p:xfrm>
-          <a:off x="694942" y="2655680"/>
-          <a:ext cx="4434151" cy="1713738"/>
+          <a:off x="743871" y="2655680"/>
+          <a:ext cx="4385222" cy="1821180"/>
         </p:xfrm>
         <a:graphic>
           <a:graphicData uri="http://schemas.openxmlformats.org/drawingml/2006/table">
             <a:tbl>
               <a:tblPr/>
               <a:tblGrid>
-                <a:gridCol w="1058235">
+                <a:gridCol w="1046558">
                   <a:extLst>
                     <a:ext uri="{9D8B030D-6E8A-4147-A177-3AD203B41FA5}">
                       <a16:colId xmlns:a16="http://schemas.microsoft.com/office/drawing/2014/main" val="20000"/>
                     </a:ext>
                   </a:extLst>
                 </a:gridCol>
-                <a:gridCol w="3375916">
+                <a:gridCol w="3338664">
                   <a:extLst>
                     <a:ext uri="{9D8B030D-6E8A-4147-A177-3AD203B41FA5}">
                       <a16:colId xmlns:a16="http://schemas.microsoft.com/office/drawing/2014/main" val="20001"/>
@@ -23777,14 +23851,16 @@
         </p:nvSpPr>
         <p:spPr>
           <a:xfrm>
-            <a:off x="777240" y="1325880"/>
+            <a:off x="731520" y="1304947"/>
             <a:ext cx="1828800" cy="182880"/>
           </a:xfrm>
           <a:prstGeom prst="rect">
             <a:avLst/>
           </a:prstGeom>
           <a:noFill/>
-          <a:ln/>
+          <a:ln>
+            <a:noFill/>
+          </a:ln>
         </p:spPr>
         <p:txBody>
           <a:bodyPr wrap="square" lIns="0" tIns="0" rIns="0" bIns="0" rtlCol="0" anchor="t">
@@ -23827,14 +23903,16 @@
         </p:nvSpPr>
         <p:spPr>
           <a:xfrm>
-            <a:off x="777239" y="1600200"/>
-            <a:ext cx="5013961" cy="658846"/>
+            <a:off x="731521" y="1600200"/>
+            <a:ext cx="5059680" cy="658846"/>
           </a:xfrm>
           <a:prstGeom prst="rect">
             <a:avLst/>
           </a:prstGeom>
           <a:noFill/>
-          <a:ln/>
+          <a:ln>
+            <a:noFill/>
+          </a:ln>
         </p:spPr>
         <p:txBody>
           <a:bodyPr wrap="square" lIns="0" tIns="0" rIns="0" bIns="0" rtlCol="0" anchor="t">
@@ -24054,14 +24132,16 @@
         </p:nvSpPr>
         <p:spPr>
           <a:xfrm>
-            <a:off x="713232" y="1307592"/>
+            <a:off x="731520" y="1307591"/>
             <a:ext cx="1097280" cy="164592"/>
           </a:xfrm>
           <a:prstGeom prst="rect">
             <a:avLst/>
           </a:prstGeom>
           <a:noFill/>
-          <a:ln/>
+          <a:ln>
+            <a:noFill/>
+          </a:ln>
         </p:spPr>
         <p:txBody>
           <a:bodyPr wrap="square" lIns="0" tIns="0" rIns="0" bIns="0" rtlCol="0" anchor="t">
@@ -24098,14 +24178,16 @@
         </p:nvSpPr>
         <p:spPr>
           <a:xfrm>
-            <a:off x="713232" y="1554480"/>
-            <a:ext cx="5303520" cy="457200"/>
+            <a:off x="731520" y="1601916"/>
+            <a:ext cx="5285232" cy="457200"/>
           </a:xfrm>
           <a:prstGeom prst="rect">
             <a:avLst/>
           </a:prstGeom>
           <a:noFill/>
-          <a:ln/>
+          <a:ln>
+            <a:noFill/>
+          </a:ln>
         </p:spPr>
         <p:txBody>
           <a:bodyPr wrap="square" lIns="0" tIns="0" rIns="0" bIns="0" rtlCol="0" anchor="t">
@@ -24138,8 +24220,8 @@
         </p:nvSpPr>
         <p:spPr>
           <a:xfrm>
-            <a:off x="713232" y="2321628"/>
-            <a:ext cx="1645920" cy="164592"/>
+            <a:off x="731520" y="2321628"/>
+            <a:ext cx="1627632" cy="164592"/>
           </a:xfrm>
           <a:prstGeom prst="rect">
             <a:avLst/>
@@ -24178,8 +24260,8 @@
         </p:nvSpPr>
         <p:spPr>
           <a:xfrm>
-            <a:off x="713232" y="4342874"/>
-            <a:ext cx="1005840" cy="146304"/>
+            <a:off x="731520" y="4326060"/>
+            <a:ext cx="1002270" cy="146304"/>
           </a:xfrm>
           <a:prstGeom prst="rect">
             <a:avLst/>
@@ -24218,8 +24300,8 @@
         </p:nvSpPr>
         <p:spPr>
           <a:xfrm>
-            <a:off x="713232" y="4568476"/>
-            <a:ext cx="5152109" cy="1281482"/>
+            <a:off x="731520" y="4568476"/>
+            <a:ext cx="5133821" cy="1281482"/>
           </a:xfrm>
           <a:prstGeom prst="rect">
             <a:avLst/>
@@ -25286,35 +25368,35 @@
           <p:nvPr>
             <p:extLst>
               <p:ext uri="{D42A27DB-BD31-4B8C-83A1-F6EECF244321}">
-                <p14:modId xmlns:p14="http://schemas.microsoft.com/office/powerpoint/2010/main" val="3771119343"/>
+                <p14:modId xmlns:p14="http://schemas.microsoft.com/office/powerpoint/2010/main" val="3406380302"/>
               </p:ext>
             </p:extLst>
           </p:nvPr>
         </p:nvGraphicFramePr>
         <p:xfrm>
-          <a:off x="694942" y="2655678"/>
-          <a:ext cx="5152110" cy="1386496"/>
+          <a:off x="731520" y="2655678"/>
+          <a:ext cx="5115532" cy="1386496"/>
         </p:xfrm>
         <a:graphic>
           <a:graphicData uri="http://schemas.openxmlformats.org/drawingml/2006/table">
             <a:tbl>
               <a:tblPr/>
               <a:tblGrid>
-                <a:gridCol w="985577">
+                <a:gridCol w="978580">
                   <a:extLst>
                     <a:ext uri="{9D8B030D-6E8A-4147-A177-3AD203B41FA5}">
                       <a16:colId xmlns:a16="http://schemas.microsoft.com/office/drawing/2014/main" val="20000"/>
                     </a:ext>
                   </a:extLst>
                 </a:gridCol>
-                <a:gridCol w="2693773">
+                <a:gridCol w="2674648">
                   <a:extLst>
                     <a:ext uri="{9D8B030D-6E8A-4147-A177-3AD203B41FA5}">
                       <a16:colId xmlns:a16="http://schemas.microsoft.com/office/drawing/2014/main" val="20001"/>
                     </a:ext>
                   </a:extLst>
                 </a:gridCol>
-                <a:gridCol w="1472760">
+                <a:gridCol w="1462304">
                   <a:extLst>
                     <a:ext uri="{9D8B030D-6E8A-4147-A177-3AD203B41FA5}">
                       <a16:colId xmlns:a16="http://schemas.microsoft.com/office/drawing/2014/main" val="35711274"/>
@@ -27108,14 +27190,16 @@
         </p:nvSpPr>
         <p:spPr>
           <a:xfrm>
-            <a:off x="777240" y="1325880"/>
+            <a:off x="731520" y="1307591"/>
             <a:ext cx="1828800" cy="182880"/>
           </a:xfrm>
           <a:prstGeom prst="rect">
             <a:avLst/>
           </a:prstGeom>
           <a:noFill/>
-          <a:ln/>
+          <a:ln>
+            <a:noFill/>
+          </a:ln>
         </p:spPr>
         <p:txBody>
           <a:bodyPr wrap="square" lIns="0" tIns="0" rIns="0" bIns="0" rtlCol="0" anchor="t">
@@ -27158,18 +27242,20 @@
         </p:nvSpPr>
         <p:spPr>
           <a:xfrm>
-            <a:off x="777240" y="1600200"/>
-            <a:ext cx="4691231" cy="411480"/>
+            <a:off x="737816" y="1600200"/>
+            <a:ext cx="4730655" cy="411480"/>
           </a:xfrm>
           <a:prstGeom prst="rect">
             <a:avLst/>
           </a:prstGeom>
           <a:noFill/>
-          <a:ln/>
+          <a:ln>
+            <a:noFill/>
+          </a:ln>
         </p:spPr>
         <p:txBody>
           <a:bodyPr wrap="square" lIns="0" tIns="0" rIns="0" bIns="0" rtlCol="0" anchor="t">
-            <a:normAutofit fontScale="70000" lnSpcReduction="20000"/>
+            <a:normAutofit/>
           </a:bodyPr>
           <a:lstStyle/>
           <a:p>
@@ -27180,7 +27266,7 @@
               <a:buNone/>
             </a:pPr>
             <a:r>
-              <a:rPr lang="en-US" sz="1900" dirty="0">
+              <a:rPr lang="en-US" sz="1200" dirty="0">
                 <a:solidFill>
                   <a:srgbClr val="1F2528"/>
                 </a:solidFill>
@@ -27190,7 +27276,7 @@
               </a:rPr>
               <a:t>From local spectrogram patterns to temporal sequence modeling – LSTM baseline defined, Design of Experiments created to vary 4 factors</a:t>
             </a:r>
-            <a:endParaRPr lang="en-US" sz="1900" dirty="0"/>
+            <a:endParaRPr lang="en-US" sz="1200" dirty="0"/>
           </a:p>
         </p:txBody>
       </p:sp>
@@ -27567,8 +27653,8 @@
         </p:nvSpPr>
         <p:spPr>
           <a:xfrm>
-            <a:off x="780690" y="2051104"/>
-            <a:ext cx="5440680" cy="164592"/>
+            <a:off x="737816" y="2051104"/>
+            <a:ext cx="4651038" cy="164592"/>
           </a:xfrm>
           <a:prstGeom prst="rect">
             <a:avLst/>
@@ -31227,14 +31313,16 @@
         </p:nvSpPr>
         <p:spPr>
           <a:xfrm>
-            <a:off x="777240" y="1325880"/>
+            <a:off x="731520" y="1307591"/>
             <a:ext cx="1828800" cy="182880"/>
           </a:xfrm>
           <a:prstGeom prst="rect">
             <a:avLst/>
           </a:prstGeom>
           <a:noFill/>
-          <a:ln/>
+          <a:ln>
+            <a:noFill/>
+          </a:ln>
         </p:spPr>
         <p:txBody>
           <a:bodyPr wrap="square" lIns="0" tIns="0" rIns="0" bIns="0" rtlCol="0" anchor="t">
@@ -31277,8 +31365,8 @@
         </p:nvSpPr>
         <p:spPr>
           <a:xfrm>
-            <a:off x="777240" y="1600199"/>
-            <a:ext cx="4691231" cy="537127"/>
+            <a:off x="731520" y="1603618"/>
+            <a:ext cx="4691231" cy="515419"/>
           </a:xfrm>
           <a:prstGeom prst="rect">
             <a:avLst/>
@@ -31575,7 +31663,7 @@
         </p:spPr>
         <p:txBody>
           <a:bodyPr wrap="square" lIns="0" tIns="0" rIns="0" bIns="0" rtlCol="0" anchor="t">
-            <a:normAutofit/>
+            <a:noAutofit/>
           </a:bodyPr>
           <a:lstStyle/>
           <a:p>
@@ -31586,7 +31674,7 @@
               <a:buNone/>
             </a:pPr>
             <a:r>
-              <a:rPr lang="en-US" sz="1130" dirty="0">
+              <a:rPr lang="en-US" sz="1200" dirty="0">
                 <a:solidFill>
                   <a:schemeClr val="tx1">
                     <a:lumMod val="75000"/>
@@ -31600,7 +31688,7 @@
               <a:t>LSTM architectures performed </a:t>
             </a:r>
             <a:r>
-              <a:rPr lang="en-US" sz="1130" b="1" dirty="0">
+              <a:rPr lang="en-US" sz="1200" b="1" dirty="0">
                 <a:solidFill>
                   <a:schemeClr val="tx1">
                     <a:lumMod val="75000"/>
@@ -31614,7 +31702,7 @@
               <a:t>worse</a:t>
             </a:r>
             <a:r>
-              <a:rPr lang="en-US" sz="1130" dirty="0">
+              <a:rPr lang="en-US" sz="1200" dirty="0">
                 <a:solidFill>
                   <a:schemeClr val="tx1">
                     <a:lumMod val="75000"/>
@@ -31636,7 +31724,7 @@
               <a:buNone/>
             </a:pPr>
             <a:r>
-              <a:rPr lang="en-US" sz="1130" dirty="0">
+              <a:rPr lang="en-US" sz="1200" dirty="0">
                 <a:solidFill>
                   <a:schemeClr val="tx1">
                     <a:lumMod val="75000"/>
@@ -31656,7 +31744,7 @@
               <a:buChar char="•"/>
             </a:pPr>
             <a:r>
-              <a:rPr lang="en-US" sz="1130" dirty="0">
+              <a:rPr lang="en-US" sz="1200" dirty="0">
                 <a:solidFill>
                   <a:schemeClr val="tx1">
                     <a:lumMod val="75000"/>
@@ -31676,7 +31764,7 @@
               <a:buChar char="•"/>
             </a:pPr>
             <a:r>
-              <a:rPr lang="en-US" sz="1130" dirty="0">
+              <a:rPr lang="en-US" sz="1200" dirty="0">
                 <a:solidFill>
                   <a:schemeClr val="tx1">
                     <a:lumMod val="75000"/>
@@ -31696,7 +31784,7 @@
               <a:buChar char="•"/>
             </a:pPr>
             <a:r>
-              <a:rPr lang="en-US" sz="1130" dirty="0">
+              <a:rPr lang="en-US" sz="1200" dirty="0">
                 <a:solidFill>
                   <a:schemeClr val="tx1">
                     <a:lumMod val="75000"/>
@@ -31723,8 +31811,8 @@
         </p:nvSpPr>
         <p:spPr>
           <a:xfrm>
-            <a:off x="780829" y="2163539"/>
-            <a:ext cx="5440680" cy="164592"/>
+            <a:off x="731520" y="2163539"/>
+            <a:ext cx="5489989" cy="164592"/>
           </a:xfrm>
           <a:prstGeom prst="rect">
             <a:avLst/>
@@ -31770,28 +31858,28 @@
           <p:nvPr>
             <p:extLst>
               <p:ext uri="{D42A27DB-BD31-4B8C-83A1-F6EECF244321}">
-                <p14:modId xmlns:p14="http://schemas.microsoft.com/office/powerpoint/2010/main" val="3222696318"/>
+                <p14:modId xmlns:p14="http://schemas.microsoft.com/office/powerpoint/2010/main" val="989276497"/>
               </p:ext>
             </p:extLst>
           </p:nvPr>
         </p:nvGraphicFramePr>
         <p:xfrm>
-          <a:off x="777241" y="2354342"/>
-          <a:ext cx="4434165" cy="1821180"/>
+          <a:off x="731521" y="2354342"/>
+          <a:ext cx="4479886" cy="1821180"/>
         </p:xfrm>
         <a:graphic>
           <a:graphicData uri="http://schemas.openxmlformats.org/drawingml/2006/table">
             <a:tbl>
               <a:tblPr/>
               <a:tblGrid>
-                <a:gridCol w="1028428">
+                <a:gridCol w="1039032">
                   <a:extLst>
                     <a:ext uri="{9D8B030D-6E8A-4147-A177-3AD203B41FA5}">
                       <a16:colId xmlns:a16="http://schemas.microsoft.com/office/drawing/2014/main" val="20000"/>
                     </a:ext>
                   </a:extLst>
                 </a:gridCol>
-                <a:gridCol w="3405737">
+                <a:gridCol w="3440854">
                   <a:extLst>
                     <a:ext uri="{9D8B030D-6E8A-4147-A177-3AD203B41FA5}">
                       <a16:colId xmlns:a16="http://schemas.microsoft.com/office/drawing/2014/main" val="20001"/>
@@ -32850,35 +32938,35 @@
           <p:nvPr>
             <p:extLst>
               <p:ext uri="{D42A27DB-BD31-4B8C-83A1-F6EECF244321}">
-                <p14:modId xmlns:p14="http://schemas.microsoft.com/office/powerpoint/2010/main" val="2695269915"/>
+                <p14:modId xmlns:p14="http://schemas.microsoft.com/office/powerpoint/2010/main" val="2921529174"/>
               </p:ext>
             </p:extLst>
           </p:nvPr>
         </p:nvGraphicFramePr>
         <p:xfrm>
-          <a:off x="777240" y="4288669"/>
-          <a:ext cx="4434166" cy="1158240"/>
+          <a:off x="731520" y="4288669"/>
+          <a:ext cx="4479886" cy="1158240"/>
         </p:xfrm>
         <a:graphic>
           <a:graphicData uri="http://schemas.openxmlformats.org/drawingml/2006/table">
             <a:tbl>
               <a:tblPr/>
               <a:tblGrid>
-                <a:gridCol w="1679858">
+                <a:gridCol w="1697179">
                   <a:extLst>
                     <a:ext uri="{9D8B030D-6E8A-4147-A177-3AD203B41FA5}">
                       <a16:colId xmlns:a16="http://schemas.microsoft.com/office/drawing/2014/main" val="20000"/>
                     </a:ext>
                   </a:extLst>
                 </a:gridCol>
-                <a:gridCol w="1232611">
+                <a:gridCol w="1245320">
                   <a:extLst>
                     <a:ext uri="{9D8B030D-6E8A-4147-A177-3AD203B41FA5}">
                       <a16:colId xmlns:a16="http://schemas.microsoft.com/office/drawing/2014/main" val="20001"/>
                     </a:ext>
                   </a:extLst>
                 </a:gridCol>
-                <a:gridCol w="1521697">
+                <a:gridCol w="1537387">
                   <a:extLst>
                     <a:ext uri="{9D8B030D-6E8A-4147-A177-3AD203B41FA5}">
                       <a16:colId xmlns:a16="http://schemas.microsoft.com/office/drawing/2014/main" val="3678863950"/>
@@ -33901,56 +33989,56 @@
           <p:nvPr>
             <p:extLst>
               <p:ext uri="{D42A27DB-BD31-4B8C-83A1-F6EECF244321}">
-                <p14:modId xmlns:p14="http://schemas.microsoft.com/office/powerpoint/2010/main" val="110652709"/>
+                <p14:modId xmlns:p14="http://schemas.microsoft.com/office/powerpoint/2010/main" val="3987419374"/>
               </p:ext>
             </p:extLst>
           </p:nvPr>
         </p:nvGraphicFramePr>
         <p:xfrm>
-          <a:off x="777242" y="5560056"/>
-          <a:ext cx="4434164" cy="600456"/>
+          <a:off x="731522" y="5560056"/>
+          <a:ext cx="4479884" cy="600456"/>
         </p:xfrm>
         <a:graphic>
           <a:graphicData uri="http://schemas.openxmlformats.org/drawingml/2006/table">
             <a:tbl>
               <a:tblPr/>
               <a:tblGrid>
-                <a:gridCol w="502108">
+                <a:gridCol w="507285">
                   <a:extLst>
                     <a:ext uri="{9D8B030D-6E8A-4147-A177-3AD203B41FA5}">
                       <a16:colId xmlns:a16="http://schemas.microsoft.com/office/drawing/2014/main" val="20000"/>
                     </a:ext>
                   </a:extLst>
                 </a:gridCol>
-                <a:gridCol w="676656">
+                <a:gridCol w="683633">
                   <a:extLst>
                     <a:ext uri="{9D8B030D-6E8A-4147-A177-3AD203B41FA5}">
                       <a16:colId xmlns:a16="http://schemas.microsoft.com/office/drawing/2014/main" val="20001"/>
                     </a:ext>
                   </a:extLst>
                 </a:gridCol>
-                <a:gridCol w="610820">
+                <a:gridCol w="617118">
                   <a:extLst>
                     <a:ext uri="{9D8B030D-6E8A-4147-A177-3AD203B41FA5}">
                       <a16:colId xmlns:a16="http://schemas.microsoft.com/office/drawing/2014/main" val="3678863950"/>
                     </a:ext>
                   </a:extLst>
                 </a:gridCol>
-                <a:gridCol w="519379">
+                <a:gridCol w="524734">
                   <a:extLst>
                     <a:ext uri="{9D8B030D-6E8A-4147-A177-3AD203B41FA5}">
                       <a16:colId xmlns:a16="http://schemas.microsoft.com/office/drawing/2014/main" val="2782421059"/>
                     </a:ext>
                   </a:extLst>
                 </a:gridCol>
-                <a:gridCol w="705917">
+                <a:gridCol w="713196">
                   <a:extLst>
                     <a:ext uri="{9D8B030D-6E8A-4147-A177-3AD203B41FA5}">
                       <a16:colId xmlns:a16="http://schemas.microsoft.com/office/drawing/2014/main" val="3043373647"/>
                     </a:ext>
                   </a:extLst>
                 </a:gridCol>
-                <a:gridCol w="1419284">
+                <a:gridCol w="1433918">
                   <a:extLst>
                     <a:ext uri="{9D8B030D-6E8A-4147-A177-3AD203B41FA5}">
                       <a16:colId xmlns:a16="http://schemas.microsoft.com/office/drawing/2014/main" val="670270140"/>

--- a/Docs/Final_Project_Presentation_Draft.pptx
+++ b/Docs/Final_Project_Presentation_Draft.pptx
@@ -884,40 +884,174 @@
           <a:bodyPr/>
           <a:lstStyle/>
           <a:p>
-            <a:r>
-              <a:rPr lang="en-US" dirty="0"/>
-              <a:t> Our results did not follow the smooth chronological improvements that we’d initially expected.  What we found that was model fit mattered much more than model age.  Hyperparameter tuning and architectural complexity only produced minor improvements when the model was still only learning from the ESC-50 dataset.  Instead, the larger gains were seen when the model was able to use prior knowledge from audio pre-training. </a:t>
-            </a:r>
+            <a:pPr rtl="0">
+              <a:spcBef>
+                <a:spcPts val="1200"/>
+              </a:spcBef>
+              <a:spcAft>
+                <a:spcPts val="1200"/>
+              </a:spcAft>
+              <a:buNone/>
+            </a:pPr>
+            <a:r>
+              <a:rPr lang="en-US" sz="1800" b="0" i="0" u="none" strike="noStrike" dirty="0">
+                <a:solidFill>
+                  <a:srgbClr val="000000"/>
+                </a:solidFill>
+                <a:effectLst/>
+                <a:latin typeface="Arial" panose="020B0604020202020204" pitchFamily="34" charset="0"/>
+              </a:rPr>
+              <a:t>Our results did not show the smooth chronological improvement we initially expected. Instead, the central lesson was that model fit mattered more than model age</a:t>
+            </a:r>
+            <a:endParaRPr lang="en-US" dirty="0">
+              <a:effectLst/>
+            </a:endParaRPr>
+          </a:p>
+          <a:p>
+            <a:pPr rtl="0">
+              <a:spcBef>
+                <a:spcPts val="1200"/>
+              </a:spcBef>
+              <a:spcAft>
+                <a:spcPts val="1200"/>
+              </a:spcAft>
+              <a:buNone/>
+            </a:pPr>
+            <a:r>
+              <a:rPr lang="en-US" sz="1800" b="0" i="0" u="none" strike="noStrike" dirty="0">
+                <a:solidFill>
+                  <a:srgbClr val="000000"/>
+                </a:solidFill>
+                <a:effectLst/>
+                <a:latin typeface="Arial" panose="020B0604020202020204" pitchFamily="34" charset="0"/>
+              </a:rPr>
+              <a:t>CNNs were a strong baseline because spectrogram audio naturally aligns with convolutional feature learning.</a:t>
+            </a:r>
+            <a:endParaRPr lang="en-US" dirty="0">
+              <a:effectLst/>
+            </a:endParaRPr>
+          </a:p>
+          <a:p>
+            <a:pPr rtl="0">
+              <a:spcBef>
+                <a:spcPts val="1200"/>
+              </a:spcBef>
+              <a:spcAft>
+                <a:spcPts val="1200"/>
+              </a:spcAft>
+              <a:buNone/>
+            </a:pPr>
+            <a:r>
+              <a:rPr lang="en-US" sz="1800" b="0" i="0" u="none" strike="noStrike" dirty="0">
+                <a:solidFill>
+                  <a:srgbClr val="000000"/>
+                </a:solidFill>
+                <a:effectLst/>
+                <a:latin typeface="Arial" panose="020B0604020202020204" pitchFamily="34" charset="0"/>
+              </a:rPr>
+              <a:t>Hyperparameter tuning and added architecture complexity helped only a small amount when the model still had to learn from ESC-50 alone, the results aligning to the importance of model selection when also looking at the impacts of the LSTM.</a:t>
+            </a:r>
+            <a:endParaRPr lang="en-US" dirty="0">
+              <a:effectLst/>
+            </a:endParaRPr>
+          </a:p>
+          <a:p>
+            <a:pPr rtl="0">
+              <a:spcBef>
+                <a:spcPts val="1200"/>
+              </a:spcBef>
+              <a:spcAft>
+                <a:spcPts val="1200"/>
+              </a:spcAft>
+              <a:buNone/>
+            </a:pPr>
+            <a:r>
+              <a:rPr lang="en-US" sz="1800" b="0" i="0" u="none" strike="noStrike" dirty="0">
+                <a:solidFill>
+                  <a:srgbClr val="000000"/>
+                </a:solidFill>
+                <a:effectLst/>
+                <a:latin typeface="Arial" panose="020B0604020202020204" pitchFamily="34" charset="0"/>
+              </a:rPr>
+              <a:t>The major gains appeared when the model brought in prior audio knowledge from large-scale pretraining.</a:t>
+            </a:r>
+            <a:endParaRPr lang="en-US" dirty="0">
+              <a:effectLst/>
+            </a:endParaRPr>
+          </a:p>
+          <a:p>
+            <a:pPr rtl="0">
+              <a:spcBef>
+                <a:spcPts val="1200"/>
+              </a:spcBef>
+              <a:spcAft>
+                <a:spcPts val="1200"/>
+              </a:spcAft>
+              <a:buNone/>
+            </a:pPr>
             <a:br>
               <a:rPr lang="en-US" dirty="0"/>
             </a:br>
-            <a:br>
-              <a:rPr lang="en-US" dirty="0"/>
-            </a:br>
-            <a:r>
-              <a:rPr lang="en-US" dirty="0"/>
-              <a:t>As for our lessons learned, we found that our original assumption regarding the data set was accurate – it provided a great benchmark and was able to efficiently be used by various models to help test our hypothesis.  </a:t>
-            </a:r>
-            <a:br>
-              <a:rPr lang="en-US" dirty="0"/>
-            </a:br>
-            <a:br>
-              <a:rPr lang="en-US" dirty="0"/>
-            </a:br>
-            <a:r>
-              <a:rPr lang="en-US" dirty="0"/>
-              <a:t>What we found didn’t go as well is that recreation of the baseline was somewhat of a challenge due to the age of the original test and technological progressions since then.  Additionally, as is often the case with group work, communication and documentation is crucial.  It took a few last second code updates and model re-runs to make sure we had consistent results to compare.  </a:t>
-            </a:r>
-            <a:br>
-              <a:rPr lang="en-US" dirty="0"/>
-            </a:br>
-            <a:br>
-              <a:rPr lang="en-US" dirty="0"/>
-            </a:br>
-            <a:r>
-              <a:rPr lang="en-US" dirty="0"/>
-              <a:t>And lastly, a few things that could be changed to improve the results – it might have helped to use less variants but dive deeper into the results of them, giving us more time to explore the nuances of the models themselves.  Locking in the evaluation protocols would save time going forward.  Introducing a random forest analysis could have provided a more classical baseline to compare to in addition to the neural networks.  And one we had hoped to include but considered a bit too late was the introduction of a runtime metric as measure of improvement rather than just relying on model accuracy.  </a:t>
-            </a:r>
+            <a:r>
+              <a:rPr lang="en-US" sz="1800" b="0" i="0" u="none" strike="noStrike" dirty="0">
+                <a:solidFill>
+                  <a:srgbClr val="000000"/>
+                </a:solidFill>
+                <a:effectLst/>
+                <a:latin typeface="Arial" panose="020B0604020202020204" pitchFamily="34" charset="0"/>
+              </a:rPr>
+              <a:t>What went well was the dataset choice: ESC-50 gave us a compact, clean, repeatable benchmark.</a:t>
+            </a:r>
+            <a:endParaRPr lang="en-US" dirty="0">
+              <a:effectLst/>
+            </a:endParaRPr>
+          </a:p>
+          <a:p>
+            <a:pPr rtl="0">
+              <a:spcBef>
+                <a:spcPts val="1200"/>
+              </a:spcBef>
+              <a:spcAft>
+                <a:spcPts val="1200"/>
+              </a:spcAft>
+              <a:buNone/>
+            </a:pPr>
+            <a:r>
+              <a:rPr lang="en-US" sz="1800" b="0" i="0" u="none" strike="noStrike" dirty="0">
+                <a:solidFill>
+                  <a:srgbClr val="000000"/>
+                </a:solidFill>
+                <a:effectLst/>
+                <a:latin typeface="Arial" panose="020B0604020202020204" pitchFamily="34" charset="0"/>
+              </a:rPr>
+              <a:t>What did not go well was reproducibility and comparison discipline. A 2015 baseline was harder to recreate than expected, and small choices like voting, folds, and final-versus-best accuracy changed the story.</a:t>
+            </a:r>
+            <a:endParaRPr lang="en-US" dirty="0">
+              <a:effectLst/>
+            </a:endParaRPr>
+          </a:p>
+          <a:p>
+            <a:pPr rtl="0">
+              <a:spcBef>
+                <a:spcPts val="1200"/>
+              </a:spcBef>
+              <a:spcAft>
+                <a:spcPts val="1200"/>
+              </a:spcAft>
+            </a:pPr>
+            <a:r>
+              <a:rPr lang="en-US" sz="1800" b="0" i="0" u="none" strike="noStrike" dirty="0">
+                <a:solidFill>
+                  <a:srgbClr val="000000"/>
+                </a:solidFill>
+                <a:effectLst/>
+                <a:latin typeface="Arial" panose="020B0604020202020204" pitchFamily="34" charset="0"/>
+              </a:rPr>
+              <a:t>If we repeated this project, we would lock the evaluation protocol earlier, run fewer variants more deeply, include a classical non-neural baseline, and add runtime or cost as a second performance dimension.</a:t>
+            </a:r>
+            <a:endParaRPr lang="en-US" dirty="0">
+              <a:effectLst/>
+            </a:endParaRPr>
           </a:p>
         </p:txBody>
       </p:sp>
@@ -1001,6 +1135,7 @@
           <a:bodyPr/>
           <a:lstStyle/>
           <a:p>
+            <a:pPr lvl="1"/>
             <a:r>
               <a:rPr lang="en-US" b="0" i="0" dirty="0">
                 <a:solidFill>
@@ -1316,7 +1451,7 @@
             </a:r>
             <a:r>
               <a:rPr lang="en-US" dirty="0"/>
-              <a:t> ESC-50 because we felt his work took a relatively unstudied segment, which was audio sound training, and that would do well to represent the growth in neural network capabilities from that point.  He also had a robust yet compact data set that was well organized – 2000 audio samples, 50 classes, 5 folds – and they were of a manageable size at 5 seconds. Per clip.</a:t>
+              <a:t> ESC-50 because we felt his work took a relatively unstudied segment, which was audio sound training, and that would do well to represent the growth in neural network capabilities from that point.  He also had a robust yet compact data set that was well organized – 2000 audio samples, 50 classes, 5 folds – and they were of a manageable size at 5 seconds per clip, which presented manageable data set to run our multiple different models against.</a:t>
             </a:r>
             <a:br>
               <a:rPr lang="en-US" dirty="0"/>
@@ -1426,6 +1561,89 @@
         <p:txBody>
           <a:bodyPr/>
           <a:lstStyle/>
+          <a:p>
+            <a:pPr rtl="0">
+              <a:buNone/>
+            </a:pPr>
+            <a:r>
+              <a:rPr lang="en-US" sz="1800" b="0" i="0" u="none" strike="noStrike" dirty="0">
+                <a:solidFill>
+                  <a:srgbClr val="000000"/>
+                </a:solidFill>
+                <a:effectLst/>
+                <a:latin typeface="Arial" panose="020B0604020202020204" pitchFamily="34" charset="0"/>
+              </a:rPr>
+              <a:t>In this block we are looking at neural network models that rely solely on the data set for training. That means it has to first learn the features of the audio clips themselves, the acoustic patterns in the </a:t>
+            </a:r>
+            <a:r>
+              <a:rPr lang="en-US" sz="1800" b="0" i="0" u="none" strike="noStrike" dirty="0" err="1">
+                <a:solidFill>
+                  <a:srgbClr val="000000"/>
+                </a:solidFill>
+                <a:effectLst/>
+                <a:latin typeface="Arial" panose="020B0604020202020204" pitchFamily="34" charset="0"/>
+              </a:rPr>
+              <a:t>spectogram</a:t>
+            </a:r>
+            <a:r>
+              <a:rPr lang="en-US" sz="1800" b="0" i="0" u="none" strike="noStrike" dirty="0">
+                <a:solidFill>
+                  <a:srgbClr val="000000"/>
+                </a:solidFill>
+                <a:effectLst/>
+                <a:latin typeface="Arial" panose="020B0604020202020204" pitchFamily="34" charset="0"/>
+              </a:rPr>
+              <a:t> that would help distinguish classes - short bursts of sound like a dog bark, repetitive textures like a bird chirp, or changes over time.  Then it has to learn the classifier, meaning mapping those patterns to the labels from ESC-50.</a:t>
+            </a:r>
+            <a:endParaRPr lang="en-US" dirty="0">
+              <a:effectLst/>
+            </a:endParaRPr>
+          </a:p>
+          <a:p>
+            <a:pPr rtl="0"/>
+            <a:br>
+              <a:rPr lang="en-US" sz="1800" b="0" i="0" u="none" strike="noStrike" dirty="0">
+                <a:solidFill>
+                  <a:srgbClr val="000000"/>
+                </a:solidFill>
+                <a:effectLst/>
+                <a:latin typeface="Arial" panose="020B0604020202020204" pitchFamily="34" charset="0"/>
+              </a:rPr>
+            </a:br>
+            <a:r>
+              <a:rPr lang="en-US" sz="1800" b="0" i="0" u="none" strike="noStrike" dirty="0">
+                <a:solidFill>
+                  <a:srgbClr val="000000"/>
+                </a:solidFill>
+                <a:effectLst/>
+                <a:latin typeface="Arial" panose="020B0604020202020204" pitchFamily="34" charset="0"/>
+              </a:rPr>
+              <a:t>Here we look at first recreating </a:t>
+            </a:r>
+            <a:r>
+              <a:rPr lang="en-US" sz="1800" b="0" i="0" u="none" strike="noStrike" dirty="0" err="1">
+                <a:solidFill>
+                  <a:srgbClr val="000000"/>
+                </a:solidFill>
+                <a:effectLst/>
+                <a:latin typeface="Arial" panose="020B0604020202020204" pitchFamily="34" charset="0"/>
+              </a:rPr>
+              <a:t>Piczak’s</a:t>
+            </a:r>
+            <a:r>
+              <a:rPr lang="en-US" sz="1800" b="0" i="0" u="none" strike="noStrike" dirty="0">
+                <a:solidFill>
+                  <a:srgbClr val="000000"/>
+                </a:solidFill>
+                <a:effectLst/>
+                <a:latin typeface="Arial" panose="020B0604020202020204" pitchFamily="34" charset="0"/>
+              </a:rPr>
+              <a:t> model to build our baseline, then we run a series of CNN variations before introducing an LSTM extension.</a:t>
+            </a:r>
+            <a:endParaRPr lang="en-US" dirty="0">
+              <a:effectLst/>
+            </a:endParaRPr>
+          </a:p>
           <a:p>
             <a:endParaRPr lang="en-US" dirty="0"/>
           </a:p>
@@ -12108,9 +12326,9 @@
         <p:grpSpPr>
           <a:xfrm>
             <a:off x="6076188" y="4092809"/>
-            <a:ext cx="2011680" cy="772294"/>
+            <a:ext cx="1920240" cy="772294"/>
             <a:chOff x="6957490" y="4123666"/>
-            <a:chExt cx="2011680" cy="772294"/>
+            <a:chExt cx="1920240" cy="772294"/>
           </a:xfrm>
         </p:grpSpPr>
         <p:sp>
@@ -12128,7 +12346,7 @@
           <p:spPr>
             <a:xfrm>
               <a:off x="6957490" y="4123666"/>
-              <a:ext cx="2011680" cy="772294"/>
+              <a:ext cx="1920012" cy="772294"/>
             </a:xfrm>
             <a:prstGeom prst="rect">
               <a:avLst/>
@@ -12300,6 +12518,66 @@
           <a:chExt cx="0" cy="0"/>
         </a:xfrm>
       </p:grpSpPr>
+      <p:pic>
+        <p:nvPicPr>
+          <p:cNvPr id="5" name="Picture 4">
+            <a:extLst>
+              <a:ext uri="{FF2B5EF4-FFF2-40B4-BE49-F238E27FC236}">
+                <a16:creationId xmlns:a16="http://schemas.microsoft.com/office/drawing/2014/main" id="{4118E2C7-E5C7-CD2E-AEBD-8960927E5AF3}"/>
+              </a:ext>
+            </a:extLst>
+          </p:cNvPr>
+          <p:cNvPicPr>
+            <a:picLocks noChangeAspect="1"/>
+          </p:cNvPicPr>
+          <p:nvPr/>
+        </p:nvPicPr>
+        <p:blipFill>
+          <a:blip r:embed="rId3"/>
+          <a:stretch>
+            <a:fillRect/>
+          </a:stretch>
+        </p:blipFill>
+        <p:spPr>
+          <a:xfrm>
+            <a:off x="5592822" y="1885417"/>
+            <a:ext cx="3216083" cy="1988679"/>
+          </a:xfrm>
+          <a:prstGeom prst="rect">
+            <a:avLst/>
+          </a:prstGeom>
+        </p:spPr>
+      </p:pic>
+      <p:pic>
+        <p:nvPicPr>
+          <p:cNvPr id="6" name="Picture 5">
+            <a:extLst>
+              <a:ext uri="{FF2B5EF4-FFF2-40B4-BE49-F238E27FC236}">
+                <a16:creationId xmlns:a16="http://schemas.microsoft.com/office/drawing/2014/main" id="{D5C5E91D-FE7B-206B-2E5B-5ED91A81AD94}"/>
+              </a:ext>
+            </a:extLst>
+          </p:cNvPr>
+          <p:cNvPicPr>
+            <a:picLocks noChangeAspect="1"/>
+          </p:cNvPicPr>
+          <p:nvPr/>
+        </p:nvPicPr>
+        <p:blipFill>
+          <a:blip r:embed="rId4"/>
+          <a:stretch>
+            <a:fillRect/>
+          </a:stretch>
+        </p:blipFill>
+        <p:spPr>
+          <a:xfrm>
+            <a:off x="8808906" y="1885417"/>
+            <a:ext cx="3249450" cy="1988679"/>
+          </a:xfrm>
+          <a:prstGeom prst="rect">
+            <a:avLst/>
+          </a:prstGeom>
+        </p:spPr>
+      </p:pic>
       <p:sp>
         <p:nvSpPr>
           <p:cNvPr id="2" name="Text 0"/>
@@ -12459,128 +12737,6 @@
               <a:t>12</a:t>
             </a:r>
             <a:endParaRPr lang="en-US" sz="750" dirty="0"/>
-          </a:p>
-        </p:txBody>
-      </p:sp>
-      <p:sp>
-        <p:nvSpPr>
-          <p:cNvPr id="32" name="Shape 30"/>
-          <p:cNvSpPr/>
-          <p:nvPr/>
-        </p:nvSpPr>
-        <p:spPr>
-          <a:xfrm>
-            <a:off x="9078898" y="4125942"/>
-            <a:ext cx="2011680" cy="770018"/>
-          </a:xfrm>
-          <a:prstGeom prst="rect">
-            <a:avLst/>
-          </a:prstGeom>
-          <a:solidFill>
-            <a:srgbClr val="FFFFFF">
-              <a:alpha val="98000"/>
-            </a:srgbClr>
-          </a:solidFill>
-          <a:ln w="17780">
-            <a:solidFill>
-              <a:srgbClr val="B65D3A"/>
-            </a:solidFill>
-            <a:prstDash val="solid"/>
-          </a:ln>
-        </p:spPr>
-        <p:txBody>
-          <a:bodyPr/>
-          <a:lstStyle/>
-          <a:p>
-            <a:endParaRPr lang="en-US"/>
-          </a:p>
-        </p:txBody>
-      </p:sp>
-      <p:sp>
-        <p:nvSpPr>
-          <p:cNvPr id="33" name="Text 31"/>
-          <p:cNvSpPr/>
-          <p:nvPr/>
-        </p:nvSpPr>
-        <p:spPr>
-          <a:xfrm>
-            <a:off x="9078898" y="4263102"/>
-            <a:ext cx="2011680" cy="329184"/>
-          </a:xfrm>
-          <a:prstGeom prst="rect">
-            <a:avLst/>
-          </a:prstGeom>
-          <a:noFill/>
-          <a:ln/>
-        </p:spPr>
-        <p:txBody>
-          <a:bodyPr wrap="square" lIns="0" tIns="0" rIns="0" bIns="0" rtlCol="0" anchor="t">
-            <a:normAutofit/>
-          </a:bodyPr>
-          <a:lstStyle/>
-          <a:p>
-            <a:pPr marL="0" indent="0" algn="ctr">
-              <a:lnSpc>
-                <a:spcPct val="90000"/>
-              </a:lnSpc>
-              <a:buNone/>
-            </a:pPr>
-            <a:r>
-              <a:rPr lang="en-US" sz="2100" b="1" dirty="0">
-                <a:solidFill>
-                  <a:srgbClr val="B65D3A"/>
-                </a:solidFill>
-                <a:latin typeface="Aptos Display" pitchFamily="34" charset="0"/>
-                <a:ea typeface="Aptos Display" pitchFamily="34" charset="-122"/>
-                <a:cs typeface="Aptos Display" pitchFamily="34" charset="-120"/>
-              </a:rPr>
-              <a:t>94.40%</a:t>
-            </a:r>
-            <a:endParaRPr lang="en-US" sz="2100" dirty="0"/>
-          </a:p>
-        </p:txBody>
-      </p:sp>
-      <p:sp>
-        <p:nvSpPr>
-          <p:cNvPr id="34" name="Text 32"/>
-          <p:cNvSpPr/>
-          <p:nvPr/>
-        </p:nvSpPr>
-        <p:spPr>
-          <a:xfrm>
-            <a:off x="9078898" y="4656294"/>
-            <a:ext cx="2011680" cy="219456"/>
-          </a:xfrm>
-          <a:prstGeom prst="rect">
-            <a:avLst/>
-          </a:prstGeom>
-          <a:noFill/>
-          <a:ln/>
-        </p:spPr>
-        <p:txBody>
-          <a:bodyPr wrap="square" lIns="0" tIns="0" rIns="0" bIns="0" rtlCol="0" anchor="t">
-            <a:normAutofit/>
-          </a:bodyPr>
-          <a:lstStyle/>
-          <a:p>
-            <a:pPr marL="0" indent="0" algn="ctr">
-              <a:lnSpc>
-                <a:spcPct val="90000"/>
-              </a:lnSpc>
-              <a:buNone/>
-            </a:pPr>
-            <a:r>
-              <a:rPr lang="en-US" sz="780" dirty="0">
-                <a:solidFill>
-                  <a:srgbClr val="6B7176"/>
-                </a:solidFill>
-                <a:latin typeface="Aptos" pitchFamily="34" charset="0"/>
-                <a:ea typeface="Aptos" pitchFamily="34" charset="-122"/>
-                <a:cs typeface="Aptos" pitchFamily="34" charset="-120"/>
-              </a:rPr>
-              <a:t>final 5-fold accuracy</a:t>
-            </a:r>
-            <a:endParaRPr lang="en-US" sz="780" dirty="0"/>
           </a:p>
         </p:txBody>
       </p:sp>
@@ -12643,7 +12799,7 @@
           <p:nvPr/>
         </p:nvPicPr>
         <p:blipFill rotWithShape="1">
-          <a:blip r:embed="rId3">
+          <a:blip r:embed="rId5">
             <a:extLst>
               <a:ext uri="{28A0092B-C50C-407E-A947-70E740481C1C}">
                 <a14:useLocalDpi xmlns:a14="http://schemas.microsoft.com/office/drawing/2010/main" val="0"/>
@@ -14550,12 +14706,152 @@
           </a:p>
         </p:txBody>
       </p:sp>
+      <p:sp>
+        <p:nvSpPr>
+          <p:cNvPr id="23" name="Shape 498">
+            <a:extLst>
+              <a:ext uri="{FF2B5EF4-FFF2-40B4-BE49-F238E27FC236}">
+                <a16:creationId xmlns:a16="http://schemas.microsoft.com/office/drawing/2014/main" id="{D9FC713D-E54E-5DD4-5B73-CA6AC57E7A9E}"/>
+              </a:ext>
+            </a:extLst>
+          </p:cNvPr>
+          <p:cNvSpPr/>
+          <p:nvPr/>
+        </p:nvSpPr>
+        <p:spPr>
+          <a:xfrm>
+            <a:off x="8239330" y="4084421"/>
+            <a:ext cx="1920012" cy="780682"/>
+          </a:xfrm>
+          <a:prstGeom prst="rect">
+            <a:avLst/>
+          </a:prstGeom>
+          <a:solidFill>
+            <a:srgbClr val="FFFFFF">
+              <a:alpha val="98000"/>
+            </a:srgbClr>
+          </a:solidFill>
+          <a:ln w="17780">
+            <a:solidFill>
+              <a:srgbClr val="B65D3A"/>
+            </a:solidFill>
+            <a:prstDash val="solid"/>
+          </a:ln>
+        </p:spPr>
+        <p:txBody>
+          <a:bodyPr/>
+          <a:lstStyle/>
+          <a:p>
+            <a:endParaRPr lang="en-US"/>
+          </a:p>
+        </p:txBody>
+      </p:sp>
+      <p:sp>
+        <p:nvSpPr>
+          <p:cNvPr id="24" name="Text 499">
+            <a:extLst>
+              <a:ext uri="{FF2B5EF4-FFF2-40B4-BE49-F238E27FC236}">
+                <a16:creationId xmlns:a16="http://schemas.microsoft.com/office/drawing/2014/main" id="{4362304F-343B-923E-3087-86ABABE95DDD}"/>
+              </a:ext>
+            </a:extLst>
+          </p:cNvPr>
+          <p:cNvSpPr/>
+          <p:nvPr/>
+        </p:nvSpPr>
+        <p:spPr>
+          <a:xfrm>
+            <a:off x="8239330" y="4224527"/>
+            <a:ext cx="1920012" cy="329184"/>
+          </a:xfrm>
+          <a:prstGeom prst="rect">
+            <a:avLst/>
+          </a:prstGeom>
+          <a:noFill/>
+          <a:ln/>
+        </p:spPr>
+        <p:txBody>
+          <a:bodyPr wrap="square" lIns="0" tIns="0" rIns="0" bIns="0" rtlCol="0" anchor="t">
+            <a:normAutofit/>
+          </a:bodyPr>
+          <a:lstStyle/>
+          <a:p>
+            <a:pPr marL="0" indent="0" algn="ctr">
+              <a:lnSpc>
+                <a:spcPct val="90000"/>
+              </a:lnSpc>
+              <a:buNone/>
+            </a:pPr>
+            <a:r>
+              <a:rPr lang="en-US" sz="2100" b="1" dirty="0">
+                <a:solidFill>
+                  <a:srgbClr val="B65D3A"/>
+                </a:solidFill>
+                <a:latin typeface="Aptos Display" pitchFamily="34" charset="0"/>
+                <a:ea typeface="Aptos Display" pitchFamily="34" charset="-122"/>
+                <a:cs typeface="Aptos Display" pitchFamily="34" charset="-120"/>
+              </a:rPr>
+              <a:t>94.4%</a:t>
+            </a:r>
+            <a:endParaRPr lang="en-US" sz="2100" dirty="0"/>
+          </a:p>
+        </p:txBody>
+      </p:sp>
+      <p:sp>
+        <p:nvSpPr>
+          <p:cNvPr id="25" name="Text 500">
+            <a:extLst>
+              <a:ext uri="{FF2B5EF4-FFF2-40B4-BE49-F238E27FC236}">
+                <a16:creationId xmlns:a16="http://schemas.microsoft.com/office/drawing/2014/main" id="{ED633736-DC22-5ED4-B73D-FDA8289C8F79}"/>
+              </a:ext>
+            </a:extLst>
+          </p:cNvPr>
+          <p:cNvSpPr/>
+          <p:nvPr/>
+        </p:nvSpPr>
+        <p:spPr>
+          <a:xfrm>
+            <a:off x="8239330" y="4617719"/>
+            <a:ext cx="1920012" cy="219456"/>
+          </a:xfrm>
+          <a:prstGeom prst="rect">
+            <a:avLst/>
+          </a:prstGeom>
+          <a:noFill/>
+          <a:ln/>
+        </p:spPr>
+        <p:txBody>
+          <a:bodyPr wrap="square" lIns="0" tIns="0" rIns="0" bIns="0" rtlCol="0" anchor="t">
+            <a:normAutofit/>
+          </a:bodyPr>
+          <a:lstStyle/>
+          <a:p>
+            <a:pPr marL="0" indent="0" algn="ctr">
+              <a:lnSpc>
+                <a:spcPct val="90000"/>
+              </a:lnSpc>
+              <a:buNone/>
+            </a:pPr>
+            <a:r>
+              <a:rPr lang="en-US" sz="780" dirty="0">
+                <a:solidFill>
+                  <a:srgbClr val="6B7176"/>
+                </a:solidFill>
+                <a:latin typeface="Aptos" pitchFamily="34" charset="0"/>
+                <a:ea typeface="Aptos" pitchFamily="34" charset="-122"/>
+                <a:cs typeface="Aptos" pitchFamily="34" charset="-120"/>
+              </a:rPr>
+              <a:t>final 5-fold accuracy</a:t>
+            </a:r>
+            <a:endParaRPr lang="en-US" sz="780" dirty="0"/>
+          </a:p>
+        </p:txBody>
+      </p:sp>
       <p:grpSp>
         <p:nvGrpSpPr>
-          <p:cNvPr id="5" name="Group 4">
+          <p:cNvPr id="26" name="Group 25">
             <a:extLst>
               <a:ext uri="{FF2B5EF4-FFF2-40B4-BE49-F238E27FC236}">
-                <a16:creationId xmlns:a16="http://schemas.microsoft.com/office/drawing/2014/main" id="{BE88CA5D-B2F9-1E52-6AC1-F2B64A98F10B}"/>
+                <a16:creationId xmlns:a16="http://schemas.microsoft.com/office/drawing/2014/main" id="{B18A83C6-62D2-E441-C96A-51AEEA5D47AC}"/>
               </a:ext>
             </a:extLst>
           </p:cNvPr>
@@ -14564,18 +14860,18 @@
         </p:nvGrpSpPr>
         <p:grpSpPr>
           <a:xfrm>
-            <a:off x="6957490" y="4123666"/>
-            <a:ext cx="2011680" cy="772294"/>
+            <a:off x="6076188" y="4092809"/>
+            <a:ext cx="1920240" cy="772294"/>
             <a:chOff x="6957490" y="4123666"/>
-            <a:chExt cx="2011680" cy="772294"/>
+            <a:chExt cx="1920240" cy="772294"/>
           </a:xfrm>
         </p:grpSpPr>
         <p:sp>
           <p:nvSpPr>
-            <p:cNvPr id="6" name="Shape 48">
+            <p:cNvPr id="27" name="Shape 48">
               <a:extLst>
                 <a:ext uri="{FF2B5EF4-FFF2-40B4-BE49-F238E27FC236}">
-                  <a16:creationId xmlns:a16="http://schemas.microsoft.com/office/drawing/2014/main" id="{7C39D036-9001-3BE9-8E12-1F1E84C39011}"/>
+                  <a16:creationId xmlns:a16="http://schemas.microsoft.com/office/drawing/2014/main" id="{2FBA8E6F-4D3F-F840-786D-0EABE6DB37C4}"/>
                 </a:ext>
               </a:extLst>
             </p:cNvPr>
@@ -14585,7 +14881,7 @@
           <p:spPr>
             <a:xfrm>
               <a:off x="6957490" y="4123666"/>
-              <a:ext cx="2011680" cy="772294"/>
+              <a:ext cx="1920012" cy="772294"/>
             </a:xfrm>
             <a:prstGeom prst="rect">
               <a:avLst/>
@@ -14615,10 +14911,10 @@
         </p:sp>
         <p:sp>
           <p:nvSpPr>
-            <p:cNvPr id="7" name="Text 49">
+            <p:cNvPr id="28" name="Text 49">
               <a:extLst>
                 <a:ext uri="{FF2B5EF4-FFF2-40B4-BE49-F238E27FC236}">
-                  <a16:creationId xmlns:a16="http://schemas.microsoft.com/office/drawing/2014/main" id="{EB63FAAC-CA55-8265-32E9-E0A1E7CBFF12}"/>
+                  <a16:creationId xmlns:a16="http://schemas.microsoft.com/office/drawing/2014/main" id="{A8DB9481-E320-7256-6DA0-124012C48D24}"/>
                 </a:ext>
               </a:extLst>
             </p:cNvPr>
@@ -14675,10 +14971,10 @@
         </p:sp>
         <p:sp>
           <p:nvSpPr>
-            <p:cNvPr id="8" name="Text 50">
+            <p:cNvPr id="29" name="Text 50">
               <a:extLst>
                 <a:ext uri="{FF2B5EF4-FFF2-40B4-BE49-F238E27FC236}">
-                  <a16:creationId xmlns:a16="http://schemas.microsoft.com/office/drawing/2014/main" id="{6E135FD5-F32A-7220-4260-D615BBDE8940}"/>
+                  <a16:creationId xmlns:a16="http://schemas.microsoft.com/office/drawing/2014/main" id="{9B484ADC-A341-3E48-D371-6B3027AD37A4}"/>
                 </a:ext>
               </a:extLst>
             </p:cNvPr>
@@ -14724,66 +15020,6 @@
           </p:txBody>
         </p:sp>
       </p:grpSp>
-      <p:pic>
-        <p:nvPicPr>
-          <p:cNvPr id="9" name="Picture 8">
-            <a:extLst>
-              <a:ext uri="{FF2B5EF4-FFF2-40B4-BE49-F238E27FC236}">
-                <a16:creationId xmlns:a16="http://schemas.microsoft.com/office/drawing/2014/main" id="{ED6FB033-FAE8-90C0-9FC0-83AC1D7A59C7}"/>
-              </a:ext>
-            </a:extLst>
-          </p:cNvPr>
-          <p:cNvPicPr>
-            <a:picLocks noChangeAspect="1"/>
-          </p:cNvPicPr>
-          <p:nvPr/>
-        </p:nvPicPr>
-        <p:blipFill>
-          <a:blip r:embed="rId4"/>
-          <a:stretch>
-            <a:fillRect/>
-          </a:stretch>
-        </p:blipFill>
-        <p:spPr>
-          <a:xfrm>
-            <a:off x="5859811" y="2022666"/>
-            <a:ext cx="3109359" cy="1922686"/>
-          </a:xfrm>
-          <a:prstGeom prst="rect">
-            <a:avLst/>
-          </a:prstGeom>
-        </p:spPr>
-      </p:pic>
-      <p:pic>
-        <p:nvPicPr>
-          <p:cNvPr id="10" name="Picture 9">
-            <a:extLst>
-              <a:ext uri="{FF2B5EF4-FFF2-40B4-BE49-F238E27FC236}">
-                <a16:creationId xmlns:a16="http://schemas.microsoft.com/office/drawing/2014/main" id="{F77EEF88-F60B-56A1-4677-329A753740B8}"/>
-              </a:ext>
-            </a:extLst>
-          </p:cNvPr>
-          <p:cNvPicPr>
-            <a:picLocks noChangeAspect="1"/>
-          </p:cNvPicPr>
-          <p:nvPr/>
-        </p:nvPicPr>
-        <p:blipFill>
-          <a:blip r:embed="rId5"/>
-          <a:stretch>
-            <a:fillRect/>
-          </a:stretch>
-        </p:blipFill>
-        <p:spPr>
-          <a:xfrm>
-            <a:off x="8969170" y="2033018"/>
-            <a:ext cx="3109359" cy="1922686"/>
-          </a:xfrm>
-          <a:prstGeom prst="rect">
-            <a:avLst/>
-          </a:prstGeom>
-        </p:spPr>
-      </p:pic>
     </p:spTree>
   </p:cSld>
   <p:clrMapOvr>
@@ -14899,8 +15135,8 @@
         </p:nvSpPr>
         <p:spPr>
           <a:xfrm>
-            <a:off x="731520" y="1261872"/>
-            <a:ext cx="6035040" cy="411480"/>
+            <a:off x="731520" y="1347624"/>
+            <a:ext cx="4922521" cy="411480"/>
           </a:xfrm>
           <a:prstGeom prst="rect">
             <a:avLst/>
@@ -14943,7 +15179,7 @@
         </p:nvSpPr>
         <p:spPr>
           <a:xfrm>
-            <a:off x="731520" y="2110784"/>
+            <a:off x="731520" y="2336071"/>
             <a:ext cx="2468880" cy="164592"/>
           </a:xfrm>
           <a:prstGeom prst="rect">
@@ -14989,7 +15225,7 @@
         </p:nvSpPr>
         <p:spPr>
           <a:xfrm>
-            <a:off x="3337560" y="2211368"/>
+            <a:off x="3337560" y="2436655"/>
             <a:ext cx="2148840" cy="0"/>
           </a:xfrm>
           <a:prstGeom prst="line">
@@ -15019,7 +15255,7 @@
         </p:nvSpPr>
         <p:spPr>
           <a:xfrm>
-            <a:off x="3337560" y="2129072"/>
+            <a:off x="3337560" y="2354359"/>
             <a:ext cx="1386002" cy="155448"/>
           </a:xfrm>
           <a:prstGeom prst="rect">
@@ -15053,7 +15289,7 @@
         </p:nvSpPr>
         <p:spPr>
           <a:xfrm>
-            <a:off x="4815002" y="2110784"/>
+            <a:off x="4815002" y="2336071"/>
             <a:ext cx="658368" cy="146304"/>
           </a:xfrm>
           <a:prstGeom prst="rect">
@@ -15097,7 +15333,7 @@
         </p:nvSpPr>
         <p:spPr>
           <a:xfrm>
-            <a:off x="731520" y="2739990"/>
+            <a:off x="731520" y="2965277"/>
             <a:ext cx="2468880" cy="164592"/>
           </a:xfrm>
           <a:prstGeom prst="rect">
@@ -15141,7 +15377,7 @@
         </p:nvSpPr>
         <p:spPr>
           <a:xfrm>
-            <a:off x="3337560" y="2840574"/>
+            <a:off x="3337560" y="3065861"/>
             <a:ext cx="2148840" cy="0"/>
           </a:xfrm>
           <a:prstGeom prst="line">
@@ -15171,7 +15407,7 @@
         </p:nvSpPr>
         <p:spPr>
           <a:xfrm>
-            <a:off x="3337560" y="2758278"/>
+            <a:off x="3337560" y="2983565"/>
             <a:ext cx="1220541" cy="155448"/>
           </a:xfrm>
           <a:prstGeom prst="rect">
@@ -15205,7 +15441,7 @@
         </p:nvSpPr>
         <p:spPr>
           <a:xfrm>
-            <a:off x="4649541" y="2739990"/>
+            <a:off x="4649541" y="2965277"/>
             <a:ext cx="658368" cy="146304"/>
           </a:xfrm>
           <a:prstGeom prst="rect">
@@ -15249,7 +15485,7 @@
         </p:nvSpPr>
         <p:spPr>
           <a:xfrm>
-            <a:off x="731520" y="3268616"/>
+            <a:off x="731520" y="3493903"/>
             <a:ext cx="2468880" cy="164592"/>
           </a:xfrm>
           <a:prstGeom prst="rect">
@@ -15293,7 +15529,7 @@
         </p:nvSpPr>
         <p:spPr>
           <a:xfrm>
-            <a:off x="3337560" y="3369200"/>
+            <a:off x="3337560" y="3594487"/>
             <a:ext cx="2148840" cy="0"/>
           </a:xfrm>
           <a:prstGeom prst="line">
@@ -15323,7 +15559,7 @@
         </p:nvSpPr>
         <p:spPr>
           <a:xfrm>
-            <a:off x="3337560" y="3286904"/>
+            <a:off x="3337560" y="3512191"/>
             <a:ext cx="1213020" cy="155448"/>
           </a:xfrm>
           <a:prstGeom prst="rect">
@@ -15357,7 +15593,7 @@
         </p:nvSpPr>
         <p:spPr>
           <a:xfrm>
-            <a:off x="4642020" y="3268616"/>
+            <a:off x="4642020" y="3493903"/>
             <a:ext cx="658368" cy="146304"/>
           </a:xfrm>
           <a:prstGeom prst="rect">
@@ -15401,7 +15637,7 @@
         </p:nvSpPr>
         <p:spPr>
           <a:xfrm>
-            <a:off x="731520" y="3588656"/>
+            <a:off x="731520" y="3813943"/>
             <a:ext cx="2468880" cy="164592"/>
           </a:xfrm>
           <a:prstGeom prst="rect">
@@ -15445,7 +15681,7 @@
         </p:nvSpPr>
         <p:spPr>
           <a:xfrm>
-            <a:off x="3337560" y="3689240"/>
+            <a:off x="3337560" y="3914527"/>
             <a:ext cx="2148840" cy="0"/>
           </a:xfrm>
           <a:prstGeom prst="line">
@@ -15475,7 +15711,7 @@
         </p:nvSpPr>
         <p:spPr>
           <a:xfrm>
-            <a:off x="3337560" y="3606944"/>
+            <a:off x="3337560" y="3832231"/>
             <a:ext cx="1792133" cy="155448"/>
           </a:xfrm>
           <a:prstGeom prst="rect">
@@ -15509,7 +15745,7 @@
         </p:nvSpPr>
         <p:spPr>
           <a:xfrm>
-            <a:off x="5221133" y="3588656"/>
+            <a:off x="5221133" y="3813943"/>
             <a:ext cx="658368" cy="146304"/>
           </a:xfrm>
           <a:prstGeom prst="rect">
@@ -15553,7 +15789,7 @@
         </p:nvSpPr>
         <p:spPr>
           <a:xfrm>
-            <a:off x="731520" y="4124696"/>
+            <a:off x="731520" y="4349983"/>
             <a:ext cx="2468880" cy="164592"/>
           </a:xfrm>
           <a:prstGeom prst="rect">
@@ -15597,7 +15833,7 @@
         </p:nvSpPr>
         <p:spPr>
           <a:xfrm>
-            <a:off x="3337560" y="4225280"/>
+            <a:off x="3337560" y="4450567"/>
             <a:ext cx="2148840" cy="0"/>
           </a:xfrm>
           <a:prstGeom prst="line">
@@ -15627,7 +15863,7 @@
         </p:nvSpPr>
         <p:spPr>
           <a:xfrm>
-            <a:off x="3337560" y="4142984"/>
+            <a:off x="3337560" y="4368271"/>
             <a:ext cx="2028505" cy="155448"/>
           </a:xfrm>
           <a:prstGeom prst="rect">
@@ -15661,7 +15897,7 @@
         </p:nvSpPr>
         <p:spPr>
           <a:xfrm>
-            <a:off x="5457505" y="4124696"/>
+            <a:off x="5457505" y="4349983"/>
             <a:ext cx="658368" cy="146304"/>
           </a:xfrm>
           <a:prstGeom prst="rect">
@@ -15705,7 +15941,7 @@
         </p:nvSpPr>
         <p:spPr>
           <a:xfrm>
-            <a:off x="731520" y="4444736"/>
+            <a:off x="731520" y="4670023"/>
             <a:ext cx="2468880" cy="164592"/>
           </a:xfrm>
           <a:prstGeom prst="rect">
@@ -15749,7 +15985,7 @@
         </p:nvSpPr>
         <p:spPr>
           <a:xfrm>
-            <a:off x="3337560" y="4545320"/>
+            <a:off x="3337560" y="4770607"/>
             <a:ext cx="2148840" cy="0"/>
           </a:xfrm>
           <a:prstGeom prst="line">
@@ -15779,7 +16015,7 @@
         </p:nvSpPr>
         <p:spPr>
           <a:xfrm>
-            <a:off x="3337560" y="4463024"/>
+            <a:off x="3337560" y="4688311"/>
             <a:ext cx="2046770" cy="155448"/>
           </a:xfrm>
           <a:prstGeom prst="rect">
@@ -15813,7 +16049,7 @@
         </p:nvSpPr>
         <p:spPr>
           <a:xfrm>
-            <a:off x="5475770" y="4444736"/>
+            <a:off x="5475770" y="4670023"/>
             <a:ext cx="658368" cy="146304"/>
           </a:xfrm>
           <a:prstGeom prst="rect">
@@ -16049,7 +16285,7 @@
         </p:nvSpPr>
         <p:spPr>
           <a:xfrm>
-            <a:off x="6702552" y="3072384"/>
+            <a:off x="6702552" y="2986246"/>
             <a:ext cx="4389120" cy="164592"/>
           </a:xfrm>
           <a:prstGeom prst="rect">
@@ -16382,7 +16618,7 @@
         </p:nvSpPr>
         <p:spPr>
           <a:xfrm>
-            <a:off x="731520" y="2430823"/>
+            <a:off x="731520" y="2656110"/>
             <a:ext cx="2468880" cy="164592"/>
           </a:xfrm>
           <a:prstGeom prst="rect">
@@ -16445,7 +16681,7 @@
         </p:nvSpPr>
         <p:spPr>
           <a:xfrm>
-            <a:off x="3337560" y="2531407"/>
+            <a:off x="3337560" y="2756694"/>
             <a:ext cx="2148840" cy="0"/>
           </a:xfrm>
           <a:prstGeom prst="line">
@@ -16481,7 +16717,7 @@
         </p:nvSpPr>
         <p:spPr>
           <a:xfrm>
-            <a:off x="3337560" y="2449111"/>
+            <a:off x="3337560" y="2674398"/>
             <a:ext cx="1463629" cy="155448"/>
           </a:xfrm>
           <a:prstGeom prst="rect">
@@ -16521,7 +16757,7 @@
         </p:nvSpPr>
         <p:spPr>
           <a:xfrm>
-            <a:off x="4891949" y="2439970"/>
+            <a:off x="4891949" y="2665257"/>
             <a:ext cx="658368" cy="146304"/>
           </a:xfrm>
           <a:prstGeom prst="rect">
@@ -16573,7 +16809,7 @@
         </p:nvCxnSpPr>
         <p:spPr>
           <a:xfrm>
-            <a:off x="1594512" y="3081918"/>
+            <a:off x="1594512" y="3307205"/>
             <a:ext cx="2688538" cy="0"/>
           </a:xfrm>
           <a:prstGeom prst="line">
@@ -16619,7 +16855,7 @@
         </p:nvCxnSpPr>
         <p:spPr>
           <a:xfrm>
-            <a:off x="1530912" y="3945272"/>
+            <a:off x="1530912" y="4170559"/>
             <a:ext cx="2688538" cy="0"/>
           </a:xfrm>
           <a:prstGeom prst="line">
@@ -21672,14 +21908,16 @@
         </p:nvSpPr>
         <p:spPr>
           <a:xfrm>
-            <a:off x="743871" y="2377918"/>
+            <a:off x="731520" y="2377916"/>
             <a:ext cx="2926080" cy="182880"/>
           </a:xfrm>
           <a:prstGeom prst="rect">
             <a:avLst/>
           </a:prstGeom>
           <a:noFill/>
-          <a:ln/>
+          <a:ln>
+            <a:noFill/>
+          </a:ln>
         </p:spPr>
         <p:txBody>
           <a:bodyPr wrap="square" lIns="0" tIns="0" rIns="0" bIns="0" rtlCol="0" anchor="t">
@@ -21967,61 +22205,6 @@
               <a:t>Baseline Replication</a:t>
             </a:r>
             <a:endParaRPr lang="en-US" sz="780" dirty="0"/>
-          </a:p>
-        </p:txBody>
-      </p:sp>
-      <p:sp>
-        <p:nvSpPr>
-          <p:cNvPr id="56" name="Text 54"/>
-          <p:cNvSpPr/>
-          <p:nvPr/>
-        </p:nvSpPr>
-        <p:spPr>
-          <a:xfrm>
-            <a:off x="6957490" y="5129506"/>
-            <a:ext cx="4389120" cy="274320"/>
-          </a:xfrm>
-          <a:prstGeom prst="rect">
-            <a:avLst/>
-          </a:prstGeom>
-          <a:noFill/>
-          <a:ln/>
-        </p:spPr>
-        <p:txBody>
-          <a:bodyPr wrap="square" lIns="0" tIns="0" rIns="0" bIns="0" rtlCol="0" anchor="t">
-            <a:normAutofit/>
-          </a:bodyPr>
-          <a:lstStyle/>
-          <a:p>
-            <a:pPr marL="0" indent="0" algn="l">
-              <a:lnSpc>
-                <a:spcPct val="82000"/>
-              </a:lnSpc>
-              <a:buNone/>
-            </a:pPr>
-            <a:r>
-              <a:rPr lang="en-US" sz="850" i="1" dirty="0">
-                <a:solidFill>
-                  <a:srgbClr val="6B7176"/>
-                </a:solidFill>
-                <a:latin typeface="Aptos" pitchFamily="34" charset="0"/>
-                <a:ea typeface="Aptos" pitchFamily="34" charset="-122"/>
-                <a:cs typeface="Aptos" pitchFamily="34" charset="-120"/>
-              </a:rPr>
-              <a:t>Baseline result closely match those found by </a:t>
-            </a:r>
-            <a:r>
-              <a:rPr lang="en-US" sz="850" i="1" dirty="0" err="1">
-                <a:solidFill>
-                  <a:srgbClr val="6B7176"/>
-                </a:solidFill>
-                <a:latin typeface="Aptos" pitchFamily="34" charset="0"/>
-                <a:ea typeface="Aptos" pitchFamily="34" charset="-122"/>
-                <a:cs typeface="Aptos" pitchFamily="34" charset="-120"/>
-              </a:rPr>
-              <a:t>Piczak</a:t>
-            </a:r>
-            <a:endParaRPr lang="en-US" sz="850" dirty="0"/>
           </a:p>
         </p:txBody>
       </p:sp>
@@ -24220,14 +24403,16 @@
         </p:nvSpPr>
         <p:spPr>
           <a:xfrm>
-            <a:off x="731520" y="2321628"/>
+            <a:off x="731520" y="2381772"/>
             <a:ext cx="1627632" cy="164592"/>
           </a:xfrm>
           <a:prstGeom prst="rect">
             <a:avLst/>
           </a:prstGeom>
           <a:noFill/>
-          <a:ln/>
+          <a:ln>
+            <a:noFill/>
+          </a:ln>
         </p:spPr>
         <p:txBody>
           <a:bodyPr wrap="square" lIns="0" tIns="0" rIns="0" bIns="0" rtlCol="0" anchor="t">
@@ -24260,7 +24445,7 @@
         </p:nvSpPr>
         <p:spPr>
           <a:xfrm>
-            <a:off x="731520" y="4326060"/>
+            <a:off x="731520" y="4650734"/>
             <a:ext cx="1002270" cy="146304"/>
           </a:xfrm>
           <a:prstGeom prst="rect">
@@ -24300,7 +24485,7 @@
         </p:nvSpPr>
         <p:spPr>
           <a:xfrm>
-            <a:off x="731520" y="4568476"/>
+            <a:off x="731520" y="4893150"/>
             <a:ext cx="5133821" cy="1281482"/>
           </a:xfrm>
           <a:prstGeom prst="rect">
@@ -32938,13 +33123,13 @@
           <p:nvPr>
             <p:extLst>
               <p:ext uri="{D42A27DB-BD31-4B8C-83A1-F6EECF244321}">
-                <p14:modId xmlns:p14="http://schemas.microsoft.com/office/powerpoint/2010/main" val="2921529174"/>
+                <p14:modId xmlns:p14="http://schemas.microsoft.com/office/powerpoint/2010/main" val="1793188872"/>
               </p:ext>
             </p:extLst>
           </p:nvPr>
         </p:nvGraphicFramePr>
         <p:xfrm>
-          <a:off x="731520" y="4288669"/>
+          <a:off x="731520" y="4328425"/>
           <a:ext cx="4479886" cy="1158240"/>
         </p:xfrm>
         <a:graphic>
@@ -33989,13 +34174,13 @@
           <p:nvPr>
             <p:extLst>
               <p:ext uri="{D42A27DB-BD31-4B8C-83A1-F6EECF244321}">
-                <p14:modId xmlns:p14="http://schemas.microsoft.com/office/powerpoint/2010/main" val="3987419374"/>
+                <p14:modId xmlns:p14="http://schemas.microsoft.com/office/powerpoint/2010/main" val="519187257"/>
               </p:ext>
             </p:extLst>
           </p:nvPr>
         </p:nvGraphicFramePr>
         <p:xfrm>
-          <a:off x="731522" y="5560056"/>
+          <a:off x="731522" y="5639568"/>
           <a:ext cx="4479884" cy="600456"/>
         </p:xfrm>
         <a:graphic>

--- a/Docs/Final_Project_Presentation_Draft.pptx
+++ b/Docs/Final_Project_Presentation_Draft.pptx
@@ -4446,7 +4446,7 @@
       </p:sp>
       <p:pic>
         <p:nvPicPr>
-          <p:cNvPr id="28" name="Image 0" descr="/Users/andrew/Library/CloudStorage/OneDrive-CornellUniversity/Courses/SYSEN5888/ Project/DeepLearning5888Project/Code/Transfer Learning/VGGish Results/VGGish_combined_training_test_metrics_1fold_5fold.png"/>
+          <p:cNvPr id="28" name="Image 0"/>
           <p:cNvPicPr>
             <a:picLocks noChangeAspect="1"/>
           </p:cNvPicPr>
@@ -4459,8 +4459,8 @@
         </p:blipFill>
         <p:spPr>
           <a:xfrm>
-            <a:off x="6012932" y="1591056"/>
-            <a:ext cx="5739517" cy="2411187"/>
+            <a:off x="6012932" y="1680632"/>
+            <a:ext cx="5739517" cy="2232034"/>
           </a:xfrm>
           <a:prstGeom prst="rect">
             <a:avLst/>
@@ -5911,631 +5911,6 @@
           </a:graphicData>
         </a:graphic>
       </p:graphicFrame>
-      <p:graphicFrame>
-        <p:nvGraphicFramePr>
-          <p:cNvPr id="64" name="Table 1">
-            <a:extLst>
-              <a:ext uri="{FF2B5EF4-FFF2-40B4-BE49-F238E27FC236}">
-                <a16:creationId xmlns:a16="http://schemas.microsoft.com/office/drawing/2014/main" id="{D91EE508-A360-8F17-6E14-BE218974268F}"/>
-              </a:ext>
-            </a:extLst>
-          </p:cNvPr>
-          <p:cNvGraphicFramePr>
-            <a:graphicFrameLocks noGrp="1"/>
-          </p:cNvGraphicFramePr>
-          <p:nvPr>
-            <p:extLst>
-              <p:ext uri="{D42A27DB-BD31-4B8C-83A1-F6EECF244321}">
-                <p14:modId xmlns:p14="http://schemas.microsoft.com/office/powerpoint/2010/main" val="2101833763"/>
-              </p:ext>
-            </p:extLst>
-          </p:nvPr>
-        </p:nvGraphicFramePr>
-        <p:xfrm>
-          <a:off x="6141156" y="4226223"/>
-          <a:ext cx="4389120" cy="749808"/>
-        </p:xfrm>
-        <a:graphic>
-          <a:graphicData uri="http://schemas.openxmlformats.org/drawingml/2006/table">
-            <a:tbl>
-              <a:tblPr/>
-              <a:tblGrid>
-                <a:gridCol w="2106778">
-                  <a:extLst>
-                    <a:ext uri="{9D8B030D-6E8A-4147-A177-3AD203B41FA5}">
-                      <a16:colId xmlns:a16="http://schemas.microsoft.com/office/drawing/2014/main" val="20000"/>
-                    </a:ext>
-                  </a:extLst>
-                </a:gridCol>
-                <a:gridCol w="1141171">
-                  <a:extLst>
-                    <a:ext uri="{9D8B030D-6E8A-4147-A177-3AD203B41FA5}">
-                      <a16:colId xmlns:a16="http://schemas.microsoft.com/office/drawing/2014/main" val="20001"/>
-                    </a:ext>
-                  </a:extLst>
-                </a:gridCol>
-                <a:gridCol w="1141171">
-                  <a:extLst>
-                    <a:ext uri="{9D8B030D-6E8A-4147-A177-3AD203B41FA5}">
-                      <a16:colId xmlns:a16="http://schemas.microsoft.com/office/drawing/2014/main" val="20002"/>
-                    </a:ext>
-                  </a:extLst>
-                </a:gridCol>
-              </a:tblGrid>
-              <a:tr h="249936">
-                <a:tc>
-                  <a:txBody>
-                    <a:bodyPr/>
-                    <a:lstStyle/>
-                    <a:p>
-                      <a:pPr marL="0" indent="0">
-                        <a:buNone/>
-                      </a:pPr>
-                      <a:r>
-                        <a:rPr lang="en-US" sz="920" b="1" dirty="0">
-                          <a:solidFill>
-                            <a:srgbClr val="FFFFFF"/>
-                          </a:solidFill>
-                        </a:rPr>
-                        <a:t>Variant</a:t>
-                      </a:r>
-                      <a:endParaRPr lang="en-US" sz="920" dirty="0"/>
-                    </a:p>
-                  </a:txBody>
-                  <a:tcPr marL="50292" marR="50292" marT="50292" marB="50292">
-                    <a:lnL w="10160" cap="flat" cmpd="sng" algn="ctr">
-                      <a:solidFill>
-                        <a:srgbClr val="FFFFFF"/>
-                      </a:solidFill>
-                      <a:prstDash val="solid"/>
-                      <a:round/>
-                      <a:headEnd type="none" w="med" len="med"/>
-                      <a:tailEnd type="none" w="med" len="med"/>
-                    </a:lnL>
-                    <a:lnR w="10160" cap="flat" cmpd="sng" algn="ctr">
-                      <a:solidFill>
-                        <a:srgbClr val="FFFFFF"/>
-                      </a:solidFill>
-                      <a:prstDash val="solid"/>
-                      <a:round/>
-                      <a:headEnd type="none" w="med" len="med"/>
-                      <a:tailEnd type="none" w="med" len="med"/>
-                    </a:lnR>
-                    <a:lnT w="10160" cap="flat" cmpd="sng" algn="ctr">
-                      <a:solidFill>
-                        <a:srgbClr val="FFFFFF"/>
-                      </a:solidFill>
-                      <a:prstDash val="solid"/>
-                      <a:round/>
-                      <a:headEnd type="none" w="med" len="med"/>
-                      <a:tailEnd type="none" w="med" len="med"/>
-                    </a:lnT>
-                    <a:lnB w="10160" cap="flat" cmpd="sng" algn="ctr">
-                      <a:solidFill>
-                        <a:srgbClr val="FFFFFF"/>
-                      </a:solidFill>
-                      <a:prstDash val="solid"/>
-                      <a:round/>
-                      <a:headEnd type="none" w="med" len="med"/>
-                      <a:tailEnd type="none" w="med" len="med"/>
-                    </a:lnB>
-                    <a:solidFill>
-                      <a:srgbClr val="17677D"/>
-                    </a:solidFill>
-                  </a:tcPr>
-                </a:tc>
-                <a:tc>
-                  <a:txBody>
-                    <a:bodyPr/>
-                    <a:lstStyle/>
-                    <a:p>
-                      <a:pPr marL="0" indent="0">
-                        <a:buNone/>
-                      </a:pPr>
-                      <a:r>
-                        <a:rPr lang="en-US" sz="920" b="1" dirty="0">
-                          <a:solidFill>
-                            <a:srgbClr val="FFFFFF"/>
-                          </a:solidFill>
-                        </a:rPr>
-                        <a:t>Final</a:t>
-                      </a:r>
-                      <a:endParaRPr lang="en-US" sz="920" dirty="0"/>
-                    </a:p>
-                  </a:txBody>
-                  <a:tcPr marL="50292" marR="50292" marT="50292" marB="50292">
-                    <a:lnL w="10160" cap="flat" cmpd="sng" algn="ctr">
-                      <a:solidFill>
-                        <a:srgbClr val="FFFFFF"/>
-                      </a:solidFill>
-                      <a:prstDash val="solid"/>
-                      <a:round/>
-                      <a:headEnd type="none" w="med" len="med"/>
-                      <a:tailEnd type="none" w="med" len="med"/>
-                    </a:lnL>
-                    <a:lnR w="10160" cap="flat" cmpd="sng" algn="ctr">
-                      <a:solidFill>
-                        <a:srgbClr val="FFFFFF"/>
-                      </a:solidFill>
-                      <a:prstDash val="solid"/>
-                      <a:round/>
-                      <a:headEnd type="none" w="med" len="med"/>
-                      <a:tailEnd type="none" w="med" len="med"/>
-                    </a:lnR>
-                    <a:lnT w="10160" cap="flat" cmpd="sng" algn="ctr">
-                      <a:solidFill>
-                        <a:srgbClr val="FFFFFF"/>
-                      </a:solidFill>
-                      <a:prstDash val="solid"/>
-                      <a:round/>
-                      <a:headEnd type="none" w="med" len="med"/>
-                      <a:tailEnd type="none" w="med" len="med"/>
-                    </a:lnT>
-                    <a:lnB w="10160" cap="flat" cmpd="sng" algn="ctr">
-                      <a:solidFill>
-                        <a:srgbClr val="FFFFFF"/>
-                      </a:solidFill>
-                      <a:prstDash val="solid"/>
-                      <a:round/>
-                      <a:headEnd type="none" w="med" len="med"/>
-                      <a:tailEnd type="none" w="med" len="med"/>
-                    </a:lnB>
-                    <a:solidFill>
-                      <a:srgbClr val="17677D"/>
-                    </a:solidFill>
-                  </a:tcPr>
-                </a:tc>
-                <a:tc>
-                  <a:txBody>
-                    <a:bodyPr/>
-                    <a:lstStyle/>
-                    <a:p>
-                      <a:pPr marL="0" indent="0">
-                        <a:buNone/>
-                      </a:pPr>
-                      <a:r>
-                        <a:rPr lang="en-US" sz="920" b="1" dirty="0">
-                          <a:solidFill>
-                            <a:srgbClr val="FFFFFF"/>
-                          </a:solidFill>
-                        </a:rPr>
-                        <a:t>Best</a:t>
-                      </a:r>
-                      <a:endParaRPr lang="en-US" sz="920" dirty="0"/>
-                    </a:p>
-                  </a:txBody>
-                  <a:tcPr marL="50292" marR="50292" marT="50292" marB="50292">
-                    <a:lnL w="10160" cap="flat" cmpd="sng" algn="ctr">
-                      <a:solidFill>
-                        <a:srgbClr val="FFFFFF"/>
-                      </a:solidFill>
-                      <a:prstDash val="solid"/>
-                      <a:round/>
-                      <a:headEnd type="none" w="med" len="med"/>
-                      <a:tailEnd type="none" w="med" len="med"/>
-                    </a:lnL>
-                    <a:lnR w="10160" cap="flat" cmpd="sng" algn="ctr">
-                      <a:solidFill>
-                        <a:srgbClr val="FFFFFF"/>
-                      </a:solidFill>
-                      <a:prstDash val="solid"/>
-                      <a:round/>
-                      <a:headEnd type="none" w="med" len="med"/>
-                      <a:tailEnd type="none" w="med" len="med"/>
-                    </a:lnR>
-                    <a:lnT w="10160" cap="flat" cmpd="sng" algn="ctr">
-                      <a:solidFill>
-                        <a:srgbClr val="FFFFFF"/>
-                      </a:solidFill>
-                      <a:prstDash val="solid"/>
-                      <a:round/>
-                      <a:headEnd type="none" w="med" len="med"/>
-                      <a:tailEnd type="none" w="med" len="med"/>
-                    </a:lnT>
-                    <a:lnB w="10160" cap="flat" cmpd="sng" algn="ctr">
-                      <a:solidFill>
-                        <a:srgbClr val="FFFFFF"/>
-                      </a:solidFill>
-                      <a:prstDash val="solid"/>
-                      <a:round/>
-                      <a:headEnd type="none" w="med" len="med"/>
-                      <a:tailEnd type="none" w="med" len="med"/>
-                    </a:lnB>
-                    <a:solidFill>
-                      <a:srgbClr val="17677D"/>
-                    </a:solidFill>
-                  </a:tcPr>
-                </a:tc>
-                <a:extLst>
-                  <a:ext uri="{0D108BD9-81ED-4DB2-BD59-A6C34878D82A}">
-                    <a16:rowId xmlns:a16="http://schemas.microsoft.com/office/drawing/2014/main" val="10000"/>
-                  </a:ext>
-                </a:extLst>
-              </a:tr>
-              <a:tr h="249936">
-                <a:tc>
-                  <a:txBody>
-                    <a:bodyPr/>
-                    <a:lstStyle/>
-                    <a:p>
-                      <a:pPr marL="0" indent="0">
-                        <a:buNone/>
-                      </a:pPr>
-                      <a:r>
-                        <a:rPr lang="en-US" sz="870" b="1" dirty="0">
-                          <a:solidFill>
-                            <a:srgbClr val="1F2528"/>
-                          </a:solidFill>
-                        </a:rPr>
-                        <a:t>Frozen</a:t>
-                      </a:r>
-                      <a:endParaRPr lang="en-US" sz="870" dirty="0"/>
-                    </a:p>
-                  </a:txBody>
-                  <a:tcPr marL="50292" marR="50292" marT="50292" marB="50292">
-                    <a:lnL w="10160" cap="flat" cmpd="sng" algn="ctr">
-                      <a:solidFill>
-                        <a:srgbClr val="FFFFFF"/>
-                      </a:solidFill>
-                      <a:prstDash val="solid"/>
-                      <a:round/>
-                      <a:headEnd type="none" w="med" len="med"/>
-                      <a:tailEnd type="none" w="med" len="med"/>
-                    </a:lnL>
-                    <a:lnR w="10160" cap="flat" cmpd="sng" algn="ctr">
-                      <a:solidFill>
-                        <a:srgbClr val="FFFFFF"/>
-                      </a:solidFill>
-                      <a:prstDash val="solid"/>
-                      <a:round/>
-                      <a:headEnd type="none" w="med" len="med"/>
-                      <a:tailEnd type="none" w="med" len="med"/>
-                    </a:lnR>
-                    <a:lnT w="10160" cap="flat" cmpd="sng" algn="ctr">
-                      <a:solidFill>
-                        <a:srgbClr val="FFFFFF"/>
-                      </a:solidFill>
-                      <a:prstDash val="solid"/>
-                      <a:round/>
-                      <a:headEnd type="none" w="med" len="med"/>
-                      <a:tailEnd type="none" w="med" len="med"/>
-                    </a:lnT>
-                    <a:lnB w="10160" cap="flat" cmpd="sng" algn="ctr">
-                      <a:solidFill>
-                        <a:srgbClr val="FFFFFF"/>
-                      </a:solidFill>
-                      <a:prstDash val="solid"/>
-                      <a:round/>
-                      <a:headEnd type="none" w="med" len="med"/>
-                      <a:tailEnd type="none" w="med" len="med"/>
-                    </a:lnB>
-                    <a:solidFill>
-                      <a:srgbClr val="F8FAF8"/>
-                    </a:solidFill>
-                  </a:tcPr>
-                </a:tc>
-                <a:tc>
-                  <a:txBody>
-                    <a:bodyPr/>
-                    <a:lstStyle/>
-                    <a:p>
-                      <a:pPr marL="0" indent="0">
-                        <a:buNone/>
-                      </a:pPr>
-                      <a:r>
-                        <a:rPr lang="en-US" sz="870" dirty="0">
-                          <a:solidFill>
-                            <a:srgbClr val="1F2528"/>
-                          </a:solidFill>
-                        </a:rPr>
-                        <a:t>56.45%</a:t>
-                      </a:r>
-                      <a:endParaRPr lang="en-US" sz="870" dirty="0"/>
-                    </a:p>
-                  </a:txBody>
-                  <a:tcPr marL="50292" marR="50292" marT="50292" marB="50292">
-                    <a:lnL w="10160" cap="flat" cmpd="sng" algn="ctr">
-                      <a:solidFill>
-                        <a:srgbClr val="FFFFFF"/>
-                      </a:solidFill>
-                      <a:prstDash val="solid"/>
-                      <a:round/>
-                      <a:headEnd type="none" w="med" len="med"/>
-                      <a:tailEnd type="none" w="med" len="med"/>
-                    </a:lnL>
-                    <a:lnR w="10160" cap="flat" cmpd="sng" algn="ctr">
-                      <a:solidFill>
-                        <a:srgbClr val="FFFFFF"/>
-                      </a:solidFill>
-                      <a:prstDash val="solid"/>
-                      <a:round/>
-                      <a:headEnd type="none" w="med" len="med"/>
-                      <a:tailEnd type="none" w="med" len="med"/>
-                    </a:lnR>
-                    <a:lnT w="10160" cap="flat" cmpd="sng" algn="ctr">
-                      <a:solidFill>
-                        <a:srgbClr val="FFFFFF"/>
-                      </a:solidFill>
-                      <a:prstDash val="solid"/>
-                      <a:round/>
-                      <a:headEnd type="none" w="med" len="med"/>
-                      <a:tailEnd type="none" w="med" len="med"/>
-                    </a:lnT>
-                    <a:lnB w="10160" cap="flat" cmpd="sng" algn="ctr">
-                      <a:solidFill>
-                        <a:srgbClr val="FFFFFF"/>
-                      </a:solidFill>
-                      <a:prstDash val="solid"/>
-                      <a:round/>
-                      <a:headEnd type="none" w="med" len="med"/>
-                      <a:tailEnd type="none" w="med" len="med"/>
-                    </a:lnB>
-                    <a:solidFill>
-                      <a:srgbClr val="F8FAF8"/>
-                    </a:solidFill>
-                  </a:tcPr>
-                </a:tc>
-                <a:tc>
-                  <a:txBody>
-                    <a:bodyPr/>
-                    <a:lstStyle/>
-                    <a:p>
-                      <a:pPr marL="0" indent="0">
-                        <a:buNone/>
-                      </a:pPr>
-                      <a:r>
-                        <a:rPr lang="en-US" sz="870" dirty="0">
-                          <a:solidFill>
-                            <a:srgbClr val="1F2528"/>
-                          </a:solidFill>
-                        </a:rPr>
-                        <a:t>60.25%</a:t>
-                      </a:r>
-                      <a:endParaRPr lang="en-US" sz="870" dirty="0"/>
-                    </a:p>
-                  </a:txBody>
-                  <a:tcPr marL="50292" marR="50292" marT="50292" marB="50292">
-                    <a:lnL w="10160" cap="flat" cmpd="sng" algn="ctr">
-                      <a:solidFill>
-                        <a:srgbClr val="FFFFFF"/>
-                      </a:solidFill>
-                      <a:prstDash val="solid"/>
-                      <a:round/>
-                      <a:headEnd type="none" w="med" len="med"/>
-                      <a:tailEnd type="none" w="med" len="med"/>
-                    </a:lnL>
-                    <a:lnR w="10160" cap="flat" cmpd="sng" algn="ctr">
-                      <a:solidFill>
-                        <a:srgbClr val="FFFFFF"/>
-                      </a:solidFill>
-                      <a:prstDash val="solid"/>
-                      <a:round/>
-                      <a:headEnd type="none" w="med" len="med"/>
-                      <a:tailEnd type="none" w="med" len="med"/>
-                    </a:lnR>
-                    <a:lnT w="10160" cap="flat" cmpd="sng" algn="ctr">
-                      <a:solidFill>
-                        <a:srgbClr val="FFFFFF"/>
-                      </a:solidFill>
-                      <a:prstDash val="solid"/>
-                      <a:round/>
-                      <a:headEnd type="none" w="med" len="med"/>
-                      <a:tailEnd type="none" w="med" len="med"/>
-                    </a:lnT>
-                    <a:lnB w="10160" cap="flat" cmpd="sng" algn="ctr">
-                      <a:solidFill>
-                        <a:srgbClr val="FFFFFF"/>
-                      </a:solidFill>
-                      <a:prstDash val="solid"/>
-                      <a:round/>
-                      <a:headEnd type="none" w="med" len="med"/>
-                      <a:tailEnd type="none" w="med" len="med"/>
-                    </a:lnB>
-                    <a:solidFill>
-                      <a:srgbClr val="F8FAF8"/>
-                    </a:solidFill>
-                  </a:tcPr>
-                </a:tc>
-                <a:extLst>
-                  <a:ext uri="{0D108BD9-81ED-4DB2-BD59-A6C34878D82A}">
-                    <a16:rowId xmlns:a16="http://schemas.microsoft.com/office/drawing/2014/main" val="10001"/>
-                  </a:ext>
-                </a:extLst>
-              </a:tr>
-              <a:tr h="249936">
-                <a:tc>
-                  <a:txBody>
-                    <a:bodyPr/>
-                    <a:lstStyle/>
-                    <a:p>
-                      <a:pPr marL="0" indent="0">
-                        <a:buNone/>
-                      </a:pPr>
-                      <a:r>
-                        <a:rPr lang="en-US" sz="870" b="1" dirty="0">
-                          <a:solidFill>
-                            <a:srgbClr val="1F2528"/>
-                          </a:solidFill>
-                        </a:rPr>
-                        <a:t>Fine-tuned</a:t>
-                      </a:r>
-                      <a:endParaRPr lang="en-US" sz="870" dirty="0"/>
-                    </a:p>
-                  </a:txBody>
-                  <a:tcPr marL="50292" marR="50292" marT="50292" marB="50292">
-                    <a:lnL w="10160" cap="flat" cmpd="sng" algn="ctr">
-                      <a:solidFill>
-                        <a:srgbClr val="FFFFFF"/>
-                      </a:solidFill>
-                      <a:prstDash val="solid"/>
-                      <a:round/>
-                      <a:headEnd type="none" w="med" len="med"/>
-                      <a:tailEnd type="none" w="med" len="med"/>
-                    </a:lnL>
-                    <a:lnR w="10160" cap="flat" cmpd="sng" algn="ctr">
-                      <a:solidFill>
-                        <a:srgbClr val="FFFFFF"/>
-                      </a:solidFill>
-                      <a:prstDash val="solid"/>
-                      <a:round/>
-                      <a:headEnd type="none" w="med" len="med"/>
-                      <a:tailEnd type="none" w="med" len="med"/>
-                    </a:lnR>
-                    <a:lnT w="10160" cap="flat" cmpd="sng" algn="ctr">
-                      <a:solidFill>
-                        <a:srgbClr val="FFFFFF"/>
-                      </a:solidFill>
-                      <a:prstDash val="solid"/>
-                      <a:round/>
-                      <a:headEnd type="none" w="med" len="med"/>
-                      <a:tailEnd type="none" w="med" len="med"/>
-                    </a:lnT>
-                    <a:lnB w="10160" cap="flat" cmpd="sng" algn="ctr">
-                      <a:solidFill>
-                        <a:srgbClr val="FFFFFF"/>
-                      </a:solidFill>
-                      <a:prstDash val="solid"/>
-                      <a:round/>
-                      <a:headEnd type="none" w="med" len="med"/>
-                      <a:tailEnd type="none" w="med" len="med"/>
-                    </a:lnB>
-                    <a:solidFill>
-                      <a:srgbClr val="EEF2F3"/>
-                    </a:solidFill>
-                  </a:tcPr>
-                </a:tc>
-                <a:tc>
-                  <a:txBody>
-                    <a:bodyPr/>
-                    <a:lstStyle/>
-                    <a:p>
-                      <a:pPr marL="0" indent="0">
-                        <a:buNone/>
-                      </a:pPr>
-                      <a:r>
-                        <a:rPr lang="en-US" sz="870" dirty="0">
-                          <a:solidFill>
-                            <a:srgbClr val="1F2528"/>
-                          </a:solidFill>
-                        </a:rPr>
-                        <a:t>53.15%</a:t>
-                      </a:r>
-                      <a:endParaRPr lang="en-US" sz="870" dirty="0"/>
-                    </a:p>
-                  </a:txBody>
-                  <a:tcPr marL="50292" marR="50292" marT="50292" marB="50292">
-                    <a:lnL w="10160" cap="flat" cmpd="sng" algn="ctr">
-                      <a:solidFill>
-                        <a:srgbClr val="FFFFFF"/>
-                      </a:solidFill>
-                      <a:prstDash val="solid"/>
-                      <a:round/>
-                      <a:headEnd type="none" w="med" len="med"/>
-                      <a:tailEnd type="none" w="med" len="med"/>
-                    </a:lnL>
-                    <a:lnR w="10160" cap="flat" cmpd="sng" algn="ctr">
-                      <a:solidFill>
-                        <a:srgbClr val="FFFFFF"/>
-                      </a:solidFill>
-                      <a:prstDash val="solid"/>
-                      <a:round/>
-                      <a:headEnd type="none" w="med" len="med"/>
-                      <a:tailEnd type="none" w="med" len="med"/>
-                    </a:lnR>
-                    <a:lnT w="10160" cap="flat" cmpd="sng" algn="ctr">
-                      <a:solidFill>
-                        <a:srgbClr val="FFFFFF"/>
-                      </a:solidFill>
-                      <a:prstDash val="solid"/>
-                      <a:round/>
-                      <a:headEnd type="none" w="med" len="med"/>
-                      <a:tailEnd type="none" w="med" len="med"/>
-                    </a:lnT>
-                    <a:lnB w="10160" cap="flat" cmpd="sng" algn="ctr">
-                      <a:solidFill>
-                        <a:srgbClr val="FFFFFF"/>
-                      </a:solidFill>
-                      <a:prstDash val="solid"/>
-                      <a:round/>
-                      <a:headEnd type="none" w="med" len="med"/>
-                      <a:tailEnd type="none" w="med" len="med"/>
-                    </a:lnB>
-                    <a:solidFill>
-                      <a:srgbClr val="EEF2F3"/>
-                    </a:solidFill>
-                  </a:tcPr>
-                </a:tc>
-                <a:tc>
-                  <a:txBody>
-                    <a:bodyPr/>
-                    <a:lstStyle/>
-                    <a:p>
-                      <a:pPr marL="0" indent="0">
-                        <a:buNone/>
-                      </a:pPr>
-                      <a:r>
-                        <a:rPr lang="en-US" sz="870" dirty="0">
-                          <a:solidFill>
-                            <a:srgbClr val="1F2528"/>
-                          </a:solidFill>
-                        </a:rPr>
-                        <a:t>53.50%</a:t>
-                      </a:r>
-                      <a:endParaRPr lang="en-US" sz="870" dirty="0"/>
-                    </a:p>
-                  </a:txBody>
-                  <a:tcPr marL="50292" marR="50292" marT="50292" marB="50292">
-                    <a:lnL w="10160" cap="flat" cmpd="sng" algn="ctr">
-                      <a:solidFill>
-                        <a:srgbClr val="FFFFFF"/>
-                      </a:solidFill>
-                      <a:prstDash val="solid"/>
-                      <a:round/>
-                      <a:headEnd type="none" w="med" len="med"/>
-                      <a:tailEnd type="none" w="med" len="med"/>
-                    </a:lnL>
-                    <a:lnR w="10160" cap="flat" cmpd="sng" algn="ctr">
-                      <a:solidFill>
-                        <a:srgbClr val="FFFFFF"/>
-                      </a:solidFill>
-                      <a:prstDash val="solid"/>
-                      <a:round/>
-                      <a:headEnd type="none" w="med" len="med"/>
-                      <a:tailEnd type="none" w="med" len="med"/>
-                    </a:lnR>
-                    <a:lnT w="10160" cap="flat" cmpd="sng" algn="ctr">
-                      <a:solidFill>
-                        <a:srgbClr val="FFFFFF"/>
-                      </a:solidFill>
-                      <a:prstDash val="solid"/>
-                      <a:round/>
-                      <a:headEnd type="none" w="med" len="med"/>
-                      <a:tailEnd type="none" w="med" len="med"/>
-                    </a:lnT>
-                    <a:lnB w="10160" cap="flat" cmpd="sng" algn="ctr">
-                      <a:solidFill>
-                        <a:srgbClr val="FFFFFF"/>
-                      </a:solidFill>
-                      <a:prstDash val="solid"/>
-                      <a:round/>
-                      <a:headEnd type="none" w="med" len="med"/>
-                      <a:tailEnd type="none" w="med" len="med"/>
-                    </a:lnB>
-                    <a:solidFill>
-                      <a:srgbClr val="EEF2F3"/>
-                    </a:solidFill>
-                  </a:tcPr>
-                </a:tc>
-                <a:extLst>
-                  <a:ext uri="{0D108BD9-81ED-4DB2-BD59-A6C34878D82A}">
-                    <a16:rowId xmlns:a16="http://schemas.microsoft.com/office/drawing/2014/main" val="10002"/>
-                  </a:ext>
-                </a:extLst>
-              </a:tr>
-            </a:tbl>
-          </a:graphicData>
-        </a:graphic>
-      </p:graphicFrame>
       <p:sp>
         <p:nvSpPr>
           <p:cNvPr id="67" name="Text 36">
@@ -6596,8 +5971,8 @@
         </p:nvSpPr>
         <p:spPr>
           <a:xfrm>
-            <a:off x="731520" y="4727447"/>
-            <a:ext cx="3886200" cy="420624"/>
+            <a:off x="731519" y="4727446"/>
+            <a:ext cx="4106203" cy="914400"/>
           </a:xfrm>
           <a:prstGeom prst="rect">
             <a:avLst/>
@@ -6626,7 +6001,7 @@
                 <a:ea typeface="Aptos" pitchFamily="34" charset="-122"/>
                 <a:cs typeface="Aptos" pitchFamily="34" charset="-120"/>
               </a:rPr>
-              <a:t>Pretraining is not automatically enough; representation fit and optimization choices matter.</a:t>
+              <a:t>While training accuracy improved significantly, pretraining is not automatically enough; representation fit and optimization choices matter. Test accuracy performed much lower at 64.5% and 61% for Frozen and Fine-Tuned models respectively</a:t>
             </a:r>
             <a:endParaRPr lang="en-US" sz="1200" dirty="0"/>
           </a:p>
@@ -6704,6 +6079,501 @@
           </a:fontRef>
         </p:style>
       </p:cxnSp>
+      <p:grpSp>
+        <p:nvGrpSpPr>
+          <p:cNvPr id="6" name="Group 5">
+            <a:extLst>
+              <a:ext uri="{FF2B5EF4-FFF2-40B4-BE49-F238E27FC236}">
+                <a16:creationId xmlns:a16="http://schemas.microsoft.com/office/drawing/2014/main" id="{A4CEFFAD-9D45-801C-C7A8-30DC06BBFD52}"/>
+              </a:ext>
+            </a:extLst>
+          </p:cNvPr>
+          <p:cNvGrpSpPr/>
+          <p:nvPr/>
+        </p:nvGrpSpPr>
+        <p:grpSpPr>
+          <a:xfrm>
+            <a:off x="6478524" y="4643132"/>
+            <a:ext cx="1920240" cy="772294"/>
+            <a:chOff x="6957490" y="4123666"/>
+            <a:chExt cx="1920240" cy="772294"/>
+          </a:xfrm>
+        </p:grpSpPr>
+        <p:sp>
+          <p:nvSpPr>
+            <p:cNvPr id="8" name="Shape 48">
+              <a:extLst>
+                <a:ext uri="{FF2B5EF4-FFF2-40B4-BE49-F238E27FC236}">
+                  <a16:creationId xmlns:a16="http://schemas.microsoft.com/office/drawing/2014/main" id="{69167FE1-7828-9BF8-EC1C-81E436E87F49}"/>
+                </a:ext>
+              </a:extLst>
+            </p:cNvPr>
+            <p:cNvSpPr/>
+            <p:nvPr/>
+          </p:nvSpPr>
+          <p:spPr>
+            <a:xfrm>
+              <a:off x="6957490" y="4123666"/>
+              <a:ext cx="1920012" cy="772294"/>
+            </a:xfrm>
+            <a:prstGeom prst="rect">
+              <a:avLst/>
+            </a:prstGeom>
+            <a:solidFill>
+              <a:srgbClr val="FFFFFF">
+                <a:alpha val="98000"/>
+              </a:srgbClr>
+            </a:solidFill>
+            <a:ln w="17780">
+              <a:solidFill>
+                <a:schemeClr val="tx1">
+                  <a:lumMod val="75000"/>
+                  <a:lumOff val="25000"/>
+                </a:schemeClr>
+              </a:solidFill>
+              <a:prstDash val="solid"/>
+            </a:ln>
+          </p:spPr>
+          <p:txBody>
+            <a:bodyPr/>
+            <a:lstStyle/>
+            <a:p>
+              <a:endParaRPr lang="en-US"/>
+            </a:p>
+          </p:txBody>
+        </p:sp>
+        <p:sp>
+          <p:nvSpPr>
+            <p:cNvPr id="9" name="Text 49">
+              <a:extLst>
+                <a:ext uri="{FF2B5EF4-FFF2-40B4-BE49-F238E27FC236}">
+                  <a16:creationId xmlns:a16="http://schemas.microsoft.com/office/drawing/2014/main" id="{6D289ABB-47DB-B86F-5309-B5BF661A6F2E}"/>
+                </a:ext>
+              </a:extLst>
+            </p:cNvPr>
+            <p:cNvSpPr/>
+            <p:nvPr/>
+          </p:nvSpPr>
+          <p:spPr>
+            <a:xfrm>
+              <a:off x="7048930" y="4260826"/>
+              <a:ext cx="1828800" cy="329184"/>
+            </a:xfrm>
+            <a:prstGeom prst="rect">
+              <a:avLst/>
+            </a:prstGeom>
+            <a:noFill/>
+            <a:ln/>
+          </p:spPr>
+          <p:txBody>
+            <a:bodyPr wrap="square" lIns="0" tIns="0" rIns="0" bIns="0" rtlCol="0" anchor="t">
+              <a:normAutofit/>
+            </a:bodyPr>
+            <a:lstStyle/>
+            <a:p>
+              <a:pPr marL="0" indent="0" algn="ctr">
+                <a:lnSpc>
+                  <a:spcPct val="90000"/>
+                </a:lnSpc>
+                <a:buNone/>
+              </a:pPr>
+              <a:r>
+                <a:rPr lang="en-US" sz="2100" b="1" dirty="0">
+                  <a:solidFill>
+                    <a:schemeClr val="tx1">
+                      <a:lumMod val="75000"/>
+                      <a:lumOff val="25000"/>
+                    </a:schemeClr>
+                  </a:solidFill>
+                  <a:latin typeface="Aptos Display" pitchFamily="34" charset="0"/>
+                  <a:ea typeface="Aptos Display" pitchFamily="34" charset="-122"/>
+                  <a:cs typeface="Aptos Display" pitchFamily="34" charset="-120"/>
+                </a:rPr>
+                <a:t>64.5%</a:t>
+              </a:r>
+              <a:endParaRPr lang="en-US" sz="2100" dirty="0">
+                <a:solidFill>
+                  <a:schemeClr val="tx1">
+                    <a:lumMod val="75000"/>
+                    <a:lumOff val="25000"/>
+                  </a:schemeClr>
+                </a:solidFill>
+              </a:endParaRPr>
+            </a:p>
+          </p:txBody>
+        </p:sp>
+        <p:sp>
+          <p:nvSpPr>
+            <p:cNvPr id="12" name="Text 50">
+              <a:extLst>
+                <a:ext uri="{FF2B5EF4-FFF2-40B4-BE49-F238E27FC236}">
+                  <a16:creationId xmlns:a16="http://schemas.microsoft.com/office/drawing/2014/main" id="{27BAB689-CEDE-945D-E10F-92035FA2DED7}"/>
+                </a:ext>
+              </a:extLst>
+            </p:cNvPr>
+            <p:cNvSpPr/>
+            <p:nvPr/>
+          </p:nvSpPr>
+          <p:spPr>
+            <a:xfrm>
+              <a:off x="7067218" y="4654018"/>
+              <a:ext cx="1792224" cy="219456"/>
+            </a:xfrm>
+            <a:prstGeom prst="rect">
+              <a:avLst/>
+            </a:prstGeom>
+            <a:noFill/>
+            <a:ln/>
+          </p:spPr>
+          <p:txBody>
+            <a:bodyPr wrap="square" lIns="0" tIns="0" rIns="0" bIns="0" rtlCol="0" anchor="t">
+              <a:normAutofit/>
+            </a:bodyPr>
+            <a:lstStyle/>
+            <a:p>
+              <a:pPr marL="0" indent="0" algn="ctr">
+                <a:lnSpc>
+                  <a:spcPct val="90000"/>
+                </a:lnSpc>
+                <a:buNone/>
+              </a:pPr>
+              <a:r>
+                <a:rPr lang="en-US" sz="780" dirty="0">
+                  <a:solidFill>
+                    <a:srgbClr val="6B7176"/>
+                  </a:solidFill>
+                  <a:latin typeface="Aptos" pitchFamily="34" charset="0"/>
+                  <a:ea typeface="Aptos" pitchFamily="34" charset="-122"/>
+                  <a:cs typeface="Aptos" pitchFamily="34" charset="-120"/>
+                </a:rPr>
+                <a:t>Piczak published LP clip-level reference</a:t>
+              </a:r>
+              <a:endParaRPr lang="en-US" sz="780" dirty="0"/>
+            </a:p>
+          </p:txBody>
+        </p:sp>
+      </p:grpSp>
+      <p:grpSp>
+        <p:nvGrpSpPr>
+          <p:cNvPr id="16" name="Group 15">
+            <a:extLst>
+              <a:ext uri="{FF2B5EF4-FFF2-40B4-BE49-F238E27FC236}">
+                <a16:creationId xmlns:a16="http://schemas.microsoft.com/office/drawing/2014/main" id="{E6FACAB8-ACFE-75A3-267E-A6CB3F395155}"/>
+              </a:ext>
+            </a:extLst>
+          </p:cNvPr>
+          <p:cNvGrpSpPr/>
+          <p:nvPr/>
+        </p:nvGrpSpPr>
+        <p:grpSpPr>
+          <a:xfrm>
+            <a:off x="9304020" y="4151375"/>
+            <a:ext cx="1965960" cy="914400"/>
+            <a:chOff x="6591302" y="4233671"/>
+            <a:chExt cx="1965960" cy="914400"/>
+          </a:xfrm>
+        </p:grpSpPr>
+        <p:sp>
+          <p:nvSpPr>
+            <p:cNvPr id="17" name="Shape 28">
+              <a:extLst>
+                <a:ext uri="{FF2B5EF4-FFF2-40B4-BE49-F238E27FC236}">
+                  <a16:creationId xmlns:a16="http://schemas.microsoft.com/office/drawing/2014/main" id="{E1AC7B9A-CDB3-C47E-30A5-6AF5336F597A}"/>
+                </a:ext>
+              </a:extLst>
+            </p:cNvPr>
+            <p:cNvSpPr/>
+            <p:nvPr/>
+          </p:nvSpPr>
+          <p:spPr>
+            <a:xfrm>
+              <a:off x="6591302" y="4233671"/>
+              <a:ext cx="1965960" cy="914400"/>
+            </a:xfrm>
+            <a:prstGeom prst="rect">
+              <a:avLst/>
+            </a:prstGeom>
+            <a:solidFill>
+              <a:srgbClr val="FFFFFF">
+                <a:alpha val="98000"/>
+              </a:srgbClr>
+            </a:solidFill>
+            <a:ln w="17780">
+              <a:solidFill>
+                <a:srgbClr val="17677D"/>
+              </a:solidFill>
+              <a:prstDash val="solid"/>
+            </a:ln>
+          </p:spPr>
+          <p:txBody>
+            <a:bodyPr/>
+            <a:lstStyle/>
+            <a:p>
+              <a:endParaRPr lang="en-US"/>
+            </a:p>
+          </p:txBody>
+        </p:sp>
+        <p:sp>
+          <p:nvSpPr>
+            <p:cNvPr id="18" name="Text 29">
+              <a:extLst>
+                <a:ext uri="{FF2B5EF4-FFF2-40B4-BE49-F238E27FC236}">
+                  <a16:creationId xmlns:a16="http://schemas.microsoft.com/office/drawing/2014/main" id="{D864CF10-274C-B463-9F34-CAC2C315EB92}"/>
+                </a:ext>
+              </a:extLst>
+            </p:cNvPr>
+            <p:cNvSpPr/>
+            <p:nvPr/>
+          </p:nvSpPr>
+          <p:spPr>
+            <a:xfrm>
+              <a:off x="6682742" y="4370831"/>
+              <a:ext cx="1783080" cy="329184"/>
+            </a:xfrm>
+            <a:prstGeom prst="rect">
+              <a:avLst/>
+            </a:prstGeom>
+            <a:noFill/>
+            <a:ln/>
+          </p:spPr>
+          <p:txBody>
+            <a:bodyPr wrap="square" lIns="0" tIns="0" rIns="0" bIns="0" rtlCol="0" anchor="t">
+              <a:normAutofit/>
+            </a:bodyPr>
+            <a:lstStyle/>
+            <a:p>
+              <a:pPr algn="ctr">
+                <a:lnSpc>
+                  <a:spcPct val="90000"/>
+                </a:lnSpc>
+              </a:pPr>
+              <a:r>
+                <a:rPr lang="en-US" sz="2100" b="1" dirty="0">
+                  <a:solidFill>
+                    <a:srgbClr val="17677D"/>
+                  </a:solidFill>
+                  <a:latin typeface="Aptos Display" pitchFamily="34" charset="0"/>
+                  <a:ea typeface="Aptos Display" pitchFamily="34" charset="-122"/>
+                  <a:cs typeface="Aptos Display" pitchFamily="34" charset="-120"/>
+                </a:rPr>
+                <a:t>91.69 %</a:t>
+              </a:r>
+              <a:endParaRPr lang="en-US" sz="2100" dirty="0"/>
+            </a:p>
+          </p:txBody>
+        </p:sp>
+        <p:sp>
+          <p:nvSpPr>
+            <p:cNvPr id="19" name="Text 30">
+              <a:extLst>
+                <a:ext uri="{FF2B5EF4-FFF2-40B4-BE49-F238E27FC236}">
+                  <a16:creationId xmlns:a16="http://schemas.microsoft.com/office/drawing/2014/main" id="{3DB68733-04AE-50AF-7D93-336F33B95783}"/>
+                </a:ext>
+              </a:extLst>
+            </p:cNvPr>
+            <p:cNvSpPr/>
+            <p:nvPr/>
+          </p:nvSpPr>
+          <p:spPr>
+            <a:xfrm>
+              <a:off x="6701030" y="4764023"/>
+              <a:ext cx="1746504" cy="219456"/>
+            </a:xfrm>
+            <a:prstGeom prst="rect">
+              <a:avLst/>
+            </a:prstGeom>
+            <a:noFill/>
+            <a:ln/>
+          </p:spPr>
+          <p:txBody>
+            <a:bodyPr wrap="square" lIns="0" tIns="0" rIns="0" bIns="0" rtlCol="0" anchor="t">
+              <a:normAutofit/>
+            </a:bodyPr>
+            <a:lstStyle/>
+            <a:p>
+              <a:pPr marL="0" indent="0" algn="ctr">
+                <a:lnSpc>
+                  <a:spcPct val="90000"/>
+                </a:lnSpc>
+                <a:buNone/>
+              </a:pPr>
+              <a:r>
+                <a:rPr lang="en-US" sz="780" dirty="0">
+                  <a:solidFill>
+                    <a:srgbClr val="6B7176"/>
+                  </a:solidFill>
+                  <a:latin typeface="Aptos" pitchFamily="34" charset="0"/>
+                  <a:ea typeface="Aptos" pitchFamily="34" charset="-122"/>
+                  <a:cs typeface="Aptos" pitchFamily="34" charset="-120"/>
+                </a:rPr>
+                <a:t>Frozen final 5-fold accuracy</a:t>
+              </a:r>
+              <a:endParaRPr lang="en-US" sz="780" dirty="0"/>
+            </a:p>
+          </p:txBody>
+        </p:sp>
+      </p:grpSp>
+      <p:grpSp>
+        <p:nvGrpSpPr>
+          <p:cNvPr id="20" name="Group 19">
+            <a:extLst>
+              <a:ext uri="{FF2B5EF4-FFF2-40B4-BE49-F238E27FC236}">
+                <a16:creationId xmlns:a16="http://schemas.microsoft.com/office/drawing/2014/main" id="{22A2A5F9-F867-8E80-76FD-4F71BE66FB64}"/>
+              </a:ext>
+            </a:extLst>
+          </p:cNvPr>
+          <p:cNvGrpSpPr/>
+          <p:nvPr/>
+        </p:nvGrpSpPr>
+        <p:grpSpPr>
+          <a:xfrm>
+            <a:off x="9304020" y="5304484"/>
+            <a:ext cx="1965960" cy="914400"/>
+            <a:chOff x="6591302" y="4233671"/>
+            <a:chExt cx="1965960" cy="914400"/>
+          </a:xfrm>
+        </p:grpSpPr>
+        <p:sp>
+          <p:nvSpPr>
+            <p:cNvPr id="21" name="Shape 28">
+              <a:extLst>
+                <a:ext uri="{FF2B5EF4-FFF2-40B4-BE49-F238E27FC236}">
+                  <a16:creationId xmlns:a16="http://schemas.microsoft.com/office/drawing/2014/main" id="{E24CA961-B9CA-7003-D39B-D269F1F1A645}"/>
+                </a:ext>
+              </a:extLst>
+            </p:cNvPr>
+            <p:cNvSpPr/>
+            <p:nvPr/>
+          </p:nvSpPr>
+          <p:spPr>
+            <a:xfrm>
+              <a:off x="6591302" y="4233671"/>
+              <a:ext cx="1965960" cy="914400"/>
+            </a:xfrm>
+            <a:prstGeom prst="rect">
+              <a:avLst/>
+            </a:prstGeom>
+            <a:solidFill>
+              <a:srgbClr val="FFFFFF">
+                <a:alpha val="98000"/>
+              </a:srgbClr>
+            </a:solidFill>
+            <a:ln w="17780">
+              <a:solidFill>
+                <a:srgbClr val="17677D"/>
+              </a:solidFill>
+              <a:prstDash val="solid"/>
+            </a:ln>
+          </p:spPr>
+          <p:txBody>
+            <a:bodyPr/>
+            <a:lstStyle/>
+            <a:p>
+              <a:endParaRPr lang="en-US"/>
+            </a:p>
+          </p:txBody>
+        </p:sp>
+        <p:sp>
+          <p:nvSpPr>
+            <p:cNvPr id="22" name="Text 29">
+              <a:extLst>
+                <a:ext uri="{FF2B5EF4-FFF2-40B4-BE49-F238E27FC236}">
+                  <a16:creationId xmlns:a16="http://schemas.microsoft.com/office/drawing/2014/main" id="{0ABD6622-FB29-2444-526C-BF6D3C09651D}"/>
+                </a:ext>
+              </a:extLst>
+            </p:cNvPr>
+            <p:cNvSpPr/>
+            <p:nvPr/>
+          </p:nvSpPr>
+          <p:spPr>
+            <a:xfrm>
+              <a:off x="6682742" y="4370831"/>
+              <a:ext cx="1783080" cy="329184"/>
+            </a:xfrm>
+            <a:prstGeom prst="rect">
+              <a:avLst/>
+            </a:prstGeom>
+            <a:noFill/>
+            <a:ln/>
+          </p:spPr>
+          <p:txBody>
+            <a:bodyPr wrap="square" lIns="0" tIns="0" rIns="0" bIns="0" rtlCol="0" anchor="t">
+              <a:normAutofit/>
+            </a:bodyPr>
+            <a:lstStyle/>
+            <a:p>
+              <a:pPr marL="0" indent="0" algn="ctr">
+                <a:lnSpc>
+                  <a:spcPct val="90000"/>
+                </a:lnSpc>
+                <a:buNone/>
+              </a:pPr>
+              <a:r>
+                <a:rPr lang="en-US" sz="2100" b="1" dirty="0">
+                  <a:solidFill>
+                    <a:srgbClr val="17677D"/>
+                  </a:solidFill>
+                  <a:latin typeface="Aptos Display" pitchFamily="34" charset="0"/>
+                  <a:ea typeface="Aptos Display" pitchFamily="34" charset="-122"/>
+                  <a:cs typeface="Aptos Display" pitchFamily="34" charset="-120"/>
+                </a:rPr>
+                <a:t>82.94%</a:t>
+              </a:r>
+              <a:endParaRPr lang="en-US" sz="2100" dirty="0"/>
+            </a:p>
+          </p:txBody>
+        </p:sp>
+        <p:sp>
+          <p:nvSpPr>
+            <p:cNvPr id="23" name="Text 30">
+              <a:extLst>
+                <a:ext uri="{FF2B5EF4-FFF2-40B4-BE49-F238E27FC236}">
+                  <a16:creationId xmlns:a16="http://schemas.microsoft.com/office/drawing/2014/main" id="{953D72EA-447D-8B97-7A06-AEBD6885B938}"/>
+                </a:ext>
+              </a:extLst>
+            </p:cNvPr>
+            <p:cNvSpPr/>
+            <p:nvPr/>
+          </p:nvSpPr>
+          <p:spPr>
+            <a:xfrm>
+              <a:off x="6701030" y="4764023"/>
+              <a:ext cx="1746504" cy="219456"/>
+            </a:xfrm>
+            <a:prstGeom prst="rect">
+              <a:avLst/>
+            </a:prstGeom>
+            <a:noFill/>
+            <a:ln/>
+          </p:spPr>
+          <p:txBody>
+            <a:bodyPr wrap="square" lIns="0" tIns="0" rIns="0" bIns="0" rtlCol="0" anchor="t">
+              <a:normAutofit/>
+            </a:bodyPr>
+            <a:lstStyle/>
+            <a:p>
+              <a:pPr marL="0" indent="0" algn="ctr">
+                <a:lnSpc>
+                  <a:spcPct val="90000"/>
+                </a:lnSpc>
+                <a:buNone/>
+              </a:pPr>
+              <a:r>
+                <a:rPr lang="en-US" sz="780" dirty="0">
+                  <a:solidFill>
+                    <a:srgbClr val="6B7176"/>
+                  </a:solidFill>
+                  <a:latin typeface="Aptos" pitchFamily="34" charset="0"/>
+                  <a:ea typeface="Aptos" pitchFamily="34" charset="-122"/>
+                  <a:cs typeface="Aptos" pitchFamily="34" charset="-120"/>
+                </a:rPr>
+                <a:t>Fine-tuned final 5-fold accuracy</a:t>
+              </a:r>
+              <a:endParaRPr lang="en-US" sz="780" dirty="0"/>
+            </a:p>
+          </p:txBody>
+        </p:sp>
+      </p:grpSp>
     </p:spTree>
   </p:cSld>
   <p:clrMapOvr>
@@ -7067,175 +6937,152 @@
           </a:p>
         </p:txBody>
       </p:sp>
-      <p:sp>
-        <p:nvSpPr>
-          <p:cNvPr id="30" name="Shape 28"/>
-          <p:cNvSpPr/>
-          <p:nvPr/>
-        </p:nvSpPr>
-        <p:spPr>
-          <a:xfrm>
-            <a:off x="6591302" y="4233671"/>
+      <p:grpSp>
+        <p:nvGrpSpPr>
+          <p:cNvPr id="8" name="Group 7">
+            <a:extLst>
+              <a:ext uri="{FF2B5EF4-FFF2-40B4-BE49-F238E27FC236}">
+                <a16:creationId xmlns:a16="http://schemas.microsoft.com/office/drawing/2014/main" id="{672A12AB-EF7E-3CB7-A9A9-0B88F8D0872D}"/>
+              </a:ext>
+            </a:extLst>
+          </p:cNvPr>
+          <p:cNvGrpSpPr/>
+          <p:nvPr/>
+        </p:nvGrpSpPr>
+        <p:grpSpPr>
+          <a:xfrm>
+            <a:off x="9445278" y="5423641"/>
             <a:ext cx="1965960" cy="914400"/>
-          </a:xfrm>
-          <a:prstGeom prst="rect">
-            <a:avLst/>
-          </a:prstGeom>
-          <a:solidFill>
-            <a:srgbClr val="FFFFFF">
-              <a:alpha val="98000"/>
-            </a:srgbClr>
-          </a:solidFill>
-          <a:ln w="17780">
+            <a:chOff x="6591302" y="4233671"/>
+            <a:chExt cx="1965960" cy="914400"/>
+          </a:xfrm>
+        </p:grpSpPr>
+        <p:sp>
+          <p:nvSpPr>
+            <p:cNvPr id="30" name="Shape 28"/>
+            <p:cNvSpPr/>
+            <p:nvPr/>
+          </p:nvSpPr>
+          <p:spPr>
+            <a:xfrm>
+              <a:off x="6591302" y="4233671"/>
+              <a:ext cx="1965960" cy="914400"/>
+            </a:xfrm>
+            <a:prstGeom prst="rect">
+              <a:avLst/>
+            </a:prstGeom>
             <a:solidFill>
-              <a:srgbClr val="17677D"/>
+              <a:srgbClr val="FFFFFF">
+                <a:alpha val="98000"/>
+              </a:srgbClr>
             </a:solidFill>
-            <a:prstDash val="solid"/>
-          </a:ln>
-        </p:spPr>
-        <p:txBody>
-          <a:bodyPr/>
-          <a:lstStyle/>
-          <a:p>
-            <a:endParaRPr lang="en-US"/>
-          </a:p>
-        </p:txBody>
-      </p:sp>
-      <p:sp>
-        <p:nvSpPr>
-          <p:cNvPr id="31" name="Text 29"/>
-          <p:cNvSpPr/>
-          <p:nvPr/>
-        </p:nvSpPr>
-        <p:spPr>
-          <a:xfrm>
-            <a:off x="6682742" y="4370831"/>
-            <a:ext cx="1783080" cy="329184"/>
-          </a:xfrm>
-          <a:prstGeom prst="rect">
-            <a:avLst/>
-          </a:prstGeom>
-          <a:noFill/>
-          <a:ln/>
-        </p:spPr>
-        <p:txBody>
-          <a:bodyPr wrap="square" lIns="0" tIns="0" rIns="0" bIns="0" rtlCol="0" anchor="t">
-            <a:normAutofit/>
-          </a:bodyPr>
-          <a:lstStyle/>
-          <a:p>
-            <a:pPr marL="0" indent="0" algn="ctr">
-              <a:lnSpc>
-                <a:spcPct val="90000"/>
-              </a:lnSpc>
-              <a:buNone/>
-            </a:pPr>
-            <a:r>
-              <a:rPr lang="en-US" sz="2100" b="1" dirty="0">
-                <a:solidFill>
-                  <a:srgbClr val="17677D"/>
-                </a:solidFill>
-                <a:latin typeface="Aptos Display" pitchFamily="34" charset="0"/>
-                <a:ea typeface="Aptos Display" pitchFamily="34" charset="-122"/>
-                <a:cs typeface="Aptos Display" pitchFamily="34" charset="-120"/>
-              </a:rPr>
-              <a:t>83.4%</a:t>
-            </a:r>
-            <a:endParaRPr lang="en-US" sz="2100" dirty="0"/>
-          </a:p>
-        </p:txBody>
-      </p:sp>
-      <p:sp>
-        <p:nvSpPr>
-          <p:cNvPr id="32" name="Text 30"/>
-          <p:cNvSpPr/>
-          <p:nvPr/>
-        </p:nvSpPr>
-        <p:spPr>
-          <a:xfrm>
-            <a:off x="6701030" y="4764023"/>
-            <a:ext cx="1746504" cy="219456"/>
-          </a:xfrm>
-          <a:prstGeom prst="rect">
-            <a:avLst/>
-          </a:prstGeom>
-          <a:noFill/>
-          <a:ln/>
-        </p:spPr>
-        <p:txBody>
-          <a:bodyPr wrap="square" lIns="0" tIns="0" rIns="0" bIns="0" rtlCol="0" anchor="t">
-            <a:normAutofit/>
-          </a:bodyPr>
-          <a:lstStyle/>
-          <a:p>
-            <a:pPr marL="0" indent="0" algn="ctr">
-              <a:lnSpc>
-                <a:spcPct val="90000"/>
-              </a:lnSpc>
-              <a:buNone/>
-            </a:pPr>
-            <a:r>
-              <a:rPr lang="en-US" sz="780" dirty="0">
-                <a:solidFill>
-                  <a:srgbClr val="6B7176"/>
-                </a:solidFill>
-                <a:latin typeface="Aptos" pitchFamily="34" charset="0"/>
-                <a:ea typeface="Aptos" pitchFamily="34" charset="-122"/>
-                <a:cs typeface="Aptos" pitchFamily="34" charset="-120"/>
-              </a:rPr>
-              <a:t>fine-tuned final 5-fold accuracy</a:t>
-            </a:r>
-            <a:endParaRPr lang="en-US" sz="780" dirty="0"/>
-          </a:p>
-        </p:txBody>
-      </p:sp>
-      <p:sp>
-        <p:nvSpPr>
-          <p:cNvPr id="33" name="Text 31"/>
-          <p:cNvSpPr/>
-          <p:nvPr/>
-        </p:nvSpPr>
-        <p:spPr>
-          <a:xfrm>
-            <a:off x="8785862" y="4562855"/>
-            <a:ext cx="3154680" cy="274320"/>
-          </a:xfrm>
-          <a:prstGeom prst="rect">
-            <a:avLst/>
-          </a:prstGeom>
-          <a:noFill/>
-          <a:ln/>
-        </p:spPr>
-        <p:txBody>
-          <a:bodyPr wrap="square" lIns="0" tIns="0" rIns="0" bIns="0" rtlCol="0" anchor="t">
-            <a:normAutofit/>
-          </a:bodyPr>
-          <a:lstStyle/>
-          <a:p>
-            <a:pPr marL="0" indent="0" algn="l">
-              <a:lnSpc>
-                <a:spcPct val="82000"/>
-              </a:lnSpc>
-              <a:buNone/>
-            </a:pPr>
-            <a:r>
-              <a:rPr lang="en-US" sz="850" i="1" dirty="0">
-                <a:solidFill>
-                  <a:srgbClr val="6B7176"/>
-                </a:solidFill>
-                <a:latin typeface="Aptos" pitchFamily="34" charset="0"/>
-                <a:ea typeface="Aptos" pitchFamily="34" charset="-122"/>
-                <a:cs typeface="Aptos" pitchFamily="34" charset="-120"/>
-              </a:rPr>
-              <a:t>Best: 84.45%. First large jump in the current results.</a:t>
-            </a:r>
-            <a:endParaRPr lang="en-US" sz="850" dirty="0"/>
-          </a:p>
-        </p:txBody>
-      </p:sp>
+            <a:ln w="17780">
+              <a:solidFill>
+                <a:srgbClr val="17677D"/>
+              </a:solidFill>
+              <a:prstDash val="solid"/>
+            </a:ln>
+          </p:spPr>
+          <p:txBody>
+            <a:bodyPr/>
+            <a:lstStyle/>
+            <a:p>
+              <a:endParaRPr lang="en-US"/>
+            </a:p>
+          </p:txBody>
+        </p:sp>
+        <p:sp>
+          <p:nvSpPr>
+            <p:cNvPr id="31" name="Text 29"/>
+            <p:cNvSpPr/>
+            <p:nvPr/>
+          </p:nvSpPr>
+          <p:spPr>
+            <a:xfrm>
+              <a:off x="6682742" y="4370831"/>
+              <a:ext cx="1783080" cy="329184"/>
+            </a:xfrm>
+            <a:prstGeom prst="rect">
+              <a:avLst/>
+            </a:prstGeom>
+            <a:noFill/>
+            <a:ln/>
+          </p:spPr>
+          <p:txBody>
+            <a:bodyPr wrap="square" lIns="0" tIns="0" rIns="0" bIns="0" rtlCol="0" anchor="t">
+              <a:normAutofit/>
+            </a:bodyPr>
+            <a:lstStyle/>
+            <a:p>
+              <a:pPr marL="0" indent="0" algn="ctr">
+                <a:lnSpc>
+                  <a:spcPct val="90000"/>
+                </a:lnSpc>
+                <a:buNone/>
+              </a:pPr>
+              <a:r>
+                <a:rPr lang="en-US" sz="2100" b="1" dirty="0">
+                  <a:solidFill>
+                    <a:srgbClr val="17677D"/>
+                  </a:solidFill>
+                  <a:latin typeface="Aptos Display" pitchFamily="34" charset="0"/>
+                  <a:ea typeface="Aptos Display" pitchFamily="34" charset="-122"/>
+                  <a:cs typeface="Aptos Display" pitchFamily="34" charset="-120"/>
+                </a:rPr>
+                <a:t>91.56%</a:t>
+              </a:r>
+              <a:endParaRPr lang="en-US" sz="2100" dirty="0"/>
+            </a:p>
+          </p:txBody>
+        </p:sp>
+        <p:sp>
+          <p:nvSpPr>
+            <p:cNvPr id="32" name="Text 30"/>
+            <p:cNvSpPr/>
+            <p:nvPr/>
+          </p:nvSpPr>
+          <p:spPr>
+            <a:xfrm>
+              <a:off x="6701030" y="4764023"/>
+              <a:ext cx="1746504" cy="219456"/>
+            </a:xfrm>
+            <a:prstGeom prst="rect">
+              <a:avLst/>
+            </a:prstGeom>
+            <a:noFill/>
+            <a:ln/>
+          </p:spPr>
+          <p:txBody>
+            <a:bodyPr wrap="square" lIns="0" tIns="0" rIns="0" bIns="0" rtlCol="0" anchor="t">
+              <a:normAutofit/>
+            </a:bodyPr>
+            <a:lstStyle/>
+            <a:p>
+              <a:pPr marL="0" indent="0" algn="ctr">
+                <a:lnSpc>
+                  <a:spcPct val="90000"/>
+                </a:lnSpc>
+                <a:buNone/>
+              </a:pPr>
+              <a:r>
+                <a:rPr lang="en-US" sz="780" dirty="0">
+                  <a:solidFill>
+                    <a:srgbClr val="6B7176"/>
+                  </a:solidFill>
+                  <a:latin typeface="Aptos" pitchFamily="34" charset="0"/>
+                  <a:ea typeface="Aptos" pitchFamily="34" charset="-122"/>
+                  <a:cs typeface="Aptos" pitchFamily="34" charset="-120"/>
+                </a:rPr>
+                <a:t>Fine-tuned final 5-fold accuracy</a:t>
+              </a:r>
+              <a:endParaRPr lang="en-US" sz="780" dirty="0"/>
+            </a:p>
+          </p:txBody>
+        </p:sp>
+      </p:grpSp>
       <p:pic>
         <p:nvPicPr>
-          <p:cNvPr id="34" name="Image 0" descr="/Users/andrew/Library/CloudStorage/OneDrive-CornellUniversity/Courses/SYSEN5888/ Project/DeepLearning5888Project/Code/Transfer Learning/YAMNet Results/YAMNet_combined_training_test_metrics_1fold_5fold.png"/>
+          <p:cNvPr id="34" name="Image 0"/>
           <p:cNvPicPr>
             <a:picLocks noChangeAspect="1"/>
           </p:cNvPicPr>
@@ -7248,8 +7095,8 @@
         </p:blipFill>
         <p:spPr>
           <a:xfrm>
-            <a:off x="6309359" y="1591056"/>
-            <a:ext cx="5442459" cy="2411188"/>
+            <a:off x="6309359" y="1738394"/>
+            <a:ext cx="5442459" cy="2116511"/>
           </a:xfrm>
           <a:prstGeom prst="rect">
             <a:avLst/>
@@ -8761,7 +8608,7 @@
         <p:spPr>
           <a:xfrm>
             <a:off x="731520" y="4727447"/>
-            <a:ext cx="3886200" cy="420624"/>
+            <a:ext cx="3886200" cy="745690"/>
           </a:xfrm>
           <a:prstGeom prst="rect">
             <a:avLst/>
@@ -8771,7 +8618,7 @@
         </p:spPr>
         <p:txBody>
           <a:bodyPr wrap="square" lIns="0" tIns="0" rIns="0" bIns="0" rtlCol="0" anchor="t">
-            <a:normAutofit fontScale="92500"/>
+            <a:normAutofit lnSpcReduction="10000"/>
           </a:bodyPr>
           <a:lstStyle/>
           <a:p>
@@ -8790,12 +8637,357 @@
                 <a:ea typeface="Aptos" pitchFamily="34" charset="-122"/>
                 <a:cs typeface="Aptos" pitchFamily="34" charset="-120"/>
               </a:rPr>
-              <a:t>Transfer learning quality matters: a stronger domain-pretrained model moves the result well beyond the from-scratch range.</a:t>
+              <a:t>Transfer learning quality matters: a stronger domain-pretrained model moves the result well beyond the from-scratch range. Transfer learning on large pretrained models can pose overfitting issues that can negatively affect the </a:t>
+            </a:r>
+            <a:r>
+              <a:rPr lang="en-US" sz="1200">
+                <a:solidFill>
+                  <a:srgbClr val="1F2528"/>
+                </a:solidFill>
+                <a:latin typeface="Aptos" pitchFamily="34" charset="0"/>
+                <a:ea typeface="Aptos" pitchFamily="34" charset="-122"/>
+                <a:cs typeface="Aptos" pitchFamily="34" charset="-120"/>
+              </a:rPr>
+              <a:t>prediction results.</a:t>
             </a:r>
             <a:endParaRPr lang="en-US" sz="1200" dirty="0"/>
           </a:p>
         </p:txBody>
       </p:sp>
+      <p:grpSp>
+        <p:nvGrpSpPr>
+          <p:cNvPr id="9" name="Group 8">
+            <a:extLst>
+              <a:ext uri="{FF2B5EF4-FFF2-40B4-BE49-F238E27FC236}">
+                <a16:creationId xmlns:a16="http://schemas.microsoft.com/office/drawing/2014/main" id="{EC11A150-702D-1BD7-50AF-2A91160EF965}"/>
+              </a:ext>
+            </a:extLst>
+          </p:cNvPr>
+          <p:cNvGrpSpPr/>
+          <p:nvPr/>
+        </p:nvGrpSpPr>
+        <p:grpSpPr>
+          <a:xfrm>
+            <a:off x="9445278" y="4279339"/>
+            <a:ext cx="1965960" cy="914400"/>
+            <a:chOff x="6591302" y="4233671"/>
+            <a:chExt cx="1965960" cy="914400"/>
+          </a:xfrm>
+        </p:grpSpPr>
+        <p:sp>
+          <p:nvSpPr>
+            <p:cNvPr id="10" name="Shape 28">
+              <a:extLst>
+                <a:ext uri="{FF2B5EF4-FFF2-40B4-BE49-F238E27FC236}">
+                  <a16:creationId xmlns:a16="http://schemas.microsoft.com/office/drawing/2014/main" id="{FB84920A-AE94-A236-9389-7EBD5029FF29}"/>
+                </a:ext>
+              </a:extLst>
+            </p:cNvPr>
+            <p:cNvSpPr/>
+            <p:nvPr/>
+          </p:nvSpPr>
+          <p:spPr>
+            <a:xfrm>
+              <a:off x="6591302" y="4233671"/>
+              <a:ext cx="1965960" cy="914400"/>
+            </a:xfrm>
+            <a:prstGeom prst="rect">
+              <a:avLst/>
+            </a:prstGeom>
+            <a:solidFill>
+              <a:srgbClr val="FFFFFF">
+                <a:alpha val="98000"/>
+              </a:srgbClr>
+            </a:solidFill>
+            <a:ln w="17780">
+              <a:solidFill>
+                <a:srgbClr val="17677D"/>
+              </a:solidFill>
+              <a:prstDash val="solid"/>
+            </a:ln>
+          </p:spPr>
+          <p:txBody>
+            <a:bodyPr/>
+            <a:lstStyle/>
+            <a:p>
+              <a:endParaRPr lang="en-US"/>
+            </a:p>
+          </p:txBody>
+        </p:sp>
+        <p:sp>
+          <p:nvSpPr>
+            <p:cNvPr id="12" name="Text 29">
+              <a:extLst>
+                <a:ext uri="{FF2B5EF4-FFF2-40B4-BE49-F238E27FC236}">
+                  <a16:creationId xmlns:a16="http://schemas.microsoft.com/office/drawing/2014/main" id="{1FD27D74-43B3-C445-5AEA-6D61007ECDFB}"/>
+                </a:ext>
+              </a:extLst>
+            </p:cNvPr>
+            <p:cNvSpPr/>
+            <p:nvPr/>
+          </p:nvSpPr>
+          <p:spPr>
+            <a:xfrm>
+              <a:off x="6682742" y="4370831"/>
+              <a:ext cx="1783080" cy="329184"/>
+            </a:xfrm>
+            <a:prstGeom prst="rect">
+              <a:avLst/>
+            </a:prstGeom>
+            <a:noFill/>
+            <a:ln/>
+          </p:spPr>
+          <p:txBody>
+            <a:bodyPr wrap="square" lIns="0" tIns="0" rIns="0" bIns="0" rtlCol="0" anchor="t">
+              <a:normAutofit/>
+            </a:bodyPr>
+            <a:lstStyle/>
+            <a:p>
+              <a:pPr algn="ctr">
+                <a:lnSpc>
+                  <a:spcPct val="90000"/>
+                </a:lnSpc>
+              </a:pPr>
+              <a:r>
+                <a:rPr lang="en-US" sz="2100" b="1" dirty="0">
+                  <a:solidFill>
+                    <a:srgbClr val="17677D"/>
+                  </a:solidFill>
+                  <a:latin typeface="Aptos Display" pitchFamily="34" charset="0"/>
+                  <a:ea typeface="Aptos Display" pitchFamily="34" charset="-122"/>
+                  <a:cs typeface="Aptos Display" pitchFamily="34" charset="-120"/>
+                </a:rPr>
+                <a:t>99.81 %</a:t>
+              </a:r>
+              <a:endParaRPr lang="en-US" sz="2100" dirty="0"/>
+            </a:p>
+          </p:txBody>
+        </p:sp>
+        <p:sp>
+          <p:nvSpPr>
+            <p:cNvPr id="15" name="Text 30">
+              <a:extLst>
+                <a:ext uri="{FF2B5EF4-FFF2-40B4-BE49-F238E27FC236}">
+                  <a16:creationId xmlns:a16="http://schemas.microsoft.com/office/drawing/2014/main" id="{0FC1132F-D57A-0F3C-B724-262B5D617A35}"/>
+                </a:ext>
+              </a:extLst>
+            </p:cNvPr>
+            <p:cNvSpPr/>
+            <p:nvPr/>
+          </p:nvSpPr>
+          <p:spPr>
+            <a:xfrm>
+              <a:off x="6701030" y="4764023"/>
+              <a:ext cx="1746504" cy="219456"/>
+            </a:xfrm>
+            <a:prstGeom prst="rect">
+              <a:avLst/>
+            </a:prstGeom>
+            <a:noFill/>
+            <a:ln/>
+          </p:spPr>
+          <p:txBody>
+            <a:bodyPr wrap="square" lIns="0" tIns="0" rIns="0" bIns="0" rtlCol="0" anchor="t">
+              <a:normAutofit/>
+            </a:bodyPr>
+            <a:lstStyle/>
+            <a:p>
+              <a:pPr marL="0" indent="0" algn="ctr">
+                <a:lnSpc>
+                  <a:spcPct val="90000"/>
+                </a:lnSpc>
+                <a:buNone/>
+              </a:pPr>
+              <a:r>
+                <a:rPr lang="en-US" sz="780" dirty="0">
+                  <a:solidFill>
+                    <a:srgbClr val="6B7176"/>
+                  </a:solidFill>
+                  <a:latin typeface="Aptos" pitchFamily="34" charset="0"/>
+                  <a:ea typeface="Aptos" pitchFamily="34" charset="-122"/>
+                  <a:cs typeface="Aptos" pitchFamily="34" charset="-120"/>
+                </a:rPr>
+                <a:t>Frozen final 5-fold accuracy</a:t>
+              </a:r>
+              <a:endParaRPr lang="en-US" sz="780" dirty="0"/>
+            </a:p>
+          </p:txBody>
+        </p:sp>
+      </p:grpSp>
+      <p:grpSp>
+        <p:nvGrpSpPr>
+          <p:cNvPr id="16" name="Group 15">
+            <a:extLst>
+              <a:ext uri="{FF2B5EF4-FFF2-40B4-BE49-F238E27FC236}">
+                <a16:creationId xmlns:a16="http://schemas.microsoft.com/office/drawing/2014/main" id="{C74D935F-EECB-7141-019C-F85ADD7C5441}"/>
+              </a:ext>
+            </a:extLst>
+          </p:cNvPr>
+          <p:cNvGrpSpPr/>
+          <p:nvPr/>
+        </p:nvGrpSpPr>
+        <p:grpSpPr>
+          <a:xfrm>
+            <a:off x="6693408" y="4723329"/>
+            <a:ext cx="1920240" cy="772294"/>
+            <a:chOff x="6957490" y="4123666"/>
+            <a:chExt cx="1920240" cy="772294"/>
+          </a:xfrm>
+        </p:grpSpPr>
+        <p:sp>
+          <p:nvSpPr>
+            <p:cNvPr id="17" name="Shape 48">
+              <a:extLst>
+                <a:ext uri="{FF2B5EF4-FFF2-40B4-BE49-F238E27FC236}">
+                  <a16:creationId xmlns:a16="http://schemas.microsoft.com/office/drawing/2014/main" id="{538F25B8-A34D-F019-ADB8-AFE6860C1027}"/>
+                </a:ext>
+              </a:extLst>
+            </p:cNvPr>
+            <p:cNvSpPr/>
+            <p:nvPr/>
+          </p:nvSpPr>
+          <p:spPr>
+            <a:xfrm>
+              <a:off x="6957490" y="4123666"/>
+              <a:ext cx="1920012" cy="772294"/>
+            </a:xfrm>
+            <a:prstGeom prst="rect">
+              <a:avLst/>
+            </a:prstGeom>
+            <a:solidFill>
+              <a:srgbClr val="FFFFFF">
+                <a:alpha val="98000"/>
+              </a:srgbClr>
+            </a:solidFill>
+            <a:ln w="17780">
+              <a:solidFill>
+                <a:schemeClr val="tx1">
+                  <a:lumMod val="75000"/>
+                  <a:lumOff val="25000"/>
+                </a:schemeClr>
+              </a:solidFill>
+              <a:prstDash val="solid"/>
+            </a:ln>
+          </p:spPr>
+          <p:txBody>
+            <a:bodyPr/>
+            <a:lstStyle/>
+            <a:p>
+              <a:endParaRPr lang="en-US"/>
+            </a:p>
+          </p:txBody>
+        </p:sp>
+        <p:sp>
+          <p:nvSpPr>
+            <p:cNvPr id="18" name="Text 49">
+              <a:extLst>
+                <a:ext uri="{FF2B5EF4-FFF2-40B4-BE49-F238E27FC236}">
+                  <a16:creationId xmlns:a16="http://schemas.microsoft.com/office/drawing/2014/main" id="{47B2762C-0B40-0FE3-A143-DA1B74EA64DD}"/>
+                </a:ext>
+              </a:extLst>
+            </p:cNvPr>
+            <p:cNvSpPr/>
+            <p:nvPr/>
+          </p:nvSpPr>
+          <p:spPr>
+            <a:xfrm>
+              <a:off x="7048930" y="4260826"/>
+              <a:ext cx="1828800" cy="329184"/>
+            </a:xfrm>
+            <a:prstGeom prst="rect">
+              <a:avLst/>
+            </a:prstGeom>
+            <a:noFill/>
+            <a:ln/>
+          </p:spPr>
+          <p:txBody>
+            <a:bodyPr wrap="square" lIns="0" tIns="0" rIns="0" bIns="0" rtlCol="0" anchor="t">
+              <a:normAutofit/>
+            </a:bodyPr>
+            <a:lstStyle/>
+            <a:p>
+              <a:pPr marL="0" indent="0" algn="ctr">
+                <a:lnSpc>
+                  <a:spcPct val="90000"/>
+                </a:lnSpc>
+                <a:buNone/>
+              </a:pPr>
+              <a:r>
+                <a:rPr lang="en-US" sz="2100" b="1" dirty="0">
+                  <a:solidFill>
+                    <a:schemeClr val="tx1">
+                      <a:lumMod val="75000"/>
+                      <a:lumOff val="25000"/>
+                    </a:schemeClr>
+                  </a:solidFill>
+                  <a:latin typeface="Aptos Display" pitchFamily="34" charset="0"/>
+                  <a:ea typeface="Aptos Display" pitchFamily="34" charset="-122"/>
+                  <a:cs typeface="Aptos Display" pitchFamily="34" charset="-120"/>
+                </a:rPr>
+                <a:t>64.5%</a:t>
+              </a:r>
+              <a:endParaRPr lang="en-US" sz="2100" dirty="0">
+                <a:solidFill>
+                  <a:schemeClr val="tx1">
+                    <a:lumMod val="75000"/>
+                    <a:lumOff val="25000"/>
+                  </a:schemeClr>
+                </a:solidFill>
+              </a:endParaRPr>
+            </a:p>
+          </p:txBody>
+        </p:sp>
+        <p:sp>
+          <p:nvSpPr>
+            <p:cNvPr id="19" name="Text 50">
+              <a:extLst>
+                <a:ext uri="{FF2B5EF4-FFF2-40B4-BE49-F238E27FC236}">
+                  <a16:creationId xmlns:a16="http://schemas.microsoft.com/office/drawing/2014/main" id="{0F5B0046-B2BA-66ED-B4E1-18EDAC4C69EF}"/>
+                </a:ext>
+              </a:extLst>
+            </p:cNvPr>
+            <p:cNvSpPr/>
+            <p:nvPr/>
+          </p:nvSpPr>
+          <p:spPr>
+            <a:xfrm>
+              <a:off x="7067218" y="4654018"/>
+              <a:ext cx="1792224" cy="219456"/>
+            </a:xfrm>
+            <a:prstGeom prst="rect">
+              <a:avLst/>
+            </a:prstGeom>
+            <a:noFill/>
+            <a:ln/>
+          </p:spPr>
+          <p:txBody>
+            <a:bodyPr wrap="square" lIns="0" tIns="0" rIns="0" bIns="0" rtlCol="0" anchor="t">
+              <a:normAutofit/>
+            </a:bodyPr>
+            <a:lstStyle/>
+            <a:p>
+              <a:pPr marL="0" indent="0" algn="ctr">
+                <a:lnSpc>
+                  <a:spcPct val="90000"/>
+                </a:lnSpc>
+                <a:buNone/>
+              </a:pPr>
+              <a:r>
+                <a:rPr lang="en-US" sz="780" dirty="0">
+                  <a:solidFill>
+                    <a:srgbClr val="6B7176"/>
+                  </a:solidFill>
+                  <a:latin typeface="Aptos" pitchFamily="34" charset="0"/>
+                  <a:ea typeface="Aptos" pitchFamily="34" charset="-122"/>
+                  <a:cs typeface="Aptos" pitchFamily="34" charset="-120"/>
+                </a:rPr>
+                <a:t>Piczak published LP clip-level reference</a:t>
+              </a:r>
+              <a:endParaRPr lang="en-US" sz="780" dirty="0"/>
+            </a:p>
+          </p:txBody>
+        </p:sp>
+      </p:grpSp>
     </p:spTree>
   </p:cSld>
   <p:clrMapOvr>

--- a/Docs/Final_Project_Presentation_Draft.pptx
+++ b/Docs/Final_Project_Presentation_Draft.pptx
@@ -4975,28 +4975,28 @@
           <p:nvPr>
             <p:extLst>
               <p:ext uri="{D42A27DB-BD31-4B8C-83A1-F6EECF244321}">
-                <p14:modId xmlns:p14="http://schemas.microsoft.com/office/powerpoint/2010/main" val="1066448884"/>
+                <p14:modId xmlns:p14="http://schemas.microsoft.com/office/powerpoint/2010/main" val="598496692"/>
               </p:ext>
             </p:extLst>
           </p:nvPr>
         </p:nvGraphicFramePr>
         <p:xfrm>
-          <a:off x="694944" y="2359153"/>
-          <a:ext cx="4443981" cy="1496568"/>
+          <a:off x="749808" y="2359153"/>
+          <a:ext cx="4389117" cy="1496568"/>
         </p:xfrm>
         <a:graphic>
           <a:graphicData uri="http://schemas.openxmlformats.org/drawingml/2006/table">
             <a:tbl>
               <a:tblPr/>
               <a:tblGrid>
-                <a:gridCol w="1121378">
+                <a:gridCol w="1107534">
                   <a:extLst>
                     <a:ext uri="{9D8B030D-6E8A-4147-A177-3AD203B41FA5}">
                       <a16:colId xmlns:a16="http://schemas.microsoft.com/office/drawing/2014/main" val="20000"/>
                     </a:ext>
                   </a:extLst>
                 </a:gridCol>
-                <a:gridCol w="3322603">
+                <a:gridCol w="3281583">
                   <a:extLst>
                     <a:ext uri="{9D8B030D-6E8A-4147-A177-3AD203B41FA5}">
                       <a16:colId xmlns:a16="http://schemas.microsoft.com/office/drawing/2014/main" val="20001"/>
@@ -6007,78 +6007,6 @@
           </a:p>
         </p:txBody>
       </p:sp>
-      <p:cxnSp>
-        <p:nvCxnSpPr>
-          <p:cNvPr id="10" name="Straight Connector 9">
-            <a:extLst>
-              <a:ext uri="{FF2B5EF4-FFF2-40B4-BE49-F238E27FC236}">
-                <a16:creationId xmlns:a16="http://schemas.microsoft.com/office/drawing/2014/main" id="{2EB6E24A-0E98-1A23-DB40-8F94F5FCB2E8}"/>
-              </a:ext>
-            </a:extLst>
-          </p:cNvPr>
-          <p:cNvCxnSpPr/>
-          <p:nvPr/>
-        </p:nvCxnSpPr>
-        <p:spPr>
-          <a:xfrm>
-            <a:off x="731520" y="1078992"/>
-            <a:ext cx="0" cy="2923251"/>
-          </a:xfrm>
-          <a:prstGeom prst="line">
-            <a:avLst/>
-          </a:prstGeom>
-        </p:spPr>
-        <p:style>
-          <a:lnRef idx="1">
-            <a:schemeClr val="accent1"/>
-          </a:lnRef>
-          <a:fillRef idx="0">
-            <a:schemeClr val="accent1"/>
-          </a:fillRef>
-          <a:effectRef idx="0">
-            <a:schemeClr val="accent1"/>
-          </a:effectRef>
-          <a:fontRef idx="minor">
-            <a:schemeClr val="tx1"/>
-          </a:fontRef>
-        </p:style>
-      </p:cxnSp>
-      <p:cxnSp>
-        <p:nvCxnSpPr>
-          <p:cNvPr id="15" name="Straight Connector 14">
-            <a:extLst>
-              <a:ext uri="{FF2B5EF4-FFF2-40B4-BE49-F238E27FC236}">
-                <a16:creationId xmlns:a16="http://schemas.microsoft.com/office/drawing/2014/main" id="{2B3A0584-80A7-C44B-0779-FDD7115C2F0A}"/>
-              </a:ext>
-            </a:extLst>
-          </p:cNvPr>
-          <p:cNvCxnSpPr/>
-          <p:nvPr/>
-        </p:nvCxnSpPr>
-        <p:spPr>
-          <a:xfrm>
-            <a:off x="477371" y="1307592"/>
-            <a:ext cx="1900069" cy="0"/>
-          </a:xfrm>
-          <a:prstGeom prst="line">
-            <a:avLst/>
-          </a:prstGeom>
-        </p:spPr>
-        <p:style>
-          <a:lnRef idx="1">
-            <a:schemeClr val="accent1"/>
-          </a:lnRef>
-          <a:fillRef idx="0">
-            <a:schemeClr val="accent1"/>
-          </a:fillRef>
-          <a:effectRef idx="0">
-            <a:schemeClr val="accent1"/>
-          </a:effectRef>
-          <a:fontRef idx="minor">
-            <a:schemeClr val="tx1"/>
-          </a:fontRef>
-        </p:style>
-      </p:cxnSp>
       <p:grpSp>
         <p:nvGrpSpPr>
           <p:cNvPr id="6" name="Group 5">
@@ -6607,6 +6535,29 @@
           <a:chExt cx="0" cy="0"/>
         </a:xfrm>
       </p:grpSpPr>
+      <p:pic>
+        <p:nvPicPr>
+          <p:cNvPr id="34" name="Image 0"/>
+          <p:cNvPicPr>
+            <a:picLocks noChangeAspect="1"/>
+          </p:cNvPicPr>
+          <p:nvPr/>
+        </p:nvPicPr>
+        <p:blipFill>
+          <a:blip r:embed="rId3"/>
+          <a:srcRect/>
+          <a:stretch/>
+        </p:blipFill>
+        <p:spPr>
+          <a:xfrm>
+            <a:off x="6012932" y="1681729"/>
+            <a:ext cx="5739516" cy="2230935"/>
+          </a:xfrm>
+          <a:prstGeom prst="rect">
+            <a:avLst/>
+          </a:prstGeom>
+        </p:spPr>
+      </p:pic>
       <p:sp>
         <p:nvSpPr>
           <p:cNvPr id="6" name="Shape 22">
@@ -6937,172 +6888,6 @@
           </a:p>
         </p:txBody>
       </p:sp>
-      <p:grpSp>
-        <p:nvGrpSpPr>
-          <p:cNvPr id="8" name="Group 7">
-            <a:extLst>
-              <a:ext uri="{FF2B5EF4-FFF2-40B4-BE49-F238E27FC236}">
-                <a16:creationId xmlns:a16="http://schemas.microsoft.com/office/drawing/2014/main" id="{672A12AB-EF7E-3CB7-A9A9-0B88F8D0872D}"/>
-              </a:ext>
-            </a:extLst>
-          </p:cNvPr>
-          <p:cNvGrpSpPr/>
-          <p:nvPr/>
-        </p:nvGrpSpPr>
-        <p:grpSpPr>
-          <a:xfrm>
-            <a:off x="9445278" y="5423641"/>
-            <a:ext cx="1965960" cy="914400"/>
-            <a:chOff x="6591302" y="4233671"/>
-            <a:chExt cx="1965960" cy="914400"/>
-          </a:xfrm>
-        </p:grpSpPr>
-        <p:sp>
-          <p:nvSpPr>
-            <p:cNvPr id="30" name="Shape 28"/>
-            <p:cNvSpPr/>
-            <p:nvPr/>
-          </p:nvSpPr>
-          <p:spPr>
-            <a:xfrm>
-              <a:off x="6591302" y="4233671"/>
-              <a:ext cx="1965960" cy="914400"/>
-            </a:xfrm>
-            <a:prstGeom prst="rect">
-              <a:avLst/>
-            </a:prstGeom>
-            <a:solidFill>
-              <a:srgbClr val="FFFFFF">
-                <a:alpha val="98000"/>
-              </a:srgbClr>
-            </a:solidFill>
-            <a:ln w="17780">
-              <a:solidFill>
-                <a:srgbClr val="17677D"/>
-              </a:solidFill>
-              <a:prstDash val="solid"/>
-            </a:ln>
-          </p:spPr>
-          <p:txBody>
-            <a:bodyPr/>
-            <a:lstStyle/>
-            <a:p>
-              <a:endParaRPr lang="en-US"/>
-            </a:p>
-          </p:txBody>
-        </p:sp>
-        <p:sp>
-          <p:nvSpPr>
-            <p:cNvPr id="31" name="Text 29"/>
-            <p:cNvSpPr/>
-            <p:nvPr/>
-          </p:nvSpPr>
-          <p:spPr>
-            <a:xfrm>
-              <a:off x="6682742" y="4370831"/>
-              <a:ext cx="1783080" cy="329184"/>
-            </a:xfrm>
-            <a:prstGeom prst="rect">
-              <a:avLst/>
-            </a:prstGeom>
-            <a:noFill/>
-            <a:ln/>
-          </p:spPr>
-          <p:txBody>
-            <a:bodyPr wrap="square" lIns="0" tIns="0" rIns="0" bIns="0" rtlCol="0" anchor="t">
-              <a:normAutofit/>
-            </a:bodyPr>
-            <a:lstStyle/>
-            <a:p>
-              <a:pPr marL="0" indent="0" algn="ctr">
-                <a:lnSpc>
-                  <a:spcPct val="90000"/>
-                </a:lnSpc>
-                <a:buNone/>
-              </a:pPr>
-              <a:r>
-                <a:rPr lang="en-US" sz="2100" b="1" dirty="0">
-                  <a:solidFill>
-                    <a:srgbClr val="17677D"/>
-                  </a:solidFill>
-                  <a:latin typeface="Aptos Display" pitchFamily="34" charset="0"/>
-                  <a:ea typeface="Aptos Display" pitchFamily="34" charset="-122"/>
-                  <a:cs typeface="Aptos Display" pitchFamily="34" charset="-120"/>
-                </a:rPr>
-                <a:t>91.56%</a:t>
-              </a:r>
-              <a:endParaRPr lang="en-US" sz="2100" dirty="0"/>
-            </a:p>
-          </p:txBody>
-        </p:sp>
-        <p:sp>
-          <p:nvSpPr>
-            <p:cNvPr id="32" name="Text 30"/>
-            <p:cNvSpPr/>
-            <p:nvPr/>
-          </p:nvSpPr>
-          <p:spPr>
-            <a:xfrm>
-              <a:off x="6701030" y="4764023"/>
-              <a:ext cx="1746504" cy="219456"/>
-            </a:xfrm>
-            <a:prstGeom prst="rect">
-              <a:avLst/>
-            </a:prstGeom>
-            <a:noFill/>
-            <a:ln/>
-          </p:spPr>
-          <p:txBody>
-            <a:bodyPr wrap="square" lIns="0" tIns="0" rIns="0" bIns="0" rtlCol="0" anchor="t">
-              <a:normAutofit/>
-            </a:bodyPr>
-            <a:lstStyle/>
-            <a:p>
-              <a:pPr marL="0" indent="0" algn="ctr">
-                <a:lnSpc>
-                  <a:spcPct val="90000"/>
-                </a:lnSpc>
-                <a:buNone/>
-              </a:pPr>
-              <a:r>
-                <a:rPr lang="en-US" sz="780" dirty="0">
-                  <a:solidFill>
-                    <a:srgbClr val="6B7176"/>
-                  </a:solidFill>
-                  <a:latin typeface="Aptos" pitchFamily="34" charset="0"/>
-                  <a:ea typeface="Aptos" pitchFamily="34" charset="-122"/>
-                  <a:cs typeface="Aptos" pitchFamily="34" charset="-120"/>
-                </a:rPr>
-                <a:t>Fine-tuned final 5-fold accuracy</a:t>
-              </a:r>
-              <a:endParaRPr lang="en-US" sz="780" dirty="0"/>
-            </a:p>
-          </p:txBody>
-        </p:sp>
-      </p:grpSp>
-      <p:pic>
-        <p:nvPicPr>
-          <p:cNvPr id="34" name="Image 0"/>
-          <p:cNvPicPr>
-            <a:picLocks noChangeAspect="1"/>
-          </p:cNvPicPr>
-          <p:nvPr/>
-        </p:nvPicPr>
-        <p:blipFill>
-          <a:blip r:embed="rId3"/>
-          <a:srcRect/>
-          <a:stretch/>
-        </p:blipFill>
-        <p:spPr>
-          <a:xfrm>
-            <a:off x="6309359" y="1738394"/>
-            <a:ext cx="5442459" cy="2116511"/>
-          </a:xfrm>
-          <a:prstGeom prst="rect">
-            <a:avLst/>
-          </a:prstGeom>
-        </p:spPr>
-      </p:pic>
       <p:sp>
         <p:nvSpPr>
           <p:cNvPr id="37" name="Text 34"/>
@@ -7611,28 +7396,28 @@
           <p:nvPr>
             <p:extLst>
               <p:ext uri="{D42A27DB-BD31-4B8C-83A1-F6EECF244321}">
-                <p14:modId xmlns:p14="http://schemas.microsoft.com/office/powerpoint/2010/main" val="899157142"/>
+                <p14:modId xmlns:p14="http://schemas.microsoft.com/office/powerpoint/2010/main" val="1374502662"/>
               </p:ext>
             </p:extLst>
           </p:nvPr>
         </p:nvGraphicFramePr>
         <p:xfrm>
-          <a:off x="694943" y="2359153"/>
-          <a:ext cx="4434169" cy="1496568"/>
+          <a:off x="743752" y="2359153"/>
+          <a:ext cx="4385360" cy="1496568"/>
         </p:xfrm>
         <a:graphic>
           <a:graphicData uri="http://schemas.openxmlformats.org/drawingml/2006/table">
             <a:tbl>
               <a:tblPr/>
               <a:tblGrid>
-                <a:gridCol w="1118903">
+                <a:gridCol w="1106587">
                   <a:extLst>
                     <a:ext uri="{9D8B030D-6E8A-4147-A177-3AD203B41FA5}">
                       <a16:colId xmlns:a16="http://schemas.microsoft.com/office/drawing/2014/main" val="20000"/>
                     </a:ext>
                   </a:extLst>
                 </a:gridCol>
-                <a:gridCol w="3315266">
+                <a:gridCol w="3278773">
                   <a:extLst>
                     <a:ext uri="{9D8B030D-6E8A-4147-A177-3AD203B41FA5}">
                       <a16:colId xmlns:a16="http://schemas.microsoft.com/office/drawing/2014/main" val="20001"/>
@@ -8656,10 +8441,10 @@
       </p:sp>
       <p:grpSp>
         <p:nvGrpSpPr>
-          <p:cNvPr id="9" name="Group 8">
+          <p:cNvPr id="20" name="Group 19">
             <a:extLst>
               <a:ext uri="{FF2B5EF4-FFF2-40B4-BE49-F238E27FC236}">
-                <a16:creationId xmlns:a16="http://schemas.microsoft.com/office/drawing/2014/main" id="{EC11A150-702D-1BD7-50AF-2A91160EF965}"/>
+                <a16:creationId xmlns:a16="http://schemas.microsoft.com/office/drawing/2014/main" id="{8B7AF595-3CF0-0FF8-C6FD-A50120C1E82D}"/>
               </a:ext>
             </a:extLst>
           </p:cNvPr>
@@ -8668,7 +8453,181 @@
         </p:nvGrpSpPr>
         <p:grpSpPr>
           <a:xfrm>
-            <a:off x="9445278" y="4279339"/>
+            <a:off x="6478524" y="4643132"/>
+            <a:ext cx="1920240" cy="772294"/>
+            <a:chOff x="6957490" y="4123666"/>
+            <a:chExt cx="1920240" cy="772294"/>
+          </a:xfrm>
+        </p:grpSpPr>
+        <p:sp>
+          <p:nvSpPr>
+            <p:cNvPr id="21" name="Shape 48">
+              <a:extLst>
+                <a:ext uri="{FF2B5EF4-FFF2-40B4-BE49-F238E27FC236}">
+                  <a16:creationId xmlns:a16="http://schemas.microsoft.com/office/drawing/2014/main" id="{3623C8A8-9A9C-61F0-51DB-DEA0C59A59D2}"/>
+                </a:ext>
+              </a:extLst>
+            </p:cNvPr>
+            <p:cNvSpPr/>
+            <p:nvPr/>
+          </p:nvSpPr>
+          <p:spPr>
+            <a:xfrm>
+              <a:off x="6957490" y="4123666"/>
+              <a:ext cx="1920012" cy="772294"/>
+            </a:xfrm>
+            <a:prstGeom prst="rect">
+              <a:avLst/>
+            </a:prstGeom>
+            <a:solidFill>
+              <a:srgbClr val="FFFFFF">
+                <a:alpha val="98000"/>
+              </a:srgbClr>
+            </a:solidFill>
+            <a:ln w="17780">
+              <a:solidFill>
+                <a:schemeClr val="tx1">
+                  <a:lumMod val="75000"/>
+                  <a:lumOff val="25000"/>
+                </a:schemeClr>
+              </a:solidFill>
+              <a:prstDash val="solid"/>
+            </a:ln>
+          </p:spPr>
+          <p:txBody>
+            <a:bodyPr/>
+            <a:lstStyle/>
+            <a:p>
+              <a:endParaRPr lang="en-US"/>
+            </a:p>
+          </p:txBody>
+        </p:sp>
+        <p:sp>
+          <p:nvSpPr>
+            <p:cNvPr id="22" name="Text 49">
+              <a:extLst>
+                <a:ext uri="{FF2B5EF4-FFF2-40B4-BE49-F238E27FC236}">
+                  <a16:creationId xmlns:a16="http://schemas.microsoft.com/office/drawing/2014/main" id="{353EF21B-FD5A-693B-1A5F-35C855996D47}"/>
+                </a:ext>
+              </a:extLst>
+            </p:cNvPr>
+            <p:cNvSpPr/>
+            <p:nvPr/>
+          </p:nvSpPr>
+          <p:spPr>
+            <a:xfrm>
+              <a:off x="7048930" y="4260826"/>
+              <a:ext cx="1828800" cy="329184"/>
+            </a:xfrm>
+            <a:prstGeom prst="rect">
+              <a:avLst/>
+            </a:prstGeom>
+            <a:noFill/>
+            <a:ln/>
+          </p:spPr>
+          <p:txBody>
+            <a:bodyPr wrap="square" lIns="0" tIns="0" rIns="0" bIns="0" rtlCol="0" anchor="t">
+              <a:normAutofit/>
+            </a:bodyPr>
+            <a:lstStyle/>
+            <a:p>
+              <a:pPr marL="0" indent="0" algn="ctr">
+                <a:lnSpc>
+                  <a:spcPct val="90000"/>
+                </a:lnSpc>
+                <a:buNone/>
+              </a:pPr>
+              <a:r>
+                <a:rPr lang="en-US" sz="2100" b="1" dirty="0">
+                  <a:solidFill>
+                    <a:schemeClr val="tx1">
+                      <a:lumMod val="75000"/>
+                      <a:lumOff val="25000"/>
+                    </a:schemeClr>
+                  </a:solidFill>
+                  <a:latin typeface="Aptos Display" pitchFamily="34" charset="0"/>
+                  <a:ea typeface="Aptos Display" pitchFamily="34" charset="-122"/>
+                  <a:cs typeface="Aptos Display" pitchFamily="34" charset="-120"/>
+                </a:rPr>
+                <a:t>64.5%</a:t>
+              </a:r>
+              <a:endParaRPr lang="en-US" sz="2100" dirty="0">
+                <a:solidFill>
+                  <a:schemeClr val="tx1">
+                    <a:lumMod val="75000"/>
+                    <a:lumOff val="25000"/>
+                  </a:schemeClr>
+                </a:solidFill>
+              </a:endParaRPr>
+            </a:p>
+          </p:txBody>
+        </p:sp>
+        <p:sp>
+          <p:nvSpPr>
+            <p:cNvPr id="23" name="Text 50">
+              <a:extLst>
+                <a:ext uri="{FF2B5EF4-FFF2-40B4-BE49-F238E27FC236}">
+                  <a16:creationId xmlns:a16="http://schemas.microsoft.com/office/drawing/2014/main" id="{2E088A5D-9FEB-D9FD-AC5D-35E88712A06E}"/>
+                </a:ext>
+              </a:extLst>
+            </p:cNvPr>
+            <p:cNvSpPr/>
+            <p:nvPr/>
+          </p:nvSpPr>
+          <p:spPr>
+            <a:xfrm>
+              <a:off x="7067218" y="4654018"/>
+              <a:ext cx="1792224" cy="219456"/>
+            </a:xfrm>
+            <a:prstGeom prst="rect">
+              <a:avLst/>
+            </a:prstGeom>
+            <a:noFill/>
+            <a:ln/>
+          </p:spPr>
+          <p:txBody>
+            <a:bodyPr wrap="square" lIns="0" tIns="0" rIns="0" bIns="0" rtlCol="0" anchor="t">
+              <a:normAutofit/>
+            </a:bodyPr>
+            <a:lstStyle/>
+            <a:p>
+              <a:pPr marL="0" indent="0" algn="ctr">
+                <a:lnSpc>
+                  <a:spcPct val="90000"/>
+                </a:lnSpc>
+                <a:buNone/>
+              </a:pPr>
+              <a:r>
+                <a:rPr lang="en-US" sz="780" dirty="0">
+                  <a:solidFill>
+                    <a:srgbClr val="6B7176"/>
+                  </a:solidFill>
+                  <a:latin typeface="Aptos" pitchFamily="34" charset="0"/>
+                  <a:ea typeface="Aptos" pitchFamily="34" charset="-122"/>
+                  <a:cs typeface="Aptos" pitchFamily="34" charset="-120"/>
+                </a:rPr>
+                <a:t>Piczak published LP clip-level reference</a:t>
+              </a:r>
+              <a:endParaRPr lang="en-US" sz="780" dirty="0"/>
+            </a:p>
+          </p:txBody>
+        </p:sp>
+      </p:grpSp>
+      <p:grpSp>
+        <p:nvGrpSpPr>
+          <p:cNvPr id="24" name="Group 23">
+            <a:extLst>
+              <a:ext uri="{FF2B5EF4-FFF2-40B4-BE49-F238E27FC236}">
+                <a16:creationId xmlns:a16="http://schemas.microsoft.com/office/drawing/2014/main" id="{C11B5318-84CC-BB9B-111A-46E5CD83B979}"/>
+              </a:ext>
+            </a:extLst>
+          </p:cNvPr>
+          <p:cNvGrpSpPr/>
+          <p:nvPr/>
+        </p:nvGrpSpPr>
+        <p:grpSpPr>
+          <a:xfrm>
+            <a:off x="9304020" y="4151375"/>
             <a:ext cx="1965960" cy="914400"/>
             <a:chOff x="6591302" y="4233671"/>
             <a:chExt cx="1965960" cy="914400"/>
@@ -8676,10 +8635,10 @@
         </p:grpSpPr>
         <p:sp>
           <p:nvSpPr>
-            <p:cNvPr id="10" name="Shape 28">
+            <p:cNvPr id="25" name="Shape 28">
               <a:extLst>
                 <a:ext uri="{FF2B5EF4-FFF2-40B4-BE49-F238E27FC236}">
-                  <a16:creationId xmlns:a16="http://schemas.microsoft.com/office/drawing/2014/main" id="{FB84920A-AE94-A236-9389-7EBD5029FF29}"/>
+                  <a16:creationId xmlns:a16="http://schemas.microsoft.com/office/drawing/2014/main" id="{F5F26EE8-94C7-4634-5BB4-8F499D0C4430}"/>
                 </a:ext>
               </a:extLst>
             </p:cNvPr>
@@ -8716,10 +8675,10 @@
         </p:sp>
         <p:sp>
           <p:nvSpPr>
-            <p:cNvPr id="12" name="Text 29">
+            <p:cNvPr id="26" name="Text 29">
               <a:extLst>
                 <a:ext uri="{FF2B5EF4-FFF2-40B4-BE49-F238E27FC236}">
-                  <a16:creationId xmlns:a16="http://schemas.microsoft.com/office/drawing/2014/main" id="{1FD27D74-43B3-C445-5AEA-6D61007ECDFB}"/>
+                  <a16:creationId xmlns:a16="http://schemas.microsoft.com/office/drawing/2014/main" id="{A24FE55D-9B43-44A1-9F9D-1941D62F09FF}"/>
                 </a:ext>
               </a:extLst>
             </p:cNvPr>
@@ -8757,7 +8716,7 @@
                   <a:ea typeface="Aptos Display" pitchFamily="34" charset="-122"/>
                   <a:cs typeface="Aptos Display" pitchFamily="34" charset="-120"/>
                 </a:rPr>
-                <a:t>99.81 %</a:t>
+                <a:t>99.81%</a:t>
               </a:r>
               <a:endParaRPr lang="en-US" sz="2100" dirty="0"/>
             </a:p>
@@ -8765,10 +8724,10 @@
         </p:sp>
         <p:sp>
           <p:nvSpPr>
-            <p:cNvPr id="15" name="Text 30">
+            <p:cNvPr id="27" name="Text 30">
               <a:extLst>
                 <a:ext uri="{FF2B5EF4-FFF2-40B4-BE49-F238E27FC236}">
-                  <a16:creationId xmlns:a16="http://schemas.microsoft.com/office/drawing/2014/main" id="{0FC1132F-D57A-0F3C-B724-262B5D617A35}"/>
+                  <a16:creationId xmlns:a16="http://schemas.microsoft.com/office/drawing/2014/main" id="{6BBAF30C-8EF3-4F5C-47F7-9F2AAB4D2399}"/>
                 </a:ext>
               </a:extLst>
             </p:cNvPr>
@@ -8816,10 +8775,10 @@
       </p:grpSp>
       <p:grpSp>
         <p:nvGrpSpPr>
-          <p:cNvPr id="16" name="Group 15">
+          <p:cNvPr id="28" name="Group 27">
             <a:extLst>
               <a:ext uri="{FF2B5EF4-FFF2-40B4-BE49-F238E27FC236}">
-                <a16:creationId xmlns:a16="http://schemas.microsoft.com/office/drawing/2014/main" id="{C74D935F-EECB-7141-019C-F85ADD7C5441}"/>
+                <a16:creationId xmlns:a16="http://schemas.microsoft.com/office/drawing/2014/main" id="{BDBC1FB6-A9A2-44E7-2087-378551A4EC49}"/>
               </a:ext>
             </a:extLst>
           </p:cNvPr>
@@ -8828,18 +8787,18 @@
         </p:nvGrpSpPr>
         <p:grpSpPr>
           <a:xfrm>
-            <a:off x="6693408" y="4723329"/>
-            <a:ext cx="1920240" cy="772294"/>
-            <a:chOff x="6957490" y="4123666"/>
-            <a:chExt cx="1920240" cy="772294"/>
+            <a:off x="9304020" y="5304484"/>
+            <a:ext cx="1965960" cy="914400"/>
+            <a:chOff x="6591302" y="4233671"/>
+            <a:chExt cx="1965960" cy="914400"/>
           </a:xfrm>
         </p:grpSpPr>
         <p:sp>
           <p:nvSpPr>
-            <p:cNvPr id="17" name="Shape 48">
+            <p:cNvPr id="29" name="Shape 28">
               <a:extLst>
                 <a:ext uri="{FF2B5EF4-FFF2-40B4-BE49-F238E27FC236}">
-                  <a16:creationId xmlns:a16="http://schemas.microsoft.com/office/drawing/2014/main" id="{538F25B8-A34D-F019-ADB8-AFE6860C1027}"/>
+                  <a16:creationId xmlns:a16="http://schemas.microsoft.com/office/drawing/2014/main" id="{C81DCAD6-2AA0-FD99-333C-3BAE705C7885}"/>
                 </a:ext>
               </a:extLst>
             </p:cNvPr>
@@ -8848,8 +8807,8 @@
           </p:nvSpPr>
           <p:spPr>
             <a:xfrm>
-              <a:off x="6957490" y="4123666"/>
-              <a:ext cx="1920012" cy="772294"/>
+              <a:off x="6591302" y="4233671"/>
+              <a:ext cx="1965960" cy="914400"/>
             </a:xfrm>
             <a:prstGeom prst="rect">
               <a:avLst/>
@@ -8861,10 +8820,7 @@
             </a:solidFill>
             <a:ln w="17780">
               <a:solidFill>
-                <a:schemeClr val="tx1">
-                  <a:lumMod val="75000"/>
-                  <a:lumOff val="25000"/>
-                </a:schemeClr>
+                <a:srgbClr val="17677D"/>
               </a:solidFill>
               <a:prstDash val="solid"/>
             </a:ln>
@@ -8879,10 +8835,10 @@
         </p:sp>
         <p:sp>
           <p:nvSpPr>
-            <p:cNvPr id="18" name="Text 49">
+            <p:cNvPr id="33" name="Text 29">
               <a:extLst>
                 <a:ext uri="{FF2B5EF4-FFF2-40B4-BE49-F238E27FC236}">
-                  <a16:creationId xmlns:a16="http://schemas.microsoft.com/office/drawing/2014/main" id="{47B2762C-0B40-0FE3-A143-DA1B74EA64DD}"/>
+                  <a16:creationId xmlns:a16="http://schemas.microsoft.com/office/drawing/2014/main" id="{B11F5F6E-3E72-55E1-031A-A2285136C6AD}"/>
                 </a:ext>
               </a:extLst>
             </p:cNvPr>
@@ -8891,8 +8847,8 @@
           </p:nvSpPr>
           <p:spPr>
             <a:xfrm>
-              <a:off x="7048930" y="4260826"/>
-              <a:ext cx="1828800" cy="329184"/>
+              <a:off x="6682742" y="4370831"/>
+              <a:ext cx="1783080" cy="329184"/>
             </a:xfrm>
             <a:prstGeom prst="rect">
               <a:avLst/>
@@ -8915,34 +8871,24 @@
               <a:r>
                 <a:rPr lang="en-US" sz="2100" b="1" dirty="0">
                   <a:solidFill>
-                    <a:schemeClr val="tx1">
-                      <a:lumMod val="75000"/>
-                      <a:lumOff val="25000"/>
-                    </a:schemeClr>
+                    <a:srgbClr val="17677D"/>
                   </a:solidFill>
                   <a:latin typeface="Aptos Display" pitchFamily="34" charset="0"/>
                   <a:ea typeface="Aptos Display" pitchFamily="34" charset="-122"/>
                   <a:cs typeface="Aptos Display" pitchFamily="34" charset="-120"/>
                 </a:rPr>
-                <a:t>64.5%</a:t>
+                <a:t>91.56%</a:t>
               </a:r>
-              <a:endParaRPr lang="en-US" sz="2100" dirty="0">
-                <a:solidFill>
-                  <a:schemeClr val="tx1">
-                    <a:lumMod val="75000"/>
-                    <a:lumOff val="25000"/>
-                  </a:schemeClr>
-                </a:solidFill>
-              </a:endParaRPr>
+              <a:endParaRPr lang="en-US" sz="2100" dirty="0"/>
             </a:p>
           </p:txBody>
         </p:sp>
         <p:sp>
           <p:nvSpPr>
-            <p:cNvPr id="19" name="Text 50">
+            <p:cNvPr id="35" name="Text 30">
               <a:extLst>
                 <a:ext uri="{FF2B5EF4-FFF2-40B4-BE49-F238E27FC236}">
-                  <a16:creationId xmlns:a16="http://schemas.microsoft.com/office/drawing/2014/main" id="{0F5B0046-B2BA-66ED-B4E1-18EDAC4C69EF}"/>
+                  <a16:creationId xmlns:a16="http://schemas.microsoft.com/office/drawing/2014/main" id="{054D37E2-EA60-5024-E445-F16B3EB61382}"/>
                 </a:ext>
               </a:extLst>
             </p:cNvPr>
@@ -8951,8 +8897,8 @@
           </p:nvSpPr>
           <p:spPr>
             <a:xfrm>
-              <a:off x="7067218" y="4654018"/>
-              <a:ext cx="1792224" cy="219456"/>
+              <a:off x="6701030" y="4764023"/>
+              <a:ext cx="1746504" cy="219456"/>
             </a:xfrm>
             <a:prstGeom prst="rect">
               <a:avLst/>
@@ -8981,7 +8927,7 @@
                   <a:ea typeface="Aptos" pitchFamily="34" charset="-122"/>
                   <a:cs typeface="Aptos" pitchFamily="34" charset="-120"/>
                 </a:rPr>
-                <a:t>Piczak published LP clip-level reference</a:t>
+                <a:t>Fine-tuned final 5-fold accuracy</a:t>
               </a:r>
               <a:endParaRPr lang="en-US" sz="780" dirty="0"/>
             </a:p>

--- a/Docs/Final_Project_Presentation_Draft.pptx
+++ b/Docs/Final_Project_Presentation_Draft.pptx
@@ -2904,6 +2904,86 @@
       </p:grpSpPr>
       <p:sp>
         <p:nvSpPr>
+          <p:cNvPr id="7" name="Shape 22">
+            <a:extLst>
+              <a:ext uri="{FF2B5EF4-FFF2-40B4-BE49-F238E27FC236}">
+                <a16:creationId xmlns:a16="http://schemas.microsoft.com/office/drawing/2014/main" id="{7ACFBABF-3D5C-09AD-F3B0-125485337F99}"/>
+              </a:ext>
+            </a:extLst>
+          </p:cNvPr>
+          <p:cNvSpPr/>
+          <p:nvPr/>
+        </p:nvSpPr>
+        <p:spPr>
+          <a:xfrm>
+            <a:off x="7904546" y="750102"/>
+            <a:ext cx="1809206" cy="295381"/>
+          </a:xfrm>
+          <a:prstGeom prst="chevron">
+            <a:avLst/>
+          </a:prstGeom>
+          <a:solidFill>
+            <a:srgbClr val="17677D"/>
+          </a:solidFill>
+          <a:ln w="12700">
+            <a:solidFill>
+              <a:srgbClr val="17677D">
+                <a:alpha val="0"/>
+              </a:srgbClr>
+            </a:solidFill>
+            <a:prstDash val="solid"/>
+          </a:ln>
+        </p:spPr>
+        <p:txBody>
+          <a:bodyPr/>
+          <a:lstStyle/>
+          <a:p>
+            <a:endParaRPr lang="en-US"/>
+          </a:p>
+        </p:txBody>
+      </p:sp>
+      <p:sp>
+        <p:nvSpPr>
+          <p:cNvPr id="8" name="Shape 25">
+            <a:extLst>
+              <a:ext uri="{FF2B5EF4-FFF2-40B4-BE49-F238E27FC236}">
+                <a16:creationId xmlns:a16="http://schemas.microsoft.com/office/drawing/2014/main" id="{51526EBD-33F1-B231-E296-C457BDC10BA7}"/>
+              </a:ext>
+            </a:extLst>
+          </p:cNvPr>
+          <p:cNvSpPr/>
+          <p:nvPr/>
+        </p:nvSpPr>
+        <p:spPr>
+          <a:xfrm>
+            <a:off x="9550658" y="750101"/>
+            <a:ext cx="1755200" cy="295381"/>
+          </a:xfrm>
+          <a:prstGeom prst="chevron">
+            <a:avLst/>
+          </a:prstGeom>
+          <a:solidFill>
+            <a:srgbClr val="D7DDE0">
+              <a:alpha val="90000"/>
+            </a:srgbClr>
+          </a:solidFill>
+          <a:ln w="12700">
+            <a:solidFill>
+              <a:srgbClr val="F7F5EF"/>
+            </a:solidFill>
+            <a:prstDash val="solid"/>
+          </a:ln>
+        </p:spPr>
+        <p:txBody>
+          <a:bodyPr/>
+          <a:lstStyle/>
+          <a:p>
+            <a:endParaRPr lang="en-US" sz="1100"/>
+          </a:p>
+        </p:txBody>
+      </p:sp>
+      <p:sp>
+        <p:nvSpPr>
           <p:cNvPr id="2" name="Text 0"/>
           <p:cNvSpPr/>
           <p:nvPr/>
@@ -3787,46 +3867,6 @@
       </p:sp>
       <p:sp>
         <p:nvSpPr>
-          <p:cNvPr id="35" name="Shape 22">
-            <a:extLst>
-              <a:ext uri="{FF2B5EF4-FFF2-40B4-BE49-F238E27FC236}">
-                <a16:creationId xmlns:a16="http://schemas.microsoft.com/office/drawing/2014/main" id="{7BC609B8-2454-D1E2-FD78-ECFA4A2277B6}"/>
-              </a:ext>
-            </a:extLst>
-          </p:cNvPr>
-          <p:cNvSpPr/>
-          <p:nvPr/>
-        </p:nvSpPr>
-        <p:spPr>
-          <a:xfrm>
-            <a:off x="7904546" y="750102"/>
-            <a:ext cx="1809206" cy="295381"/>
-          </a:xfrm>
-          <a:prstGeom prst="chevron">
-            <a:avLst/>
-          </a:prstGeom>
-          <a:solidFill>
-            <a:srgbClr val="17677D"/>
-          </a:solidFill>
-          <a:ln w="12700">
-            <a:solidFill>
-              <a:srgbClr val="17677D">
-                <a:alpha val="0"/>
-              </a:srgbClr>
-            </a:solidFill>
-            <a:prstDash val="solid"/>
-          </a:ln>
-        </p:spPr>
-        <p:txBody>
-          <a:bodyPr/>
-          <a:lstStyle/>
-          <a:p>
-            <a:endParaRPr lang="en-US"/>
-          </a:p>
-        </p:txBody>
-      </p:sp>
-      <p:sp>
-        <p:nvSpPr>
           <p:cNvPr id="36" name="Text 23">
             <a:extLst>
               <a:ext uri="{FF2B5EF4-FFF2-40B4-BE49-F238E27FC236}">
@@ -3873,92 +3913,6 @@
       </p:sp>
       <p:sp>
         <p:nvSpPr>
-          <p:cNvPr id="37" name="Text 24">
-            <a:extLst>
-              <a:ext uri="{FF2B5EF4-FFF2-40B4-BE49-F238E27FC236}">
-                <a16:creationId xmlns:a16="http://schemas.microsoft.com/office/drawing/2014/main" id="{9EEFE770-72AD-FDAB-7578-75687A89F7E1}"/>
-              </a:ext>
-            </a:extLst>
-          </p:cNvPr>
-          <p:cNvSpPr/>
-          <p:nvPr/>
-        </p:nvSpPr>
-        <p:spPr>
-          <a:xfrm>
-            <a:off x="7997198" y="941012"/>
-            <a:ext cx="1597682" cy="58389"/>
-          </a:xfrm>
-          <a:prstGeom prst="rect">
-            <a:avLst/>
-          </a:prstGeom>
-          <a:noFill/>
-          <a:ln/>
-        </p:spPr>
-        <p:txBody>
-          <a:bodyPr wrap="square" lIns="0" tIns="0" rIns="0" bIns="0" rtlCol="0" anchor="t">
-            <a:normAutofit fontScale="92500" lnSpcReduction="20000"/>
-          </a:bodyPr>
-          <a:lstStyle/>
-          <a:p>
-            <a:pPr algn="ctr">
-              <a:lnSpc>
-                <a:spcPct val="90000"/>
-              </a:lnSpc>
-            </a:pPr>
-            <a:r>
-              <a:rPr lang="en-US" sz="500" dirty="0">
-                <a:solidFill>
-                  <a:srgbClr val="FFFFFF"/>
-                </a:solidFill>
-                <a:latin typeface="Aptos" pitchFamily="34" charset="0"/>
-              </a:rPr>
-              <a:t>VGGish | YAMNet</a:t>
-            </a:r>
-          </a:p>
-        </p:txBody>
-      </p:sp>
-      <p:sp>
-        <p:nvSpPr>
-          <p:cNvPr id="38" name="Shape 25">
-            <a:extLst>
-              <a:ext uri="{FF2B5EF4-FFF2-40B4-BE49-F238E27FC236}">
-                <a16:creationId xmlns:a16="http://schemas.microsoft.com/office/drawing/2014/main" id="{87FAA393-F71D-9400-5795-A3916A051E8B}"/>
-              </a:ext>
-            </a:extLst>
-          </p:cNvPr>
-          <p:cNvSpPr/>
-          <p:nvPr/>
-        </p:nvSpPr>
-        <p:spPr>
-          <a:xfrm>
-            <a:off x="9564782" y="749723"/>
-            <a:ext cx="1755200" cy="295381"/>
-          </a:xfrm>
-          <a:prstGeom prst="chevron">
-            <a:avLst/>
-          </a:prstGeom>
-          <a:solidFill>
-            <a:srgbClr val="D7DDE0">
-              <a:alpha val="90000"/>
-            </a:srgbClr>
-          </a:solidFill>
-          <a:ln w="12700">
-            <a:solidFill>
-              <a:srgbClr val="F7F5EF"/>
-            </a:solidFill>
-            <a:prstDash val="solid"/>
-          </a:ln>
-        </p:spPr>
-        <p:txBody>
-          <a:bodyPr/>
-          <a:lstStyle/>
-          <a:p>
-            <a:endParaRPr lang="en-US" sz="1100"/>
-          </a:p>
-        </p:txBody>
-      </p:sp>
-      <p:sp>
-        <p:nvSpPr>
           <p:cNvPr id="39" name="Text 26">
             <a:extLst>
               <a:ext uri="{FF2B5EF4-FFF2-40B4-BE49-F238E27FC236}">
@@ -4054,6 +4008,54 @@
               <a:t>AST | BEATs</a:t>
             </a:r>
             <a:endParaRPr lang="en-US" sz="500" dirty="0"/>
+          </a:p>
+        </p:txBody>
+      </p:sp>
+      <p:sp>
+        <p:nvSpPr>
+          <p:cNvPr id="10" name="Text 24">
+            <a:extLst>
+              <a:ext uri="{FF2B5EF4-FFF2-40B4-BE49-F238E27FC236}">
+                <a16:creationId xmlns:a16="http://schemas.microsoft.com/office/drawing/2014/main" id="{1C039644-5A2D-090F-2305-74160B1D24BB}"/>
+              </a:ext>
+            </a:extLst>
+          </p:cNvPr>
+          <p:cNvSpPr/>
+          <p:nvPr/>
+        </p:nvSpPr>
+        <p:spPr>
+          <a:xfrm>
+            <a:off x="7997198" y="941012"/>
+            <a:ext cx="1597682" cy="58389"/>
+          </a:xfrm>
+          <a:prstGeom prst="rect">
+            <a:avLst/>
+          </a:prstGeom>
+          <a:noFill/>
+          <a:ln/>
+        </p:spPr>
+        <p:txBody>
+          <a:bodyPr wrap="square" lIns="0" tIns="0" rIns="0" bIns="0" rtlCol="0" anchor="t">
+            <a:normAutofit fontScale="92500" lnSpcReduction="20000"/>
+          </a:bodyPr>
+          <a:lstStyle/>
+          <a:p>
+            <a:pPr algn="ctr">
+              <a:lnSpc>
+                <a:spcPct val="90000"/>
+              </a:lnSpc>
+            </a:pPr>
+            <a:r>
+              <a:rPr lang="en-US" sz="500" dirty="0">
+                <a:solidFill>
+                  <a:schemeClr val="bg1">
+                    <a:lumMod val="75000"/>
+                  </a:schemeClr>
+                </a:solidFill>
+                <a:latin typeface="Aptos" pitchFamily="34" charset="0"/>
+              </a:rPr>
+              <a:t>VGGish | YAMNet</a:t>
+            </a:r>
           </a:p>
         </p:txBody>
       </p:sp>
@@ -4794,7 +4796,7 @@
                 </a:solidFill>
                 <a:latin typeface="Aptos" pitchFamily="34" charset="0"/>
               </a:rPr>
-              <a:t> | </a:t>
+              <a:t> </a:t>
             </a:r>
             <a:r>
               <a:rPr lang="en-US" sz="500" dirty="0">
@@ -4805,7 +4807,7 @@
                 </a:solidFill>
                 <a:latin typeface="Aptos" pitchFamily="34" charset="0"/>
               </a:rPr>
-              <a:t>YAMNet</a:t>
+              <a:t>| YAMNet</a:t>
             </a:r>
           </a:p>
         </p:txBody>
@@ -7217,7 +7219,18 @@
                 </a:solidFill>
                 <a:latin typeface="Aptos" pitchFamily="34" charset="0"/>
               </a:rPr>
-              <a:t> | </a:t>
+              <a:t> </a:t>
+            </a:r>
+            <a:r>
+              <a:rPr lang="en-US" sz="500" dirty="0">
+                <a:solidFill>
+                  <a:schemeClr val="bg1">
+                    <a:lumMod val="75000"/>
+                  </a:schemeClr>
+                </a:solidFill>
+                <a:latin typeface="Aptos" pitchFamily="34" charset="0"/>
+              </a:rPr>
+              <a:t>| </a:t>
             </a:r>
             <a:r>
               <a:rPr lang="en-US" sz="500" b="1" dirty="0">
@@ -10092,7 +10105,9 @@
             <a:r>
               <a:rPr lang="en-US" sz="500" dirty="0">
                 <a:solidFill>
-                  <a:srgbClr val="FFFFFF"/>
+                  <a:schemeClr val="bg1">
+                    <a:lumMod val="75000"/>
+                  </a:schemeClr>
                 </a:solidFill>
                 <a:latin typeface="Aptos" pitchFamily="34" charset="0"/>
               </a:rPr>
@@ -11110,7 +11125,7 @@
                 </a:solidFill>
                 <a:latin typeface="Aptos" pitchFamily="34" charset="0"/>
               </a:rPr>
-              <a:t> | </a:t>
+              <a:t> </a:t>
             </a:r>
             <a:r>
               <a:rPr lang="en-US" sz="500" dirty="0">
@@ -11121,7 +11136,7 @@
                 </a:solidFill>
                 <a:latin typeface="Aptos" pitchFamily="34" charset="0"/>
               </a:rPr>
-              <a:t>BEATs</a:t>
+              <a:t>| BEATs</a:t>
             </a:r>
           </a:p>
         </p:txBody>
@@ -13370,16 +13385,7 @@
                 </a:solidFill>
                 <a:latin typeface="Aptos" pitchFamily="34" charset="0"/>
               </a:rPr>
-              <a:t>AST</a:t>
-            </a:r>
-            <a:r>
-              <a:rPr lang="en-US" sz="500" dirty="0">
-                <a:solidFill>
-                  <a:srgbClr val="FFFFFF"/>
-                </a:solidFill>
-                <a:latin typeface="Aptos" pitchFamily="34" charset="0"/>
-              </a:rPr>
-              <a:t> | </a:t>
+              <a:t>AST | </a:t>
             </a:r>
             <a:r>
               <a:rPr lang="en-US" sz="500" b="1" dirty="0">
@@ -15273,8 +15279,8 @@
         </p:nvSpPr>
         <p:spPr>
           <a:xfrm>
-            <a:off x="731520" y="1347624"/>
-            <a:ext cx="4922521" cy="411480"/>
+            <a:off x="731520" y="1347623"/>
+            <a:ext cx="5418632" cy="772663"/>
           </a:xfrm>
           <a:prstGeom prst="rect">
             <a:avLst/>
@@ -15284,7 +15290,7 @@
         </p:spPr>
         <p:txBody>
           <a:bodyPr wrap="square" lIns="0" tIns="0" rIns="0" bIns="0" rtlCol="0" anchor="t">
-            <a:normAutofit fontScale="85000" lnSpcReduction="20000"/>
+            <a:noAutofit/>
           </a:bodyPr>
           <a:lstStyle/>
           <a:p>
@@ -15295,17 +15301,27 @@
               <a:buNone/>
             </a:pPr>
             <a:r>
-              <a:rPr lang="en-US" sz="2050" b="1" dirty="0">
-                <a:solidFill>
-                  <a:srgbClr val="1F2528"/>
-                </a:solidFill>
-                <a:latin typeface="Aptos Display" pitchFamily="34" charset="0"/>
+              <a:rPr lang="en-US" dirty="0">
+                <a:solidFill>
+                  <a:schemeClr val="tx1">
+                    <a:lumMod val="65000"/>
+                    <a:lumOff val="35000"/>
+                  </a:schemeClr>
+                </a:solidFill>
                 <a:ea typeface="Aptos Display" pitchFamily="34" charset="-122"/>
-                <a:cs typeface="Aptos Display" pitchFamily="34" charset="-120"/>
-              </a:rPr>
-              <a:t>The biggest shift was where the model learned its audio knowledge.</a:t>
-            </a:r>
-            <a:endParaRPr lang="en-US" sz="2050" dirty="0"/>
+                <a:cs typeface="Calibri" panose="020F0502020204030204" pitchFamily="34" charset="0"/>
+              </a:rPr>
+              <a:t>The biggest factor in accuracy was where the model learned its audio knowledge, and the applicability of the model to the task at hand</a:t>
+            </a:r>
+            <a:endParaRPr lang="en-US" dirty="0">
+              <a:solidFill>
+                <a:schemeClr val="tx1">
+                  <a:lumMod val="65000"/>
+                  <a:lumOff val="35000"/>
+                </a:schemeClr>
+              </a:solidFill>
+              <a:cs typeface="Calibri" panose="020F0502020204030204" pitchFamily="34" charset="0"/>
+            </a:endParaRPr>
           </a:p>
         </p:txBody>
       </p:sp>
@@ -15317,7 +15333,7 @@
         </p:nvSpPr>
         <p:spPr>
           <a:xfrm>
-            <a:off x="731520" y="2336071"/>
+            <a:off x="1036555" y="2358036"/>
             <a:ext cx="2468880" cy="164592"/>
           </a:xfrm>
           <a:prstGeom prst="rect">
@@ -15363,7 +15379,7 @@
         </p:nvSpPr>
         <p:spPr>
           <a:xfrm>
-            <a:off x="3337560" y="2436655"/>
+            <a:off x="3642595" y="2458620"/>
             <a:ext cx="2148840" cy="0"/>
           </a:xfrm>
           <a:prstGeom prst="line">
@@ -15393,7 +15409,7 @@
         </p:nvSpPr>
         <p:spPr>
           <a:xfrm>
-            <a:off x="3337560" y="2354359"/>
+            <a:off x="3642595" y="2376324"/>
             <a:ext cx="1386002" cy="155448"/>
           </a:xfrm>
           <a:prstGeom prst="rect">
@@ -15427,7 +15443,7 @@
         </p:nvSpPr>
         <p:spPr>
           <a:xfrm>
-            <a:off x="4815002" y="2336071"/>
+            <a:off x="5120037" y="2358036"/>
             <a:ext cx="658368" cy="146304"/>
           </a:xfrm>
           <a:prstGeom prst="rect">
@@ -15471,7 +15487,7 @@
         </p:nvSpPr>
         <p:spPr>
           <a:xfrm>
-            <a:off x="731520" y="2965277"/>
+            <a:off x="1036555" y="2987242"/>
             <a:ext cx="2468880" cy="164592"/>
           </a:xfrm>
           <a:prstGeom prst="rect">
@@ -15515,7 +15531,7 @@
         </p:nvSpPr>
         <p:spPr>
           <a:xfrm>
-            <a:off x="3337560" y="3065861"/>
+            <a:off x="3642595" y="3087826"/>
             <a:ext cx="2148840" cy="0"/>
           </a:xfrm>
           <a:prstGeom prst="line">
@@ -15545,7 +15561,7 @@
         </p:nvSpPr>
         <p:spPr>
           <a:xfrm>
-            <a:off x="3337560" y="2983565"/>
+            <a:off x="3642595" y="3005530"/>
             <a:ext cx="1220541" cy="155448"/>
           </a:xfrm>
           <a:prstGeom prst="rect">
@@ -15579,7 +15595,7 @@
         </p:nvSpPr>
         <p:spPr>
           <a:xfrm>
-            <a:off x="4649541" y="2965277"/>
+            <a:off x="4954576" y="2987242"/>
             <a:ext cx="658368" cy="146304"/>
           </a:xfrm>
           <a:prstGeom prst="rect">
@@ -15623,7 +15639,7 @@
         </p:nvSpPr>
         <p:spPr>
           <a:xfrm>
-            <a:off x="731520" y="3493903"/>
+            <a:off x="1036555" y="3515868"/>
             <a:ext cx="2468880" cy="164592"/>
           </a:xfrm>
           <a:prstGeom prst="rect">
@@ -15667,7 +15683,7 @@
         </p:nvSpPr>
         <p:spPr>
           <a:xfrm>
-            <a:off x="3337560" y="3594487"/>
+            <a:off x="3642595" y="3616452"/>
             <a:ext cx="2148840" cy="0"/>
           </a:xfrm>
           <a:prstGeom prst="line">
@@ -15697,7 +15713,7 @@
         </p:nvSpPr>
         <p:spPr>
           <a:xfrm>
-            <a:off x="3337560" y="3512191"/>
+            <a:off x="3642595" y="3534156"/>
             <a:ext cx="1213020" cy="155448"/>
           </a:xfrm>
           <a:prstGeom prst="rect">
@@ -15731,7 +15747,7 @@
         </p:nvSpPr>
         <p:spPr>
           <a:xfrm>
-            <a:off x="4642020" y="3493903"/>
+            <a:off x="4947055" y="3515868"/>
             <a:ext cx="658368" cy="146304"/>
           </a:xfrm>
           <a:prstGeom prst="rect">
@@ -15775,7 +15791,7 @@
         </p:nvSpPr>
         <p:spPr>
           <a:xfrm>
-            <a:off x="731520" y="3813943"/>
+            <a:off x="1036555" y="3835908"/>
             <a:ext cx="2468880" cy="164592"/>
           </a:xfrm>
           <a:prstGeom prst="rect">
@@ -15819,7 +15835,7 @@
         </p:nvSpPr>
         <p:spPr>
           <a:xfrm>
-            <a:off x="3337560" y="3914527"/>
+            <a:off x="3642595" y="3936492"/>
             <a:ext cx="2148840" cy="0"/>
           </a:xfrm>
           <a:prstGeom prst="line">
@@ -15849,7 +15865,7 @@
         </p:nvSpPr>
         <p:spPr>
           <a:xfrm>
-            <a:off x="3337560" y="3832231"/>
+            <a:off x="3642595" y="3854196"/>
             <a:ext cx="1792133" cy="155448"/>
           </a:xfrm>
           <a:prstGeom prst="rect">
@@ -15883,7 +15899,7 @@
         </p:nvSpPr>
         <p:spPr>
           <a:xfrm>
-            <a:off x="5221133" y="3813943"/>
+            <a:off x="5526168" y="3835908"/>
             <a:ext cx="658368" cy="146304"/>
           </a:xfrm>
           <a:prstGeom prst="rect">
@@ -15927,7 +15943,7 @@
         </p:nvSpPr>
         <p:spPr>
           <a:xfrm>
-            <a:off x="731520" y="4349983"/>
+            <a:off x="1036555" y="4371948"/>
             <a:ext cx="2468880" cy="164592"/>
           </a:xfrm>
           <a:prstGeom prst="rect">
@@ -15971,7 +15987,7 @@
         </p:nvSpPr>
         <p:spPr>
           <a:xfrm>
-            <a:off x="3337560" y="4450567"/>
+            <a:off x="3642595" y="4472532"/>
             <a:ext cx="2148840" cy="0"/>
           </a:xfrm>
           <a:prstGeom prst="line">
@@ -16001,7 +16017,7 @@
         </p:nvSpPr>
         <p:spPr>
           <a:xfrm>
-            <a:off x="3337560" y="4368271"/>
+            <a:off x="3642595" y="4390236"/>
             <a:ext cx="2028505" cy="155448"/>
           </a:xfrm>
           <a:prstGeom prst="rect">
@@ -16035,7 +16051,7 @@
         </p:nvSpPr>
         <p:spPr>
           <a:xfrm>
-            <a:off x="5457505" y="4349983"/>
+            <a:off x="5762540" y="4371948"/>
             <a:ext cx="658368" cy="146304"/>
           </a:xfrm>
           <a:prstGeom prst="rect">
@@ -16079,7 +16095,7 @@
         </p:nvSpPr>
         <p:spPr>
           <a:xfrm>
-            <a:off x="731520" y="4670023"/>
+            <a:off x="1036555" y="4691988"/>
             <a:ext cx="2468880" cy="164592"/>
           </a:xfrm>
           <a:prstGeom prst="rect">
@@ -16123,7 +16139,7 @@
         </p:nvSpPr>
         <p:spPr>
           <a:xfrm>
-            <a:off x="3337560" y="4770607"/>
+            <a:off x="3642595" y="4792572"/>
             <a:ext cx="2148840" cy="0"/>
           </a:xfrm>
           <a:prstGeom prst="line">
@@ -16153,7 +16169,7 @@
         </p:nvSpPr>
         <p:spPr>
           <a:xfrm>
-            <a:off x="3337560" y="4688311"/>
+            <a:off x="3642595" y="4710276"/>
             <a:ext cx="2046770" cy="155448"/>
           </a:xfrm>
           <a:prstGeom prst="rect">
@@ -16187,7 +16203,7 @@
         </p:nvSpPr>
         <p:spPr>
           <a:xfrm>
-            <a:off x="5475770" y="4670023"/>
+            <a:off x="5780805" y="4691988"/>
             <a:ext cx="658368" cy="146304"/>
           </a:xfrm>
           <a:prstGeom prst="rect">
@@ -16231,7 +16247,7 @@
         </p:nvSpPr>
         <p:spPr>
           <a:xfrm>
-            <a:off x="6537960" y="1325880"/>
+            <a:off x="6693173" y="1350220"/>
             <a:ext cx="2011680" cy="201168"/>
           </a:xfrm>
           <a:prstGeom prst="rect">
@@ -16271,7 +16287,7 @@
         </p:nvSpPr>
         <p:spPr>
           <a:xfrm>
-            <a:off x="6537960" y="1737360"/>
+            <a:off x="6693173" y="1761700"/>
             <a:ext cx="4754880" cy="914400"/>
           </a:xfrm>
           <a:prstGeom prst="rect">
@@ -16303,7 +16319,7 @@
         </p:nvSpPr>
         <p:spPr>
           <a:xfrm>
-            <a:off x="6702552" y="1865376"/>
+            <a:off x="6857765" y="1889716"/>
             <a:ext cx="4389120" cy="164592"/>
           </a:xfrm>
           <a:prstGeom prst="rect">
@@ -16347,7 +16363,7 @@
         </p:nvSpPr>
         <p:spPr>
           <a:xfrm>
-            <a:off x="6702552" y="2130552"/>
+            <a:off x="6857765" y="2154892"/>
             <a:ext cx="4297680" cy="329184"/>
           </a:xfrm>
           <a:prstGeom prst="rect">
@@ -16391,7 +16407,7 @@
         </p:nvSpPr>
         <p:spPr>
           <a:xfrm>
-            <a:off x="6537960" y="2862073"/>
+            <a:off x="6693173" y="2886413"/>
             <a:ext cx="4754880" cy="1173856"/>
           </a:xfrm>
           <a:prstGeom prst="rect">
@@ -16423,7 +16439,7 @@
         </p:nvSpPr>
         <p:spPr>
           <a:xfrm>
-            <a:off x="6702552" y="2986246"/>
+            <a:off x="6857765" y="3010586"/>
             <a:ext cx="4389120" cy="164592"/>
           </a:xfrm>
           <a:prstGeom prst="rect">
@@ -16467,7 +16483,7 @@
         </p:nvSpPr>
         <p:spPr>
           <a:xfrm>
-            <a:off x="6702552" y="3255265"/>
+            <a:off x="6857765" y="3279605"/>
             <a:ext cx="4297680" cy="808095"/>
           </a:xfrm>
           <a:prstGeom prst="rect">
@@ -16541,7 +16557,7 @@
         </p:nvSpPr>
         <p:spPr>
           <a:xfrm>
-            <a:off x="6565627" y="4248140"/>
+            <a:off x="6720840" y="4272480"/>
             <a:ext cx="4754880" cy="914400"/>
           </a:xfrm>
           <a:prstGeom prst="rect">
@@ -16573,7 +16589,7 @@
         </p:nvSpPr>
         <p:spPr>
           <a:xfrm>
-            <a:off x="6730219" y="4376156"/>
+            <a:off x="6885432" y="4400496"/>
             <a:ext cx="4389120" cy="164592"/>
           </a:xfrm>
           <a:prstGeom prst="rect">
@@ -16617,7 +16633,7 @@
         </p:nvSpPr>
         <p:spPr>
           <a:xfrm>
-            <a:off x="6730219" y="4641332"/>
+            <a:off x="6885432" y="4665672"/>
             <a:ext cx="4297680" cy="329184"/>
           </a:xfrm>
           <a:prstGeom prst="rect">
@@ -16756,7 +16772,7 @@
         </p:nvSpPr>
         <p:spPr>
           <a:xfrm>
-            <a:off x="731520" y="2656110"/>
+            <a:off x="1036555" y="2678075"/>
             <a:ext cx="2468880" cy="164592"/>
           </a:xfrm>
           <a:prstGeom prst="rect">
@@ -16819,7 +16835,7 @@
         </p:nvSpPr>
         <p:spPr>
           <a:xfrm>
-            <a:off x="3337560" y="2756694"/>
+            <a:off x="3642595" y="2778659"/>
             <a:ext cx="2148840" cy="0"/>
           </a:xfrm>
           <a:prstGeom prst="line">
@@ -16855,7 +16871,7 @@
         </p:nvSpPr>
         <p:spPr>
           <a:xfrm>
-            <a:off x="3337560" y="2674398"/>
+            <a:off x="3642595" y="2696363"/>
             <a:ext cx="1463629" cy="155448"/>
           </a:xfrm>
           <a:prstGeom prst="rect">
@@ -16895,7 +16911,7 @@
         </p:nvSpPr>
         <p:spPr>
           <a:xfrm>
-            <a:off x="4891949" y="2665257"/>
+            <a:off x="5196984" y="2687222"/>
             <a:ext cx="658368" cy="146304"/>
           </a:xfrm>
           <a:prstGeom prst="rect">
@@ -16947,7 +16963,7 @@
         </p:nvCxnSpPr>
         <p:spPr>
           <a:xfrm>
-            <a:off x="1594512" y="3307205"/>
+            <a:off x="1899547" y="3329170"/>
             <a:ext cx="2688538" cy="0"/>
           </a:xfrm>
           <a:prstGeom prst="line">
@@ -16993,7 +17009,7 @@
         </p:nvCxnSpPr>
         <p:spPr>
           <a:xfrm>
-            <a:off x="1530912" y="4170559"/>
+            <a:off x="1835947" y="4192524"/>
             <a:ext cx="2688538" cy="0"/>
           </a:xfrm>
           <a:prstGeom prst="line">

--- a/Docs/Final_Project_Presentation_Draft.pptx
+++ b/Docs/Final_Project_Presentation_Draft.pptx
@@ -15311,7 +15311,7 @@
                 <a:ea typeface="Aptos Display" pitchFamily="34" charset="-122"/>
                 <a:cs typeface="Calibri" panose="020F0502020204030204" pitchFamily="34" charset="0"/>
               </a:rPr>
-              <a:t>The biggest factor in accuracy was where the model learned its audio knowledge, and the applicability of the model to the task at hand</a:t>
+              <a:t>The biggest factors in accuracy were where the model learned its audio knowledge and the applicability of the model to the task at hand</a:t>
             </a:r>
             <a:endParaRPr lang="en-US" dirty="0">
               <a:solidFill>

--- a/Docs/Final_Project_Presentation_Draft.pptx
+++ b/Docs/Final_Project_Presentation_Draft.pptx
@@ -5,7 +5,7 @@
     <p:sldMasterId id="2147483648" r:id="rId1"/>
   </p:sldMasterIdLst>
   <p:notesMasterIdLst>
-    <p:notesMasterId r:id="rId18"/>
+    <p:notesMasterId r:id="rId17"/>
   </p:notesMasterIdLst>
   <p:sldIdLst>
     <p:sldId id="273" r:id="rId2"/>
@@ -15,15 +15,14 @@
     <p:sldId id="259" r:id="rId6"/>
     <p:sldId id="260" r:id="rId7"/>
     <p:sldId id="271" r:id="rId8"/>
-    <p:sldId id="261" r:id="rId9"/>
-    <p:sldId id="270" r:id="rId10"/>
-    <p:sldId id="262" r:id="rId11"/>
-    <p:sldId id="263" r:id="rId12"/>
-    <p:sldId id="264" r:id="rId13"/>
-    <p:sldId id="265" r:id="rId14"/>
-    <p:sldId id="266" r:id="rId15"/>
-    <p:sldId id="267" r:id="rId16"/>
-    <p:sldId id="268" r:id="rId17"/>
+    <p:sldId id="270" r:id="rId9"/>
+    <p:sldId id="262" r:id="rId10"/>
+    <p:sldId id="263" r:id="rId11"/>
+    <p:sldId id="264" r:id="rId12"/>
+    <p:sldId id="265" r:id="rId13"/>
+    <p:sldId id="266" r:id="rId14"/>
+    <p:sldId id="267" r:id="rId15"/>
+    <p:sldId id="268" r:id="rId16"/>
   </p:sldIdLst>
   <p:sldSz cx="12192000" cy="6858000"/>
   <p:notesSz cx="6858000" cy="12192000"/>
@@ -800,90 +799,6 @@
           <a:bodyPr/>
           <a:lstStyle/>
           <a:p>
-            <a:endParaRPr lang="en-US" dirty="0"/>
-          </a:p>
-        </p:txBody>
-      </p:sp>
-      <p:sp>
-        <p:nvSpPr>
-          <p:cNvPr id="4" name="Slide Number Placeholder 3"/>
-          <p:cNvSpPr>
-            <a:spLocks noGrp="1"/>
-          </p:cNvSpPr>
-          <p:nvPr>
-            <p:ph type="sldNum" sz="quarter" idx="10"/>
-          </p:nvPr>
-        </p:nvSpPr>
-        <p:spPr/>
-        <p:txBody>
-          <a:bodyPr/>
-          <a:lstStyle/>
-          <a:p>
-            <a:fld id="{F7021451-1387-4CA6-816F-3879F97B5CBC}" type="slidenum">
-              <a:rPr lang="en-US"/>
-              <a:t>15</a:t>
-            </a:fld>
-            <a:endParaRPr lang="en-US"/>
-          </a:p>
-        </p:txBody>
-      </p:sp>
-    </p:spTree>
-    <p:extLst>
-      <p:ext uri="{BB962C8B-B14F-4D97-AF65-F5344CB8AC3E}">
-        <p14:creationId xmlns:p14="http://schemas.microsoft.com/office/powerpoint/2010/main" val="1024086991"/>
-      </p:ext>
-    </p:extLst>
-  </p:cSld>
-  <p:clrMapOvr>
-    <a:masterClrMapping/>
-  </p:clrMapOvr>
-</p:notes>
-</file>
-
-<file path=ppt/notesSlides/notesSlide16.xml><?xml version="1.0" encoding="utf-8"?>
-<p:notes xmlns:a="http://schemas.openxmlformats.org/drawingml/2006/main" xmlns:r="http://schemas.openxmlformats.org/officeDocument/2006/relationships" xmlns:p="http://schemas.openxmlformats.org/presentationml/2006/main">
-  <p:cSld>
-    <p:spTree>
-      <p:nvGrpSpPr>
-        <p:cNvPr id="1" name=""/>
-        <p:cNvGrpSpPr/>
-        <p:nvPr/>
-      </p:nvGrpSpPr>
-      <p:grpSpPr>
-        <a:xfrm>
-          <a:off x="0" y="0"/>
-          <a:ext cx="0" cy="0"/>
-          <a:chOff x="0" y="0"/>
-          <a:chExt cx="0" cy="0"/>
-        </a:xfrm>
-      </p:grpSpPr>
-      <p:sp>
-        <p:nvSpPr>
-          <p:cNvPr id="2" name="Slide Image Placeholder 1"/>
-          <p:cNvSpPr>
-            <a:spLocks noGrp="1" noRot="1" noChangeAspect="1"/>
-          </p:cNvSpPr>
-          <p:nvPr>
-            <p:ph type="sldImg"/>
-          </p:nvPr>
-        </p:nvSpPr>
-        <p:spPr/>
-      </p:sp>
-      <p:sp>
-        <p:nvSpPr>
-          <p:cNvPr id="3" name="Notes Placeholder 2"/>
-          <p:cNvSpPr>
-            <a:spLocks noGrp="1"/>
-          </p:cNvSpPr>
-          <p:nvPr>
-            <p:ph type="body" idx="1"/>
-          </p:nvPr>
-        </p:nvSpPr>
-        <p:spPr/>
-        <p:txBody>
-          <a:bodyPr/>
-          <a:lstStyle/>
-          <a:p>
             <a:pPr rtl="0">
               <a:spcBef>
                 <a:spcPts val="1200"/>
@@ -1072,7 +987,7 @@
           <a:p>
             <a:fld id="{F7021451-1387-4CA6-816F-3879F97B5CBC}" type="slidenum">
               <a:rPr lang="en-US"/>
-              <a:t>16</a:t>
+              <a:t>15</a:t>
             </a:fld>
             <a:endParaRPr lang="en-US"/>
           </a:p>
@@ -1908,90 +1823,6 @@
   <p:cSld>
     <p:spTree>
       <p:nvGrpSpPr>
-        <p:cNvPr id="1" name=""/>
-        <p:cNvGrpSpPr/>
-        <p:nvPr/>
-      </p:nvGrpSpPr>
-      <p:grpSpPr>
-        <a:xfrm>
-          <a:off x="0" y="0"/>
-          <a:ext cx="0" cy="0"/>
-          <a:chOff x="0" y="0"/>
-          <a:chExt cx="0" cy="0"/>
-        </a:xfrm>
-      </p:grpSpPr>
-      <p:sp>
-        <p:nvSpPr>
-          <p:cNvPr id="2" name="Slide Image Placeholder 1"/>
-          <p:cNvSpPr>
-            <a:spLocks noGrp="1" noRot="1" noChangeAspect="1"/>
-          </p:cNvSpPr>
-          <p:nvPr>
-            <p:ph type="sldImg"/>
-          </p:nvPr>
-        </p:nvSpPr>
-        <p:spPr/>
-      </p:sp>
-      <p:sp>
-        <p:nvSpPr>
-          <p:cNvPr id="3" name="Notes Placeholder 2"/>
-          <p:cNvSpPr>
-            <a:spLocks noGrp="1"/>
-          </p:cNvSpPr>
-          <p:nvPr>
-            <p:ph type="body" idx="1"/>
-          </p:nvPr>
-        </p:nvSpPr>
-        <p:spPr/>
-        <p:txBody>
-          <a:bodyPr/>
-          <a:lstStyle/>
-          <a:p>
-            <a:endParaRPr lang="en-US" dirty="0"/>
-          </a:p>
-        </p:txBody>
-      </p:sp>
-      <p:sp>
-        <p:nvSpPr>
-          <p:cNvPr id="4" name="Slide Number Placeholder 3"/>
-          <p:cNvSpPr>
-            <a:spLocks noGrp="1"/>
-          </p:cNvSpPr>
-          <p:nvPr>
-            <p:ph type="sldNum" sz="quarter" idx="10"/>
-          </p:nvPr>
-        </p:nvSpPr>
-        <p:spPr/>
-        <p:txBody>
-          <a:bodyPr/>
-          <a:lstStyle/>
-          <a:p>
-            <a:fld id="{F7021451-1387-4CA6-816F-3879F97B5CBC}" type="slidenum">
-              <a:rPr lang="en-US"/>
-              <a:t>8</a:t>
-            </a:fld>
-            <a:endParaRPr lang="en-US"/>
-          </a:p>
-        </p:txBody>
-      </p:sp>
-    </p:spTree>
-    <p:extLst>
-      <p:ext uri="{BB962C8B-B14F-4D97-AF65-F5344CB8AC3E}">
-        <p14:creationId xmlns:p14="http://schemas.microsoft.com/office/powerpoint/2010/main" val="1024086991"/>
-      </p:ext>
-    </p:extLst>
-  </p:cSld>
-  <p:clrMapOvr>
-    <a:masterClrMapping/>
-  </p:clrMapOvr>
-</p:notes>
-</file>
-
-<file path=ppt/notesSlides/notesSlide9.xml><?xml version="1.0" encoding="utf-8"?>
-<p:notes xmlns:a="http://schemas.openxmlformats.org/drawingml/2006/main" xmlns:r="http://schemas.openxmlformats.org/officeDocument/2006/relationships" xmlns:p="http://schemas.openxmlformats.org/presentationml/2006/main">
-  <p:cSld>
-    <p:spTree>
-      <p:nvGrpSpPr>
         <p:cNvPr id="1" name="">
           <a:extLst>
             <a:ext uri="{FF2B5EF4-FFF2-40B4-BE49-F238E27FC236}">
@@ -2076,7 +1907,7 @@
           <a:p>
             <a:fld id="{F7021451-1387-4CA6-816F-3879F97B5CBC}" type="slidenum">
               <a:rPr lang="en-US"/>
-              <a:t>9</a:t>
+              <a:t>8</a:t>
             </a:fld>
             <a:endParaRPr lang="en-US"/>
           </a:p>
@@ -2086,6 +1917,90 @@
     <p:extLst>
       <p:ext uri="{BB962C8B-B14F-4D97-AF65-F5344CB8AC3E}">
         <p14:creationId xmlns:p14="http://schemas.microsoft.com/office/powerpoint/2010/main" val="1136316266"/>
+      </p:ext>
+    </p:extLst>
+  </p:cSld>
+  <p:clrMapOvr>
+    <a:masterClrMapping/>
+  </p:clrMapOvr>
+</p:notes>
+</file>
+
+<file path=ppt/notesSlides/notesSlide9.xml><?xml version="1.0" encoding="utf-8"?>
+<p:notes xmlns:a="http://schemas.openxmlformats.org/drawingml/2006/main" xmlns:r="http://schemas.openxmlformats.org/officeDocument/2006/relationships" xmlns:p="http://schemas.openxmlformats.org/presentationml/2006/main">
+  <p:cSld>
+    <p:spTree>
+      <p:nvGrpSpPr>
+        <p:cNvPr id="1" name=""/>
+        <p:cNvGrpSpPr/>
+        <p:nvPr/>
+      </p:nvGrpSpPr>
+      <p:grpSpPr>
+        <a:xfrm>
+          <a:off x="0" y="0"/>
+          <a:ext cx="0" cy="0"/>
+          <a:chOff x="0" y="0"/>
+          <a:chExt cx="0" cy="0"/>
+        </a:xfrm>
+      </p:grpSpPr>
+      <p:sp>
+        <p:nvSpPr>
+          <p:cNvPr id="2" name="Slide Image Placeholder 1"/>
+          <p:cNvSpPr>
+            <a:spLocks noGrp="1" noRot="1" noChangeAspect="1"/>
+          </p:cNvSpPr>
+          <p:nvPr>
+            <p:ph type="sldImg"/>
+          </p:nvPr>
+        </p:nvSpPr>
+        <p:spPr/>
+      </p:sp>
+      <p:sp>
+        <p:nvSpPr>
+          <p:cNvPr id="3" name="Notes Placeholder 2"/>
+          <p:cNvSpPr>
+            <a:spLocks noGrp="1"/>
+          </p:cNvSpPr>
+          <p:nvPr>
+            <p:ph type="body" idx="1"/>
+          </p:nvPr>
+        </p:nvSpPr>
+        <p:spPr/>
+        <p:txBody>
+          <a:bodyPr/>
+          <a:lstStyle/>
+          <a:p>
+            <a:endParaRPr lang="en-US" dirty="0"/>
+          </a:p>
+        </p:txBody>
+      </p:sp>
+      <p:sp>
+        <p:nvSpPr>
+          <p:cNvPr id="4" name="Slide Number Placeholder 3"/>
+          <p:cNvSpPr>
+            <a:spLocks noGrp="1"/>
+          </p:cNvSpPr>
+          <p:nvPr>
+            <p:ph type="sldNum" sz="quarter" idx="10"/>
+          </p:nvPr>
+        </p:nvSpPr>
+        <p:spPr/>
+        <p:txBody>
+          <a:bodyPr/>
+          <a:lstStyle/>
+          <a:p>
+            <a:fld id="{F7021451-1387-4CA6-816F-3879F97B5CBC}" type="slidenum">
+              <a:rPr lang="en-US"/>
+              <a:t>9</a:t>
+            </a:fld>
+            <a:endParaRPr lang="en-US"/>
+          </a:p>
+        </p:txBody>
+      </p:sp>
+    </p:spTree>
+    <p:extLst>
+      <p:ext uri="{BB962C8B-B14F-4D97-AF65-F5344CB8AC3E}">
+        <p14:creationId xmlns:p14="http://schemas.microsoft.com/office/powerpoint/2010/main" val="1024086991"/>
       </p:ext>
     </p:extLst>
   </p:cSld>
@@ -2683,7 +2598,7 @@
                 </a:solidFill>
                 <a:latin typeface="Aptos" pitchFamily="34" charset="0"/>
               </a:rPr>
-              <a:t>Jonathan Lloyd (JLS384)</a:t>
+              <a:t>Jonathan Lloyd (JSL384)</a:t>
             </a:r>
             <a:endParaRPr lang="en-US" dirty="0">
               <a:solidFill>
@@ -2878,1196 +2793,6 @@
 </file>
 
 <file path=ppt/slides/slide10.xml><?xml version="1.0" encoding="utf-8"?>
-<p:sld xmlns:a="http://schemas.openxmlformats.org/drawingml/2006/main" xmlns:r="http://schemas.openxmlformats.org/officeDocument/2006/relationships" xmlns:p="http://schemas.openxmlformats.org/presentationml/2006/main">
-  <p:cSld name="Slide 7">
-    <p:bg>
-      <p:bgPr>
-        <a:solidFill>
-          <a:srgbClr val="F7F5EF"/>
-        </a:solidFill>
-        <a:effectLst/>
-      </p:bgPr>
-    </p:bg>
-    <p:spTree>
-      <p:nvGrpSpPr>
-        <p:cNvPr id="1" name=""/>
-        <p:cNvGrpSpPr/>
-        <p:nvPr/>
-      </p:nvGrpSpPr>
-      <p:grpSpPr>
-        <a:xfrm>
-          <a:off x="0" y="0"/>
-          <a:ext cx="0" cy="0"/>
-          <a:chOff x="0" y="0"/>
-          <a:chExt cx="0" cy="0"/>
-        </a:xfrm>
-      </p:grpSpPr>
-      <p:sp>
-        <p:nvSpPr>
-          <p:cNvPr id="7" name="Shape 22">
-            <a:extLst>
-              <a:ext uri="{FF2B5EF4-FFF2-40B4-BE49-F238E27FC236}">
-                <a16:creationId xmlns:a16="http://schemas.microsoft.com/office/drawing/2014/main" id="{7ACFBABF-3D5C-09AD-F3B0-125485337F99}"/>
-              </a:ext>
-            </a:extLst>
-          </p:cNvPr>
-          <p:cNvSpPr/>
-          <p:nvPr/>
-        </p:nvSpPr>
-        <p:spPr>
-          <a:xfrm>
-            <a:off x="7904546" y="750102"/>
-            <a:ext cx="1809206" cy="295381"/>
-          </a:xfrm>
-          <a:prstGeom prst="chevron">
-            <a:avLst/>
-          </a:prstGeom>
-          <a:solidFill>
-            <a:srgbClr val="17677D"/>
-          </a:solidFill>
-          <a:ln w="12700">
-            <a:solidFill>
-              <a:srgbClr val="17677D">
-                <a:alpha val="0"/>
-              </a:srgbClr>
-            </a:solidFill>
-            <a:prstDash val="solid"/>
-          </a:ln>
-        </p:spPr>
-        <p:txBody>
-          <a:bodyPr/>
-          <a:lstStyle/>
-          <a:p>
-            <a:endParaRPr lang="en-US"/>
-          </a:p>
-        </p:txBody>
-      </p:sp>
-      <p:sp>
-        <p:nvSpPr>
-          <p:cNvPr id="8" name="Shape 25">
-            <a:extLst>
-              <a:ext uri="{FF2B5EF4-FFF2-40B4-BE49-F238E27FC236}">
-                <a16:creationId xmlns:a16="http://schemas.microsoft.com/office/drawing/2014/main" id="{51526EBD-33F1-B231-E296-C457BDC10BA7}"/>
-              </a:ext>
-            </a:extLst>
-          </p:cNvPr>
-          <p:cNvSpPr/>
-          <p:nvPr/>
-        </p:nvSpPr>
-        <p:spPr>
-          <a:xfrm>
-            <a:off x="9550658" y="750101"/>
-            <a:ext cx="1755200" cy="295381"/>
-          </a:xfrm>
-          <a:prstGeom prst="chevron">
-            <a:avLst/>
-          </a:prstGeom>
-          <a:solidFill>
-            <a:srgbClr val="D7DDE0">
-              <a:alpha val="90000"/>
-            </a:srgbClr>
-          </a:solidFill>
-          <a:ln w="12700">
-            <a:solidFill>
-              <a:srgbClr val="F7F5EF"/>
-            </a:solidFill>
-            <a:prstDash val="solid"/>
-          </a:ln>
-        </p:spPr>
-        <p:txBody>
-          <a:bodyPr/>
-          <a:lstStyle/>
-          <a:p>
-            <a:endParaRPr lang="en-US" sz="1100"/>
-          </a:p>
-        </p:txBody>
-      </p:sp>
-      <p:sp>
-        <p:nvSpPr>
-          <p:cNvPr id="2" name="Text 0"/>
-          <p:cNvSpPr/>
-          <p:nvPr/>
-        </p:nvSpPr>
-        <p:spPr>
-          <a:xfrm>
-            <a:off x="594360" y="310896"/>
-            <a:ext cx="4114800" cy="201168"/>
-          </a:xfrm>
-          <a:prstGeom prst="rect">
-            <a:avLst/>
-          </a:prstGeom>
-          <a:noFill/>
-          <a:ln/>
-        </p:spPr>
-        <p:txBody>
-          <a:bodyPr wrap="square" lIns="0" tIns="0" rIns="0" bIns="0" rtlCol="0" anchor="t">
-            <a:normAutofit/>
-          </a:bodyPr>
-          <a:lstStyle/>
-          <a:p>
-            <a:pPr marL="0" indent="0" algn="l">
-              <a:lnSpc>
-                <a:spcPct val="90000"/>
-              </a:lnSpc>
-              <a:buNone/>
-            </a:pPr>
-            <a:r>
-              <a:rPr lang="en-US" sz="880" b="1" dirty="0">
-                <a:solidFill>
-                  <a:srgbClr val="17677D"/>
-                </a:solidFill>
-                <a:latin typeface="Aptos" pitchFamily="34" charset="0"/>
-                <a:ea typeface="Aptos" pitchFamily="34" charset="-122"/>
-                <a:cs typeface="Aptos" pitchFamily="34" charset="-120"/>
-              </a:rPr>
-              <a:t>SECOND TECHNICAL ERA</a:t>
-            </a:r>
-            <a:endParaRPr lang="en-US" sz="880" dirty="0"/>
-          </a:p>
-        </p:txBody>
-      </p:sp>
-      <p:sp>
-        <p:nvSpPr>
-          <p:cNvPr id="3" name="Text 1"/>
-          <p:cNvSpPr/>
-          <p:nvPr/>
-        </p:nvSpPr>
-        <p:spPr>
-          <a:xfrm>
-            <a:off x="566928" y="512064"/>
-            <a:ext cx="5657347" cy="502920"/>
-          </a:xfrm>
-          <a:prstGeom prst="rect">
-            <a:avLst/>
-          </a:prstGeom>
-          <a:noFill/>
-          <a:ln/>
-        </p:spPr>
-        <p:txBody>
-          <a:bodyPr wrap="square" lIns="0" tIns="0" rIns="0" bIns="0" rtlCol="0" anchor="t">
-            <a:normAutofit fontScale="85000" lnSpcReduction="20000"/>
-          </a:bodyPr>
-          <a:lstStyle/>
-          <a:p>
-            <a:pPr marL="0" indent="0" algn="l">
-              <a:lnSpc>
-                <a:spcPct val="90000"/>
-              </a:lnSpc>
-              <a:buNone/>
-            </a:pPr>
-            <a:r>
-              <a:rPr lang="en-US" sz="2600" b="1" dirty="0">
-                <a:solidFill>
-                  <a:srgbClr val="1F2528"/>
-                </a:solidFill>
-                <a:latin typeface="Aptos Display" pitchFamily="34" charset="0"/>
-                <a:ea typeface="Aptos Display" pitchFamily="34" charset="-122"/>
-                <a:cs typeface="Aptos Display" pitchFamily="34" charset="-120"/>
-              </a:rPr>
-              <a:t>Era shift: transfer learning with pretrained CNN models</a:t>
-            </a:r>
-            <a:endParaRPr lang="en-US" sz="2600" dirty="0"/>
-          </a:p>
-        </p:txBody>
-      </p:sp>
-      <p:sp>
-        <p:nvSpPr>
-          <p:cNvPr id="4" name="Shape 2"/>
-          <p:cNvSpPr/>
-          <p:nvPr/>
-        </p:nvSpPr>
-        <p:spPr>
-          <a:xfrm>
-            <a:off x="566928" y="1078992"/>
-            <a:ext cx="11018520" cy="0"/>
-          </a:xfrm>
-          <a:prstGeom prst="line">
-            <a:avLst/>
-          </a:prstGeom>
-          <a:noFill/>
-          <a:ln w="9525">
-            <a:solidFill>
-              <a:srgbClr val="D8D4C8"/>
-            </a:solidFill>
-            <a:prstDash val="solid"/>
-          </a:ln>
-        </p:spPr>
-        <p:txBody>
-          <a:bodyPr/>
-          <a:lstStyle/>
-          <a:p>
-            <a:endParaRPr lang="en-US"/>
-          </a:p>
-        </p:txBody>
-      </p:sp>
-      <p:sp>
-        <p:nvSpPr>
-          <p:cNvPr id="11" name="Text 9"/>
-          <p:cNvSpPr/>
-          <p:nvPr/>
-        </p:nvSpPr>
-        <p:spPr>
-          <a:xfrm>
-            <a:off x="822960" y="1371600"/>
-            <a:ext cx="822960" cy="182880"/>
-          </a:xfrm>
-          <a:prstGeom prst="rect">
-            <a:avLst/>
-          </a:prstGeom>
-          <a:noFill/>
-          <a:ln/>
-        </p:spPr>
-        <p:txBody>
-          <a:bodyPr wrap="square" lIns="0" tIns="0" rIns="0" bIns="0" rtlCol="0" anchor="t">
-            <a:normAutofit/>
-          </a:bodyPr>
-          <a:lstStyle/>
-          <a:p>
-            <a:pPr marL="0" indent="0" algn="l">
-              <a:lnSpc>
-                <a:spcPct val="90000"/>
-              </a:lnSpc>
-              <a:buNone/>
-            </a:pPr>
-            <a:r>
-              <a:rPr lang="en-US" sz="1000" b="1" dirty="0">
-                <a:solidFill>
-                  <a:srgbClr val="17677D"/>
-                </a:solidFill>
-                <a:latin typeface="Aptos" pitchFamily="34" charset="0"/>
-                <a:ea typeface="Aptos" pitchFamily="34" charset="-122"/>
-                <a:cs typeface="Aptos" pitchFamily="34" charset="-120"/>
-              </a:rPr>
-              <a:t>Shift</a:t>
-            </a:r>
-            <a:endParaRPr lang="en-US" sz="1000" dirty="0"/>
-          </a:p>
-        </p:txBody>
-      </p:sp>
-      <p:sp>
-        <p:nvSpPr>
-          <p:cNvPr id="12" name="Text 10"/>
-          <p:cNvSpPr/>
-          <p:nvPr/>
-        </p:nvSpPr>
-        <p:spPr>
-          <a:xfrm>
-            <a:off x="822960" y="1664208"/>
-            <a:ext cx="5486400" cy="438912"/>
-          </a:xfrm>
-          <a:prstGeom prst="rect">
-            <a:avLst/>
-          </a:prstGeom>
-          <a:noFill/>
-          <a:ln/>
-        </p:spPr>
-        <p:txBody>
-          <a:bodyPr wrap="square" lIns="0" tIns="0" rIns="0" bIns="0" rtlCol="0" anchor="t">
-            <a:normAutofit fontScale="85000" lnSpcReduction="10000"/>
-          </a:bodyPr>
-          <a:lstStyle/>
-          <a:p>
-            <a:pPr marL="0" indent="0" algn="l">
-              <a:lnSpc>
-                <a:spcPct val="90000"/>
-              </a:lnSpc>
-              <a:buNone/>
-            </a:pPr>
-            <a:r>
-              <a:rPr lang="en-US" sz="2400" b="1" dirty="0">
-                <a:solidFill>
-                  <a:srgbClr val="1F2528"/>
-                </a:solidFill>
-                <a:latin typeface="Aptos Display" pitchFamily="34" charset="0"/>
-                <a:ea typeface="Aptos Display" pitchFamily="34" charset="-122"/>
-                <a:cs typeface="Aptos Display" pitchFamily="34" charset="-120"/>
-              </a:rPr>
-              <a:t>Learn the representation elsewhere. Adapt it here.</a:t>
-            </a:r>
-            <a:endParaRPr lang="en-US" sz="2400" dirty="0"/>
-          </a:p>
-        </p:txBody>
-      </p:sp>
-      <p:sp>
-        <p:nvSpPr>
-          <p:cNvPr id="13" name="Shape 11"/>
-          <p:cNvSpPr/>
-          <p:nvPr/>
-        </p:nvSpPr>
-        <p:spPr>
-          <a:xfrm>
-            <a:off x="914400" y="2743200"/>
-            <a:ext cx="2743200" cy="1005840"/>
-          </a:xfrm>
-          <a:prstGeom prst="rect">
-            <a:avLst/>
-          </a:prstGeom>
-          <a:solidFill>
-            <a:srgbClr val="FFFFFF"/>
-          </a:solidFill>
-          <a:ln w="15240">
-            <a:solidFill>
-              <a:srgbClr val="17677D"/>
-            </a:solidFill>
-            <a:prstDash val="solid"/>
-          </a:ln>
-        </p:spPr>
-        <p:txBody>
-          <a:bodyPr/>
-          <a:lstStyle/>
-          <a:p>
-            <a:endParaRPr lang="en-US"/>
-          </a:p>
-        </p:txBody>
-      </p:sp>
-      <p:sp>
-        <p:nvSpPr>
-          <p:cNvPr id="14" name="Text 12"/>
-          <p:cNvSpPr/>
-          <p:nvPr/>
-        </p:nvSpPr>
-        <p:spPr>
-          <a:xfrm>
-            <a:off x="1097280" y="2971800"/>
-            <a:ext cx="2377440" cy="182880"/>
-          </a:xfrm>
-          <a:prstGeom prst="rect">
-            <a:avLst/>
-          </a:prstGeom>
-          <a:noFill/>
-          <a:ln/>
-        </p:spPr>
-        <p:txBody>
-          <a:bodyPr wrap="square" lIns="0" tIns="0" rIns="0" bIns="0" rtlCol="0" anchor="t">
-            <a:normAutofit lnSpcReduction="10000"/>
-          </a:bodyPr>
-          <a:lstStyle/>
-          <a:p>
-            <a:pPr marL="0" indent="0" algn="ctr">
-              <a:lnSpc>
-                <a:spcPct val="90000"/>
-              </a:lnSpc>
-              <a:buNone/>
-            </a:pPr>
-            <a:r>
-              <a:rPr lang="en-US" sz="1350" b="1" dirty="0">
-                <a:solidFill>
-                  <a:srgbClr val="17677D"/>
-                </a:solidFill>
-                <a:latin typeface="Aptos" pitchFamily="34" charset="0"/>
-                <a:ea typeface="Aptos" pitchFamily="34" charset="-122"/>
-                <a:cs typeface="Aptos" pitchFamily="34" charset="-120"/>
-              </a:rPr>
-              <a:t>Large audio datasets</a:t>
-            </a:r>
-            <a:endParaRPr lang="en-US" sz="1350" dirty="0"/>
-          </a:p>
-        </p:txBody>
-      </p:sp>
-      <p:sp>
-        <p:nvSpPr>
-          <p:cNvPr id="15" name="Text 13"/>
-          <p:cNvSpPr/>
-          <p:nvPr/>
-        </p:nvSpPr>
-        <p:spPr>
-          <a:xfrm>
-            <a:off x="1097280" y="3246120"/>
-            <a:ext cx="2377440" cy="146304"/>
-          </a:xfrm>
-          <a:prstGeom prst="rect">
-            <a:avLst/>
-          </a:prstGeom>
-          <a:noFill/>
-          <a:ln/>
-        </p:spPr>
-        <p:txBody>
-          <a:bodyPr wrap="square" lIns="0" tIns="0" rIns="0" bIns="0" rtlCol="0" anchor="t">
-            <a:normAutofit/>
-          </a:bodyPr>
-          <a:lstStyle/>
-          <a:p>
-            <a:pPr marL="0" indent="0" algn="ctr">
-              <a:lnSpc>
-                <a:spcPct val="90000"/>
-              </a:lnSpc>
-              <a:buNone/>
-            </a:pPr>
-            <a:r>
-              <a:rPr lang="en-US" sz="850" dirty="0">
-                <a:solidFill>
-                  <a:srgbClr val="6B7176"/>
-                </a:solidFill>
-                <a:latin typeface="Aptos" pitchFamily="34" charset="0"/>
-                <a:ea typeface="Aptos" pitchFamily="34" charset="-122"/>
-                <a:cs typeface="Aptos" pitchFamily="34" charset="-120"/>
-              </a:rPr>
-              <a:t>pretraining</a:t>
-            </a:r>
-            <a:endParaRPr lang="en-US" sz="850" dirty="0"/>
-          </a:p>
-        </p:txBody>
-      </p:sp>
-      <p:sp>
-        <p:nvSpPr>
-          <p:cNvPr id="16" name="Shape 14"/>
-          <p:cNvSpPr/>
-          <p:nvPr/>
-        </p:nvSpPr>
-        <p:spPr>
-          <a:xfrm>
-            <a:off x="3886200" y="3246120"/>
-            <a:ext cx="1069848" cy="0"/>
-          </a:xfrm>
-          <a:prstGeom prst="line">
-            <a:avLst/>
-          </a:prstGeom>
-          <a:noFill/>
-          <a:ln w="19050">
-            <a:solidFill>
-              <a:srgbClr val="BFC6C8"/>
-            </a:solidFill>
-            <a:prstDash val="solid"/>
-            <a:tailEnd type="triangle"/>
-          </a:ln>
-        </p:spPr>
-        <p:txBody>
-          <a:bodyPr/>
-          <a:lstStyle/>
-          <a:p>
-            <a:endParaRPr lang="en-US"/>
-          </a:p>
-        </p:txBody>
-      </p:sp>
-      <p:sp>
-        <p:nvSpPr>
-          <p:cNvPr id="17" name="Shape 15"/>
-          <p:cNvSpPr/>
-          <p:nvPr/>
-        </p:nvSpPr>
-        <p:spPr>
-          <a:xfrm>
-            <a:off x="5138928" y="2743200"/>
-            <a:ext cx="2148840" cy="1005840"/>
-          </a:xfrm>
-          <a:prstGeom prst="rect">
-            <a:avLst/>
-          </a:prstGeom>
-          <a:solidFill>
-            <a:srgbClr val="FDFDFB"/>
-          </a:solidFill>
-          <a:ln w="10160">
-            <a:solidFill>
-              <a:srgbClr val="17677D"/>
-            </a:solidFill>
-            <a:prstDash val="solid"/>
-          </a:ln>
-        </p:spPr>
-        <p:txBody>
-          <a:bodyPr/>
-          <a:lstStyle/>
-          <a:p>
-            <a:endParaRPr lang="en-US"/>
-          </a:p>
-        </p:txBody>
-      </p:sp>
-      <p:sp>
-        <p:nvSpPr>
-          <p:cNvPr id="18" name="Text 16"/>
-          <p:cNvSpPr/>
-          <p:nvPr/>
-        </p:nvSpPr>
-        <p:spPr>
-          <a:xfrm>
-            <a:off x="5212080" y="3172968"/>
-            <a:ext cx="2002536" cy="164592"/>
-          </a:xfrm>
-          <a:prstGeom prst="rect">
-            <a:avLst/>
-          </a:prstGeom>
-          <a:noFill/>
-          <a:ln/>
-        </p:spPr>
-        <p:txBody>
-          <a:bodyPr wrap="square" lIns="0" tIns="0" rIns="0" bIns="0" rtlCol="0" anchor="ctr">
-            <a:normAutofit fontScale="62500" lnSpcReduction="20000"/>
-          </a:bodyPr>
-          <a:lstStyle/>
-          <a:p>
-            <a:pPr marL="0" indent="0" algn="ctr">
-              <a:lnSpc>
-                <a:spcPct val="90000"/>
-              </a:lnSpc>
-              <a:buNone/>
-            </a:pPr>
-            <a:r>
-              <a:rPr lang="en-US" sz="1100" dirty="0">
-                <a:solidFill>
-                  <a:srgbClr val="1F2528"/>
-                </a:solidFill>
-                <a:latin typeface="Aptos" pitchFamily="34" charset="0"/>
-                <a:ea typeface="Aptos" pitchFamily="34" charset="-122"/>
-                <a:cs typeface="Aptos" pitchFamily="34" charset="-120"/>
-              </a:rPr>
-              <a:t>Pretrained</a:t>
-            </a:r>
-            <a:endParaRPr lang="en-US" sz="1100" dirty="0"/>
-          </a:p>
-          <a:p>
-            <a:pPr marL="0" indent="0" algn="ctr">
-              <a:lnSpc>
-                <a:spcPct val="90000"/>
-              </a:lnSpc>
-              <a:buNone/>
-            </a:pPr>
-            <a:r>
-              <a:rPr lang="en-US" sz="1100" dirty="0">
-                <a:solidFill>
-                  <a:srgbClr val="1F2528"/>
-                </a:solidFill>
-                <a:latin typeface="Aptos" pitchFamily="34" charset="0"/>
-                <a:ea typeface="Aptos" pitchFamily="34" charset="-122"/>
-                <a:cs typeface="Aptos" pitchFamily="34" charset="-120"/>
-              </a:rPr>
-              <a:t>CNN-style encoder</a:t>
-            </a:r>
-            <a:endParaRPr lang="en-US" sz="1100" dirty="0"/>
-          </a:p>
-        </p:txBody>
-      </p:sp>
-      <p:sp>
-        <p:nvSpPr>
-          <p:cNvPr id="19" name="Shape 17"/>
-          <p:cNvSpPr/>
-          <p:nvPr/>
-        </p:nvSpPr>
-        <p:spPr>
-          <a:xfrm>
-            <a:off x="7452360" y="3246120"/>
-            <a:ext cx="1005840" cy="0"/>
-          </a:xfrm>
-          <a:prstGeom prst="line">
-            <a:avLst/>
-          </a:prstGeom>
-          <a:noFill/>
-          <a:ln w="19050">
-            <a:solidFill>
-              <a:srgbClr val="BFC6C8"/>
-            </a:solidFill>
-            <a:prstDash val="solid"/>
-            <a:tailEnd type="triangle"/>
-          </a:ln>
-        </p:spPr>
-        <p:txBody>
-          <a:bodyPr/>
-          <a:lstStyle/>
-          <a:p>
-            <a:endParaRPr lang="en-US"/>
-          </a:p>
-        </p:txBody>
-      </p:sp>
-      <p:sp>
-        <p:nvSpPr>
-          <p:cNvPr id="20" name="Shape 18"/>
-          <p:cNvSpPr/>
-          <p:nvPr/>
-        </p:nvSpPr>
-        <p:spPr>
-          <a:xfrm>
-            <a:off x="8641080" y="2743200"/>
-            <a:ext cx="1920240" cy="1005840"/>
-          </a:xfrm>
-          <a:prstGeom prst="rect">
-            <a:avLst/>
-          </a:prstGeom>
-          <a:solidFill>
-            <a:srgbClr val="FDFDFB"/>
-          </a:solidFill>
-          <a:ln w="10160">
-            <a:solidFill>
-              <a:srgbClr val="BFC6C8"/>
-            </a:solidFill>
-            <a:prstDash val="solid"/>
-          </a:ln>
-        </p:spPr>
-        <p:txBody>
-          <a:bodyPr/>
-          <a:lstStyle/>
-          <a:p>
-            <a:endParaRPr lang="en-US"/>
-          </a:p>
-        </p:txBody>
-      </p:sp>
-      <p:sp>
-        <p:nvSpPr>
-          <p:cNvPr id="21" name="Text 19"/>
-          <p:cNvSpPr/>
-          <p:nvPr/>
-        </p:nvSpPr>
-        <p:spPr>
-          <a:xfrm>
-            <a:off x="8714232" y="3172968"/>
-            <a:ext cx="1773936" cy="164592"/>
-          </a:xfrm>
-          <a:prstGeom prst="rect">
-            <a:avLst/>
-          </a:prstGeom>
-          <a:noFill/>
-          <a:ln/>
-        </p:spPr>
-        <p:txBody>
-          <a:bodyPr wrap="square" lIns="0" tIns="0" rIns="0" bIns="0" rtlCol="0" anchor="ctr">
-            <a:normAutofit fontScale="62500" lnSpcReduction="20000"/>
-          </a:bodyPr>
-          <a:lstStyle/>
-          <a:p>
-            <a:pPr marL="0" indent="0" algn="ctr">
-              <a:lnSpc>
-                <a:spcPct val="90000"/>
-              </a:lnSpc>
-              <a:buNone/>
-            </a:pPr>
-            <a:r>
-              <a:rPr lang="en-US" sz="1100" dirty="0">
-                <a:solidFill>
-                  <a:srgbClr val="1F2528"/>
-                </a:solidFill>
-                <a:latin typeface="Aptos" pitchFamily="34" charset="0"/>
-                <a:ea typeface="Aptos" pitchFamily="34" charset="-122"/>
-                <a:cs typeface="Aptos" pitchFamily="34" charset="-120"/>
-              </a:rPr>
-              <a:t>ESC-50</a:t>
-            </a:r>
-            <a:endParaRPr lang="en-US" sz="1100" dirty="0"/>
-          </a:p>
-          <a:p>
-            <a:pPr marL="0" indent="0" algn="ctr">
-              <a:lnSpc>
-                <a:spcPct val="90000"/>
-              </a:lnSpc>
-              <a:buNone/>
-            </a:pPr>
-            <a:r>
-              <a:rPr lang="en-US" sz="1100" dirty="0">
-                <a:solidFill>
-                  <a:srgbClr val="1F2528"/>
-                </a:solidFill>
-                <a:latin typeface="Aptos" pitchFamily="34" charset="0"/>
-                <a:ea typeface="Aptos" pitchFamily="34" charset="-122"/>
-                <a:cs typeface="Aptos" pitchFamily="34" charset="-120"/>
-              </a:rPr>
-              <a:t>fine-tuning</a:t>
-            </a:r>
-            <a:endParaRPr lang="en-US" sz="1100" dirty="0"/>
-          </a:p>
-        </p:txBody>
-      </p:sp>
-      <p:sp>
-        <p:nvSpPr>
-          <p:cNvPr id="22" name="Text 20"/>
-          <p:cNvSpPr/>
-          <p:nvPr/>
-        </p:nvSpPr>
-        <p:spPr>
-          <a:xfrm>
-            <a:off x="914400" y="4572000"/>
-            <a:ext cx="9509760" cy="1024128"/>
-          </a:xfrm>
-          <a:prstGeom prst="rect">
-            <a:avLst/>
-          </a:prstGeom>
-          <a:noFill/>
-          <a:ln/>
-        </p:spPr>
-        <p:txBody>
-          <a:bodyPr wrap="square" lIns="254" tIns="254" rIns="254" bIns="254" rtlCol="0" anchor="ctr">
-            <a:normAutofit/>
-          </a:bodyPr>
-          <a:lstStyle/>
-          <a:p>
-            <a:r>
-              <a:rPr lang="en-US" sz="1300" dirty="0">
-                <a:solidFill>
-                  <a:srgbClr val="1F2528"/>
-                </a:solidFill>
-                <a:latin typeface="Aptos" pitchFamily="34" charset="0"/>
-                <a:ea typeface="Aptos" pitchFamily="34" charset="-122"/>
-                <a:cs typeface="Aptos" pitchFamily="34" charset="-120"/>
-              </a:rPr>
-              <a:t>ESC-50 is small for learning robust audio features from scratch.</a:t>
-            </a:r>
-            <a:endParaRPr lang="en-US" sz="1300" dirty="0"/>
-          </a:p>
-          <a:p>
-            <a:endParaRPr lang="en-US" sz="1300" dirty="0"/>
-          </a:p>
-          <a:p>
-            <a:r>
-              <a:rPr lang="en-US" sz="1300" dirty="0">
-                <a:solidFill>
-                  <a:srgbClr val="1F2528"/>
-                </a:solidFill>
-                <a:latin typeface="Aptos" pitchFamily="34" charset="0"/>
-                <a:ea typeface="Aptos" pitchFamily="34" charset="-122"/>
-                <a:cs typeface="Aptos" pitchFamily="34" charset="-120"/>
-              </a:rPr>
-              <a:t>Transfer learning imports representations learned from much larger audio datasets.</a:t>
-            </a:r>
-            <a:endParaRPr lang="en-US" sz="1300" dirty="0"/>
-          </a:p>
-          <a:p>
-            <a:endParaRPr lang="en-US" sz="1300" dirty="0"/>
-          </a:p>
-          <a:p>
-            <a:r>
-              <a:rPr lang="en-US" sz="1300" dirty="0">
-                <a:solidFill>
-                  <a:srgbClr val="1F2528"/>
-                </a:solidFill>
-                <a:latin typeface="Aptos" pitchFamily="34" charset="0"/>
-                <a:ea typeface="Aptos" pitchFamily="34" charset="-122"/>
-                <a:cs typeface="Aptos" pitchFamily="34" charset="-120"/>
-              </a:rPr>
-              <a:t>This era tests pretrained CNN-style audio models before transformer-based audio encoders.</a:t>
-            </a:r>
-            <a:endParaRPr lang="en-US" sz="1300" dirty="0"/>
-          </a:p>
-        </p:txBody>
-      </p:sp>
-      <p:sp>
-        <p:nvSpPr>
-          <p:cNvPr id="23" name="Text 21"/>
-          <p:cNvSpPr/>
-          <p:nvPr/>
-        </p:nvSpPr>
-        <p:spPr>
-          <a:xfrm>
-            <a:off x="11064240" y="6473952"/>
-            <a:ext cx="411480" cy="164592"/>
-          </a:xfrm>
-          <a:prstGeom prst="rect">
-            <a:avLst/>
-          </a:prstGeom>
-          <a:noFill/>
-          <a:ln/>
-        </p:spPr>
-        <p:txBody>
-          <a:bodyPr wrap="square" lIns="0" tIns="0" rIns="0" bIns="0" rtlCol="0" anchor="t">
-            <a:normAutofit/>
-          </a:bodyPr>
-          <a:lstStyle/>
-          <a:p>
-            <a:pPr marL="0" indent="0" algn="r">
-              <a:lnSpc>
-                <a:spcPct val="90000"/>
-              </a:lnSpc>
-              <a:buNone/>
-            </a:pPr>
-            <a:r>
-              <a:rPr lang="en-US" sz="750" dirty="0">
-                <a:solidFill>
-                  <a:srgbClr val="6B7176"/>
-                </a:solidFill>
-                <a:latin typeface="Aptos" pitchFamily="34" charset="0"/>
-                <a:ea typeface="Aptos" pitchFamily="34" charset="-122"/>
-                <a:cs typeface="Aptos" pitchFamily="34" charset="-120"/>
-              </a:rPr>
-              <a:t>07</a:t>
-            </a:r>
-            <a:endParaRPr lang="en-US" sz="750" dirty="0"/>
-          </a:p>
-        </p:txBody>
-      </p:sp>
-      <p:pic>
-        <p:nvPicPr>
-          <p:cNvPr id="31" name="Picture 2" descr="Cornell University Logo, symbol, meaning, history, PNG, brand">
-            <a:extLst>
-              <a:ext uri="{FF2B5EF4-FFF2-40B4-BE49-F238E27FC236}">
-                <a16:creationId xmlns:a16="http://schemas.microsoft.com/office/drawing/2014/main" id="{62E0AF86-B513-90EF-C7B7-DDB5A9E396B9}"/>
-              </a:ext>
-            </a:extLst>
-          </p:cNvPr>
-          <p:cNvPicPr>
-            <a:picLocks noChangeAspect="1" noChangeArrowheads="1"/>
-          </p:cNvPicPr>
-          <p:nvPr/>
-        </p:nvPicPr>
-        <p:blipFill rotWithShape="1">
-          <a:blip r:embed="rId3">
-            <a:extLst>
-              <a:ext uri="{28A0092B-C50C-407E-A947-70E740481C1C}">
-                <a14:useLocalDpi xmlns:a14="http://schemas.microsoft.com/office/drawing/2010/main" val="0"/>
-              </a:ext>
-            </a:extLst>
-          </a:blip>
-          <a:srcRect l="15934" r="15589"/>
-          <a:stretch/>
-        </p:blipFill>
-        <p:spPr bwMode="auto">
-          <a:xfrm>
-            <a:off x="11320507" y="147128"/>
-            <a:ext cx="863884" cy="709633"/>
-          </a:xfrm>
-          <a:prstGeom prst="rect">
-            <a:avLst/>
-          </a:prstGeom>
-          <a:noFill/>
-          <a:extLst>
-            <a:ext uri="{909E8E84-426E-40DD-AFC4-6F175D3DCCD1}">
-              <a14:hiddenFill xmlns:a14="http://schemas.microsoft.com/office/drawing/2010/main">
-                <a:solidFill>
-                  <a:srgbClr val="FFFFFF"/>
-                </a:solidFill>
-              </a14:hiddenFill>
-            </a:ext>
-          </a:extLst>
-        </p:spPr>
-      </p:pic>
-      <p:sp>
-        <p:nvSpPr>
-          <p:cNvPr id="32" name="Shape 19">
-            <a:extLst>
-              <a:ext uri="{FF2B5EF4-FFF2-40B4-BE49-F238E27FC236}">
-                <a16:creationId xmlns:a16="http://schemas.microsoft.com/office/drawing/2014/main" id="{260A39BB-675D-9A5C-9111-93699EA456EF}"/>
-              </a:ext>
-            </a:extLst>
-          </p:cNvPr>
-          <p:cNvSpPr/>
-          <p:nvPr/>
-        </p:nvSpPr>
-        <p:spPr>
-          <a:xfrm>
-            <a:off x="6237447" y="751408"/>
-            <a:ext cx="1809206" cy="295381"/>
-          </a:xfrm>
-          <a:prstGeom prst="chevron">
-            <a:avLst/>
-          </a:prstGeom>
-          <a:solidFill>
-            <a:srgbClr val="D7DDE0">
-              <a:alpha val="90000"/>
-            </a:srgbClr>
-          </a:solidFill>
-          <a:ln w="12700">
-            <a:solidFill>
-              <a:srgbClr val="F7F5EF"/>
-            </a:solidFill>
-            <a:prstDash val="solid"/>
-          </a:ln>
-        </p:spPr>
-        <p:txBody>
-          <a:bodyPr/>
-          <a:lstStyle/>
-          <a:p>
-            <a:endParaRPr lang="en-US" sz="1100" dirty="0"/>
-          </a:p>
-        </p:txBody>
-      </p:sp>
-      <p:sp>
-        <p:nvSpPr>
-          <p:cNvPr id="33" name="Text 20">
-            <a:extLst>
-              <a:ext uri="{FF2B5EF4-FFF2-40B4-BE49-F238E27FC236}">
-                <a16:creationId xmlns:a16="http://schemas.microsoft.com/office/drawing/2014/main" id="{BA526180-DF64-53B3-1180-B6DBF5A9B1C8}"/>
-              </a:ext>
-            </a:extLst>
-          </p:cNvPr>
-          <p:cNvSpPr/>
-          <p:nvPr/>
-        </p:nvSpPr>
-        <p:spPr>
-          <a:xfrm>
-            <a:off x="6287692" y="833886"/>
-            <a:ext cx="1597682" cy="75563"/>
-          </a:xfrm>
-          <a:prstGeom prst="rect">
-            <a:avLst/>
-          </a:prstGeom>
-          <a:noFill/>
-          <a:ln/>
-        </p:spPr>
-        <p:txBody>
-          <a:bodyPr wrap="square" lIns="0" tIns="0" rIns="0" bIns="0" rtlCol="0" anchor="t">
-            <a:normAutofit fontScale="92500" lnSpcReduction="20000"/>
-          </a:bodyPr>
-          <a:lstStyle/>
-          <a:p>
-            <a:pPr algn="ctr">
-              <a:lnSpc>
-                <a:spcPct val="90000"/>
-              </a:lnSpc>
-            </a:pPr>
-            <a:r>
-              <a:rPr lang="en-US" sz="700" b="1" dirty="0">
-                <a:solidFill>
-                  <a:srgbClr val="30383D"/>
-                </a:solidFill>
-                <a:latin typeface="Aptos" pitchFamily="34" charset="0"/>
-              </a:rPr>
-              <a:t>Training from scratch</a:t>
-            </a:r>
-          </a:p>
-        </p:txBody>
-      </p:sp>
-      <p:sp>
-        <p:nvSpPr>
-          <p:cNvPr id="34" name="Text 21">
-            <a:extLst>
-              <a:ext uri="{FF2B5EF4-FFF2-40B4-BE49-F238E27FC236}">
-                <a16:creationId xmlns:a16="http://schemas.microsoft.com/office/drawing/2014/main" id="{91AA0ADC-A28C-7C05-372C-FD6A76EC5657}"/>
-              </a:ext>
-            </a:extLst>
-          </p:cNvPr>
-          <p:cNvSpPr/>
-          <p:nvPr/>
-        </p:nvSpPr>
-        <p:spPr>
-          <a:xfrm>
-            <a:off x="6295809" y="928966"/>
-            <a:ext cx="1597682" cy="58389"/>
-          </a:xfrm>
-          <a:prstGeom prst="rect">
-            <a:avLst/>
-          </a:prstGeom>
-          <a:noFill/>
-          <a:ln/>
-        </p:spPr>
-        <p:txBody>
-          <a:bodyPr wrap="square" lIns="0" tIns="0" rIns="0" bIns="0" rtlCol="0" anchor="t">
-            <a:normAutofit fontScale="92500" lnSpcReduction="20000"/>
-          </a:bodyPr>
-          <a:lstStyle/>
-          <a:p>
-            <a:pPr marL="0" indent="0" algn="ctr">
-              <a:lnSpc>
-                <a:spcPct val="90000"/>
-              </a:lnSpc>
-              <a:buNone/>
-            </a:pPr>
-            <a:r>
-              <a:rPr lang="en-US" sz="500" dirty="0" err="1">
-                <a:solidFill>
-                  <a:srgbClr val="6B7176"/>
-                </a:solidFill>
-                <a:latin typeface="Aptos" pitchFamily="34" charset="0"/>
-              </a:rPr>
-              <a:t>Piczak</a:t>
-            </a:r>
-            <a:r>
-              <a:rPr lang="en-US" sz="500" dirty="0">
-                <a:solidFill>
-                  <a:srgbClr val="6B7176"/>
-                </a:solidFill>
-                <a:latin typeface="Aptos" pitchFamily="34" charset="0"/>
-              </a:rPr>
-              <a:t> CNN | Variations | LSTM</a:t>
-            </a:r>
-          </a:p>
-        </p:txBody>
-      </p:sp>
-      <p:sp>
-        <p:nvSpPr>
-          <p:cNvPr id="36" name="Text 23">
-            <a:extLst>
-              <a:ext uri="{FF2B5EF4-FFF2-40B4-BE49-F238E27FC236}">
-                <a16:creationId xmlns:a16="http://schemas.microsoft.com/office/drawing/2014/main" id="{5795C228-2271-C0A9-F5DA-A886FEE6BFCA}"/>
-              </a:ext>
-            </a:extLst>
-          </p:cNvPr>
-          <p:cNvSpPr/>
-          <p:nvPr/>
-        </p:nvSpPr>
-        <p:spPr>
-          <a:xfrm>
-            <a:off x="7976392" y="839252"/>
-            <a:ext cx="1597682" cy="75563"/>
-          </a:xfrm>
-          <a:prstGeom prst="rect">
-            <a:avLst/>
-          </a:prstGeom>
-          <a:noFill/>
-          <a:ln/>
-        </p:spPr>
-        <p:txBody>
-          <a:bodyPr wrap="square" lIns="0" tIns="0" rIns="0" bIns="0" rtlCol="0" anchor="t">
-            <a:normAutofit fontScale="92500" lnSpcReduction="20000"/>
-          </a:bodyPr>
-          <a:lstStyle/>
-          <a:p>
-            <a:pPr algn="ctr">
-              <a:lnSpc>
-                <a:spcPct val="90000"/>
-              </a:lnSpc>
-            </a:pPr>
-            <a:r>
-              <a:rPr lang="en-US" sz="700" b="1" dirty="0">
-                <a:solidFill>
-                  <a:srgbClr val="FFFFFF"/>
-                </a:solidFill>
-                <a:latin typeface="Aptos" pitchFamily="34" charset="0"/>
-              </a:rPr>
-              <a:t>Transfer learning: pretrained CNN</a:t>
-            </a:r>
-          </a:p>
-        </p:txBody>
-      </p:sp>
-      <p:sp>
-        <p:nvSpPr>
-          <p:cNvPr id="39" name="Text 26">
-            <a:extLst>
-              <a:ext uri="{FF2B5EF4-FFF2-40B4-BE49-F238E27FC236}">
-                <a16:creationId xmlns:a16="http://schemas.microsoft.com/office/drawing/2014/main" id="{180CCBB2-1146-638B-A7EE-280D19E1094A}"/>
-              </a:ext>
-            </a:extLst>
-          </p:cNvPr>
-          <p:cNvSpPr/>
-          <p:nvPr/>
-        </p:nvSpPr>
-        <p:spPr>
-          <a:xfrm>
-            <a:off x="9657605" y="848441"/>
-            <a:ext cx="1597682" cy="75563"/>
-          </a:xfrm>
-          <a:prstGeom prst="rect">
-            <a:avLst/>
-          </a:prstGeom>
-          <a:noFill/>
-          <a:ln/>
-        </p:spPr>
-        <p:txBody>
-          <a:bodyPr wrap="square" lIns="0" tIns="0" rIns="0" bIns="0" rtlCol="0" anchor="t">
-            <a:normAutofit fontScale="92500" lnSpcReduction="20000"/>
-          </a:bodyPr>
-          <a:lstStyle/>
-          <a:p>
-            <a:pPr marL="0" indent="0" algn="ctr">
-              <a:lnSpc>
-                <a:spcPct val="90000"/>
-              </a:lnSpc>
-              <a:buNone/>
-            </a:pPr>
-            <a:r>
-              <a:rPr lang="en-US" sz="700" b="1" dirty="0">
-                <a:solidFill>
-                  <a:srgbClr val="30383D"/>
-                </a:solidFill>
-                <a:latin typeface="Aptos" pitchFamily="34" charset="0"/>
-                <a:ea typeface="Aptos" pitchFamily="34" charset="-122"/>
-                <a:cs typeface="Aptos" pitchFamily="34" charset="-120"/>
-              </a:rPr>
-              <a:t>Transfer learning: pretrained transformers</a:t>
-            </a:r>
-            <a:endParaRPr lang="en-US" sz="700" dirty="0"/>
-          </a:p>
-        </p:txBody>
-      </p:sp>
-      <p:sp>
-        <p:nvSpPr>
-          <p:cNvPr id="40" name="Text 27">
-            <a:extLst>
-              <a:ext uri="{FF2B5EF4-FFF2-40B4-BE49-F238E27FC236}">
-                <a16:creationId xmlns:a16="http://schemas.microsoft.com/office/drawing/2014/main" id="{3FEF8C9C-411D-2FBC-9DE3-A476A096BB75}"/>
-              </a:ext>
-            </a:extLst>
-          </p:cNvPr>
-          <p:cNvSpPr/>
-          <p:nvPr/>
-        </p:nvSpPr>
-        <p:spPr>
-          <a:xfrm>
-            <a:off x="9657605" y="944489"/>
-            <a:ext cx="1662902" cy="107931"/>
-          </a:xfrm>
-          <a:prstGeom prst="rect">
-            <a:avLst/>
-          </a:prstGeom>
-          <a:noFill/>
-          <a:ln/>
-        </p:spPr>
-        <p:txBody>
-          <a:bodyPr wrap="square" lIns="0" tIns="0" rIns="0" bIns="0" rtlCol="0" anchor="t">
-            <a:normAutofit/>
-          </a:bodyPr>
-          <a:lstStyle/>
-          <a:p>
-            <a:pPr marL="0" indent="0" algn="ctr">
-              <a:lnSpc>
-                <a:spcPct val="90000"/>
-              </a:lnSpc>
-              <a:buNone/>
-            </a:pPr>
-            <a:r>
-              <a:rPr lang="en-US" sz="500" dirty="0">
-                <a:solidFill>
-                  <a:srgbClr val="6B7176"/>
-                </a:solidFill>
-                <a:latin typeface="Aptos" pitchFamily="34" charset="0"/>
-                <a:ea typeface="Aptos" pitchFamily="34" charset="-122"/>
-                <a:cs typeface="Aptos" pitchFamily="34" charset="-120"/>
-              </a:rPr>
-              <a:t>AST | BEATs</a:t>
-            </a:r>
-            <a:endParaRPr lang="en-US" sz="500" dirty="0"/>
-          </a:p>
-        </p:txBody>
-      </p:sp>
-      <p:sp>
-        <p:nvSpPr>
-          <p:cNvPr id="10" name="Text 24">
-            <a:extLst>
-              <a:ext uri="{FF2B5EF4-FFF2-40B4-BE49-F238E27FC236}">
-                <a16:creationId xmlns:a16="http://schemas.microsoft.com/office/drawing/2014/main" id="{1C039644-5A2D-090F-2305-74160B1D24BB}"/>
-              </a:ext>
-            </a:extLst>
-          </p:cNvPr>
-          <p:cNvSpPr/>
-          <p:nvPr/>
-        </p:nvSpPr>
-        <p:spPr>
-          <a:xfrm>
-            <a:off x="7997198" y="941012"/>
-            <a:ext cx="1597682" cy="58389"/>
-          </a:xfrm>
-          <a:prstGeom prst="rect">
-            <a:avLst/>
-          </a:prstGeom>
-          <a:noFill/>
-          <a:ln/>
-        </p:spPr>
-        <p:txBody>
-          <a:bodyPr wrap="square" lIns="0" tIns="0" rIns="0" bIns="0" rtlCol="0" anchor="t">
-            <a:normAutofit fontScale="92500" lnSpcReduction="20000"/>
-          </a:bodyPr>
-          <a:lstStyle/>
-          <a:p>
-            <a:pPr algn="ctr">
-              <a:lnSpc>
-                <a:spcPct val="90000"/>
-              </a:lnSpc>
-            </a:pPr>
-            <a:r>
-              <a:rPr lang="en-US" sz="500" dirty="0">
-                <a:solidFill>
-                  <a:schemeClr val="bg1">
-                    <a:lumMod val="75000"/>
-                  </a:schemeClr>
-                </a:solidFill>
-                <a:latin typeface="Aptos" pitchFamily="34" charset="0"/>
-              </a:rPr>
-              <a:t>VGGish | YAMNet</a:t>
-            </a:r>
-          </a:p>
-        </p:txBody>
-      </p:sp>
-    </p:spTree>
-  </p:cSld>
-  <p:clrMapOvr>
-    <a:masterClrMapping/>
-  </p:clrMapOvr>
-</p:sld>
-</file>
-
-<file path=ppt/slides/slide11.xml><?xml version="1.0" encoding="utf-8"?>
 <p:sld xmlns:a="http://schemas.openxmlformats.org/drawingml/2006/main" xmlns:r="http://schemas.openxmlformats.org/officeDocument/2006/relationships" xmlns:p="http://schemas.openxmlformats.org/presentationml/2006/main">
   <p:cSld name="Slide 8">
     <p:bg>
@@ -6512,7 +5237,7 @@
 </p:sld>
 </file>
 
-<file path=ppt/slides/slide12.xml><?xml version="1.0" encoding="utf-8"?>
+<file path=ppt/slides/slide11.xml><?xml version="1.0" encoding="utf-8"?>
 <p:sld xmlns:a="http://schemas.openxmlformats.org/drawingml/2006/main" xmlns:r="http://schemas.openxmlformats.org/officeDocument/2006/relationships" xmlns:p="http://schemas.openxmlformats.org/presentationml/2006/main">
   <p:cSld name="Slide 9">
     <p:bg>
@@ -8955,7 +7680,7 @@
 </p:sld>
 </file>
 
-<file path=ppt/slides/slide13.xml><?xml version="1.0" encoding="utf-8"?>
+<file path=ppt/slides/slide12.xml><?xml version="1.0" encoding="utf-8"?>
 <p:sld xmlns:a="http://schemas.openxmlformats.org/drawingml/2006/main" xmlns:r="http://schemas.openxmlformats.org/officeDocument/2006/relationships" xmlns:p="http://schemas.openxmlformats.org/presentationml/2006/main">
   <p:cSld name="Slide 10">
     <p:bg>
@@ -10273,7 +8998,7 @@
 </p:sld>
 </file>
 
-<file path=ppt/slides/slide14.xml><?xml version="1.0" encoding="utf-8"?>
+<file path=ppt/slides/slide13.xml><?xml version="1.0" encoding="utf-8"?>
 <p:sld xmlns:a="http://schemas.openxmlformats.org/drawingml/2006/main" xmlns:r="http://schemas.openxmlformats.org/officeDocument/2006/relationships" xmlns:p="http://schemas.openxmlformats.org/presentationml/2006/main">
   <p:cSld name="Slide 11">
     <p:bg>
@@ -12646,7 +11371,7 @@
 </p:sld>
 </file>
 
-<file path=ppt/slides/slide15.xml><?xml version="1.0" encoding="utf-8"?>
+<file path=ppt/slides/slide14.xml><?xml version="1.0" encoding="utf-8"?>
 <p:sld xmlns:a="http://schemas.openxmlformats.org/drawingml/2006/main" xmlns:r="http://schemas.openxmlformats.org/officeDocument/2006/relationships" xmlns:p="http://schemas.openxmlformats.org/presentationml/2006/main">
   <p:cSld name="Slide 12">
     <p:bg>
@@ -15172,7 +13897,7 @@
 </p:sld>
 </file>
 
-<file path=ppt/slides/slide16.xml><?xml version="1.0" encoding="utf-8"?>
+<file path=ppt/slides/slide15.xml><?xml version="1.0" encoding="utf-8"?>
 <p:sld xmlns:a="http://schemas.openxmlformats.org/drawingml/2006/main" xmlns:r="http://schemas.openxmlformats.org/officeDocument/2006/relationships" xmlns:p="http://schemas.openxmlformats.org/presentationml/2006/main">
   <p:cSld name="Slide 13">
     <p:bg>
@@ -26797,4093 +25522,6 @@
 
 <file path=ppt/slides/slide8.xml><?xml version="1.0" encoding="utf-8"?>
 <p:sld xmlns:a="http://schemas.openxmlformats.org/drawingml/2006/main" xmlns:r="http://schemas.openxmlformats.org/officeDocument/2006/relationships" xmlns:p="http://schemas.openxmlformats.org/presentationml/2006/main">
-  <p:cSld name="Slide 6">
-    <p:bg>
-      <p:bgPr>
-        <a:solidFill>
-          <a:srgbClr val="F7F5EF"/>
-        </a:solidFill>
-        <a:effectLst/>
-      </p:bgPr>
-    </p:bg>
-    <p:spTree>
-      <p:nvGrpSpPr>
-        <p:cNvPr id="1" name=""/>
-        <p:cNvGrpSpPr/>
-        <p:nvPr/>
-      </p:nvGrpSpPr>
-      <p:grpSpPr>
-        <a:xfrm>
-          <a:off x="0" y="0"/>
-          <a:ext cx="0" cy="0"/>
-          <a:chOff x="0" y="0"/>
-          <a:chExt cx="0" cy="0"/>
-        </a:xfrm>
-      </p:grpSpPr>
-      <p:sp>
-        <p:nvSpPr>
-          <p:cNvPr id="26" name="Shape 25">
-            <a:extLst>
-              <a:ext uri="{FF2B5EF4-FFF2-40B4-BE49-F238E27FC236}">
-                <a16:creationId xmlns:a16="http://schemas.microsoft.com/office/drawing/2014/main" id="{26AD7A7F-B718-877D-5D6D-64139BB2D9C3}"/>
-              </a:ext>
-            </a:extLst>
-          </p:cNvPr>
-          <p:cNvSpPr/>
-          <p:nvPr/>
-        </p:nvSpPr>
-        <p:spPr>
-          <a:xfrm>
-            <a:off x="9550658" y="750101"/>
-            <a:ext cx="1755200" cy="295381"/>
-          </a:xfrm>
-          <a:prstGeom prst="chevron">
-            <a:avLst/>
-          </a:prstGeom>
-          <a:solidFill>
-            <a:srgbClr val="D7DDE0">
-              <a:alpha val="90000"/>
-            </a:srgbClr>
-          </a:solidFill>
-          <a:ln w="12700">
-            <a:solidFill>
-              <a:srgbClr val="F7F5EF"/>
-            </a:solidFill>
-            <a:prstDash val="solid"/>
-          </a:ln>
-        </p:spPr>
-        <p:txBody>
-          <a:bodyPr/>
-          <a:lstStyle/>
-          <a:p>
-            <a:endParaRPr lang="en-US" sz="1100"/>
-          </a:p>
-        </p:txBody>
-      </p:sp>
-      <p:sp>
-        <p:nvSpPr>
-          <p:cNvPr id="2" name="Text 0"/>
-          <p:cNvSpPr/>
-          <p:nvPr/>
-        </p:nvSpPr>
-        <p:spPr>
-          <a:xfrm>
-            <a:off x="594360" y="310896"/>
-            <a:ext cx="4114800" cy="201168"/>
-          </a:xfrm>
-          <a:prstGeom prst="rect">
-            <a:avLst/>
-          </a:prstGeom>
-          <a:noFill/>
-          <a:ln/>
-        </p:spPr>
-        <p:txBody>
-          <a:bodyPr wrap="square" lIns="0" tIns="0" rIns="0" bIns="0" rtlCol="0" anchor="t">
-            <a:normAutofit/>
-          </a:bodyPr>
-          <a:lstStyle/>
-          <a:p>
-            <a:pPr marL="0" indent="0" algn="l">
-              <a:lnSpc>
-                <a:spcPct val="90000"/>
-              </a:lnSpc>
-              <a:buNone/>
-            </a:pPr>
-            <a:r>
-              <a:rPr lang="en-US" sz="880" b="1" dirty="0">
-                <a:solidFill>
-                  <a:srgbClr val="17677D"/>
-                </a:solidFill>
-                <a:latin typeface="Aptos" pitchFamily="34" charset="0"/>
-                <a:ea typeface="Aptos" pitchFamily="34" charset="-122"/>
-                <a:cs typeface="Aptos" pitchFamily="34" charset="-120"/>
-              </a:rPr>
-              <a:t>ERA 1: TRAINING FROM SCRATCH</a:t>
-            </a:r>
-            <a:endParaRPr lang="en-US" sz="880" dirty="0"/>
-          </a:p>
-        </p:txBody>
-      </p:sp>
-      <p:sp>
-        <p:nvSpPr>
-          <p:cNvPr id="3" name="Text 1"/>
-          <p:cNvSpPr/>
-          <p:nvPr/>
-        </p:nvSpPr>
-        <p:spPr>
-          <a:xfrm>
-            <a:off x="566928" y="512064"/>
-            <a:ext cx="8046720" cy="502920"/>
-          </a:xfrm>
-          <a:prstGeom prst="rect">
-            <a:avLst/>
-          </a:prstGeom>
-          <a:noFill/>
-          <a:ln/>
-        </p:spPr>
-        <p:txBody>
-          <a:bodyPr wrap="square" lIns="0" tIns="0" rIns="0" bIns="0" rtlCol="0" anchor="t">
-            <a:normAutofit/>
-          </a:bodyPr>
-          <a:lstStyle/>
-          <a:p>
-            <a:pPr marL="0" indent="0" algn="l">
-              <a:lnSpc>
-                <a:spcPct val="90000"/>
-              </a:lnSpc>
-              <a:buNone/>
-            </a:pPr>
-            <a:r>
-              <a:rPr lang="en-US" sz="2600" b="1" dirty="0">
-                <a:solidFill>
-                  <a:srgbClr val="1F2528"/>
-                </a:solidFill>
-                <a:latin typeface="Aptos Display" pitchFamily="34" charset="0"/>
-                <a:ea typeface="Aptos Display" pitchFamily="34" charset="-122"/>
-                <a:cs typeface="Aptos Display" pitchFamily="34" charset="-120"/>
-              </a:rPr>
-              <a:t>LSTM extension</a:t>
-            </a:r>
-            <a:endParaRPr lang="en-US" sz="2600" dirty="0"/>
-          </a:p>
-        </p:txBody>
-      </p:sp>
-      <p:sp>
-        <p:nvSpPr>
-          <p:cNvPr id="4" name="Shape 2"/>
-          <p:cNvSpPr/>
-          <p:nvPr/>
-        </p:nvSpPr>
-        <p:spPr>
-          <a:xfrm>
-            <a:off x="566928" y="1078992"/>
-            <a:ext cx="11018520" cy="0"/>
-          </a:xfrm>
-          <a:prstGeom prst="line">
-            <a:avLst/>
-          </a:prstGeom>
-          <a:noFill/>
-          <a:ln w="9525">
-            <a:solidFill>
-              <a:srgbClr val="D8D4C8"/>
-            </a:solidFill>
-            <a:prstDash val="solid"/>
-          </a:ln>
-        </p:spPr>
-        <p:txBody>
-          <a:bodyPr/>
-          <a:lstStyle/>
-          <a:p>
-            <a:endParaRPr lang="en-US"/>
-          </a:p>
-        </p:txBody>
-      </p:sp>
-      <p:sp>
-        <p:nvSpPr>
-          <p:cNvPr id="11" name="Text 9"/>
-          <p:cNvSpPr/>
-          <p:nvPr/>
-        </p:nvSpPr>
-        <p:spPr>
-          <a:xfrm>
-            <a:off x="11064240" y="6473952"/>
-            <a:ext cx="411480" cy="164592"/>
-          </a:xfrm>
-          <a:prstGeom prst="rect">
-            <a:avLst/>
-          </a:prstGeom>
-          <a:noFill/>
-          <a:ln/>
-        </p:spPr>
-        <p:txBody>
-          <a:bodyPr wrap="square" lIns="0" tIns="0" rIns="0" bIns="0" rtlCol="0" anchor="t">
-            <a:normAutofit/>
-          </a:bodyPr>
-          <a:lstStyle/>
-          <a:p>
-            <a:pPr marL="0" indent="0" algn="r">
-              <a:lnSpc>
-                <a:spcPct val="90000"/>
-              </a:lnSpc>
-              <a:buNone/>
-            </a:pPr>
-            <a:r>
-              <a:rPr lang="en-US" sz="750" dirty="0">
-                <a:solidFill>
-                  <a:srgbClr val="6B7176"/>
-                </a:solidFill>
-                <a:latin typeface="Aptos" pitchFamily="34" charset="0"/>
-                <a:ea typeface="Aptos" pitchFamily="34" charset="-122"/>
-                <a:cs typeface="Aptos" pitchFamily="34" charset="-120"/>
-              </a:rPr>
-              <a:t>06</a:t>
-            </a:r>
-            <a:endParaRPr lang="en-US" sz="750" dirty="0"/>
-          </a:p>
-        </p:txBody>
-      </p:sp>
-      <p:sp>
-        <p:nvSpPr>
-          <p:cNvPr id="41" name="Text 38"/>
-          <p:cNvSpPr/>
-          <p:nvPr/>
-        </p:nvSpPr>
-        <p:spPr>
-          <a:xfrm>
-            <a:off x="11064240" y="6473952"/>
-            <a:ext cx="411480" cy="164592"/>
-          </a:xfrm>
-          <a:prstGeom prst="rect">
-            <a:avLst/>
-          </a:prstGeom>
-          <a:noFill/>
-          <a:ln/>
-        </p:spPr>
-        <p:txBody>
-          <a:bodyPr wrap="square" lIns="0" tIns="0" rIns="0" bIns="0" rtlCol="0" anchor="t">
-            <a:normAutofit/>
-          </a:bodyPr>
-          <a:lstStyle/>
-          <a:p>
-            <a:pPr marL="0" indent="0" algn="r">
-              <a:lnSpc>
-                <a:spcPct val="90000"/>
-              </a:lnSpc>
-              <a:buNone/>
-            </a:pPr>
-            <a:r>
-              <a:rPr lang="en-US" sz="750" dirty="0">
-                <a:solidFill>
-                  <a:srgbClr val="6B7176"/>
-                </a:solidFill>
-                <a:latin typeface="Aptos" pitchFamily="34" charset="0"/>
-                <a:ea typeface="Aptos" pitchFamily="34" charset="-122"/>
-                <a:cs typeface="Aptos" pitchFamily="34" charset="-120"/>
-              </a:rPr>
-              <a:t>06</a:t>
-            </a:r>
-            <a:endParaRPr lang="en-US" sz="750" dirty="0"/>
-          </a:p>
-        </p:txBody>
-      </p:sp>
-      <p:pic>
-        <p:nvPicPr>
-          <p:cNvPr id="49" name="Picture 2" descr="Cornell University Logo, symbol, meaning, history, PNG, brand">
-            <a:extLst>
-              <a:ext uri="{FF2B5EF4-FFF2-40B4-BE49-F238E27FC236}">
-                <a16:creationId xmlns:a16="http://schemas.microsoft.com/office/drawing/2014/main" id="{21052E2F-76ED-2FFC-D206-D31C31D0D4D1}"/>
-              </a:ext>
-            </a:extLst>
-          </p:cNvPr>
-          <p:cNvPicPr>
-            <a:picLocks noChangeAspect="1" noChangeArrowheads="1"/>
-          </p:cNvPicPr>
-          <p:nvPr/>
-        </p:nvPicPr>
-        <p:blipFill rotWithShape="1">
-          <a:blip r:embed="rId3">
-            <a:extLst>
-              <a:ext uri="{28A0092B-C50C-407E-A947-70E740481C1C}">
-                <a14:useLocalDpi xmlns:a14="http://schemas.microsoft.com/office/drawing/2010/main" val="0"/>
-              </a:ext>
-            </a:extLst>
-          </a:blip>
-          <a:srcRect l="15934" r="15589"/>
-          <a:stretch/>
-        </p:blipFill>
-        <p:spPr bwMode="auto">
-          <a:xfrm>
-            <a:off x="11320507" y="147128"/>
-            <a:ext cx="863884" cy="709633"/>
-          </a:xfrm>
-          <a:prstGeom prst="rect">
-            <a:avLst/>
-          </a:prstGeom>
-          <a:noFill/>
-          <a:extLst>
-            <a:ext uri="{909E8E84-426E-40DD-AFC4-6F175D3DCCD1}">
-              <a14:hiddenFill xmlns:a14="http://schemas.microsoft.com/office/drawing/2010/main">
-                <a:solidFill>
-                  <a:srgbClr val="FFFFFF"/>
-                </a:solidFill>
-              </a14:hiddenFill>
-            </a:ext>
-          </a:extLst>
-        </p:spPr>
-      </p:pic>
-      <p:sp>
-        <p:nvSpPr>
-          <p:cNvPr id="50" name="Shape 19">
-            <a:extLst>
-              <a:ext uri="{FF2B5EF4-FFF2-40B4-BE49-F238E27FC236}">
-                <a16:creationId xmlns:a16="http://schemas.microsoft.com/office/drawing/2014/main" id="{07FAD0BE-4F31-699C-D5A9-12E056BF2C06}"/>
-              </a:ext>
-            </a:extLst>
-          </p:cNvPr>
-          <p:cNvSpPr/>
-          <p:nvPr/>
-        </p:nvSpPr>
-        <p:spPr>
-          <a:xfrm>
-            <a:off x="6237447" y="751408"/>
-            <a:ext cx="1809206" cy="295381"/>
-          </a:xfrm>
-          <a:prstGeom prst="chevron">
-            <a:avLst/>
-          </a:prstGeom>
-          <a:solidFill>
-            <a:srgbClr val="426E9E"/>
-          </a:solidFill>
-          <a:ln w="12700">
-            <a:solidFill>
-              <a:srgbClr val="F7F5EF"/>
-            </a:solidFill>
-            <a:prstDash val="solid"/>
-          </a:ln>
-        </p:spPr>
-        <p:txBody>
-          <a:bodyPr/>
-          <a:lstStyle/>
-          <a:p>
-            <a:endParaRPr lang="en-US" sz="1100" dirty="0"/>
-          </a:p>
-        </p:txBody>
-      </p:sp>
-      <p:sp>
-        <p:nvSpPr>
-          <p:cNvPr id="51" name="Text 20">
-            <a:extLst>
-              <a:ext uri="{FF2B5EF4-FFF2-40B4-BE49-F238E27FC236}">
-                <a16:creationId xmlns:a16="http://schemas.microsoft.com/office/drawing/2014/main" id="{EE3E5F18-639F-9B03-B8B3-F152A7C1E928}"/>
-              </a:ext>
-            </a:extLst>
-          </p:cNvPr>
-          <p:cNvSpPr/>
-          <p:nvPr/>
-        </p:nvSpPr>
-        <p:spPr>
-          <a:xfrm>
-            <a:off x="6287692" y="833886"/>
-            <a:ext cx="1597682" cy="75563"/>
-          </a:xfrm>
-          <a:prstGeom prst="rect">
-            <a:avLst/>
-          </a:prstGeom>
-          <a:noFill/>
-          <a:ln/>
-        </p:spPr>
-        <p:txBody>
-          <a:bodyPr wrap="square" lIns="0" tIns="0" rIns="0" bIns="0" rtlCol="0" anchor="t">
-            <a:normAutofit fontScale="92500" lnSpcReduction="20000"/>
-          </a:bodyPr>
-          <a:lstStyle/>
-          <a:p>
-            <a:pPr marL="0" indent="0" algn="ctr">
-              <a:lnSpc>
-                <a:spcPct val="90000"/>
-              </a:lnSpc>
-              <a:buNone/>
-            </a:pPr>
-            <a:r>
-              <a:rPr lang="en-US" sz="700" b="1" dirty="0">
-                <a:solidFill>
-                  <a:srgbClr val="FFFFFF"/>
-                </a:solidFill>
-                <a:latin typeface="Aptos" pitchFamily="34" charset="0"/>
-                <a:ea typeface="Aptos" pitchFamily="34" charset="-122"/>
-                <a:cs typeface="Aptos" pitchFamily="34" charset="-120"/>
-              </a:rPr>
-              <a:t>Training from scratch</a:t>
-            </a:r>
-            <a:endParaRPr lang="en-US" sz="700" dirty="0"/>
-          </a:p>
-        </p:txBody>
-      </p:sp>
-      <p:sp>
-        <p:nvSpPr>
-          <p:cNvPr id="52" name="Text 21">
-            <a:extLst>
-              <a:ext uri="{FF2B5EF4-FFF2-40B4-BE49-F238E27FC236}">
-                <a16:creationId xmlns:a16="http://schemas.microsoft.com/office/drawing/2014/main" id="{27A93C74-65E1-2F1C-7E4E-BFF7DF063491}"/>
-              </a:ext>
-            </a:extLst>
-          </p:cNvPr>
-          <p:cNvSpPr/>
-          <p:nvPr/>
-        </p:nvSpPr>
-        <p:spPr>
-          <a:xfrm>
-            <a:off x="6295809" y="928966"/>
-            <a:ext cx="1597682" cy="58389"/>
-          </a:xfrm>
-          <a:prstGeom prst="rect">
-            <a:avLst/>
-          </a:prstGeom>
-          <a:noFill/>
-          <a:ln/>
-        </p:spPr>
-        <p:txBody>
-          <a:bodyPr wrap="square" lIns="0" tIns="0" rIns="0" bIns="0" rtlCol="0" anchor="t">
-            <a:normAutofit fontScale="92500" lnSpcReduction="20000"/>
-          </a:bodyPr>
-          <a:lstStyle/>
-          <a:p>
-            <a:pPr marL="0" indent="0" algn="ctr">
-              <a:lnSpc>
-                <a:spcPct val="90000"/>
-              </a:lnSpc>
-              <a:buNone/>
-            </a:pPr>
-            <a:r>
-              <a:rPr lang="en-US" sz="500" dirty="0" err="1">
-                <a:solidFill>
-                  <a:srgbClr val="D9D9D9"/>
-                </a:solidFill>
-                <a:latin typeface="Aptos" pitchFamily="34" charset="0"/>
-              </a:rPr>
-              <a:t>Piczak</a:t>
-            </a:r>
-            <a:r>
-              <a:rPr lang="en-US" sz="500" dirty="0">
-                <a:solidFill>
-                  <a:srgbClr val="D9D9D9"/>
-                </a:solidFill>
-                <a:latin typeface="Aptos" pitchFamily="34" charset="0"/>
-              </a:rPr>
-              <a:t> CNN | Variations </a:t>
-            </a:r>
-            <a:r>
-              <a:rPr lang="en-US" sz="500" dirty="0">
-                <a:solidFill>
-                  <a:srgbClr val="D9D9D9"/>
-                </a:solidFill>
-                <a:latin typeface="Aptos" pitchFamily="34" charset="0"/>
-                <a:ea typeface="Aptos" pitchFamily="34" charset="-122"/>
-                <a:cs typeface="Aptos" pitchFamily="34" charset="-120"/>
-              </a:rPr>
-              <a:t>| </a:t>
-            </a:r>
-            <a:r>
-              <a:rPr lang="en-US" sz="500" b="1" dirty="0">
-                <a:solidFill>
-                  <a:srgbClr val="FFFFFF"/>
-                </a:solidFill>
-                <a:latin typeface="Aptos" pitchFamily="34" charset="0"/>
-              </a:rPr>
-              <a:t>LSTM</a:t>
-            </a:r>
-          </a:p>
-        </p:txBody>
-      </p:sp>
-      <p:sp>
-        <p:nvSpPr>
-          <p:cNvPr id="53" name="Shape 22">
-            <a:extLst>
-              <a:ext uri="{FF2B5EF4-FFF2-40B4-BE49-F238E27FC236}">
-                <a16:creationId xmlns:a16="http://schemas.microsoft.com/office/drawing/2014/main" id="{5E856389-785C-EDDD-2E93-69A6E4437709}"/>
-              </a:ext>
-            </a:extLst>
-          </p:cNvPr>
-          <p:cNvSpPr/>
-          <p:nvPr/>
-        </p:nvSpPr>
-        <p:spPr>
-          <a:xfrm>
-            <a:off x="7891484" y="750102"/>
-            <a:ext cx="1809206" cy="295381"/>
-          </a:xfrm>
-          <a:prstGeom prst="chevron">
-            <a:avLst/>
-          </a:prstGeom>
-          <a:solidFill>
-            <a:srgbClr val="D7DDE0">
-              <a:alpha val="90000"/>
-            </a:srgbClr>
-          </a:solidFill>
-          <a:ln w="12700">
-            <a:solidFill>
-              <a:srgbClr val="F7F5EF"/>
-            </a:solidFill>
-            <a:prstDash val="solid"/>
-          </a:ln>
-        </p:spPr>
-        <p:txBody>
-          <a:bodyPr/>
-          <a:lstStyle/>
-          <a:p>
-            <a:endParaRPr lang="en-US" sz="1100"/>
-          </a:p>
-        </p:txBody>
-      </p:sp>
-      <p:sp>
-        <p:nvSpPr>
-          <p:cNvPr id="54" name="Text 23">
-            <a:extLst>
-              <a:ext uri="{FF2B5EF4-FFF2-40B4-BE49-F238E27FC236}">
-                <a16:creationId xmlns:a16="http://schemas.microsoft.com/office/drawing/2014/main" id="{E70FD8BD-8D92-81E6-9C3C-AC93C8A0C1EE}"/>
-              </a:ext>
-            </a:extLst>
-          </p:cNvPr>
-          <p:cNvSpPr/>
-          <p:nvPr/>
-        </p:nvSpPr>
-        <p:spPr>
-          <a:xfrm>
-            <a:off x="7963330" y="839252"/>
-            <a:ext cx="1597682" cy="75563"/>
-          </a:xfrm>
-          <a:prstGeom prst="rect">
-            <a:avLst/>
-          </a:prstGeom>
-          <a:noFill/>
-          <a:ln/>
-        </p:spPr>
-        <p:txBody>
-          <a:bodyPr wrap="square" lIns="0" tIns="0" rIns="0" bIns="0" rtlCol="0" anchor="t">
-            <a:normAutofit fontScale="92500" lnSpcReduction="20000"/>
-          </a:bodyPr>
-          <a:lstStyle/>
-          <a:p>
-            <a:pPr marL="0" indent="0" algn="ctr">
-              <a:lnSpc>
-                <a:spcPct val="90000"/>
-              </a:lnSpc>
-              <a:buNone/>
-            </a:pPr>
-            <a:r>
-              <a:rPr lang="en-US" sz="700" b="1" dirty="0">
-                <a:solidFill>
-                  <a:srgbClr val="30383D"/>
-                </a:solidFill>
-                <a:latin typeface="Aptos" pitchFamily="34" charset="0"/>
-                <a:ea typeface="Aptos" pitchFamily="34" charset="-122"/>
-                <a:cs typeface="Aptos" pitchFamily="34" charset="-120"/>
-              </a:rPr>
-              <a:t>Transfer learning: pretrained CNN</a:t>
-            </a:r>
-            <a:endParaRPr lang="en-US" sz="700" dirty="0"/>
-          </a:p>
-        </p:txBody>
-      </p:sp>
-      <p:sp>
-        <p:nvSpPr>
-          <p:cNvPr id="55" name="Text 24">
-            <a:extLst>
-              <a:ext uri="{FF2B5EF4-FFF2-40B4-BE49-F238E27FC236}">
-                <a16:creationId xmlns:a16="http://schemas.microsoft.com/office/drawing/2014/main" id="{C5EBDED2-597B-9227-B546-C4D2824C88F6}"/>
-              </a:ext>
-            </a:extLst>
-          </p:cNvPr>
-          <p:cNvSpPr/>
-          <p:nvPr/>
-        </p:nvSpPr>
-        <p:spPr>
-          <a:xfrm>
-            <a:off x="7984136" y="941012"/>
-            <a:ext cx="1597682" cy="58389"/>
-          </a:xfrm>
-          <a:prstGeom prst="rect">
-            <a:avLst/>
-          </a:prstGeom>
-          <a:noFill/>
-          <a:ln/>
-        </p:spPr>
-        <p:txBody>
-          <a:bodyPr wrap="square" lIns="0" tIns="0" rIns="0" bIns="0" rtlCol="0" anchor="t">
-            <a:normAutofit fontScale="92500" lnSpcReduction="20000"/>
-          </a:bodyPr>
-          <a:lstStyle/>
-          <a:p>
-            <a:pPr marL="0" indent="0" algn="ctr">
-              <a:lnSpc>
-                <a:spcPct val="90000"/>
-              </a:lnSpc>
-              <a:buNone/>
-            </a:pPr>
-            <a:r>
-              <a:rPr lang="en-US" sz="500" dirty="0">
-                <a:solidFill>
-                  <a:srgbClr val="6B7176"/>
-                </a:solidFill>
-                <a:latin typeface="Aptos" pitchFamily="34" charset="0"/>
-                <a:ea typeface="Aptos" pitchFamily="34" charset="-122"/>
-                <a:cs typeface="Aptos" pitchFamily="34" charset="-120"/>
-              </a:rPr>
-              <a:t>VGGish | YAMNet</a:t>
-            </a:r>
-            <a:endParaRPr lang="en-US" sz="500" dirty="0"/>
-          </a:p>
-        </p:txBody>
-      </p:sp>
-      <p:sp>
-        <p:nvSpPr>
-          <p:cNvPr id="57" name="Text 26">
-            <a:extLst>
-              <a:ext uri="{FF2B5EF4-FFF2-40B4-BE49-F238E27FC236}">
-                <a16:creationId xmlns:a16="http://schemas.microsoft.com/office/drawing/2014/main" id="{FDD7A5D5-2EF0-FA2E-CAED-E6DF2A85E002}"/>
-              </a:ext>
-            </a:extLst>
-          </p:cNvPr>
-          <p:cNvSpPr/>
-          <p:nvPr/>
-        </p:nvSpPr>
-        <p:spPr>
-          <a:xfrm>
-            <a:off x="9657605" y="848441"/>
-            <a:ext cx="1597682" cy="75563"/>
-          </a:xfrm>
-          <a:prstGeom prst="rect">
-            <a:avLst/>
-          </a:prstGeom>
-          <a:noFill/>
-          <a:ln/>
-        </p:spPr>
-        <p:txBody>
-          <a:bodyPr wrap="square" lIns="0" tIns="0" rIns="0" bIns="0" rtlCol="0" anchor="t">
-            <a:normAutofit fontScale="92500" lnSpcReduction="20000"/>
-          </a:bodyPr>
-          <a:lstStyle/>
-          <a:p>
-            <a:pPr marL="0" indent="0" algn="ctr">
-              <a:lnSpc>
-                <a:spcPct val="90000"/>
-              </a:lnSpc>
-              <a:buNone/>
-            </a:pPr>
-            <a:r>
-              <a:rPr lang="en-US" sz="700" b="1" dirty="0">
-                <a:solidFill>
-                  <a:srgbClr val="30383D"/>
-                </a:solidFill>
-                <a:latin typeface="Aptos" pitchFamily="34" charset="0"/>
-                <a:ea typeface="Aptos" pitchFamily="34" charset="-122"/>
-                <a:cs typeface="Aptos" pitchFamily="34" charset="-120"/>
-              </a:rPr>
-              <a:t>Transfer learning: pretrained transformers</a:t>
-            </a:r>
-            <a:endParaRPr lang="en-US" sz="700" dirty="0"/>
-          </a:p>
-        </p:txBody>
-      </p:sp>
-      <p:sp>
-        <p:nvSpPr>
-          <p:cNvPr id="58" name="Text 27">
-            <a:extLst>
-              <a:ext uri="{FF2B5EF4-FFF2-40B4-BE49-F238E27FC236}">
-                <a16:creationId xmlns:a16="http://schemas.microsoft.com/office/drawing/2014/main" id="{1F3398B0-70FF-C5E6-5B81-8C74E3BDC7DE}"/>
-              </a:ext>
-            </a:extLst>
-          </p:cNvPr>
-          <p:cNvSpPr/>
-          <p:nvPr/>
-        </p:nvSpPr>
-        <p:spPr>
-          <a:xfrm>
-            <a:off x="9657605" y="944489"/>
-            <a:ext cx="1662902" cy="107931"/>
-          </a:xfrm>
-          <a:prstGeom prst="rect">
-            <a:avLst/>
-          </a:prstGeom>
-          <a:noFill/>
-          <a:ln/>
-        </p:spPr>
-        <p:txBody>
-          <a:bodyPr wrap="square" lIns="0" tIns="0" rIns="0" bIns="0" rtlCol="0" anchor="t">
-            <a:normAutofit/>
-          </a:bodyPr>
-          <a:lstStyle/>
-          <a:p>
-            <a:pPr marL="0" indent="0" algn="ctr">
-              <a:lnSpc>
-                <a:spcPct val="90000"/>
-              </a:lnSpc>
-              <a:buNone/>
-            </a:pPr>
-            <a:r>
-              <a:rPr lang="en-US" sz="500" dirty="0">
-                <a:solidFill>
-                  <a:srgbClr val="6B7176"/>
-                </a:solidFill>
-                <a:latin typeface="Aptos" pitchFamily="34" charset="0"/>
-                <a:ea typeface="Aptos" pitchFamily="34" charset="-122"/>
-                <a:cs typeface="Aptos" pitchFamily="34" charset="-120"/>
-              </a:rPr>
-              <a:t>AST | BEATs</a:t>
-            </a:r>
-            <a:endParaRPr lang="en-US" sz="500" dirty="0"/>
-          </a:p>
-        </p:txBody>
-      </p:sp>
-      <p:sp>
-        <p:nvSpPr>
-          <p:cNvPr id="5" name="Text 11">
-            <a:extLst>
-              <a:ext uri="{FF2B5EF4-FFF2-40B4-BE49-F238E27FC236}">
-                <a16:creationId xmlns:a16="http://schemas.microsoft.com/office/drawing/2014/main" id="{95D35998-729C-C512-7B25-183F08D4C5A5}"/>
-              </a:ext>
-            </a:extLst>
-          </p:cNvPr>
-          <p:cNvSpPr/>
-          <p:nvPr/>
-        </p:nvSpPr>
-        <p:spPr>
-          <a:xfrm>
-            <a:off x="731520" y="1307591"/>
-            <a:ext cx="1828800" cy="182880"/>
-          </a:xfrm>
-          <a:prstGeom prst="rect">
-            <a:avLst/>
-          </a:prstGeom>
-          <a:noFill/>
-          <a:ln>
-            <a:noFill/>
-          </a:ln>
-        </p:spPr>
-        <p:txBody>
-          <a:bodyPr wrap="square" lIns="0" tIns="0" rIns="0" bIns="0" rtlCol="0" anchor="t">
-            <a:normAutofit/>
-          </a:bodyPr>
-          <a:lstStyle/>
-          <a:p>
-            <a:pPr marL="0" indent="0" algn="l">
-              <a:lnSpc>
-                <a:spcPct val="90000"/>
-              </a:lnSpc>
-              <a:buNone/>
-            </a:pPr>
-            <a:r>
-              <a:rPr lang="en-US" sz="1000" b="1" dirty="0">
-                <a:solidFill>
-                  <a:srgbClr val="426E9E"/>
-                </a:solidFill>
-                <a:latin typeface="Aptos" pitchFamily="34" charset="0"/>
-                <a:ea typeface="Aptos" pitchFamily="34" charset="-122"/>
-                <a:cs typeface="Aptos" pitchFamily="34" charset="-120"/>
-              </a:rPr>
-              <a:t>What changed?</a:t>
-            </a:r>
-            <a:endParaRPr lang="en-US" sz="1000" dirty="0"/>
-          </a:p>
-        </p:txBody>
-      </p:sp>
-      <p:sp>
-        <p:nvSpPr>
-          <p:cNvPr id="6" name="Text 12">
-            <a:extLst>
-              <a:ext uri="{FF2B5EF4-FFF2-40B4-BE49-F238E27FC236}">
-                <a16:creationId xmlns:a16="http://schemas.microsoft.com/office/drawing/2014/main" id="{B5C49A20-5BE9-158D-D657-66FBE59336B5}"/>
-              </a:ext>
-            </a:extLst>
-          </p:cNvPr>
-          <p:cNvSpPr/>
-          <p:nvPr/>
-        </p:nvSpPr>
-        <p:spPr>
-          <a:xfrm>
-            <a:off x="737816" y="1600200"/>
-            <a:ext cx="4730655" cy="411480"/>
-          </a:xfrm>
-          <a:prstGeom prst="rect">
-            <a:avLst/>
-          </a:prstGeom>
-          <a:noFill/>
-          <a:ln>
-            <a:noFill/>
-          </a:ln>
-        </p:spPr>
-        <p:txBody>
-          <a:bodyPr wrap="square" lIns="0" tIns="0" rIns="0" bIns="0" rtlCol="0" anchor="t">
-            <a:normAutofit/>
-          </a:bodyPr>
-          <a:lstStyle/>
-          <a:p>
-            <a:pPr marL="0" indent="0" algn="l">
-              <a:lnSpc>
-                <a:spcPct val="90000"/>
-              </a:lnSpc>
-              <a:buNone/>
-            </a:pPr>
-            <a:r>
-              <a:rPr lang="en-US" sz="1200" dirty="0">
-                <a:solidFill>
-                  <a:srgbClr val="1F2528"/>
-                </a:solidFill>
-                <a:latin typeface="Aptos Display" pitchFamily="34" charset="0"/>
-                <a:ea typeface="Aptos Display" pitchFamily="34" charset="-122"/>
-                <a:cs typeface="Aptos Display" pitchFamily="34" charset="-120"/>
-              </a:rPr>
-              <a:t>From local spectrogram patterns to temporal sequence modeling – LSTM baseline defined, Design of Experiments created to vary 4 factors</a:t>
-            </a:r>
-            <a:endParaRPr lang="en-US" sz="1200" dirty="0"/>
-          </a:p>
-        </p:txBody>
-      </p:sp>
-      <p:grpSp>
-        <p:nvGrpSpPr>
-          <p:cNvPr id="7" name="Group 6">
-            <a:extLst>
-              <a:ext uri="{FF2B5EF4-FFF2-40B4-BE49-F238E27FC236}">
-                <a16:creationId xmlns:a16="http://schemas.microsoft.com/office/drawing/2014/main" id="{5504F900-04E2-A0C8-2727-E8C606D82368}"/>
-              </a:ext>
-            </a:extLst>
-          </p:cNvPr>
-          <p:cNvGrpSpPr/>
-          <p:nvPr/>
-        </p:nvGrpSpPr>
-        <p:grpSpPr>
-          <a:xfrm>
-            <a:off x="8720101" y="4812128"/>
-            <a:ext cx="1920240" cy="772294"/>
-            <a:chOff x="9328755" y="4727446"/>
-            <a:chExt cx="1920240" cy="772294"/>
-          </a:xfrm>
-        </p:grpSpPr>
-        <p:sp>
-          <p:nvSpPr>
-            <p:cNvPr id="8" name="Shape 32">
-              <a:extLst>
-                <a:ext uri="{FF2B5EF4-FFF2-40B4-BE49-F238E27FC236}">
-                  <a16:creationId xmlns:a16="http://schemas.microsoft.com/office/drawing/2014/main" id="{FF8E2337-52F1-8783-827C-7F1008D8C855}"/>
-                </a:ext>
-              </a:extLst>
-            </p:cNvPr>
-            <p:cNvSpPr/>
-            <p:nvPr/>
-          </p:nvSpPr>
-          <p:spPr>
-            <a:xfrm>
-              <a:off x="9328755" y="4727446"/>
-              <a:ext cx="1920240" cy="772294"/>
-            </a:xfrm>
-            <a:prstGeom prst="rect">
-              <a:avLst/>
-            </a:prstGeom>
-            <a:solidFill>
-              <a:srgbClr val="FFFFFF">
-                <a:alpha val="98000"/>
-              </a:srgbClr>
-            </a:solidFill>
-            <a:ln w="17780">
-              <a:solidFill>
-                <a:srgbClr val="426E9E"/>
-              </a:solidFill>
-              <a:prstDash val="solid"/>
-            </a:ln>
-          </p:spPr>
-          <p:txBody>
-            <a:bodyPr/>
-            <a:lstStyle/>
-            <a:p>
-              <a:endParaRPr lang="en-US"/>
-            </a:p>
-          </p:txBody>
-        </p:sp>
-        <p:sp>
-          <p:nvSpPr>
-            <p:cNvPr id="9" name="Text 33">
-              <a:extLst>
-                <a:ext uri="{FF2B5EF4-FFF2-40B4-BE49-F238E27FC236}">
-                  <a16:creationId xmlns:a16="http://schemas.microsoft.com/office/drawing/2014/main" id="{C5DFBC2B-9662-68E1-8AB0-4FD4ED093D93}"/>
-                </a:ext>
-              </a:extLst>
-            </p:cNvPr>
-            <p:cNvSpPr/>
-            <p:nvPr/>
-          </p:nvSpPr>
-          <p:spPr>
-            <a:xfrm>
-              <a:off x="9420195" y="4864606"/>
-              <a:ext cx="1737360" cy="329184"/>
-            </a:xfrm>
-            <a:prstGeom prst="rect">
-              <a:avLst/>
-            </a:prstGeom>
-            <a:noFill/>
-            <a:ln/>
-          </p:spPr>
-          <p:txBody>
-            <a:bodyPr wrap="square" lIns="0" tIns="0" rIns="0" bIns="0" rtlCol="0" anchor="t">
-              <a:normAutofit/>
-            </a:bodyPr>
-            <a:lstStyle/>
-            <a:p>
-              <a:pPr marL="0" indent="0" algn="ctr">
-                <a:lnSpc>
-                  <a:spcPct val="90000"/>
-                </a:lnSpc>
-                <a:buNone/>
-              </a:pPr>
-              <a:r>
-                <a:rPr lang="en-US" sz="2100" b="1" dirty="0">
-                  <a:solidFill>
-                    <a:srgbClr val="426E9E"/>
-                  </a:solidFill>
-                  <a:latin typeface="Aptos Display" pitchFamily="34" charset="0"/>
-                  <a:ea typeface="Aptos Display" pitchFamily="34" charset="-122"/>
-                  <a:cs typeface="Aptos Display" pitchFamily="34" charset="-120"/>
-                </a:rPr>
-                <a:t>56.8%</a:t>
-              </a:r>
-              <a:endParaRPr lang="en-US" sz="2100" dirty="0"/>
-            </a:p>
-          </p:txBody>
-        </p:sp>
-        <p:sp>
-          <p:nvSpPr>
-            <p:cNvPr id="10" name="Text 34">
-              <a:extLst>
-                <a:ext uri="{FF2B5EF4-FFF2-40B4-BE49-F238E27FC236}">
-                  <a16:creationId xmlns:a16="http://schemas.microsoft.com/office/drawing/2014/main" id="{18C1C5EA-9BD1-DCE8-3929-401367F5AC9C}"/>
-                </a:ext>
-              </a:extLst>
-            </p:cNvPr>
-            <p:cNvSpPr/>
-            <p:nvPr/>
-          </p:nvSpPr>
-          <p:spPr>
-            <a:xfrm>
-              <a:off x="9438483" y="5257798"/>
-              <a:ext cx="1700784" cy="219456"/>
-            </a:xfrm>
-            <a:prstGeom prst="rect">
-              <a:avLst/>
-            </a:prstGeom>
-            <a:noFill/>
-            <a:ln/>
-          </p:spPr>
-          <p:txBody>
-            <a:bodyPr wrap="square" lIns="0" tIns="0" rIns="0" bIns="0" rtlCol="0" anchor="t">
-              <a:normAutofit/>
-            </a:bodyPr>
-            <a:lstStyle/>
-            <a:p>
-              <a:pPr marL="0" indent="0" algn="ctr">
-                <a:lnSpc>
-                  <a:spcPct val="90000"/>
-                </a:lnSpc>
-                <a:buNone/>
-              </a:pPr>
-              <a:r>
-                <a:rPr lang="en-US" sz="780" dirty="0">
-                  <a:solidFill>
-                    <a:srgbClr val="6B7176"/>
-                  </a:solidFill>
-                  <a:latin typeface="Aptos" pitchFamily="34" charset="0"/>
-                  <a:ea typeface="Aptos" pitchFamily="34" charset="-122"/>
-                  <a:cs typeface="Aptos" pitchFamily="34" charset="-120"/>
-                </a:rPr>
-                <a:t>final 5-fold clip-level accuracy</a:t>
-              </a:r>
-              <a:endParaRPr lang="en-US" sz="780" dirty="0"/>
-            </a:p>
-          </p:txBody>
-        </p:sp>
-      </p:grpSp>
-      <p:pic>
-        <p:nvPicPr>
-          <p:cNvPr id="12" name="Image 0" descr="/Users/andrew/Library/CloudStorage/OneDrive-CornellUniversity/Courses/SYSEN5888/ Project/DeepLearning5888Project/Plots and Data/LSTM/LSTM_Run8_CapacityMeanPool_long/curves.png">
-            <a:extLst>
-              <a:ext uri="{FF2B5EF4-FFF2-40B4-BE49-F238E27FC236}">
-                <a16:creationId xmlns:a16="http://schemas.microsoft.com/office/drawing/2014/main" id="{12442A1A-0ADC-E00E-8F65-04BE871CCA8C}"/>
-              </a:ext>
-            </a:extLst>
-          </p:cNvPr>
-          <p:cNvPicPr>
-            <a:picLocks noChangeAspect="1"/>
-          </p:cNvPicPr>
-          <p:nvPr/>
-        </p:nvPicPr>
-        <p:blipFill>
-          <a:blip r:embed="rId4"/>
-          <a:srcRect/>
-          <a:stretch/>
-        </p:blipFill>
-        <p:spPr>
-          <a:xfrm>
-            <a:off x="5763893" y="1600200"/>
-            <a:ext cx="5530488" cy="3063240"/>
-          </a:xfrm>
-          <a:prstGeom prst="rect">
-            <a:avLst/>
-          </a:prstGeom>
-        </p:spPr>
-      </p:pic>
-      <p:sp>
-        <p:nvSpPr>
-          <p:cNvPr id="15" name="Text 36">
-            <a:extLst>
-              <a:ext uri="{FF2B5EF4-FFF2-40B4-BE49-F238E27FC236}">
-                <a16:creationId xmlns:a16="http://schemas.microsoft.com/office/drawing/2014/main" id="{69F3321B-6ECD-9FCA-AC23-97AFA70A1559}"/>
-              </a:ext>
-            </a:extLst>
-          </p:cNvPr>
-          <p:cNvSpPr/>
-          <p:nvPr/>
-        </p:nvSpPr>
-        <p:spPr>
-          <a:xfrm>
-            <a:off x="737816" y="5445120"/>
-            <a:ext cx="1645920" cy="182880"/>
-          </a:xfrm>
-          <a:prstGeom prst="rect">
-            <a:avLst/>
-          </a:prstGeom>
-          <a:noFill/>
-          <a:ln/>
-        </p:spPr>
-        <p:txBody>
-          <a:bodyPr wrap="square" lIns="0" tIns="0" rIns="0" bIns="0" rtlCol="0" anchor="t">
-            <a:normAutofit/>
-          </a:bodyPr>
-          <a:lstStyle/>
-          <a:p>
-            <a:pPr marL="0" indent="0" algn="l">
-              <a:lnSpc>
-                <a:spcPct val="90000"/>
-              </a:lnSpc>
-              <a:buNone/>
-            </a:pPr>
-            <a:r>
-              <a:rPr lang="en-US" sz="1000" b="1" dirty="0">
-                <a:solidFill>
-                  <a:srgbClr val="426E9E"/>
-                </a:solidFill>
-                <a:latin typeface="Aptos" pitchFamily="34" charset="0"/>
-              </a:rPr>
-              <a:t>Results</a:t>
-            </a:r>
-          </a:p>
-        </p:txBody>
-      </p:sp>
-      <p:sp>
-        <p:nvSpPr>
-          <p:cNvPr id="16" name="Text 37">
-            <a:extLst>
-              <a:ext uri="{FF2B5EF4-FFF2-40B4-BE49-F238E27FC236}">
-                <a16:creationId xmlns:a16="http://schemas.microsoft.com/office/drawing/2014/main" id="{0A2D3FFE-A0F9-5698-47B0-895FD95E89EB}"/>
-              </a:ext>
-            </a:extLst>
-          </p:cNvPr>
-          <p:cNvSpPr/>
-          <p:nvPr/>
-        </p:nvSpPr>
-        <p:spPr>
-          <a:xfrm>
-            <a:off x="737816" y="5628000"/>
-            <a:ext cx="4727617" cy="996734"/>
-          </a:xfrm>
-          <a:prstGeom prst="rect">
-            <a:avLst/>
-          </a:prstGeom>
-          <a:noFill/>
-          <a:ln/>
-        </p:spPr>
-        <p:txBody>
-          <a:bodyPr wrap="square" lIns="0" tIns="0" rIns="0" bIns="0" rtlCol="0" anchor="t">
-            <a:normAutofit lnSpcReduction="10000"/>
-          </a:bodyPr>
-          <a:lstStyle/>
-          <a:p>
-            <a:pPr marL="0" indent="0" algn="l">
-              <a:lnSpc>
-                <a:spcPct val="90000"/>
-              </a:lnSpc>
-              <a:buNone/>
-            </a:pPr>
-            <a:r>
-              <a:rPr lang="en-US" sz="1130" dirty="0">
-                <a:solidFill>
-                  <a:srgbClr val="1F2528"/>
-                </a:solidFill>
-                <a:latin typeface="Aptos" pitchFamily="34" charset="0"/>
-                <a:ea typeface="Aptos" pitchFamily="34" charset="-122"/>
-                <a:cs typeface="Aptos" pitchFamily="34" charset="-120"/>
-              </a:rPr>
-              <a:t>LSTM architectures performed </a:t>
-            </a:r>
-            <a:r>
-              <a:rPr lang="en-US" sz="1130" b="1" dirty="0">
-                <a:solidFill>
-                  <a:srgbClr val="1F2528"/>
-                </a:solidFill>
-                <a:latin typeface="Aptos" pitchFamily="34" charset="0"/>
-                <a:ea typeface="Aptos" pitchFamily="34" charset="-122"/>
-                <a:cs typeface="Aptos" pitchFamily="34" charset="-120"/>
-              </a:rPr>
-              <a:t>worse</a:t>
-            </a:r>
-            <a:r>
-              <a:rPr lang="en-US" sz="1130" dirty="0">
-                <a:solidFill>
-                  <a:srgbClr val="1F2528"/>
-                </a:solidFill>
-                <a:latin typeface="Aptos" pitchFamily="34" charset="0"/>
-                <a:ea typeface="Aptos" pitchFamily="34" charset="-122"/>
-                <a:cs typeface="Aptos" pitchFamily="34" charset="-120"/>
-              </a:rPr>
-              <a:t> than CNN baseline. </a:t>
-            </a:r>
-          </a:p>
-          <a:p>
-            <a:pPr marL="0" indent="0" algn="l">
-              <a:lnSpc>
-                <a:spcPct val="90000"/>
-              </a:lnSpc>
-              <a:buNone/>
-            </a:pPr>
-            <a:r>
-              <a:rPr lang="en-US" sz="1130" dirty="0"/>
-              <a:t>Some reasons may include:</a:t>
-            </a:r>
-          </a:p>
-          <a:p>
-            <a:pPr marL="171450" indent="-171450" algn="l">
-              <a:lnSpc>
-                <a:spcPct val="90000"/>
-              </a:lnSpc>
-              <a:buFont typeface="Arial" panose="020B0604020202020204" pitchFamily="34" charset="0"/>
-              <a:buChar char="•"/>
-            </a:pPr>
-            <a:r>
-              <a:rPr lang="en-US" sz="1130" dirty="0"/>
-              <a:t>CNNs are inherently designed for 2D time-frequency patterns like audio clips</a:t>
-            </a:r>
-          </a:p>
-          <a:p>
-            <a:pPr marL="171450" indent="-171450" algn="l">
-              <a:lnSpc>
-                <a:spcPct val="90000"/>
-              </a:lnSpc>
-              <a:buFont typeface="Arial" panose="020B0604020202020204" pitchFamily="34" charset="0"/>
-              <a:buChar char="•"/>
-            </a:pPr>
-            <a:r>
-              <a:rPr lang="en-US" sz="1130" dirty="0"/>
-              <a:t>Dataset not large enough for LSTM</a:t>
-            </a:r>
-          </a:p>
-          <a:p>
-            <a:pPr marL="171450" indent="-171450" algn="l">
-              <a:lnSpc>
-                <a:spcPct val="90000"/>
-              </a:lnSpc>
-              <a:buFont typeface="Arial" panose="020B0604020202020204" pitchFamily="34" charset="0"/>
-              <a:buChar char="•"/>
-            </a:pPr>
-            <a:r>
-              <a:rPr lang="en-US" sz="1130" dirty="0"/>
-              <a:t>5 second audio clips not long enough to take advantage of LSTM’s strengths in modeling long temporal dependencies</a:t>
-            </a:r>
-          </a:p>
-        </p:txBody>
-      </p:sp>
-      <p:sp>
-        <p:nvSpPr>
-          <p:cNvPr id="17" name="Text 13">
-            <a:extLst>
-              <a:ext uri="{FF2B5EF4-FFF2-40B4-BE49-F238E27FC236}">
-                <a16:creationId xmlns:a16="http://schemas.microsoft.com/office/drawing/2014/main" id="{029A96BE-9D4F-9DAB-9A10-46F742A52D8E}"/>
-              </a:ext>
-            </a:extLst>
-          </p:cNvPr>
-          <p:cNvSpPr/>
-          <p:nvPr/>
-        </p:nvSpPr>
-        <p:spPr>
-          <a:xfrm>
-            <a:off x="737816" y="2051104"/>
-            <a:ext cx="4651038" cy="164592"/>
-          </a:xfrm>
-          <a:prstGeom prst="rect">
-            <a:avLst/>
-          </a:prstGeom>
-          <a:noFill/>
-          <a:ln/>
-        </p:spPr>
-        <p:txBody>
-          <a:bodyPr wrap="square" lIns="0" tIns="0" rIns="0" bIns="0" rtlCol="0" anchor="t">
-            <a:normAutofit/>
-          </a:bodyPr>
-          <a:lstStyle/>
-          <a:p>
-            <a:pPr>
-              <a:lnSpc>
-                <a:spcPct val="90000"/>
-              </a:lnSpc>
-            </a:pPr>
-            <a:r>
-              <a:rPr lang="en-US" sz="1000" b="1" dirty="0">
-                <a:solidFill>
-                  <a:srgbClr val="426E9E"/>
-                </a:solidFill>
-                <a:latin typeface="Aptos" pitchFamily="34" charset="0"/>
-              </a:rPr>
-              <a:t>LSTM architecture</a:t>
-            </a:r>
-          </a:p>
-        </p:txBody>
-      </p:sp>
-      <p:graphicFrame>
-        <p:nvGraphicFramePr>
-          <p:cNvPr id="18" name="Table 0">
-            <a:extLst>
-              <a:ext uri="{FF2B5EF4-FFF2-40B4-BE49-F238E27FC236}">
-                <a16:creationId xmlns:a16="http://schemas.microsoft.com/office/drawing/2014/main" id="{9A2E0087-A62C-C1EB-8E35-CF64515AB1E0}"/>
-              </a:ext>
-            </a:extLst>
-          </p:cNvPr>
-          <p:cNvGraphicFramePr>
-            <a:graphicFrameLocks noGrp="1"/>
-          </p:cNvGraphicFramePr>
-          <p:nvPr>
-            <p:extLst>
-              <p:ext uri="{D42A27DB-BD31-4B8C-83A1-F6EECF244321}">
-                <p14:modId xmlns:p14="http://schemas.microsoft.com/office/powerpoint/2010/main" val="4276692088"/>
-              </p:ext>
-            </p:extLst>
-          </p:nvPr>
-        </p:nvGraphicFramePr>
-        <p:xfrm>
-          <a:off x="737817" y="2220705"/>
-          <a:ext cx="4434165" cy="1821180"/>
-        </p:xfrm>
-        <a:graphic>
-          <a:graphicData uri="http://schemas.openxmlformats.org/drawingml/2006/table">
-            <a:tbl>
-              <a:tblPr/>
-              <a:tblGrid>
-                <a:gridCol w="1028428">
-                  <a:extLst>
-                    <a:ext uri="{9D8B030D-6E8A-4147-A177-3AD203B41FA5}">
-                      <a16:colId xmlns:a16="http://schemas.microsoft.com/office/drawing/2014/main" val="20000"/>
-                    </a:ext>
-                  </a:extLst>
-                </a:gridCol>
-                <a:gridCol w="3405737">
-                  <a:extLst>
-                    <a:ext uri="{9D8B030D-6E8A-4147-A177-3AD203B41FA5}">
-                      <a16:colId xmlns:a16="http://schemas.microsoft.com/office/drawing/2014/main" val="20001"/>
-                    </a:ext>
-                  </a:extLst>
-                </a:gridCol>
-              </a:tblGrid>
-              <a:tr h="155414">
-                <a:tc>
-                  <a:txBody>
-                    <a:bodyPr/>
-                    <a:lstStyle/>
-                    <a:p>
-                      <a:pPr marL="0" indent="0">
-                        <a:buNone/>
-                      </a:pPr>
-                      <a:r>
-                        <a:rPr lang="en-US" sz="1030" b="1" dirty="0">
-                          <a:solidFill>
-                            <a:srgbClr val="FFFFFF"/>
-                          </a:solidFill>
-                        </a:rPr>
-                        <a:t>Model Step</a:t>
-                      </a:r>
-                      <a:endParaRPr lang="en-US" sz="1030" dirty="0"/>
-                    </a:p>
-                  </a:txBody>
-                  <a:tcPr marL="50292" marR="50292" marT="50292" marB="50292">
-                    <a:lnL w="10795" cap="flat" cmpd="sng" algn="ctr">
-                      <a:solidFill>
-                        <a:srgbClr val="FFFFFF"/>
-                      </a:solidFill>
-                      <a:prstDash val="solid"/>
-                      <a:round/>
-                      <a:headEnd type="none" w="med" len="med"/>
-                      <a:tailEnd type="none" w="med" len="med"/>
-                    </a:lnL>
-                    <a:lnR w="10795" cap="flat" cmpd="sng" algn="ctr">
-                      <a:solidFill>
-                        <a:srgbClr val="FFFFFF"/>
-                      </a:solidFill>
-                      <a:prstDash val="solid"/>
-                      <a:round/>
-                      <a:headEnd type="none" w="med" len="med"/>
-                      <a:tailEnd type="none" w="med" len="med"/>
-                    </a:lnR>
-                    <a:lnT w="10795" cap="flat" cmpd="sng" algn="ctr">
-                      <a:solidFill>
-                        <a:srgbClr val="FFFFFF"/>
-                      </a:solidFill>
-                      <a:prstDash val="solid"/>
-                      <a:round/>
-                      <a:headEnd type="none" w="med" len="med"/>
-                      <a:tailEnd type="none" w="med" len="med"/>
-                    </a:lnT>
-                    <a:lnB w="10795" cap="flat" cmpd="sng" algn="ctr">
-                      <a:solidFill>
-                        <a:srgbClr val="FFFFFF"/>
-                      </a:solidFill>
-                      <a:prstDash val="solid"/>
-                      <a:round/>
-                      <a:headEnd type="none" w="med" len="med"/>
-                      <a:tailEnd type="none" w="med" len="med"/>
-                    </a:lnB>
-                    <a:solidFill>
-                      <a:srgbClr val="426E9E"/>
-                    </a:solidFill>
-                  </a:tcPr>
-                </a:tc>
-                <a:tc>
-                  <a:txBody>
-                    <a:bodyPr/>
-                    <a:lstStyle/>
-                    <a:p>
-                      <a:pPr marL="0" indent="0">
-                        <a:buNone/>
-                      </a:pPr>
-                      <a:r>
-                        <a:rPr lang="en-US" sz="1030" b="1" dirty="0">
-                          <a:solidFill>
-                            <a:srgbClr val="FFFFFF"/>
-                          </a:solidFill>
-                        </a:rPr>
-                        <a:t>LSTM Baseline Parameters / implementation</a:t>
-                      </a:r>
-                      <a:endParaRPr lang="en-US" sz="1030" dirty="0"/>
-                    </a:p>
-                  </a:txBody>
-                  <a:tcPr marL="50292" marR="50292" marT="50292" marB="50292">
-                    <a:lnL w="10795" cap="flat" cmpd="sng" algn="ctr">
-                      <a:solidFill>
-                        <a:srgbClr val="FFFFFF"/>
-                      </a:solidFill>
-                      <a:prstDash val="solid"/>
-                      <a:round/>
-                      <a:headEnd type="none" w="med" len="med"/>
-                      <a:tailEnd type="none" w="med" len="med"/>
-                    </a:lnL>
-                    <a:lnR w="10795" cap="flat" cmpd="sng" algn="ctr">
-                      <a:solidFill>
-                        <a:srgbClr val="FFFFFF"/>
-                      </a:solidFill>
-                      <a:prstDash val="solid"/>
-                      <a:round/>
-                      <a:headEnd type="none" w="med" len="med"/>
-                      <a:tailEnd type="none" w="med" len="med"/>
-                    </a:lnR>
-                    <a:lnT w="10795" cap="flat" cmpd="sng" algn="ctr">
-                      <a:solidFill>
-                        <a:srgbClr val="FFFFFF"/>
-                      </a:solidFill>
-                      <a:prstDash val="solid"/>
-                      <a:round/>
-                      <a:headEnd type="none" w="med" len="med"/>
-                      <a:tailEnd type="none" w="med" len="med"/>
-                    </a:lnT>
-                    <a:lnB w="10795" cap="flat" cmpd="sng" algn="ctr">
-                      <a:solidFill>
-                        <a:srgbClr val="FFFFFF"/>
-                      </a:solidFill>
-                      <a:prstDash val="solid"/>
-                      <a:round/>
-                      <a:headEnd type="none" w="med" len="med"/>
-                      <a:tailEnd type="none" w="med" len="med"/>
-                    </a:lnB>
-                    <a:solidFill>
-                      <a:srgbClr val="426E9E"/>
-                    </a:solidFill>
-                  </a:tcPr>
-                </a:tc>
-                <a:extLst>
-                  <a:ext uri="{0D108BD9-81ED-4DB2-BD59-A6C34878D82A}">
-                    <a16:rowId xmlns:a16="http://schemas.microsoft.com/office/drawing/2014/main" val="10000"/>
-                  </a:ext>
-                </a:extLst>
-              </a:tr>
-              <a:tr h="0">
-                <a:tc>
-                  <a:txBody>
-                    <a:bodyPr/>
-                    <a:lstStyle/>
-                    <a:p>
-                      <a:pPr marL="0" indent="0">
-                        <a:buNone/>
-                      </a:pPr>
-                      <a:r>
-                        <a:rPr lang="en-US" sz="705" b="1" dirty="0">
-                          <a:solidFill>
-                            <a:srgbClr val="1F2528"/>
-                          </a:solidFill>
-                        </a:rPr>
-                        <a:t>Input</a:t>
-                      </a:r>
-                      <a:endParaRPr lang="en-US" sz="705" dirty="0"/>
-                    </a:p>
-                  </a:txBody>
-                  <a:tcPr marL="50292" marR="50292" marT="50292" marB="50292">
-                    <a:lnL w="10795" cap="flat" cmpd="sng" algn="ctr">
-                      <a:solidFill>
-                        <a:srgbClr val="FFFFFF"/>
-                      </a:solidFill>
-                      <a:prstDash val="solid"/>
-                      <a:round/>
-                      <a:headEnd type="none" w="med" len="med"/>
-                      <a:tailEnd type="none" w="med" len="med"/>
-                    </a:lnL>
-                    <a:lnR w="10795" cap="flat" cmpd="sng" algn="ctr">
-                      <a:solidFill>
-                        <a:srgbClr val="FFFFFF"/>
-                      </a:solidFill>
-                      <a:prstDash val="solid"/>
-                      <a:round/>
-                      <a:headEnd type="none" w="med" len="med"/>
-                      <a:tailEnd type="none" w="med" len="med"/>
-                    </a:lnR>
-                    <a:lnT w="10795" cap="flat" cmpd="sng" algn="ctr">
-                      <a:solidFill>
-                        <a:srgbClr val="FFFFFF"/>
-                      </a:solidFill>
-                      <a:prstDash val="solid"/>
-                      <a:round/>
-                      <a:headEnd type="none" w="med" len="med"/>
-                      <a:tailEnd type="none" w="med" len="med"/>
-                    </a:lnT>
-                    <a:lnB w="10795" cap="flat" cmpd="sng" algn="ctr">
-                      <a:solidFill>
-                        <a:srgbClr val="FFFFFF"/>
-                      </a:solidFill>
-                      <a:prstDash val="solid"/>
-                      <a:round/>
-                      <a:headEnd type="none" w="med" len="med"/>
-                      <a:tailEnd type="none" w="med" len="med"/>
-                    </a:lnB>
-                    <a:solidFill>
-                      <a:srgbClr val="EEF2F3"/>
-                    </a:solidFill>
-                  </a:tcPr>
-                </a:tc>
-                <a:tc>
-                  <a:txBody>
-                    <a:bodyPr/>
-                    <a:lstStyle/>
-                    <a:p>
-                      <a:pPr marL="0" indent="0">
-                        <a:buNone/>
-                      </a:pPr>
-                      <a:r>
-                        <a:rPr lang="en-US" sz="705" dirty="0">
-                          <a:solidFill>
-                            <a:srgbClr val="1F2528"/>
-                          </a:solidFill>
-                        </a:rPr>
-                        <a:t>Piczak log-mel + delta segment tensor, shape (B, 2, 60, T)</a:t>
-                      </a:r>
-                      <a:endParaRPr lang="en-US" sz="705" dirty="0"/>
-                    </a:p>
-                  </a:txBody>
-                  <a:tcPr marL="50292" marR="50292" marT="50292" marB="50292">
-                    <a:lnL w="10795" cap="flat" cmpd="sng" algn="ctr">
-                      <a:solidFill>
-                        <a:srgbClr val="FFFFFF"/>
-                      </a:solidFill>
-                      <a:prstDash val="solid"/>
-                      <a:round/>
-                      <a:headEnd type="none" w="med" len="med"/>
-                      <a:tailEnd type="none" w="med" len="med"/>
-                    </a:lnL>
-                    <a:lnR w="10795" cap="flat" cmpd="sng" algn="ctr">
-                      <a:solidFill>
-                        <a:srgbClr val="FFFFFF"/>
-                      </a:solidFill>
-                      <a:prstDash val="solid"/>
-                      <a:round/>
-                      <a:headEnd type="none" w="med" len="med"/>
-                      <a:tailEnd type="none" w="med" len="med"/>
-                    </a:lnR>
-                    <a:lnT w="10795" cap="flat" cmpd="sng" algn="ctr">
-                      <a:solidFill>
-                        <a:srgbClr val="FFFFFF"/>
-                      </a:solidFill>
-                      <a:prstDash val="solid"/>
-                      <a:round/>
-                      <a:headEnd type="none" w="med" len="med"/>
-                      <a:tailEnd type="none" w="med" len="med"/>
-                    </a:lnT>
-                    <a:lnB w="10795" cap="flat" cmpd="sng" algn="ctr">
-                      <a:solidFill>
-                        <a:srgbClr val="FFFFFF"/>
-                      </a:solidFill>
-                      <a:prstDash val="solid"/>
-                      <a:round/>
-                      <a:headEnd type="none" w="med" len="med"/>
-                      <a:tailEnd type="none" w="med" len="med"/>
-                    </a:lnB>
-                    <a:solidFill>
-                      <a:srgbClr val="EEF2F3"/>
-                    </a:solidFill>
-                  </a:tcPr>
-                </a:tc>
-                <a:extLst>
-                  <a:ext uri="{0D108BD9-81ED-4DB2-BD59-A6C34878D82A}">
-                    <a16:rowId xmlns:a16="http://schemas.microsoft.com/office/drawing/2014/main" val="10001"/>
-                  </a:ext>
-                </a:extLst>
-              </a:tr>
-              <a:tr h="0">
-                <a:tc>
-                  <a:txBody>
-                    <a:bodyPr/>
-                    <a:lstStyle/>
-                    <a:p>
-                      <a:pPr marL="0" indent="0">
-                        <a:buNone/>
-                      </a:pPr>
-                      <a:r>
-                        <a:rPr lang="en-US" sz="705" b="1" dirty="0">
-                          <a:solidFill>
-                            <a:srgbClr val="1F2528"/>
-                          </a:solidFill>
-                        </a:rPr>
-                        <a:t>Reshape</a:t>
-                      </a:r>
-                      <a:endParaRPr lang="en-US" sz="705" dirty="0"/>
-                    </a:p>
-                  </a:txBody>
-                  <a:tcPr marL="50292" marR="50292" marT="50292" marB="50292">
-                    <a:lnL w="10795" cap="flat" cmpd="sng" algn="ctr">
-                      <a:solidFill>
-                        <a:srgbClr val="FFFFFF"/>
-                      </a:solidFill>
-                      <a:prstDash val="solid"/>
-                      <a:round/>
-                      <a:headEnd type="none" w="med" len="med"/>
-                      <a:tailEnd type="none" w="med" len="med"/>
-                    </a:lnL>
-                    <a:lnR w="10795" cap="flat" cmpd="sng" algn="ctr">
-                      <a:solidFill>
-                        <a:srgbClr val="FFFFFF"/>
-                      </a:solidFill>
-                      <a:prstDash val="solid"/>
-                      <a:round/>
-                      <a:headEnd type="none" w="med" len="med"/>
-                      <a:tailEnd type="none" w="med" len="med"/>
-                    </a:lnR>
-                    <a:lnT w="10795" cap="flat" cmpd="sng" algn="ctr">
-                      <a:solidFill>
-                        <a:srgbClr val="FFFFFF"/>
-                      </a:solidFill>
-                      <a:prstDash val="solid"/>
-                      <a:round/>
-                      <a:headEnd type="none" w="med" len="med"/>
-                      <a:tailEnd type="none" w="med" len="med"/>
-                    </a:lnT>
-                    <a:lnB w="10795" cap="flat" cmpd="sng" algn="ctr">
-                      <a:solidFill>
-                        <a:srgbClr val="FFFFFF"/>
-                      </a:solidFill>
-                      <a:prstDash val="solid"/>
-                      <a:round/>
-                      <a:headEnd type="none" w="med" len="med"/>
-                      <a:tailEnd type="none" w="med" len="med"/>
-                    </a:lnB>
-                    <a:solidFill>
-                      <a:srgbClr val="F8FAF8"/>
-                    </a:solidFill>
-                  </a:tcPr>
-                </a:tc>
-                <a:tc>
-                  <a:txBody>
-                    <a:bodyPr/>
-                    <a:lstStyle/>
-                    <a:p>
-                      <a:pPr marL="0" indent="0">
-                        <a:buNone/>
-                      </a:pPr>
-                      <a:r>
-                        <a:rPr lang="en-US" sz="705" dirty="0">
-                          <a:solidFill>
-                            <a:srgbClr val="1F2528"/>
-                          </a:solidFill>
-                        </a:rPr>
-                        <a:t>(B, 2, 60, T) -&gt; (B, T, 120); one sequence step per time frame</a:t>
-                      </a:r>
-                      <a:endParaRPr lang="en-US" sz="705" dirty="0"/>
-                    </a:p>
-                  </a:txBody>
-                  <a:tcPr marL="50292" marR="50292" marT="50292" marB="50292">
-                    <a:lnL w="10795" cap="flat" cmpd="sng" algn="ctr">
-                      <a:solidFill>
-                        <a:srgbClr val="FFFFFF"/>
-                      </a:solidFill>
-                      <a:prstDash val="solid"/>
-                      <a:round/>
-                      <a:headEnd type="none" w="med" len="med"/>
-                      <a:tailEnd type="none" w="med" len="med"/>
-                    </a:lnL>
-                    <a:lnR w="10795" cap="flat" cmpd="sng" algn="ctr">
-                      <a:solidFill>
-                        <a:srgbClr val="FFFFFF"/>
-                      </a:solidFill>
-                      <a:prstDash val="solid"/>
-                      <a:round/>
-                      <a:headEnd type="none" w="med" len="med"/>
-                      <a:tailEnd type="none" w="med" len="med"/>
-                    </a:lnR>
-                    <a:lnT w="10795" cap="flat" cmpd="sng" algn="ctr">
-                      <a:solidFill>
-                        <a:srgbClr val="FFFFFF"/>
-                      </a:solidFill>
-                      <a:prstDash val="solid"/>
-                      <a:round/>
-                      <a:headEnd type="none" w="med" len="med"/>
-                      <a:tailEnd type="none" w="med" len="med"/>
-                    </a:lnT>
-                    <a:lnB w="10795" cap="flat" cmpd="sng" algn="ctr">
-                      <a:solidFill>
-                        <a:srgbClr val="FFFFFF"/>
-                      </a:solidFill>
-                      <a:prstDash val="solid"/>
-                      <a:round/>
-                      <a:headEnd type="none" w="med" len="med"/>
-                      <a:tailEnd type="none" w="med" len="med"/>
-                    </a:lnB>
-                    <a:solidFill>
-                      <a:srgbClr val="F8FAF8"/>
-                    </a:solidFill>
-                  </a:tcPr>
-                </a:tc>
-                <a:extLst>
-                  <a:ext uri="{0D108BD9-81ED-4DB2-BD59-A6C34878D82A}">
-                    <a16:rowId xmlns:a16="http://schemas.microsoft.com/office/drawing/2014/main" val="10002"/>
-                  </a:ext>
-                </a:extLst>
-              </a:tr>
-              <a:tr h="0">
-                <a:tc>
-                  <a:txBody>
-                    <a:bodyPr/>
-                    <a:lstStyle/>
-                    <a:p>
-                      <a:pPr marL="0" indent="0">
-                        <a:buNone/>
-                      </a:pPr>
-                      <a:r>
-                        <a:rPr lang="en-US" sz="705" b="1" dirty="0">
-                          <a:solidFill>
-                            <a:srgbClr val="1F2528"/>
-                          </a:solidFill>
-                        </a:rPr>
-                        <a:t>Recurrent</a:t>
-                      </a:r>
-                      <a:endParaRPr lang="en-US" sz="705" dirty="0"/>
-                    </a:p>
-                  </a:txBody>
-                  <a:tcPr marL="50292" marR="50292" marT="50292" marB="50292">
-                    <a:lnL w="10795" cap="flat" cmpd="sng" algn="ctr">
-                      <a:solidFill>
-                        <a:srgbClr val="FFFFFF"/>
-                      </a:solidFill>
-                      <a:prstDash val="solid"/>
-                      <a:round/>
-                      <a:headEnd type="none" w="med" len="med"/>
-                      <a:tailEnd type="none" w="med" len="med"/>
-                    </a:lnL>
-                    <a:lnR w="10795" cap="flat" cmpd="sng" algn="ctr">
-                      <a:solidFill>
-                        <a:srgbClr val="FFFFFF"/>
-                      </a:solidFill>
-                      <a:prstDash val="solid"/>
-                      <a:round/>
-                      <a:headEnd type="none" w="med" len="med"/>
-                      <a:tailEnd type="none" w="med" len="med"/>
-                    </a:lnR>
-                    <a:lnT w="10795" cap="flat" cmpd="sng" algn="ctr">
-                      <a:solidFill>
-                        <a:srgbClr val="FFFFFF"/>
-                      </a:solidFill>
-                      <a:prstDash val="solid"/>
-                      <a:round/>
-                      <a:headEnd type="none" w="med" len="med"/>
-                      <a:tailEnd type="none" w="med" len="med"/>
-                    </a:lnT>
-                    <a:lnB w="10795" cap="flat" cmpd="sng" algn="ctr">
-                      <a:solidFill>
-                        <a:srgbClr val="FFFFFF"/>
-                      </a:solidFill>
-                      <a:prstDash val="solid"/>
-                      <a:round/>
-                      <a:headEnd type="none" w="med" len="med"/>
-                      <a:tailEnd type="none" w="med" len="med"/>
-                    </a:lnB>
-                    <a:solidFill>
-                      <a:srgbClr val="EEF2F3"/>
-                    </a:solidFill>
-                  </a:tcPr>
-                </a:tc>
-                <a:tc>
-                  <a:txBody>
-                    <a:bodyPr/>
-                    <a:lstStyle/>
-                    <a:p>
-                      <a:pPr marL="0" indent="0">
-                        <a:buNone/>
-                      </a:pPr>
-                      <a:r>
-                        <a:rPr lang="en-US" sz="705" dirty="0">
-                          <a:solidFill>
-                            <a:srgbClr val="1F2528"/>
-                          </a:solidFill>
-                        </a:rPr>
-                        <a:t>2-layer bidirectional LSTM; hidden size 128; Xavier/orthogonal init</a:t>
-                      </a:r>
-                      <a:endParaRPr lang="en-US" sz="705" dirty="0"/>
-                    </a:p>
-                  </a:txBody>
-                  <a:tcPr marL="50292" marR="50292" marT="50292" marB="50292">
-                    <a:lnL w="10795" cap="flat" cmpd="sng" algn="ctr">
-                      <a:solidFill>
-                        <a:srgbClr val="FFFFFF"/>
-                      </a:solidFill>
-                      <a:prstDash val="solid"/>
-                      <a:round/>
-                      <a:headEnd type="none" w="med" len="med"/>
-                      <a:tailEnd type="none" w="med" len="med"/>
-                    </a:lnL>
-                    <a:lnR w="10795" cap="flat" cmpd="sng" algn="ctr">
-                      <a:solidFill>
-                        <a:srgbClr val="FFFFFF"/>
-                      </a:solidFill>
-                      <a:prstDash val="solid"/>
-                      <a:round/>
-                      <a:headEnd type="none" w="med" len="med"/>
-                      <a:tailEnd type="none" w="med" len="med"/>
-                    </a:lnR>
-                    <a:lnT w="10795" cap="flat" cmpd="sng" algn="ctr">
-                      <a:solidFill>
-                        <a:srgbClr val="FFFFFF"/>
-                      </a:solidFill>
-                      <a:prstDash val="solid"/>
-                      <a:round/>
-                      <a:headEnd type="none" w="med" len="med"/>
-                      <a:tailEnd type="none" w="med" len="med"/>
-                    </a:lnT>
-                    <a:lnB w="10795" cap="flat" cmpd="sng" algn="ctr">
-                      <a:solidFill>
-                        <a:srgbClr val="FFFFFF"/>
-                      </a:solidFill>
-                      <a:prstDash val="solid"/>
-                      <a:round/>
-                      <a:headEnd type="none" w="med" len="med"/>
-                      <a:tailEnd type="none" w="med" len="med"/>
-                    </a:lnB>
-                    <a:solidFill>
-                      <a:srgbClr val="EEF2F3"/>
-                    </a:solidFill>
-                  </a:tcPr>
-                </a:tc>
-                <a:extLst>
-                  <a:ext uri="{0D108BD9-81ED-4DB2-BD59-A6C34878D82A}">
-                    <a16:rowId xmlns:a16="http://schemas.microsoft.com/office/drawing/2014/main" val="10003"/>
-                  </a:ext>
-                </a:extLst>
-              </a:tr>
-              <a:tr h="0">
-                <a:tc>
-                  <a:txBody>
-                    <a:bodyPr/>
-                    <a:lstStyle/>
-                    <a:p>
-                      <a:pPr marL="0" indent="0">
-                        <a:buNone/>
-                      </a:pPr>
-                      <a:r>
-                        <a:rPr lang="en-US" sz="705" b="1" dirty="0">
-                          <a:solidFill>
-                            <a:srgbClr val="1F2528"/>
-                          </a:solidFill>
-                        </a:rPr>
-                        <a:t>Pooling</a:t>
-                      </a:r>
-                      <a:endParaRPr lang="en-US" sz="705" dirty="0"/>
-                    </a:p>
-                  </a:txBody>
-                  <a:tcPr marL="50292" marR="50292" marT="50292" marB="50292">
-                    <a:lnL w="10795" cap="flat" cmpd="sng" algn="ctr">
-                      <a:solidFill>
-                        <a:srgbClr val="FFFFFF"/>
-                      </a:solidFill>
-                      <a:prstDash val="solid"/>
-                      <a:round/>
-                      <a:headEnd type="none" w="med" len="med"/>
-                      <a:tailEnd type="none" w="med" len="med"/>
-                    </a:lnL>
-                    <a:lnR w="10795" cap="flat" cmpd="sng" algn="ctr">
-                      <a:solidFill>
-                        <a:srgbClr val="FFFFFF"/>
-                      </a:solidFill>
-                      <a:prstDash val="solid"/>
-                      <a:round/>
-                      <a:headEnd type="none" w="med" len="med"/>
-                      <a:tailEnd type="none" w="med" len="med"/>
-                    </a:lnR>
-                    <a:lnT w="10795" cap="flat" cmpd="sng" algn="ctr">
-                      <a:solidFill>
-                        <a:srgbClr val="FFFFFF"/>
-                      </a:solidFill>
-                      <a:prstDash val="solid"/>
-                      <a:round/>
-                      <a:headEnd type="none" w="med" len="med"/>
-                      <a:tailEnd type="none" w="med" len="med"/>
-                    </a:lnT>
-                    <a:lnB w="10795" cap="flat" cmpd="sng" algn="ctr">
-                      <a:solidFill>
-                        <a:srgbClr val="FFFFFF"/>
-                      </a:solidFill>
-                      <a:prstDash val="solid"/>
-                      <a:round/>
-                      <a:headEnd type="none" w="med" len="med"/>
-                      <a:tailEnd type="none" w="med" len="med"/>
-                    </a:lnB>
-                    <a:solidFill>
-                      <a:srgbClr val="F8FAF8"/>
-                    </a:solidFill>
-                  </a:tcPr>
-                </a:tc>
-                <a:tc>
-                  <a:txBody>
-                    <a:bodyPr/>
-                    <a:lstStyle/>
-                    <a:p>
-                      <a:pPr marL="0" indent="0">
-                        <a:buNone/>
-                      </a:pPr>
-                      <a:r>
-                        <a:rPr lang="en-US" sz="705" dirty="0">
-                          <a:solidFill>
-                            <a:srgbClr val="1F2528"/>
-                          </a:solidFill>
-                        </a:rPr>
-                        <a:t>Final pooling</a:t>
-                      </a:r>
-                      <a:endParaRPr lang="en-US" sz="705" dirty="0"/>
-                    </a:p>
-                  </a:txBody>
-                  <a:tcPr marL="50292" marR="50292" marT="50292" marB="50292">
-                    <a:lnL w="10795" cap="flat" cmpd="sng" algn="ctr">
-                      <a:solidFill>
-                        <a:srgbClr val="FFFFFF"/>
-                      </a:solidFill>
-                      <a:prstDash val="solid"/>
-                      <a:round/>
-                      <a:headEnd type="none" w="med" len="med"/>
-                      <a:tailEnd type="none" w="med" len="med"/>
-                    </a:lnL>
-                    <a:lnR w="10795" cap="flat" cmpd="sng" algn="ctr">
-                      <a:solidFill>
-                        <a:srgbClr val="FFFFFF"/>
-                      </a:solidFill>
-                      <a:prstDash val="solid"/>
-                      <a:round/>
-                      <a:headEnd type="none" w="med" len="med"/>
-                      <a:tailEnd type="none" w="med" len="med"/>
-                    </a:lnR>
-                    <a:lnT w="10795" cap="flat" cmpd="sng" algn="ctr">
-                      <a:solidFill>
-                        <a:srgbClr val="FFFFFF"/>
-                      </a:solidFill>
-                      <a:prstDash val="solid"/>
-                      <a:round/>
-                      <a:headEnd type="none" w="med" len="med"/>
-                      <a:tailEnd type="none" w="med" len="med"/>
-                    </a:lnT>
-                    <a:lnB w="10795" cap="flat" cmpd="sng" algn="ctr">
-                      <a:solidFill>
-                        <a:srgbClr val="FFFFFF"/>
-                      </a:solidFill>
-                      <a:prstDash val="solid"/>
-                      <a:round/>
-                      <a:headEnd type="none" w="med" len="med"/>
-                      <a:tailEnd type="none" w="med" len="med"/>
-                    </a:lnB>
-                    <a:solidFill>
-                      <a:srgbClr val="F8FAF8"/>
-                    </a:solidFill>
-                  </a:tcPr>
-                </a:tc>
-                <a:extLst>
-                  <a:ext uri="{0D108BD9-81ED-4DB2-BD59-A6C34878D82A}">
-                    <a16:rowId xmlns:a16="http://schemas.microsoft.com/office/drawing/2014/main" val="10004"/>
-                  </a:ext>
-                </a:extLst>
-              </a:tr>
-              <a:tr h="0">
-                <a:tc>
-                  <a:txBody>
-                    <a:bodyPr/>
-                    <a:lstStyle/>
-                    <a:p>
-                      <a:pPr marL="0" indent="0">
-                        <a:buNone/>
-                      </a:pPr>
-                      <a:r>
-                        <a:rPr lang="en-US" sz="705" b="1" dirty="0">
-                          <a:solidFill>
-                            <a:srgbClr val="1F2528"/>
-                          </a:solidFill>
-                        </a:rPr>
-                        <a:t>Head</a:t>
-                      </a:r>
-                      <a:endParaRPr lang="en-US" sz="705" dirty="0"/>
-                    </a:p>
-                  </a:txBody>
-                  <a:tcPr marL="50292" marR="50292" marT="50292" marB="50292">
-                    <a:lnL w="10795" cap="flat" cmpd="sng" algn="ctr">
-                      <a:solidFill>
-                        <a:srgbClr val="FFFFFF"/>
-                      </a:solidFill>
-                      <a:prstDash val="solid"/>
-                      <a:round/>
-                      <a:headEnd type="none" w="med" len="med"/>
-                      <a:tailEnd type="none" w="med" len="med"/>
-                    </a:lnL>
-                    <a:lnR w="10795" cap="flat" cmpd="sng" algn="ctr">
-                      <a:solidFill>
-                        <a:srgbClr val="FFFFFF"/>
-                      </a:solidFill>
-                      <a:prstDash val="solid"/>
-                      <a:round/>
-                      <a:headEnd type="none" w="med" len="med"/>
-                      <a:tailEnd type="none" w="med" len="med"/>
-                    </a:lnR>
-                    <a:lnT w="10795" cap="flat" cmpd="sng" algn="ctr">
-                      <a:solidFill>
-                        <a:srgbClr val="FFFFFF"/>
-                      </a:solidFill>
-                      <a:prstDash val="solid"/>
-                      <a:round/>
-                      <a:headEnd type="none" w="med" len="med"/>
-                      <a:tailEnd type="none" w="med" len="med"/>
-                    </a:lnT>
-                    <a:lnB w="10795" cap="flat" cmpd="sng" algn="ctr">
-                      <a:solidFill>
-                        <a:srgbClr val="FFFFFF"/>
-                      </a:solidFill>
-                      <a:prstDash val="solid"/>
-                      <a:round/>
-                      <a:headEnd type="none" w="med" len="med"/>
-                      <a:tailEnd type="none" w="med" len="med"/>
-                    </a:lnB>
-                    <a:solidFill>
-                      <a:srgbClr val="EEF2F3"/>
-                    </a:solidFill>
-                  </a:tcPr>
-                </a:tc>
-                <a:tc>
-                  <a:txBody>
-                    <a:bodyPr/>
-                    <a:lstStyle/>
-                    <a:p>
-                      <a:pPr marL="0" indent="0">
-                        <a:buNone/>
-                      </a:pPr>
-                      <a:r>
-                        <a:rPr lang="en-US" sz="705" dirty="0">
-                          <a:solidFill>
-                            <a:srgbClr val="1F2528"/>
-                          </a:solidFill>
-                        </a:rPr>
-                        <a:t>Dropout 0.3 -&gt; Linear 512-&gt;50 logits</a:t>
-                      </a:r>
-                      <a:endParaRPr lang="en-US" sz="705" dirty="0"/>
-                    </a:p>
-                  </a:txBody>
-                  <a:tcPr marL="50292" marR="50292" marT="50292" marB="50292">
-                    <a:lnL w="10795" cap="flat" cmpd="sng" algn="ctr">
-                      <a:solidFill>
-                        <a:srgbClr val="FFFFFF"/>
-                      </a:solidFill>
-                      <a:prstDash val="solid"/>
-                      <a:round/>
-                      <a:headEnd type="none" w="med" len="med"/>
-                      <a:tailEnd type="none" w="med" len="med"/>
-                    </a:lnL>
-                    <a:lnR w="10795" cap="flat" cmpd="sng" algn="ctr">
-                      <a:solidFill>
-                        <a:srgbClr val="FFFFFF"/>
-                      </a:solidFill>
-                      <a:prstDash val="solid"/>
-                      <a:round/>
-                      <a:headEnd type="none" w="med" len="med"/>
-                      <a:tailEnd type="none" w="med" len="med"/>
-                    </a:lnR>
-                    <a:lnT w="10795" cap="flat" cmpd="sng" algn="ctr">
-                      <a:solidFill>
-                        <a:srgbClr val="FFFFFF"/>
-                      </a:solidFill>
-                      <a:prstDash val="solid"/>
-                      <a:round/>
-                      <a:headEnd type="none" w="med" len="med"/>
-                      <a:tailEnd type="none" w="med" len="med"/>
-                    </a:lnT>
-                    <a:lnB w="10795" cap="flat" cmpd="sng" algn="ctr">
-                      <a:solidFill>
-                        <a:srgbClr val="FFFFFF"/>
-                      </a:solidFill>
-                      <a:prstDash val="solid"/>
-                      <a:round/>
-                      <a:headEnd type="none" w="med" len="med"/>
-                      <a:tailEnd type="none" w="med" len="med"/>
-                    </a:lnB>
-                    <a:solidFill>
-                      <a:srgbClr val="EEF2F3"/>
-                    </a:solidFill>
-                  </a:tcPr>
-                </a:tc>
-                <a:extLst>
-                  <a:ext uri="{0D108BD9-81ED-4DB2-BD59-A6C34878D82A}">
-                    <a16:rowId xmlns:a16="http://schemas.microsoft.com/office/drawing/2014/main" val="10005"/>
-                  </a:ext>
-                </a:extLst>
-              </a:tr>
-              <a:tr h="0">
-                <a:tc>
-                  <a:txBody>
-                    <a:bodyPr/>
-                    <a:lstStyle/>
-                    <a:p>
-                      <a:pPr marL="0" indent="0">
-                        <a:buNone/>
-                      </a:pPr>
-                      <a:r>
-                        <a:rPr lang="en-US" sz="705" b="1" dirty="0">
-                          <a:solidFill>
-                            <a:srgbClr val="1F2528"/>
-                          </a:solidFill>
-                        </a:rPr>
-                        <a:t>Optimization</a:t>
-                      </a:r>
-                      <a:endParaRPr lang="en-US" sz="705" dirty="0"/>
-                    </a:p>
-                  </a:txBody>
-                  <a:tcPr marL="50292" marR="50292" marT="50292" marB="50292">
-                    <a:lnL w="10795" cap="flat" cmpd="sng" algn="ctr">
-                      <a:solidFill>
-                        <a:srgbClr val="FFFFFF"/>
-                      </a:solidFill>
-                      <a:prstDash val="solid"/>
-                      <a:round/>
-                      <a:headEnd type="none" w="med" len="med"/>
-                      <a:tailEnd type="none" w="med" len="med"/>
-                    </a:lnL>
-                    <a:lnR w="10795" cap="flat" cmpd="sng" algn="ctr">
-                      <a:solidFill>
-                        <a:srgbClr val="FFFFFF"/>
-                      </a:solidFill>
-                      <a:prstDash val="solid"/>
-                      <a:round/>
-                      <a:headEnd type="none" w="med" len="med"/>
-                      <a:tailEnd type="none" w="med" len="med"/>
-                    </a:lnR>
-                    <a:lnT w="10795" cap="flat" cmpd="sng" algn="ctr">
-                      <a:solidFill>
-                        <a:srgbClr val="FFFFFF"/>
-                      </a:solidFill>
-                      <a:prstDash val="solid"/>
-                      <a:round/>
-                      <a:headEnd type="none" w="med" len="med"/>
-                      <a:tailEnd type="none" w="med" len="med"/>
-                    </a:lnT>
-                    <a:lnB w="10795" cap="flat" cmpd="sng" algn="ctr">
-                      <a:solidFill>
-                        <a:srgbClr val="FFFFFF"/>
-                      </a:solidFill>
-                      <a:prstDash val="solid"/>
-                      <a:round/>
-                      <a:headEnd type="none" w="med" len="med"/>
-                      <a:tailEnd type="none" w="med" len="med"/>
-                    </a:lnB>
-                    <a:solidFill>
-                      <a:srgbClr val="F8FAF8"/>
-                    </a:solidFill>
-                  </a:tcPr>
-                </a:tc>
-                <a:tc>
-                  <a:txBody>
-                    <a:bodyPr/>
-                    <a:lstStyle/>
-                    <a:p>
-                      <a:pPr marL="0" indent="0">
-                        <a:buNone/>
-                      </a:pPr>
-                      <a:r>
-                        <a:rPr lang="en-US" sz="705" dirty="0">
-                          <a:solidFill>
-                            <a:srgbClr val="1F2528"/>
-                          </a:solidFill>
-                        </a:rPr>
-                        <a:t>CrossEntropyLoss; Adam lr 1e-3; weight decay 1e-4; cosine LR; grad clip 1.0</a:t>
-                      </a:r>
-                      <a:endParaRPr lang="en-US" sz="705" dirty="0"/>
-                    </a:p>
-                  </a:txBody>
-                  <a:tcPr marL="50292" marR="50292" marT="50292" marB="50292">
-                    <a:lnL w="10795" cap="flat" cmpd="sng" algn="ctr">
-                      <a:solidFill>
-                        <a:srgbClr val="FFFFFF"/>
-                      </a:solidFill>
-                      <a:prstDash val="solid"/>
-                      <a:round/>
-                      <a:headEnd type="none" w="med" len="med"/>
-                      <a:tailEnd type="none" w="med" len="med"/>
-                    </a:lnL>
-                    <a:lnR w="10795" cap="flat" cmpd="sng" algn="ctr">
-                      <a:solidFill>
-                        <a:srgbClr val="FFFFFF"/>
-                      </a:solidFill>
-                      <a:prstDash val="solid"/>
-                      <a:round/>
-                      <a:headEnd type="none" w="med" len="med"/>
-                      <a:tailEnd type="none" w="med" len="med"/>
-                    </a:lnR>
-                    <a:lnT w="10795" cap="flat" cmpd="sng" algn="ctr">
-                      <a:solidFill>
-                        <a:srgbClr val="FFFFFF"/>
-                      </a:solidFill>
-                      <a:prstDash val="solid"/>
-                      <a:round/>
-                      <a:headEnd type="none" w="med" len="med"/>
-                      <a:tailEnd type="none" w="med" len="med"/>
-                    </a:lnT>
-                    <a:lnB w="10795" cap="flat" cmpd="sng" algn="ctr">
-                      <a:solidFill>
-                        <a:srgbClr val="FFFFFF"/>
-                      </a:solidFill>
-                      <a:prstDash val="solid"/>
-                      <a:round/>
-                      <a:headEnd type="none" w="med" len="med"/>
-                      <a:tailEnd type="none" w="med" len="med"/>
-                    </a:lnB>
-                    <a:solidFill>
-                      <a:srgbClr val="F8FAF8"/>
-                    </a:solidFill>
-                  </a:tcPr>
-                </a:tc>
-                <a:extLst>
-                  <a:ext uri="{0D108BD9-81ED-4DB2-BD59-A6C34878D82A}">
-                    <a16:rowId xmlns:a16="http://schemas.microsoft.com/office/drawing/2014/main" val="10006"/>
-                  </a:ext>
-                </a:extLst>
-              </a:tr>
-              <a:tr h="190359">
-                <a:tc>
-                  <a:txBody>
-                    <a:bodyPr/>
-                    <a:lstStyle/>
-                    <a:p>
-                      <a:pPr marL="0" indent="0">
-                        <a:buNone/>
-                      </a:pPr>
-                      <a:r>
-                        <a:rPr lang="en-US" sz="705" b="1" dirty="0">
-                          <a:solidFill>
-                            <a:srgbClr val="1F2528"/>
-                          </a:solidFill>
-                        </a:rPr>
-                        <a:t>Evaluation</a:t>
-                      </a:r>
-                      <a:endParaRPr lang="en-US" sz="705" dirty="0"/>
-                    </a:p>
-                  </a:txBody>
-                  <a:tcPr marL="50292" marR="50292" marT="50292" marB="50292">
-                    <a:lnL w="10795" cap="flat" cmpd="sng" algn="ctr">
-                      <a:solidFill>
-                        <a:srgbClr val="FFFFFF"/>
-                      </a:solidFill>
-                      <a:prstDash val="solid"/>
-                      <a:round/>
-                      <a:headEnd type="none" w="med" len="med"/>
-                      <a:tailEnd type="none" w="med" len="med"/>
-                    </a:lnL>
-                    <a:lnR w="10795" cap="flat" cmpd="sng" algn="ctr">
-                      <a:solidFill>
-                        <a:srgbClr val="FFFFFF"/>
-                      </a:solidFill>
-                      <a:prstDash val="solid"/>
-                      <a:round/>
-                      <a:headEnd type="none" w="med" len="med"/>
-                      <a:tailEnd type="none" w="med" len="med"/>
-                    </a:lnR>
-                    <a:lnT w="10795" cap="flat" cmpd="sng" algn="ctr">
-                      <a:solidFill>
-                        <a:srgbClr val="FFFFFF"/>
-                      </a:solidFill>
-                      <a:prstDash val="solid"/>
-                      <a:round/>
-                      <a:headEnd type="none" w="med" len="med"/>
-                      <a:tailEnd type="none" w="med" len="med"/>
-                    </a:lnT>
-                    <a:lnB w="10795" cap="flat" cmpd="sng" algn="ctr">
-                      <a:solidFill>
-                        <a:srgbClr val="FFFFFF"/>
-                      </a:solidFill>
-                      <a:prstDash val="solid"/>
-                      <a:round/>
-                      <a:headEnd type="none" w="med" len="med"/>
-                      <a:tailEnd type="none" w="med" len="med"/>
-                    </a:lnB>
-                    <a:solidFill>
-                      <a:srgbClr val="EEF2F3"/>
-                    </a:solidFill>
-                  </a:tcPr>
-                </a:tc>
-                <a:tc>
-                  <a:txBody>
-                    <a:bodyPr/>
-                    <a:lstStyle/>
-                    <a:p>
-                      <a:pPr marL="0" indent="0">
-                        <a:buNone/>
-                      </a:pPr>
-                      <a:r>
-                        <a:rPr lang="en-US" sz="705" dirty="0">
-                          <a:solidFill>
-                            <a:srgbClr val="1F2528"/>
-                          </a:solidFill>
-                        </a:rPr>
-                        <a:t>Clip-level probability voting; 60 epochs ran but accuracy reported at best value attained over all epochs; batch size 64</a:t>
-                      </a:r>
-                      <a:endParaRPr lang="en-US" sz="705" dirty="0"/>
-                    </a:p>
-                  </a:txBody>
-                  <a:tcPr marL="50292" marR="50292" marT="50292" marB="50292">
-                    <a:lnL w="10795" cap="flat" cmpd="sng" algn="ctr">
-                      <a:solidFill>
-                        <a:srgbClr val="FFFFFF"/>
-                      </a:solidFill>
-                      <a:prstDash val="solid"/>
-                      <a:round/>
-                      <a:headEnd type="none" w="med" len="med"/>
-                      <a:tailEnd type="none" w="med" len="med"/>
-                    </a:lnL>
-                    <a:lnR w="10795" cap="flat" cmpd="sng" algn="ctr">
-                      <a:solidFill>
-                        <a:srgbClr val="FFFFFF"/>
-                      </a:solidFill>
-                      <a:prstDash val="solid"/>
-                      <a:round/>
-                      <a:headEnd type="none" w="med" len="med"/>
-                      <a:tailEnd type="none" w="med" len="med"/>
-                    </a:lnR>
-                    <a:lnT w="10795" cap="flat" cmpd="sng" algn="ctr">
-                      <a:solidFill>
-                        <a:srgbClr val="FFFFFF"/>
-                      </a:solidFill>
-                      <a:prstDash val="solid"/>
-                      <a:round/>
-                      <a:headEnd type="none" w="med" len="med"/>
-                      <a:tailEnd type="none" w="med" len="med"/>
-                    </a:lnT>
-                    <a:lnB w="10795" cap="flat" cmpd="sng" algn="ctr">
-                      <a:solidFill>
-                        <a:srgbClr val="FFFFFF"/>
-                      </a:solidFill>
-                      <a:prstDash val="solid"/>
-                      <a:round/>
-                      <a:headEnd type="none" w="med" len="med"/>
-                      <a:tailEnd type="none" w="med" len="med"/>
-                    </a:lnB>
-                    <a:solidFill>
-                      <a:srgbClr val="EEF2F3"/>
-                    </a:solidFill>
-                  </a:tcPr>
-                </a:tc>
-                <a:extLst>
-                  <a:ext uri="{0D108BD9-81ED-4DB2-BD59-A6C34878D82A}">
-                    <a16:rowId xmlns:a16="http://schemas.microsoft.com/office/drawing/2014/main" val="10007"/>
-                  </a:ext>
-                </a:extLst>
-              </a:tr>
-            </a:tbl>
-          </a:graphicData>
-        </a:graphic>
-      </p:graphicFrame>
-      <p:graphicFrame>
-        <p:nvGraphicFramePr>
-          <p:cNvPr id="23" name="Table 22">
-            <a:extLst>
-              <a:ext uri="{FF2B5EF4-FFF2-40B4-BE49-F238E27FC236}">
-                <a16:creationId xmlns:a16="http://schemas.microsoft.com/office/drawing/2014/main" id="{5834280A-C1C7-08BD-15D1-C5A9597C1C5E}"/>
-              </a:ext>
-            </a:extLst>
-          </p:cNvPr>
-          <p:cNvGraphicFramePr>
-            <a:graphicFrameLocks noGrp="1"/>
-          </p:cNvGraphicFramePr>
-          <p:nvPr>
-            <p:extLst>
-              <p:ext uri="{D42A27DB-BD31-4B8C-83A1-F6EECF244321}">
-                <p14:modId xmlns:p14="http://schemas.microsoft.com/office/powerpoint/2010/main" val="1083395052"/>
-              </p:ext>
-            </p:extLst>
-          </p:nvPr>
-        </p:nvGraphicFramePr>
-        <p:xfrm>
-          <a:off x="6104727" y="5745480"/>
-          <a:ext cx="5017842" cy="600456"/>
-        </p:xfrm>
-        <a:graphic>
-          <a:graphicData uri="http://schemas.openxmlformats.org/drawingml/2006/table">
-            <a:tbl>
-              <a:tblPr firstRow="1" bandRow="1"/>
-              <a:tblGrid>
-                <a:gridCol w="521941">
-                  <a:extLst>
-                    <a:ext uri="{9D8B030D-6E8A-4147-A177-3AD203B41FA5}">
-                      <a16:colId xmlns:a16="http://schemas.microsoft.com/office/drawing/2014/main" val="1390217886"/>
-                    </a:ext>
-                  </a:extLst>
-                </a:gridCol>
-                <a:gridCol w="782171">
-                  <a:extLst>
-                    <a:ext uri="{9D8B030D-6E8A-4147-A177-3AD203B41FA5}">
-                      <a16:colId xmlns:a16="http://schemas.microsoft.com/office/drawing/2014/main" val="1688786671"/>
-                    </a:ext>
-                  </a:extLst>
-                </a:gridCol>
-                <a:gridCol w="782171">
-                  <a:extLst>
-                    <a:ext uri="{9D8B030D-6E8A-4147-A177-3AD203B41FA5}">
-                      <a16:colId xmlns:a16="http://schemas.microsoft.com/office/drawing/2014/main" val="3390239440"/>
-                    </a:ext>
-                  </a:extLst>
-                </a:gridCol>
-                <a:gridCol w="782171">
-                  <a:extLst>
-                    <a:ext uri="{9D8B030D-6E8A-4147-A177-3AD203B41FA5}">
-                      <a16:colId xmlns:a16="http://schemas.microsoft.com/office/drawing/2014/main" val="839013668"/>
-                    </a:ext>
-                  </a:extLst>
-                </a:gridCol>
-                <a:gridCol w="782171">
-                  <a:extLst>
-                    <a:ext uri="{9D8B030D-6E8A-4147-A177-3AD203B41FA5}">
-                      <a16:colId xmlns:a16="http://schemas.microsoft.com/office/drawing/2014/main" val="1387880440"/>
-                    </a:ext>
-                  </a:extLst>
-                </a:gridCol>
-                <a:gridCol w="1367217">
-                  <a:extLst>
-                    <a:ext uri="{9D8B030D-6E8A-4147-A177-3AD203B41FA5}">
-                      <a16:colId xmlns:a16="http://schemas.microsoft.com/office/drawing/2014/main" val="1167938057"/>
-                    </a:ext>
-                  </a:extLst>
-                </a:gridCol>
-              </a:tblGrid>
-              <a:tr h="257536">
-                <a:tc>
-                  <a:txBody>
-                    <a:bodyPr/>
-                    <a:lstStyle/>
-                    <a:p>
-                      <a:pPr marL="0" indent="0" algn="l" defTabSz="914400" rtl="0" eaLnBrk="1" latinLnBrk="0" hangingPunct="1">
-                        <a:buNone/>
-                      </a:pPr>
-                      <a:r>
-                        <a:rPr lang="en-US" sz="1030" b="1" kern="1200" dirty="0">
-                          <a:solidFill>
-                            <a:srgbClr val="FFFFFF"/>
-                          </a:solidFill>
-                          <a:latin typeface="+mn-lt"/>
-                          <a:ea typeface="+mn-ea"/>
-                          <a:cs typeface="+mn-cs"/>
-                        </a:rPr>
-                        <a:t>Run </a:t>
-                      </a:r>
-                    </a:p>
-                  </a:txBody>
-                  <a:tcPr marL="123825" marR="123825" marT="57150" marB="57150" anchor="ctr">
-                    <a:lnL>
-                      <a:noFill/>
-                    </a:lnL>
-                    <a:lnR>
-                      <a:noFill/>
-                    </a:lnR>
-                    <a:lnT>
-                      <a:noFill/>
-                    </a:lnT>
-                    <a:lnB>
-                      <a:noFill/>
-                    </a:lnB>
-                    <a:solidFill>
-                      <a:srgbClr val="426E9E"/>
-                    </a:solidFill>
-                  </a:tcPr>
-                </a:tc>
-                <a:tc>
-                  <a:txBody>
-                    <a:bodyPr/>
-                    <a:lstStyle/>
-                    <a:p>
-                      <a:pPr marL="0" indent="0" algn="l" defTabSz="914400" rtl="0" eaLnBrk="1" latinLnBrk="0" hangingPunct="1">
-                        <a:buNone/>
-                      </a:pPr>
-                      <a:r>
-                        <a:rPr lang="en-US" sz="1030" b="1" kern="1200" dirty="0">
-                          <a:solidFill>
-                            <a:srgbClr val="FFFFFF"/>
-                          </a:solidFill>
-                          <a:latin typeface="+mn-lt"/>
-                          <a:ea typeface="+mn-ea"/>
-                          <a:cs typeface="+mn-cs"/>
-                        </a:rPr>
-                        <a:t>hidden</a:t>
-                      </a:r>
-                    </a:p>
-                  </a:txBody>
-                  <a:tcPr marL="123825" marR="123825" marT="57150" marB="57150" anchor="ctr">
-                    <a:lnL>
-                      <a:noFill/>
-                    </a:lnL>
-                    <a:lnR>
-                      <a:noFill/>
-                    </a:lnR>
-                    <a:lnT>
-                      <a:noFill/>
-                    </a:lnT>
-                    <a:lnB>
-                      <a:noFill/>
-                    </a:lnB>
-                    <a:solidFill>
-                      <a:srgbClr val="426E9E"/>
-                    </a:solidFill>
-                  </a:tcPr>
-                </a:tc>
-                <a:tc>
-                  <a:txBody>
-                    <a:bodyPr/>
-                    <a:lstStyle/>
-                    <a:p>
-                      <a:pPr marL="0" indent="0" algn="l" defTabSz="914400" rtl="0" eaLnBrk="1" latinLnBrk="0" hangingPunct="1">
-                        <a:buNone/>
-                      </a:pPr>
-                      <a:r>
-                        <a:rPr lang="en-US" sz="1030" b="1" kern="1200" dirty="0">
-                          <a:solidFill>
-                            <a:srgbClr val="FFFFFF"/>
-                          </a:solidFill>
-                          <a:latin typeface="+mn-lt"/>
-                          <a:ea typeface="+mn-ea"/>
-                          <a:cs typeface="+mn-cs"/>
-                        </a:rPr>
-                        <a:t>layers</a:t>
-                      </a:r>
-                    </a:p>
-                  </a:txBody>
-                  <a:tcPr marL="123825" marR="123825" marT="57150" marB="57150" anchor="ctr">
-                    <a:lnL>
-                      <a:noFill/>
-                    </a:lnL>
-                    <a:lnR>
-                      <a:noFill/>
-                    </a:lnR>
-                    <a:lnT>
-                      <a:noFill/>
-                    </a:lnT>
-                    <a:lnB>
-                      <a:noFill/>
-                    </a:lnB>
-                    <a:solidFill>
-                      <a:srgbClr val="426E9E"/>
-                    </a:solidFill>
-                  </a:tcPr>
-                </a:tc>
-                <a:tc>
-                  <a:txBody>
-                    <a:bodyPr/>
-                    <a:lstStyle/>
-                    <a:p>
-                      <a:pPr marL="0" indent="0" algn="l" defTabSz="914400" rtl="0" eaLnBrk="1" latinLnBrk="0" hangingPunct="1">
-                        <a:buNone/>
-                      </a:pPr>
-                      <a:r>
-                        <a:rPr lang="en-US" sz="1030" b="1" kern="1200" dirty="0" err="1">
-                          <a:solidFill>
-                            <a:srgbClr val="FFFFFF"/>
-                          </a:solidFill>
-                          <a:latin typeface="+mn-lt"/>
-                          <a:ea typeface="+mn-ea"/>
-                          <a:cs typeface="+mn-cs"/>
-                        </a:rPr>
-                        <a:t>bidir</a:t>
-                      </a:r>
-                      <a:endParaRPr lang="en-US" sz="1030" b="1" kern="1200" dirty="0">
-                        <a:solidFill>
-                          <a:srgbClr val="FFFFFF"/>
-                        </a:solidFill>
-                        <a:latin typeface="+mn-lt"/>
-                        <a:ea typeface="+mn-ea"/>
-                        <a:cs typeface="+mn-cs"/>
-                      </a:endParaRPr>
-                    </a:p>
-                  </a:txBody>
-                  <a:tcPr marL="123825" marR="123825" marT="57150" marB="57150" anchor="ctr">
-                    <a:lnL>
-                      <a:noFill/>
-                    </a:lnL>
-                    <a:lnR>
-                      <a:noFill/>
-                    </a:lnR>
-                    <a:lnT>
-                      <a:noFill/>
-                    </a:lnT>
-                    <a:lnB>
-                      <a:noFill/>
-                    </a:lnB>
-                    <a:solidFill>
-                      <a:srgbClr val="426E9E"/>
-                    </a:solidFill>
-                  </a:tcPr>
-                </a:tc>
-                <a:tc>
-                  <a:txBody>
-                    <a:bodyPr/>
-                    <a:lstStyle/>
-                    <a:p>
-                      <a:pPr marL="0" indent="0" algn="l" defTabSz="914400" rtl="0" eaLnBrk="1" latinLnBrk="0" hangingPunct="1">
-                        <a:buNone/>
-                      </a:pPr>
-                      <a:r>
-                        <a:rPr lang="en-US" sz="1030" b="1" kern="1200" dirty="0">
-                          <a:solidFill>
-                            <a:srgbClr val="FFFFFF"/>
-                          </a:solidFill>
-                          <a:latin typeface="+mn-lt"/>
-                          <a:ea typeface="+mn-ea"/>
-                          <a:cs typeface="+mn-cs"/>
-                        </a:rPr>
-                        <a:t>pooling</a:t>
-                      </a:r>
-                    </a:p>
-                  </a:txBody>
-                  <a:tcPr marL="123825" marR="123825" marT="57150" marB="57150" anchor="ctr">
-                    <a:lnL>
-                      <a:noFill/>
-                    </a:lnL>
-                    <a:lnR>
-                      <a:noFill/>
-                    </a:lnR>
-                    <a:lnT>
-                      <a:noFill/>
-                    </a:lnT>
-                    <a:lnB>
-                      <a:noFill/>
-                    </a:lnB>
-                    <a:solidFill>
-                      <a:srgbClr val="426E9E"/>
-                    </a:solidFill>
-                  </a:tcPr>
-                </a:tc>
-                <a:tc>
-                  <a:txBody>
-                    <a:bodyPr/>
-                    <a:lstStyle/>
-                    <a:p>
-                      <a:pPr marL="0" indent="0" algn="l" defTabSz="914400" rtl="0" eaLnBrk="1" latinLnBrk="0" hangingPunct="1">
-                        <a:buNone/>
-                      </a:pPr>
-                      <a:r>
-                        <a:rPr lang="en-US" sz="1030" b="1" kern="1200" dirty="0">
-                          <a:solidFill>
-                            <a:srgbClr val="FFFFFF"/>
-                          </a:solidFill>
-                          <a:latin typeface="+mn-lt"/>
-                          <a:ea typeface="+mn-ea"/>
-                          <a:cs typeface="+mn-cs"/>
-                        </a:rPr>
-                        <a:t>Question</a:t>
-                      </a:r>
-                    </a:p>
-                  </a:txBody>
-                  <a:tcPr marL="123825" marR="123825" marT="57150" marB="57150" anchor="ctr">
-                    <a:lnL>
-                      <a:noFill/>
-                    </a:lnL>
-                    <a:lnR>
-                      <a:noFill/>
-                    </a:lnR>
-                    <a:lnT>
-                      <a:noFill/>
-                    </a:lnT>
-                    <a:lnB>
-                      <a:noFill/>
-                    </a:lnB>
-                    <a:solidFill>
-                      <a:srgbClr val="426E9E"/>
-                    </a:solidFill>
-                  </a:tcPr>
-                </a:tc>
-                <a:extLst>
-                  <a:ext uri="{0D108BD9-81ED-4DB2-BD59-A6C34878D82A}">
-                    <a16:rowId xmlns:a16="http://schemas.microsoft.com/office/drawing/2014/main" val="3935896676"/>
-                  </a:ext>
-                </a:extLst>
-              </a:tr>
-              <a:tr h="249799">
-                <a:tc>
-                  <a:txBody>
-                    <a:bodyPr/>
-                    <a:lstStyle/>
-                    <a:p>
-                      <a:pPr>
-                        <a:buNone/>
-                      </a:pPr>
-                      <a:r>
-                        <a:rPr lang="en-US" sz="705" kern="1200" dirty="0">
-                          <a:solidFill>
-                            <a:srgbClr val="1F2528"/>
-                          </a:solidFill>
-                          <a:latin typeface="+mn-lt"/>
-                          <a:ea typeface="+mn-ea"/>
-                          <a:cs typeface="+mn-cs"/>
-                        </a:rPr>
-                        <a:t>8</a:t>
-                      </a:r>
-                    </a:p>
-                  </a:txBody>
-                  <a:tcPr marL="123825" marR="123825" marT="57150" marB="57150" anchor="ctr">
-                    <a:lnL>
-                      <a:noFill/>
-                    </a:lnL>
-                    <a:lnR>
-                      <a:noFill/>
-                    </a:lnR>
-                    <a:lnT>
-                      <a:noFill/>
-                    </a:lnT>
-                    <a:lnB>
-                      <a:noFill/>
-                    </a:lnB>
-                    <a:solidFill>
-                      <a:srgbClr val="EFF2F3"/>
-                    </a:solidFill>
-                  </a:tcPr>
-                </a:tc>
-                <a:tc>
-                  <a:txBody>
-                    <a:bodyPr/>
-                    <a:lstStyle/>
-                    <a:p>
-                      <a:pPr>
-                        <a:buNone/>
-                      </a:pPr>
-                      <a:r>
-                        <a:rPr lang="en-US" sz="705" kern="1200" dirty="0">
-                          <a:solidFill>
-                            <a:srgbClr val="1F2528"/>
-                          </a:solidFill>
-                          <a:latin typeface="+mn-lt"/>
-                          <a:ea typeface="+mn-ea"/>
-                          <a:cs typeface="+mn-cs"/>
-                        </a:rPr>
-                        <a:t>256</a:t>
-                      </a:r>
-                    </a:p>
-                  </a:txBody>
-                  <a:tcPr marL="123825" marR="123825" marT="57150" marB="57150" anchor="ctr">
-                    <a:lnL>
-                      <a:noFill/>
-                    </a:lnL>
-                    <a:lnR>
-                      <a:noFill/>
-                    </a:lnR>
-                    <a:lnT>
-                      <a:noFill/>
-                    </a:lnT>
-                    <a:lnB>
-                      <a:noFill/>
-                    </a:lnB>
-                    <a:solidFill>
-                      <a:srgbClr val="EFF2F3"/>
-                    </a:solidFill>
-                  </a:tcPr>
-                </a:tc>
-                <a:tc>
-                  <a:txBody>
-                    <a:bodyPr/>
-                    <a:lstStyle/>
-                    <a:p>
-                      <a:pPr>
-                        <a:buNone/>
-                      </a:pPr>
-                      <a:r>
-                        <a:rPr lang="en-US" sz="705" kern="1200" dirty="0">
-                          <a:solidFill>
-                            <a:srgbClr val="1F2528"/>
-                          </a:solidFill>
-                          <a:latin typeface="+mn-lt"/>
-                          <a:ea typeface="+mn-ea"/>
-                          <a:cs typeface="+mn-cs"/>
-                        </a:rPr>
-                        <a:t>1</a:t>
-                      </a:r>
-                    </a:p>
-                  </a:txBody>
-                  <a:tcPr marL="123825" marR="123825" marT="57150" marB="57150" anchor="ctr">
-                    <a:lnL>
-                      <a:noFill/>
-                    </a:lnL>
-                    <a:lnR>
-                      <a:noFill/>
-                    </a:lnR>
-                    <a:lnT>
-                      <a:noFill/>
-                    </a:lnT>
-                    <a:lnB>
-                      <a:noFill/>
-                    </a:lnB>
-                    <a:solidFill>
-                      <a:srgbClr val="EFF2F3"/>
-                    </a:solidFill>
-                  </a:tcPr>
-                </a:tc>
-                <a:tc>
-                  <a:txBody>
-                    <a:bodyPr/>
-                    <a:lstStyle/>
-                    <a:p>
-                      <a:pPr>
-                        <a:buNone/>
-                      </a:pPr>
-                      <a:r>
-                        <a:rPr lang="en-US" sz="705" kern="1200" dirty="0">
-                          <a:solidFill>
-                            <a:srgbClr val="1F2528"/>
-                          </a:solidFill>
-                          <a:latin typeface="+mn-lt"/>
-                          <a:ea typeface="+mn-ea"/>
-                          <a:cs typeface="+mn-cs"/>
-                        </a:rPr>
-                        <a:t>True</a:t>
-                      </a:r>
-                    </a:p>
-                  </a:txBody>
-                  <a:tcPr marL="123825" marR="123825" marT="57150" marB="57150" anchor="ctr">
-                    <a:lnL>
-                      <a:noFill/>
-                    </a:lnL>
-                    <a:lnR>
-                      <a:noFill/>
-                    </a:lnR>
-                    <a:lnT>
-                      <a:noFill/>
-                    </a:lnT>
-                    <a:lnB>
-                      <a:noFill/>
-                    </a:lnB>
-                    <a:solidFill>
-                      <a:srgbClr val="EFF2F3"/>
-                    </a:solidFill>
-                  </a:tcPr>
-                </a:tc>
-                <a:tc>
-                  <a:txBody>
-                    <a:bodyPr/>
-                    <a:lstStyle/>
-                    <a:p>
-                      <a:pPr>
-                        <a:buNone/>
-                      </a:pPr>
-                      <a:r>
-                        <a:rPr lang="en-US" sz="705" kern="1200" dirty="0">
-                          <a:solidFill>
-                            <a:srgbClr val="1F2528"/>
-                          </a:solidFill>
-                          <a:latin typeface="+mn-lt"/>
-                          <a:ea typeface="+mn-ea"/>
-                          <a:cs typeface="+mn-cs"/>
-                        </a:rPr>
-                        <a:t>mean</a:t>
-                      </a:r>
-                    </a:p>
-                  </a:txBody>
-                  <a:tcPr marL="123825" marR="123825" marT="57150" marB="57150" anchor="ctr">
-                    <a:lnL>
-                      <a:noFill/>
-                    </a:lnL>
-                    <a:lnR>
-                      <a:noFill/>
-                    </a:lnR>
-                    <a:lnT>
-                      <a:noFill/>
-                    </a:lnT>
-                    <a:lnB>
-                      <a:noFill/>
-                    </a:lnB>
-                    <a:solidFill>
-                      <a:srgbClr val="EFF2F3"/>
-                    </a:solidFill>
-                  </a:tcPr>
-                </a:tc>
-                <a:tc>
-                  <a:txBody>
-                    <a:bodyPr/>
-                    <a:lstStyle/>
-                    <a:p>
-                      <a:pPr>
-                        <a:buNone/>
-                      </a:pPr>
-                      <a:r>
-                        <a:rPr lang="en-US" sz="705" kern="1200" dirty="0">
-                          <a:solidFill>
-                            <a:srgbClr val="1F2528"/>
-                          </a:solidFill>
-                          <a:latin typeface="+mn-lt"/>
-                          <a:ea typeface="+mn-ea"/>
-                          <a:cs typeface="+mn-cs"/>
-                        </a:rPr>
-                        <a:t>Does mean pooling substitute for depth?</a:t>
-                      </a:r>
-                    </a:p>
-                  </a:txBody>
-                  <a:tcPr marL="123825" marR="123825" marT="57150" marB="57150" anchor="ctr">
-                    <a:lnL>
-                      <a:noFill/>
-                    </a:lnL>
-                    <a:lnR>
-                      <a:noFill/>
-                    </a:lnR>
-                    <a:lnT>
-                      <a:noFill/>
-                    </a:lnT>
-                    <a:lnB>
-                      <a:noFill/>
-                    </a:lnB>
-                    <a:solidFill>
-                      <a:srgbClr val="EFF2F3"/>
-                    </a:solidFill>
-                  </a:tcPr>
-                </a:tc>
-                <a:extLst>
-                  <a:ext uri="{0D108BD9-81ED-4DB2-BD59-A6C34878D82A}">
-                    <a16:rowId xmlns:a16="http://schemas.microsoft.com/office/drawing/2014/main" val="2523090203"/>
-                  </a:ext>
-                </a:extLst>
-              </a:tr>
-            </a:tbl>
-          </a:graphicData>
-        </a:graphic>
-      </p:graphicFrame>
-      <p:graphicFrame>
-        <p:nvGraphicFramePr>
-          <p:cNvPr id="25" name="Table 0">
-            <a:extLst>
-              <a:ext uri="{FF2B5EF4-FFF2-40B4-BE49-F238E27FC236}">
-                <a16:creationId xmlns:a16="http://schemas.microsoft.com/office/drawing/2014/main" id="{AC735606-46D0-9739-7BD3-E09C4E2943A1}"/>
-              </a:ext>
-            </a:extLst>
-          </p:cNvPr>
-          <p:cNvGraphicFramePr>
-            <a:graphicFrameLocks noGrp="1"/>
-          </p:cNvGraphicFramePr>
-          <p:nvPr>
-            <p:extLst>
-              <p:ext uri="{D42A27DB-BD31-4B8C-83A1-F6EECF244321}">
-                <p14:modId xmlns:p14="http://schemas.microsoft.com/office/powerpoint/2010/main" val="2515556746"/>
-              </p:ext>
-            </p:extLst>
-          </p:nvPr>
-        </p:nvGraphicFramePr>
-        <p:xfrm>
-          <a:off x="737816" y="4155032"/>
-          <a:ext cx="4809196" cy="1158240"/>
-        </p:xfrm>
-        <a:graphic>
-          <a:graphicData uri="http://schemas.openxmlformats.org/drawingml/2006/table">
-            <a:tbl>
-              <a:tblPr/>
-              <a:tblGrid>
-                <a:gridCol w="1511106">
-                  <a:extLst>
-                    <a:ext uri="{9D8B030D-6E8A-4147-A177-3AD203B41FA5}">
-                      <a16:colId xmlns:a16="http://schemas.microsoft.com/office/drawing/2014/main" val="20000"/>
-                    </a:ext>
-                  </a:extLst>
-                </a:gridCol>
-                <a:gridCol w="1208924">
-                  <a:extLst>
-                    <a:ext uri="{9D8B030D-6E8A-4147-A177-3AD203B41FA5}">
-                      <a16:colId xmlns:a16="http://schemas.microsoft.com/office/drawing/2014/main" val="20001"/>
-                    </a:ext>
-                  </a:extLst>
-                </a:gridCol>
-                <a:gridCol w="2089166">
-                  <a:extLst>
-                    <a:ext uri="{9D8B030D-6E8A-4147-A177-3AD203B41FA5}">
-                      <a16:colId xmlns:a16="http://schemas.microsoft.com/office/drawing/2014/main" val="3678863950"/>
-                    </a:ext>
-                  </a:extLst>
-                </a:gridCol>
-              </a:tblGrid>
-              <a:tr h="0">
-                <a:tc>
-                  <a:txBody>
-                    <a:bodyPr/>
-                    <a:lstStyle/>
-                    <a:p>
-                      <a:pPr marL="0" indent="0" algn="l" defTabSz="914400" rtl="0" eaLnBrk="1" latinLnBrk="0" hangingPunct="1">
-                        <a:buNone/>
-                      </a:pPr>
-                      <a:r>
-                        <a:rPr lang="en-US" sz="1030" b="1" kern="1200" dirty="0">
-                          <a:solidFill>
-                            <a:srgbClr val="FFFFFF"/>
-                          </a:solidFill>
-                          <a:latin typeface="+mn-lt"/>
-                          <a:ea typeface="+mn-ea"/>
-                          <a:cs typeface="+mn-cs"/>
-                        </a:rPr>
-                        <a:t>Experimental Factor</a:t>
-                      </a:r>
-                    </a:p>
-                  </a:txBody>
-                  <a:tcPr marL="123825" marR="123825" marT="57150" marB="57150" anchor="ctr">
-                    <a:lnL w="10795" cap="flat" cmpd="sng" algn="ctr">
-                      <a:solidFill>
-                        <a:srgbClr val="FFFFFF"/>
-                      </a:solidFill>
-                      <a:prstDash val="solid"/>
-                      <a:round/>
-                      <a:headEnd type="none" w="med" len="med"/>
-                      <a:tailEnd type="none" w="med" len="med"/>
-                    </a:lnL>
-                    <a:lnR w="10795" cap="flat" cmpd="sng" algn="ctr">
-                      <a:solidFill>
-                        <a:srgbClr val="FFFFFF"/>
-                      </a:solidFill>
-                      <a:prstDash val="solid"/>
-                      <a:round/>
-                      <a:headEnd type="none" w="med" len="med"/>
-                      <a:tailEnd type="none" w="med" len="med"/>
-                    </a:lnR>
-                    <a:lnT w="10795" cap="flat" cmpd="sng" algn="ctr">
-                      <a:solidFill>
-                        <a:srgbClr val="FFFFFF"/>
-                      </a:solidFill>
-                      <a:prstDash val="solid"/>
-                      <a:round/>
-                      <a:headEnd type="none" w="med" len="med"/>
-                      <a:tailEnd type="none" w="med" len="med"/>
-                    </a:lnT>
-                    <a:lnB w="10795" cap="flat" cmpd="sng" algn="ctr">
-                      <a:solidFill>
-                        <a:srgbClr val="FFFFFF"/>
-                      </a:solidFill>
-                      <a:prstDash val="solid"/>
-                      <a:round/>
-                      <a:headEnd type="none" w="med" len="med"/>
-                      <a:tailEnd type="none" w="med" len="med"/>
-                    </a:lnB>
-                    <a:solidFill>
-                      <a:srgbClr val="426E9E"/>
-                    </a:solidFill>
-                  </a:tcPr>
-                </a:tc>
-                <a:tc>
-                  <a:txBody>
-                    <a:bodyPr/>
-                    <a:lstStyle/>
-                    <a:p>
-                      <a:pPr marL="0" indent="0" algn="l" defTabSz="914400" rtl="0" eaLnBrk="1" latinLnBrk="0" hangingPunct="1">
-                        <a:buNone/>
-                      </a:pPr>
-                      <a:r>
-                        <a:rPr lang="en-US" sz="1030" b="1" kern="1200" dirty="0">
-                          <a:solidFill>
-                            <a:srgbClr val="FFFFFF"/>
-                          </a:solidFill>
-                          <a:latin typeface="+mn-lt"/>
-                          <a:ea typeface="+mn-ea"/>
-                          <a:cs typeface="+mn-cs"/>
-                        </a:rPr>
-                        <a:t>Baseline Value</a:t>
-                      </a:r>
-                    </a:p>
-                  </a:txBody>
-                  <a:tcPr marL="123825" marR="123825" marT="57150" marB="57150" anchor="ctr">
-                    <a:lnL w="10795" cap="flat" cmpd="sng" algn="ctr">
-                      <a:solidFill>
-                        <a:srgbClr val="FFFFFF"/>
-                      </a:solidFill>
-                      <a:prstDash val="solid"/>
-                      <a:round/>
-                      <a:headEnd type="none" w="med" len="med"/>
-                      <a:tailEnd type="none" w="med" len="med"/>
-                    </a:lnL>
-                    <a:lnR w="10795" cap="flat" cmpd="sng" algn="ctr">
-                      <a:solidFill>
-                        <a:srgbClr val="FFFFFF"/>
-                      </a:solidFill>
-                      <a:prstDash val="solid"/>
-                      <a:round/>
-                      <a:headEnd type="none" w="med" len="med"/>
-                      <a:tailEnd type="none" w="med" len="med"/>
-                    </a:lnR>
-                    <a:lnT w="10795" cap="flat" cmpd="sng" algn="ctr">
-                      <a:solidFill>
-                        <a:srgbClr val="FFFFFF"/>
-                      </a:solidFill>
-                      <a:prstDash val="solid"/>
-                      <a:round/>
-                      <a:headEnd type="none" w="med" len="med"/>
-                      <a:tailEnd type="none" w="med" len="med"/>
-                    </a:lnT>
-                    <a:lnB w="10795" cap="flat" cmpd="sng" algn="ctr">
-                      <a:solidFill>
-                        <a:srgbClr val="FFFFFF"/>
-                      </a:solidFill>
-                      <a:prstDash val="solid"/>
-                      <a:round/>
-                      <a:headEnd type="none" w="med" len="med"/>
-                      <a:tailEnd type="none" w="med" len="med"/>
-                    </a:lnB>
-                    <a:solidFill>
-                      <a:srgbClr val="426E9E"/>
-                    </a:solidFill>
-                  </a:tcPr>
-                </a:tc>
-                <a:tc>
-                  <a:txBody>
-                    <a:bodyPr/>
-                    <a:lstStyle/>
-                    <a:p>
-                      <a:pPr marL="0" indent="0" algn="l" defTabSz="914400" rtl="0" eaLnBrk="1" latinLnBrk="0" hangingPunct="1">
-                        <a:buNone/>
-                      </a:pPr>
-                      <a:r>
-                        <a:rPr lang="en-US" sz="1030" b="1" kern="1200" dirty="0">
-                          <a:solidFill>
-                            <a:srgbClr val="FFFFFF"/>
-                          </a:solidFill>
-                          <a:latin typeface="+mn-lt"/>
-                          <a:ea typeface="+mn-ea"/>
-                          <a:cs typeface="+mn-cs"/>
-                        </a:rPr>
-                        <a:t>Levels Tested</a:t>
-                      </a:r>
-                    </a:p>
-                  </a:txBody>
-                  <a:tcPr marL="123825" marR="123825" marT="57150" marB="57150" anchor="ctr">
-                    <a:lnL w="10795" cap="flat" cmpd="sng" algn="ctr">
-                      <a:solidFill>
-                        <a:srgbClr val="FFFFFF"/>
-                      </a:solidFill>
-                      <a:prstDash val="solid"/>
-                      <a:round/>
-                      <a:headEnd type="none" w="med" len="med"/>
-                      <a:tailEnd type="none" w="med" len="med"/>
-                    </a:lnL>
-                    <a:lnR w="10795" cap="flat" cmpd="sng" algn="ctr">
-                      <a:solidFill>
-                        <a:srgbClr val="FFFFFF"/>
-                      </a:solidFill>
-                      <a:prstDash val="solid"/>
-                      <a:round/>
-                      <a:headEnd type="none" w="med" len="med"/>
-                      <a:tailEnd type="none" w="med" len="med"/>
-                    </a:lnR>
-                    <a:lnT w="10795" cap="flat" cmpd="sng" algn="ctr">
-                      <a:solidFill>
-                        <a:srgbClr val="FFFFFF"/>
-                      </a:solidFill>
-                      <a:prstDash val="solid"/>
-                      <a:round/>
-                      <a:headEnd type="none" w="med" len="med"/>
-                      <a:tailEnd type="none" w="med" len="med"/>
-                    </a:lnT>
-                    <a:lnB w="10795" cap="flat" cmpd="sng" algn="ctr">
-                      <a:solidFill>
-                        <a:srgbClr val="FFFFFF"/>
-                      </a:solidFill>
-                      <a:prstDash val="solid"/>
-                      <a:round/>
-                      <a:headEnd type="none" w="med" len="med"/>
-                      <a:tailEnd type="none" w="med" len="med"/>
-                    </a:lnB>
-                    <a:solidFill>
-                      <a:srgbClr val="426E9E"/>
-                    </a:solidFill>
-                  </a:tcPr>
-                </a:tc>
-                <a:extLst>
-                  <a:ext uri="{0D108BD9-81ED-4DB2-BD59-A6C34878D82A}">
-                    <a16:rowId xmlns:a16="http://schemas.microsoft.com/office/drawing/2014/main" val="10000"/>
-                  </a:ext>
-                </a:extLst>
-              </a:tr>
-              <a:tr h="0">
-                <a:tc>
-                  <a:txBody>
-                    <a:bodyPr/>
-                    <a:lstStyle/>
-                    <a:p>
-                      <a:pPr marL="0" indent="0" algn="l" defTabSz="914400" rtl="0" eaLnBrk="1" latinLnBrk="0" hangingPunct="1">
-                        <a:buNone/>
-                      </a:pPr>
-                      <a:r>
-                        <a:rPr lang="en-US" sz="705" b="1" kern="1200" dirty="0" err="1">
-                          <a:solidFill>
-                            <a:srgbClr val="1F2528"/>
-                          </a:solidFill>
-                          <a:latin typeface="+mn-lt"/>
-                          <a:ea typeface="+mn-ea"/>
-                          <a:cs typeface="+mn-cs"/>
-                        </a:rPr>
-                        <a:t>hidden_size</a:t>
-                      </a:r>
-                      <a:endParaRPr lang="en-US" sz="705" b="1" kern="1200" dirty="0">
-                        <a:solidFill>
-                          <a:srgbClr val="1F2528"/>
-                        </a:solidFill>
-                        <a:latin typeface="+mn-lt"/>
-                        <a:ea typeface="+mn-ea"/>
-                        <a:cs typeface="+mn-cs"/>
-                      </a:endParaRPr>
-                    </a:p>
-                  </a:txBody>
-                  <a:tcPr marL="123825" marR="123825" marT="57150" marB="57150" anchor="ctr">
-                    <a:lnL w="10795" cap="flat" cmpd="sng" algn="ctr">
-                      <a:solidFill>
-                        <a:srgbClr val="FFFFFF"/>
-                      </a:solidFill>
-                      <a:prstDash val="solid"/>
-                      <a:round/>
-                      <a:headEnd type="none" w="med" len="med"/>
-                      <a:tailEnd type="none" w="med" len="med"/>
-                    </a:lnL>
-                    <a:lnR w="10795" cap="flat" cmpd="sng" algn="ctr">
-                      <a:solidFill>
-                        <a:srgbClr val="FFFFFF"/>
-                      </a:solidFill>
-                      <a:prstDash val="solid"/>
-                      <a:round/>
-                      <a:headEnd type="none" w="med" len="med"/>
-                      <a:tailEnd type="none" w="med" len="med"/>
-                    </a:lnR>
-                    <a:lnT w="10795" cap="flat" cmpd="sng" algn="ctr">
-                      <a:solidFill>
-                        <a:srgbClr val="FFFFFF"/>
-                      </a:solidFill>
-                      <a:prstDash val="solid"/>
-                      <a:round/>
-                      <a:headEnd type="none" w="med" len="med"/>
-                      <a:tailEnd type="none" w="med" len="med"/>
-                    </a:lnT>
-                    <a:lnB w="10795" cap="flat" cmpd="sng" algn="ctr">
-                      <a:solidFill>
-                        <a:srgbClr val="FFFFFF"/>
-                      </a:solidFill>
-                      <a:prstDash val="solid"/>
-                      <a:round/>
-                      <a:headEnd type="none" w="med" len="med"/>
-                      <a:tailEnd type="none" w="med" len="med"/>
-                    </a:lnB>
-                    <a:solidFill>
-                      <a:srgbClr val="EEF2F3"/>
-                    </a:solidFill>
-                  </a:tcPr>
-                </a:tc>
-                <a:tc>
-                  <a:txBody>
-                    <a:bodyPr/>
-                    <a:lstStyle/>
-                    <a:p>
-                      <a:pPr marL="0" indent="0" algn="l" defTabSz="914400" rtl="0" eaLnBrk="1" latinLnBrk="0" hangingPunct="1">
-                        <a:buNone/>
-                      </a:pPr>
-                      <a:r>
-                        <a:rPr lang="en-US" sz="705" kern="1200" dirty="0">
-                          <a:solidFill>
-                            <a:srgbClr val="1F2528"/>
-                          </a:solidFill>
-                          <a:latin typeface="+mn-lt"/>
-                          <a:ea typeface="+mn-ea"/>
-                          <a:cs typeface="+mn-cs"/>
-                        </a:rPr>
-                        <a:t>128</a:t>
-                      </a:r>
-                    </a:p>
-                  </a:txBody>
-                  <a:tcPr marL="123825" marR="123825" marT="57150" marB="57150" anchor="ctr">
-                    <a:lnL w="10795" cap="flat" cmpd="sng" algn="ctr">
-                      <a:solidFill>
-                        <a:srgbClr val="FFFFFF"/>
-                      </a:solidFill>
-                      <a:prstDash val="solid"/>
-                      <a:round/>
-                      <a:headEnd type="none" w="med" len="med"/>
-                      <a:tailEnd type="none" w="med" len="med"/>
-                    </a:lnL>
-                    <a:lnR w="10795" cap="flat" cmpd="sng" algn="ctr">
-                      <a:solidFill>
-                        <a:srgbClr val="FFFFFF"/>
-                      </a:solidFill>
-                      <a:prstDash val="solid"/>
-                      <a:round/>
-                      <a:headEnd type="none" w="med" len="med"/>
-                      <a:tailEnd type="none" w="med" len="med"/>
-                    </a:lnR>
-                    <a:lnT w="10795" cap="flat" cmpd="sng" algn="ctr">
-                      <a:solidFill>
-                        <a:srgbClr val="FFFFFF"/>
-                      </a:solidFill>
-                      <a:prstDash val="solid"/>
-                      <a:round/>
-                      <a:headEnd type="none" w="med" len="med"/>
-                      <a:tailEnd type="none" w="med" len="med"/>
-                    </a:lnT>
-                    <a:lnB w="10795" cap="flat" cmpd="sng" algn="ctr">
-                      <a:solidFill>
-                        <a:srgbClr val="FFFFFF"/>
-                      </a:solidFill>
-                      <a:prstDash val="solid"/>
-                      <a:round/>
-                      <a:headEnd type="none" w="med" len="med"/>
-                      <a:tailEnd type="none" w="med" len="med"/>
-                    </a:lnB>
-                    <a:solidFill>
-                      <a:srgbClr val="EEF2F3"/>
-                    </a:solidFill>
-                  </a:tcPr>
-                </a:tc>
-                <a:tc>
-                  <a:txBody>
-                    <a:bodyPr/>
-                    <a:lstStyle/>
-                    <a:p>
-                      <a:pPr marL="0" indent="0" algn="l" defTabSz="914400" rtl="0" eaLnBrk="1" latinLnBrk="0" hangingPunct="1">
-                        <a:buNone/>
-                      </a:pPr>
-                      <a:r>
-                        <a:rPr lang="en-US" sz="705" kern="1200" dirty="0">
-                          <a:solidFill>
-                            <a:srgbClr val="1F2528"/>
-                          </a:solidFill>
-                          <a:latin typeface="+mn-lt"/>
-                          <a:ea typeface="+mn-ea"/>
-                          <a:cs typeface="+mn-cs"/>
-                        </a:rPr>
-                        <a:t>64, 128, 256</a:t>
-                      </a:r>
-                    </a:p>
-                  </a:txBody>
-                  <a:tcPr marL="123825" marR="123825" marT="57150" marB="57150" anchor="ctr">
-                    <a:lnL w="10795" cap="flat" cmpd="sng" algn="ctr">
-                      <a:solidFill>
-                        <a:srgbClr val="FFFFFF"/>
-                      </a:solidFill>
-                      <a:prstDash val="solid"/>
-                      <a:round/>
-                      <a:headEnd type="none" w="med" len="med"/>
-                      <a:tailEnd type="none" w="med" len="med"/>
-                    </a:lnL>
-                    <a:lnR w="10795" cap="flat" cmpd="sng" algn="ctr">
-                      <a:solidFill>
-                        <a:srgbClr val="FFFFFF"/>
-                      </a:solidFill>
-                      <a:prstDash val="solid"/>
-                      <a:round/>
-                      <a:headEnd type="none" w="med" len="med"/>
-                      <a:tailEnd type="none" w="med" len="med"/>
-                    </a:lnR>
-                    <a:lnT w="10795" cap="flat" cmpd="sng" algn="ctr">
-                      <a:solidFill>
-                        <a:srgbClr val="FFFFFF"/>
-                      </a:solidFill>
-                      <a:prstDash val="solid"/>
-                      <a:round/>
-                      <a:headEnd type="none" w="med" len="med"/>
-                      <a:tailEnd type="none" w="med" len="med"/>
-                    </a:lnT>
-                    <a:lnB w="10795" cap="flat" cmpd="sng" algn="ctr">
-                      <a:solidFill>
-                        <a:srgbClr val="FFFFFF"/>
-                      </a:solidFill>
-                      <a:prstDash val="solid"/>
-                      <a:round/>
-                      <a:headEnd type="none" w="med" len="med"/>
-                      <a:tailEnd type="none" w="med" len="med"/>
-                    </a:lnB>
-                    <a:solidFill>
-                      <a:srgbClr val="EEF2F3"/>
-                    </a:solidFill>
-                  </a:tcPr>
-                </a:tc>
-                <a:extLst>
-                  <a:ext uri="{0D108BD9-81ED-4DB2-BD59-A6C34878D82A}">
-                    <a16:rowId xmlns:a16="http://schemas.microsoft.com/office/drawing/2014/main" val="10001"/>
-                  </a:ext>
-                </a:extLst>
-              </a:tr>
-              <a:tr h="0">
-                <a:tc>
-                  <a:txBody>
-                    <a:bodyPr/>
-                    <a:lstStyle/>
-                    <a:p>
-                      <a:pPr marL="0" indent="0" algn="l" defTabSz="914400" rtl="0" eaLnBrk="1" latinLnBrk="0" hangingPunct="1">
-                        <a:buNone/>
-                      </a:pPr>
-                      <a:r>
-                        <a:rPr lang="en-US" sz="705" b="1" kern="1200" dirty="0" err="1">
-                          <a:solidFill>
-                            <a:srgbClr val="1F2528"/>
-                          </a:solidFill>
-                          <a:latin typeface="+mn-lt"/>
-                          <a:ea typeface="+mn-ea"/>
-                          <a:cs typeface="+mn-cs"/>
-                        </a:rPr>
-                        <a:t>num_layers</a:t>
-                      </a:r>
-                      <a:endParaRPr lang="en-US" sz="705" b="1" kern="1200" dirty="0">
-                        <a:solidFill>
-                          <a:srgbClr val="1F2528"/>
-                        </a:solidFill>
-                        <a:latin typeface="+mn-lt"/>
-                        <a:ea typeface="+mn-ea"/>
-                        <a:cs typeface="+mn-cs"/>
-                      </a:endParaRPr>
-                    </a:p>
-                  </a:txBody>
-                  <a:tcPr marL="123825" marR="123825" marT="57150" marB="57150" anchor="ctr">
-                    <a:lnL w="10795" cap="flat" cmpd="sng" algn="ctr">
-                      <a:solidFill>
-                        <a:srgbClr val="FFFFFF"/>
-                      </a:solidFill>
-                      <a:prstDash val="solid"/>
-                      <a:round/>
-                      <a:headEnd type="none" w="med" len="med"/>
-                      <a:tailEnd type="none" w="med" len="med"/>
-                    </a:lnL>
-                    <a:lnR w="10795" cap="flat" cmpd="sng" algn="ctr">
-                      <a:solidFill>
-                        <a:srgbClr val="FFFFFF"/>
-                      </a:solidFill>
-                      <a:prstDash val="solid"/>
-                      <a:round/>
-                      <a:headEnd type="none" w="med" len="med"/>
-                      <a:tailEnd type="none" w="med" len="med"/>
-                    </a:lnR>
-                    <a:lnT w="10795" cap="flat" cmpd="sng" algn="ctr">
-                      <a:solidFill>
-                        <a:srgbClr val="FFFFFF"/>
-                      </a:solidFill>
-                      <a:prstDash val="solid"/>
-                      <a:round/>
-                      <a:headEnd type="none" w="med" len="med"/>
-                      <a:tailEnd type="none" w="med" len="med"/>
-                    </a:lnT>
-                    <a:lnB w="10795" cap="flat" cmpd="sng" algn="ctr">
-                      <a:solidFill>
-                        <a:srgbClr val="FFFFFF"/>
-                      </a:solidFill>
-                      <a:prstDash val="solid"/>
-                      <a:round/>
-                      <a:headEnd type="none" w="med" len="med"/>
-                      <a:tailEnd type="none" w="med" len="med"/>
-                    </a:lnB>
-                    <a:solidFill>
-                      <a:srgbClr val="F8FAF8"/>
-                    </a:solidFill>
-                  </a:tcPr>
-                </a:tc>
-                <a:tc>
-                  <a:txBody>
-                    <a:bodyPr/>
-                    <a:lstStyle/>
-                    <a:p>
-                      <a:pPr marL="0" indent="0" algn="l" defTabSz="914400" rtl="0" eaLnBrk="1" latinLnBrk="0" hangingPunct="1">
-                        <a:buNone/>
-                      </a:pPr>
-                      <a:r>
-                        <a:rPr lang="en-US" sz="705" kern="1200" dirty="0">
-                          <a:solidFill>
-                            <a:srgbClr val="1F2528"/>
-                          </a:solidFill>
-                          <a:latin typeface="+mn-lt"/>
-                          <a:ea typeface="+mn-ea"/>
-                          <a:cs typeface="+mn-cs"/>
-                        </a:rPr>
-                        <a:t>2</a:t>
-                      </a:r>
-                    </a:p>
-                  </a:txBody>
-                  <a:tcPr marL="123825" marR="123825" marT="57150" marB="57150" anchor="ctr">
-                    <a:lnL w="10795" cap="flat" cmpd="sng" algn="ctr">
-                      <a:solidFill>
-                        <a:srgbClr val="FFFFFF"/>
-                      </a:solidFill>
-                      <a:prstDash val="solid"/>
-                      <a:round/>
-                      <a:headEnd type="none" w="med" len="med"/>
-                      <a:tailEnd type="none" w="med" len="med"/>
-                    </a:lnL>
-                    <a:lnR w="10795" cap="flat" cmpd="sng" algn="ctr">
-                      <a:solidFill>
-                        <a:srgbClr val="FFFFFF"/>
-                      </a:solidFill>
-                      <a:prstDash val="solid"/>
-                      <a:round/>
-                      <a:headEnd type="none" w="med" len="med"/>
-                      <a:tailEnd type="none" w="med" len="med"/>
-                    </a:lnR>
-                    <a:lnT w="10795" cap="flat" cmpd="sng" algn="ctr">
-                      <a:solidFill>
-                        <a:srgbClr val="FFFFFF"/>
-                      </a:solidFill>
-                      <a:prstDash val="solid"/>
-                      <a:round/>
-                      <a:headEnd type="none" w="med" len="med"/>
-                      <a:tailEnd type="none" w="med" len="med"/>
-                    </a:lnT>
-                    <a:lnB w="10795" cap="flat" cmpd="sng" algn="ctr">
-                      <a:solidFill>
-                        <a:srgbClr val="FFFFFF"/>
-                      </a:solidFill>
-                      <a:prstDash val="solid"/>
-                      <a:round/>
-                      <a:headEnd type="none" w="med" len="med"/>
-                      <a:tailEnd type="none" w="med" len="med"/>
-                    </a:lnB>
-                    <a:solidFill>
-                      <a:srgbClr val="F8FAF8"/>
-                    </a:solidFill>
-                  </a:tcPr>
-                </a:tc>
-                <a:tc>
-                  <a:txBody>
-                    <a:bodyPr/>
-                    <a:lstStyle/>
-                    <a:p>
-                      <a:pPr marL="0" indent="0" algn="l" defTabSz="914400" rtl="0" eaLnBrk="1" latinLnBrk="0" hangingPunct="1">
-                        <a:buNone/>
-                      </a:pPr>
-                      <a:r>
-                        <a:rPr lang="en-US" sz="705" kern="1200" dirty="0">
-                          <a:solidFill>
-                            <a:srgbClr val="1F2528"/>
-                          </a:solidFill>
-                          <a:latin typeface="+mn-lt"/>
-                          <a:ea typeface="+mn-ea"/>
-                          <a:cs typeface="+mn-cs"/>
-                        </a:rPr>
-                        <a:t>1, 2, 3</a:t>
-                      </a:r>
-                    </a:p>
-                  </a:txBody>
-                  <a:tcPr marL="123825" marR="123825" marT="57150" marB="57150" anchor="ctr">
-                    <a:lnL w="10795" cap="flat" cmpd="sng" algn="ctr">
-                      <a:solidFill>
-                        <a:srgbClr val="FFFFFF"/>
-                      </a:solidFill>
-                      <a:prstDash val="solid"/>
-                      <a:round/>
-                      <a:headEnd type="none" w="med" len="med"/>
-                      <a:tailEnd type="none" w="med" len="med"/>
-                    </a:lnL>
-                    <a:lnR w="10795" cap="flat" cmpd="sng" algn="ctr">
-                      <a:solidFill>
-                        <a:srgbClr val="FFFFFF"/>
-                      </a:solidFill>
-                      <a:prstDash val="solid"/>
-                      <a:round/>
-                      <a:headEnd type="none" w="med" len="med"/>
-                      <a:tailEnd type="none" w="med" len="med"/>
-                    </a:lnR>
-                    <a:lnT w="10795" cap="flat" cmpd="sng" algn="ctr">
-                      <a:solidFill>
-                        <a:srgbClr val="FFFFFF"/>
-                      </a:solidFill>
-                      <a:prstDash val="solid"/>
-                      <a:round/>
-                      <a:headEnd type="none" w="med" len="med"/>
-                      <a:tailEnd type="none" w="med" len="med"/>
-                    </a:lnT>
-                    <a:lnB w="10795" cap="flat" cmpd="sng" algn="ctr">
-                      <a:solidFill>
-                        <a:srgbClr val="FFFFFF"/>
-                      </a:solidFill>
-                      <a:prstDash val="solid"/>
-                      <a:round/>
-                      <a:headEnd type="none" w="med" len="med"/>
-                      <a:tailEnd type="none" w="med" len="med"/>
-                    </a:lnB>
-                    <a:solidFill>
-                      <a:srgbClr val="F8FAF8"/>
-                    </a:solidFill>
-                  </a:tcPr>
-                </a:tc>
-                <a:extLst>
-                  <a:ext uri="{0D108BD9-81ED-4DB2-BD59-A6C34878D82A}">
-                    <a16:rowId xmlns:a16="http://schemas.microsoft.com/office/drawing/2014/main" val="10002"/>
-                  </a:ext>
-                </a:extLst>
-              </a:tr>
-              <a:tr h="0">
-                <a:tc>
-                  <a:txBody>
-                    <a:bodyPr/>
-                    <a:lstStyle/>
-                    <a:p>
-                      <a:pPr marL="0" indent="0" algn="l" defTabSz="914400" rtl="0" eaLnBrk="1" latinLnBrk="0" hangingPunct="1">
-                        <a:buNone/>
-                      </a:pPr>
-                      <a:r>
-                        <a:rPr lang="en-US" sz="705" b="1" kern="1200" dirty="0">
-                          <a:solidFill>
-                            <a:srgbClr val="1F2528"/>
-                          </a:solidFill>
-                          <a:latin typeface="+mn-lt"/>
-                          <a:ea typeface="+mn-ea"/>
-                          <a:cs typeface="+mn-cs"/>
-                        </a:rPr>
-                        <a:t>bidirectional</a:t>
-                      </a:r>
-                    </a:p>
-                  </a:txBody>
-                  <a:tcPr marL="123825" marR="123825" marT="57150" marB="57150" anchor="ctr">
-                    <a:lnL w="10795" cap="flat" cmpd="sng" algn="ctr">
-                      <a:solidFill>
-                        <a:srgbClr val="FFFFFF"/>
-                      </a:solidFill>
-                      <a:prstDash val="solid"/>
-                      <a:round/>
-                      <a:headEnd type="none" w="med" len="med"/>
-                      <a:tailEnd type="none" w="med" len="med"/>
-                    </a:lnL>
-                    <a:lnR w="10795" cap="flat" cmpd="sng" algn="ctr">
-                      <a:solidFill>
-                        <a:srgbClr val="FFFFFF"/>
-                      </a:solidFill>
-                      <a:prstDash val="solid"/>
-                      <a:round/>
-                      <a:headEnd type="none" w="med" len="med"/>
-                      <a:tailEnd type="none" w="med" len="med"/>
-                    </a:lnR>
-                    <a:lnT w="10795" cap="flat" cmpd="sng" algn="ctr">
-                      <a:solidFill>
-                        <a:srgbClr val="FFFFFF"/>
-                      </a:solidFill>
-                      <a:prstDash val="solid"/>
-                      <a:round/>
-                      <a:headEnd type="none" w="med" len="med"/>
-                      <a:tailEnd type="none" w="med" len="med"/>
-                    </a:lnT>
-                    <a:lnB w="10795" cap="flat" cmpd="sng" algn="ctr">
-                      <a:solidFill>
-                        <a:srgbClr val="FFFFFF"/>
-                      </a:solidFill>
-                      <a:prstDash val="solid"/>
-                      <a:round/>
-                      <a:headEnd type="none" w="med" len="med"/>
-                      <a:tailEnd type="none" w="med" len="med"/>
-                    </a:lnB>
-                    <a:solidFill>
-                      <a:srgbClr val="EEF2F3"/>
-                    </a:solidFill>
-                  </a:tcPr>
-                </a:tc>
-                <a:tc>
-                  <a:txBody>
-                    <a:bodyPr/>
-                    <a:lstStyle/>
-                    <a:p>
-                      <a:pPr marL="0" indent="0" algn="l" defTabSz="914400" rtl="0" eaLnBrk="1" latinLnBrk="0" hangingPunct="1">
-                        <a:buNone/>
-                      </a:pPr>
-                      <a:r>
-                        <a:rPr lang="en-US" sz="705" kern="1200" dirty="0">
-                          <a:solidFill>
-                            <a:srgbClr val="1F2528"/>
-                          </a:solidFill>
-                          <a:latin typeface="+mn-lt"/>
-                          <a:ea typeface="+mn-ea"/>
-                          <a:cs typeface="+mn-cs"/>
-                        </a:rPr>
-                        <a:t>True</a:t>
-                      </a:r>
-                    </a:p>
-                  </a:txBody>
-                  <a:tcPr marL="123825" marR="123825" marT="57150" marB="57150" anchor="ctr">
-                    <a:lnL w="10795" cap="flat" cmpd="sng" algn="ctr">
-                      <a:solidFill>
-                        <a:srgbClr val="FFFFFF"/>
-                      </a:solidFill>
-                      <a:prstDash val="solid"/>
-                      <a:round/>
-                      <a:headEnd type="none" w="med" len="med"/>
-                      <a:tailEnd type="none" w="med" len="med"/>
-                    </a:lnL>
-                    <a:lnR w="10795" cap="flat" cmpd="sng" algn="ctr">
-                      <a:solidFill>
-                        <a:srgbClr val="FFFFFF"/>
-                      </a:solidFill>
-                      <a:prstDash val="solid"/>
-                      <a:round/>
-                      <a:headEnd type="none" w="med" len="med"/>
-                      <a:tailEnd type="none" w="med" len="med"/>
-                    </a:lnR>
-                    <a:lnT w="10795" cap="flat" cmpd="sng" algn="ctr">
-                      <a:solidFill>
-                        <a:srgbClr val="FFFFFF"/>
-                      </a:solidFill>
-                      <a:prstDash val="solid"/>
-                      <a:round/>
-                      <a:headEnd type="none" w="med" len="med"/>
-                      <a:tailEnd type="none" w="med" len="med"/>
-                    </a:lnT>
-                    <a:lnB w="10795" cap="flat" cmpd="sng" algn="ctr">
-                      <a:solidFill>
-                        <a:srgbClr val="FFFFFF"/>
-                      </a:solidFill>
-                      <a:prstDash val="solid"/>
-                      <a:round/>
-                      <a:headEnd type="none" w="med" len="med"/>
-                      <a:tailEnd type="none" w="med" len="med"/>
-                    </a:lnB>
-                    <a:solidFill>
-                      <a:srgbClr val="EEF2F3"/>
-                    </a:solidFill>
-                  </a:tcPr>
-                </a:tc>
-                <a:tc>
-                  <a:txBody>
-                    <a:bodyPr/>
-                    <a:lstStyle/>
-                    <a:p>
-                      <a:pPr marL="0" indent="0" algn="l" defTabSz="914400" rtl="0" eaLnBrk="1" latinLnBrk="0" hangingPunct="1">
-                        <a:buNone/>
-                      </a:pPr>
-                      <a:r>
-                        <a:rPr lang="en-US" sz="705" kern="1200" dirty="0">
-                          <a:solidFill>
-                            <a:srgbClr val="1F2528"/>
-                          </a:solidFill>
-                          <a:latin typeface="+mn-lt"/>
-                          <a:ea typeface="+mn-ea"/>
-                          <a:cs typeface="+mn-cs"/>
-                        </a:rPr>
-                        <a:t>True, False</a:t>
-                      </a:r>
-                    </a:p>
-                  </a:txBody>
-                  <a:tcPr marL="123825" marR="123825" marT="57150" marB="57150" anchor="ctr">
-                    <a:lnL w="10795" cap="flat" cmpd="sng" algn="ctr">
-                      <a:solidFill>
-                        <a:srgbClr val="FFFFFF"/>
-                      </a:solidFill>
-                      <a:prstDash val="solid"/>
-                      <a:round/>
-                      <a:headEnd type="none" w="med" len="med"/>
-                      <a:tailEnd type="none" w="med" len="med"/>
-                    </a:lnL>
-                    <a:lnR w="10795" cap="flat" cmpd="sng" algn="ctr">
-                      <a:solidFill>
-                        <a:srgbClr val="FFFFFF"/>
-                      </a:solidFill>
-                      <a:prstDash val="solid"/>
-                      <a:round/>
-                      <a:headEnd type="none" w="med" len="med"/>
-                      <a:tailEnd type="none" w="med" len="med"/>
-                    </a:lnR>
-                    <a:lnT w="10795" cap="flat" cmpd="sng" algn="ctr">
-                      <a:solidFill>
-                        <a:srgbClr val="FFFFFF"/>
-                      </a:solidFill>
-                      <a:prstDash val="solid"/>
-                      <a:round/>
-                      <a:headEnd type="none" w="med" len="med"/>
-                      <a:tailEnd type="none" w="med" len="med"/>
-                    </a:lnT>
-                    <a:lnB w="10795" cap="flat" cmpd="sng" algn="ctr">
-                      <a:solidFill>
-                        <a:srgbClr val="FFFFFF"/>
-                      </a:solidFill>
-                      <a:prstDash val="solid"/>
-                      <a:round/>
-                      <a:headEnd type="none" w="med" len="med"/>
-                      <a:tailEnd type="none" w="med" len="med"/>
-                    </a:lnB>
-                    <a:solidFill>
-                      <a:srgbClr val="EEF2F3"/>
-                    </a:solidFill>
-                  </a:tcPr>
-                </a:tc>
-                <a:extLst>
-                  <a:ext uri="{0D108BD9-81ED-4DB2-BD59-A6C34878D82A}">
-                    <a16:rowId xmlns:a16="http://schemas.microsoft.com/office/drawing/2014/main" val="10003"/>
-                  </a:ext>
-                </a:extLst>
-              </a:tr>
-              <a:tr h="0">
-                <a:tc>
-                  <a:txBody>
-                    <a:bodyPr/>
-                    <a:lstStyle/>
-                    <a:p>
-                      <a:pPr marL="0" indent="0" algn="l" defTabSz="914400" rtl="0" eaLnBrk="1" latinLnBrk="0" hangingPunct="1">
-                        <a:buNone/>
-                      </a:pPr>
-                      <a:r>
-                        <a:rPr lang="en-US" sz="705" b="1" kern="1200" dirty="0">
-                          <a:solidFill>
-                            <a:srgbClr val="1F2528"/>
-                          </a:solidFill>
-                          <a:latin typeface="+mn-lt"/>
-                          <a:ea typeface="+mn-ea"/>
-                          <a:cs typeface="+mn-cs"/>
-                        </a:rPr>
-                        <a:t>pooling</a:t>
-                      </a:r>
-                    </a:p>
-                  </a:txBody>
-                  <a:tcPr marL="123825" marR="123825" marT="57150" marB="57150" anchor="ctr">
-                    <a:lnL w="10795" cap="flat" cmpd="sng" algn="ctr">
-                      <a:solidFill>
-                        <a:srgbClr val="FFFFFF"/>
-                      </a:solidFill>
-                      <a:prstDash val="solid"/>
-                      <a:round/>
-                      <a:headEnd type="none" w="med" len="med"/>
-                      <a:tailEnd type="none" w="med" len="med"/>
-                    </a:lnL>
-                    <a:lnR w="10795" cap="flat" cmpd="sng" algn="ctr">
-                      <a:solidFill>
-                        <a:srgbClr val="FFFFFF"/>
-                      </a:solidFill>
-                      <a:prstDash val="solid"/>
-                      <a:round/>
-                      <a:headEnd type="none" w="med" len="med"/>
-                      <a:tailEnd type="none" w="med" len="med"/>
-                    </a:lnR>
-                    <a:lnT w="10795" cap="flat" cmpd="sng" algn="ctr">
-                      <a:solidFill>
-                        <a:srgbClr val="FFFFFF"/>
-                      </a:solidFill>
-                      <a:prstDash val="solid"/>
-                      <a:round/>
-                      <a:headEnd type="none" w="med" len="med"/>
-                      <a:tailEnd type="none" w="med" len="med"/>
-                    </a:lnT>
-                    <a:lnB w="10795" cap="flat" cmpd="sng" algn="ctr">
-                      <a:solidFill>
-                        <a:srgbClr val="FFFFFF"/>
-                      </a:solidFill>
-                      <a:prstDash val="solid"/>
-                      <a:round/>
-                      <a:headEnd type="none" w="med" len="med"/>
-                      <a:tailEnd type="none" w="med" len="med"/>
-                    </a:lnB>
-                    <a:solidFill>
-                      <a:srgbClr val="F8FAF8"/>
-                    </a:solidFill>
-                  </a:tcPr>
-                </a:tc>
-                <a:tc>
-                  <a:txBody>
-                    <a:bodyPr/>
-                    <a:lstStyle/>
-                    <a:p>
-                      <a:pPr marL="0" indent="0" algn="l" defTabSz="914400" rtl="0" eaLnBrk="1" latinLnBrk="0" hangingPunct="1">
-                        <a:buNone/>
-                      </a:pPr>
-                      <a:r>
-                        <a:rPr lang="en-US" sz="705" kern="1200" dirty="0">
-                          <a:solidFill>
-                            <a:srgbClr val="1F2528"/>
-                          </a:solidFill>
-                          <a:latin typeface="+mn-lt"/>
-                          <a:ea typeface="+mn-ea"/>
-                          <a:cs typeface="+mn-cs"/>
-                        </a:rPr>
-                        <a:t>Final</a:t>
-                      </a:r>
-                    </a:p>
-                  </a:txBody>
-                  <a:tcPr marL="123825" marR="123825" marT="57150" marB="57150" anchor="ctr">
-                    <a:lnL w="10795" cap="flat" cmpd="sng" algn="ctr">
-                      <a:solidFill>
-                        <a:srgbClr val="FFFFFF"/>
-                      </a:solidFill>
-                      <a:prstDash val="solid"/>
-                      <a:round/>
-                      <a:headEnd type="none" w="med" len="med"/>
-                      <a:tailEnd type="none" w="med" len="med"/>
-                    </a:lnL>
-                    <a:lnR w="10795" cap="flat" cmpd="sng" algn="ctr">
-                      <a:solidFill>
-                        <a:srgbClr val="FFFFFF"/>
-                      </a:solidFill>
-                      <a:prstDash val="solid"/>
-                      <a:round/>
-                      <a:headEnd type="none" w="med" len="med"/>
-                      <a:tailEnd type="none" w="med" len="med"/>
-                    </a:lnR>
-                    <a:lnT w="10795" cap="flat" cmpd="sng" algn="ctr">
-                      <a:solidFill>
-                        <a:srgbClr val="FFFFFF"/>
-                      </a:solidFill>
-                      <a:prstDash val="solid"/>
-                      <a:round/>
-                      <a:headEnd type="none" w="med" len="med"/>
-                      <a:tailEnd type="none" w="med" len="med"/>
-                    </a:lnT>
-                    <a:lnB w="10795" cap="flat" cmpd="sng" algn="ctr">
-                      <a:solidFill>
-                        <a:srgbClr val="FFFFFF"/>
-                      </a:solidFill>
-                      <a:prstDash val="solid"/>
-                      <a:round/>
-                      <a:headEnd type="none" w="med" len="med"/>
-                      <a:tailEnd type="none" w="med" len="med"/>
-                    </a:lnB>
-                    <a:solidFill>
-                      <a:srgbClr val="F8FAF8"/>
-                    </a:solidFill>
-                  </a:tcPr>
-                </a:tc>
-                <a:tc>
-                  <a:txBody>
-                    <a:bodyPr/>
-                    <a:lstStyle/>
-                    <a:p>
-                      <a:pPr marL="0" indent="0" algn="l" defTabSz="914400" rtl="0" eaLnBrk="1" latinLnBrk="0" hangingPunct="1">
-                        <a:buNone/>
-                      </a:pPr>
-                      <a:r>
-                        <a:rPr lang="en-US" sz="705" kern="1200" dirty="0">
-                          <a:solidFill>
-                            <a:srgbClr val="1F2528"/>
-                          </a:solidFill>
-                          <a:latin typeface="+mn-lt"/>
-                          <a:ea typeface="+mn-ea"/>
-                          <a:cs typeface="+mn-cs"/>
-                        </a:rPr>
-                        <a:t>Final, Mean</a:t>
-                      </a:r>
-                    </a:p>
-                  </a:txBody>
-                  <a:tcPr marL="123825" marR="123825" marT="57150" marB="57150" anchor="ctr">
-                    <a:lnL w="10795" cap="flat" cmpd="sng" algn="ctr">
-                      <a:solidFill>
-                        <a:srgbClr val="FFFFFF"/>
-                      </a:solidFill>
-                      <a:prstDash val="solid"/>
-                      <a:round/>
-                      <a:headEnd type="none" w="med" len="med"/>
-                      <a:tailEnd type="none" w="med" len="med"/>
-                    </a:lnL>
-                    <a:lnR w="10795" cap="flat" cmpd="sng" algn="ctr">
-                      <a:solidFill>
-                        <a:srgbClr val="FFFFFF"/>
-                      </a:solidFill>
-                      <a:prstDash val="solid"/>
-                      <a:round/>
-                      <a:headEnd type="none" w="med" len="med"/>
-                      <a:tailEnd type="none" w="med" len="med"/>
-                    </a:lnR>
-                    <a:lnT w="10795" cap="flat" cmpd="sng" algn="ctr">
-                      <a:solidFill>
-                        <a:srgbClr val="FFFFFF"/>
-                      </a:solidFill>
-                      <a:prstDash val="solid"/>
-                      <a:round/>
-                      <a:headEnd type="none" w="med" len="med"/>
-                      <a:tailEnd type="none" w="med" len="med"/>
-                    </a:lnT>
-                    <a:lnB w="10795" cap="flat" cmpd="sng" algn="ctr">
-                      <a:solidFill>
-                        <a:srgbClr val="FFFFFF"/>
-                      </a:solidFill>
-                      <a:prstDash val="solid"/>
-                      <a:round/>
-                      <a:headEnd type="none" w="med" len="med"/>
-                      <a:tailEnd type="none" w="med" len="med"/>
-                    </a:lnB>
-                    <a:solidFill>
-                      <a:srgbClr val="F8FAF8"/>
-                    </a:solidFill>
-                  </a:tcPr>
-                </a:tc>
-                <a:extLst>
-                  <a:ext uri="{0D108BD9-81ED-4DB2-BD59-A6C34878D82A}">
-                    <a16:rowId xmlns:a16="http://schemas.microsoft.com/office/drawing/2014/main" val="10004"/>
-                  </a:ext>
-                </a:extLst>
-              </a:tr>
-            </a:tbl>
-          </a:graphicData>
-        </a:graphic>
-      </p:graphicFrame>
-      <p:sp>
-        <p:nvSpPr>
-          <p:cNvPr id="13" name="Shape 48">
-            <a:extLst>
-              <a:ext uri="{FF2B5EF4-FFF2-40B4-BE49-F238E27FC236}">
-                <a16:creationId xmlns:a16="http://schemas.microsoft.com/office/drawing/2014/main" id="{92B74C76-3998-10F6-9060-161881FEC340}"/>
-              </a:ext>
-            </a:extLst>
-          </p:cNvPr>
-          <p:cNvSpPr/>
-          <p:nvPr/>
-        </p:nvSpPr>
-        <p:spPr>
-          <a:xfrm>
-            <a:off x="6535262" y="4812128"/>
-            <a:ext cx="2011680" cy="772294"/>
-          </a:xfrm>
-          <a:prstGeom prst="rect">
-            <a:avLst/>
-          </a:prstGeom>
-          <a:solidFill>
-            <a:srgbClr val="FFFFFF">
-              <a:alpha val="98000"/>
-            </a:srgbClr>
-          </a:solidFill>
-          <a:ln w="17780">
-            <a:solidFill>
-              <a:schemeClr val="tx1">
-                <a:lumMod val="75000"/>
-                <a:lumOff val="25000"/>
-              </a:schemeClr>
-            </a:solidFill>
-            <a:prstDash val="solid"/>
-          </a:ln>
-        </p:spPr>
-        <p:txBody>
-          <a:bodyPr/>
-          <a:lstStyle/>
-          <a:p>
-            <a:endParaRPr lang="en-US"/>
-          </a:p>
-        </p:txBody>
-      </p:sp>
-      <p:sp>
-        <p:nvSpPr>
-          <p:cNvPr id="14" name="Text 49">
-            <a:extLst>
-              <a:ext uri="{FF2B5EF4-FFF2-40B4-BE49-F238E27FC236}">
-                <a16:creationId xmlns:a16="http://schemas.microsoft.com/office/drawing/2014/main" id="{C162797D-3CC9-6542-3D39-69B5DCB40689}"/>
-              </a:ext>
-            </a:extLst>
-          </p:cNvPr>
-          <p:cNvSpPr/>
-          <p:nvPr/>
-        </p:nvSpPr>
-        <p:spPr>
-          <a:xfrm>
-            <a:off x="6626702" y="4949288"/>
-            <a:ext cx="1828800" cy="329184"/>
-          </a:xfrm>
-          <a:prstGeom prst="rect">
-            <a:avLst/>
-          </a:prstGeom>
-          <a:noFill/>
-          <a:ln/>
-        </p:spPr>
-        <p:txBody>
-          <a:bodyPr wrap="square" lIns="0" tIns="0" rIns="0" bIns="0" rtlCol="0" anchor="t">
-            <a:normAutofit/>
-          </a:bodyPr>
-          <a:lstStyle/>
-          <a:p>
-            <a:pPr marL="0" indent="0" algn="ctr">
-              <a:lnSpc>
-                <a:spcPct val="90000"/>
-              </a:lnSpc>
-              <a:buNone/>
-            </a:pPr>
-            <a:r>
-              <a:rPr lang="en-US" sz="2100" b="1" dirty="0">
-                <a:solidFill>
-                  <a:schemeClr val="tx1">
-                    <a:lumMod val="75000"/>
-                    <a:lumOff val="25000"/>
-                  </a:schemeClr>
-                </a:solidFill>
-                <a:latin typeface="Aptos Display" pitchFamily="34" charset="0"/>
-                <a:ea typeface="Aptos Display" pitchFamily="34" charset="-122"/>
-                <a:cs typeface="Aptos Display" pitchFamily="34" charset="-120"/>
-              </a:rPr>
-              <a:t>64.5%</a:t>
-            </a:r>
-            <a:endParaRPr lang="en-US" sz="2100" dirty="0">
-              <a:solidFill>
-                <a:schemeClr val="tx1">
-                  <a:lumMod val="75000"/>
-                  <a:lumOff val="25000"/>
-                </a:schemeClr>
-              </a:solidFill>
-            </a:endParaRPr>
-          </a:p>
-        </p:txBody>
-      </p:sp>
-      <p:sp>
-        <p:nvSpPr>
-          <p:cNvPr id="24" name="Text 50">
-            <a:extLst>
-              <a:ext uri="{FF2B5EF4-FFF2-40B4-BE49-F238E27FC236}">
-                <a16:creationId xmlns:a16="http://schemas.microsoft.com/office/drawing/2014/main" id="{69D614F5-4FAA-9AE5-9133-D5D0E3647358}"/>
-              </a:ext>
-            </a:extLst>
-          </p:cNvPr>
-          <p:cNvSpPr/>
-          <p:nvPr/>
-        </p:nvSpPr>
-        <p:spPr>
-          <a:xfrm>
-            <a:off x="6644990" y="5342480"/>
-            <a:ext cx="1792224" cy="219456"/>
-          </a:xfrm>
-          <a:prstGeom prst="rect">
-            <a:avLst/>
-          </a:prstGeom>
-          <a:noFill/>
-          <a:ln/>
-        </p:spPr>
-        <p:txBody>
-          <a:bodyPr wrap="square" lIns="0" tIns="0" rIns="0" bIns="0" rtlCol="0" anchor="t">
-            <a:normAutofit/>
-          </a:bodyPr>
-          <a:lstStyle/>
-          <a:p>
-            <a:pPr marL="0" indent="0" algn="ctr">
-              <a:lnSpc>
-                <a:spcPct val="90000"/>
-              </a:lnSpc>
-              <a:buNone/>
-            </a:pPr>
-            <a:r>
-              <a:rPr lang="en-US" sz="780" dirty="0">
-                <a:solidFill>
-                  <a:srgbClr val="6B7176"/>
-                </a:solidFill>
-                <a:latin typeface="Aptos" pitchFamily="34" charset="0"/>
-                <a:ea typeface="Aptos" pitchFamily="34" charset="-122"/>
-                <a:cs typeface="Aptos" pitchFamily="34" charset="-120"/>
-              </a:rPr>
-              <a:t>Piczak published LP clip-level reference</a:t>
-            </a:r>
-            <a:endParaRPr lang="en-US" sz="780" dirty="0"/>
-          </a:p>
-        </p:txBody>
-      </p:sp>
-    </p:spTree>
-  </p:cSld>
-  <p:clrMapOvr>
-    <a:masterClrMapping/>
-  </p:clrMapOvr>
-</p:sld>
-</file>
-
-<file path=ppt/slides/slide9.xml><?xml version="1.0" encoding="utf-8"?>
-<p:sld xmlns:a="http://schemas.openxmlformats.org/drawingml/2006/main" xmlns:r="http://schemas.openxmlformats.org/officeDocument/2006/relationships" xmlns:p="http://schemas.openxmlformats.org/presentationml/2006/main">
   <p:cSld>
     <p:bg>
       <p:bgPr>
@@ -31754,7 +26392,7 @@
         </p:nvGrpSpPr>
         <p:grpSpPr>
           <a:xfrm>
-            <a:off x="8463399" y="3717436"/>
+            <a:off x="9022199" y="4392875"/>
             <a:ext cx="1920240" cy="772294"/>
             <a:chOff x="9328755" y="4727446"/>
             <a:chExt cx="1920240" cy="772294"/>
@@ -31901,35 +26539,6 @@
           </p:txBody>
         </p:sp>
       </p:grpSp>
-      <p:pic>
-        <p:nvPicPr>
-          <p:cNvPr id="12" name="Image 0" descr="/Users/andrew/Library/CloudStorage/OneDrive-CornellUniversity/Courses/SYSEN5888/ Project/DeepLearning5888Project/Plots and Data/LSTM/LSTM_Run8_CapacityMeanPool_long/curves.png">
-            <a:extLst>
-              <a:ext uri="{FF2B5EF4-FFF2-40B4-BE49-F238E27FC236}">
-                <a16:creationId xmlns:a16="http://schemas.microsoft.com/office/drawing/2014/main" id="{F42B345D-4B54-5EB9-8D14-B1D5276BD406}"/>
-              </a:ext>
-            </a:extLst>
-          </p:cNvPr>
-          <p:cNvPicPr>
-            <a:picLocks noChangeAspect="1"/>
-          </p:cNvPicPr>
-          <p:nvPr/>
-        </p:nvPicPr>
-        <p:blipFill>
-          <a:blip r:embed="rId4"/>
-          <a:srcRect/>
-          <a:stretch/>
-        </p:blipFill>
-        <p:spPr>
-          <a:xfrm>
-            <a:off x="6182085" y="1296008"/>
-            <a:ext cx="4691231" cy="2251881"/>
-          </a:xfrm>
-          <a:prstGeom prst="rect">
-            <a:avLst/>
-          </a:prstGeom>
-        </p:spPr>
-      </p:pic>
       <p:sp>
         <p:nvSpPr>
           <p:cNvPr id="15" name="Text 36">
@@ -31944,7 +26553,7 @@
         </p:nvSpPr>
         <p:spPr>
           <a:xfrm>
-            <a:off x="6221509" y="4924387"/>
+            <a:off x="6215141" y="5271940"/>
             <a:ext cx="1750000" cy="182880"/>
           </a:xfrm>
           <a:prstGeom prst="rect">
@@ -31991,7 +26600,7 @@
         </p:nvSpPr>
         <p:spPr>
           <a:xfrm>
-            <a:off x="6294060" y="5129665"/>
+            <a:off x="6287692" y="5477218"/>
             <a:ext cx="5026569" cy="996734"/>
           </a:xfrm>
           <a:prstGeom prst="rect">
@@ -35181,7 +29790,7 @@
         </p:nvGrpSpPr>
         <p:grpSpPr>
           <a:xfrm>
-            <a:off x="6341991" y="3717436"/>
+            <a:off x="6900791" y="4392875"/>
             <a:ext cx="2011680" cy="772294"/>
             <a:chOff x="6957490" y="4123666"/>
             <a:chExt cx="2011680" cy="772294"/>
@@ -35341,12 +29950,1231 @@
           </p:txBody>
         </p:sp>
       </p:grpSp>
+      <p:pic>
+        <p:nvPicPr>
+          <p:cNvPr id="19" name="Image 0" descr="/Users/andrew/Library/CloudStorage/OneDrive-CornellUniversity/Courses/SYSEN5888/ Project/DeepLearning5888Project/Plots and Data/LSTM/LSTM_Run8_CapacityMeanPool_long/curves.png">
+            <a:extLst>
+              <a:ext uri="{FF2B5EF4-FFF2-40B4-BE49-F238E27FC236}">
+                <a16:creationId xmlns:a16="http://schemas.microsoft.com/office/drawing/2014/main" id="{9D6112E5-F266-FE2C-C0FA-41BF056F9FA8}"/>
+              </a:ext>
+            </a:extLst>
+          </p:cNvPr>
+          <p:cNvPicPr>
+            <a:picLocks noChangeAspect="1"/>
+          </p:cNvPicPr>
+          <p:nvPr/>
+        </p:nvPicPr>
+        <p:blipFill>
+          <a:blip r:embed="rId4"/>
+          <a:srcRect/>
+          <a:stretch/>
+        </p:blipFill>
+        <p:spPr>
+          <a:xfrm>
+            <a:off x="6096000" y="1204314"/>
+            <a:ext cx="5530488" cy="3063240"/>
+          </a:xfrm>
+          <a:prstGeom prst="rect">
+            <a:avLst/>
+          </a:prstGeom>
+        </p:spPr>
+      </p:pic>
     </p:spTree>
     <p:extLst>
       <p:ext uri="{BB962C8B-B14F-4D97-AF65-F5344CB8AC3E}">
         <p14:creationId xmlns:p14="http://schemas.microsoft.com/office/powerpoint/2010/main" val="1825942691"/>
       </p:ext>
     </p:extLst>
+  </p:cSld>
+  <p:clrMapOvr>
+    <a:masterClrMapping/>
+  </p:clrMapOvr>
+</p:sld>
+</file>
+
+<file path=ppt/slides/slide9.xml><?xml version="1.0" encoding="utf-8"?>
+<p:sld xmlns:a="http://schemas.openxmlformats.org/drawingml/2006/main" xmlns:r="http://schemas.openxmlformats.org/officeDocument/2006/relationships" xmlns:p="http://schemas.openxmlformats.org/presentationml/2006/main">
+  <p:cSld name="Slide 7">
+    <p:bg>
+      <p:bgPr>
+        <a:solidFill>
+          <a:srgbClr val="F7F5EF"/>
+        </a:solidFill>
+        <a:effectLst/>
+      </p:bgPr>
+    </p:bg>
+    <p:spTree>
+      <p:nvGrpSpPr>
+        <p:cNvPr id="1" name=""/>
+        <p:cNvGrpSpPr/>
+        <p:nvPr/>
+      </p:nvGrpSpPr>
+      <p:grpSpPr>
+        <a:xfrm>
+          <a:off x="0" y="0"/>
+          <a:ext cx="0" cy="0"/>
+          <a:chOff x="0" y="0"/>
+          <a:chExt cx="0" cy="0"/>
+        </a:xfrm>
+      </p:grpSpPr>
+      <p:sp>
+        <p:nvSpPr>
+          <p:cNvPr id="7" name="Shape 22">
+            <a:extLst>
+              <a:ext uri="{FF2B5EF4-FFF2-40B4-BE49-F238E27FC236}">
+                <a16:creationId xmlns:a16="http://schemas.microsoft.com/office/drawing/2014/main" id="{7ACFBABF-3D5C-09AD-F3B0-125485337F99}"/>
+              </a:ext>
+            </a:extLst>
+          </p:cNvPr>
+          <p:cNvSpPr/>
+          <p:nvPr/>
+        </p:nvSpPr>
+        <p:spPr>
+          <a:xfrm>
+            <a:off x="7904546" y="750102"/>
+            <a:ext cx="1809206" cy="295381"/>
+          </a:xfrm>
+          <a:prstGeom prst="chevron">
+            <a:avLst/>
+          </a:prstGeom>
+          <a:solidFill>
+            <a:srgbClr val="17677D"/>
+          </a:solidFill>
+          <a:ln w="12700">
+            <a:solidFill>
+              <a:srgbClr val="17677D">
+                <a:alpha val="0"/>
+              </a:srgbClr>
+            </a:solidFill>
+            <a:prstDash val="solid"/>
+          </a:ln>
+        </p:spPr>
+        <p:txBody>
+          <a:bodyPr/>
+          <a:lstStyle/>
+          <a:p>
+            <a:endParaRPr lang="en-US"/>
+          </a:p>
+        </p:txBody>
+      </p:sp>
+      <p:sp>
+        <p:nvSpPr>
+          <p:cNvPr id="8" name="Shape 25">
+            <a:extLst>
+              <a:ext uri="{FF2B5EF4-FFF2-40B4-BE49-F238E27FC236}">
+                <a16:creationId xmlns:a16="http://schemas.microsoft.com/office/drawing/2014/main" id="{51526EBD-33F1-B231-E296-C457BDC10BA7}"/>
+              </a:ext>
+            </a:extLst>
+          </p:cNvPr>
+          <p:cNvSpPr/>
+          <p:nvPr/>
+        </p:nvSpPr>
+        <p:spPr>
+          <a:xfrm>
+            <a:off x="9550658" y="750101"/>
+            <a:ext cx="1755200" cy="295381"/>
+          </a:xfrm>
+          <a:prstGeom prst="chevron">
+            <a:avLst/>
+          </a:prstGeom>
+          <a:solidFill>
+            <a:srgbClr val="D7DDE0">
+              <a:alpha val="90000"/>
+            </a:srgbClr>
+          </a:solidFill>
+          <a:ln w="12700">
+            <a:solidFill>
+              <a:srgbClr val="F7F5EF"/>
+            </a:solidFill>
+            <a:prstDash val="solid"/>
+          </a:ln>
+        </p:spPr>
+        <p:txBody>
+          <a:bodyPr/>
+          <a:lstStyle/>
+          <a:p>
+            <a:endParaRPr lang="en-US" sz="1100"/>
+          </a:p>
+        </p:txBody>
+      </p:sp>
+      <p:sp>
+        <p:nvSpPr>
+          <p:cNvPr id="2" name="Text 0"/>
+          <p:cNvSpPr/>
+          <p:nvPr/>
+        </p:nvSpPr>
+        <p:spPr>
+          <a:xfrm>
+            <a:off x="594360" y="310896"/>
+            <a:ext cx="4114800" cy="201168"/>
+          </a:xfrm>
+          <a:prstGeom prst="rect">
+            <a:avLst/>
+          </a:prstGeom>
+          <a:noFill/>
+          <a:ln/>
+        </p:spPr>
+        <p:txBody>
+          <a:bodyPr wrap="square" lIns="0" tIns="0" rIns="0" bIns="0" rtlCol="0" anchor="t">
+            <a:normAutofit/>
+          </a:bodyPr>
+          <a:lstStyle/>
+          <a:p>
+            <a:pPr marL="0" indent="0" algn="l">
+              <a:lnSpc>
+                <a:spcPct val="90000"/>
+              </a:lnSpc>
+              <a:buNone/>
+            </a:pPr>
+            <a:r>
+              <a:rPr lang="en-US" sz="880" b="1" dirty="0">
+                <a:solidFill>
+                  <a:srgbClr val="17677D"/>
+                </a:solidFill>
+                <a:latin typeface="Aptos" pitchFamily="34" charset="0"/>
+                <a:ea typeface="Aptos" pitchFamily="34" charset="-122"/>
+                <a:cs typeface="Aptos" pitchFamily="34" charset="-120"/>
+              </a:rPr>
+              <a:t>SECOND TECHNICAL ERA</a:t>
+            </a:r>
+            <a:endParaRPr lang="en-US" sz="880" dirty="0"/>
+          </a:p>
+        </p:txBody>
+      </p:sp>
+      <p:sp>
+        <p:nvSpPr>
+          <p:cNvPr id="3" name="Text 1"/>
+          <p:cNvSpPr/>
+          <p:nvPr/>
+        </p:nvSpPr>
+        <p:spPr>
+          <a:xfrm>
+            <a:off x="566928" y="512064"/>
+            <a:ext cx="5657347" cy="502920"/>
+          </a:xfrm>
+          <a:prstGeom prst="rect">
+            <a:avLst/>
+          </a:prstGeom>
+          <a:noFill/>
+          <a:ln/>
+        </p:spPr>
+        <p:txBody>
+          <a:bodyPr wrap="square" lIns="0" tIns="0" rIns="0" bIns="0" rtlCol="0" anchor="t">
+            <a:normAutofit fontScale="85000" lnSpcReduction="20000"/>
+          </a:bodyPr>
+          <a:lstStyle/>
+          <a:p>
+            <a:pPr marL="0" indent="0" algn="l">
+              <a:lnSpc>
+                <a:spcPct val="90000"/>
+              </a:lnSpc>
+              <a:buNone/>
+            </a:pPr>
+            <a:r>
+              <a:rPr lang="en-US" sz="2600" b="1" dirty="0">
+                <a:solidFill>
+                  <a:srgbClr val="1F2528"/>
+                </a:solidFill>
+                <a:latin typeface="Aptos Display" pitchFamily="34" charset="0"/>
+                <a:ea typeface="Aptos Display" pitchFamily="34" charset="-122"/>
+                <a:cs typeface="Aptos Display" pitchFamily="34" charset="-120"/>
+              </a:rPr>
+              <a:t>Era shift: transfer learning with pretrained CNN models</a:t>
+            </a:r>
+            <a:endParaRPr lang="en-US" sz="2600" dirty="0"/>
+          </a:p>
+        </p:txBody>
+      </p:sp>
+      <p:sp>
+        <p:nvSpPr>
+          <p:cNvPr id="4" name="Shape 2"/>
+          <p:cNvSpPr/>
+          <p:nvPr/>
+        </p:nvSpPr>
+        <p:spPr>
+          <a:xfrm>
+            <a:off x="566928" y="1078992"/>
+            <a:ext cx="11018520" cy="0"/>
+          </a:xfrm>
+          <a:prstGeom prst="line">
+            <a:avLst/>
+          </a:prstGeom>
+          <a:noFill/>
+          <a:ln w="9525">
+            <a:solidFill>
+              <a:srgbClr val="D8D4C8"/>
+            </a:solidFill>
+            <a:prstDash val="solid"/>
+          </a:ln>
+        </p:spPr>
+        <p:txBody>
+          <a:bodyPr/>
+          <a:lstStyle/>
+          <a:p>
+            <a:endParaRPr lang="en-US"/>
+          </a:p>
+        </p:txBody>
+      </p:sp>
+      <p:sp>
+        <p:nvSpPr>
+          <p:cNvPr id="11" name="Text 9"/>
+          <p:cNvSpPr/>
+          <p:nvPr/>
+        </p:nvSpPr>
+        <p:spPr>
+          <a:xfrm>
+            <a:off x="822960" y="1371600"/>
+            <a:ext cx="822960" cy="182880"/>
+          </a:xfrm>
+          <a:prstGeom prst="rect">
+            <a:avLst/>
+          </a:prstGeom>
+          <a:noFill/>
+          <a:ln/>
+        </p:spPr>
+        <p:txBody>
+          <a:bodyPr wrap="square" lIns="0" tIns="0" rIns="0" bIns="0" rtlCol="0" anchor="t">
+            <a:normAutofit/>
+          </a:bodyPr>
+          <a:lstStyle/>
+          <a:p>
+            <a:pPr marL="0" indent="0" algn="l">
+              <a:lnSpc>
+                <a:spcPct val="90000"/>
+              </a:lnSpc>
+              <a:buNone/>
+            </a:pPr>
+            <a:r>
+              <a:rPr lang="en-US" sz="1000" b="1" dirty="0">
+                <a:solidFill>
+                  <a:srgbClr val="17677D"/>
+                </a:solidFill>
+                <a:latin typeface="Aptos" pitchFamily="34" charset="0"/>
+                <a:ea typeface="Aptos" pitchFamily="34" charset="-122"/>
+                <a:cs typeface="Aptos" pitchFamily="34" charset="-120"/>
+              </a:rPr>
+              <a:t>Shift</a:t>
+            </a:r>
+            <a:endParaRPr lang="en-US" sz="1000" dirty="0"/>
+          </a:p>
+        </p:txBody>
+      </p:sp>
+      <p:sp>
+        <p:nvSpPr>
+          <p:cNvPr id="12" name="Text 10"/>
+          <p:cNvSpPr/>
+          <p:nvPr/>
+        </p:nvSpPr>
+        <p:spPr>
+          <a:xfrm>
+            <a:off x="822960" y="1664208"/>
+            <a:ext cx="5486400" cy="438912"/>
+          </a:xfrm>
+          <a:prstGeom prst="rect">
+            <a:avLst/>
+          </a:prstGeom>
+          <a:noFill/>
+          <a:ln/>
+        </p:spPr>
+        <p:txBody>
+          <a:bodyPr wrap="square" lIns="0" tIns="0" rIns="0" bIns="0" rtlCol="0" anchor="t">
+            <a:normAutofit fontScale="85000" lnSpcReduction="10000"/>
+          </a:bodyPr>
+          <a:lstStyle/>
+          <a:p>
+            <a:pPr marL="0" indent="0" algn="l">
+              <a:lnSpc>
+                <a:spcPct val="90000"/>
+              </a:lnSpc>
+              <a:buNone/>
+            </a:pPr>
+            <a:r>
+              <a:rPr lang="en-US" sz="2400" b="1" dirty="0">
+                <a:solidFill>
+                  <a:srgbClr val="1F2528"/>
+                </a:solidFill>
+                <a:latin typeface="Aptos Display" pitchFamily="34" charset="0"/>
+                <a:ea typeface="Aptos Display" pitchFamily="34" charset="-122"/>
+                <a:cs typeface="Aptos Display" pitchFamily="34" charset="-120"/>
+              </a:rPr>
+              <a:t>Learn the representation elsewhere. Adapt it here.</a:t>
+            </a:r>
+            <a:endParaRPr lang="en-US" sz="2400" dirty="0"/>
+          </a:p>
+        </p:txBody>
+      </p:sp>
+      <p:sp>
+        <p:nvSpPr>
+          <p:cNvPr id="13" name="Shape 11"/>
+          <p:cNvSpPr/>
+          <p:nvPr/>
+        </p:nvSpPr>
+        <p:spPr>
+          <a:xfrm>
+            <a:off x="914400" y="2743200"/>
+            <a:ext cx="2743200" cy="1005840"/>
+          </a:xfrm>
+          <a:prstGeom prst="rect">
+            <a:avLst/>
+          </a:prstGeom>
+          <a:solidFill>
+            <a:srgbClr val="FFFFFF"/>
+          </a:solidFill>
+          <a:ln w="15240">
+            <a:solidFill>
+              <a:srgbClr val="17677D"/>
+            </a:solidFill>
+            <a:prstDash val="solid"/>
+          </a:ln>
+        </p:spPr>
+        <p:txBody>
+          <a:bodyPr/>
+          <a:lstStyle/>
+          <a:p>
+            <a:endParaRPr lang="en-US"/>
+          </a:p>
+        </p:txBody>
+      </p:sp>
+      <p:sp>
+        <p:nvSpPr>
+          <p:cNvPr id="14" name="Text 12"/>
+          <p:cNvSpPr/>
+          <p:nvPr/>
+        </p:nvSpPr>
+        <p:spPr>
+          <a:xfrm>
+            <a:off x="1097280" y="2971800"/>
+            <a:ext cx="2377440" cy="182880"/>
+          </a:xfrm>
+          <a:prstGeom prst="rect">
+            <a:avLst/>
+          </a:prstGeom>
+          <a:noFill/>
+          <a:ln/>
+        </p:spPr>
+        <p:txBody>
+          <a:bodyPr wrap="square" lIns="0" tIns="0" rIns="0" bIns="0" rtlCol="0" anchor="t">
+            <a:normAutofit lnSpcReduction="10000"/>
+          </a:bodyPr>
+          <a:lstStyle/>
+          <a:p>
+            <a:pPr marL="0" indent="0" algn="ctr">
+              <a:lnSpc>
+                <a:spcPct val="90000"/>
+              </a:lnSpc>
+              <a:buNone/>
+            </a:pPr>
+            <a:r>
+              <a:rPr lang="en-US" sz="1350" b="1" dirty="0">
+                <a:solidFill>
+                  <a:srgbClr val="17677D"/>
+                </a:solidFill>
+                <a:latin typeface="Aptos" pitchFamily="34" charset="0"/>
+                <a:ea typeface="Aptos" pitchFamily="34" charset="-122"/>
+                <a:cs typeface="Aptos" pitchFamily="34" charset="-120"/>
+              </a:rPr>
+              <a:t>Large audio datasets</a:t>
+            </a:r>
+            <a:endParaRPr lang="en-US" sz="1350" dirty="0"/>
+          </a:p>
+        </p:txBody>
+      </p:sp>
+      <p:sp>
+        <p:nvSpPr>
+          <p:cNvPr id="15" name="Text 13"/>
+          <p:cNvSpPr/>
+          <p:nvPr/>
+        </p:nvSpPr>
+        <p:spPr>
+          <a:xfrm>
+            <a:off x="1097280" y="3246120"/>
+            <a:ext cx="2377440" cy="146304"/>
+          </a:xfrm>
+          <a:prstGeom prst="rect">
+            <a:avLst/>
+          </a:prstGeom>
+          <a:noFill/>
+          <a:ln/>
+        </p:spPr>
+        <p:txBody>
+          <a:bodyPr wrap="square" lIns="0" tIns="0" rIns="0" bIns="0" rtlCol="0" anchor="t">
+            <a:normAutofit/>
+          </a:bodyPr>
+          <a:lstStyle/>
+          <a:p>
+            <a:pPr marL="0" indent="0" algn="ctr">
+              <a:lnSpc>
+                <a:spcPct val="90000"/>
+              </a:lnSpc>
+              <a:buNone/>
+            </a:pPr>
+            <a:r>
+              <a:rPr lang="en-US" sz="850" dirty="0">
+                <a:solidFill>
+                  <a:srgbClr val="6B7176"/>
+                </a:solidFill>
+                <a:latin typeface="Aptos" pitchFamily="34" charset="0"/>
+                <a:ea typeface="Aptos" pitchFamily="34" charset="-122"/>
+                <a:cs typeface="Aptos" pitchFamily="34" charset="-120"/>
+              </a:rPr>
+              <a:t>pretraining</a:t>
+            </a:r>
+            <a:endParaRPr lang="en-US" sz="850" dirty="0"/>
+          </a:p>
+        </p:txBody>
+      </p:sp>
+      <p:sp>
+        <p:nvSpPr>
+          <p:cNvPr id="16" name="Shape 14"/>
+          <p:cNvSpPr/>
+          <p:nvPr/>
+        </p:nvSpPr>
+        <p:spPr>
+          <a:xfrm>
+            <a:off x="3886200" y="3246120"/>
+            <a:ext cx="1069848" cy="0"/>
+          </a:xfrm>
+          <a:prstGeom prst="line">
+            <a:avLst/>
+          </a:prstGeom>
+          <a:noFill/>
+          <a:ln w="19050">
+            <a:solidFill>
+              <a:srgbClr val="BFC6C8"/>
+            </a:solidFill>
+            <a:prstDash val="solid"/>
+            <a:tailEnd type="triangle"/>
+          </a:ln>
+        </p:spPr>
+        <p:txBody>
+          <a:bodyPr/>
+          <a:lstStyle/>
+          <a:p>
+            <a:endParaRPr lang="en-US"/>
+          </a:p>
+        </p:txBody>
+      </p:sp>
+      <p:sp>
+        <p:nvSpPr>
+          <p:cNvPr id="17" name="Shape 15"/>
+          <p:cNvSpPr/>
+          <p:nvPr/>
+        </p:nvSpPr>
+        <p:spPr>
+          <a:xfrm>
+            <a:off x="5138928" y="2743200"/>
+            <a:ext cx="2148840" cy="1005840"/>
+          </a:xfrm>
+          <a:prstGeom prst="rect">
+            <a:avLst/>
+          </a:prstGeom>
+          <a:solidFill>
+            <a:srgbClr val="FDFDFB"/>
+          </a:solidFill>
+          <a:ln w="10160">
+            <a:solidFill>
+              <a:srgbClr val="17677D"/>
+            </a:solidFill>
+            <a:prstDash val="solid"/>
+          </a:ln>
+        </p:spPr>
+        <p:txBody>
+          <a:bodyPr/>
+          <a:lstStyle/>
+          <a:p>
+            <a:endParaRPr lang="en-US"/>
+          </a:p>
+        </p:txBody>
+      </p:sp>
+      <p:sp>
+        <p:nvSpPr>
+          <p:cNvPr id="18" name="Text 16"/>
+          <p:cNvSpPr/>
+          <p:nvPr/>
+        </p:nvSpPr>
+        <p:spPr>
+          <a:xfrm>
+            <a:off x="5212080" y="3172968"/>
+            <a:ext cx="2002536" cy="164592"/>
+          </a:xfrm>
+          <a:prstGeom prst="rect">
+            <a:avLst/>
+          </a:prstGeom>
+          <a:noFill/>
+          <a:ln/>
+        </p:spPr>
+        <p:txBody>
+          <a:bodyPr wrap="square" lIns="0" tIns="0" rIns="0" bIns="0" rtlCol="0" anchor="ctr">
+            <a:normAutofit fontScale="62500" lnSpcReduction="20000"/>
+          </a:bodyPr>
+          <a:lstStyle/>
+          <a:p>
+            <a:pPr marL="0" indent="0" algn="ctr">
+              <a:lnSpc>
+                <a:spcPct val="90000"/>
+              </a:lnSpc>
+              <a:buNone/>
+            </a:pPr>
+            <a:r>
+              <a:rPr lang="en-US" sz="1100" dirty="0">
+                <a:solidFill>
+                  <a:srgbClr val="1F2528"/>
+                </a:solidFill>
+                <a:latin typeface="Aptos" pitchFamily="34" charset="0"/>
+                <a:ea typeface="Aptos" pitchFamily="34" charset="-122"/>
+                <a:cs typeface="Aptos" pitchFamily="34" charset="-120"/>
+              </a:rPr>
+              <a:t>Pretrained</a:t>
+            </a:r>
+            <a:endParaRPr lang="en-US" sz="1100" dirty="0"/>
+          </a:p>
+          <a:p>
+            <a:pPr marL="0" indent="0" algn="ctr">
+              <a:lnSpc>
+                <a:spcPct val="90000"/>
+              </a:lnSpc>
+              <a:buNone/>
+            </a:pPr>
+            <a:r>
+              <a:rPr lang="en-US" sz="1100" dirty="0">
+                <a:solidFill>
+                  <a:srgbClr val="1F2528"/>
+                </a:solidFill>
+                <a:latin typeface="Aptos" pitchFamily="34" charset="0"/>
+                <a:ea typeface="Aptos" pitchFamily="34" charset="-122"/>
+                <a:cs typeface="Aptos" pitchFamily="34" charset="-120"/>
+              </a:rPr>
+              <a:t>CNN-style encoder</a:t>
+            </a:r>
+            <a:endParaRPr lang="en-US" sz="1100" dirty="0"/>
+          </a:p>
+        </p:txBody>
+      </p:sp>
+      <p:sp>
+        <p:nvSpPr>
+          <p:cNvPr id="19" name="Shape 17"/>
+          <p:cNvSpPr/>
+          <p:nvPr/>
+        </p:nvSpPr>
+        <p:spPr>
+          <a:xfrm>
+            <a:off x="7452360" y="3246120"/>
+            <a:ext cx="1005840" cy="0"/>
+          </a:xfrm>
+          <a:prstGeom prst="line">
+            <a:avLst/>
+          </a:prstGeom>
+          <a:noFill/>
+          <a:ln w="19050">
+            <a:solidFill>
+              <a:srgbClr val="BFC6C8"/>
+            </a:solidFill>
+            <a:prstDash val="solid"/>
+            <a:tailEnd type="triangle"/>
+          </a:ln>
+        </p:spPr>
+        <p:txBody>
+          <a:bodyPr/>
+          <a:lstStyle/>
+          <a:p>
+            <a:endParaRPr lang="en-US"/>
+          </a:p>
+        </p:txBody>
+      </p:sp>
+      <p:sp>
+        <p:nvSpPr>
+          <p:cNvPr id="20" name="Shape 18"/>
+          <p:cNvSpPr/>
+          <p:nvPr/>
+        </p:nvSpPr>
+        <p:spPr>
+          <a:xfrm>
+            <a:off x="8641080" y="2743200"/>
+            <a:ext cx="1920240" cy="1005840"/>
+          </a:xfrm>
+          <a:prstGeom prst="rect">
+            <a:avLst/>
+          </a:prstGeom>
+          <a:solidFill>
+            <a:srgbClr val="FDFDFB"/>
+          </a:solidFill>
+          <a:ln w="10160">
+            <a:solidFill>
+              <a:srgbClr val="BFC6C8"/>
+            </a:solidFill>
+            <a:prstDash val="solid"/>
+          </a:ln>
+        </p:spPr>
+        <p:txBody>
+          <a:bodyPr/>
+          <a:lstStyle/>
+          <a:p>
+            <a:endParaRPr lang="en-US"/>
+          </a:p>
+        </p:txBody>
+      </p:sp>
+      <p:sp>
+        <p:nvSpPr>
+          <p:cNvPr id="21" name="Text 19"/>
+          <p:cNvSpPr/>
+          <p:nvPr/>
+        </p:nvSpPr>
+        <p:spPr>
+          <a:xfrm>
+            <a:off x="8714232" y="3172968"/>
+            <a:ext cx="1773936" cy="164592"/>
+          </a:xfrm>
+          <a:prstGeom prst="rect">
+            <a:avLst/>
+          </a:prstGeom>
+          <a:noFill/>
+          <a:ln/>
+        </p:spPr>
+        <p:txBody>
+          <a:bodyPr wrap="square" lIns="0" tIns="0" rIns="0" bIns="0" rtlCol="0" anchor="ctr">
+            <a:normAutofit fontScale="62500" lnSpcReduction="20000"/>
+          </a:bodyPr>
+          <a:lstStyle/>
+          <a:p>
+            <a:pPr marL="0" indent="0" algn="ctr">
+              <a:lnSpc>
+                <a:spcPct val="90000"/>
+              </a:lnSpc>
+              <a:buNone/>
+            </a:pPr>
+            <a:r>
+              <a:rPr lang="en-US" sz="1100" dirty="0">
+                <a:solidFill>
+                  <a:srgbClr val="1F2528"/>
+                </a:solidFill>
+                <a:latin typeface="Aptos" pitchFamily="34" charset="0"/>
+                <a:ea typeface="Aptos" pitchFamily="34" charset="-122"/>
+                <a:cs typeface="Aptos" pitchFamily="34" charset="-120"/>
+              </a:rPr>
+              <a:t>ESC-50</a:t>
+            </a:r>
+            <a:endParaRPr lang="en-US" sz="1100" dirty="0"/>
+          </a:p>
+          <a:p>
+            <a:pPr marL="0" indent="0" algn="ctr">
+              <a:lnSpc>
+                <a:spcPct val="90000"/>
+              </a:lnSpc>
+              <a:buNone/>
+            </a:pPr>
+            <a:r>
+              <a:rPr lang="en-US" sz="1100" dirty="0">
+                <a:solidFill>
+                  <a:srgbClr val="1F2528"/>
+                </a:solidFill>
+                <a:latin typeface="Aptos" pitchFamily="34" charset="0"/>
+                <a:ea typeface="Aptos" pitchFamily="34" charset="-122"/>
+                <a:cs typeface="Aptos" pitchFamily="34" charset="-120"/>
+              </a:rPr>
+              <a:t>fine-tuning</a:t>
+            </a:r>
+            <a:endParaRPr lang="en-US" sz="1100" dirty="0"/>
+          </a:p>
+        </p:txBody>
+      </p:sp>
+      <p:sp>
+        <p:nvSpPr>
+          <p:cNvPr id="22" name="Text 20"/>
+          <p:cNvSpPr/>
+          <p:nvPr/>
+        </p:nvSpPr>
+        <p:spPr>
+          <a:xfrm>
+            <a:off x="914400" y="4572000"/>
+            <a:ext cx="9509760" cy="1024128"/>
+          </a:xfrm>
+          <a:prstGeom prst="rect">
+            <a:avLst/>
+          </a:prstGeom>
+          <a:noFill/>
+          <a:ln/>
+        </p:spPr>
+        <p:txBody>
+          <a:bodyPr wrap="square" lIns="254" tIns="254" rIns="254" bIns="254" rtlCol="0" anchor="ctr">
+            <a:normAutofit/>
+          </a:bodyPr>
+          <a:lstStyle/>
+          <a:p>
+            <a:r>
+              <a:rPr lang="en-US" sz="1300" dirty="0">
+                <a:solidFill>
+                  <a:srgbClr val="1F2528"/>
+                </a:solidFill>
+                <a:latin typeface="Aptos" pitchFamily="34" charset="0"/>
+                <a:ea typeface="Aptos" pitchFamily="34" charset="-122"/>
+                <a:cs typeface="Aptos" pitchFamily="34" charset="-120"/>
+              </a:rPr>
+              <a:t>ESC-50 is small for learning robust audio features from scratch.</a:t>
+            </a:r>
+            <a:endParaRPr lang="en-US" sz="1300" dirty="0"/>
+          </a:p>
+          <a:p>
+            <a:endParaRPr lang="en-US" sz="1300" dirty="0"/>
+          </a:p>
+          <a:p>
+            <a:r>
+              <a:rPr lang="en-US" sz="1300" dirty="0">
+                <a:solidFill>
+                  <a:srgbClr val="1F2528"/>
+                </a:solidFill>
+                <a:latin typeface="Aptos" pitchFamily="34" charset="0"/>
+                <a:ea typeface="Aptos" pitchFamily="34" charset="-122"/>
+                <a:cs typeface="Aptos" pitchFamily="34" charset="-120"/>
+              </a:rPr>
+              <a:t>Transfer learning imports representations learned from much larger audio datasets.</a:t>
+            </a:r>
+            <a:endParaRPr lang="en-US" sz="1300" dirty="0"/>
+          </a:p>
+          <a:p>
+            <a:endParaRPr lang="en-US" sz="1300" dirty="0"/>
+          </a:p>
+          <a:p>
+            <a:r>
+              <a:rPr lang="en-US" sz="1300" dirty="0">
+                <a:solidFill>
+                  <a:srgbClr val="1F2528"/>
+                </a:solidFill>
+                <a:latin typeface="Aptos" pitchFamily="34" charset="0"/>
+                <a:ea typeface="Aptos" pitchFamily="34" charset="-122"/>
+                <a:cs typeface="Aptos" pitchFamily="34" charset="-120"/>
+              </a:rPr>
+              <a:t>This era tests pretrained CNN-style audio models before transformer-based audio encoders.</a:t>
+            </a:r>
+            <a:endParaRPr lang="en-US" sz="1300" dirty="0"/>
+          </a:p>
+        </p:txBody>
+      </p:sp>
+      <p:sp>
+        <p:nvSpPr>
+          <p:cNvPr id="23" name="Text 21"/>
+          <p:cNvSpPr/>
+          <p:nvPr/>
+        </p:nvSpPr>
+        <p:spPr>
+          <a:xfrm>
+            <a:off x="11064240" y="6473952"/>
+            <a:ext cx="411480" cy="164592"/>
+          </a:xfrm>
+          <a:prstGeom prst="rect">
+            <a:avLst/>
+          </a:prstGeom>
+          <a:noFill/>
+          <a:ln/>
+        </p:spPr>
+        <p:txBody>
+          <a:bodyPr wrap="square" lIns="0" tIns="0" rIns="0" bIns="0" rtlCol="0" anchor="t">
+            <a:normAutofit/>
+          </a:bodyPr>
+          <a:lstStyle/>
+          <a:p>
+            <a:pPr marL="0" indent="0" algn="r">
+              <a:lnSpc>
+                <a:spcPct val="90000"/>
+              </a:lnSpc>
+              <a:buNone/>
+            </a:pPr>
+            <a:r>
+              <a:rPr lang="en-US" sz="750" dirty="0">
+                <a:solidFill>
+                  <a:srgbClr val="6B7176"/>
+                </a:solidFill>
+                <a:latin typeface="Aptos" pitchFamily="34" charset="0"/>
+                <a:ea typeface="Aptos" pitchFamily="34" charset="-122"/>
+                <a:cs typeface="Aptos" pitchFamily="34" charset="-120"/>
+              </a:rPr>
+              <a:t>07</a:t>
+            </a:r>
+            <a:endParaRPr lang="en-US" sz="750" dirty="0"/>
+          </a:p>
+        </p:txBody>
+      </p:sp>
+      <p:pic>
+        <p:nvPicPr>
+          <p:cNvPr id="31" name="Picture 2" descr="Cornell University Logo, symbol, meaning, history, PNG, brand">
+            <a:extLst>
+              <a:ext uri="{FF2B5EF4-FFF2-40B4-BE49-F238E27FC236}">
+                <a16:creationId xmlns:a16="http://schemas.microsoft.com/office/drawing/2014/main" id="{62E0AF86-B513-90EF-C7B7-DDB5A9E396B9}"/>
+              </a:ext>
+            </a:extLst>
+          </p:cNvPr>
+          <p:cNvPicPr>
+            <a:picLocks noChangeAspect="1" noChangeArrowheads="1"/>
+          </p:cNvPicPr>
+          <p:nvPr/>
+        </p:nvPicPr>
+        <p:blipFill rotWithShape="1">
+          <a:blip r:embed="rId3">
+            <a:extLst>
+              <a:ext uri="{28A0092B-C50C-407E-A947-70E740481C1C}">
+                <a14:useLocalDpi xmlns:a14="http://schemas.microsoft.com/office/drawing/2010/main" val="0"/>
+              </a:ext>
+            </a:extLst>
+          </a:blip>
+          <a:srcRect l="15934" r="15589"/>
+          <a:stretch/>
+        </p:blipFill>
+        <p:spPr bwMode="auto">
+          <a:xfrm>
+            <a:off x="11320507" y="147128"/>
+            <a:ext cx="863884" cy="709633"/>
+          </a:xfrm>
+          <a:prstGeom prst="rect">
+            <a:avLst/>
+          </a:prstGeom>
+          <a:noFill/>
+          <a:extLst>
+            <a:ext uri="{909E8E84-426E-40DD-AFC4-6F175D3DCCD1}">
+              <a14:hiddenFill xmlns:a14="http://schemas.microsoft.com/office/drawing/2010/main">
+                <a:solidFill>
+                  <a:srgbClr val="FFFFFF"/>
+                </a:solidFill>
+              </a14:hiddenFill>
+            </a:ext>
+          </a:extLst>
+        </p:spPr>
+      </p:pic>
+      <p:sp>
+        <p:nvSpPr>
+          <p:cNvPr id="32" name="Shape 19">
+            <a:extLst>
+              <a:ext uri="{FF2B5EF4-FFF2-40B4-BE49-F238E27FC236}">
+                <a16:creationId xmlns:a16="http://schemas.microsoft.com/office/drawing/2014/main" id="{260A39BB-675D-9A5C-9111-93699EA456EF}"/>
+              </a:ext>
+            </a:extLst>
+          </p:cNvPr>
+          <p:cNvSpPr/>
+          <p:nvPr/>
+        </p:nvSpPr>
+        <p:spPr>
+          <a:xfrm>
+            <a:off x="6237447" y="751408"/>
+            <a:ext cx="1809206" cy="295381"/>
+          </a:xfrm>
+          <a:prstGeom prst="chevron">
+            <a:avLst/>
+          </a:prstGeom>
+          <a:solidFill>
+            <a:srgbClr val="D7DDE0">
+              <a:alpha val="90000"/>
+            </a:srgbClr>
+          </a:solidFill>
+          <a:ln w="12700">
+            <a:solidFill>
+              <a:srgbClr val="F7F5EF"/>
+            </a:solidFill>
+            <a:prstDash val="solid"/>
+          </a:ln>
+        </p:spPr>
+        <p:txBody>
+          <a:bodyPr/>
+          <a:lstStyle/>
+          <a:p>
+            <a:endParaRPr lang="en-US" sz="1100" dirty="0"/>
+          </a:p>
+        </p:txBody>
+      </p:sp>
+      <p:sp>
+        <p:nvSpPr>
+          <p:cNvPr id="33" name="Text 20">
+            <a:extLst>
+              <a:ext uri="{FF2B5EF4-FFF2-40B4-BE49-F238E27FC236}">
+                <a16:creationId xmlns:a16="http://schemas.microsoft.com/office/drawing/2014/main" id="{BA526180-DF64-53B3-1180-B6DBF5A9B1C8}"/>
+              </a:ext>
+            </a:extLst>
+          </p:cNvPr>
+          <p:cNvSpPr/>
+          <p:nvPr/>
+        </p:nvSpPr>
+        <p:spPr>
+          <a:xfrm>
+            <a:off x="6287692" y="833886"/>
+            <a:ext cx="1597682" cy="75563"/>
+          </a:xfrm>
+          <a:prstGeom prst="rect">
+            <a:avLst/>
+          </a:prstGeom>
+          <a:noFill/>
+          <a:ln/>
+        </p:spPr>
+        <p:txBody>
+          <a:bodyPr wrap="square" lIns="0" tIns="0" rIns="0" bIns="0" rtlCol="0" anchor="t">
+            <a:normAutofit fontScale="92500" lnSpcReduction="20000"/>
+          </a:bodyPr>
+          <a:lstStyle/>
+          <a:p>
+            <a:pPr algn="ctr">
+              <a:lnSpc>
+                <a:spcPct val="90000"/>
+              </a:lnSpc>
+            </a:pPr>
+            <a:r>
+              <a:rPr lang="en-US" sz="700" b="1" dirty="0">
+                <a:solidFill>
+                  <a:srgbClr val="30383D"/>
+                </a:solidFill>
+                <a:latin typeface="Aptos" pitchFamily="34" charset="0"/>
+              </a:rPr>
+              <a:t>Training from scratch</a:t>
+            </a:r>
+          </a:p>
+        </p:txBody>
+      </p:sp>
+      <p:sp>
+        <p:nvSpPr>
+          <p:cNvPr id="34" name="Text 21">
+            <a:extLst>
+              <a:ext uri="{FF2B5EF4-FFF2-40B4-BE49-F238E27FC236}">
+                <a16:creationId xmlns:a16="http://schemas.microsoft.com/office/drawing/2014/main" id="{91AA0ADC-A28C-7C05-372C-FD6A76EC5657}"/>
+              </a:ext>
+            </a:extLst>
+          </p:cNvPr>
+          <p:cNvSpPr/>
+          <p:nvPr/>
+        </p:nvSpPr>
+        <p:spPr>
+          <a:xfrm>
+            <a:off x="6295809" y="928966"/>
+            <a:ext cx="1597682" cy="58389"/>
+          </a:xfrm>
+          <a:prstGeom prst="rect">
+            <a:avLst/>
+          </a:prstGeom>
+          <a:noFill/>
+          <a:ln/>
+        </p:spPr>
+        <p:txBody>
+          <a:bodyPr wrap="square" lIns="0" tIns="0" rIns="0" bIns="0" rtlCol="0" anchor="t">
+            <a:normAutofit fontScale="92500" lnSpcReduction="20000"/>
+          </a:bodyPr>
+          <a:lstStyle/>
+          <a:p>
+            <a:pPr marL="0" indent="0" algn="ctr">
+              <a:lnSpc>
+                <a:spcPct val="90000"/>
+              </a:lnSpc>
+              <a:buNone/>
+            </a:pPr>
+            <a:r>
+              <a:rPr lang="en-US" sz="500" dirty="0" err="1">
+                <a:solidFill>
+                  <a:srgbClr val="6B7176"/>
+                </a:solidFill>
+                <a:latin typeface="Aptos" pitchFamily="34" charset="0"/>
+              </a:rPr>
+              <a:t>Piczak</a:t>
+            </a:r>
+            <a:r>
+              <a:rPr lang="en-US" sz="500" dirty="0">
+                <a:solidFill>
+                  <a:srgbClr val="6B7176"/>
+                </a:solidFill>
+                <a:latin typeface="Aptos" pitchFamily="34" charset="0"/>
+              </a:rPr>
+              <a:t> CNN | Variations | LSTM</a:t>
+            </a:r>
+          </a:p>
+        </p:txBody>
+      </p:sp>
+      <p:sp>
+        <p:nvSpPr>
+          <p:cNvPr id="36" name="Text 23">
+            <a:extLst>
+              <a:ext uri="{FF2B5EF4-FFF2-40B4-BE49-F238E27FC236}">
+                <a16:creationId xmlns:a16="http://schemas.microsoft.com/office/drawing/2014/main" id="{5795C228-2271-C0A9-F5DA-A886FEE6BFCA}"/>
+              </a:ext>
+            </a:extLst>
+          </p:cNvPr>
+          <p:cNvSpPr/>
+          <p:nvPr/>
+        </p:nvSpPr>
+        <p:spPr>
+          <a:xfrm>
+            <a:off x="7976392" y="839252"/>
+            <a:ext cx="1597682" cy="75563"/>
+          </a:xfrm>
+          <a:prstGeom prst="rect">
+            <a:avLst/>
+          </a:prstGeom>
+          <a:noFill/>
+          <a:ln/>
+        </p:spPr>
+        <p:txBody>
+          <a:bodyPr wrap="square" lIns="0" tIns="0" rIns="0" bIns="0" rtlCol="0" anchor="t">
+            <a:normAutofit fontScale="92500" lnSpcReduction="20000"/>
+          </a:bodyPr>
+          <a:lstStyle/>
+          <a:p>
+            <a:pPr algn="ctr">
+              <a:lnSpc>
+                <a:spcPct val="90000"/>
+              </a:lnSpc>
+            </a:pPr>
+            <a:r>
+              <a:rPr lang="en-US" sz="700" b="1" dirty="0">
+                <a:solidFill>
+                  <a:srgbClr val="FFFFFF"/>
+                </a:solidFill>
+                <a:latin typeface="Aptos" pitchFamily="34" charset="0"/>
+              </a:rPr>
+              <a:t>Transfer learning: pretrained CNN</a:t>
+            </a:r>
+          </a:p>
+        </p:txBody>
+      </p:sp>
+      <p:sp>
+        <p:nvSpPr>
+          <p:cNvPr id="39" name="Text 26">
+            <a:extLst>
+              <a:ext uri="{FF2B5EF4-FFF2-40B4-BE49-F238E27FC236}">
+                <a16:creationId xmlns:a16="http://schemas.microsoft.com/office/drawing/2014/main" id="{180CCBB2-1146-638B-A7EE-280D19E1094A}"/>
+              </a:ext>
+            </a:extLst>
+          </p:cNvPr>
+          <p:cNvSpPr/>
+          <p:nvPr/>
+        </p:nvSpPr>
+        <p:spPr>
+          <a:xfrm>
+            <a:off x="9657605" y="848441"/>
+            <a:ext cx="1597682" cy="75563"/>
+          </a:xfrm>
+          <a:prstGeom prst="rect">
+            <a:avLst/>
+          </a:prstGeom>
+          <a:noFill/>
+          <a:ln/>
+        </p:spPr>
+        <p:txBody>
+          <a:bodyPr wrap="square" lIns="0" tIns="0" rIns="0" bIns="0" rtlCol="0" anchor="t">
+            <a:normAutofit fontScale="92500" lnSpcReduction="20000"/>
+          </a:bodyPr>
+          <a:lstStyle/>
+          <a:p>
+            <a:pPr marL="0" indent="0" algn="ctr">
+              <a:lnSpc>
+                <a:spcPct val="90000"/>
+              </a:lnSpc>
+              <a:buNone/>
+            </a:pPr>
+            <a:r>
+              <a:rPr lang="en-US" sz="700" b="1" dirty="0">
+                <a:solidFill>
+                  <a:srgbClr val="30383D"/>
+                </a:solidFill>
+                <a:latin typeface="Aptos" pitchFamily="34" charset="0"/>
+                <a:ea typeface="Aptos" pitchFamily="34" charset="-122"/>
+                <a:cs typeface="Aptos" pitchFamily="34" charset="-120"/>
+              </a:rPr>
+              <a:t>Transfer learning: pretrained transformers</a:t>
+            </a:r>
+            <a:endParaRPr lang="en-US" sz="700" dirty="0"/>
+          </a:p>
+        </p:txBody>
+      </p:sp>
+      <p:sp>
+        <p:nvSpPr>
+          <p:cNvPr id="40" name="Text 27">
+            <a:extLst>
+              <a:ext uri="{FF2B5EF4-FFF2-40B4-BE49-F238E27FC236}">
+                <a16:creationId xmlns:a16="http://schemas.microsoft.com/office/drawing/2014/main" id="{3FEF8C9C-411D-2FBC-9DE3-A476A096BB75}"/>
+              </a:ext>
+            </a:extLst>
+          </p:cNvPr>
+          <p:cNvSpPr/>
+          <p:nvPr/>
+        </p:nvSpPr>
+        <p:spPr>
+          <a:xfrm>
+            <a:off x="9657605" y="944489"/>
+            <a:ext cx="1662902" cy="107931"/>
+          </a:xfrm>
+          <a:prstGeom prst="rect">
+            <a:avLst/>
+          </a:prstGeom>
+          <a:noFill/>
+          <a:ln/>
+        </p:spPr>
+        <p:txBody>
+          <a:bodyPr wrap="square" lIns="0" tIns="0" rIns="0" bIns="0" rtlCol="0" anchor="t">
+            <a:normAutofit/>
+          </a:bodyPr>
+          <a:lstStyle/>
+          <a:p>
+            <a:pPr marL="0" indent="0" algn="ctr">
+              <a:lnSpc>
+                <a:spcPct val="90000"/>
+              </a:lnSpc>
+              <a:buNone/>
+            </a:pPr>
+            <a:r>
+              <a:rPr lang="en-US" sz="500" dirty="0">
+                <a:solidFill>
+                  <a:srgbClr val="6B7176"/>
+                </a:solidFill>
+                <a:latin typeface="Aptos" pitchFamily="34" charset="0"/>
+                <a:ea typeface="Aptos" pitchFamily="34" charset="-122"/>
+                <a:cs typeface="Aptos" pitchFamily="34" charset="-120"/>
+              </a:rPr>
+              <a:t>AST | BEATs</a:t>
+            </a:r>
+            <a:endParaRPr lang="en-US" sz="500" dirty="0"/>
+          </a:p>
+        </p:txBody>
+      </p:sp>
+      <p:sp>
+        <p:nvSpPr>
+          <p:cNvPr id="10" name="Text 24">
+            <a:extLst>
+              <a:ext uri="{FF2B5EF4-FFF2-40B4-BE49-F238E27FC236}">
+                <a16:creationId xmlns:a16="http://schemas.microsoft.com/office/drawing/2014/main" id="{1C039644-5A2D-090F-2305-74160B1D24BB}"/>
+              </a:ext>
+            </a:extLst>
+          </p:cNvPr>
+          <p:cNvSpPr/>
+          <p:nvPr/>
+        </p:nvSpPr>
+        <p:spPr>
+          <a:xfrm>
+            <a:off x="7997198" y="941012"/>
+            <a:ext cx="1597682" cy="58389"/>
+          </a:xfrm>
+          <a:prstGeom prst="rect">
+            <a:avLst/>
+          </a:prstGeom>
+          <a:noFill/>
+          <a:ln/>
+        </p:spPr>
+        <p:txBody>
+          <a:bodyPr wrap="square" lIns="0" tIns="0" rIns="0" bIns="0" rtlCol="0" anchor="t">
+            <a:normAutofit fontScale="92500" lnSpcReduction="20000"/>
+          </a:bodyPr>
+          <a:lstStyle/>
+          <a:p>
+            <a:pPr algn="ctr">
+              <a:lnSpc>
+                <a:spcPct val="90000"/>
+              </a:lnSpc>
+            </a:pPr>
+            <a:r>
+              <a:rPr lang="en-US" sz="500" dirty="0">
+                <a:solidFill>
+                  <a:schemeClr val="bg1">
+                    <a:lumMod val="75000"/>
+                  </a:schemeClr>
+                </a:solidFill>
+                <a:latin typeface="Aptos" pitchFamily="34" charset="0"/>
+              </a:rPr>
+              <a:t>VGGish | YAMNet</a:t>
+            </a:r>
+          </a:p>
+        </p:txBody>
+      </p:sp>
+    </p:spTree>
   </p:cSld>
   <p:clrMapOvr>
     <a:masterClrMapping/>

--- a/Docs/Final_Project_Presentation_Draft.pptx
+++ b/Docs/Final_Project_Presentation_Draft.pptx
@@ -3061,26 +3061,24 @@
       </p:sp>
       <p:sp>
         <p:nvSpPr>
-          <p:cNvPr id="13" name="Text 11"/>
-          <p:cNvSpPr/>
-          <p:nvPr/>
-        </p:nvSpPr>
-        <p:spPr>
-          <a:xfrm>
-            <a:off x="731520" y="1307592"/>
-            <a:ext cx="1188720" cy="182880"/>
+          <p:cNvPr id="14" name="Text 12"/>
+          <p:cNvSpPr/>
+          <p:nvPr/>
+        </p:nvSpPr>
+        <p:spPr>
+          <a:xfrm>
+            <a:off x="731520" y="1591056"/>
+            <a:ext cx="4937760" cy="411480"/>
           </a:xfrm>
           <a:prstGeom prst="rect">
             <a:avLst/>
           </a:prstGeom>
           <a:noFill/>
-          <a:ln>
-            <a:noFill/>
-          </a:ln>
+          <a:ln/>
         </p:spPr>
         <p:txBody>
           <a:bodyPr wrap="square" lIns="0" tIns="0" rIns="0" bIns="0" rtlCol="0" anchor="t">
-            <a:normAutofit/>
+            <a:normAutofit fontScale="62500" lnSpcReduction="20000"/>
           </a:bodyPr>
           <a:lstStyle/>
           <a:p>
@@ -3091,81 +3089,22 @@
               <a:buNone/>
             </a:pPr>
             <a:r>
-              <a:rPr lang="en-US" sz="1000" b="1" dirty="0">
-                <a:solidFill>
-                  <a:srgbClr val="17677D"/>
-                </a:solidFill>
-                <a:latin typeface="Aptos" pitchFamily="34" charset="0"/>
-                <a:ea typeface="Aptos" pitchFamily="34" charset="-122"/>
-                <a:cs typeface="Aptos" pitchFamily="34" charset="-120"/>
-              </a:rPr>
-              <a:t>Question</a:t>
-            </a:r>
-            <a:endParaRPr lang="en-US" sz="1000" dirty="0"/>
-          </a:p>
-        </p:txBody>
-      </p:sp>
-      <p:sp>
-        <p:nvSpPr>
-          <p:cNvPr id="14" name="Text 12"/>
-          <p:cNvSpPr/>
-          <p:nvPr/>
-        </p:nvSpPr>
-        <p:spPr>
-          <a:xfrm>
-            <a:off x="731520" y="1591056"/>
-            <a:ext cx="4937760" cy="411480"/>
-          </a:xfrm>
-          <a:prstGeom prst="rect">
-            <a:avLst/>
-          </a:prstGeom>
-          <a:noFill/>
-          <a:ln/>
-        </p:spPr>
-        <p:txBody>
-          <a:bodyPr wrap="square" lIns="0" tIns="0" rIns="0" bIns="0" rtlCol="0" anchor="t">
-            <a:normAutofit fontScale="92500" lnSpcReduction="20000"/>
-          </a:bodyPr>
-          <a:lstStyle/>
-          <a:p>
-            <a:pPr marL="0" indent="0" algn="l">
-              <a:lnSpc>
-                <a:spcPct val="90000"/>
-              </a:lnSpc>
-              <a:buNone/>
-            </a:pPr>
-            <a:r>
-              <a:rPr lang="en-US" sz="1850" b="1" dirty="0">
+              <a:rPr lang="en-US" sz="1850" dirty="0" err="1">
                 <a:solidFill>
                   <a:srgbClr val="1F2528"/>
                 </a:solidFill>
                 <a:latin typeface="Aptos Display" pitchFamily="34" charset="0"/>
-                <a:ea typeface="Aptos Display" pitchFamily="34" charset="-122"/>
-                <a:cs typeface="Aptos Display" pitchFamily="34" charset="-120"/>
-              </a:rPr>
-              <a:t>Can earlier pretrained audio embeddings improve the relative to the </a:t>
-            </a:r>
-            <a:r>
-              <a:rPr lang="en-US" sz="1850" b="1" dirty="0" err="1">
+              </a:rPr>
+              <a:t>VGGish</a:t>
+            </a:r>
+            <a:r>
+              <a:rPr lang="en-US" sz="1850" dirty="0">
                 <a:solidFill>
                   <a:srgbClr val="1F2528"/>
                 </a:solidFill>
                 <a:latin typeface="Aptos Display" pitchFamily="34" charset="0"/>
-                <a:ea typeface="Aptos Display" pitchFamily="34" charset="-122"/>
-                <a:cs typeface="Aptos Display" pitchFamily="34" charset="-120"/>
-              </a:rPr>
-              <a:t>Piczak</a:t>
-            </a:r>
-            <a:r>
-              <a:rPr lang="en-US" sz="1850" b="1" dirty="0">
-                <a:solidFill>
-                  <a:srgbClr val="1F2528"/>
-                </a:solidFill>
-                <a:latin typeface="Aptos Display" pitchFamily="34" charset="0"/>
-                <a:ea typeface="Aptos Display" pitchFamily="34" charset="-122"/>
-                <a:cs typeface="Aptos Display" pitchFamily="34" charset="-120"/>
-              </a:rPr>
-              <a:t> baseline?</a:t>
+              </a:rPr>
+              <a:t> as a pretrained model has already trained to detect acoustic patterns and differences between sound types (speech, music, etc.) This acts as a catalyst for feature extraction on the ESC-50 dataset.</a:t>
             </a:r>
             <a:endParaRPr lang="en-US" sz="1850" dirty="0"/>
           </a:p>
@@ -5229,6 +5168,56 @@
           </p:txBody>
         </p:sp>
       </p:grpSp>
+      <p:sp>
+        <p:nvSpPr>
+          <p:cNvPr id="10" name="Text 11">
+            <a:extLst>
+              <a:ext uri="{FF2B5EF4-FFF2-40B4-BE49-F238E27FC236}">
+                <a16:creationId xmlns:a16="http://schemas.microsoft.com/office/drawing/2014/main" id="{DE244EB8-3ED2-4043-4502-02BC33DFA5D4}"/>
+              </a:ext>
+            </a:extLst>
+          </p:cNvPr>
+          <p:cNvSpPr/>
+          <p:nvPr/>
+        </p:nvSpPr>
+        <p:spPr>
+          <a:xfrm>
+            <a:off x="749808" y="1305368"/>
+            <a:ext cx="1280160" cy="182880"/>
+          </a:xfrm>
+          <a:prstGeom prst="rect">
+            <a:avLst/>
+          </a:prstGeom>
+          <a:noFill/>
+          <a:ln/>
+        </p:spPr>
+        <p:txBody>
+          <a:bodyPr wrap="square" lIns="0" tIns="0" rIns="0" bIns="0" rtlCol="0" anchor="t">
+            <a:normAutofit/>
+          </a:bodyPr>
+          <a:lstStyle/>
+          <a:p>
+            <a:pPr marL="0" indent="0" algn="l">
+              <a:lnSpc>
+                <a:spcPct val="90000"/>
+              </a:lnSpc>
+              <a:buNone/>
+            </a:pPr>
+            <a:r>
+              <a:rPr lang="en-US" sz="1000" b="1" dirty="0">
+                <a:solidFill>
+                  <a:srgbClr val="B65D3A"/>
+                </a:solidFill>
+                <a:latin typeface="Aptos" pitchFamily="34" charset="0"/>
+                <a:ea typeface="Aptos" pitchFamily="34" charset="-122"/>
+                <a:cs typeface="Aptos" pitchFamily="34" charset="-120"/>
+              </a:rPr>
+              <a:t>What Changed?</a:t>
+            </a:r>
+            <a:endParaRPr lang="en-US" sz="1000" dirty="0"/>
+          </a:p>
+        </p:txBody>
+      </p:sp>
     </p:spTree>
   </p:cSld>
   <p:clrMapOvr>
@@ -5524,94 +5513,6 @@
               <a:t>09</a:t>
             </a:r>
             <a:endParaRPr lang="en-US" sz="750" dirty="0"/>
-          </a:p>
-        </p:txBody>
-      </p:sp>
-      <p:sp>
-        <p:nvSpPr>
-          <p:cNvPr id="13" name="Text 11"/>
-          <p:cNvSpPr/>
-          <p:nvPr/>
-        </p:nvSpPr>
-        <p:spPr>
-          <a:xfrm>
-            <a:off x="731520" y="1307592"/>
-            <a:ext cx="1188720" cy="182880"/>
-          </a:xfrm>
-          <a:prstGeom prst="rect">
-            <a:avLst/>
-          </a:prstGeom>
-          <a:noFill/>
-          <a:ln/>
-        </p:spPr>
-        <p:txBody>
-          <a:bodyPr wrap="square" lIns="0" tIns="0" rIns="0" bIns="0" rtlCol="0" anchor="t">
-            <a:normAutofit/>
-          </a:bodyPr>
-          <a:lstStyle/>
-          <a:p>
-            <a:pPr marL="0" indent="0" algn="l">
-              <a:lnSpc>
-                <a:spcPct val="90000"/>
-              </a:lnSpc>
-              <a:buNone/>
-            </a:pPr>
-            <a:r>
-              <a:rPr lang="en-US" sz="1000" b="1" dirty="0">
-                <a:solidFill>
-                  <a:srgbClr val="17677D"/>
-                </a:solidFill>
-                <a:latin typeface="Aptos" pitchFamily="34" charset="0"/>
-                <a:ea typeface="Aptos" pitchFamily="34" charset="-122"/>
-                <a:cs typeface="Aptos" pitchFamily="34" charset="-120"/>
-              </a:rPr>
-              <a:t>Question</a:t>
-            </a:r>
-            <a:endParaRPr lang="en-US" sz="1000" dirty="0"/>
-          </a:p>
-        </p:txBody>
-      </p:sp>
-      <p:sp>
-        <p:nvSpPr>
-          <p:cNvPr id="14" name="Text 12"/>
-          <p:cNvSpPr/>
-          <p:nvPr/>
-        </p:nvSpPr>
-        <p:spPr>
-          <a:xfrm>
-            <a:off x="731519" y="1591056"/>
-            <a:ext cx="5151121" cy="411480"/>
-          </a:xfrm>
-          <a:prstGeom prst="rect">
-            <a:avLst/>
-          </a:prstGeom>
-          <a:noFill/>
-          <a:ln/>
-        </p:spPr>
-        <p:txBody>
-          <a:bodyPr wrap="square" lIns="0" tIns="0" rIns="0" bIns="0" rtlCol="0" anchor="t">
-            <a:normAutofit fontScale="92500" lnSpcReduction="20000"/>
-          </a:bodyPr>
-          <a:lstStyle/>
-          <a:p>
-            <a:pPr marL="0" indent="0" algn="l">
-              <a:lnSpc>
-                <a:spcPct val="90000"/>
-              </a:lnSpc>
-              <a:buNone/>
-            </a:pPr>
-            <a:r>
-              <a:rPr lang="en-US" sz="1850" b="1" dirty="0">
-                <a:solidFill>
-                  <a:srgbClr val="1F2528"/>
-                </a:solidFill>
-                <a:latin typeface="Aptos Display" pitchFamily="34" charset="0"/>
-                <a:ea typeface="Aptos Display" pitchFamily="34" charset="-122"/>
-                <a:cs typeface="Aptos Display" pitchFamily="34" charset="-120"/>
-              </a:rPr>
-              <a:t>What happens when the pretrained audio representation is a better fit?</a:t>
-            </a:r>
-            <a:endParaRPr lang="en-US" sz="1850" dirty="0"/>
           </a:p>
         </p:txBody>
       </p:sp>
@@ -7672,6 +7573,122 @@
           </p:txBody>
         </p:sp>
       </p:grpSp>
+      <p:sp>
+        <p:nvSpPr>
+          <p:cNvPr id="7" name="Text 12">
+            <a:extLst>
+              <a:ext uri="{FF2B5EF4-FFF2-40B4-BE49-F238E27FC236}">
+                <a16:creationId xmlns:a16="http://schemas.microsoft.com/office/drawing/2014/main" id="{C829912F-CEEF-318D-D8D9-38E0F626FD2E}"/>
+              </a:ext>
+            </a:extLst>
+          </p:cNvPr>
+          <p:cNvSpPr/>
+          <p:nvPr/>
+        </p:nvSpPr>
+        <p:spPr>
+          <a:xfrm>
+            <a:off x="731520" y="1591056"/>
+            <a:ext cx="4937760" cy="411480"/>
+          </a:xfrm>
+          <a:prstGeom prst="rect">
+            <a:avLst/>
+          </a:prstGeom>
+          <a:noFill/>
+          <a:ln/>
+        </p:spPr>
+        <p:txBody>
+          <a:bodyPr wrap="square" lIns="0" tIns="0" rIns="0" bIns="0" rtlCol="0" anchor="t">
+            <a:normAutofit/>
+          </a:bodyPr>
+          <a:lstStyle/>
+          <a:p>
+            <a:pPr marL="0" indent="0" algn="l">
+              <a:lnSpc>
+                <a:spcPct val="90000"/>
+              </a:lnSpc>
+              <a:buNone/>
+            </a:pPr>
+            <a:r>
+              <a:rPr lang="en-US" sz="1200" dirty="0">
+                <a:solidFill>
+                  <a:srgbClr val="1F2528"/>
+                </a:solidFill>
+                <a:latin typeface="Aptos Display" pitchFamily="34" charset="0"/>
+              </a:rPr>
+              <a:t>Lightweight pretrained model that is 20x smaller than </a:t>
+            </a:r>
+            <a:r>
+              <a:rPr lang="en-US" sz="1200" dirty="0" err="1">
+                <a:solidFill>
+                  <a:srgbClr val="1F2528"/>
+                </a:solidFill>
+                <a:latin typeface="Aptos Display" pitchFamily="34" charset="0"/>
+              </a:rPr>
+              <a:t>VGGish</a:t>
+            </a:r>
+            <a:r>
+              <a:rPr lang="en-US" sz="1200" dirty="0">
+                <a:solidFill>
+                  <a:srgbClr val="1F2528"/>
+                </a:solidFill>
+                <a:latin typeface="Aptos Display" pitchFamily="34" charset="0"/>
+              </a:rPr>
+              <a:t>, but works well with real-time audio event classification. </a:t>
+            </a:r>
+            <a:endParaRPr lang="en-US" sz="1200" dirty="0"/>
+          </a:p>
+        </p:txBody>
+      </p:sp>
+      <p:sp>
+        <p:nvSpPr>
+          <p:cNvPr id="8" name="Text 11">
+            <a:extLst>
+              <a:ext uri="{FF2B5EF4-FFF2-40B4-BE49-F238E27FC236}">
+                <a16:creationId xmlns:a16="http://schemas.microsoft.com/office/drawing/2014/main" id="{CC25267D-307A-400B-0537-40DFFA195C28}"/>
+              </a:ext>
+            </a:extLst>
+          </p:cNvPr>
+          <p:cNvSpPr/>
+          <p:nvPr/>
+        </p:nvSpPr>
+        <p:spPr>
+          <a:xfrm>
+            <a:off x="749808" y="1305368"/>
+            <a:ext cx="1280160" cy="182880"/>
+          </a:xfrm>
+          <a:prstGeom prst="rect">
+            <a:avLst/>
+          </a:prstGeom>
+          <a:noFill/>
+          <a:ln/>
+        </p:spPr>
+        <p:txBody>
+          <a:bodyPr wrap="square" lIns="0" tIns="0" rIns="0" bIns="0" rtlCol="0" anchor="t">
+            <a:normAutofit/>
+          </a:bodyPr>
+          <a:lstStyle/>
+          <a:p>
+            <a:pPr marL="0" indent="0" algn="l">
+              <a:lnSpc>
+                <a:spcPct val="90000"/>
+              </a:lnSpc>
+              <a:buNone/>
+            </a:pPr>
+            <a:r>
+              <a:rPr lang="en-US" sz="1000" b="1" dirty="0">
+                <a:solidFill>
+                  <a:srgbClr val="B65D3A"/>
+                </a:solidFill>
+                <a:latin typeface="Aptos" pitchFamily="34" charset="0"/>
+                <a:ea typeface="Aptos" pitchFamily="34" charset="-122"/>
+                <a:cs typeface="Aptos" pitchFamily="34" charset="-120"/>
+              </a:rPr>
+              <a:t>What Changed?</a:t>
+            </a:r>
+            <a:endParaRPr lang="en-US" sz="1000" dirty="0"/>
+          </a:p>
+        </p:txBody>
+      </p:sp>
     </p:spTree>
   </p:cSld>
   <p:clrMapOvr>
